--- a/docs/FootballPredictorDemoDay20260803.pptx
+++ b/docs/FootballPredictorDemoDay20260803.pptx
@@ -5,7 +5,7 @@
     <p:sldMasterId id="2147483648" r:id="rId1"/>
   </p:sldMasterIdLst>
   <p:notesMasterIdLst>
-    <p:notesMasterId r:id="rId18"/>
+    <p:notesMasterId r:id="rId17"/>
   </p:notesMasterIdLst>
   <p:sldIdLst>
     <p:sldId id="256" r:id="rId2"/>
@@ -13,17 +13,16 @@
     <p:sldId id="258" r:id="rId4"/>
     <p:sldId id="259" r:id="rId5"/>
     <p:sldId id="260" r:id="rId6"/>
-    <p:sldId id="271" r:id="rId7"/>
-    <p:sldId id="261" r:id="rId8"/>
-    <p:sldId id="262" r:id="rId9"/>
-    <p:sldId id="263" r:id="rId10"/>
-    <p:sldId id="264" r:id="rId11"/>
-    <p:sldId id="265" r:id="rId12"/>
-    <p:sldId id="266" r:id="rId13"/>
-    <p:sldId id="267" r:id="rId14"/>
-    <p:sldId id="268" r:id="rId15"/>
-    <p:sldId id="269" r:id="rId16"/>
-    <p:sldId id="270" r:id="rId17"/>
+    <p:sldId id="261" r:id="rId7"/>
+    <p:sldId id="262" r:id="rId8"/>
+    <p:sldId id="263" r:id="rId9"/>
+    <p:sldId id="264" r:id="rId10"/>
+    <p:sldId id="265" r:id="rId11"/>
+    <p:sldId id="266" r:id="rId12"/>
+    <p:sldId id="267" r:id="rId13"/>
+    <p:sldId id="268" r:id="rId14"/>
+    <p:sldId id="269" r:id="rId15"/>
+    <p:sldId id="270" r:id="rId16"/>
   </p:sldIdLst>
   <p:sldSz cx="9144000" cy="5143500" type="screen16x9"/>
   <p:notesSz cx="6858000" cy="9144000"/>
@@ -325,6 +324,11 @@
       </a:defRPr>
     </a:lvl9pPr>
   </p:defaultTextStyle>
+  <p:extLst>
+    <p:ext uri="{EFAFB233-063F-42B5-8137-9DF3F51BA10A}">
+      <p15:sldGuideLst xmlns:p15="http://schemas.microsoft.com/office/powerpoint/2012/main"/>
+    </p:ext>
+  </p:extLst>
 </p:presentation>
 </file>
 
@@ -1153,7 +1157,7 @@
 
 <file path=ppt/slideLayouts/slideLayout3.xml><?xml version="1.0" encoding="utf-8"?>
 <p:sldLayout xmlns:a="http://schemas.openxmlformats.org/drawingml/2006/main" xmlns:r="http://schemas.openxmlformats.org/officeDocument/2006/relationships" xmlns:p="http://schemas.openxmlformats.org/presentationml/2006/main" type="tx">
-  <p:cSld name="TITLE_AND_BODY">
+  <p:cSld name="1_TITLE_AND_BODY">
     <p:spTree>
       <p:nvGrpSpPr>
         <p:cNvPr id="1" name=""/>
@@ -2216,7 +2220,7 @@
           </a:ln>
           <a:extLst>
             <a:ext uri="{C572A759-6A51-4108-AA02-DFA0A04FC94B}">
-              <ma14:wrappingTextBoxFlag xmlns:ma14="http://schemas.microsoft.com/office/mac/drawingml/2011/main" xmlns:a14="http://schemas.microsoft.com/office/drawing/2010/main" xmlns:m="http://schemas.openxmlformats.org/officeDocument/2006/math" xmlns="" val="1"/>
+              <ma14:wrappingTextBoxFlag xmlns="" xmlns:m="http://schemas.openxmlformats.org/officeDocument/2006/math" xmlns:a14="http://schemas.microsoft.com/office/drawing/2010/main" xmlns:ma14="http://schemas.microsoft.com/office/mac/drawingml/2011/main" val="1"/>
             </a:ext>
           </a:extLst>
         </p:spPr>
@@ -2255,7 +2259,7 @@
           </a:ln>
           <a:extLst>
             <a:ext uri="{C572A759-6A51-4108-AA02-DFA0A04FC94B}">
-              <ma14:wrappingTextBoxFlag xmlns:ma14="http://schemas.microsoft.com/office/mac/drawingml/2011/main" xmlns:a14="http://schemas.microsoft.com/office/drawing/2010/main" xmlns:m="http://schemas.openxmlformats.org/officeDocument/2006/math" xmlns="" val="1"/>
+              <ma14:wrappingTextBoxFlag xmlns="" xmlns:m="http://schemas.openxmlformats.org/officeDocument/2006/math" xmlns:a14="http://schemas.microsoft.com/office/drawing/2010/main" xmlns:ma14="http://schemas.microsoft.com/office/mac/drawingml/2011/main" val="1"/>
             </a:ext>
           </a:extLst>
         </p:spPr>
@@ -3237,7 +3241,7 @@
           </a:ln>
           <a:extLst>
             <a:ext uri="{C572A759-6A51-4108-AA02-DFA0A04FC94B}">
-              <ma14:wrappingTextBoxFlag xmlns:ma14="http://schemas.microsoft.com/office/mac/drawingml/2011/main" xmlns:a14="http://schemas.microsoft.com/office/drawing/2010/main" xmlns:m="http://schemas.openxmlformats.org/officeDocument/2006/math" xmlns="" val="1"/>
+              <ma14:wrappingTextBoxFlag xmlns="" xmlns:m="http://schemas.openxmlformats.org/officeDocument/2006/math" xmlns:a14="http://schemas.microsoft.com/office/drawing/2010/main" xmlns:ma14="http://schemas.microsoft.com/office/mac/drawingml/2011/main" val="1"/>
             </a:ext>
           </a:extLst>
         </p:spPr>
@@ -3275,813 +3279,6 @@
 </file>
 
 <file path=ppt/slides/slide10.xml><?xml version="1.0" encoding="utf-8"?>
-<p:sld xmlns:a="http://schemas.openxmlformats.org/drawingml/2006/main" xmlns:r="http://schemas.openxmlformats.org/officeDocument/2006/relationships" xmlns:p="http://schemas.openxmlformats.org/presentationml/2006/main">
-  <p:cSld>
-    <p:spTree>
-      <p:nvGrpSpPr>
-        <p:cNvPr id="1" name=""/>
-        <p:cNvGrpSpPr/>
-        <p:nvPr/>
-      </p:nvGrpSpPr>
-      <p:grpSpPr>
-        <a:xfrm>
-          <a:off x="0" y="0"/>
-          <a:ext cx="0" cy="0"/>
-          <a:chOff x="0" y="0"/>
-          <a:chExt cx="0" cy="0"/>
-        </a:xfrm>
-      </p:grpSpPr>
-      <p:pic>
-        <p:nvPicPr>
-          <p:cNvPr id="266" name="Fond FC Barcelone" descr="Fond FC Barcelone"/>
-          <p:cNvPicPr>
-            <a:picLocks noChangeAspect="1"/>
-          </p:cNvPicPr>
-          <p:nvPr/>
-        </p:nvPicPr>
-        <p:blipFill>
-          <a:blip r:embed="rId2"/>
-          <a:srcRect t="7813" b="7812"/>
-          <a:stretch>
-            <a:fillRect/>
-          </a:stretch>
-        </p:blipFill>
-        <p:spPr>
-          <a:xfrm>
-            <a:off x="0" y="-1"/>
-            <a:ext cx="9144000" cy="5143502"/>
-          </a:xfrm>
-          <a:prstGeom prst="rect">
-            <a:avLst/>
-          </a:prstGeom>
-          <a:ln w="12700">
-            <a:miter lim="400000"/>
-          </a:ln>
-        </p:spPr>
-      </p:pic>
-      <p:sp>
-        <p:nvSpPr>
-          <p:cNvPr id="267" name="Google Shape;75;p16"/>
-          <p:cNvSpPr txBox="1">
-            <a:spLocks noGrp="1"/>
-          </p:cNvSpPr>
-          <p:nvPr>
-            <p:ph type="title"/>
-          </p:nvPr>
-        </p:nvSpPr>
-        <p:spPr>
-          <a:xfrm>
-            <a:off x="1192664" y="403309"/>
-            <a:ext cx="5315101" cy="533101"/>
-          </a:xfrm>
-          <a:prstGeom prst="rect">
-            <a:avLst/>
-          </a:prstGeom>
-        </p:spPr>
-        <p:txBody>
-          <a:bodyPr/>
-          <a:lstStyle>
-            <a:lvl1pPr defTabSz="822959">
-              <a:defRPr sz="2250">
-                <a:solidFill>
-                  <a:srgbClr val="0E3449"/>
-                </a:solidFill>
-                <a:latin typeface="Inter SemiBold"/>
-                <a:ea typeface="Inter SemiBold"/>
-                <a:cs typeface="Inter SemiBold"/>
-                <a:sym typeface="Inter SemiBold"/>
-              </a:defRPr>
-            </a:lvl1pPr>
-          </a:lstStyle>
-          <a:p>
-            <a:r>
-              <a:t>Architecture - Entrainement</a:t>
-            </a:r>
-          </a:p>
-        </p:txBody>
-      </p:sp>
-      <p:pic>
-        <p:nvPicPr>
-          <p:cNvPr id="268" name="Google Shape;76;p16" descr="Google Shape;76;p16"/>
-          <p:cNvPicPr>
-            <a:picLocks noChangeAspect="1"/>
-          </p:cNvPicPr>
-          <p:nvPr/>
-        </p:nvPicPr>
-        <p:blipFill>
-          <a:blip r:embed="rId3"/>
-          <a:stretch>
-            <a:fillRect/>
-          </a:stretch>
-        </p:blipFill>
-        <p:spPr>
-          <a:xfrm>
-            <a:off x="463375" y="482852"/>
-            <a:ext cx="576901" cy="385905"/>
-          </a:xfrm>
-          <a:prstGeom prst="rect">
-            <a:avLst/>
-          </a:prstGeom>
-          <a:ln w="12700">
-            <a:miter lim="400000"/>
-          </a:ln>
-        </p:spPr>
-      </p:pic>
-      <p:sp>
-        <p:nvSpPr>
-          <p:cNvPr id="269" name="Google Shape;77;p16"/>
-          <p:cNvSpPr/>
-          <p:nvPr/>
-        </p:nvSpPr>
-        <p:spPr>
-          <a:xfrm>
-            <a:off x="10224" y="4892025"/>
-            <a:ext cx="9144001" cy="251400"/>
-          </a:xfrm>
-          <a:prstGeom prst="rect">
-            <a:avLst/>
-          </a:prstGeom>
-          <a:solidFill>
-            <a:srgbClr val="C3FFFC"/>
-          </a:solidFill>
-          <a:ln w="12700">
-            <a:miter lim="400000"/>
-          </a:ln>
-        </p:spPr>
-        <p:txBody>
-          <a:bodyPr lIns="45719" rIns="45719" anchor="ctr"/>
-          <a:lstStyle/>
-          <a:p>
-            <a:endParaRPr/>
-          </a:p>
-        </p:txBody>
-      </p:sp>
-      <p:grpSp>
-        <p:nvGrpSpPr>
-          <p:cNvPr id="272" name="Groupe 27"/>
-          <p:cNvGrpSpPr/>
-          <p:nvPr/>
-        </p:nvGrpSpPr>
-        <p:grpSpPr>
-          <a:xfrm>
-            <a:off x="7096703" y="1678903"/>
-            <a:ext cx="1143100" cy="1615649"/>
-            <a:chOff x="0" y="0"/>
-            <a:chExt cx="1143099" cy="1615648"/>
-          </a:xfrm>
-        </p:grpSpPr>
-        <p:pic>
-          <p:nvPicPr>
-            <p:cNvPr id="270" name="Image 7" descr="Image 7"/>
-            <p:cNvPicPr>
-              <a:picLocks noChangeAspect="1"/>
-            </p:cNvPicPr>
-            <p:nvPr/>
-          </p:nvPicPr>
-          <p:blipFill>
-            <a:blip r:embed="rId4"/>
-            <a:stretch>
-              <a:fillRect/>
-            </a:stretch>
-          </p:blipFill>
-          <p:spPr>
-            <a:xfrm>
-              <a:off x="0" y="396341"/>
-              <a:ext cx="1143100" cy="1219307"/>
-            </a:xfrm>
-            <a:prstGeom prst="rect">
-              <a:avLst/>
-            </a:prstGeom>
-            <a:ln w="12700" cap="flat">
-              <a:noFill/>
-              <a:miter lim="400000"/>
-            </a:ln>
-            <a:effectLst/>
-          </p:spPr>
-        </p:pic>
-        <p:pic>
-          <p:nvPicPr>
-            <p:cNvPr id="271" name="Image 13" descr="Image 13"/>
-            <p:cNvPicPr>
-              <a:picLocks noChangeAspect="1"/>
-            </p:cNvPicPr>
-            <p:nvPr/>
-          </p:nvPicPr>
-          <p:blipFill>
-            <a:blip r:embed="rId5"/>
-            <a:stretch>
-              <a:fillRect/>
-            </a:stretch>
-          </p:blipFill>
-          <p:spPr>
-            <a:xfrm>
-              <a:off x="220147" y="-1"/>
-              <a:ext cx="844692" cy="530697"/>
-            </a:xfrm>
-            <a:prstGeom prst="rect">
-              <a:avLst/>
-            </a:prstGeom>
-            <a:ln w="12700" cap="flat">
-              <a:noFill/>
-              <a:miter lim="400000"/>
-            </a:ln>
-            <a:effectLst/>
-          </p:spPr>
-        </p:pic>
-      </p:grpSp>
-      <p:grpSp>
-        <p:nvGrpSpPr>
-          <p:cNvPr id="276" name="Groupe 17"/>
-          <p:cNvGrpSpPr/>
-          <p:nvPr/>
-        </p:nvGrpSpPr>
-        <p:grpSpPr>
-          <a:xfrm>
-            <a:off x="2546643" y="1488950"/>
-            <a:ext cx="2268735" cy="2356464"/>
-            <a:chOff x="0" y="0"/>
-            <a:chExt cx="2268733" cy="2356462"/>
-          </a:xfrm>
-        </p:grpSpPr>
-        <p:pic>
-          <p:nvPicPr>
-            <p:cNvPr id="273" name="Image 2" descr="Image 2"/>
-            <p:cNvPicPr>
-              <a:picLocks noChangeAspect="1"/>
-            </p:cNvPicPr>
-            <p:nvPr/>
-          </p:nvPicPr>
-          <p:blipFill>
-            <a:blip r:embed="rId6"/>
-            <a:stretch>
-              <a:fillRect/>
-            </a:stretch>
-          </p:blipFill>
-          <p:spPr>
-            <a:xfrm>
-              <a:off x="143865" y="837871"/>
-              <a:ext cx="1196483" cy="577613"/>
-            </a:xfrm>
-            <a:prstGeom prst="rect">
-              <a:avLst/>
-            </a:prstGeom>
-            <a:ln w="12700" cap="flat">
-              <a:noFill/>
-              <a:miter lim="400000"/>
-            </a:ln>
-            <a:effectLst/>
-          </p:spPr>
-        </p:pic>
-        <p:pic>
-          <p:nvPicPr>
-            <p:cNvPr id="274" name="Image 15" descr="Image 15"/>
-            <p:cNvPicPr>
-              <a:picLocks noChangeAspect="1"/>
-            </p:cNvPicPr>
-            <p:nvPr/>
-          </p:nvPicPr>
-          <p:blipFill>
-            <a:blip r:embed="rId7"/>
-            <a:stretch>
-              <a:fillRect/>
-            </a:stretch>
-          </p:blipFill>
-          <p:spPr>
-            <a:xfrm>
-              <a:off x="392206" y="0"/>
-              <a:ext cx="699801" cy="627208"/>
-            </a:xfrm>
-            <a:prstGeom prst="rect">
-              <a:avLst/>
-            </a:prstGeom>
-            <a:ln w="12700" cap="flat">
-              <a:noFill/>
-              <a:miter lim="400000"/>
-            </a:ln>
-            <a:effectLst/>
-          </p:spPr>
-        </p:pic>
-        <p:sp>
-          <p:nvSpPr>
-            <p:cNvPr id="275" name="ZoneTexte 16"/>
-            <p:cNvSpPr txBox="1"/>
-            <p:nvPr/>
-          </p:nvSpPr>
-          <p:spPr>
-            <a:xfrm>
-              <a:off x="0" y="1617322"/>
-              <a:ext cx="2268734" cy="739141"/>
-            </a:xfrm>
-            <a:prstGeom prst="rect">
-              <a:avLst/>
-            </a:prstGeom>
-            <a:noFill/>
-            <a:ln w="12700" cap="flat">
-              <a:noFill/>
-              <a:miter lim="400000"/>
-            </a:ln>
-            <a:effectLst/>
-            <a:extLst>
-              <a:ext uri="{C572A759-6A51-4108-AA02-DFA0A04FC94B}">
-                <ma14:wrappingTextBoxFlag xmlns:ma14="http://schemas.microsoft.com/office/mac/drawingml/2011/main" xmlns:a14="http://schemas.microsoft.com/office/drawing/2010/main" xmlns:m="http://schemas.openxmlformats.org/officeDocument/2006/math" xmlns="" val="1"/>
-              </a:ext>
-            </a:extLst>
-          </p:spPr>
-          <p:txBody>
-            <a:bodyPr wrap="none" lIns="45719" tIns="45719" rIns="45719" bIns="45719" numCol="1" anchor="t">
-              <a:spAutoFit/>
-            </a:bodyPr>
-            <a:lstStyle/>
-            <a:p>
-              <a:pPr>
-                <a:defRPr>
-                  <a:latin typeface="Inter"/>
-                  <a:ea typeface="Inter"/>
-                  <a:cs typeface="Inter"/>
-                  <a:sym typeface="Inter"/>
-                </a:defRPr>
-              </a:pPr>
-              <a:r>
-                <a:t>Construction dataset</a:t>
-              </a:r>
-              <a:br/>
-              <a:r>
-                <a:t>et entrainement du modèle </a:t>
-              </a:r>
-            </a:p>
-            <a:p>
-              <a:pPr>
-                <a:defRPr>
-                  <a:latin typeface="Inter"/>
-                  <a:ea typeface="Inter"/>
-                  <a:cs typeface="Inter"/>
-                  <a:sym typeface="Inter"/>
-                </a:defRPr>
-              </a:pPr>
-              <a:r>
-                <a:t>en Local</a:t>
-              </a:r>
-            </a:p>
-          </p:txBody>
-        </p:sp>
-      </p:grpSp>
-      <p:sp>
-        <p:nvSpPr>
-          <p:cNvPr id="291" name="Fleche FastAPI vers Render"/>
-          <p:cNvSpPr/>
-          <p:nvPr/>
-        </p:nvSpPr>
-        <p:spPr>
-          <a:xfrm>
-            <a:off x="1664018" y="2785794"/>
-            <a:ext cx="1026492" cy="122923"/>
-          </a:xfrm>
-          <a:custGeom>
-            <a:avLst/>
-            <a:gdLst/>
-            <a:ahLst/>
-            <a:cxnLst>
-              <a:cxn ang="0">
-                <a:pos x="wd2" y="hd2"/>
-              </a:cxn>
-              <a:cxn ang="5400000">
-                <a:pos x="wd2" y="hd2"/>
-              </a:cxn>
-              <a:cxn ang="10800000">
-                <a:pos x="wd2" y="hd2"/>
-              </a:cxn>
-              <a:cxn ang="16200000">
-                <a:pos x="wd2" y="hd2"/>
-              </a:cxn>
-            </a:cxnLst>
-            <a:rect l="0" t="0" r="r" b="b"/>
-            <a:pathLst>
-              <a:path w="21600" h="21600" extrusionOk="0">
-                <a:moveTo>
-                  <a:pt x="0" y="21600"/>
-                </a:moveTo>
-                <a:lnTo>
-                  <a:pt x="21600" y="0"/>
-                </a:lnTo>
-              </a:path>
-            </a:pathLst>
-          </a:custGeom>
-          <a:ln w="19050" cap="rnd">
-            <a:solidFill>
-              <a:srgbClr val="015955"/>
-            </a:solidFill>
-            <a:tailEnd type="triangle"/>
-          </a:ln>
-        </p:spPr>
-        <p:txBody>
-          <a:bodyPr/>
-          <a:lstStyle/>
-          <a:p>
-            <a:endParaRPr/>
-          </a:p>
-        </p:txBody>
-      </p:sp>
-      <p:sp>
-        <p:nvSpPr>
-          <p:cNvPr id="292" name="Fleche FastAPI vers Render"/>
-          <p:cNvSpPr/>
-          <p:nvPr/>
-        </p:nvSpPr>
-        <p:spPr>
-          <a:xfrm>
-            <a:off x="3886991" y="2579290"/>
-            <a:ext cx="863916" cy="70972"/>
-          </a:xfrm>
-          <a:custGeom>
-            <a:avLst/>
-            <a:gdLst/>
-            <a:ahLst/>
-            <a:cxnLst>
-              <a:cxn ang="0">
-                <a:pos x="wd2" y="hd2"/>
-              </a:cxn>
-              <a:cxn ang="5400000">
-                <a:pos x="wd2" y="hd2"/>
-              </a:cxn>
-              <a:cxn ang="10800000">
-                <a:pos x="wd2" y="hd2"/>
-              </a:cxn>
-              <a:cxn ang="16200000">
-                <a:pos x="wd2" y="hd2"/>
-              </a:cxn>
-            </a:cxnLst>
-            <a:rect l="0" t="0" r="r" b="b"/>
-            <a:pathLst>
-              <a:path w="21600" h="21600" extrusionOk="0">
-                <a:moveTo>
-                  <a:pt x="0" y="21600"/>
-                </a:moveTo>
-                <a:lnTo>
-                  <a:pt x="21600" y="0"/>
-                </a:lnTo>
-              </a:path>
-            </a:pathLst>
-          </a:custGeom>
-          <a:ln w="19050" cap="rnd">
-            <a:solidFill>
-              <a:srgbClr val="015955"/>
-            </a:solidFill>
-            <a:tailEnd type="triangle"/>
-          </a:ln>
-        </p:spPr>
-        <p:txBody>
-          <a:bodyPr/>
-          <a:lstStyle/>
-          <a:p>
-            <a:endParaRPr/>
-          </a:p>
-        </p:txBody>
-      </p:sp>
-      <p:sp>
-        <p:nvSpPr>
-          <p:cNvPr id="293" name="Fleche FastAPI vers Render"/>
-          <p:cNvSpPr/>
-          <p:nvPr/>
-        </p:nvSpPr>
-        <p:spPr>
-          <a:xfrm>
-            <a:off x="6259797" y="2494809"/>
-            <a:ext cx="836907" cy="11836"/>
-          </a:xfrm>
-          <a:custGeom>
-            <a:avLst/>
-            <a:gdLst/>
-            <a:ahLst/>
-            <a:cxnLst>
-              <a:cxn ang="0">
-                <a:pos x="wd2" y="hd2"/>
-              </a:cxn>
-              <a:cxn ang="5400000">
-                <a:pos x="wd2" y="hd2"/>
-              </a:cxn>
-              <a:cxn ang="10800000">
-                <a:pos x="wd2" y="hd2"/>
-              </a:cxn>
-              <a:cxn ang="16200000">
-                <a:pos x="wd2" y="hd2"/>
-              </a:cxn>
-            </a:cxnLst>
-            <a:rect l="0" t="0" r="r" b="b"/>
-            <a:pathLst>
-              <a:path w="21600" h="21600" extrusionOk="0">
-                <a:moveTo>
-                  <a:pt x="0" y="21600"/>
-                </a:moveTo>
-                <a:lnTo>
-                  <a:pt x="21600" y="0"/>
-                </a:lnTo>
-              </a:path>
-            </a:pathLst>
-          </a:custGeom>
-          <a:ln w="19050" cap="rnd">
-            <a:solidFill>
-              <a:srgbClr val="015955"/>
-            </a:solidFill>
-            <a:tailEnd type="triangle"/>
-          </a:ln>
-        </p:spPr>
-        <p:txBody>
-          <a:bodyPr/>
-          <a:lstStyle/>
-          <a:p>
-            <a:endParaRPr/>
-          </a:p>
-        </p:txBody>
-      </p:sp>
-      <p:grpSp>
-        <p:nvGrpSpPr>
-          <p:cNvPr id="282" name="Groupe 36"/>
-          <p:cNvGrpSpPr/>
-          <p:nvPr/>
-        </p:nvGrpSpPr>
-        <p:grpSpPr>
-          <a:xfrm>
-            <a:off x="904198" y="2278927"/>
-            <a:ext cx="759821" cy="1350567"/>
-            <a:chOff x="0" y="0"/>
-            <a:chExt cx="759819" cy="1350566"/>
-          </a:xfrm>
-        </p:grpSpPr>
-        <p:pic>
-          <p:nvPicPr>
-            <p:cNvPr id="280" name="Image 9" descr="Image 9"/>
-            <p:cNvPicPr>
-              <a:picLocks noChangeAspect="1"/>
-            </p:cNvPicPr>
-            <p:nvPr/>
-          </p:nvPicPr>
-          <p:blipFill>
-            <a:blip r:embed="rId8"/>
-            <a:stretch>
-              <a:fillRect/>
-            </a:stretch>
-          </p:blipFill>
-          <p:spPr>
-            <a:xfrm>
-              <a:off x="0" y="-1"/>
-              <a:ext cx="759820" cy="698366"/>
-            </a:xfrm>
-            <a:prstGeom prst="rect">
-              <a:avLst/>
-            </a:prstGeom>
-            <a:ln w="12700" cap="flat">
-              <a:noFill/>
-              <a:miter lim="400000"/>
-            </a:ln>
-            <a:effectLst/>
-          </p:spPr>
-        </p:pic>
-        <p:pic>
-          <p:nvPicPr>
-            <p:cNvPr id="281" name="Image 35" descr="Image 35"/>
-            <p:cNvPicPr>
-              <a:picLocks noChangeAspect="1"/>
-            </p:cNvPicPr>
-            <p:nvPr/>
-          </p:nvPicPr>
-          <p:blipFill>
-            <a:blip r:embed="rId9"/>
-            <a:stretch>
-              <a:fillRect/>
-            </a:stretch>
-          </p:blipFill>
-          <p:spPr>
-            <a:xfrm>
-              <a:off x="0" y="572214"/>
-              <a:ext cx="759820" cy="778353"/>
-            </a:xfrm>
-            <a:prstGeom prst="rect">
-              <a:avLst/>
-            </a:prstGeom>
-            <a:ln w="12700" cap="flat">
-              <a:noFill/>
-              <a:miter lim="400000"/>
-            </a:ln>
-            <a:effectLst/>
-          </p:spPr>
-        </p:pic>
-      </p:grpSp>
-      <p:grpSp>
-        <p:nvGrpSpPr>
-          <p:cNvPr id="289" name="Groupe 39"/>
-          <p:cNvGrpSpPr/>
-          <p:nvPr/>
-        </p:nvGrpSpPr>
-        <p:grpSpPr>
-          <a:xfrm>
-            <a:off x="4750906" y="1740510"/>
-            <a:ext cx="1508892" cy="1553606"/>
-            <a:chOff x="0" y="0"/>
-            <a:chExt cx="1508891" cy="1553604"/>
-          </a:xfrm>
-        </p:grpSpPr>
-        <p:grpSp>
-          <p:nvGrpSpPr>
-            <p:cNvPr id="287" name="Groupe 26"/>
-            <p:cNvGrpSpPr/>
-            <p:nvPr/>
-          </p:nvGrpSpPr>
-          <p:grpSpPr>
-            <a:xfrm>
-              <a:off x="0" y="0"/>
-              <a:ext cx="1508892" cy="1553605"/>
-              <a:chOff x="0" y="0"/>
-              <a:chExt cx="1508891" cy="1553605"/>
-            </a:xfrm>
-          </p:grpSpPr>
-          <p:grpSp>
-            <p:nvGrpSpPr>
-              <p:cNvPr id="285" name="Groupe 3"/>
-              <p:cNvGrpSpPr/>
-              <p:nvPr/>
-            </p:nvGrpSpPr>
-            <p:grpSpPr>
-              <a:xfrm>
-                <a:off x="0" y="484198"/>
-                <a:ext cx="1508892" cy="1069408"/>
-                <a:chOff x="0" y="0"/>
-                <a:chExt cx="1508891" cy="1069406"/>
-              </a:xfrm>
-            </p:grpSpPr>
-            <p:pic>
-              <p:nvPicPr>
-                <p:cNvPr id="283" name="Image 4" descr="Image 4"/>
-                <p:cNvPicPr>
-                  <a:picLocks noChangeAspect="1"/>
-                </p:cNvPicPr>
-                <p:nvPr/>
-              </p:nvPicPr>
-              <p:blipFill>
-                <a:blip r:embed="rId10"/>
-                <a:stretch>
-                  <a:fillRect/>
-                </a:stretch>
-              </p:blipFill>
-              <p:spPr>
-                <a:xfrm>
-                  <a:off x="0" y="0"/>
-                  <a:ext cx="1508892" cy="762067"/>
-                </a:xfrm>
-                <a:prstGeom prst="rect">
-                  <a:avLst/>
-                </a:prstGeom>
-                <a:ln w="12700" cap="flat">
-                  <a:noFill/>
-                  <a:miter lim="400000"/>
-                </a:ln>
-                <a:effectLst/>
-              </p:spPr>
-            </p:pic>
-            <p:sp>
-              <p:nvSpPr>
-                <p:cNvPr id="284" name="ZoneTexte 5"/>
-                <p:cNvSpPr txBox="1"/>
-                <p:nvPr/>
-              </p:nvSpPr>
-              <p:spPr>
-                <a:xfrm>
-                  <a:off x="345738" y="762066"/>
-                  <a:ext cx="779400" cy="307341"/>
-                </a:xfrm>
-                <a:prstGeom prst="rect">
-                  <a:avLst/>
-                </a:prstGeom>
-                <a:noFill/>
-                <a:ln w="12700" cap="flat">
-                  <a:noFill/>
-                  <a:miter lim="400000"/>
-                </a:ln>
-                <a:effectLst/>
-                <a:extLst>
-                  <a:ext uri="{C572A759-6A51-4108-AA02-DFA0A04FC94B}">
-                    <ma14:wrappingTextBoxFlag xmlns:ma14="http://schemas.microsoft.com/office/mac/drawingml/2011/main" xmlns:a14="http://schemas.microsoft.com/office/drawing/2010/main" xmlns:m="http://schemas.openxmlformats.org/officeDocument/2006/math" xmlns="" val="1"/>
-                  </a:ext>
-                </a:extLst>
-              </p:spPr>
-              <p:txBody>
-                <a:bodyPr wrap="none" lIns="45719" tIns="45719" rIns="45719" bIns="45719" numCol="1" anchor="t">
-                  <a:spAutoFit/>
-                </a:bodyPr>
-                <a:lstStyle>
-                  <a:lvl1pPr>
-                    <a:defRPr>
-                      <a:latin typeface="Inter"/>
-                      <a:ea typeface="Inter"/>
-                      <a:cs typeface="Inter"/>
-                      <a:sym typeface="Inter"/>
-                    </a:defRPr>
-                  </a:lvl1pPr>
-                </a:lstStyle>
-                <a:p>
-                  <a:r>
-                    <a:t>Tracking</a:t>
-                  </a:r>
-                </a:p>
-              </p:txBody>
-            </p:sp>
-          </p:grpSp>
-          <p:pic>
-            <p:nvPicPr>
-              <p:cNvPr id="286" name="Image 11" descr="Image 11"/>
-              <p:cNvPicPr>
-                <a:picLocks noChangeAspect="1"/>
-              </p:cNvPicPr>
-              <p:nvPr/>
-            </p:nvPicPr>
-            <p:blipFill>
-              <a:blip r:embed="rId11"/>
-              <a:stretch>
-                <a:fillRect/>
-              </a:stretch>
-            </p:blipFill>
-            <p:spPr>
-              <a:xfrm>
-                <a:off x="390419" y="0"/>
-                <a:ext cx="728055" cy="599032"/>
-              </a:xfrm>
-              <a:prstGeom prst="rect">
-                <a:avLst/>
-              </a:prstGeom>
-              <a:ln w="12700" cap="flat">
-                <a:noFill/>
-                <a:miter lim="400000"/>
-              </a:ln>
-              <a:effectLst/>
-            </p:spPr>
-          </p:pic>
-        </p:grpSp>
-        <p:pic>
-          <p:nvPicPr>
-            <p:cNvPr id="288" name="Image 38" descr="Image 38"/>
-            <p:cNvPicPr>
-              <a:picLocks noChangeAspect="1"/>
-            </p:cNvPicPr>
-            <p:nvPr/>
-          </p:nvPicPr>
-          <p:blipFill>
-            <a:blip r:embed="rId12"/>
-            <a:stretch>
-              <a:fillRect/>
-            </a:stretch>
-          </p:blipFill>
-          <p:spPr>
-            <a:xfrm>
-              <a:off x="1138058" y="320055"/>
-              <a:ext cx="351248" cy="213377"/>
-            </a:xfrm>
-            <a:prstGeom prst="rect">
-              <a:avLst/>
-            </a:prstGeom>
-            <a:ln w="12700" cap="flat">
-              <a:noFill/>
-              <a:miter lim="400000"/>
-            </a:ln>
-            <a:effectLst/>
-          </p:spPr>
-        </p:pic>
-      </p:grpSp>
-      <p:pic>
-        <p:nvPicPr>
-          <p:cNvPr id="290" name="Image 41" descr="Image 41"/>
-          <p:cNvPicPr>
-            <a:picLocks noChangeAspect="1"/>
-          </p:cNvPicPr>
-          <p:nvPr/>
-        </p:nvPicPr>
-        <p:blipFill>
-          <a:blip r:embed="rId13"/>
-          <a:stretch>
-            <a:fillRect/>
-          </a:stretch>
-        </p:blipFill>
-        <p:spPr>
-          <a:xfrm>
-            <a:off x="3092480" y="3816081"/>
-            <a:ext cx="759821" cy="410655"/>
-          </a:xfrm>
-          <a:prstGeom prst="rect">
-            <a:avLst/>
-          </a:prstGeom>
-          <a:ln w="12700">
-            <a:miter lim="400000"/>
-          </a:ln>
-        </p:spPr>
-      </p:pic>
-    </p:spTree>
-  </p:cSld>
-  <p:clrMapOvr>
-    <a:masterClrMapping/>
-  </p:clrMapOvr>
-  <p:transition spd="med"/>
-</p:sld>
-</file>
-
-<file path=ppt/slides/slide11.xml><?xml version="1.0" encoding="utf-8"?>
 <p:sld xmlns:a="http://schemas.openxmlformats.org/drawingml/2006/main" xmlns:r="http://schemas.openxmlformats.org/officeDocument/2006/relationships" xmlns:p="http://schemas.openxmlformats.org/presentationml/2006/main">
   <p:cSld>
     <p:spTree>
@@ -4887,8 +4084,8 @@
         </p:blipFill>
         <p:spPr>
           <a:xfrm>
-            <a:off x="4815473" y="1345760"/>
-            <a:ext cx="3861001" cy="3299401"/>
+            <a:off x="4815473" y="1393654"/>
+            <a:ext cx="3861001" cy="3203612"/>
           </a:xfrm>
           <a:prstGeom prst="rect">
             <a:avLst/>
@@ -4936,9 +4133,9 @@
         <p:grpSpPr>
           <a:xfrm>
             <a:off x="2812992" y="3443897"/>
-            <a:ext cx="1508892" cy="1452149"/>
+            <a:ext cx="1508895" cy="1452151"/>
             <a:chOff x="0" y="0"/>
-            <a:chExt cx="1508891" cy="1452148"/>
+            <a:chExt cx="1508894" cy="1452150"/>
           </a:xfrm>
         </p:grpSpPr>
         <p:grpSp>
@@ -4950,9 +4147,9 @@
           <p:grpSpPr>
             <a:xfrm>
               <a:off x="0" y="0"/>
-              <a:ext cx="1508892" cy="1452149"/>
+              <a:ext cx="1508894" cy="1452150"/>
               <a:chOff x="0" y="0"/>
-              <a:chExt cx="1508891" cy="1452148"/>
+              <a:chExt cx="1508893" cy="1452149"/>
             </a:xfrm>
           </p:grpSpPr>
           <p:grpSp>
@@ -4964,9 +4161,9 @@
             <p:grpSpPr>
               <a:xfrm>
                 <a:off x="0" y="401258"/>
-                <a:ext cx="1508892" cy="1050891"/>
+                <a:ext cx="1508893" cy="1050891"/>
                 <a:chOff x="0" y="0"/>
-                <a:chExt cx="1508891" cy="1050889"/>
+                <a:chExt cx="1508892" cy="1050890"/>
               </a:xfrm>
             </p:grpSpPr>
             <p:pic>
@@ -5020,7 +4217,7 @@
                 <a:effectLst/>
                 <a:extLst>
                   <a:ext uri="{C572A759-6A51-4108-AA02-DFA0A04FC94B}">
-                    <ma14:wrappingTextBoxFlag xmlns:ma14="http://schemas.microsoft.com/office/mac/drawingml/2011/main" xmlns:a14="http://schemas.microsoft.com/office/drawing/2010/main" xmlns:m="http://schemas.openxmlformats.org/officeDocument/2006/math" xmlns="" val="1"/>
+                    <ma14:wrappingTextBoxFlag xmlns="" xmlns:m="http://schemas.openxmlformats.org/officeDocument/2006/math" xmlns:a14="http://schemas.microsoft.com/office/drawing/2010/main" xmlns:ma14="http://schemas.microsoft.com/office/mac/drawingml/2011/main" val="1"/>
                   </a:ext>
                 </a:extLst>
               </p:spPr>
@@ -5105,10 +4302,10 @@
         </p:nvGrpSpPr>
         <p:grpSpPr>
           <a:xfrm>
-            <a:off x="5074482" y="1489796"/>
-            <a:ext cx="1284870" cy="863623"/>
-            <a:chOff x="0" y="0"/>
-            <a:chExt cx="1284869" cy="863622"/>
+            <a:off x="5074481" y="1489796"/>
+            <a:ext cx="1284872" cy="863623"/>
+            <a:chOff x="-1" y="0"/>
+            <a:chExt cx="1284871" cy="863623"/>
           </a:xfrm>
         </p:grpSpPr>
         <p:sp>
@@ -5133,7 +4330,7 @@
             <a:effectLst/>
             <a:extLst>
               <a:ext uri="{C572A759-6A51-4108-AA02-DFA0A04FC94B}">
-                <ma14:wrappingTextBoxFlag xmlns:ma14="http://schemas.microsoft.com/office/mac/drawingml/2011/main" xmlns:a14="http://schemas.microsoft.com/office/drawing/2010/main" xmlns:m="http://schemas.openxmlformats.org/officeDocument/2006/math" xmlns="" val="1"/>
+                <ma14:wrappingTextBoxFlag xmlns="" xmlns:m="http://schemas.openxmlformats.org/officeDocument/2006/math" xmlns:a14="http://schemas.microsoft.com/office/drawing/2010/main" xmlns:ma14="http://schemas.microsoft.com/office/mac/drawingml/2011/main" val="1"/>
               </a:ext>
             </a:extLst>
           </p:spPr>
@@ -5167,9 +4364,9 @@
           <p:grpSpPr>
             <a:xfrm>
               <a:off x="-1" y="0"/>
-              <a:ext cx="1134268" cy="632036"/>
+              <a:ext cx="1134269" cy="632037"/>
               <a:chOff x="0" y="0"/>
-              <a:chExt cx="1134266" cy="632035"/>
+              <a:chExt cx="1134267" cy="632036"/>
             </a:xfrm>
           </p:grpSpPr>
           <p:pic>
@@ -5240,10 +4437,10 @@
         </p:nvGrpSpPr>
         <p:grpSpPr>
           <a:xfrm>
-            <a:off x="6998003" y="2855765"/>
-            <a:ext cx="1327672" cy="1005705"/>
-            <a:chOff x="0" y="0"/>
-            <a:chExt cx="1327671" cy="1005704"/>
+            <a:off x="6998003" y="2855764"/>
+            <a:ext cx="1327674" cy="1005707"/>
+            <a:chOff x="0" y="-1"/>
+            <a:chExt cx="1327673" cy="1005706"/>
           </a:xfrm>
         </p:grpSpPr>
         <p:grpSp>
@@ -5255,9 +4452,9 @@
           <p:grpSpPr>
             <a:xfrm>
               <a:off x="129243" y="-1"/>
-              <a:ext cx="1198429" cy="1005706"/>
+              <a:ext cx="1198430" cy="1005706"/>
               <a:chOff x="0" y="0"/>
-              <a:chExt cx="1198427" cy="1005704"/>
+              <a:chExt cx="1198428" cy="1005705"/>
             </a:xfrm>
           </p:grpSpPr>
           <p:pic>
@@ -5311,7 +4508,7 @@
               <a:effectLst/>
               <a:extLst>
                 <a:ext uri="{C572A759-6A51-4108-AA02-DFA0A04FC94B}">
-                  <ma14:wrappingTextBoxFlag xmlns:ma14="http://schemas.microsoft.com/office/mac/drawingml/2011/main" xmlns:a14="http://schemas.microsoft.com/office/drawing/2010/main" xmlns:m="http://schemas.openxmlformats.org/officeDocument/2006/math" xmlns="" val="1"/>
+                  <ma14:wrappingTextBoxFlag xmlns="" xmlns:m="http://schemas.openxmlformats.org/officeDocument/2006/math" xmlns:a14="http://schemas.microsoft.com/office/drawing/2010/main" xmlns:ma14="http://schemas.microsoft.com/office/mac/drawingml/2011/main" val="1"/>
                 </a:ext>
               </a:extLst>
             </p:spPr>
@@ -5375,10 +4572,10 @@
         </p:nvGrpSpPr>
         <p:grpSpPr>
           <a:xfrm>
-            <a:off x="4991815" y="2520993"/>
-            <a:ext cx="1184279" cy="913434"/>
-            <a:chOff x="0" y="0"/>
-            <a:chExt cx="1184278" cy="913432"/>
+            <a:off x="4991814" y="2520993"/>
+            <a:ext cx="1184282" cy="913435"/>
+            <a:chOff x="-1" y="0"/>
+            <a:chExt cx="1184281" cy="913434"/>
           </a:xfrm>
         </p:grpSpPr>
         <p:grpSp>
@@ -5390,9 +4587,9 @@
           <p:grpSpPr>
             <a:xfrm>
               <a:off x="-1" y="27498"/>
-              <a:ext cx="1184280" cy="885935"/>
+              <a:ext cx="1184281" cy="885936"/>
               <a:chOff x="0" y="0"/>
-              <a:chExt cx="1184278" cy="885935"/>
+              <a:chExt cx="1184279" cy="885936"/>
             </a:xfrm>
           </p:grpSpPr>
           <p:pic>
@@ -5446,7 +4643,7 @@
               <a:effectLst/>
               <a:extLst>
                 <a:ext uri="{C572A759-6A51-4108-AA02-DFA0A04FC94B}">
-                  <ma14:wrappingTextBoxFlag xmlns:ma14="http://schemas.microsoft.com/office/mac/drawingml/2011/main" xmlns:a14="http://schemas.microsoft.com/office/drawing/2010/main" xmlns:m="http://schemas.openxmlformats.org/officeDocument/2006/math" xmlns="" val="1"/>
+                  <ma14:wrappingTextBoxFlag xmlns="" xmlns:m="http://schemas.openxmlformats.org/officeDocument/2006/math" xmlns:a14="http://schemas.microsoft.com/office/drawing/2010/main" xmlns:ma14="http://schemas.microsoft.com/office/mac/drawingml/2011/main" val="1"/>
                 </a:ext>
               </a:extLst>
             </p:spPr>
@@ -5523,9 +4720,9 @@
         <p:grpSpPr>
           <a:xfrm>
             <a:off x="5032095" y="3665180"/>
-            <a:ext cx="1348456" cy="632036"/>
+            <a:ext cx="1348458" cy="632038"/>
             <a:chOff x="0" y="0"/>
-            <a:chExt cx="1348454" cy="632035"/>
+            <a:chExt cx="1348457" cy="632037"/>
           </a:xfrm>
         </p:grpSpPr>
         <p:grpSp>
@@ -5537,9 +4734,9 @@
           <p:grpSpPr>
             <a:xfrm>
               <a:off x="0" y="0"/>
-              <a:ext cx="1348455" cy="632036"/>
+              <a:ext cx="1348457" cy="632037"/>
               <a:chOff x="0" y="0"/>
-              <a:chExt cx="1348454" cy="632035"/>
+              <a:chExt cx="1348455" cy="632036"/>
             </a:xfrm>
           </p:grpSpPr>
           <p:pic>
@@ -5593,7 +4790,7 @@
               <a:effectLst/>
               <a:extLst>
                 <a:ext uri="{C572A759-6A51-4108-AA02-DFA0A04FC94B}">
-                  <ma14:wrappingTextBoxFlag xmlns:ma14="http://schemas.microsoft.com/office/mac/drawingml/2011/main" xmlns:a14="http://schemas.microsoft.com/office/drawing/2010/main" xmlns:m="http://schemas.openxmlformats.org/officeDocument/2006/math" xmlns="" val="1"/>
+                  <ma14:wrappingTextBoxFlag xmlns="" xmlns:m="http://schemas.openxmlformats.org/officeDocument/2006/math" xmlns:a14="http://schemas.microsoft.com/office/drawing/2010/main" xmlns:ma14="http://schemas.microsoft.com/office/mac/drawingml/2011/main" val="1"/>
                 </a:ext>
               </a:extLst>
             </p:spPr>
@@ -5775,7 +4972,7 @@
 </p:sld>
 </file>
 
-<file path=ppt/slides/slide12.xml><?xml version="1.0" encoding="utf-8"?>
+<file path=ppt/slides/slide11.xml><?xml version="1.0" encoding="utf-8"?>
 <p:sld xmlns:a="http://schemas.openxmlformats.org/drawingml/2006/main" xmlns:r="http://schemas.openxmlformats.org/officeDocument/2006/relationships" xmlns:p="http://schemas.openxmlformats.org/presentationml/2006/main">
   <p:cSld>
     <p:spTree>
@@ -5936,7 +5133,7 @@
           </a:ln>
           <a:extLst>
             <a:ext uri="{C572A759-6A51-4108-AA02-DFA0A04FC94B}">
-              <ma14:wrappingTextBoxFlag xmlns:ma14="http://schemas.microsoft.com/office/mac/drawingml/2011/main" xmlns:a14="http://schemas.microsoft.com/office/drawing/2010/main" xmlns:m="http://schemas.openxmlformats.org/officeDocument/2006/math" xmlns="" val="1"/>
+              <ma14:wrappingTextBoxFlag xmlns="" xmlns:m="http://schemas.openxmlformats.org/officeDocument/2006/math" xmlns:a14="http://schemas.microsoft.com/office/drawing/2010/main" xmlns:ma14="http://schemas.microsoft.com/office/mac/drawingml/2011/main" val="1"/>
             </a:ext>
           </a:extLst>
         </p:spPr>
@@ -6137,7 +5334,7 @@
 </p:sld>
 </file>
 
-<file path=ppt/slides/slide13.xml><?xml version="1.0" encoding="utf-8"?>
+<file path=ppt/slides/slide12.xml><?xml version="1.0" encoding="utf-8"?>
 <p:sld xmlns:a="http://schemas.openxmlformats.org/drawingml/2006/main" xmlns:r="http://schemas.openxmlformats.org/officeDocument/2006/relationships" xmlns:p="http://schemas.openxmlformats.org/presentationml/2006/main">
   <p:cSld>
     <p:spTree>
@@ -6298,7 +5495,7 @@
           </a:ln>
           <a:extLst>
             <a:ext uri="{C572A759-6A51-4108-AA02-DFA0A04FC94B}">
-              <ma14:wrappingTextBoxFlag xmlns:ma14="http://schemas.microsoft.com/office/mac/drawingml/2011/main" xmlns:a14="http://schemas.microsoft.com/office/drawing/2010/main" xmlns:m="http://schemas.openxmlformats.org/officeDocument/2006/math" xmlns="" val="1"/>
+              <ma14:wrappingTextBoxFlag xmlns="" xmlns:m="http://schemas.openxmlformats.org/officeDocument/2006/math" xmlns:a14="http://schemas.microsoft.com/office/drawing/2010/main" xmlns:ma14="http://schemas.microsoft.com/office/mac/drawingml/2011/main" val="1"/>
             </a:ext>
           </a:extLst>
         </p:spPr>
@@ -6503,7 +5700,7 @@
 </p:sld>
 </file>
 
-<file path=ppt/slides/slide14.xml><?xml version="1.0" encoding="utf-8"?>
+<file path=ppt/slides/slide13.xml><?xml version="1.0" encoding="utf-8"?>
 <p:sld xmlns:a="http://schemas.openxmlformats.org/drawingml/2006/main" xmlns:r="http://schemas.openxmlformats.org/officeDocument/2006/relationships" xmlns:p="http://schemas.openxmlformats.org/presentationml/2006/main">
   <p:cSld>
     <p:bg>
@@ -6632,7 +5829,7 @@
 </p:sld>
 </file>
 
-<file path=ppt/slides/slide15.xml><?xml version="1.0" encoding="utf-8"?>
+<file path=ppt/slides/slide14.xml><?xml version="1.0" encoding="utf-8"?>
 <p:sld xmlns:a="http://schemas.openxmlformats.org/drawingml/2006/main" xmlns:r="http://schemas.openxmlformats.org/officeDocument/2006/relationships" xmlns:p="http://schemas.openxmlformats.org/presentationml/2006/main">
   <p:cSld>
     <p:spTree>
@@ -6795,7 +5992,7 @@
           </a:ln>
           <a:extLst>
             <a:ext uri="{C572A759-6A51-4108-AA02-DFA0A04FC94B}">
-              <ma14:wrappingTextBoxFlag xmlns:ma14="http://schemas.microsoft.com/office/mac/drawingml/2011/main" xmlns:a14="http://schemas.microsoft.com/office/drawing/2010/main" xmlns:m="http://schemas.openxmlformats.org/officeDocument/2006/math" xmlns="" val="1"/>
+              <ma14:wrappingTextBoxFlag xmlns="" xmlns:m="http://schemas.openxmlformats.org/officeDocument/2006/math" xmlns:a14="http://schemas.microsoft.com/office/drawing/2010/main" xmlns:ma14="http://schemas.microsoft.com/office/mac/drawingml/2011/main" val="1"/>
             </a:ext>
           </a:extLst>
         </p:spPr>
@@ -6900,7 +6097,7 @@
           </a:ln>
           <a:extLst>
             <a:ext uri="{C572A759-6A51-4108-AA02-DFA0A04FC94B}">
-              <ma14:wrappingTextBoxFlag xmlns:ma14="http://schemas.microsoft.com/office/mac/drawingml/2011/main" xmlns:a14="http://schemas.microsoft.com/office/drawing/2010/main" xmlns:m="http://schemas.openxmlformats.org/officeDocument/2006/math" xmlns="" val="1"/>
+              <ma14:wrappingTextBoxFlag xmlns="" xmlns:m="http://schemas.openxmlformats.org/officeDocument/2006/math" xmlns:a14="http://schemas.microsoft.com/office/drawing/2010/main" xmlns:ma14="http://schemas.microsoft.com/office/mac/drawingml/2011/main" val="1"/>
             </a:ext>
           </a:extLst>
         </p:spPr>
@@ -7023,7 +6220,7 @@
 </p:sld>
 </file>
 
-<file path=ppt/slides/slide16.xml><?xml version="1.0" encoding="utf-8"?>
+<file path=ppt/slides/slide15.xml><?xml version="1.0" encoding="utf-8"?>
 <p:sld xmlns:a="http://schemas.openxmlformats.org/drawingml/2006/main" xmlns:r="http://schemas.openxmlformats.org/officeDocument/2006/relationships" xmlns:p="http://schemas.openxmlformats.org/presentationml/2006/main">
   <p:cSld>
     <p:spTree>
@@ -7173,9 +6370,9 @@
         <p:grpSpPr>
           <a:xfrm>
             <a:off x="4261163" y="1653247"/>
-            <a:ext cx="1508892" cy="1050891"/>
+            <a:ext cx="1508893" cy="1050891"/>
             <a:chOff x="0" y="0"/>
-            <a:chExt cx="1508891" cy="1050889"/>
+            <a:chExt cx="1508892" cy="1050890"/>
           </a:xfrm>
         </p:grpSpPr>
         <p:pic>
@@ -7229,7 +6426,7 @@
             <a:effectLst/>
             <a:extLst>
               <a:ext uri="{C572A759-6A51-4108-AA02-DFA0A04FC94B}">
-                <ma14:wrappingTextBoxFlag xmlns:ma14="http://schemas.microsoft.com/office/mac/drawingml/2011/main" xmlns:a14="http://schemas.microsoft.com/office/drawing/2010/main" xmlns:m="http://schemas.openxmlformats.org/officeDocument/2006/math" xmlns="" val="1"/>
+                <ma14:wrappingTextBoxFlag xmlns="" xmlns:m="http://schemas.openxmlformats.org/officeDocument/2006/math" xmlns:a14="http://schemas.microsoft.com/office/drawing/2010/main" xmlns:ma14="http://schemas.microsoft.com/office/mac/drawingml/2011/main" val="1"/>
               </a:ext>
             </a:extLst>
           </p:spPr>
@@ -7255,9 +6452,9 @@
         <p:grpSpPr>
           <a:xfrm>
             <a:off x="5770055" y="1653247"/>
-            <a:ext cx="1508892" cy="1050891"/>
+            <a:ext cx="1508893" cy="1050891"/>
             <a:chOff x="0" y="0"/>
-            <a:chExt cx="1508891" cy="1050889"/>
+            <a:chExt cx="1508892" cy="1050890"/>
           </a:xfrm>
         </p:grpSpPr>
         <p:pic>
@@ -7311,7 +6508,7 @@
             <a:effectLst/>
             <a:extLst>
               <a:ext uri="{C572A759-6A51-4108-AA02-DFA0A04FC94B}">
-                <ma14:wrappingTextBoxFlag xmlns:ma14="http://schemas.microsoft.com/office/mac/drawingml/2011/main" xmlns:a14="http://schemas.microsoft.com/office/drawing/2010/main" xmlns:m="http://schemas.openxmlformats.org/officeDocument/2006/math" xmlns="" val="1"/>
+                <ma14:wrappingTextBoxFlag xmlns="" xmlns:m="http://schemas.openxmlformats.org/officeDocument/2006/math" xmlns:a14="http://schemas.microsoft.com/office/drawing/2010/main" xmlns:ma14="http://schemas.microsoft.com/office/mac/drawingml/2011/main" val="1"/>
               </a:ext>
             </a:extLst>
           </p:spPr>
@@ -8226,7 +7423,7 @@
           </a:ln>
           <a:extLst>
             <a:ext uri="{C572A759-6A51-4108-AA02-DFA0A04FC94B}">
-              <ma14:wrappingTextBoxFlag xmlns:ma14="http://schemas.microsoft.com/office/mac/drawingml/2011/main" xmlns:a14="http://schemas.microsoft.com/office/drawing/2010/main" xmlns:m="http://schemas.openxmlformats.org/officeDocument/2006/math" xmlns="" val="1"/>
+              <ma14:wrappingTextBoxFlag xmlns="" xmlns:m="http://schemas.openxmlformats.org/officeDocument/2006/math" xmlns:a14="http://schemas.microsoft.com/office/drawing/2010/main" xmlns:ma14="http://schemas.microsoft.com/office/mac/drawingml/2011/main" val="1"/>
             </a:ext>
           </a:extLst>
         </p:spPr>
@@ -8499,7 +7696,7 @@
           </a:ln>
           <a:extLst>
             <a:ext uri="{C572A759-6A51-4108-AA02-DFA0A04FC94B}">
-              <ma14:wrappingTextBoxFlag xmlns:ma14="http://schemas.microsoft.com/office/mac/drawingml/2011/main" xmlns:a14="http://schemas.microsoft.com/office/drawing/2010/main" xmlns:m="http://schemas.openxmlformats.org/officeDocument/2006/math" xmlns="" val="1"/>
+              <ma14:wrappingTextBoxFlag xmlns="" xmlns:m="http://schemas.openxmlformats.org/officeDocument/2006/math" xmlns:a14="http://schemas.microsoft.com/office/drawing/2010/main" xmlns:ma14="http://schemas.microsoft.com/office/mac/drawingml/2011/main" val="1"/>
             </a:ext>
           </a:extLst>
         </p:spPr>
@@ -8546,7 +7743,7 @@
           </a:ln>
           <a:extLst>
             <a:ext uri="{C572A759-6A51-4108-AA02-DFA0A04FC94B}">
-              <ma14:wrappingTextBoxFlag xmlns:ma14="http://schemas.microsoft.com/office/mac/drawingml/2011/main" xmlns:a14="http://schemas.microsoft.com/office/drawing/2010/main" xmlns:m="http://schemas.openxmlformats.org/officeDocument/2006/math" xmlns="" val="1"/>
+              <ma14:wrappingTextBoxFlag xmlns="" xmlns:m="http://schemas.openxmlformats.org/officeDocument/2006/math" xmlns:a14="http://schemas.microsoft.com/office/drawing/2010/main" xmlns:ma14="http://schemas.microsoft.com/office/mac/drawingml/2011/main" val="1"/>
             </a:ext>
           </a:extLst>
         </p:spPr>
@@ -8593,7 +7790,7 @@
           </a:ln>
           <a:extLst>
             <a:ext uri="{C572A759-6A51-4108-AA02-DFA0A04FC94B}">
-              <ma14:wrappingTextBoxFlag xmlns:ma14="http://schemas.microsoft.com/office/mac/drawingml/2011/main" xmlns:a14="http://schemas.microsoft.com/office/drawing/2010/main" xmlns:m="http://schemas.openxmlformats.org/officeDocument/2006/math" xmlns="" val="1"/>
+              <ma14:wrappingTextBoxFlag xmlns="" xmlns:m="http://schemas.openxmlformats.org/officeDocument/2006/math" xmlns:a14="http://schemas.microsoft.com/office/drawing/2010/main" xmlns:ma14="http://schemas.microsoft.com/office/mac/drawingml/2011/main" val="1"/>
             </a:ext>
           </a:extLst>
         </p:spPr>
@@ -8640,7 +7837,7 @@
           </a:ln>
           <a:extLst>
             <a:ext uri="{C572A759-6A51-4108-AA02-DFA0A04FC94B}">
-              <ma14:wrappingTextBoxFlag xmlns:ma14="http://schemas.microsoft.com/office/mac/drawingml/2011/main" xmlns:a14="http://schemas.microsoft.com/office/drawing/2010/main" xmlns:m="http://schemas.openxmlformats.org/officeDocument/2006/math" xmlns="" val="1"/>
+              <ma14:wrappingTextBoxFlag xmlns="" xmlns:m="http://schemas.openxmlformats.org/officeDocument/2006/math" xmlns:a14="http://schemas.microsoft.com/office/drawing/2010/main" xmlns:ma14="http://schemas.microsoft.com/office/mac/drawingml/2011/main" val="1"/>
             </a:ext>
           </a:extLst>
         </p:spPr>
@@ -9175,7 +8372,7 @@
           </a:ln>
           <a:extLst>
             <a:ext uri="{C572A759-6A51-4108-AA02-DFA0A04FC94B}">
-              <ma14:wrappingTextBoxFlag xmlns:ma14="http://schemas.microsoft.com/office/mac/drawingml/2011/main" xmlns:a14="http://schemas.microsoft.com/office/drawing/2010/main" xmlns:m="http://schemas.openxmlformats.org/officeDocument/2006/math" xmlns="" val="1"/>
+              <ma14:wrappingTextBoxFlag xmlns="" xmlns:m="http://schemas.openxmlformats.org/officeDocument/2006/math" xmlns:a14="http://schemas.microsoft.com/office/drawing/2010/main" xmlns:ma14="http://schemas.microsoft.com/office/mac/drawingml/2011/main" val="1"/>
             </a:ext>
           </a:extLst>
         </p:spPr>
@@ -9222,7 +8419,7 @@
           </a:ln>
           <a:extLst>
             <a:ext uri="{C572A759-6A51-4108-AA02-DFA0A04FC94B}">
-              <ma14:wrappingTextBoxFlag xmlns:ma14="http://schemas.microsoft.com/office/mac/drawingml/2011/main" xmlns:a14="http://schemas.microsoft.com/office/drawing/2010/main" xmlns:m="http://schemas.openxmlformats.org/officeDocument/2006/math" xmlns="" val="1"/>
+              <ma14:wrappingTextBoxFlag xmlns="" xmlns:m="http://schemas.openxmlformats.org/officeDocument/2006/math" xmlns:a14="http://schemas.microsoft.com/office/drawing/2010/main" xmlns:ma14="http://schemas.microsoft.com/office/mac/drawingml/2011/main" val="1"/>
             </a:ext>
           </a:extLst>
         </p:spPr>
@@ -9269,7 +8466,7 @@
           </a:ln>
           <a:extLst>
             <a:ext uri="{C572A759-6A51-4108-AA02-DFA0A04FC94B}">
-              <ma14:wrappingTextBoxFlag xmlns:ma14="http://schemas.microsoft.com/office/mac/drawingml/2011/main" xmlns:a14="http://schemas.microsoft.com/office/drawing/2010/main" xmlns:m="http://schemas.openxmlformats.org/officeDocument/2006/math" xmlns="" val="1"/>
+              <ma14:wrappingTextBoxFlag xmlns="" xmlns:m="http://schemas.openxmlformats.org/officeDocument/2006/math" xmlns:a14="http://schemas.microsoft.com/office/drawing/2010/main" xmlns:ma14="http://schemas.microsoft.com/office/mac/drawingml/2011/main" val="1"/>
             </a:ext>
           </a:extLst>
         </p:spPr>
@@ -9316,7 +8513,7 @@
           </a:ln>
           <a:extLst>
             <a:ext uri="{C572A759-6A51-4108-AA02-DFA0A04FC94B}">
-              <ma14:wrappingTextBoxFlag xmlns:ma14="http://schemas.microsoft.com/office/mac/drawingml/2011/main" xmlns:a14="http://schemas.microsoft.com/office/drawing/2010/main" xmlns:m="http://schemas.openxmlformats.org/officeDocument/2006/math" xmlns="" val="1"/>
+              <ma14:wrappingTextBoxFlag xmlns="" xmlns:m="http://schemas.openxmlformats.org/officeDocument/2006/math" xmlns:a14="http://schemas.microsoft.com/office/drawing/2010/main" xmlns:ma14="http://schemas.microsoft.com/office/mac/drawingml/2011/main" val="1"/>
             </a:ext>
           </a:extLst>
         </p:spPr>
@@ -9363,7 +8560,7 @@
           </a:ln>
           <a:extLst>
             <a:ext uri="{C572A759-6A51-4108-AA02-DFA0A04FC94B}">
-              <ma14:wrappingTextBoxFlag xmlns:ma14="http://schemas.microsoft.com/office/mac/drawingml/2011/main" xmlns:a14="http://schemas.microsoft.com/office/drawing/2010/main" xmlns:m="http://schemas.openxmlformats.org/officeDocument/2006/math" xmlns="" val="1"/>
+              <ma14:wrappingTextBoxFlag xmlns="" xmlns:m="http://schemas.openxmlformats.org/officeDocument/2006/math" xmlns:a14="http://schemas.microsoft.com/office/drawing/2010/main" xmlns:ma14="http://schemas.microsoft.com/office/mac/drawingml/2011/main" val="1"/>
             </a:ext>
           </a:extLst>
         </p:spPr>
@@ -9410,7 +8607,7 @@
           </a:ln>
           <a:extLst>
             <a:ext uri="{C572A759-6A51-4108-AA02-DFA0A04FC94B}">
-              <ma14:wrappingTextBoxFlag xmlns:ma14="http://schemas.microsoft.com/office/mac/drawingml/2011/main" xmlns:a14="http://schemas.microsoft.com/office/drawing/2010/main" xmlns:m="http://schemas.openxmlformats.org/officeDocument/2006/math" xmlns="" val="1"/>
+              <ma14:wrappingTextBoxFlag xmlns="" xmlns:m="http://schemas.openxmlformats.org/officeDocument/2006/math" xmlns:a14="http://schemas.microsoft.com/office/drawing/2010/main" xmlns:ma14="http://schemas.microsoft.com/office/mac/drawingml/2011/main" val="1"/>
             </a:ext>
           </a:extLst>
         </p:spPr>
@@ -9512,7 +8709,9 @@
           </a:prstGeom>
         </p:spPr>
         <p:txBody>
-          <a:bodyPr/>
+          <a:bodyPr>
+            <a:normAutofit fontScale="90000"/>
+          </a:bodyPr>
           <a:lstStyle>
             <a:lvl1pPr defTabSz="822958">
               <a:defRPr sz="2200">
@@ -9528,8 +8727,14 @@
           </a:lstStyle>
           <a:p>
             <a:r>
+              <a:rPr dirty="0"/>
               <a:t>Football predictor application</a:t>
             </a:r>
+            <a:r>
+              <a:rPr lang="fr-FR" dirty="0"/>
+              <a:t> - Démonstration</a:t>
+            </a:r>
+            <a:endParaRPr dirty="0"/>
           </a:p>
         </p:txBody>
       </p:sp>
@@ -9984,7 +9189,7 @@
           </a:ln>
           <a:extLst>
             <a:ext uri="{C572A759-6A51-4108-AA02-DFA0A04FC94B}">
-              <ma14:wrappingTextBoxFlag xmlns:ma14="http://schemas.microsoft.com/office/mac/drawingml/2011/main" xmlns:a14="http://schemas.microsoft.com/office/drawing/2010/main" xmlns:m="http://schemas.openxmlformats.org/officeDocument/2006/math" xmlns="" val="1"/>
+              <ma14:wrappingTextBoxFlag xmlns="" xmlns:m="http://schemas.openxmlformats.org/officeDocument/2006/math" xmlns:a14="http://schemas.microsoft.com/office/drawing/2010/main" xmlns:ma14="http://schemas.microsoft.com/office/mac/drawingml/2011/main" val="1"/>
             </a:ext>
           </a:extLst>
         </p:spPr>
@@ -10031,7 +9236,7 @@
           </a:ln>
           <a:extLst>
             <a:ext uri="{C572A759-6A51-4108-AA02-DFA0A04FC94B}">
-              <ma14:wrappingTextBoxFlag xmlns:ma14="http://schemas.microsoft.com/office/mac/drawingml/2011/main" xmlns:a14="http://schemas.microsoft.com/office/drawing/2010/main" xmlns:m="http://schemas.openxmlformats.org/officeDocument/2006/math" xmlns="" val="1"/>
+              <ma14:wrappingTextBoxFlag xmlns="" xmlns:m="http://schemas.openxmlformats.org/officeDocument/2006/math" xmlns:a14="http://schemas.microsoft.com/office/drawing/2010/main" xmlns:ma14="http://schemas.microsoft.com/office/mac/drawingml/2011/main" val="1"/>
             </a:ext>
           </a:extLst>
         </p:spPr>
@@ -10078,7 +9283,7 @@
           </a:ln>
           <a:extLst>
             <a:ext uri="{C572A759-6A51-4108-AA02-DFA0A04FC94B}">
-              <ma14:wrappingTextBoxFlag xmlns:ma14="http://schemas.microsoft.com/office/mac/drawingml/2011/main" xmlns:a14="http://schemas.microsoft.com/office/drawing/2010/main" xmlns:m="http://schemas.openxmlformats.org/officeDocument/2006/math" xmlns="" val="1"/>
+              <ma14:wrappingTextBoxFlag xmlns="" xmlns:m="http://schemas.openxmlformats.org/officeDocument/2006/math" xmlns:a14="http://schemas.microsoft.com/office/drawing/2010/main" xmlns:ma14="http://schemas.microsoft.com/office/mac/drawingml/2011/main" val="1"/>
             </a:ext>
           </a:extLst>
         </p:spPr>
@@ -10125,7 +9330,7 @@
           </a:ln>
           <a:extLst>
             <a:ext uri="{C572A759-6A51-4108-AA02-DFA0A04FC94B}">
-              <ma14:wrappingTextBoxFlag xmlns:ma14="http://schemas.microsoft.com/office/mac/drawingml/2011/main" xmlns:a14="http://schemas.microsoft.com/office/drawing/2010/main" xmlns:m="http://schemas.openxmlformats.org/officeDocument/2006/math" xmlns="" val="1"/>
+              <ma14:wrappingTextBoxFlag xmlns="" xmlns:m="http://schemas.openxmlformats.org/officeDocument/2006/math" xmlns:a14="http://schemas.microsoft.com/office/drawing/2010/main" xmlns:ma14="http://schemas.microsoft.com/office/mac/drawingml/2011/main" val="1"/>
             </a:ext>
           </a:extLst>
         </p:spPr>
@@ -10172,7 +9377,7 @@
           </a:ln>
           <a:extLst>
             <a:ext uri="{C572A759-6A51-4108-AA02-DFA0A04FC94B}">
-              <ma14:wrappingTextBoxFlag xmlns:ma14="http://schemas.microsoft.com/office/mac/drawingml/2011/main" xmlns:a14="http://schemas.microsoft.com/office/drawing/2010/main" xmlns:m="http://schemas.openxmlformats.org/officeDocument/2006/math" xmlns="" val="1"/>
+              <ma14:wrappingTextBoxFlag xmlns="" xmlns:m="http://schemas.openxmlformats.org/officeDocument/2006/math" xmlns:a14="http://schemas.microsoft.com/office/drawing/2010/main" xmlns:ma14="http://schemas.microsoft.com/office/mac/drawingml/2011/main" val="1"/>
             </a:ext>
           </a:extLst>
         </p:spPr>
@@ -10219,7 +9424,7 @@
           </a:ln>
           <a:extLst>
             <a:ext uri="{C572A759-6A51-4108-AA02-DFA0A04FC94B}">
-              <ma14:wrappingTextBoxFlag xmlns:ma14="http://schemas.microsoft.com/office/mac/drawingml/2011/main" xmlns:a14="http://schemas.microsoft.com/office/drawing/2010/main" xmlns:m="http://schemas.openxmlformats.org/officeDocument/2006/math" xmlns="" val="1"/>
+              <ma14:wrappingTextBoxFlag xmlns="" xmlns:m="http://schemas.openxmlformats.org/officeDocument/2006/math" xmlns:a14="http://schemas.microsoft.com/office/drawing/2010/main" xmlns:ma14="http://schemas.microsoft.com/office/mac/drawingml/2011/main" val="1"/>
             </a:ext>
           </a:extLst>
         </p:spPr>
@@ -10266,7 +9471,7 @@
           </a:ln>
           <a:extLst>
             <a:ext uri="{C572A759-6A51-4108-AA02-DFA0A04FC94B}">
-              <ma14:wrappingTextBoxFlag xmlns:ma14="http://schemas.microsoft.com/office/mac/drawingml/2011/main" xmlns:a14="http://schemas.microsoft.com/office/drawing/2010/main" xmlns:m="http://schemas.openxmlformats.org/officeDocument/2006/math" xmlns="" val="1"/>
+              <ma14:wrappingTextBoxFlag xmlns="" xmlns:m="http://schemas.openxmlformats.org/officeDocument/2006/math" xmlns:a14="http://schemas.microsoft.com/office/drawing/2010/main" xmlns:ma14="http://schemas.microsoft.com/office/mac/drawingml/2011/main" val="1"/>
             </a:ext>
           </a:extLst>
         </p:spPr>
@@ -10313,7 +9518,7 @@
           </a:ln>
           <a:extLst>
             <a:ext uri="{C572A759-6A51-4108-AA02-DFA0A04FC94B}">
-              <ma14:wrappingTextBoxFlag xmlns:ma14="http://schemas.microsoft.com/office/mac/drawingml/2011/main" xmlns:a14="http://schemas.microsoft.com/office/drawing/2010/main" xmlns:m="http://schemas.openxmlformats.org/officeDocument/2006/math" xmlns="" val="1"/>
+              <ma14:wrappingTextBoxFlag xmlns="" xmlns:m="http://schemas.openxmlformats.org/officeDocument/2006/math" xmlns:a14="http://schemas.microsoft.com/office/drawing/2010/main" xmlns:ma14="http://schemas.microsoft.com/office/mac/drawingml/2011/main" val="1"/>
             </a:ext>
           </a:extLst>
         </p:spPr>
@@ -10341,161 +9546,12 @@
           </a:p>
         </p:txBody>
       </p:sp>
-    </p:spTree>
-  </p:cSld>
-  <p:clrMapOvr>
-    <a:masterClrMapping/>
-  </p:clrMapOvr>
-  <p:transition spd="med"/>
-</p:sld>
-</file>
-
-<file path=ppt/slides/slide6.xml><?xml version="1.0" encoding="utf-8"?>
-<p:sld xmlns:a="http://schemas.openxmlformats.org/drawingml/2006/main" xmlns:r="http://schemas.openxmlformats.org/officeDocument/2006/relationships" xmlns:p="http://schemas.openxmlformats.org/presentationml/2006/main">
-  <p:cSld>
-    <p:spTree>
-      <p:nvGrpSpPr>
-        <p:cNvPr id="1" name="">
-          <a:extLst>
-            <a:ext uri="{FF2B5EF4-FFF2-40B4-BE49-F238E27FC236}">
-              <a16:creationId xmlns:a16="http://schemas.microsoft.com/office/drawing/2014/main" id="{A7B39AC5-8BE7-B9AA-7BBC-512B4E68391C}"/>
-            </a:ext>
-          </a:extLst>
-        </p:cNvPr>
-        <p:cNvGrpSpPr/>
-        <p:nvPr/>
-      </p:nvGrpSpPr>
-      <p:grpSpPr>
-        <a:xfrm>
-          <a:off x="0" y="0"/>
-          <a:ext cx="0" cy="0"/>
-          <a:chOff x="0" y="0"/>
-          <a:chExt cx="0" cy="0"/>
-        </a:xfrm>
-      </p:grpSpPr>
       <p:sp>
         <p:nvSpPr>
-          <p:cNvPr id="145" name="Google Shape;68;p15">
+          <p:cNvPr id="5" name="flab">
             <a:extLst>
               <a:ext uri="{FF2B5EF4-FFF2-40B4-BE49-F238E27FC236}">
-                <a16:creationId xmlns:a16="http://schemas.microsoft.com/office/drawing/2014/main" id="{2B5F8F97-9B12-1B98-6E8E-BD92FCE00B0C}"/>
-              </a:ext>
-            </a:extLst>
-          </p:cNvPr>
-          <p:cNvSpPr txBox="1">
-            <a:spLocks noGrp="1"/>
-          </p:cNvSpPr>
-          <p:nvPr>
-            <p:ph type="title"/>
-          </p:nvPr>
-        </p:nvSpPr>
-        <p:spPr>
-          <a:xfrm>
-            <a:off x="1192663" y="403307"/>
-            <a:ext cx="5315103" cy="533103"/>
-          </a:xfrm>
-          <a:prstGeom prst="rect">
-            <a:avLst/>
-          </a:prstGeom>
-        </p:spPr>
-        <p:txBody>
-          <a:bodyPr/>
-          <a:lstStyle>
-            <a:lvl1pPr defTabSz="822958">
-              <a:defRPr sz="2200">
-                <a:solidFill>
-                  <a:srgbClr val="0E3449"/>
-                </a:solidFill>
-                <a:latin typeface="Inter SemiBold"/>
-                <a:ea typeface="Inter SemiBold"/>
-                <a:cs typeface="Inter SemiBold"/>
-                <a:sym typeface="Inter SemiBold"/>
-              </a:defRPr>
-            </a:lvl1pPr>
-          </a:lstStyle>
-          <a:p>
-            <a:r>
-              <a:rPr lang="fr-FR" dirty="0"/>
-              <a:t>Démonstration de l’application</a:t>
-            </a:r>
-            <a:endParaRPr dirty="0"/>
-          </a:p>
-        </p:txBody>
-      </p:sp>
-      <p:sp>
-        <p:nvSpPr>
-          <p:cNvPr id="146" name="Google Shape;69;p15">
-            <a:extLst>
-              <a:ext uri="{FF2B5EF4-FFF2-40B4-BE49-F238E27FC236}">
-                <a16:creationId xmlns:a16="http://schemas.microsoft.com/office/drawing/2014/main" id="{C10E6EDA-84D2-625F-B159-CB5967207CE7}"/>
-              </a:ext>
-            </a:extLst>
-          </p:cNvPr>
-          <p:cNvSpPr/>
-          <p:nvPr/>
-        </p:nvSpPr>
-        <p:spPr>
-          <a:xfrm>
-            <a:off x="10224" y="4892025"/>
-            <a:ext cx="9144001" cy="251400"/>
-          </a:xfrm>
-          <a:prstGeom prst="rect">
-            <a:avLst/>
-          </a:prstGeom>
-          <a:solidFill>
-            <a:srgbClr val="C3FFFC"/>
-          </a:solidFill>
-          <a:ln w="12700">
-            <a:miter lim="400000"/>
-          </a:ln>
-        </p:spPr>
-        <p:txBody>
-          <a:bodyPr lIns="0" tIns="0" rIns="0" bIns="0" anchor="ctr"/>
-          <a:lstStyle/>
-          <a:p>
-            <a:endParaRPr/>
-          </a:p>
-        </p:txBody>
-      </p:sp>
-      <p:pic>
-        <p:nvPicPr>
-          <p:cNvPr id="147" name="Google Shape;70;p15" descr="Google Shape;70;p15">
-            <a:extLst>
-              <a:ext uri="{FF2B5EF4-FFF2-40B4-BE49-F238E27FC236}">
-                <a16:creationId xmlns:a16="http://schemas.microsoft.com/office/drawing/2014/main" id="{79120C56-AD4F-0425-A531-8C5BC25CF8A8}"/>
-              </a:ext>
-            </a:extLst>
-          </p:cNvPr>
-          <p:cNvPicPr>
-            <a:picLocks noChangeAspect="1"/>
-          </p:cNvPicPr>
-          <p:nvPr/>
-        </p:nvPicPr>
-        <p:blipFill>
-          <a:blip r:embed="rId2"/>
-          <a:stretch>
-            <a:fillRect/>
-          </a:stretch>
-        </p:blipFill>
-        <p:spPr>
-          <a:xfrm>
-            <a:off x="463375" y="482852"/>
-            <a:ext cx="576901" cy="385906"/>
-          </a:xfrm>
-          <a:prstGeom prst="rect">
-            <a:avLst/>
-          </a:prstGeom>
-          <a:ln w="12700">
-            <a:miter lim="400000"/>
-          </a:ln>
-        </p:spPr>
-      </p:pic>
-      <p:sp>
-        <p:nvSpPr>
-          <p:cNvPr id="161" name="flab">
-            <a:extLst>
-              <a:ext uri="{FF2B5EF4-FFF2-40B4-BE49-F238E27FC236}">
-                <a16:creationId xmlns:a16="http://schemas.microsoft.com/office/drawing/2014/main" id="{3F25130B-BAE3-3E9B-B2DB-36CA32F61DC0}"/>
+                <a16:creationId xmlns:a16="http://schemas.microsoft.com/office/drawing/2014/main" id="{5F1AD63F-A918-04BA-0C0B-3427DF1712C5}"/>
               </a:ext>
             </a:extLst>
           </p:cNvPr>
@@ -10504,7 +9560,7 @@
         </p:nvSpPr>
         <p:spPr>
           <a:xfrm>
-            <a:off x="3439333" y="2546750"/>
+            <a:off x="5582002" y="655423"/>
             <a:ext cx="2265334" cy="300001"/>
           </a:xfrm>
           <a:prstGeom prst="rect">
@@ -10538,19 +9594,19 @@
           </a:lstStyle>
           <a:p>
             <a:r>
-              <a:rPr lang="fr-FR" sz="2400" dirty="0"/>
-              <a:t>Vidéo</a:t>
+              <a:rPr lang="fr-FR" sz="2400" dirty="0">
+                <a:hlinkClick r:id="rId8"/>
+              </a:rPr>
+              <a:t>Vidéo </a:t>
             </a:r>
-            <a:endParaRPr sz="2400" dirty="0"/>
+            <a:endParaRPr lang="fr-FR" sz="2400" dirty="0"/>
+          </a:p>
+          <a:p>
+            <a:endParaRPr lang="fr-FR" sz="2400" dirty="0"/>
           </a:p>
         </p:txBody>
       </p:sp>
     </p:spTree>
-    <p:extLst>
-      <p:ext uri="{BB962C8B-B14F-4D97-AF65-F5344CB8AC3E}">
-        <p14:creationId xmlns:p14="http://schemas.microsoft.com/office/powerpoint/2010/main" val="3835693099"/>
-      </p:ext>
-    </p:extLst>
   </p:cSld>
   <p:clrMapOvr>
     <a:masterClrMapping/>
@@ -10559,7 +9615,7 @@
 </p:sld>
 </file>
 
-<file path=ppt/slides/slide7.xml><?xml version="1.0" encoding="utf-8"?>
+<file path=ppt/slides/slide6.xml><?xml version="1.0" encoding="utf-8"?>
 <p:sld xmlns:a="http://schemas.openxmlformats.org/drawingml/2006/main" xmlns:r="http://schemas.openxmlformats.org/officeDocument/2006/relationships" xmlns:p="http://schemas.openxmlformats.org/presentationml/2006/main">
   <p:cSld>
     <p:spTree>
@@ -10706,10 +9762,10 @@
         </p:nvGrpSpPr>
         <p:grpSpPr>
           <a:xfrm>
-            <a:off x="817152" y="2657189"/>
-            <a:ext cx="5680323" cy="1343027"/>
-            <a:chOff x="0" y="0"/>
-            <a:chExt cx="5680321" cy="1343025"/>
+            <a:off x="817150" y="2657189"/>
+            <a:ext cx="5680327" cy="1343029"/>
+            <a:chOff x="-2" y="0"/>
+            <a:chExt cx="5680325" cy="1343027"/>
           </a:xfrm>
         </p:grpSpPr>
         <p:grpSp>
@@ -10720,10 +9776,10 @@
           </p:nvGrpSpPr>
           <p:grpSpPr>
             <a:xfrm>
-              <a:off x="-1" y="0"/>
-              <a:ext cx="5680323" cy="1343026"/>
-              <a:chOff x="0" y="0"/>
-              <a:chExt cx="5680321" cy="1343025"/>
+              <a:off x="-2" y="0"/>
+              <a:ext cx="5680325" cy="1343027"/>
+              <a:chOff x="-1" y="0"/>
+              <a:chExt cx="5680323" cy="1343026"/>
             </a:xfrm>
           </p:grpSpPr>
           <p:sp>
@@ -10786,7 +9842,7 @@
               <a:effectLst/>
               <a:extLst>
                 <a:ext uri="{C572A759-6A51-4108-AA02-DFA0A04FC94B}">
-                  <ma14:wrappingTextBoxFlag xmlns:ma14="http://schemas.microsoft.com/office/mac/drawingml/2011/main" xmlns:a14="http://schemas.microsoft.com/office/drawing/2010/main" xmlns:m="http://schemas.openxmlformats.org/officeDocument/2006/math" xmlns="" val="1"/>
+                  <ma14:wrappingTextBoxFlag xmlns="" xmlns:m="http://schemas.openxmlformats.org/officeDocument/2006/math" xmlns:a14="http://schemas.microsoft.com/office/drawing/2010/main" xmlns:ma14="http://schemas.microsoft.com/office/mac/drawingml/2011/main" val="1"/>
                 </a:ext>
               </a:extLst>
             </p:spPr>
@@ -10834,7 +9890,7 @@
             <a:effectLst/>
             <a:extLst>
               <a:ext uri="{C572A759-6A51-4108-AA02-DFA0A04FC94B}">
-                <ma14:wrappingTextBoxFlag xmlns:ma14="http://schemas.microsoft.com/office/mac/drawingml/2011/main" xmlns:a14="http://schemas.microsoft.com/office/drawing/2010/main" xmlns:m="http://schemas.openxmlformats.org/officeDocument/2006/math" xmlns="" val="1"/>
+                <ma14:wrappingTextBoxFlag xmlns="" xmlns:m="http://schemas.openxmlformats.org/officeDocument/2006/math" xmlns:a14="http://schemas.microsoft.com/office/drawing/2010/main" xmlns:ma14="http://schemas.microsoft.com/office/mac/drawingml/2011/main" val="1"/>
               </a:ext>
             </a:extLst>
           </p:spPr>
@@ -10868,10 +9924,10 @@
         </p:nvGrpSpPr>
         <p:grpSpPr>
           <a:xfrm>
-            <a:off x="817152" y="1284870"/>
-            <a:ext cx="5778382" cy="662463"/>
-            <a:chOff x="0" y="0"/>
-            <a:chExt cx="5778380" cy="662461"/>
+            <a:off x="817151" y="1284870"/>
+            <a:ext cx="5778384" cy="662464"/>
+            <a:chOff x="-1" y="0"/>
+            <a:chExt cx="5778382" cy="662462"/>
           </a:xfrm>
         </p:grpSpPr>
         <p:sp>
@@ -10934,7 +9990,7 @@
             <a:effectLst/>
             <a:extLst>
               <a:ext uri="{C572A759-6A51-4108-AA02-DFA0A04FC94B}">
-                <ma14:wrappingTextBoxFlag xmlns:ma14="http://schemas.microsoft.com/office/mac/drawingml/2011/main" xmlns:a14="http://schemas.microsoft.com/office/drawing/2010/main" xmlns:m="http://schemas.openxmlformats.org/officeDocument/2006/math" xmlns="" val="1"/>
+                <ma14:wrappingTextBoxFlag xmlns="" xmlns:m="http://schemas.openxmlformats.org/officeDocument/2006/math" xmlns:a14="http://schemas.microsoft.com/office/drawing/2010/main" xmlns:ma14="http://schemas.microsoft.com/office/mac/drawingml/2011/main" val="1"/>
               </a:ext>
             </a:extLst>
           </p:spPr>
@@ -10983,7 +10039,7 @@
 </p:sld>
 </file>
 
-<file path=ppt/slides/slide8.xml><?xml version="1.0" encoding="utf-8"?>
+<file path=ppt/slides/slide7.xml><?xml version="1.0" encoding="utf-8"?>
 <p:sld xmlns:a="http://schemas.openxmlformats.org/drawingml/2006/main" xmlns:r="http://schemas.openxmlformats.org/officeDocument/2006/relationships" xmlns:p="http://schemas.openxmlformats.org/presentationml/2006/main">
   <p:cSld>
     <p:spTree>
@@ -11149,9 +10205,9 @@
         <p:grpSpPr>
           <a:xfrm>
             <a:off x="340861" y="1191904"/>
-            <a:ext cx="2510118" cy="1476045"/>
+            <a:ext cx="2510119" cy="1476047"/>
             <a:chOff x="0" y="0"/>
-            <a:chExt cx="2510117" cy="1476045"/>
+            <a:chExt cx="2510118" cy="1476047"/>
           </a:xfrm>
         </p:grpSpPr>
         <p:sp>
@@ -11176,7 +10232,7 @@
             <a:effectLst/>
             <a:extLst>
               <a:ext uri="{C572A759-6A51-4108-AA02-DFA0A04FC94B}">
-                <ma14:wrappingTextBoxFlag xmlns:ma14="http://schemas.microsoft.com/office/mac/drawingml/2011/main" xmlns:a14="http://schemas.microsoft.com/office/drawing/2010/main" xmlns:m="http://schemas.openxmlformats.org/officeDocument/2006/math" xmlns="" val="1"/>
+                <ma14:wrappingTextBoxFlag xmlns="" xmlns:m="http://schemas.openxmlformats.org/officeDocument/2006/math" xmlns:a14="http://schemas.microsoft.com/office/drawing/2010/main" xmlns:ma14="http://schemas.microsoft.com/office/mac/drawingml/2011/main" val="1"/>
               </a:ext>
             </a:extLst>
           </p:spPr>
@@ -11213,9 +10269,9 @@
           <p:grpSpPr>
             <a:xfrm>
               <a:off x="0" y="379061"/>
-              <a:ext cx="2320745" cy="1096985"/>
+              <a:ext cx="2320746" cy="1096986"/>
               <a:chOff x="0" y="0"/>
-              <a:chExt cx="2320744" cy="1096983"/>
+              <a:chExt cx="2320745" cy="1096984"/>
             </a:xfrm>
           </p:grpSpPr>
           <p:sp>
@@ -11278,7 +10334,7 @@
               <a:effectLst/>
               <a:extLst>
                 <a:ext uri="{C572A759-6A51-4108-AA02-DFA0A04FC94B}">
-                  <ma14:wrappingTextBoxFlag xmlns:ma14="http://schemas.microsoft.com/office/mac/drawingml/2011/main" xmlns:a14="http://schemas.microsoft.com/office/drawing/2010/main" xmlns:m="http://schemas.openxmlformats.org/officeDocument/2006/math" xmlns="" val="1"/>
+                  <ma14:wrappingTextBoxFlag xmlns="" xmlns:m="http://schemas.openxmlformats.org/officeDocument/2006/math" xmlns:a14="http://schemas.microsoft.com/office/drawing/2010/main" xmlns:ma14="http://schemas.microsoft.com/office/mac/drawingml/2011/main" val="1"/>
                 </a:ext>
               </a:extLst>
             </p:spPr>
@@ -11328,7 +10384,7 @@
               <a:effectLst/>
               <a:extLst>
                 <a:ext uri="{C572A759-6A51-4108-AA02-DFA0A04FC94B}">
-                  <ma14:wrappingTextBoxFlag xmlns:ma14="http://schemas.microsoft.com/office/mac/drawingml/2011/main" xmlns:a14="http://schemas.microsoft.com/office/drawing/2010/main" xmlns:m="http://schemas.openxmlformats.org/officeDocument/2006/math" xmlns="" val="1"/>
+                  <ma14:wrappingTextBoxFlag xmlns="" xmlns:m="http://schemas.openxmlformats.org/officeDocument/2006/math" xmlns:a14="http://schemas.microsoft.com/office/drawing/2010/main" xmlns:ma14="http://schemas.microsoft.com/office/mac/drawingml/2011/main" val="1"/>
                 </a:ext>
               </a:extLst>
             </p:spPr>
@@ -11363,10 +10419,10 @@
         </p:nvGrpSpPr>
         <p:grpSpPr>
           <a:xfrm>
-            <a:off x="340861" y="3612991"/>
-            <a:ext cx="2540362" cy="1071563"/>
-            <a:chOff x="0" y="0"/>
-            <a:chExt cx="2540361" cy="1071562"/>
+            <a:off x="340861" y="3612990"/>
+            <a:ext cx="2540364" cy="1071566"/>
+            <a:chOff x="0" y="-1"/>
+            <a:chExt cx="2540363" cy="1071565"/>
           </a:xfrm>
         </p:grpSpPr>
         <p:grpSp>
@@ -11377,10 +10433,10 @@
           </p:nvGrpSpPr>
           <p:grpSpPr>
             <a:xfrm>
-              <a:off x="0" y="0"/>
-              <a:ext cx="2540362" cy="1071563"/>
-              <a:chOff x="0" y="0"/>
-              <a:chExt cx="2540361" cy="1071562"/>
+              <a:off x="0" y="-1"/>
+              <a:ext cx="2540363" cy="1071565"/>
+              <a:chOff x="0" y="-1"/>
+              <a:chExt cx="2540362" cy="1071564"/>
             </a:xfrm>
           </p:grpSpPr>
           <p:sp>
@@ -11443,7 +10499,7 @@
               <a:effectLst/>
               <a:extLst>
                 <a:ext uri="{C572A759-6A51-4108-AA02-DFA0A04FC94B}">
-                  <ma14:wrappingTextBoxFlag xmlns:ma14="http://schemas.microsoft.com/office/mac/drawingml/2011/main" xmlns:a14="http://schemas.microsoft.com/office/drawing/2010/main" xmlns:m="http://schemas.openxmlformats.org/officeDocument/2006/math" xmlns="" val="1"/>
+                  <ma14:wrappingTextBoxFlag xmlns="" xmlns:m="http://schemas.openxmlformats.org/officeDocument/2006/math" xmlns:a14="http://schemas.microsoft.com/office/drawing/2010/main" xmlns:ma14="http://schemas.microsoft.com/office/mac/drawingml/2011/main" val="1"/>
                 </a:ext>
               </a:extLst>
             </p:spPr>
@@ -11494,7 +10550,7 @@
             <a:effectLst/>
             <a:extLst>
               <a:ext uri="{C572A759-6A51-4108-AA02-DFA0A04FC94B}">
-                <ma14:wrappingTextBoxFlag xmlns:ma14="http://schemas.microsoft.com/office/mac/drawingml/2011/main" xmlns:a14="http://schemas.microsoft.com/office/drawing/2010/main" xmlns:m="http://schemas.openxmlformats.org/officeDocument/2006/math" xmlns="" val="1"/>
+                <ma14:wrappingTextBoxFlag xmlns="" xmlns:m="http://schemas.openxmlformats.org/officeDocument/2006/math" xmlns:a14="http://schemas.microsoft.com/office/drawing/2010/main" xmlns:ma14="http://schemas.microsoft.com/office/mac/drawingml/2011/main" val="1"/>
               </a:ext>
             </a:extLst>
           </p:spPr>
@@ -11529,9 +10585,9 @@
         <p:grpSpPr>
           <a:xfrm>
             <a:off x="3010220" y="3001971"/>
-            <a:ext cx="866911" cy="418794"/>
+            <a:ext cx="866912" cy="418795"/>
             <a:chOff x="0" y="0"/>
-            <a:chExt cx="866909" cy="418792"/>
+            <a:chExt cx="866910" cy="418793"/>
           </a:xfrm>
         </p:grpSpPr>
         <p:sp>
@@ -11594,7 +10650,7 @@
             <a:effectLst/>
             <a:extLst>
               <a:ext uri="{C572A759-6A51-4108-AA02-DFA0A04FC94B}">
-                <ma14:wrappingTextBoxFlag xmlns:ma14="http://schemas.microsoft.com/office/mac/drawingml/2011/main" xmlns:a14="http://schemas.microsoft.com/office/drawing/2010/main" xmlns:m="http://schemas.openxmlformats.org/officeDocument/2006/math" xmlns="" val="1"/>
+                <ma14:wrappingTextBoxFlag xmlns="" xmlns:m="http://schemas.openxmlformats.org/officeDocument/2006/math" xmlns:a14="http://schemas.microsoft.com/office/drawing/2010/main" xmlns:ma14="http://schemas.microsoft.com/office/mac/drawingml/2011/main" val="1"/>
               </a:ext>
             </a:extLst>
           </p:spPr>
@@ -11632,9 +10688,9 @@
         <p:grpSpPr>
           <a:xfrm>
             <a:off x="3776910" y="1101850"/>
-            <a:ext cx="2894650" cy="1096274"/>
+            <a:ext cx="2894651" cy="1096275"/>
             <a:chOff x="0" y="0"/>
-            <a:chExt cx="2894649" cy="1096272"/>
+            <a:chExt cx="2894650" cy="1096273"/>
           </a:xfrm>
         </p:grpSpPr>
         <p:sp>
@@ -11697,7 +10753,7 @@
             <a:effectLst/>
             <a:extLst>
               <a:ext uri="{C572A759-6A51-4108-AA02-DFA0A04FC94B}">
-                <ma14:wrappingTextBoxFlag xmlns:ma14="http://schemas.microsoft.com/office/mac/drawingml/2011/main" xmlns:a14="http://schemas.microsoft.com/office/drawing/2010/main" xmlns:m="http://schemas.openxmlformats.org/officeDocument/2006/math" xmlns="" val="1"/>
+                <ma14:wrappingTextBoxFlag xmlns="" xmlns:m="http://schemas.openxmlformats.org/officeDocument/2006/math" xmlns:a14="http://schemas.microsoft.com/office/drawing/2010/main" xmlns:ma14="http://schemas.microsoft.com/office/mac/drawingml/2011/main" val="1"/>
               </a:ext>
             </a:extLst>
           </p:spPr>
@@ -11743,7 +10799,7 @@
             <a:effectLst/>
             <a:extLst>
               <a:ext uri="{C572A759-6A51-4108-AA02-DFA0A04FC94B}">
-                <ma14:wrappingTextBoxFlag xmlns:ma14="http://schemas.microsoft.com/office/mac/drawingml/2011/main" xmlns:a14="http://schemas.microsoft.com/office/drawing/2010/main" xmlns:m="http://schemas.openxmlformats.org/officeDocument/2006/math" xmlns="" val="1"/>
+                <ma14:wrappingTextBoxFlag xmlns="" xmlns:m="http://schemas.openxmlformats.org/officeDocument/2006/math" xmlns:a14="http://schemas.microsoft.com/office/drawing/2010/main" xmlns:ma14="http://schemas.microsoft.com/office/mac/drawingml/2011/main" val="1"/>
               </a:ext>
             </a:extLst>
           </p:spPr>
@@ -11806,10 +10862,10 @@
         </p:nvGrpSpPr>
         <p:grpSpPr>
           <a:xfrm>
-            <a:off x="7019905" y="2015012"/>
-            <a:ext cx="1931672" cy="1477240"/>
-            <a:chOff x="0" y="0"/>
-            <a:chExt cx="1931671" cy="1477239"/>
+            <a:off x="7019904" y="2015012"/>
+            <a:ext cx="1931676" cy="1477241"/>
+            <a:chOff x="-1" y="0"/>
+            <a:chExt cx="1931675" cy="1477241"/>
           </a:xfrm>
         </p:grpSpPr>
         <p:sp>
@@ -11834,7 +10890,7 @@
             <a:effectLst/>
             <a:extLst>
               <a:ext uri="{C572A759-6A51-4108-AA02-DFA0A04FC94B}">
-                <ma14:wrappingTextBoxFlag xmlns:ma14="http://schemas.microsoft.com/office/mac/drawingml/2011/main" xmlns:a14="http://schemas.microsoft.com/office/drawing/2010/main" xmlns:m="http://schemas.openxmlformats.org/officeDocument/2006/math" xmlns="" val="1"/>
+                <ma14:wrappingTextBoxFlag xmlns="" xmlns:m="http://schemas.openxmlformats.org/officeDocument/2006/math" xmlns:a14="http://schemas.microsoft.com/office/drawing/2010/main" xmlns:ma14="http://schemas.microsoft.com/office/mac/drawingml/2011/main" val="1"/>
               </a:ext>
             </a:extLst>
           </p:spPr>
@@ -11870,10 +10926,10 @@
           </p:nvGrpSpPr>
           <p:grpSpPr>
             <a:xfrm>
-              <a:off x="0" y="314798"/>
-              <a:ext cx="1931672" cy="1162442"/>
-              <a:chOff x="0" y="0"/>
-              <a:chExt cx="1931671" cy="1162440"/>
+              <a:off x="-1" y="314798"/>
+              <a:ext cx="1931675" cy="1162443"/>
+              <a:chOff x="-1" y="0"/>
+              <a:chExt cx="1931674" cy="1162441"/>
             </a:xfrm>
           </p:grpSpPr>
           <p:grpSp>
@@ -11884,10 +10940,10 @@
             </p:nvGrpSpPr>
             <p:grpSpPr>
               <a:xfrm>
-                <a:off x="0" y="0"/>
-                <a:ext cx="1931672" cy="1071563"/>
-                <a:chOff x="0" y="0"/>
-                <a:chExt cx="1931671" cy="1071562"/>
+                <a:off x="-1" y="0"/>
+                <a:ext cx="1931674" cy="1071564"/>
+                <a:chOff x="-1" y="0"/>
+                <a:chExt cx="1931673" cy="1071563"/>
               </a:xfrm>
             </p:grpSpPr>
             <p:sp>
@@ -11950,7 +11006,7 @@
                 <a:effectLst/>
                 <a:extLst>
                   <a:ext uri="{C572A759-6A51-4108-AA02-DFA0A04FC94B}">
-                    <ma14:wrappingTextBoxFlag xmlns:ma14="http://schemas.microsoft.com/office/mac/drawingml/2011/main" xmlns:a14="http://schemas.microsoft.com/office/drawing/2010/main" xmlns:m="http://schemas.openxmlformats.org/officeDocument/2006/math" xmlns="" val="1"/>
+                    <ma14:wrappingTextBoxFlag xmlns="" xmlns:m="http://schemas.openxmlformats.org/officeDocument/2006/math" xmlns:a14="http://schemas.microsoft.com/office/drawing/2010/main" xmlns:ma14="http://schemas.microsoft.com/office/mac/drawingml/2011/main" val="1"/>
                   </a:ext>
                 </a:extLst>
               </p:spPr>
@@ -12001,7 +11057,7 @@
               <a:effectLst/>
               <a:extLst>
                 <a:ext uri="{C572A759-6A51-4108-AA02-DFA0A04FC94B}">
-                  <ma14:wrappingTextBoxFlag xmlns:ma14="http://schemas.microsoft.com/office/mac/drawingml/2011/main" xmlns:a14="http://schemas.microsoft.com/office/drawing/2010/main" xmlns:m="http://schemas.openxmlformats.org/officeDocument/2006/math" xmlns="" val="1"/>
+                  <ma14:wrappingTextBoxFlag xmlns="" xmlns:m="http://schemas.openxmlformats.org/officeDocument/2006/math" xmlns:a14="http://schemas.microsoft.com/office/drawing/2010/main" xmlns:ma14="http://schemas.microsoft.com/office/mac/drawingml/2011/main" val="1"/>
                 </a:ext>
               </a:extLst>
             </p:spPr>
@@ -12253,7 +11309,7 @@
 </p:sld>
 </file>
 
-<file path=ppt/slides/slide9.xml><?xml version="1.0" encoding="utf-8"?>
+<file path=ppt/slides/slide8.xml><?xml version="1.0" encoding="utf-8"?>
 <p:sld xmlns:a="http://schemas.openxmlformats.org/drawingml/2006/main" xmlns:r="http://schemas.openxmlformats.org/officeDocument/2006/relationships" xmlns:p="http://schemas.openxmlformats.org/presentationml/2006/main">
   <p:cSld>
     <p:spTree>
@@ -12419,7 +11475,7 @@
           </a:ln>
           <a:extLst>
             <a:ext uri="{C572A759-6A51-4108-AA02-DFA0A04FC94B}">
-              <ma14:wrappingTextBoxFlag xmlns:ma14="http://schemas.microsoft.com/office/mac/drawingml/2011/main" xmlns:a14="http://schemas.microsoft.com/office/drawing/2010/main" xmlns:m="http://schemas.openxmlformats.org/officeDocument/2006/math" xmlns="" val="1"/>
+              <ma14:wrappingTextBoxFlag xmlns="" xmlns:m="http://schemas.openxmlformats.org/officeDocument/2006/math" xmlns:a14="http://schemas.microsoft.com/office/drawing/2010/main" xmlns:ma14="http://schemas.microsoft.com/office/mac/drawingml/2011/main" val="1"/>
             </a:ext>
           </a:extLst>
         </p:spPr>
@@ -12455,10 +11511,10 @@
         </p:nvGrpSpPr>
         <p:grpSpPr>
           <a:xfrm>
-            <a:off x="751824" y="1784186"/>
-            <a:ext cx="1928815" cy="1985964"/>
-            <a:chOff x="0" y="0"/>
-            <a:chExt cx="1928813" cy="1985963"/>
+            <a:off x="751822" y="1784184"/>
+            <a:ext cx="1928819" cy="1985968"/>
+            <a:chOff x="-2" y="-2"/>
+            <a:chExt cx="1928817" cy="1985967"/>
           </a:xfrm>
         </p:grpSpPr>
         <p:grpSp>
@@ -12469,10 +11525,10 @@
           </p:nvGrpSpPr>
           <p:grpSpPr>
             <a:xfrm>
-              <a:off x="-1" y="-1"/>
-              <a:ext cx="1928815" cy="1985965"/>
-              <a:chOff x="0" y="0"/>
-              <a:chExt cx="1928813" cy="1985963"/>
+              <a:off x="-2" y="-2"/>
+              <a:ext cx="1928817" cy="1985967"/>
+              <a:chOff x="-1" y="-1"/>
+              <a:chExt cx="1928815" cy="1985965"/>
             </a:xfrm>
           </p:grpSpPr>
           <p:sp>
@@ -12535,7 +11591,7 @@
               <a:effectLst/>
               <a:extLst>
                 <a:ext uri="{C572A759-6A51-4108-AA02-DFA0A04FC94B}">
-                  <ma14:wrappingTextBoxFlag xmlns:ma14="http://schemas.microsoft.com/office/mac/drawingml/2011/main" xmlns:a14="http://schemas.microsoft.com/office/drawing/2010/main" xmlns:m="http://schemas.openxmlformats.org/officeDocument/2006/math" xmlns="" val="1"/>
+                  <ma14:wrappingTextBoxFlag xmlns="" xmlns:m="http://schemas.openxmlformats.org/officeDocument/2006/math" xmlns:a14="http://schemas.microsoft.com/office/drawing/2010/main" xmlns:ma14="http://schemas.microsoft.com/office/mac/drawingml/2011/main" val="1"/>
                 </a:ext>
               </a:extLst>
             </p:spPr>
@@ -12578,7 +11634,7 @@
             <a:effectLst/>
             <a:extLst>
               <a:ext uri="{C572A759-6A51-4108-AA02-DFA0A04FC94B}">
-                <ma14:wrappingTextBoxFlag xmlns:ma14="http://schemas.microsoft.com/office/mac/drawingml/2011/main" xmlns:a14="http://schemas.microsoft.com/office/drawing/2010/main" xmlns:m="http://schemas.openxmlformats.org/officeDocument/2006/math" xmlns="" val="1"/>
+                <ma14:wrappingTextBoxFlag xmlns="" xmlns:m="http://schemas.openxmlformats.org/officeDocument/2006/math" xmlns:a14="http://schemas.microsoft.com/office/drawing/2010/main" xmlns:ma14="http://schemas.microsoft.com/office/mac/drawingml/2011/main" val="1"/>
               </a:ext>
             </a:extLst>
           </p:spPr>
@@ -12612,10 +11668,10 @@
         </p:nvGrpSpPr>
         <p:grpSpPr>
           <a:xfrm>
-            <a:off x="3135526" y="1798532"/>
-            <a:ext cx="1928814" cy="1985964"/>
-            <a:chOff x="0" y="0"/>
-            <a:chExt cx="1928813" cy="1985963"/>
+            <a:off x="3135524" y="1798530"/>
+            <a:ext cx="1928818" cy="1985968"/>
+            <a:chOff x="-2" y="-2"/>
+            <a:chExt cx="1928817" cy="1985967"/>
           </a:xfrm>
         </p:grpSpPr>
         <p:grpSp>
@@ -12626,10 +11682,10 @@
           </p:nvGrpSpPr>
           <p:grpSpPr>
             <a:xfrm>
-              <a:off x="-1" y="-1"/>
-              <a:ext cx="1928815" cy="1985965"/>
-              <a:chOff x="0" y="0"/>
-              <a:chExt cx="1928813" cy="1985963"/>
+              <a:off x="-2" y="-2"/>
+              <a:ext cx="1928817" cy="1985967"/>
+              <a:chOff x="-1" y="-1"/>
+              <a:chExt cx="1928815" cy="1985965"/>
             </a:xfrm>
           </p:grpSpPr>
           <p:sp>
@@ -12692,7 +11748,7 @@
               <a:effectLst/>
               <a:extLst>
                 <a:ext uri="{C572A759-6A51-4108-AA02-DFA0A04FC94B}">
-                  <ma14:wrappingTextBoxFlag xmlns:ma14="http://schemas.microsoft.com/office/mac/drawingml/2011/main" xmlns:a14="http://schemas.microsoft.com/office/drawing/2010/main" xmlns:m="http://schemas.openxmlformats.org/officeDocument/2006/math" xmlns="" val="1"/>
+                  <ma14:wrappingTextBoxFlag xmlns="" xmlns:m="http://schemas.openxmlformats.org/officeDocument/2006/math" xmlns:a14="http://schemas.microsoft.com/office/drawing/2010/main" xmlns:ma14="http://schemas.microsoft.com/office/mac/drawingml/2011/main" val="1"/>
                 </a:ext>
               </a:extLst>
             </p:spPr>
@@ -12735,7 +11791,7 @@
             <a:effectLst/>
             <a:extLst>
               <a:ext uri="{C572A759-6A51-4108-AA02-DFA0A04FC94B}">
-                <ma14:wrappingTextBoxFlag xmlns:ma14="http://schemas.microsoft.com/office/mac/drawingml/2011/main" xmlns:a14="http://schemas.microsoft.com/office/drawing/2010/main" xmlns:m="http://schemas.openxmlformats.org/officeDocument/2006/math" xmlns="" val="1"/>
+                <ma14:wrappingTextBoxFlag xmlns="" xmlns:m="http://schemas.openxmlformats.org/officeDocument/2006/math" xmlns:a14="http://schemas.microsoft.com/office/drawing/2010/main" xmlns:ma14="http://schemas.microsoft.com/office/mac/drawingml/2011/main" val="1"/>
               </a:ext>
             </a:extLst>
           </p:spPr>
@@ -12769,10 +11825,10 @@
         </p:nvGrpSpPr>
         <p:grpSpPr>
           <a:xfrm>
-            <a:off x="5915159" y="1784186"/>
-            <a:ext cx="1928814" cy="1985964"/>
-            <a:chOff x="0" y="0"/>
-            <a:chExt cx="1928813" cy="1985963"/>
+            <a:off x="5915157" y="1784184"/>
+            <a:ext cx="1928818" cy="1985968"/>
+            <a:chOff x="-2" y="-2"/>
+            <a:chExt cx="1928817" cy="1985967"/>
           </a:xfrm>
         </p:grpSpPr>
         <p:grpSp>
@@ -12783,10 +11839,10 @@
           </p:nvGrpSpPr>
           <p:grpSpPr>
             <a:xfrm>
-              <a:off x="-1" y="-1"/>
-              <a:ext cx="1928815" cy="1985965"/>
-              <a:chOff x="0" y="0"/>
-              <a:chExt cx="1928813" cy="1985963"/>
+              <a:off x="-2" y="-2"/>
+              <a:ext cx="1928817" cy="1985967"/>
+              <a:chOff x="-1" y="-1"/>
+              <a:chExt cx="1928815" cy="1985965"/>
             </a:xfrm>
           </p:grpSpPr>
           <p:sp>
@@ -12849,7 +11905,7 @@
               <a:effectLst/>
               <a:extLst>
                 <a:ext uri="{C572A759-6A51-4108-AA02-DFA0A04FC94B}">
-                  <ma14:wrappingTextBoxFlag xmlns:ma14="http://schemas.microsoft.com/office/mac/drawingml/2011/main" xmlns:a14="http://schemas.microsoft.com/office/drawing/2010/main" xmlns:m="http://schemas.openxmlformats.org/officeDocument/2006/math" xmlns="" val="1"/>
+                  <ma14:wrappingTextBoxFlag xmlns="" xmlns:m="http://schemas.openxmlformats.org/officeDocument/2006/math" xmlns:a14="http://schemas.microsoft.com/office/drawing/2010/main" xmlns:ma14="http://schemas.microsoft.com/office/mac/drawingml/2011/main" val="1"/>
                 </a:ext>
               </a:extLst>
             </p:spPr>
@@ -12892,7 +11948,7 @@
             <a:effectLst/>
             <a:extLst>
               <a:ext uri="{C572A759-6A51-4108-AA02-DFA0A04FC94B}">
-                <ma14:wrappingTextBoxFlag xmlns:ma14="http://schemas.microsoft.com/office/mac/drawingml/2011/main" xmlns:a14="http://schemas.microsoft.com/office/drawing/2010/main" xmlns:m="http://schemas.openxmlformats.org/officeDocument/2006/math" xmlns="" val="1"/>
+                <ma14:wrappingTextBoxFlag xmlns="" xmlns:m="http://schemas.openxmlformats.org/officeDocument/2006/math" xmlns:a14="http://schemas.microsoft.com/office/drawing/2010/main" xmlns:ma14="http://schemas.microsoft.com/office/mac/drawingml/2011/main" val="1"/>
               </a:ext>
             </a:extLst>
           </p:spPr>
@@ -12937,7 +11993,7 @@
           </a:ln>
           <a:extLst>
             <a:ext uri="{C572A759-6A51-4108-AA02-DFA0A04FC94B}">
-              <ma14:wrappingTextBoxFlag xmlns:ma14="http://schemas.microsoft.com/office/mac/drawingml/2011/main" xmlns:a14="http://schemas.microsoft.com/office/drawing/2010/main" xmlns:m="http://schemas.openxmlformats.org/officeDocument/2006/math" xmlns="" val="1"/>
+              <ma14:wrappingTextBoxFlag xmlns="" xmlns:m="http://schemas.openxmlformats.org/officeDocument/2006/math" xmlns:a14="http://schemas.microsoft.com/office/drawing/2010/main" xmlns:ma14="http://schemas.microsoft.com/office/mac/drawingml/2011/main" val="1"/>
             </a:ext>
           </a:extLst>
         </p:spPr>
@@ -12981,7 +12037,7 @@
           </a:ln>
           <a:extLst>
             <a:ext uri="{C572A759-6A51-4108-AA02-DFA0A04FC94B}">
-              <ma14:wrappingTextBoxFlag xmlns:ma14="http://schemas.microsoft.com/office/mac/drawingml/2011/main" xmlns:a14="http://schemas.microsoft.com/office/drawing/2010/main" xmlns:m="http://schemas.openxmlformats.org/officeDocument/2006/math" xmlns="" val="1"/>
+              <ma14:wrappingTextBoxFlag xmlns="" xmlns:m="http://schemas.openxmlformats.org/officeDocument/2006/math" xmlns:a14="http://schemas.microsoft.com/office/drawing/2010/main" xmlns:ma14="http://schemas.microsoft.com/office/mac/drawingml/2011/main" val="1"/>
             </a:ext>
           </a:extLst>
         </p:spPr>
@@ -13025,7 +12081,7 @@
           </a:ln>
           <a:extLst>
             <a:ext uri="{C572A759-6A51-4108-AA02-DFA0A04FC94B}">
-              <ma14:wrappingTextBoxFlag xmlns:ma14="http://schemas.microsoft.com/office/mac/drawingml/2011/main" xmlns:a14="http://schemas.microsoft.com/office/drawing/2010/main" xmlns:m="http://schemas.openxmlformats.org/officeDocument/2006/math" xmlns="" val="1"/>
+              <ma14:wrappingTextBoxFlag xmlns="" xmlns:m="http://schemas.openxmlformats.org/officeDocument/2006/math" xmlns:a14="http://schemas.microsoft.com/office/drawing/2010/main" xmlns:ma14="http://schemas.microsoft.com/office/mac/drawingml/2011/main" val="1"/>
             </a:ext>
           </a:extLst>
         </p:spPr>
@@ -13049,6 +12105,813 @@
           </a:p>
         </p:txBody>
       </p:sp>
+    </p:spTree>
+  </p:cSld>
+  <p:clrMapOvr>
+    <a:masterClrMapping/>
+  </p:clrMapOvr>
+  <p:transition spd="med"/>
+</p:sld>
+</file>
+
+<file path=ppt/slides/slide9.xml><?xml version="1.0" encoding="utf-8"?>
+<p:sld xmlns:a="http://schemas.openxmlformats.org/drawingml/2006/main" xmlns:r="http://schemas.openxmlformats.org/officeDocument/2006/relationships" xmlns:p="http://schemas.openxmlformats.org/presentationml/2006/main">
+  <p:cSld>
+    <p:spTree>
+      <p:nvGrpSpPr>
+        <p:cNvPr id="1" name=""/>
+        <p:cNvGrpSpPr/>
+        <p:nvPr/>
+      </p:nvGrpSpPr>
+      <p:grpSpPr>
+        <a:xfrm>
+          <a:off x="0" y="0"/>
+          <a:ext cx="0" cy="0"/>
+          <a:chOff x="0" y="0"/>
+          <a:chExt cx="0" cy="0"/>
+        </a:xfrm>
+      </p:grpSpPr>
+      <p:pic>
+        <p:nvPicPr>
+          <p:cNvPr id="266" name="Fond FC Barcelone" descr="Fond FC Barcelone"/>
+          <p:cNvPicPr>
+            <a:picLocks noChangeAspect="1"/>
+          </p:cNvPicPr>
+          <p:nvPr/>
+        </p:nvPicPr>
+        <p:blipFill>
+          <a:blip r:embed="rId2"/>
+          <a:srcRect t="7813" b="7812"/>
+          <a:stretch>
+            <a:fillRect/>
+          </a:stretch>
+        </p:blipFill>
+        <p:spPr>
+          <a:xfrm>
+            <a:off x="0" y="-1"/>
+            <a:ext cx="9144000" cy="5143502"/>
+          </a:xfrm>
+          <a:prstGeom prst="rect">
+            <a:avLst/>
+          </a:prstGeom>
+          <a:ln w="12700">
+            <a:miter lim="400000"/>
+          </a:ln>
+        </p:spPr>
+      </p:pic>
+      <p:sp>
+        <p:nvSpPr>
+          <p:cNvPr id="267" name="Google Shape;75;p16"/>
+          <p:cNvSpPr txBox="1">
+            <a:spLocks noGrp="1"/>
+          </p:cNvSpPr>
+          <p:nvPr>
+            <p:ph type="title"/>
+          </p:nvPr>
+        </p:nvSpPr>
+        <p:spPr>
+          <a:xfrm>
+            <a:off x="1192664" y="403309"/>
+            <a:ext cx="5315101" cy="533101"/>
+          </a:xfrm>
+          <a:prstGeom prst="rect">
+            <a:avLst/>
+          </a:prstGeom>
+        </p:spPr>
+        <p:txBody>
+          <a:bodyPr/>
+          <a:lstStyle>
+            <a:lvl1pPr defTabSz="822959">
+              <a:defRPr sz="2250">
+                <a:solidFill>
+                  <a:srgbClr val="0E3449"/>
+                </a:solidFill>
+                <a:latin typeface="Inter SemiBold"/>
+                <a:ea typeface="Inter SemiBold"/>
+                <a:cs typeface="Inter SemiBold"/>
+                <a:sym typeface="Inter SemiBold"/>
+              </a:defRPr>
+            </a:lvl1pPr>
+          </a:lstStyle>
+          <a:p>
+            <a:r>
+              <a:t>Architecture - Entrainement</a:t>
+            </a:r>
+          </a:p>
+        </p:txBody>
+      </p:sp>
+      <p:pic>
+        <p:nvPicPr>
+          <p:cNvPr id="268" name="Google Shape;76;p16" descr="Google Shape;76;p16"/>
+          <p:cNvPicPr>
+            <a:picLocks noChangeAspect="1"/>
+          </p:cNvPicPr>
+          <p:nvPr/>
+        </p:nvPicPr>
+        <p:blipFill>
+          <a:blip r:embed="rId3"/>
+          <a:stretch>
+            <a:fillRect/>
+          </a:stretch>
+        </p:blipFill>
+        <p:spPr>
+          <a:xfrm>
+            <a:off x="463375" y="482852"/>
+            <a:ext cx="576901" cy="385905"/>
+          </a:xfrm>
+          <a:prstGeom prst="rect">
+            <a:avLst/>
+          </a:prstGeom>
+          <a:ln w="12700">
+            <a:miter lim="400000"/>
+          </a:ln>
+        </p:spPr>
+      </p:pic>
+      <p:sp>
+        <p:nvSpPr>
+          <p:cNvPr id="269" name="Google Shape;77;p16"/>
+          <p:cNvSpPr/>
+          <p:nvPr/>
+        </p:nvSpPr>
+        <p:spPr>
+          <a:xfrm>
+            <a:off x="10224" y="4892025"/>
+            <a:ext cx="9144001" cy="251400"/>
+          </a:xfrm>
+          <a:prstGeom prst="rect">
+            <a:avLst/>
+          </a:prstGeom>
+          <a:solidFill>
+            <a:srgbClr val="C3FFFC"/>
+          </a:solidFill>
+          <a:ln w="12700">
+            <a:miter lim="400000"/>
+          </a:ln>
+        </p:spPr>
+        <p:txBody>
+          <a:bodyPr lIns="45719" rIns="45719" anchor="ctr"/>
+          <a:lstStyle/>
+          <a:p>
+            <a:endParaRPr/>
+          </a:p>
+        </p:txBody>
+      </p:sp>
+      <p:grpSp>
+        <p:nvGrpSpPr>
+          <p:cNvPr id="272" name="Groupe 27"/>
+          <p:cNvGrpSpPr/>
+          <p:nvPr/>
+        </p:nvGrpSpPr>
+        <p:grpSpPr>
+          <a:xfrm>
+            <a:off x="7096703" y="1678903"/>
+            <a:ext cx="1143100" cy="1615649"/>
+            <a:chOff x="0" y="0"/>
+            <a:chExt cx="1143099" cy="1615648"/>
+          </a:xfrm>
+        </p:grpSpPr>
+        <p:pic>
+          <p:nvPicPr>
+            <p:cNvPr id="270" name="Image 7" descr="Image 7"/>
+            <p:cNvPicPr>
+              <a:picLocks noChangeAspect="1"/>
+            </p:cNvPicPr>
+            <p:nvPr/>
+          </p:nvPicPr>
+          <p:blipFill>
+            <a:blip r:embed="rId4"/>
+            <a:stretch>
+              <a:fillRect/>
+            </a:stretch>
+          </p:blipFill>
+          <p:spPr>
+            <a:xfrm>
+              <a:off x="0" y="396341"/>
+              <a:ext cx="1143100" cy="1219307"/>
+            </a:xfrm>
+            <a:prstGeom prst="rect">
+              <a:avLst/>
+            </a:prstGeom>
+            <a:ln w="12700" cap="flat">
+              <a:noFill/>
+              <a:miter lim="400000"/>
+            </a:ln>
+            <a:effectLst/>
+          </p:spPr>
+        </p:pic>
+        <p:pic>
+          <p:nvPicPr>
+            <p:cNvPr id="271" name="Image 13" descr="Image 13"/>
+            <p:cNvPicPr>
+              <a:picLocks noChangeAspect="1"/>
+            </p:cNvPicPr>
+            <p:nvPr/>
+          </p:nvPicPr>
+          <p:blipFill>
+            <a:blip r:embed="rId5"/>
+            <a:stretch>
+              <a:fillRect/>
+            </a:stretch>
+          </p:blipFill>
+          <p:spPr>
+            <a:xfrm>
+              <a:off x="220147" y="-1"/>
+              <a:ext cx="844692" cy="530697"/>
+            </a:xfrm>
+            <a:prstGeom prst="rect">
+              <a:avLst/>
+            </a:prstGeom>
+            <a:ln w="12700" cap="flat">
+              <a:noFill/>
+              <a:miter lim="400000"/>
+            </a:ln>
+            <a:effectLst/>
+          </p:spPr>
+        </p:pic>
+      </p:grpSp>
+      <p:grpSp>
+        <p:nvGrpSpPr>
+          <p:cNvPr id="276" name="Groupe 17"/>
+          <p:cNvGrpSpPr/>
+          <p:nvPr/>
+        </p:nvGrpSpPr>
+        <p:grpSpPr>
+          <a:xfrm>
+            <a:off x="2546643" y="1488950"/>
+            <a:ext cx="2268736" cy="2356463"/>
+            <a:chOff x="0" y="0"/>
+            <a:chExt cx="2268734" cy="2356463"/>
+          </a:xfrm>
+        </p:grpSpPr>
+        <p:pic>
+          <p:nvPicPr>
+            <p:cNvPr id="273" name="Image 2" descr="Image 2"/>
+            <p:cNvPicPr>
+              <a:picLocks noChangeAspect="1"/>
+            </p:cNvPicPr>
+            <p:nvPr/>
+          </p:nvPicPr>
+          <p:blipFill>
+            <a:blip r:embed="rId6"/>
+            <a:stretch>
+              <a:fillRect/>
+            </a:stretch>
+          </p:blipFill>
+          <p:spPr>
+            <a:xfrm>
+              <a:off x="143865" y="837871"/>
+              <a:ext cx="1196483" cy="577613"/>
+            </a:xfrm>
+            <a:prstGeom prst="rect">
+              <a:avLst/>
+            </a:prstGeom>
+            <a:ln w="12700" cap="flat">
+              <a:noFill/>
+              <a:miter lim="400000"/>
+            </a:ln>
+            <a:effectLst/>
+          </p:spPr>
+        </p:pic>
+        <p:pic>
+          <p:nvPicPr>
+            <p:cNvPr id="274" name="Image 15" descr="Image 15"/>
+            <p:cNvPicPr>
+              <a:picLocks noChangeAspect="1"/>
+            </p:cNvPicPr>
+            <p:nvPr/>
+          </p:nvPicPr>
+          <p:blipFill>
+            <a:blip r:embed="rId7"/>
+            <a:stretch>
+              <a:fillRect/>
+            </a:stretch>
+          </p:blipFill>
+          <p:spPr>
+            <a:xfrm>
+              <a:off x="392206" y="0"/>
+              <a:ext cx="699801" cy="627208"/>
+            </a:xfrm>
+            <a:prstGeom prst="rect">
+              <a:avLst/>
+            </a:prstGeom>
+            <a:ln w="12700" cap="flat">
+              <a:noFill/>
+              <a:miter lim="400000"/>
+            </a:ln>
+            <a:effectLst/>
+          </p:spPr>
+        </p:pic>
+        <p:sp>
+          <p:nvSpPr>
+            <p:cNvPr id="275" name="ZoneTexte 16"/>
+            <p:cNvSpPr txBox="1"/>
+            <p:nvPr/>
+          </p:nvSpPr>
+          <p:spPr>
+            <a:xfrm>
+              <a:off x="0" y="1617322"/>
+              <a:ext cx="2268734" cy="739141"/>
+            </a:xfrm>
+            <a:prstGeom prst="rect">
+              <a:avLst/>
+            </a:prstGeom>
+            <a:noFill/>
+            <a:ln w="12700" cap="flat">
+              <a:noFill/>
+              <a:miter lim="400000"/>
+            </a:ln>
+            <a:effectLst/>
+            <a:extLst>
+              <a:ext uri="{C572A759-6A51-4108-AA02-DFA0A04FC94B}">
+                <ma14:wrappingTextBoxFlag xmlns="" xmlns:m="http://schemas.openxmlformats.org/officeDocument/2006/math" xmlns:a14="http://schemas.microsoft.com/office/drawing/2010/main" xmlns:ma14="http://schemas.microsoft.com/office/mac/drawingml/2011/main" val="1"/>
+              </a:ext>
+            </a:extLst>
+          </p:spPr>
+          <p:txBody>
+            <a:bodyPr wrap="none" lIns="45719" tIns="45719" rIns="45719" bIns="45719" numCol="1" anchor="t">
+              <a:spAutoFit/>
+            </a:bodyPr>
+            <a:lstStyle/>
+            <a:p>
+              <a:pPr>
+                <a:defRPr>
+                  <a:latin typeface="Inter"/>
+                  <a:ea typeface="Inter"/>
+                  <a:cs typeface="Inter"/>
+                  <a:sym typeface="Inter"/>
+                </a:defRPr>
+              </a:pPr>
+              <a:r>
+                <a:t>Construction dataset</a:t>
+              </a:r>
+              <a:br/>
+              <a:r>
+                <a:t>et entrainement du modèle </a:t>
+              </a:r>
+            </a:p>
+            <a:p>
+              <a:pPr>
+                <a:defRPr>
+                  <a:latin typeface="Inter"/>
+                  <a:ea typeface="Inter"/>
+                  <a:cs typeface="Inter"/>
+                  <a:sym typeface="Inter"/>
+                </a:defRPr>
+              </a:pPr>
+              <a:r>
+                <a:t>en Local</a:t>
+              </a:r>
+            </a:p>
+          </p:txBody>
+        </p:sp>
+      </p:grpSp>
+      <p:sp>
+        <p:nvSpPr>
+          <p:cNvPr id="291" name="Fleche FastAPI vers Render"/>
+          <p:cNvSpPr/>
+          <p:nvPr/>
+        </p:nvSpPr>
+        <p:spPr>
+          <a:xfrm>
+            <a:off x="1664018" y="2785794"/>
+            <a:ext cx="1026492" cy="122923"/>
+          </a:xfrm>
+          <a:custGeom>
+            <a:avLst/>
+            <a:gdLst/>
+            <a:ahLst/>
+            <a:cxnLst>
+              <a:cxn ang="0">
+                <a:pos x="wd2" y="hd2"/>
+              </a:cxn>
+              <a:cxn ang="5400000">
+                <a:pos x="wd2" y="hd2"/>
+              </a:cxn>
+              <a:cxn ang="10800000">
+                <a:pos x="wd2" y="hd2"/>
+              </a:cxn>
+              <a:cxn ang="16200000">
+                <a:pos x="wd2" y="hd2"/>
+              </a:cxn>
+            </a:cxnLst>
+            <a:rect l="0" t="0" r="r" b="b"/>
+            <a:pathLst>
+              <a:path w="21600" h="21600" extrusionOk="0">
+                <a:moveTo>
+                  <a:pt x="0" y="21600"/>
+                </a:moveTo>
+                <a:lnTo>
+                  <a:pt x="21600" y="0"/>
+                </a:lnTo>
+              </a:path>
+            </a:pathLst>
+          </a:custGeom>
+          <a:ln w="19050" cap="rnd">
+            <a:solidFill>
+              <a:srgbClr val="015955"/>
+            </a:solidFill>
+            <a:tailEnd type="triangle"/>
+          </a:ln>
+        </p:spPr>
+        <p:txBody>
+          <a:bodyPr/>
+          <a:lstStyle/>
+          <a:p>
+            <a:endParaRPr/>
+          </a:p>
+        </p:txBody>
+      </p:sp>
+      <p:sp>
+        <p:nvSpPr>
+          <p:cNvPr id="292" name="Fleche FastAPI vers Render"/>
+          <p:cNvSpPr/>
+          <p:nvPr/>
+        </p:nvSpPr>
+        <p:spPr>
+          <a:xfrm>
+            <a:off x="3886991" y="2579290"/>
+            <a:ext cx="863916" cy="70972"/>
+          </a:xfrm>
+          <a:custGeom>
+            <a:avLst/>
+            <a:gdLst/>
+            <a:ahLst/>
+            <a:cxnLst>
+              <a:cxn ang="0">
+                <a:pos x="wd2" y="hd2"/>
+              </a:cxn>
+              <a:cxn ang="5400000">
+                <a:pos x="wd2" y="hd2"/>
+              </a:cxn>
+              <a:cxn ang="10800000">
+                <a:pos x="wd2" y="hd2"/>
+              </a:cxn>
+              <a:cxn ang="16200000">
+                <a:pos x="wd2" y="hd2"/>
+              </a:cxn>
+            </a:cxnLst>
+            <a:rect l="0" t="0" r="r" b="b"/>
+            <a:pathLst>
+              <a:path w="21600" h="21600" extrusionOk="0">
+                <a:moveTo>
+                  <a:pt x="0" y="21600"/>
+                </a:moveTo>
+                <a:lnTo>
+                  <a:pt x="21600" y="0"/>
+                </a:lnTo>
+              </a:path>
+            </a:pathLst>
+          </a:custGeom>
+          <a:ln w="19050" cap="rnd">
+            <a:solidFill>
+              <a:srgbClr val="015955"/>
+            </a:solidFill>
+            <a:tailEnd type="triangle"/>
+          </a:ln>
+        </p:spPr>
+        <p:txBody>
+          <a:bodyPr/>
+          <a:lstStyle/>
+          <a:p>
+            <a:endParaRPr/>
+          </a:p>
+        </p:txBody>
+      </p:sp>
+      <p:sp>
+        <p:nvSpPr>
+          <p:cNvPr id="293" name="Fleche FastAPI vers Render"/>
+          <p:cNvSpPr/>
+          <p:nvPr/>
+        </p:nvSpPr>
+        <p:spPr>
+          <a:xfrm>
+            <a:off x="6259797" y="2494809"/>
+            <a:ext cx="836907" cy="11836"/>
+          </a:xfrm>
+          <a:custGeom>
+            <a:avLst/>
+            <a:gdLst/>
+            <a:ahLst/>
+            <a:cxnLst>
+              <a:cxn ang="0">
+                <a:pos x="wd2" y="hd2"/>
+              </a:cxn>
+              <a:cxn ang="5400000">
+                <a:pos x="wd2" y="hd2"/>
+              </a:cxn>
+              <a:cxn ang="10800000">
+                <a:pos x="wd2" y="hd2"/>
+              </a:cxn>
+              <a:cxn ang="16200000">
+                <a:pos x="wd2" y="hd2"/>
+              </a:cxn>
+            </a:cxnLst>
+            <a:rect l="0" t="0" r="r" b="b"/>
+            <a:pathLst>
+              <a:path w="21600" h="21600" extrusionOk="0">
+                <a:moveTo>
+                  <a:pt x="0" y="21600"/>
+                </a:moveTo>
+                <a:lnTo>
+                  <a:pt x="21600" y="0"/>
+                </a:lnTo>
+              </a:path>
+            </a:pathLst>
+          </a:custGeom>
+          <a:ln w="19050" cap="rnd">
+            <a:solidFill>
+              <a:srgbClr val="015955"/>
+            </a:solidFill>
+            <a:tailEnd type="triangle"/>
+          </a:ln>
+        </p:spPr>
+        <p:txBody>
+          <a:bodyPr/>
+          <a:lstStyle/>
+          <a:p>
+            <a:endParaRPr/>
+          </a:p>
+        </p:txBody>
+      </p:sp>
+      <p:grpSp>
+        <p:nvGrpSpPr>
+          <p:cNvPr id="282" name="Groupe 36"/>
+          <p:cNvGrpSpPr/>
+          <p:nvPr/>
+        </p:nvGrpSpPr>
+        <p:grpSpPr>
+          <a:xfrm>
+            <a:off x="904198" y="2278927"/>
+            <a:ext cx="759821" cy="1350567"/>
+            <a:chOff x="0" y="0"/>
+            <a:chExt cx="759819" cy="1350566"/>
+          </a:xfrm>
+        </p:grpSpPr>
+        <p:pic>
+          <p:nvPicPr>
+            <p:cNvPr id="280" name="Image 9" descr="Image 9"/>
+            <p:cNvPicPr>
+              <a:picLocks noChangeAspect="1"/>
+            </p:cNvPicPr>
+            <p:nvPr/>
+          </p:nvPicPr>
+          <p:blipFill>
+            <a:blip r:embed="rId8"/>
+            <a:stretch>
+              <a:fillRect/>
+            </a:stretch>
+          </p:blipFill>
+          <p:spPr>
+            <a:xfrm>
+              <a:off x="0" y="-1"/>
+              <a:ext cx="759820" cy="698366"/>
+            </a:xfrm>
+            <a:prstGeom prst="rect">
+              <a:avLst/>
+            </a:prstGeom>
+            <a:ln w="12700" cap="flat">
+              <a:noFill/>
+              <a:miter lim="400000"/>
+            </a:ln>
+            <a:effectLst/>
+          </p:spPr>
+        </p:pic>
+        <p:pic>
+          <p:nvPicPr>
+            <p:cNvPr id="281" name="Image 35" descr="Image 35"/>
+            <p:cNvPicPr>
+              <a:picLocks noChangeAspect="1"/>
+            </p:cNvPicPr>
+            <p:nvPr/>
+          </p:nvPicPr>
+          <p:blipFill>
+            <a:blip r:embed="rId9"/>
+            <a:stretch>
+              <a:fillRect/>
+            </a:stretch>
+          </p:blipFill>
+          <p:spPr>
+            <a:xfrm>
+              <a:off x="0" y="572214"/>
+              <a:ext cx="759820" cy="778353"/>
+            </a:xfrm>
+            <a:prstGeom prst="rect">
+              <a:avLst/>
+            </a:prstGeom>
+            <a:ln w="12700" cap="flat">
+              <a:noFill/>
+              <a:miter lim="400000"/>
+            </a:ln>
+            <a:effectLst/>
+          </p:spPr>
+        </p:pic>
+      </p:grpSp>
+      <p:grpSp>
+        <p:nvGrpSpPr>
+          <p:cNvPr id="289" name="Groupe 39"/>
+          <p:cNvGrpSpPr/>
+          <p:nvPr/>
+        </p:nvGrpSpPr>
+        <p:grpSpPr>
+          <a:xfrm>
+            <a:off x="4750906" y="1740510"/>
+            <a:ext cx="1508895" cy="1553608"/>
+            <a:chOff x="0" y="0"/>
+            <a:chExt cx="1508894" cy="1553606"/>
+          </a:xfrm>
+        </p:grpSpPr>
+        <p:grpSp>
+          <p:nvGrpSpPr>
+            <p:cNvPr id="287" name="Groupe 26"/>
+            <p:cNvGrpSpPr/>
+            <p:nvPr/>
+          </p:nvGrpSpPr>
+          <p:grpSpPr>
+            <a:xfrm>
+              <a:off x="0" y="0"/>
+              <a:ext cx="1508894" cy="1553606"/>
+              <a:chOff x="0" y="0"/>
+              <a:chExt cx="1508893" cy="1553606"/>
+            </a:xfrm>
+          </p:grpSpPr>
+          <p:grpSp>
+            <p:nvGrpSpPr>
+              <p:cNvPr id="285" name="Groupe 3"/>
+              <p:cNvGrpSpPr/>
+              <p:nvPr/>
+            </p:nvGrpSpPr>
+            <p:grpSpPr>
+              <a:xfrm>
+                <a:off x="0" y="484198"/>
+                <a:ext cx="1508893" cy="1069408"/>
+                <a:chOff x="0" y="0"/>
+                <a:chExt cx="1508892" cy="1069407"/>
+              </a:xfrm>
+            </p:grpSpPr>
+            <p:pic>
+              <p:nvPicPr>
+                <p:cNvPr id="283" name="Image 4" descr="Image 4"/>
+                <p:cNvPicPr>
+                  <a:picLocks noChangeAspect="1"/>
+                </p:cNvPicPr>
+                <p:nvPr/>
+              </p:nvPicPr>
+              <p:blipFill>
+                <a:blip r:embed="rId10"/>
+                <a:stretch>
+                  <a:fillRect/>
+                </a:stretch>
+              </p:blipFill>
+              <p:spPr>
+                <a:xfrm>
+                  <a:off x="0" y="0"/>
+                  <a:ext cx="1508892" cy="762067"/>
+                </a:xfrm>
+                <a:prstGeom prst="rect">
+                  <a:avLst/>
+                </a:prstGeom>
+                <a:ln w="12700" cap="flat">
+                  <a:noFill/>
+                  <a:miter lim="400000"/>
+                </a:ln>
+                <a:effectLst/>
+              </p:spPr>
+            </p:pic>
+            <p:sp>
+              <p:nvSpPr>
+                <p:cNvPr id="284" name="ZoneTexte 5"/>
+                <p:cNvSpPr txBox="1"/>
+                <p:nvPr/>
+              </p:nvSpPr>
+              <p:spPr>
+                <a:xfrm>
+                  <a:off x="345738" y="762066"/>
+                  <a:ext cx="779400" cy="307341"/>
+                </a:xfrm>
+                <a:prstGeom prst="rect">
+                  <a:avLst/>
+                </a:prstGeom>
+                <a:noFill/>
+                <a:ln w="12700" cap="flat">
+                  <a:noFill/>
+                  <a:miter lim="400000"/>
+                </a:ln>
+                <a:effectLst/>
+                <a:extLst>
+                  <a:ext uri="{C572A759-6A51-4108-AA02-DFA0A04FC94B}">
+                    <ma14:wrappingTextBoxFlag xmlns="" xmlns:m="http://schemas.openxmlformats.org/officeDocument/2006/math" xmlns:a14="http://schemas.microsoft.com/office/drawing/2010/main" xmlns:ma14="http://schemas.microsoft.com/office/mac/drawingml/2011/main" val="1"/>
+                  </a:ext>
+                </a:extLst>
+              </p:spPr>
+              <p:txBody>
+                <a:bodyPr wrap="none" lIns="45719" tIns="45719" rIns="45719" bIns="45719" numCol="1" anchor="t">
+                  <a:spAutoFit/>
+                </a:bodyPr>
+                <a:lstStyle>
+                  <a:lvl1pPr>
+                    <a:defRPr>
+                      <a:latin typeface="Inter"/>
+                      <a:ea typeface="Inter"/>
+                      <a:cs typeface="Inter"/>
+                      <a:sym typeface="Inter"/>
+                    </a:defRPr>
+                  </a:lvl1pPr>
+                </a:lstStyle>
+                <a:p>
+                  <a:r>
+                    <a:t>Tracking</a:t>
+                  </a:r>
+                </a:p>
+              </p:txBody>
+            </p:sp>
+          </p:grpSp>
+          <p:pic>
+            <p:nvPicPr>
+              <p:cNvPr id="286" name="Image 11" descr="Image 11"/>
+              <p:cNvPicPr>
+                <a:picLocks noChangeAspect="1"/>
+              </p:cNvPicPr>
+              <p:nvPr/>
+            </p:nvPicPr>
+            <p:blipFill>
+              <a:blip r:embed="rId11"/>
+              <a:stretch>
+                <a:fillRect/>
+              </a:stretch>
+            </p:blipFill>
+            <p:spPr>
+              <a:xfrm>
+                <a:off x="390419" y="0"/>
+                <a:ext cx="728055" cy="599032"/>
+              </a:xfrm>
+              <a:prstGeom prst="rect">
+                <a:avLst/>
+              </a:prstGeom>
+              <a:ln w="12700" cap="flat">
+                <a:noFill/>
+                <a:miter lim="400000"/>
+              </a:ln>
+              <a:effectLst/>
+            </p:spPr>
+          </p:pic>
+        </p:grpSp>
+        <p:pic>
+          <p:nvPicPr>
+            <p:cNvPr id="288" name="Image 38" descr="Image 38"/>
+            <p:cNvPicPr>
+              <a:picLocks noChangeAspect="1"/>
+            </p:cNvPicPr>
+            <p:nvPr/>
+          </p:nvPicPr>
+          <p:blipFill>
+            <a:blip r:embed="rId12"/>
+            <a:stretch>
+              <a:fillRect/>
+            </a:stretch>
+          </p:blipFill>
+          <p:spPr>
+            <a:xfrm>
+              <a:off x="1138058" y="320055"/>
+              <a:ext cx="351248" cy="213377"/>
+            </a:xfrm>
+            <a:prstGeom prst="rect">
+              <a:avLst/>
+            </a:prstGeom>
+            <a:ln w="12700" cap="flat">
+              <a:noFill/>
+              <a:miter lim="400000"/>
+            </a:ln>
+            <a:effectLst/>
+          </p:spPr>
+        </p:pic>
+      </p:grpSp>
+      <p:pic>
+        <p:nvPicPr>
+          <p:cNvPr id="290" name="Image 41" descr="Image 41"/>
+          <p:cNvPicPr>
+            <a:picLocks noChangeAspect="1"/>
+          </p:cNvPicPr>
+          <p:nvPr/>
+        </p:nvPicPr>
+        <p:blipFill>
+          <a:blip r:embed="rId13"/>
+          <a:stretch>
+            <a:fillRect/>
+          </a:stretch>
+        </p:blipFill>
+        <p:spPr>
+          <a:xfrm>
+            <a:off x="3092480" y="3816081"/>
+            <a:ext cx="759821" cy="410655"/>
+          </a:xfrm>
+          <a:prstGeom prst="rect">
+            <a:avLst/>
+          </a:prstGeom>
+          <a:ln w="12700">
+            <a:miter lim="400000"/>
+          </a:ln>
+        </p:spPr>
+      </p:pic>
     </p:spTree>
   </p:cSld>
   <p:clrMapOvr>

--- a/docs/FootballPredictorDemoDay20260803.pptx
+++ b/docs/FootballPredictorDemoDay20260803.pptx
@@ -77,9 +77,9 @@
         </a:solidFill>
         <a:effectLst/>
         <a:uFillTx/>
-        <a:latin typeface="+mj-lt"/>
-        <a:ea typeface="+mj-ea"/>
-        <a:cs typeface="+mj-cs"/>
+        <a:latin typeface="+mn-lt"/>
+        <a:ea typeface="+mn-ea"/>
+        <a:cs typeface="+mn-cs"/>
         <a:sym typeface="Helvetica"/>
       </a:defRPr>
     </a:lvl1pPr>
@@ -107,9 +107,9 @@
         </a:solidFill>
         <a:effectLst/>
         <a:uFillTx/>
-        <a:latin typeface="+mj-lt"/>
-        <a:ea typeface="+mj-ea"/>
-        <a:cs typeface="+mj-cs"/>
+        <a:latin typeface="+mn-lt"/>
+        <a:ea typeface="+mn-ea"/>
+        <a:cs typeface="+mn-cs"/>
         <a:sym typeface="Helvetica"/>
       </a:defRPr>
     </a:lvl2pPr>
@@ -137,9 +137,9 @@
         </a:solidFill>
         <a:effectLst/>
         <a:uFillTx/>
-        <a:latin typeface="+mj-lt"/>
-        <a:ea typeface="+mj-ea"/>
-        <a:cs typeface="+mj-cs"/>
+        <a:latin typeface="+mn-lt"/>
+        <a:ea typeface="+mn-ea"/>
+        <a:cs typeface="+mn-cs"/>
         <a:sym typeface="Helvetica"/>
       </a:defRPr>
     </a:lvl3pPr>
@@ -167,9 +167,9 @@
         </a:solidFill>
         <a:effectLst/>
         <a:uFillTx/>
-        <a:latin typeface="+mj-lt"/>
-        <a:ea typeface="+mj-ea"/>
-        <a:cs typeface="+mj-cs"/>
+        <a:latin typeface="+mn-lt"/>
+        <a:ea typeface="+mn-ea"/>
+        <a:cs typeface="+mn-cs"/>
         <a:sym typeface="Helvetica"/>
       </a:defRPr>
     </a:lvl4pPr>
@@ -197,9 +197,9 @@
         </a:solidFill>
         <a:effectLst/>
         <a:uFillTx/>
-        <a:latin typeface="+mj-lt"/>
-        <a:ea typeface="+mj-ea"/>
-        <a:cs typeface="+mj-cs"/>
+        <a:latin typeface="+mn-lt"/>
+        <a:ea typeface="+mn-ea"/>
+        <a:cs typeface="+mn-cs"/>
         <a:sym typeface="Helvetica"/>
       </a:defRPr>
     </a:lvl5pPr>
@@ -227,9 +227,9 @@
         </a:solidFill>
         <a:effectLst/>
         <a:uFillTx/>
-        <a:latin typeface="+mj-lt"/>
-        <a:ea typeface="+mj-ea"/>
-        <a:cs typeface="+mj-cs"/>
+        <a:latin typeface="+mn-lt"/>
+        <a:ea typeface="+mn-ea"/>
+        <a:cs typeface="+mn-cs"/>
         <a:sym typeface="Helvetica"/>
       </a:defRPr>
     </a:lvl6pPr>
@@ -257,9 +257,9 @@
         </a:solidFill>
         <a:effectLst/>
         <a:uFillTx/>
-        <a:latin typeface="+mj-lt"/>
-        <a:ea typeface="+mj-ea"/>
-        <a:cs typeface="+mj-cs"/>
+        <a:latin typeface="+mn-lt"/>
+        <a:ea typeface="+mn-ea"/>
+        <a:cs typeface="+mn-cs"/>
         <a:sym typeface="Helvetica"/>
       </a:defRPr>
     </a:lvl7pPr>
@@ -287,9 +287,9 @@
         </a:solidFill>
         <a:effectLst/>
         <a:uFillTx/>
-        <a:latin typeface="+mj-lt"/>
-        <a:ea typeface="+mj-ea"/>
-        <a:cs typeface="+mj-cs"/>
+        <a:latin typeface="+mn-lt"/>
+        <a:ea typeface="+mn-ea"/>
+        <a:cs typeface="+mn-cs"/>
         <a:sym typeface="Helvetica"/>
       </a:defRPr>
     </a:lvl8pPr>
@@ -317,9 +317,9 @@
         </a:solidFill>
         <a:effectLst/>
         <a:uFillTx/>
-        <a:latin typeface="+mj-lt"/>
-        <a:ea typeface="+mj-ea"/>
-        <a:cs typeface="+mj-cs"/>
+        <a:latin typeface="+mn-lt"/>
+        <a:ea typeface="+mn-ea"/>
+        <a:cs typeface="+mn-cs"/>
         <a:sym typeface="Helvetica"/>
       </a:defRPr>
     </a:lvl9pPr>
@@ -404,73 +404,73 @@
   <p:notesStyle>
     <a:lvl1pPr latinLnBrk="0">
       <a:defRPr sz="1400">
-        <a:latin typeface="+mn-lt"/>
-        <a:ea typeface="+mn-ea"/>
-        <a:cs typeface="+mn-cs"/>
+        <a:latin typeface="+mj-lt"/>
+        <a:ea typeface="+mj-ea"/>
+        <a:cs typeface="+mj-cs"/>
         <a:sym typeface="Arial"/>
       </a:defRPr>
     </a:lvl1pPr>
     <a:lvl2pPr indent="228600" latinLnBrk="0">
       <a:defRPr sz="1400">
-        <a:latin typeface="+mn-lt"/>
-        <a:ea typeface="+mn-ea"/>
-        <a:cs typeface="+mn-cs"/>
+        <a:latin typeface="+mj-lt"/>
+        <a:ea typeface="+mj-ea"/>
+        <a:cs typeface="+mj-cs"/>
         <a:sym typeface="Arial"/>
       </a:defRPr>
     </a:lvl2pPr>
     <a:lvl3pPr indent="457200" latinLnBrk="0">
       <a:defRPr sz="1400">
-        <a:latin typeface="+mn-lt"/>
-        <a:ea typeface="+mn-ea"/>
-        <a:cs typeface="+mn-cs"/>
+        <a:latin typeface="+mj-lt"/>
+        <a:ea typeface="+mj-ea"/>
+        <a:cs typeface="+mj-cs"/>
         <a:sym typeface="Arial"/>
       </a:defRPr>
     </a:lvl3pPr>
     <a:lvl4pPr indent="685800" latinLnBrk="0">
       <a:defRPr sz="1400">
-        <a:latin typeface="+mn-lt"/>
-        <a:ea typeface="+mn-ea"/>
-        <a:cs typeface="+mn-cs"/>
+        <a:latin typeface="+mj-lt"/>
+        <a:ea typeface="+mj-ea"/>
+        <a:cs typeface="+mj-cs"/>
         <a:sym typeface="Arial"/>
       </a:defRPr>
     </a:lvl4pPr>
     <a:lvl5pPr indent="914400" latinLnBrk="0">
       <a:defRPr sz="1400">
-        <a:latin typeface="+mn-lt"/>
-        <a:ea typeface="+mn-ea"/>
-        <a:cs typeface="+mn-cs"/>
+        <a:latin typeface="+mj-lt"/>
+        <a:ea typeface="+mj-ea"/>
+        <a:cs typeface="+mj-cs"/>
         <a:sym typeface="Arial"/>
       </a:defRPr>
     </a:lvl5pPr>
     <a:lvl6pPr indent="1143000" latinLnBrk="0">
       <a:defRPr sz="1400">
-        <a:latin typeface="+mn-lt"/>
-        <a:ea typeface="+mn-ea"/>
-        <a:cs typeface="+mn-cs"/>
+        <a:latin typeface="+mj-lt"/>
+        <a:ea typeface="+mj-ea"/>
+        <a:cs typeface="+mj-cs"/>
         <a:sym typeface="Arial"/>
       </a:defRPr>
     </a:lvl6pPr>
     <a:lvl7pPr indent="1371600" latinLnBrk="0">
       <a:defRPr sz="1400">
-        <a:latin typeface="+mn-lt"/>
-        <a:ea typeface="+mn-ea"/>
-        <a:cs typeface="+mn-cs"/>
+        <a:latin typeface="+mj-lt"/>
+        <a:ea typeface="+mj-ea"/>
+        <a:cs typeface="+mj-cs"/>
         <a:sym typeface="Arial"/>
       </a:defRPr>
     </a:lvl7pPr>
     <a:lvl8pPr indent="1600200" latinLnBrk="0">
       <a:defRPr sz="1400">
-        <a:latin typeface="+mn-lt"/>
-        <a:ea typeface="+mn-ea"/>
-        <a:cs typeface="+mn-cs"/>
+        <a:latin typeface="+mj-lt"/>
+        <a:ea typeface="+mj-ea"/>
+        <a:cs typeface="+mj-cs"/>
         <a:sym typeface="Arial"/>
       </a:defRPr>
     </a:lvl8pPr>
     <a:lvl9pPr indent="1828800" latinLnBrk="0">
       <a:defRPr sz="1400">
-        <a:latin typeface="+mn-lt"/>
-        <a:ea typeface="+mn-ea"/>
-        <a:cs typeface="+mn-cs"/>
+        <a:latin typeface="+mj-lt"/>
+        <a:ea typeface="+mj-ea"/>
+        <a:cs typeface="+mj-cs"/>
         <a:sym typeface="Arial"/>
       </a:defRPr>
     </a:lvl9pPr>
@@ -538,7 +538,7 @@
         <p:spPr>
           <a:xfrm>
             <a:off x="311698" y="2834125"/>
-            <a:ext cx="8520604" cy="792603"/>
+            <a:ext cx="8520604" cy="792605"/>
           </a:xfrm>
           <a:prstGeom prst="rect">
             <a:avLst/>
@@ -547,7 +547,7 @@
         <p:txBody>
           <a:bodyPr/>
           <a:lstStyle>
-            <a:lvl1pPr marL="114300" indent="0" algn="ctr">
+            <a:lvl1pPr marL="0" indent="114300" algn="ctr">
               <a:lnSpc>
                 <a:spcPct val="100000"/>
               </a:lnSpc>
@@ -557,7 +557,7 @@
               <a:buNone/>
               <a:defRPr sz="2800"/>
             </a:lvl1pPr>
-            <a:lvl2pPr marL="114300" indent="114300" algn="ctr">
+            <a:lvl2pPr marL="0" indent="114300" algn="ctr">
               <a:lnSpc>
                 <a:spcPct val="100000"/>
               </a:lnSpc>
@@ -567,7 +567,7 @@
               <a:buNone/>
               <a:defRPr sz="2800"/>
             </a:lvl2pPr>
-            <a:lvl3pPr marL="114300" indent="114300" algn="ctr">
+            <a:lvl3pPr marL="0" indent="114300" algn="ctr">
               <a:lnSpc>
                 <a:spcPct val="100000"/>
               </a:lnSpc>
@@ -577,7 +577,7 @@
               <a:buNone/>
               <a:defRPr sz="2800"/>
             </a:lvl3pPr>
-            <a:lvl4pPr marL="114300" indent="114300" algn="ctr">
+            <a:lvl4pPr marL="0" indent="114300" algn="ctr">
               <a:lnSpc>
                 <a:spcPct val="100000"/>
               </a:lnSpc>
@@ -587,7 +587,7 @@
               <a:buNone/>
               <a:defRPr sz="2800"/>
             </a:lvl4pPr>
-            <a:lvl5pPr marL="114300" indent="114300" algn="ctr">
+            <a:lvl5pPr marL="0" indent="114300" algn="ctr">
               <a:lnSpc>
                 <a:spcPct val="100000"/>
               </a:lnSpc>
@@ -873,16 +873,12 @@
           </p:nvPr>
         </p:nvSpPr>
         <p:spPr>
-          <a:xfrm>
-            <a:off x="311698" y="445025"/>
-            <a:ext cx="8520604" cy="572703"/>
-          </a:xfrm>
           <a:prstGeom prst="rect">
             <a:avLst/>
           </a:prstGeom>
         </p:spPr>
         <p:txBody>
-          <a:bodyPr lIns="91421" tIns="91421" rIns="91421" bIns="91421"/>
+          <a:bodyPr/>
           <a:lstStyle/>
           <a:p>
             <a:pPr/>
@@ -901,16 +897,12 @@
           </p:nvPr>
         </p:nvSpPr>
         <p:spPr>
-          <a:xfrm>
-            <a:off x="311698" y="1152475"/>
-            <a:ext cx="8520604" cy="3416400"/>
-          </a:xfrm>
           <a:prstGeom prst="rect">
             <a:avLst/>
           </a:prstGeom>
         </p:spPr>
         <p:txBody>
-          <a:bodyPr lIns="91421" tIns="91421" rIns="91421" bIns="91421"/>
+          <a:bodyPr/>
           <a:lstStyle/>
           <a:p>
             <a:pPr/>
@@ -954,15 +946,15 @@
         </p:nvSpPr>
         <p:spPr>
           <a:xfrm>
-            <a:off x="8684354" y="4700822"/>
-            <a:ext cx="336808" cy="318390"/>
+            <a:off x="8684357" y="4700823"/>
+            <a:ext cx="336805" cy="318388"/>
           </a:xfrm>
           <a:prstGeom prst="rect">
             <a:avLst/>
           </a:prstGeom>
         </p:spPr>
         <p:txBody>
-          <a:bodyPr lIns="91421" tIns="91421" rIns="91421" bIns="91421"/>
+          <a:bodyPr/>
           <a:lstStyle/>
           <a:p>
             <a:pPr/>
@@ -1303,8 +1295,8 @@
         </p:nvSpPr>
         <p:spPr>
           <a:xfrm>
-            <a:off x="4832397" y="1152475"/>
-            <a:ext cx="3999905" cy="3416400"/>
+            <a:off x="4832396" y="1152475"/>
+            <a:ext cx="3999906" cy="3416400"/>
           </a:xfrm>
           <a:prstGeom prst="rect">
             <a:avLst/>
@@ -1481,7 +1473,7 @@
         <p:spPr>
           <a:xfrm>
             <a:off x="311698" y="1389598"/>
-            <a:ext cx="2808004" cy="3179404"/>
+            <a:ext cx="2808004" cy="3179405"/>
           </a:xfrm>
           <a:prstGeom prst="rect">
             <a:avLst/>
@@ -1602,7 +1594,7 @@
         <p:spPr>
           <a:xfrm>
             <a:off x="490250" y="450148"/>
-            <a:ext cx="6367801" cy="4090804"/>
+            <a:ext cx="6367801" cy="4090805"/>
           </a:xfrm>
           <a:prstGeom prst="rect">
             <a:avLst/>
@@ -1679,8 +1671,8 @@
         </p:nvSpPr>
         <p:spPr>
           <a:xfrm>
-            <a:off x="4572000" y="-127"/>
-            <a:ext cx="4572000" cy="5143505"/>
+            <a:off x="4572000" y="-128"/>
+            <a:ext cx="4572000" cy="5143507"/>
           </a:xfrm>
           <a:prstGeom prst="rect">
             <a:avLst/>
@@ -1698,9 +1690,9 @@
           <a:p>
             <a:pPr>
               <a:defRPr>
-                <a:latin typeface="+mn-lt"/>
-                <a:ea typeface="+mn-ea"/>
-                <a:cs typeface="+mn-cs"/>
+                <a:latin typeface="+mj-lt"/>
+                <a:ea typeface="+mj-ea"/>
+                <a:cs typeface="+mj-cs"/>
                 <a:sym typeface="Arial"/>
               </a:defRPr>
             </a:pPr>
@@ -1759,7 +1751,7 @@
         <p:txBody>
           <a:bodyPr/>
           <a:lstStyle>
-            <a:lvl1pPr marL="114300" indent="0" algn="ctr">
+            <a:lvl1pPr marL="0" indent="114300" algn="ctr">
               <a:lnSpc>
                 <a:spcPct val="100000"/>
               </a:lnSpc>
@@ -1769,7 +1761,7 @@
               <a:buNone/>
               <a:defRPr sz="2100"/>
             </a:lvl1pPr>
-            <a:lvl2pPr marL="114300" indent="114300" algn="ctr">
+            <a:lvl2pPr marL="0" indent="114300" algn="ctr">
               <a:lnSpc>
                 <a:spcPct val="100000"/>
               </a:lnSpc>
@@ -1779,7 +1771,7 @@
               <a:buNone/>
               <a:defRPr sz="2100"/>
             </a:lvl2pPr>
-            <a:lvl3pPr marL="114300" indent="114300" algn="ctr">
+            <a:lvl3pPr marL="0" indent="114300" algn="ctr">
               <a:lnSpc>
                 <a:spcPct val="100000"/>
               </a:lnSpc>
@@ -1789,7 +1781,7 @@
               <a:buNone/>
               <a:defRPr sz="2100"/>
             </a:lvl3pPr>
-            <a:lvl4pPr marL="114300" indent="114300" algn="ctr">
+            <a:lvl4pPr marL="0" indent="114300" algn="ctr">
               <a:lnSpc>
                 <a:spcPct val="100000"/>
               </a:lnSpc>
@@ -1799,7 +1791,7 @@
               <a:buNone/>
               <a:defRPr sz="2100"/>
             </a:lvl4pPr>
-            <a:lvl5pPr marL="114300" indent="114300" algn="ctr">
+            <a:lvl5pPr marL="0" indent="114300" algn="ctr">
               <a:lnSpc>
                 <a:spcPct val="100000"/>
               </a:lnSpc>
@@ -1852,8 +1844,8 @@
         </p:nvSpPr>
         <p:spPr>
           <a:xfrm>
-            <a:off x="4939500" y="724073"/>
-            <a:ext cx="3837000" cy="3695105"/>
+            <a:off x="4939500" y="724071"/>
+            <a:ext cx="3837000" cy="3695108"/>
           </a:xfrm>
           <a:prstGeom prst="rect">
             <a:avLst/>
@@ -1926,7 +1918,7 @@
         <p:spPr>
           <a:xfrm>
             <a:off x="311698" y="4230575"/>
-            <a:ext cx="5998804" cy="605103"/>
+            <a:ext cx="5998804" cy="605105"/>
           </a:xfrm>
           <a:prstGeom prst="rect">
             <a:avLst/>
@@ -1944,28 +1936,28 @@
               <a:buFontTx/>
               <a:buNone/>
             </a:lvl1pPr>
-            <a:lvl2pPr marL="1233714" indent="-408213">
+            <a:lvl2pPr marL="1690914" indent="-408213">
               <a:lnSpc>
                 <a:spcPct val="100000"/>
               </a:lnSpc>
               <a:buClrTx/>
               <a:buFontTx/>
             </a:lvl2pPr>
-            <a:lvl3pPr marL="1690914">
+            <a:lvl3pPr marL="2148114">
               <a:lnSpc>
                 <a:spcPct val="100000"/>
               </a:lnSpc>
               <a:buClrTx/>
               <a:buFontTx/>
             </a:lvl3pPr>
-            <a:lvl4pPr marL="2148114">
+            <a:lvl4pPr marL="2605314">
               <a:lnSpc>
                 <a:spcPct val="100000"/>
               </a:lnSpc>
               <a:buClrTx/>
               <a:buFontTx/>
             </a:lvl4pPr>
-            <a:lvl5pPr marL="2605314">
+            <a:lvl5pPr marL="3062514">
               <a:lnSpc>
                 <a:spcPct val="100000"/>
               </a:lnSpc>
@@ -2086,7 +2078,7 @@
           </a:extLst>
         </p:spPr>
         <p:txBody>
-          <a:bodyPr lIns="91422" tIns="91422" rIns="91422" bIns="91422">
+          <a:bodyPr lIns="91421" tIns="91421" rIns="91421" bIns="91421">
             <a:normAutofit fontScale="100000" lnSpcReduction="0"/>
           </a:bodyPr>
           <a:lstStyle/>
@@ -2124,7 +2116,7 @@
           </a:extLst>
         </p:spPr>
         <p:txBody>
-          <a:bodyPr lIns="91422" tIns="91422" rIns="91422" bIns="91422">
+          <a:bodyPr lIns="91421" tIns="91421" rIns="91421" bIns="91421">
             <a:normAutofit fontScale="100000" lnSpcReduction="0"/>
           </a:bodyPr>
           <a:lstStyle/>
@@ -2170,8 +2162,8 @@
         </p:nvSpPr>
         <p:spPr>
           <a:xfrm>
-            <a:off x="8684349" y="4700821"/>
-            <a:ext cx="336810" cy="318392"/>
+            <a:off x="8684354" y="4700823"/>
+            <a:ext cx="336806" cy="318388"/>
           </a:xfrm>
           <a:prstGeom prst="rect">
             <a:avLst/>
@@ -2181,7 +2173,7 @@
           </a:ln>
         </p:spPr>
         <p:txBody>
-          <a:bodyPr wrap="none" lIns="91422" tIns="91422" rIns="91422" bIns="91422" anchor="ctr">
+          <a:bodyPr wrap="none" lIns="91421" tIns="91421" rIns="91421" bIns="91421" anchor="ctr">
             <a:spAutoFit/>
           </a:bodyPr>
           <a:lstStyle>
@@ -2190,9 +2182,9 @@
                 <a:solidFill>
                   <a:srgbClr val="585858"/>
                 </a:solidFill>
-                <a:latin typeface="+mn-lt"/>
-                <a:ea typeface="+mn-ea"/>
-                <a:cs typeface="+mn-cs"/>
+                <a:latin typeface="+mj-lt"/>
+                <a:ea typeface="+mj-ea"/>
+                <a:cs typeface="+mj-cs"/>
                 <a:sym typeface="Arial"/>
               </a:defRPr>
             </a:lvl1pPr>
@@ -2243,9 +2235,9 @@
             <a:srgbClr val="000000"/>
           </a:solidFill>
           <a:uFillTx/>
-          <a:latin typeface="+mn-lt"/>
-          <a:ea typeface="+mn-ea"/>
-          <a:cs typeface="+mn-cs"/>
+          <a:latin typeface="+mj-lt"/>
+          <a:ea typeface="+mj-ea"/>
+          <a:cs typeface="+mj-cs"/>
           <a:sym typeface="Arial"/>
         </a:defRPr>
       </a:lvl1pPr>
@@ -2269,9 +2261,9 @@
             <a:srgbClr val="000000"/>
           </a:solidFill>
           <a:uFillTx/>
-          <a:latin typeface="+mn-lt"/>
-          <a:ea typeface="+mn-ea"/>
-          <a:cs typeface="+mn-cs"/>
+          <a:latin typeface="+mj-lt"/>
+          <a:ea typeface="+mj-ea"/>
+          <a:cs typeface="+mj-cs"/>
           <a:sym typeface="Arial"/>
         </a:defRPr>
       </a:lvl2pPr>
@@ -2295,9 +2287,9 @@
             <a:srgbClr val="000000"/>
           </a:solidFill>
           <a:uFillTx/>
-          <a:latin typeface="+mn-lt"/>
-          <a:ea typeface="+mn-ea"/>
-          <a:cs typeface="+mn-cs"/>
+          <a:latin typeface="+mj-lt"/>
+          <a:ea typeface="+mj-ea"/>
+          <a:cs typeface="+mj-cs"/>
           <a:sym typeface="Arial"/>
         </a:defRPr>
       </a:lvl3pPr>
@@ -2321,9 +2313,9 @@
             <a:srgbClr val="000000"/>
           </a:solidFill>
           <a:uFillTx/>
-          <a:latin typeface="+mn-lt"/>
-          <a:ea typeface="+mn-ea"/>
-          <a:cs typeface="+mn-cs"/>
+          <a:latin typeface="+mj-lt"/>
+          <a:ea typeface="+mj-ea"/>
+          <a:cs typeface="+mj-cs"/>
           <a:sym typeface="Arial"/>
         </a:defRPr>
       </a:lvl4pPr>
@@ -2347,9 +2339,9 @@
             <a:srgbClr val="000000"/>
           </a:solidFill>
           <a:uFillTx/>
-          <a:latin typeface="+mn-lt"/>
-          <a:ea typeface="+mn-ea"/>
-          <a:cs typeface="+mn-cs"/>
+          <a:latin typeface="+mj-lt"/>
+          <a:ea typeface="+mj-ea"/>
+          <a:cs typeface="+mj-cs"/>
           <a:sym typeface="Arial"/>
         </a:defRPr>
       </a:lvl5pPr>
@@ -2373,9 +2365,9 @@
             <a:srgbClr val="000000"/>
           </a:solidFill>
           <a:uFillTx/>
-          <a:latin typeface="+mn-lt"/>
-          <a:ea typeface="+mn-ea"/>
-          <a:cs typeface="+mn-cs"/>
+          <a:latin typeface="+mj-lt"/>
+          <a:ea typeface="+mj-ea"/>
+          <a:cs typeface="+mj-cs"/>
           <a:sym typeface="Arial"/>
         </a:defRPr>
       </a:lvl6pPr>
@@ -2399,9 +2391,9 @@
             <a:srgbClr val="000000"/>
           </a:solidFill>
           <a:uFillTx/>
-          <a:latin typeface="+mn-lt"/>
-          <a:ea typeface="+mn-ea"/>
-          <a:cs typeface="+mn-cs"/>
+          <a:latin typeface="+mj-lt"/>
+          <a:ea typeface="+mj-ea"/>
+          <a:cs typeface="+mj-cs"/>
           <a:sym typeface="Arial"/>
         </a:defRPr>
       </a:lvl7pPr>
@@ -2425,9 +2417,9 @@
             <a:srgbClr val="000000"/>
           </a:solidFill>
           <a:uFillTx/>
-          <a:latin typeface="+mn-lt"/>
-          <a:ea typeface="+mn-ea"/>
-          <a:cs typeface="+mn-cs"/>
+          <a:latin typeface="+mj-lt"/>
+          <a:ea typeface="+mj-ea"/>
+          <a:cs typeface="+mj-cs"/>
           <a:sym typeface="Arial"/>
         </a:defRPr>
       </a:lvl8pPr>
@@ -2451,9 +2443,9 @@
             <a:srgbClr val="000000"/>
           </a:solidFill>
           <a:uFillTx/>
-          <a:latin typeface="+mn-lt"/>
-          <a:ea typeface="+mn-ea"/>
-          <a:cs typeface="+mn-cs"/>
+          <a:latin typeface="+mj-lt"/>
+          <a:ea typeface="+mj-ea"/>
+          <a:cs typeface="+mj-cs"/>
           <a:sym typeface="Arial"/>
         </a:defRPr>
       </a:lvl9pPr>
@@ -2481,9 +2473,9 @@
             <a:srgbClr val="585858"/>
           </a:solidFill>
           <a:uFillTx/>
-          <a:latin typeface="+mn-lt"/>
-          <a:ea typeface="+mn-ea"/>
-          <a:cs typeface="+mn-cs"/>
+          <a:latin typeface="+mj-lt"/>
+          <a:ea typeface="+mj-ea"/>
+          <a:cs typeface="+mj-cs"/>
           <a:sym typeface="Arial"/>
         </a:defRPr>
       </a:lvl1pPr>
@@ -2509,9 +2501,9 @@
             <a:srgbClr val="585858"/>
           </a:solidFill>
           <a:uFillTx/>
-          <a:latin typeface="+mn-lt"/>
-          <a:ea typeface="+mn-ea"/>
-          <a:cs typeface="+mn-cs"/>
+          <a:latin typeface="+mj-lt"/>
+          <a:ea typeface="+mj-ea"/>
+          <a:cs typeface="+mj-cs"/>
           <a:sym typeface="Arial"/>
         </a:defRPr>
       </a:lvl2pPr>
@@ -2537,9 +2529,9 @@
             <a:srgbClr val="585858"/>
           </a:solidFill>
           <a:uFillTx/>
-          <a:latin typeface="+mn-lt"/>
-          <a:ea typeface="+mn-ea"/>
-          <a:cs typeface="+mn-cs"/>
+          <a:latin typeface="+mj-lt"/>
+          <a:ea typeface="+mj-ea"/>
+          <a:cs typeface="+mj-cs"/>
           <a:sym typeface="Arial"/>
         </a:defRPr>
       </a:lvl3pPr>
@@ -2565,9 +2557,9 @@
             <a:srgbClr val="585858"/>
           </a:solidFill>
           <a:uFillTx/>
-          <a:latin typeface="+mn-lt"/>
-          <a:ea typeface="+mn-ea"/>
-          <a:cs typeface="+mn-cs"/>
+          <a:latin typeface="+mj-lt"/>
+          <a:ea typeface="+mj-ea"/>
+          <a:cs typeface="+mj-cs"/>
           <a:sym typeface="Arial"/>
         </a:defRPr>
       </a:lvl4pPr>
@@ -2593,9 +2585,9 @@
             <a:srgbClr val="585858"/>
           </a:solidFill>
           <a:uFillTx/>
-          <a:latin typeface="+mn-lt"/>
-          <a:ea typeface="+mn-ea"/>
-          <a:cs typeface="+mn-cs"/>
+          <a:latin typeface="+mj-lt"/>
+          <a:ea typeface="+mj-ea"/>
+          <a:cs typeface="+mj-cs"/>
           <a:sym typeface="Arial"/>
         </a:defRPr>
       </a:lvl5pPr>
@@ -2621,9 +2613,9 @@
             <a:srgbClr val="585858"/>
           </a:solidFill>
           <a:uFillTx/>
-          <a:latin typeface="+mn-lt"/>
-          <a:ea typeface="+mn-ea"/>
-          <a:cs typeface="+mn-cs"/>
+          <a:latin typeface="+mj-lt"/>
+          <a:ea typeface="+mj-ea"/>
+          <a:cs typeface="+mj-cs"/>
           <a:sym typeface="Arial"/>
         </a:defRPr>
       </a:lvl6pPr>
@@ -2649,9 +2641,9 @@
             <a:srgbClr val="585858"/>
           </a:solidFill>
           <a:uFillTx/>
-          <a:latin typeface="+mn-lt"/>
-          <a:ea typeface="+mn-ea"/>
-          <a:cs typeface="+mn-cs"/>
+          <a:latin typeface="+mj-lt"/>
+          <a:ea typeface="+mj-ea"/>
+          <a:cs typeface="+mj-cs"/>
           <a:sym typeface="Arial"/>
         </a:defRPr>
       </a:lvl7pPr>
@@ -2677,9 +2669,9 @@
             <a:srgbClr val="585858"/>
           </a:solidFill>
           <a:uFillTx/>
-          <a:latin typeface="+mn-lt"/>
-          <a:ea typeface="+mn-ea"/>
-          <a:cs typeface="+mn-cs"/>
+          <a:latin typeface="+mj-lt"/>
+          <a:ea typeface="+mj-ea"/>
+          <a:cs typeface="+mj-cs"/>
           <a:sym typeface="Arial"/>
         </a:defRPr>
       </a:lvl8pPr>
@@ -2705,9 +2697,9 @@
             <a:srgbClr val="585858"/>
           </a:solidFill>
           <a:uFillTx/>
-          <a:latin typeface="+mn-lt"/>
-          <a:ea typeface="+mn-ea"/>
-          <a:cs typeface="+mn-cs"/>
+          <a:latin typeface="+mj-lt"/>
+          <a:ea typeface="+mj-ea"/>
+          <a:cs typeface="+mj-cs"/>
           <a:sym typeface="Arial"/>
         </a:defRPr>
       </a:lvl9pPr>
@@ -2986,8 +2978,8 @@
         </p:nvSpPr>
         <p:spPr>
           <a:xfrm>
-            <a:off x="1718098" y="866768"/>
-            <a:ext cx="6478204" cy="617702"/>
+            <a:off x="1718097" y="866768"/>
+            <a:ext cx="6478207" cy="617702"/>
           </a:xfrm>
           <a:prstGeom prst="rect">
             <a:avLst/>
@@ -3069,7 +3061,7 @@
           </a:extLst>
         </p:spPr>
         <p:txBody>
-          <a:bodyPr lIns="91422" tIns="91422" rIns="91422" bIns="91422" anchor="b">
+          <a:bodyPr lIns="91421" tIns="91421" rIns="91421" bIns="91421" anchor="b">
             <a:normAutofit fontScale="100000" lnSpcReduction="0"/>
           </a:bodyPr>
           <a:lstStyle>
@@ -3088,7 +3080,7 @@
           <a:p>
             <a:pPr/>
             <a:r>
-              <a:t>Group # - FootBall Predictor</a:t>
+              <a:t>Group # - Football Predictor</a:t>
             </a:r>
           </a:p>
         </p:txBody>
@@ -3121,7 +3113,7 @@
       </p:grpSpPr>
       <p:pic>
         <p:nvPicPr>
-          <p:cNvPr id="292" name="Fond OM" descr="Fond OM"/>
+          <p:cNvPr id="290" name="Fond OM" descr="Fond OM"/>
           <p:cNvPicPr>
             <a:picLocks noChangeAspect="1"/>
           </p:cNvPicPr>
@@ -3151,14 +3143,14 @@
       </p:pic>
       <p:sp>
         <p:nvSpPr>
-          <p:cNvPr id="293" name="Zone API-Front"/>
+          <p:cNvPr id="291" name="Zone API-Front"/>
           <p:cNvSpPr/>
           <p:nvPr/>
         </p:nvSpPr>
         <p:spPr>
           <a:xfrm>
             <a:off x="4857472" y="1433652"/>
-            <a:ext cx="3777003" cy="3123615"/>
+            <a:ext cx="3777005" cy="3123615"/>
           </a:xfrm>
           <a:prstGeom prst="roundRect">
             <a:avLst>
@@ -3184,9 +3176,9 @@
           <a:p>
             <a:pPr>
               <a:defRPr>
-                <a:latin typeface="+mn-lt"/>
-                <a:ea typeface="+mn-ea"/>
-                <a:cs typeface="+mn-cs"/>
+                <a:latin typeface="+mj-lt"/>
+                <a:ea typeface="+mj-ea"/>
+                <a:cs typeface="+mj-cs"/>
                 <a:sym typeface="Arial"/>
               </a:defRPr>
             </a:pPr>
@@ -3195,7 +3187,7 @@
       </p:sp>
       <p:sp>
         <p:nvSpPr>
-          <p:cNvPr id="294" name="Google Shape;75;p16"/>
+          <p:cNvPr id="292" name="Google Shape;75;p16"/>
           <p:cNvSpPr txBox="1"/>
           <p:nvPr>
             <p:ph type="title"/>
@@ -3203,15 +3195,15 @@
         </p:nvSpPr>
         <p:spPr>
           <a:xfrm>
-            <a:off x="1192662" y="403309"/>
-            <a:ext cx="5315105" cy="533103"/>
+            <a:off x="1192661" y="403307"/>
+            <a:ext cx="5315108" cy="533106"/>
           </a:xfrm>
           <a:prstGeom prst="rect">
             <a:avLst/>
           </a:prstGeom>
         </p:spPr>
         <p:txBody>
-          <a:bodyPr/>
+          <a:bodyPr anchor="ctr"/>
           <a:lstStyle>
             <a:lvl1pPr defTabSz="822958">
               <a:defRPr sz="2200">
@@ -3235,7 +3227,7 @@
       </p:sp>
       <p:pic>
         <p:nvPicPr>
-          <p:cNvPr id="295" name="Google Shape;76;p16" descr="Google Shape;76;p16"/>
+          <p:cNvPr id="293" name="Google Shape;76;p16" descr="Google Shape;76;p16"/>
           <p:cNvPicPr>
             <a:picLocks noChangeAspect="1"/>
           </p:cNvPicPr>
@@ -3252,7 +3244,7 @@
         <p:spPr>
           <a:xfrm>
             <a:off x="463375" y="482852"/>
-            <a:ext cx="576901" cy="385907"/>
+            <a:ext cx="576901" cy="385909"/>
           </a:xfrm>
           <a:prstGeom prst="rect">
             <a:avLst/>
@@ -3264,7 +3256,7 @@
       </p:pic>
       <p:sp>
         <p:nvSpPr>
-          <p:cNvPr id="296" name="Google Shape;77;p16"/>
+          <p:cNvPr id="294" name="Google Shape;77;p16"/>
           <p:cNvSpPr/>
           <p:nvPr/>
         </p:nvSpPr>
@@ -3289,9 +3281,9 @@
           <a:p>
             <a:pPr>
               <a:defRPr>
-                <a:latin typeface="+mn-lt"/>
-                <a:ea typeface="+mn-ea"/>
-                <a:cs typeface="+mn-cs"/>
+                <a:latin typeface="+mj-lt"/>
+                <a:ea typeface="+mj-ea"/>
+                <a:cs typeface="+mj-cs"/>
                 <a:sym typeface="Arial"/>
               </a:defRPr>
             </a:pPr>
@@ -3300,7 +3292,7 @@
       </p:sp>
       <p:pic>
         <p:nvPicPr>
-          <p:cNvPr id="297" name="Image 19" descr="Image 19"/>
+          <p:cNvPr id="295" name="Image 19" descr="Image 19"/>
           <p:cNvPicPr>
             <a:picLocks noChangeAspect="1"/>
           </p:cNvPicPr>
@@ -3317,7 +3309,7 @@
         <p:spPr>
           <a:xfrm>
             <a:off x="5074482" y="1035810"/>
-            <a:ext cx="1010882" cy="319062"/>
+            <a:ext cx="1010884" cy="319064"/>
           </a:xfrm>
           <a:prstGeom prst="rect">
             <a:avLst/>
@@ -3329,21 +3321,21 @@
       </p:pic>
       <p:grpSp>
         <p:nvGrpSpPr>
-          <p:cNvPr id="300" name="Groupe 83"/>
+          <p:cNvPr id="298" name="Groupe 83"/>
           <p:cNvGrpSpPr/>
           <p:nvPr/>
         </p:nvGrpSpPr>
         <p:grpSpPr>
           <a:xfrm>
-            <a:off x="372631" y="3143066"/>
-            <a:ext cx="1143105" cy="1543943"/>
-            <a:chOff x="0" y="-1"/>
-            <a:chExt cx="1143103" cy="1543941"/>
+            <a:off x="372627" y="3143063"/>
+            <a:ext cx="1143113" cy="1543948"/>
+            <a:chOff x="-1" y="-1"/>
+            <a:chExt cx="1143111" cy="1543947"/>
           </a:xfrm>
         </p:grpSpPr>
         <p:pic>
           <p:nvPicPr>
-            <p:cNvPr id="298" name="Image 11" descr="Image 11"/>
+            <p:cNvPr id="296" name="Image 11" descr="Image 11"/>
             <p:cNvPicPr>
               <a:picLocks noChangeAspect="1"/>
             </p:cNvPicPr>
@@ -3359,8 +3351,8 @@
           </p:blipFill>
           <p:spPr>
             <a:xfrm>
-              <a:off x="-1" y="324630"/>
-              <a:ext cx="1143105" cy="1219310"/>
+              <a:off x="-2" y="324632"/>
+              <a:ext cx="1143113" cy="1219315"/>
             </a:xfrm>
             <a:prstGeom prst="rect">
               <a:avLst/>
@@ -3374,7 +3366,7 @@
         </p:pic>
         <p:pic>
           <p:nvPicPr>
-            <p:cNvPr id="299" name="Image 23" descr="Image 23"/>
+            <p:cNvPr id="297" name="Image 23" descr="Image 23"/>
             <p:cNvPicPr>
               <a:picLocks noChangeAspect="1"/>
             </p:cNvPicPr>
@@ -3390,8 +3382,8 @@
           </p:blipFill>
           <p:spPr>
             <a:xfrm>
-              <a:off x="204525" y="-2"/>
-              <a:ext cx="844694" cy="530700"/>
+              <a:off x="204526" y="-2"/>
+              <a:ext cx="844698" cy="530704"/>
             </a:xfrm>
             <a:prstGeom prst="rect">
               <a:avLst/>
@@ -3406,14 +3398,14 @@
       </p:grpSp>
       <p:sp>
         <p:nvSpPr>
-          <p:cNvPr id="301" name="Fleche FastAPI vers LLM"/>
+          <p:cNvPr id="299" name="Fleche FastAPI vers LLM"/>
           <p:cNvSpPr/>
           <p:nvPr/>
         </p:nvSpPr>
         <p:spPr>
           <a:xfrm flipV="1">
             <a:off x="5789912" y="3528815"/>
-            <a:ext cx="1337338" cy="425772"/>
+            <a:ext cx="1337340" cy="425772"/>
           </a:xfrm>
           <a:prstGeom prst="line">
             <a:avLst/>
@@ -3435,14 +3427,14 @@
       </p:sp>
       <p:sp>
         <p:nvSpPr>
-          <p:cNvPr id="302" name="Fleche FastAPI vers App"/>
+          <p:cNvPr id="300" name="Fleche FastAPI vers App"/>
           <p:cNvSpPr/>
           <p:nvPr/>
         </p:nvSpPr>
         <p:spPr>
           <a:xfrm flipV="1">
             <a:off x="2994767" y="2074135"/>
-            <a:ext cx="125592" cy="297451"/>
+            <a:ext cx="125592" cy="297453"/>
           </a:xfrm>
           <a:prstGeom prst="line">
             <a:avLst/>
@@ -3464,14 +3456,14 @@
       </p:sp>
       <p:sp>
         <p:nvSpPr>
-          <p:cNvPr id="303" name="Fleche FastAPI vers App"/>
+          <p:cNvPr id="301" name="Fleche FastAPI vers App"/>
           <p:cNvSpPr/>
           <p:nvPr/>
         </p:nvSpPr>
         <p:spPr>
           <a:xfrm flipV="1">
             <a:off x="4321883" y="4040701"/>
-            <a:ext cx="710215" cy="62685"/>
+            <a:ext cx="710217" cy="62687"/>
           </a:xfrm>
           <a:prstGeom prst="line">
             <a:avLst/>
@@ -3493,14 +3485,14 @@
       </p:sp>
       <p:sp>
         <p:nvSpPr>
-          <p:cNvPr id="304" name="Fleche FastAPI vers App"/>
+          <p:cNvPr id="302" name="Fleche FastAPI vers App"/>
           <p:cNvSpPr/>
           <p:nvPr/>
         </p:nvSpPr>
         <p:spPr>
           <a:xfrm flipV="1">
             <a:off x="3104418" y="2995964"/>
-            <a:ext cx="1887400" cy="58197"/>
+            <a:ext cx="1887400" cy="58199"/>
           </a:xfrm>
           <a:prstGeom prst="line">
             <a:avLst/>
@@ -3522,14 +3514,14 @@
       </p:sp>
       <p:sp>
         <p:nvSpPr>
-          <p:cNvPr id="305" name="Fleche FastAPI vers Render"/>
+          <p:cNvPr id="303" name="Fleche FastAPI vers Render"/>
           <p:cNvSpPr/>
           <p:nvPr/>
         </p:nvSpPr>
         <p:spPr>
           <a:xfrm>
             <a:off x="3935236" y="1606811"/>
-            <a:ext cx="1139248" cy="201291"/>
+            <a:ext cx="1139250" cy="201293"/>
           </a:xfrm>
           <a:prstGeom prst="line">
             <a:avLst/>
@@ -3551,14 +3543,14 @@
       </p:sp>
       <p:sp>
         <p:nvSpPr>
-          <p:cNvPr id="306" name="Fleche FastAPI vers LLM"/>
+          <p:cNvPr id="304" name="Fleche FastAPI vers LLM"/>
           <p:cNvSpPr/>
           <p:nvPr/>
         </p:nvSpPr>
         <p:spPr>
           <a:xfrm>
             <a:off x="5788223" y="1974294"/>
-            <a:ext cx="1339026" cy="989341"/>
+            <a:ext cx="1339028" cy="989341"/>
           </a:xfrm>
           <a:prstGeom prst="line">
             <a:avLst/>
@@ -3580,14 +3572,14 @@
       </p:sp>
       <p:sp>
         <p:nvSpPr>
-          <p:cNvPr id="307" name="Fleche FastAPI vers LLM"/>
+          <p:cNvPr id="305" name="Fleche FastAPI vers LLM"/>
           <p:cNvSpPr/>
           <p:nvPr/>
         </p:nvSpPr>
         <p:spPr>
           <a:xfrm>
             <a:off x="6176093" y="3086255"/>
-            <a:ext cx="951157" cy="174365"/>
+            <a:ext cx="951157" cy="174367"/>
           </a:xfrm>
           <a:prstGeom prst="line">
             <a:avLst/>
@@ -3609,14 +3601,14 @@
       </p:sp>
       <p:sp>
         <p:nvSpPr>
-          <p:cNvPr id="308" name="Fleche FastAPI vers Render"/>
+          <p:cNvPr id="306" name="Fleche FastAPI vers Render"/>
           <p:cNvSpPr/>
           <p:nvPr/>
         </p:nvSpPr>
         <p:spPr>
           <a:xfrm>
-            <a:off x="1515730" y="3970582"/>
-            <a:ext cx="1297265" cy="126073"/>
+            <a:off x="1515729" y="3970582"/>
+            <a:ext cx="1297267" cy="126075"/>
           </a:xfrm>
           <a:prstGeom prst="line">
             <a:avLst/>
@@ -3638,21 +3630,21 @@
       </p:sp>
       <p:grpSp>
         <p:nvGrpSpPr>
-          <p:cNvPr id="311" name="Groupe 91"/>
+          <p:cNvPr id="309" name="Groupe 91"/>
           <p:cNvGrpSpPr/>
           <p:nvPr/>
         </p:nvGrpSpPr>
         <p:grpSpPr>
           <a:xfrm>
-            <a:off x="2298218" y="2371580"/>
-            <a:ext cx="806206" cy="1390017"/>
+            <a:off x="2298216" y="2371578"/>
+            <a:ext cx="806211" cy="1390023"/>
             <a:chOff x="0" y="-1"/>
-            <a:chExt cx="806205" cy="1390016"/>
+            <a:chExt cx="806209" cy="1390022"/>
           </a:xfrm>
         </p:grpSpPr>
         <p:pic>
           <p:nvPicPr>
-            <p:cNvPr id="309" name="Image 15" descr="Image 15"/>
+            <p:cNvPr id="307" name="Image 15" descr="Image 15"/>
             <p:cNvPicPr>
               <a:picLocks noChangeAspect="1"/>
             </p:cNvPicPr>
@@ -3669,7 +3661,7 @@
           <p:spPr>
             <a:xfrm>
               <a:off x="-1" y="-2"/>
-              <a:ext cx="759826" cy="698370"/>
+              <a:ext cx="759829" cy="698374"/>
             </a:xfrm>
             <a:prstGeom prst="rect">
               <a:avLst/>
@@ -3683,7 +3675,7 @@
         </p:pic>
         <p:pic>
           <p:nvPicPr>
-            <p:cNvPr id="310" name="Image 90" descr="Image 90"/>
+            <p:cNvPr id="308" name="Image 90" descr="Image 90"/>
             <p:cNvPicPr>
               <a:picLocks noChangeAspect="1"/>
             </p:cNvPicPr>
@@ -3699,8 +3691,8 @@
           </p:blipFill>
           <p:spPr>
             <a:xfrm>
-              <a:off x="46380" y="611659"/>
-              <a:ext cx="759825" cy="778357"/>
+              <a:off x="46381" y="611661"/>
+              <a:ext cx="759829" cy="778361"/>
             </a:xfrm>
             <a:prstGeom prst="rect">
               <a:avLst/>
@@ -3715,7 +3707,7 @@
       </p:grpSp>
       <p:pic>
         <p:nvPicPr>
-          <p:cNvPr id="312" name="Image 93" descr="Image 93"/>
+          <p:cNvPr id="310" name="Image 93" descr="Image 93"/>
           <p:cNvPicPr>
             <a:picLocks noChangeAspect="1"/>
           </p:cNvPicPr>
@@ -3731,8 +3723,8 @@
         </p:blipFill>
         <p:spPr>
           <a:xfrm>
-            <a:off x="7307907" y="328874"/>
-            <a:ext cx="707869" cy="681972"/>
+            <a:off x="7307905" y="328872"/>
+            <a:ext cx="707871" cy="681975"/>
           </a:xfrm>
           <a:prstGeom prst="rect">
             <a:avLst/>
@@ -3744,13 +3736,13 @@
       </p:pic>
       <p:sp>
         <p:nvSpPr>
-          <p:cNvPr id="313" name="Fleche FastAPI vers Render"/>
+          <p:cNvPr id="311" name="Fleche FastAPI vers Render"/>
           <p:cNvSpPr/>
           <p:nvPr/>
         </p:nvSpPr>
         <p:spPr>
           <a:xfrm flipH="1">
-            <a:off x="6015517" y="979023"/>
+            <a:off x="6015517" y="979022"/>
             <a:ext cx="1652007" cy="216319"/>
           </a:xfrm>
           <a:prstGeom prst="line">
@@ -3773,49 +3765,49 @@
       </p:sp>
       <p:grpSp>
         <p:nvGrpSpPr>
-          <p:cNvPr id="320" name="Groupe 212"/>
+          <p:cNvPr id="318" name="Groupe 212"/>
           <p:cNvGrpSpPr/>
           <p:nvPr/>
         </p:nvGrpSpPr>
         <p:grpSpPr>
           <a:xfrm>
-            <a:off x="2812992" y="3443895"/>
-            <a:ext cx="1508899" cy="1452149"/>
-            <a:chOff x="0" y="-1"/>
-            <a:chExt cx="1508898" cy="1452148"/>
+            <a:off x="2812990" y="3443890"/>
+            <a:ext cx="1508909" cy="1452153"/>
+            <a:chOff x="-1" y="-1"/>
+            <a:chExt cx="1508908" cy="1452152"/>
           </a:xfrm>
         </p:grpSpPr>
         <p:grpSp>
           <p:nvGrpSpPr>
-            <p:cNvPr id="318" name="Groupe 52"/>
+            <p:cNvPr id="316" name="Groupe 52"/>
             <p:cNvGrpSpPr/>
             <p:nvPr/>
           </p:nvGrpSpPr>
           <p:grpSpPr>
             <a:xfrm>
-              <a:off x="0" y="-2"/>
-              <a:ext cx="1508899" cy="1452149"/>
+              <a:off x="-2" y="-2"/>
+              <a:ext cx="1508909" cy="1452153"/>
               <a:chOff x="0" y="-1"/>
-              <a:chExt cx="1508898" cy="1452148"/>
+              <a:chExt cx="1508908" cy="1452152"/>
             </a:xfrm>
           </p:grpSpPr>
           <p:grpSp>
             <p:nvGrpSpPr>
-              <p:cNvPr id="316" name="Groupe 7"/>
+              <p:cNvPr id="314" name="Groupe 7"/>
               <p:cNvGrpSpPr/>
               <p:nvPr/>
             </p:nvGrpSpPr>
             <p:grpSpPr>
               <a:xfrm>
-                <a:off x="0" y="401257"/>
-                <a:ext cx="1508899" cy="1050891"/>
-                <a:chOff x="0" y="0"/>
-                <a:chExt cx="1508898" cy="1050889"/>
+                <a:off x="-1" y="401256"/>
+                <a:ext cx="1508909" cy="1050896"/>
+                <a:chOff x="0" y="-1"/>
+                <a:chExt cx="1508908" cy="1050894"/>
               </a:xfrm>
             </p:grpSpPr>
             <p:pic>
               <p:nvPicPr>
-                <p:cNvPr id="314" name="Image 8" descr="Image 8"/>
+                <p:cNvPr id="312" name="Image 8" descr="Image 8"/>
                 <p:cNvPicPr>
                   <a:picLocks noChangeAspect="1"/>
                 </p:cNvPicPr>
@@ -3831,8 +3823,8 @@
               </p:blipFill>
               <p:spPr>
                 <a:xfrm>
-                  <a:off x="0" y="-1"/>
-                  <a:ext cx="1508899" cy="762073"/>
+                  <a:off x="0" y="-2"/>
+                  <a:ext cx="1508909" cy="762081"/>
                 </a:xfrm>
                 <a:prstGeom prst="rect">
                   <a:avLst/>
@@ -3846,13 +3838,13 @@
             </p:pic>
             <p:sp>
               <p:nvSpPr>
-                <p:cNvPr id="315" name="ZoneTexte 9"/>
+                <p:cNvPr id="313" name="ZoneTexte 9"/>
                 <p:cNvSpPr txBox="1"/>
                 <p:nvPr/>
               </p:nvSpPr>
               <p:spPr>
                 <a:xfrm>
-                  <a:off x="345739" y="762069"/>
+                  <a:off x="345740" y="762074"/>
                   <a:ext cx="588399" cy="288820"/>
                 </a:xfrm>
                 <a:prstGeom prst="rect">
@@ -3877,9 +3869,9 @@
                 <a:lstStyle>
                   <a:lvl1pPr>
                     <a:defRPr>
-                      <a:latin typeface="+mn-lt"/>
-                      <a:ea typeface="+mn-ea"/>
-                      <a:cs typeface="+mn-cs"/>
+                      <a:latin typeface="+mj-lt"/>
+                      <a:ea typeface="+mj-ea"/>
+                      <a:cs typeface="+mj-cs"/>
                       <a:sym typeface="Arial"/>
                     </a:defRPr>
                   </a:lvl1pPr>
@@ -3895,7 +3887,7 @@
           </p:grpSp>
           <p:pic>
             <p:nvPicPr>
-              <p:cNvPr id="317" name="Image 21" descr="Image 21"/>
+              <p:cNvPr id="315" name="Image 21" descr="Image 21"/>
               <p:cNvPicPr>
                 <a:picLocks noChangeAspect="1"/>
               </p:cNvPicPr>
@@ -3911,8 +3903,8 @@
             </p:blipFill>
             <p:spPr>
               <a:xfrm>
-                <a:off x="422990" y="-2"/>
-                <a:ext cx="728061" cy="599037"/>
+                <a:off x="422991" y="-2"/>
+                <a:ext cx="728066" cy="599041"/>
               </a:xfrm>
               <a:prstGeom prst="rect">
                 <a:avLst/>
@@ -3927,7 +3919,7 @@
         </p:grpSp>
         <p:pic>
           <p:nvPicPr>
-            <p:cNvPr id="319" name="Image 126" descr="Image 126"/>
+            <p:cNvPr id="317" name="Image 126" descr="Image 126"/>
             <p:cNvPicPr>
               <a:picLocks noChangeAspect="1"/>
             </p:cNvPicPr>
@@ -3943,8 +3935,8 @@
           </p:blipFill>
           <p:spPr>
             <a:xfrm>
-              <a:off x="1086754" y="271673"/>
-              <a:ext cx="351250" cy="213378"/>
+              <a:off x="1086755" y="271675"/>
+              <a:ext cx="351252" cy="213380"/>
             </a:xfrm>
             <a:prstGeom prst="rect">
               <a:avLst/>
@@ -3959,28 +3951,28 @@
       </p:grpSp>
       <p:grpSp>
         <p:nvGrpSpPr>
-          <p:cNvPr id="325" name="Groupe 203"/>
+          <p:cNvPr id="323" name="Groupe 203"/>
           <p:cNvGrpSpPr/>
           <p:nvPr/>
         </p:nvGrpSpPr>
         <p:grpSpPr>
           <a:xfrm>
-            <a:off x="5074479" y="1489795"/>
-            <a:ext cx="1284875" cy="863619"/>
-            <a:chOff x="-1" y="0"/>
-            <a:chExt cx="1284874" cy="863618"/>
+            <a:off x="5074475" y="1489790"/>
+            <a:ext cx="1284881" cy="863624"/>
+            <a:chOff x="-1" y="-1"/>
+            <a:chExt cx="1284880" cy="863622"/>
           </a:xfrm>
         </p:grpSpPr>
         <p:sp>
           <p:nvSpPr>
-            <p:cNvPr id="321" name="ZoneTexte 119"/>
+            <p:cNvPr id="319" name="ZoneTexte 119"/>
             <p:cNvSpPr txBox="1"/>
             <p:nvPr/>
           </p:nvSpPr>
           <p:spPr>
             <a:xfrm>
-              <a:off x="281169" y="556282"/>
-              <a:ext cx="1003705" cy="307337"/>
+              <a:off x="281172" y="556284"/>
+              <a:ext cx="1003707" cy="307337"/>
             </a:xfrm>
             <a:prstGeom prst="rect">
               <a:avLst/>
@@ -4021,21 +4013,21 @@
         </p:sp>
         <p:grpSp>
           <p:nvGrpSpPr>
-            <p:cNvPr id="324" name="Groupe 202"/>
+            <p:cNvPr id="322" name="Groupe 202"/>
             <p:cNvGrpSpPr/>
             <p:nvPr/>
           </p:nvGrpSpPr>
           <p:grpSpPr>
             <a:xfrm>
-              <a:off x="-2" y="0"/>
-              <a:ext cx="1134275" cy="632040"/>
+              <a:off x="-2" y="-2"/>
+              <a:ext cx="1134281" cy="632048"/>
               <a:chOff x="0" y="0"/>
-              <a:chExt cx="1134273" cy="632039"/>
+              <a:chExt cx="1134280" cy="632047"/>
             </a:xfrm>
           </p:grpSpPr>
           <p:pic>
             <p:nvPicPr>
-              <p:cNvPr id="322" name="Image 6" descr="Image 6"/>
+              <p:cNvPr id="320" name="Image 6" descr="Image 6"/>
               <p:cNvPicPr>
                 <a:picLocks noChangeAspect="1"/>
               </p:cNvPicPr>
@@ -4052,7 +4044,7 @@
             <p:spPr>
               <a:xfrm>
                 <a:off x="-1" y="-1"/>
-                <a:ext cx="713749" cy="632041"/>
+                <a:ext cx="713754" cy="632048"/>
               </a:xfrm>
               <a:prstGeom prst="rect">
                 <a:avLst/>
@@ -4066,7 +4058,7 @@
           </p:pic>
           <p:pic>
             <p:nvPicPr>
-              <p:cNvPr id="323" name="Image 192" descr="Image 192"/>
+              <p:cNvPr id="321" name="Image 192" descr="Image 192"/>
               <p:cNvPicPr>
                 <a:picLocks noChangeAspect="1"/>
               </p:cNvPicPr>
@@ -4082,8 +4074,8 @@
             </p:blipFill>
             <p:spPr>
               <a:xfrm>
-                <a:off x="783021" y="207978"/>
-                <a:ext cx="351252" cy="213380"/>
+                <a:off x="783024" y="207980"/>
+                <a:ext cx="351256" cy="213384"/>
               </a:xfrm>
               <a:prstGeom prst="rect">
                 <a:avLst/>
@@ -4099,35 +4091,35 @@
       </p:grpSp>
       <p:grpSp>
         <p:nvGrpSpPr>
-          <p:cNvPr id="330" name="Groupe 211"/>
+          <p:cNvPr id="328" name="Groupe 211"/>
           <p:cNvGrpSpPr/>
           <p:nvPr/>
         </p:nvGrpSpPr>
         <p:grpSpPr>
           <a:xfrm>
-            <a:off x="6998003" y="2855762"/>
-            <a:ext cx="1327678" cy="1005705"/>
-            <a:chOff x="0" y="-2"/>
-            <a:chExt cx="1327677" cy="1005704"/>
+            <a:off x="6998001" y="2855756"/>
+            <a:ext cx="1327684" cy="1005711"/>
+            <a:chOff x="-1" y="-2"/>
+            <a:chExt cx="1327683" cy="1005709"/>
           </a:xfrm>
         </p:grpSpPr>
         <p:grpSp>
           <p:nvGrpSpPr>
-            <p:cNvPr id="328" name="Groupe 122"/>
+            <p:cNvPr id="326" name="Groupe 122"/>
             <p:cNvGrpSpPr/>
             <p:nvPr/>
           </p:nvGrpSpPr>
           <p:grpSpPr>
             <a:xfrm>
-              <a:off x="129243" y="-3"/>
-              <a:ext cx="1198434" cy="1005706"/>
-              <a:chOff x="0" y="-1"/>
-              <a:chExt cx="1198433" cy="1005704"/>
+              <a:off x="129242" y="-3"/>
+              <a:ext cx="1198441" cy="1005711"/>
+              <a:chOff x="-1" y="-1"/>
+              <a:chExt cx="1198439" cy="1005709"/>
             </a:xfrm>
           </p:grpSpPr>
           <p:pic>
             <p:nvPicPr>
-              <p:cNvPr id="326" name="Image 13" descr="Image 13"/>
+              <p:cNvPr id="324" name="Image 13" descr="Image 13"/>
               <p:cNvPicPr>
                 <a:picLocks noChangeAspect="1"/>
               </p:cNvPicPr>
@@ -4143,8 +4135,8 @@
             </p:blipFill>
             <p:spPr>
               <a:xfrm>
-                <a:off x="-1" y="-2"/>
-                <a:ext cx="1198435" cy="698372"/>
+                <a:off x="-2" y="-2"/>
+                <a:ext cx="1198441" cy="698379"/>
               </a:xfrm>
               <a:prstGeom prst="rect">
                 <a:avLst/>
@@ -4158,13 +4150,13 @@
           </p:pic>
           <p:sp>
             <p:nvSpPr>
-              <p:cNvPr id="327" name="ZoneTexte 114"/>
+              <p:cNvPr id="325" name="ZoneTexte 114"/>
               <p:cNvSpPr txBox="1"/>
               <p:nvPr/>
             </p:nvSpPr>
             <p:spPr>
               <a:xfrm>
-                <a:off x="386153" y="698367"/>
+                <a:off x="386154" y="698372"/>
                 <a:ext cx="519120" cy="307337"/>
               </a:xfrm>
               <a:prstGeom prst="rect">
@@ -4207,7 +4199,7 @@
         </p:grpSp>
         <p:pic>
           <p:nvPicPr>
-            <p:cNvPr id="329" name="Image 194" descr="Image 194"/>
+            <p:cNvPr id="327" name="Image 194" descr="Image 194"/>
             <p:cNvPicPr>
               <a:picLocks noChangeAspect="1"/>
             </p:cNvPicPr>
@@ -4223,8 +4215,8 @@
           </p:blipFill>
           <p:spPr>
             <a:xfrm>
-              <a:off x="-1" y="455331"/>
-              <a:ext cx="351250" cy="213378"/>
+              <a:off x="-2" y="455334"/>
+              <a:ext cx="351254" cy="213380"/>
             </a:xfrm>
             <a:prstGeom prst="rect">
               <a:avLst/>
@@ -4239,35 +4231,35 @@
       </p:grpSp>
       <p:grpSp>
         <p:nvGrpSpPr>
-          <p:cNvPr id="335" name="Groupe 204"/>
+          <p:cNvPr id="333" name="Groupe 204"/>
           <p:cNvGrpSpPr/>
           <p:nvPr/>
         </p:nvGrpSpPr>
         <p:grpSpPr>
           <a:xfrm>
-            <a:off x="4991813" y="2520993"/>
-            <a:ext cx="1184277" cy="913430"/>
-            <a:chOff x="0" y="0"/>
-            <a:chExt cx="1184276" cy="913429"/>
+            <a:off x="4991808" y="2520991"/>
+            <a:ext cx="1184282" cy="913432"/>
+            <a:chOff x="-1" y="-1"/>
+            <a:chExt cx="1184280" cy="913430"/>
           </a:xfrm>
         </p:grpSpPr>
         <p:grpSp>
           <p:nvGrpSpPr>
-            <p:cNvPr id="333" name="Groupe 120"/>
+            <p:cNvPr id="331" name="Groupe 120"/>
             <p:cNvGrpSpPr/>
             <p:nvPr/>
           </p:nvGrpSpPr>
           <p:grpSpPr>
             <a:xfrm>
-              <a:off x="-1" y="27498"/>
-              <a:ext cx="1184278" cy="885932"/>
+              <a:off x="-2" y="27495"/>
+              <a:ext cx="1184281" cy="885935"/>
               <a:chOff x="0" y="0"/>
-              <a:chExt cx="1184276" cy="885931"/>
+              <a:chExt cx="1184280" cy="885934"/>
             </a:xfrm>
           </p:grpSpPr>
           <p:pic>
             <p:nvPicPr>
-              <p:cNvPr id="331" name="Image 4" descr="Image 4"/>
+              <p:cNvPr id="329" name="Image 4" descr="Image 4"/>
               <p:cNvPicPr>
                 <a:picLocks noChangeAspect="1"/>
               </p:cNvPicPr>
@@ -4284,7 +4276,7 @@
             <p:spPr>
               <a:xfrm>
                 <a:off x="-1" y="-1"/>
-                <a:ext cx="713749" cy="632040"/>
+                <a:ext cx="713754" cy="632046"/>
               </a:xfrm>
               <a:prstGeom prst="rect">
                 <a:avLst/>
@@ -4298,14 +4290,14 @@
           </p:pic>
           <p:sp>
             <p:nvSpPr>
-              <p:cNvPr id="332" name="ZoneTexte 117"/>
+              <p:cNvPr id="330" name="ZoneTexte 117"/>
               <p:cNvSpPr txBox="1"/>
               <p:nvPr/>
             </p:nvSpPr>
             <p:spPr>
               <a:xfrm>
-                <a:off x="546480" y="362695"/>
-                <a:ext cx="637797" cy="523237"/>
+                <a:off x="546482" y="362697"/>
+                <a:ext cx="637798" cy="523237"/>
               </a:xfrm>
               <a:prstGeom prst="rect">
                 <a:avLst/>
@@ -4358,7 +4350,7 @@
         </p:grpSp>
         <p:pic>
           <p:nvPicPr>
-            <p:cNvPr id="334" name="Image 196" descr="Image 196"/>
+            <p:cNvPr id="332" name="Image 196" descr="Image 196"/>
             <p:cNvPicPr>
               <a:picLocks noChangeAspect="1"/>
             </p:cNvPicPr>
@@ -4374,8 +4366,8 @@
           </p:blipFill>
           <p:spPr>
             <a:xfrm>
-              <a:off x="642630" y="0"/>
-              <a:ext cx="351250" cy="213378"/>
+              <a:off x="642631" y="-2"/>
+              <a:ext cx="351252" cy="213382"/>
             </a:xfrm>
             <a:prstGeom prst="rect">
               <a:avLst/>
@@ -4390,35 +4382,35 @@
       </p:grpSp>
       <p:grpSp>
         <p:nvGrpSpPr>
-          <p:cNvPr id="340" name="Groupe 210"/>
+          <p:cNvPr id="338" name="Groupe 210"/>
           <p:cNvGrpSpPr/>
           <p:nvPr/>
         </p:nvGrpSpPr>
         <p:grpSpPr>
           <a:xfrm>
-            <a:off x="5032095" y="3665180"/>
-            <a:ext cx="1348453" cy="632042"/>
-            <a:chOff x="0" y="0"/>
-            <a:chExt cx="1348451" cy="632040"/>
+            <a:off x="5032090" y="3665180"/>
+            <a:ext cx="1348456" cy="632048"/>
+            <a:chOff x="-1" y="0"/>
+            <a:chExt cx="1348454" cy="632046"/>
           </a:xfrm>
         </p:grpSpPr>
         <p:grpSp>
           <p:nvGrpSpPr>
-            <p:cNvPr id="338" name="Groupe 121"/>
+            <p:cNvPr id="336" name="Groupe 121"/>
             <p:cNvGrpSpPr/>
             <p:nvPr/>
           </p:nvGrpSpPr>
           <p:grpSpPr>
             <a:xfrm>
-              <a:off x="-1" y="0"/>
-              <a:ext cx="1348453" cy="632041"/>
+              <a:off x="-2" y="0"/>
+              <a:ext cx="1348455" cy="632047"/>
               <a:chOff x="0" y="0"/>
-              <a:chExt cx="1348451" cy="632040"/>
+              <a:chExt cx="1348454" cy="632046"/>
             </a:xfrm>
           </p:grpSpPr>
           <p:pic>
             <p:nvPicPr>
-              <p:cNvPr id="336" name="Image 2" descr="Image 2"/>
+              <p:cNvPr id="334" name="Image 2" descr="Image 2"/>
               <p:cNvPicPr>
                 <a:picLocks noChangeAspect="1"/>
               </p:cNvPicPr>
@@ -4435,7 +4427,7 @@
             <p:spPr>
               <a:xfrm>
                 <a:off x="-1" y="0"/>
-                <a:ext cx="713749" cy="632041"/>
+                <a:ext cx="713755" cy="632047"/>
               </a:xfrm>
               <a:prstGeom prst="rect">
                 <a:avLst/>
@@ -4449,13 +4441,13 @@
           </p:pic>
           <p:sp>
             <p:nvSpPr>
-              <p:cNvPr id="337" name="ZoneTexte 115"/>
+              <p:cNvPr id="335" name="ZoneTexte 115"/>
               <p:cNvSpPr txBox="1"/>
               <p:nvPr/>
             </p:nvSpPr>
             <p:spPr>
               <a:xfrm>
-                <a:off x="661256" y="289406"/>
+                <a:off x="661258" y="289408"/>
                 <a:ext cx="687196" cy="307337"/>
               </a:xfrm>
               <a:prstGeom prst="rect">
@@ -4481,9 +4473,9 @@
               <a:p>
                 <a:pPr>
                   <a:defRPr>
-                    <a:latin typeface="+mn-lt"/>
-                    <a:ea typeface="+mn-ea"/>
-                    <a:cs typeface="+mn-cs"/>
+                    <a:latin typeface="+mj-lt"/>
+                    <a:ea typeface="+mj-ea"/>
+                    <a:cs typeface="+mj-cs"/>
                     <a:sym typeface="Arial"/>
                   </a:defRPr>
                 </a:pPr>
@@ -4505,7 +4497,7 @@
         </p:grpSp>
         <p:pic>
           <p:nvPicPr>
-            <p:cNvPr id="339" name="Image 198" descr="Image 198"/>
+            <p:cNvPr id="337" name="Image 198" descr="Image 198"/>
             <p:cNvPicPr>
               <a:picLocks noChangeAspect="1"/>
             </p:cNvPicPr>
@@ -4521,8 +4513,8 @@
           </p:blipFill>
           <p:spPr>
             <a:xfrm>
-              <a:off x="618101" y="50390"/>
-              <a:ext cx="351250" cy="213378"/>
+              <a:off x="618103" y="50390"/>
+              <a:ext cx="351254" cy="213380"/>
             </a:xfrm>
             <a:prstGeom prst="rect">
               <a:avLst/>
@@ -4537,35 +4529,35 @@
       </p:grpSp>
       <p:grpSp>
         <p:nvGrpSpPr>
-          <p:cNvPr id="345" name="Groupe 213"/>
+          <p:cNvPr id="343" name="Groupe 213"/>
           <p:cNvGrpSpPr/>
           <p:nvPr/>
         </p:nvGrpSpPr>
         <p:grpSpPr>
           <a:xfrm>
-            <a:off x="2785854" y="936404"/>
-            <a:ext cx="1149389" cy="1137735"/>
-            <a:chOff x="0" y="-2"/>
-            <a:chExt cx="1149388" cy="1137733"/>
+            <a:off x="2785852" y="936399"/>
+            <a:ext cx="1149397" cy="1137743"/>
+            <a:chOff x="-1" y="-1"/>
+            <a:chExt cx="1149396" cy="1137741"/>
           </a:xfrm>
         </p:grpSpPr>
         <p:grpSp>
           <p:nvGrpSpPr>
-            <p:cNvPr id="343" name="Groupe 37"/>
+            <p:cNvPr id="341" name="Groupe 37"/>
             <p:cNvGrpSpPr/>
             <p:nvPr/>
           </p:nvGrpSpPr>
           <p:grpSpPr>
             <a:xfrm>
-              <a:off x="209350" y="-3"/>
-              <a:ext cx="940039" cy="1137735"/>
-              <a:chOff x="0" y="-1"/>
-              <a:chExt cx="940038" cy="1137733"/>
+              <a:off x="209350" y="-2"/>
+              <a:ext cx="940046" cy="1137742"/>
+              <a:chOff x="0" y="0"/>
+              <a:chExt cx="940044" cy="1137741"/>
             </a:xfrm>
           </p:grpSpPr>
           <p:pic>
             <p:nvPicPr>
-              <p:cNvPr id="341" name="Image 27" descr="Image 27"/>
+              <p:cNvPr id="339" name="Image 27" descr="Image 27"/>
               <p:cNvPicPr>
                 <a:picLocks noChangeAspect="1"/>
               </p:cNvPicPr>
@@ -4581,8 +4573,8 @@
             </p:blipFill>
             <p:spPr>
               <a:xfrm>
-                <a:off x="152389" y="-2"/>
-                <a:ext cx="571736" cy="638217"/>
+                <a:off x="152389" y="-1"/>
+                <a:ext cx="571741" cy="638222"/>
               </a:xfrm>
               <a:prstGeom prst="rect">
                 <a:avLst/>
@@ -4596,7 +4588,7 @@
           </p:pic>
           <p:pic>
             <p:nvPicPr>
-              <p:cNvPr id="342" name="Image 17" descr="Image 17"/>
+              <p:cNvPr id="340" name="Image 17" descr="Image 17"/>
               <p:cNvPicPr>
                 <a:picLocks noChangeAspect="1"/>
               </p:cNvPicPr>
@@ -4612,8 +4604,8 @@
             </p:blipFill>
             <p:spPr>
               <a:xfrm>
-                <a:off x="0" y="555407"/>
-                <a:ext cx="940039" cy="582326"/>
+                <a:off x="0" y="555409"/>
+                <a:ext cx="940045" cy="582332"/>
               </a:xfrm>
               <a:prstGeom prst="rect">
                 <a:avLst/>
@@ -4628,7 +4620,7 @@
         </p:grpSp>
         <p:pic>
           <p:nvPicPr>
-            <p:cNvPr id="344" name="Image 201" descr="Image 201"/>
+            <p:cNvPr id="342" name="Image 201" descr="Image 201"/>
             <p:cNvPicPr>
               <a:picLocks noChangeAspect="1"/>
             </p:cNvPicPr>
@@ -4644,8 +4636,8 @@
           </p:blipFill>
           <p:spPr>
             <a:xfrm>
-              <a:off x="0" y="419989"/>
-              <a:ext cx="351250" cy="213379"/>
+              <a:off x="-2" y="419992"/>
+              <a:ext cx="351254" cy="213382"/>
             </a:xfrm>
             <a:prstGeom prst="rect">
               <a:avLst/>
@@ -4686,7 +4678,7 @@
       </p:grpSpPr>
       <p:pic>
         <p:nvPicPr>
-          <p:cNvPr id="347" name="Fond Manchester United" descr="Fond Manchester United"/>
+          <p:cNvPr id="345" name="Fond Manchester United" descr="Fond Manchester United"/>
           <p:cNvPicPr>
             <a:picLocks noChangeAspect="1"/>
           </p:cNvPicPr>
@@ -4716,7 +4708,7 @@
       </p:pic>
       <p:sp>
         <p:nvSpPr>
-          <p:cNvPr id="348" name="Google Shape;75;p16"/>
+          <p:cNvPr id="346" name="Google Shape;75;p16"/>
           <p:cNvSpPr txBox="1"/>
           <p:nvPr>
             <p:ph type="title"/>
@@ -4724,15 +4716,15 @@
         </p:nvSpPr>
         <p:spPr>
           <a:xfrm>
-            <a:off x="1192662" y="403309"/>
-            <a:ext cx="5315105" cy="533103"/>
+            <a:off x="1192661" y="403307"/>
+            <a:ext cx="5315108" cy="533106"/>
           </a:xfrm>
           <a:prstGeom prst="rect">
             <a:avLst/>
           </a:prstGeom>
         </p:spPr>
         <p:txBody>
-          <a:bodyPr/>
+          <a:bodyPr anchor="ctr"/>
           <a:lstStyle>
             <a:lvl1pPr defTabSz="822958">
               <a:defRPr sz="2200">
@@ -4756,7 +4748,7 @@
       </p:sp>
       <p:pic>
         <p:nvPicPr>
-          <p:cNvPr id="349" name="Google Shape;76;p16" descr="Google Shape;76;p16"/>
+          <p:cNvPr id="347" name="Google Shape;76;p16" descr="Google Shape;76;p16"/>
           <p:cNvPicPr>
             <a:picLocks noChangeAspect="1"/>
           </p:cNvPicPr>
@@ -4773,7 +4765,7 @@
         <p:spPr>
           <a:xfrm>
             <a:off x="463375" y="482852"/>
-            <a:ext cx="576901" cy="385907"/>
+            <a:ext cx="576901" cy="385909"/>
           </a:xfrm>
           <a:prstGeom prst="rect">
             <a:avLst/>
@@ -4785,7 +4777,7 @@
       </p:pic>
       <p:sp>
         <p:nvSpPr>
-          <p:cNvPr id="350" name="Google Shape;77;p16"/>
+          <p:cNvPr id="348" name="Google Shape;77;p16"/>
           <p:cNvSpPr/>
           <p:nvPr/>
         </p:nvSpPr>
@@ -4810,9 +4802,9 @@
           <a:p>
             <a:pPr>
               <a:defRPr>
-                <a:latin typeface="+mn-lt"/>
-                <a:ea typeface="+mn-ea"/>
-                <a:cs typeface="+mn-cs"/>
+                <a:latin typeface="+mj-lt"/>
+                <a:ea typeface="+mj-ea"/>
+                <a:cs typeface="+mj-cs"/>
                 <a:sym typeface="Arial"/>
               </a:defRPr>
             </a:pPr>
@@ -4821,14 +4813,14 @@
       </p:sp>
       <p:sp>
         <p:nvSpPr>
-          <p:cNvPr id="351" name="ZoneTexte 2"/>
+          <p:cNvPr id="349" name="ZoneTexte 2"/>
           <p:cNvSpPr txBox="1"/>
           <p:nvPr/>
         </p:nvSpPr>
         <p:spPr>
           <a:xfrm>
             <a:off x="1238384" y="1975180"/>
-            <a:ext cx="7036935" cy="1635758"/>
+            <a:ext cx="7036935" cy="1635757"/>
           </a:xfrm>
           <a:prstGeom prst="rect">
             <a:avLst/>
@@ -4919,7 +4911,7 @@
               </a:defRPr>
             </a:pPr>
             <a:r>
-              <a:t>Amélioration du modèle : Passer à une target « probabilité de gagner un match »</a:t>
+              <a:t>Amélioration du modèle : passer à une target « probabilité de gagner un match »</a:t>
             </a:r>
           </a:p>
           <a:p>
@@ -5055,7 +5047,7 @@
       </p:grpSpPr>
       <p:pic>
         <p:nvPicPr>
-          <p:cNvPr id="353" name="Fond Bayern Munich" descr="Fond Bayern Munich"/>
+          <p:cNvPr id="351" name="Fond Bayern Munich" descr="Fond Bayern Munich"/>
           <p:cNvPicPr>
             <a:picLocks noChangeAspect="1"/>
           </p:cNvPicPr>
@@ -5085,7 +5077,7 @@
       </p:pic>
       <p:sp>
         <p:nvSpPr>
-          <p:cNvPr id="354" name="Google Shape;75;p16"/>
+          <p:cNvPr id="352" name="Google Shape;75;p16"/>
           <p:cNvSpPr txBox="1"/>
           <p:nvPr>
             <p:ph type="title"/>
@@ -5093,15 +5085,15 @@
         </p:nvSpPr>
         <p:spPr>
           <a:xfrm>
-            <a:off x="1192662" y="403309"/>
-            <a:ext cx="5315105" cy="533103"/>
+            <a:off x="1192661" y="403307"/>
+            <a:ext cx="5315108" cy="533106"/>
           </a:xfrm>
           <a:prstGeom prst="rect">
             <a:avLst/>
           </a:prstGeom>
         </p:spPr>
         <p:txBody>
-          <a:bodyPr/>
+          <a:bodyPr anchor="ctr"/>
           <a:lstStyle>
             <a:lvl1pPr defTabSz="822958">
               <a:defRPr sz="2200">
@@ -5125,7 +5117,7 @@
       </p:sp>
       <p:pic>
         <p:nvPicPr>
-          <p:cNvPr id="355" name="Google Shape;76;p16" descr="Google Shape;76;p16"/>
+          <p:cNvPr id="353" name="Google Shape;76;p16" descr="Google Shape;76;p16"/>
           <p:cNvPicPr>
             <a:picLocks noChangeAspect="1"/>
           </p:cNvPicPr>
@@ -5142,7 +5134,7 @@
         <p:spPr>
           <a:xfrm>
             <a:off x="463375" y="482852"/>
-            <a:ext cx="576901" cy="385907"/>
+            <a:ext cx="576901" cy="385909"/>
           </a:xfrm>
           <a:prstGeom prst="rect">
             <a:avLst/>
@@ -5154,7 +5146,7 @@
       </p:pic>
       <p:sp>
         <p:nvSpPr>
-          <p:cNvPr id="356" name="Google Shape;77;p16"/>
+          <p:cNvPr id="354" name="Google Shape;77;p16"/>
           <p:cNvSpPr/>
           <p:nvPr/>
         </p:nvSpPr>
@@ -5179,9 +5171,9 @@
           <a:p>
             <a:pPr>
               <a:defRPr>
-                <a:latin typeface="+mn-lt"/>
-                <a:ea typeface="+mn-ea"/>
-                <a:cs typeface="+mn-cs"/>
+                <a:latin typeface="+mj-lt"/>
+                <a:ea typeface="+mj-ea"/>
+                <a:cs typeface="+mj-cs"/>
                 <a:sym typeface="Arial"/>
               </a:defRPr>
             </a:pPr>
@@ -5190,13 +5182,13 @@
       </p:sp>
       <p:sp>
         <p:nvSpPr>
-          <p:cNvPr id="357" name="ZoneTexte 2"/>
+          <p:cNvPr id="355" name="ZoneTexte 2"/>
           <p:cNvSpPr txBox="1"/>
           <p:nvPr/>
         </p:nvSpPr>
         <p:spPr>
           <a:xfrm>
-            <a:off x="1238383" y="1937025"/>
+            <a:off x="1238383" y="1937023"/>
             <a:ext cx="6974090" cy="1907537"/>
           </a:xfrm>
           <a:prstGeom prst="rect">
@@ -5432,7 +5424,7 @@
       </p:grpSpPr>
       <p:sp>
         <p:nvSpPr>
-          <p:cNvPr id="359" name="Google Shape;110;p21"/>
+          <p:cNvPr id="357" name="Google Shape;110;p21"/>
           <p:cNvSpPr txBox="1"/>
           <p:nvPr>
             <p:ph type="title"/>
@@ -5441,7 +5433,7 @@
         <p:spPr>
           <a:xfrm>
             <a:off x="1089725" y="1970775"/>
-            <a:ext cx="6269100" cy="698403"/>
+            <a:ext cx="6269100" cy="698405"/>
           </a:xfrm>
           <a:prstGeom prst="rect">
             <a:avLst/>
@@ -5472,7 +5464,7 @@
       </p:sp>
       <p:pic>
         <p:nvPicPr>
-          <p:cNvPr id="360" name="Google Shape;111;p21" descr="Google Shape;111;p21"/>
+          <p:cNvPr id="358" name="Google Shape;111;p21" descr="Google Shape;111;p21"/>
           <p:cNvPicPr>
             <a:picLocks noChangeAspect="1"/>
           </p:cNvPicPr>
@@ -5501,7 +5493,7 @@
       </p:pic>
       <p:pic>
         <p:nvPicPr>
-          <p:cNvPr id="361" name="Google Shape;112;p21" descr="Google Shape;112;p21"/>
+          <p:cNvPr id="359" name="Google Shape;112;p21" descr="Google Shape;112;p21"/>
           <p:cNvPicPr>
             <a:picLocks noChangeAspect="1"/>
           </p:cNvPicPr>
@@ -5556,7 +5548,7 @@
       </p:grpSpPr>
       <p:pic>
         <p:nvPicPr>
-          <p:cNvPr id="363" name="Fond logo club" descr="Fond logo club"/>
+          <p:cNvPr id="361" name="Fond logo club" descr="Fond logo club"/>
           <p:cNvPicPr>
             <a:picLocks noChangeAspect="1"/>
           </p:cNvPicPr>
@@ -5587,7 +5579,7 @@
       </p:pic>
       <p:sp>
         <p:nvSpPr>
-          <p:cNvPr id="364" name="Google Shape;75;p16"/>
+          <p:cNvPr id="362" name="Google Shape;75;p16"/>
           <p:cNvSpPr txBox="1"/>
           <p:nvPr>
             <p:ph type="title"/>
@@ -5595,15 +5587,15 @@
         </p:nvSpPr>
         <p:spPr>
           <a:xfrm>
-            <a:off x="1192662" y="403309"/>
-            <a:ext cx="5315105" cy="533103"/>
+            <a:off x="1192661" y="403307"/>
+            <a:ext cx="5315108" cy="533106"/>
           </a:xfrm>
           <a:prstGeom prst="rect">
             <a:avLst/>
           </a:prstGeom>
         </p:spPr>
         <p:txBody>
-          <a:bodyPr/>
+          <a:bodyPr anchor="ctr"/>
           <a:lstStyle>
             <a:lvl1pPr defTabSz="822958">
               <a:defRPr sz="2200">
@@ -5627,7 +5619,7 @@
       </p:sp>
       <p:pic>
         <p:nvPicPr>
-          <p:cNvPr id="365" name="Google Shape;76;p16" descr="Google Shape;76;p16"/>
+          <p:cNvPr id="363" name="Google Shape;76;p16" descr="Google Shape;76;p16"/>
           <p:cNvPicPr>
             <a:picLocks noChangeAspect="1"/>
           </p:cNvPicPr>
@@ -5644,7 +5636,7 @@
         <p:spPr>
           <a:xfrm>
             <a:off x="463375" y="482852"/>
-            <a:ext cx="576901" cy="385907"/>
+            <a:ext cx="576901" cy="385909"/>
           </a:xfrm>
           <a:prstGeom prst="rect">
             <a:avLst/>
@@ -5656,7 +5648,7 @@
       </p:pic>
       <p:sp>
         <p:nvSpPr>
-          <p:cNvPr id="366" name="Google Shape;77;p16"/>
+          <p:cNvPr id="364" name="Google Shape;77;p16"/>
           <p:cNvSpPr/>
           <p:nvPr/>
         </p:nvSpPr>
@@ -5681,9 +5673,9 @@
           <a:p>
             <a:pPr>
               <a:defRPr>
-                <a:latin typeface="+mn-lt"/>
-                <a:ea typeface="+mn-ea"/>
-                <a:cs typeface="+mn-cs"/>
+                <a:latin typeface="+mj-lt"/>
+                <a:ea typeface="+mj-ea"/>
+                <a:cs typeface="+mj-cs"/>
                 <a:sym typeface="Arial"/>
               </a:defRPr>
             </a:pPr>
@@ -5692,14 +5684,14 @@
       </p:sp>
       <p:sp>
         <p:nvSpPr>
-          <p:cNvPr id="367" name="ZoneTexte 2"/>
+          <p:cNvPr id="365" name="ZoneTexte 2"/>
           <p:cNvSpPr txBox="1"/>
           <p:nvPr/>
         </p:nvSpPr>
         <p:spPr>
           <a:xfrm>
-            <a:off x="2089323" y="1450335"/>
-            <a:ext cx="4484504" cy="690878"/>
+            <a:off x="2089322" y="1450335"/>
+            <a:ext cx="4484507" cy="690877"/>
           </a:xfrm>
           <a:prstGeom prst="rect">
             <a:avLst/>
@@ -5797,7 +5789,7 @@
       </p:sp>
       <p:sp>
         <p:nvSpPr>
-          <p:cNvPr id="368" name="ZoneTexte 4"/>
+          <p:cNvPr id="366" name="ZoneTexte 4"/>
           <p:cNvSpPr txBox="1"/>
           <p:nvPr/>
         </p:nvSpPr>
@@ -5956,7 +5948,7 @@
       </p:grpSpPr>
       <p:sp>
         <p:nvSpPr>
-          <p:cNvPr id="370" name="Google Shape;75;p16"/>
+          <p:cNvPr id="368" name="Google Shape;75;p16"/>
           <p:cNvSpPr txBox="1"/>
           <p:nvPr>
             <p:ph type="title"/>
@@ -5964,15 +5956,15 @@
         </p:nvSpPr>
         <p:spPr>
           <a:xfrm>
-            <a:off x="1192662" y="403309"/>
-            <a:ext cx="5315105" cy="533103"/>
+            <a:off x="1192661" y="403307"/>
+            <a:ext cx="5315108" cy="533106"/>
           </a:xfrm>
           <a:prstGeom prst="rect">
             <a:avLst/>
           </a:prstGeom>
         </p:spPr>
         <p:txBody>
-          <a:bodyPr/>
+          <a:bodyPr anchor="ctr"/>
           <a:lstStyle>
             <a:lvl1pPr defTabSz="822958">
               <a:defRPr sz="2200">
@@ -5996,7 +5988,7 @@
       </p:sp>
       <p:pic>
         <p:nvPicPr>
-          <p:cNvPr id="371" name="Google Shape;76;p16" descr="Google Shape;76;p16"/>
+          <p:cNvPr id="369" name="Google Shape;76;p16" descr="Google Shape;76;p16"/>
           <p:cNvPicPr>
             <a:picLocks noChangeAspect="1"/>
           </p:cNvPicPr>
@@ -6013,7 +6005,7 @@
         <p:spPr>
           <a:xfrm>
             <a:off x="463375" y="482852"/>
-            <a:ext cx="576901" cy="385907"/>
+            <a:ext cx="576901" cy="385909"/>
           </a:xfrm>
           <a:prstGeom prst="rect">
             <a:avLst/>
@@ -6025,7 +6017,7 @@
       </p:pic>
       <p:sp>
         <p:nvSpPr>
-          <p:cNvPr id="372" name="Google Shape;77;p16"/>
+          <p:cNvPr id="370" name="Google Shape;77;p16"/>
           <p:cNvSpPr/>
           <p:nvPr/>
         </p:nvSpPr>
@@ -6050,9 +6042,9 @@
           <a:p>
             <a:pPr>
               <a:defRPr>
-                <a:latin typeface="+mn-lt"/>
-                <a:ea typeface="+mn-ea"/>
-                <a:cs typeface="+mn-cs"/>
+                <a:latin typeface="+mj-lt"/>
+                <a:ea typeface="+mj-ea"/>
+                <a:cs typeface="+mj-cs"/>
                 <a:sym typeface="Arial"/>
               </a:defRPr>
             </a:pPr>
@@ -6061,7 +6053,7 @@
       </p:sp>
       <p:pic>
         <p:nvPicPr>
-          <p:cNvPr id="373" name="Image 2" descr="Image 2"/>
+          <p:cNvPr id="371" name="Image 2" descr="Image 2"/>
           <p:cNvPicPr>
             <a:picLocks noChangeAspect="1"/>
           </p:cNvPicPr>
@@ -6078,7 +6070,7 @@
         <p:spPr>
           <a:xfrm>
             <a:off x="1919621" y="1716950"/>
-            <a:ext cx="759823" cy="698367"/>
+            <a:ext cx="759825" cy="698369"/>
           </a:xfrm>
           <a:prstGeom prst="rect">
             <a:avLst/>
@@ -6090,21 +6082,21 @@
       </p:pic>
       <p:grpSp>
         <p:nvGrpSpPr>
-          <p:cNvPr id="376" name="Groupe 35"/>
+          <p:cNvPr id="374" name="Groupe 35"/>
           <p:cNvGrpSpPr/>
           <p:nvPr/>
         </p:nvGrpSpPr>
         <p:grpSpPr>
           <a:xfrm>
-            <a:off x="4261163" y="1653244"/>
-            <a:ext cx="1508896" cy="1050888"/>
-            <a:chOff x="0" y="-1"/>
-            <a:chExt cx="1508895" cy="1050887"/>
+            <a:off x="4261162" y="1653242"/>
+            <a:ext cx="1508901" cy="1050889"/>
+            <a:chOff x="0" y="0"/>
+            <a:chExt cx="1508899" cy="1050888"/>
           </a:xfrm>
         </p:grpSpPr>
         <p:pic>
           <p:nvPicPr>
-            <p:cNvPr id="374" name="Image 6" descr="Image 6"/>
+            <p:cNvPr id="372" name="Image 6" descr="Image 6"/>
             <p:cNvPicPr>
               <a:picLocks noChangeAspect="1"/>
             </p:cNvPicPr>
@@ -6120,8 +6112,8 @@
           </p:blipFill>
           <p:spPr>
             <a:xfrm>
-              <a:off x="0" y="-2"/>
-              <a:ext cx="1508896" cy="762071"/>
+              <a:off x="-1" y="-1"/>
+              <a:ext cx="1508900" cy="762074"/>
             </a:xfrm>
             <a:prstGeom prst="rect">
               <a:avLst/>
@@ -6135,14 +6127,14 @@
         </p:pic>
         <p:sp>
           <p:nvSpPr>
-            <p:cNvPr id="375" name="ZoneTexte 7"/>
+            <p:cNvPr id="373" name="ZoneTexte 7"/>
             <p:cNvSpPr txBox="1"/>
             <p:nvPr/>
           </p:nvSpPr>
           <p:spPr>
             <a:xfrm>
-              <a:off x="345738" y="762066"/>
-              <a:ext cx="779308" cy="288821"/>
+              <a:off x="345738" y="762068"/>
+              <a:ext cx="779308" cy="288820"/>
             </a:xfrm>
             <a:prstGeom prst="rect">
               <a:avLst/>
@@ -6166,9 +6158,9 @@
             <a:lstStyle>
               <a:lvl1pPr>
                 <a:defRPr>
-                  <a:latin typeface="+mn-lt"/>
-                  <a:ea typeface="+mn-ea"/>
-                  <a:cs typeface="+mn-cs"/>
+                  <a:latin typeface="+mj-lt"/>
+                  <a:ea typeface="+mj-ea"/>
+                  <a:cs typeface="+mj-cs"/>
                   <a:sym typeface="Arial"/>
                 </a:defRPr>
               </a:lvl1pPr>
@@ -6184,21 +6176,21 @@
       </p:grpSp>
       <p:grpSp>
         <p:nvGrpSpPr>
-          <p:cNvPr id="379" name="Groupe 34"/>
+          <p:cNvPr id="377" name="Groupe 34"/>
           <p:cNvGrpSpPr/>
           <p:nvPr/>
         </p:nvGrpSpPr>
         <p:grpSpPr>
           <a:xfrm>
-            <a:off x="5770055" y="1653244"/>
-            <a:ext cx="1508896" cy="1050888"/>
-            <a:chOff x="0" y="-1"/>
-            <a:chExt cx="1508895" cy="1050887"/>
+            <a:off x="5770054" y="1653242"/>
+            <a:ext cx="1508901" cy="1050889"/>
+            <a:chOff x="0" y="0"/>
+            <a:chExt cx="1508899" cy="1050888"/>
           </a:xfrm>
         </p:grpSpPr>
         <p:pic>
           <p:nvPicPr>
-            <p:cNvPr id="377" name="Image 9" descr="Image 9"/>
+            <p:cNvPr id="375" name="Image 9" descr="Image 9"/>
             <p:cNvPicPr>
               <a:picLocks noChangeAspect="1"/>
             </p:cNvPicPr>
@@ -6214,8 +6206,8 @@
           </p:blipFill>
           <p:spPr>
             <a:xfrm>
-              <a:off x="0" y="-2"/>
-              <a:ext cx="1508896" cy="762071"/>
+              <a:off x="-1" y="-1"/>
+              <a:ext cx="1508900" cy="762074"/>
             </a:xfrm>
             <a:prstGeom prst="rect">
               <a:avLst/>
@@ -6229,14 +6221,14 @@
         </p:pic>
         <p:sp>
           <p:nvSpPr>
-            <p:cNvPr id="378" name="ZoneTexte 11"/>
+            <p:cNvPr id="376" name="ZoneTexte 11"/>
             <p:cNvSpPr txBox="1"/>
             <p:nvPr/>
           </p:nvSpPr>
           <p:spPr>
             <a:xfrm>
-              <a:off x="345739" y="762066"/>
-              <a:ext cx="588399" cy="288821"/>
+              <a:off x="345739" y="762068"/>
+              <a:ext cx="588399" cy="288820"/>
             </a:xfrm>
             <a:prstGeom prst="rect">
               <a:avLst/>
@@ -6260,9 +6252,9 @@
             <a:lstStyle>
               <a:lvl1pPr>
                 <a:defRPr>
-                  <a:latin typeface="+mn-lt"/>
-                  <a:ea typeface="+mn-ea"/>
-                  <a:cs typeface="+mn-cs"/>
+                  <a:latin typeface="+mj-lt"/>
+                  <a:ea typeface="+mj-ea"/>
+                  <a:cs typeface="+mj-cs"/>
                   <a:sym typeface="Arial"/>
                 </a:defRPr>
               </a:lvl1pPr>
@@ -6278,7 +6270,7 @@
       </p:grpSp>
       <p:pic>
         <p:nvPicPr>
-          <p:cNvPr id="380" name="Image 13" descr="Image 13"/>
+          <p:cNvPr id="378" name="Image 13" descr="Image 13"/>
           <p:cNvPicPr>
             <a:picLocks noChangeAspect="1"/>
           </p:cNvPicPr>
@@ -6295,7 +6287,7 @@
         <p:spPr>
           <a:xfrm>
             <a:off x="7318622" y="1680726"/>
-            <a:ext cx="1143102" cy="1219309"/>
+            <a:ext cx="1143104" cy="1219311"/>
           </a:xfrm>
           <a:prstGeom prst="rect">
             <a:avLst/>
@@ -6307,7 +6299,7 @@
       </p:pic>
       <p:pic>
         <p:nvPicPr>
-          <p:cNvPr id="381" name="Image 19" descr="Image 19"/>
+          <p:cNvPr id="379" name="Image 19" descr="Image 19"/>
           <p:cNvPicPr>
             <a:picLocks noChangeAspect="1"/>
           </p:cNvPicPr>
@@ -6324,7 +6316,7 @@
         <p:spPr>
           <a:xfrm>
             <a:off x="6699570" y="2928402"/>
-            <a:ext cx="1198430" cy="698367"/>
+            <a:ext cx="1198432" cy="698369"/>
           </a:xfrm>
           <a:prstGeom prst="rect">
             <a:avLst/>
@@ -6336,7 +6328,7 @@
       </p:pic>
       <p:pic>
         <p:nvPicPr>
-          <p:cNvPr id="382" name="Image 21" descr="Image 21"/>
+          <p:cNvPr id="380" name="Image 21" descr="Image 21"/>
           <p:cNvPicPr>
             <a:picLocks noChangeAspect="1"/>
           </p:cNvPicPr>
@@ -6353,7 +6345,7 @@
         <p:spPr>
           <a:xfrm>
             <a:off x="1782757" y="3564866"/>
-            <a:ext cx="713746" cy="632038"/>
+            <a:ext cx="713748" cy="632040"/>
           </a:xfrm>
           <a:prstGeom prst="rect">
             <a:avLst/>
@@ -6365,7 +6357,7 @@
       </p:pic>
       <p:pic>
         <p:nvPicPr>
-          <p:cNvPr id="383" name="Image 23" descr="Image 23"/>
+          <p:cNvPr id="381" name="Image 23" descr="Image 23"/>
           <p:cNvPicPr>
             <a:picLocks noChangeAspect="1"/>
           </p:cNvPicPr>
@@ -6382,7 +6374,7 @@
         <p:spPr>
           <a:xfrm>
             <a:off x="3883493" y="3663755"/>
-            <a:ext cx="940036" cy="582324"/>
+            <a:ext cx="940038" cy="582326"/>
           </a:xfrm>
           <a:prstGeom prst="rect">
             <a:avLst/>
@@ -6394,7 +6386,7 @@
       </p:pic>
       <p:pic>
         <p:nvPicPr>
-          <p:cNvPr id="384" name="Image 25" descr="Image 25"/>
+          <p:cNvPr id="382" name="Image 25" descr="Image 25"/>
           <p:cNvPicPr>
             <a:picLocks noChangeAspect="1"/>
           </p:cNvPicPr>
@@ -6411,7 +6403,7 @@
         <p:spPr>
           <a:xfrm>
             <a:off x="5395183" y="3812004"/>
-            <a:ext cx="1010882" cy="319062"/>
+            <a:ext cx="1010884" cy="319064"/>
           </a:xfrm>
           <a:prstGeom prst="rect">
             <a:avLst/>
@@ -6423,7 +6415,7 @@
       </p:pic>
       <p:pic>
         <p:nvPicPr>
-          <p:cNvPr id="385" name="Image 27" descr="Image 27"/>
+          <p:cNvPr id="383" name="Image 27" descr="Image 27"/>
           <p:cNvPicPr>
             <a:picLocks noChangeAspect="1"/>
           </p:cNvPicPr>
@@ -6440,7 +6432,7 @@
         <p:spPr>
           <a:xfrm>
             <a:off x="2724293" y="3542217"/>
-            <a:ext cx="728055" cy="599035"/>
+            <a:ext cx="728055" cy="599037"/>
           </a:xfrm>
           <a:prstGeom prst="rect">
             <a:avLst/>
@@ -6452,7 +6444,7 @@
       </p:pic>
       <p:pic>
         <p:nvPicPr>
-          <p:cNvPr id="386" name="Image 29" descr="Image 29"/>
+          <p:cNvPr id="384" name="Image 29" descr="Image 29"/>
           <p:cNvPicPr>
             <a:picLocks noChangeAspect="1"/>
           </p:cNvPicPr>
@@ -6469,7 +6461,7 @@
         <p:spPr>
           <a:xfrm>
             <a:off x="6634663" y="3669243"/>
-            <a:ext cx="571734" cy="638214"/>
+            <a:ext cx="571736" cy="638216"/>
           </a:xfrm>
           <a:prstGeom prst="rect">
             <a:avLst/>
@@ -6481,7 +6473,7 @@
       </p:pic>
       <p:pic>
         <p:nvPicPr>
-          <p:cNvPr id="387" name="Image 31" descr="Image 31"/>
+          <p:cNvPr id="385" name="Image 31" descr="Image 31"/>
           <p:cNvPicPr>
             <a:picLocks noChangeAspect="1"/>
           </p:cNvPicPr>
@@ -6498,7 +6490,7 @@
         <p:spPr>
           <a:xfrm>
             <a:off x="7617028" y="3666204"/>
-            <a:ext cx="844694" cy="530699"/>
+            <a:ext cx="844696" cy="530701"/>
           </a:xfrm>
           <a:prstGeom prst="rect">
             <a:avLst/>
@@ -6510,7 +6502,7 @@
       </p:pic>
       <p:pic>
         <p:nvPicPr>
-          <p:cNvPr id="388" name="Image 33" descr="Image 33"/>
+          <p:cNvPr id="386" name="Image 33" descr="Image 33"/>
           <p:cNvPicPr>
             <a:picLocks noChangeAspect="1"/>
           </p:cNvPicPr>
@@ -6527,7 +6519,7 @@
         <p:spPr>
           <a:xfrm>
             <a:off x="3566616" y="2831400"/>
-            <a:ext cx="1196483" cy="577615"/>
+            <a:ext cx="1196483" cy="577617"/>
           </a:xfrm>
           <a:prstGeom prst="rect">
             <a:avLst/>
@@ -6539,7 +6531,7 @@
       </p:pic>
       <p:pic>
         <p:nvPicPr>
-          <p:cNvPr id="389" name="Image 37" descr="Image 37"/>
+          <p:cNvPr id="387" name="Image 37" descr="Image 37"/>
           <p:cNvPicPr>
             <a:picLocks noChangeAspect="1"/>
           </p:cNvPicPr>
@@ -6556,7 +6548,7 @@
         <p:spPr>
           <a:xfrm>
             <a:off x="583047" y="2520892"/>
-            <a:ext cx="699804" cy="627210"/>
+            <a:ext cx="699806" cy="627212"/>
           </a:xfrm>
           <a:prstGeom prst="rect">
             <a:avLst/>
@@ -6568,7 +6560,7 @@
       </p:pic>
       <p:pic>
         <p:nvPicPr>
-          <p:cNvPr id="390" name="Image 3" descr="Image 3"/>
+          <p:cNvPr id="388" name="Image 3" descr="Image 3"/>
           <p:cNvPicPr>
             <a:picLocks noChangeAspect="1"/>
           </p:cNvPicPr>
@@ -6585,7 +6577,7 @@
         <p:spPr>
           <a:xfrm>
             <a:off x="807362" y="3635006"/>
-            <a:ext cx="759822" cy="778355"/>
+            <a:ext cx="759822" cy="778357"/>
           </a:xfrm>
           <a:prstGeom prst="rect">
             <a:avLst/>
@@ -6597,7 +6589,7 @@
       </p:pic>
       <p:pic>
         <p:nvPicPr>
-          <p:cNvPr id="391" name="Image 8" descr="Image 8"/>
+          <p:cNvPr id="389" name="Image 8" descr="Image 8"/>
           <p:cNvPicPr>
             <a:picLocks noChangeAspect="1"/>
           </p:cNvPicPr>
@@ -6614,7 +6606,7 @@
         <p:spPr>
           <a:xfrm>
             <a:off x="5736113" y="2855183"/>
-            <a:ext cx="707869" cy="681972"/>
+            <a:ext cx="707871" cy="681974"/>
           </a:xfrm>
           <a:prstGeom prst="rect">
             <a:avLst/>
@@ -6626,7 +6618,7 @@
       </p:pic>
       <p:pic>
         <p:nvPicPr>
-          <p:cNvPr id="392" name="Image 12" descr="Image 12"/>
+          <p:cNvPr id="390" name="Image 12" descr="Image 12"/>
           <p:cNvPicPr>
             <a:picLocks noChangeAspect="1"/>
           </p:cNvPicPr>
@@ -6643,7 +6635,7 @@
         <p:spPr>
           <a:xfrm>
             <a:off x="5151661" y="2901642"/>
-            <a:ext cx="301645" cy="183243"/>
+            <a:ext cx="301647" cy="183245"/>
           </a:xfrm>
           <a:prstGeom prst="rect">
             <a:avLst/>
@@ -6655,7 +6647,7 @@
       </p:pic>
       <p:pic>
         <p:nvPicPr>
-          <p:cNvPr id="393" name="Image 16" descr="Image 16"/>
+          <p:cNvPr id="391" name="Image 16" descr="Image 16"/>
           <p:cNvPicPr>
             <a:picLocks noChangeAspect="1"/>
           </p:cNvPicPr>
@@ -6672,7 +6664,7 @@
         <p:spPr>
           <a:xfrm>
             <a:off x="2116589" y="2709552"/>
-            <a:ext cx="759823" cy="410657"/>
+            <a:ext cx="759825" cy="410659"/>
           </a:xfrm>
           <a:prstGeom prst="rect">
             <a:avLst/>
@@ -6735,9 +6727,9 @@
           <a:p>
             <a:pPr>
               <a:defRPr>
-                <a:latin typeface="+mn-lt"/>
-                <a:ea typeface="+mn-ea"/>
-                <a:cs typeface="+mn-cs"/>
+                <a:latin typeface="+mj-lt"/>
+                <a:ea typeface="+mj-ea"/>
+                <a:cs typeface="+mj-cs"/>
                 <a:sym typeface="Arial"/>
               </a:defRPr>
             </a:pPr>
@@ -6754,8 +6746,8 @@
         </p:nvSpPr>
         <p:spPr>
           <a:xfrm>
-            <a:off x="390596" y="1138673"/>
-            <a:ext cx="2513109" cy="3458105"/>
+            <a:off x="390595" y="1138673"/>
+            <a:ext cx="2513111" cy="3458105"/>
           </a:xfrm>
           <a:prstGeom prst="rect">
             <a:avLst/>
@@ -6888,7 +6880,7 @@
         <p:spPr>
           <a:xfrm>
             <a:off x="463375" y="482852"/>
-            <a:ext cx="576901" cy="385909"/>
+            <a:ext cx="576901" cy="385911"/>
           </a:xfrm>
           <a:prstGeom prst="rect">
             <a:avLst/>
@@ -6963,15 +6955,15 @@
         </p:nvSpPr>
         <p:spPr>
           <a:xfrm>
-            <a:off x="1192661" y="403305"/>
-            <a:ext cx="5315107" cy="533107"/>
+            <a:off x="1192660" y="403305"/>
+            <a:ext cx="5315110" cy="533109"/>
           </a:xfrm>
           <a:prstGeom prst="rect">
             <a:avLst/>
           </a:prstGeom>
         </p:spPr>
         <p:txBody>
-          <a:bodyPr/>
+          <a:bodyPr anchor="ctr"/>
           <a:lstStyle>
             <a:lvl1pPr defTabSz="822958">
               <a:defRPr sz="2200">
@@ -7012,7 +7004,7 @@
         <p:spPr>
           <a:xfrm>
             <a:off x="463375" y="482852"/>
-            <a:ext cx="576901" cy="385908"/>
+            <a:ext cx="576901" cy="385910"/>
           </a:xfrm>
           <a:prstGeom prst="rect">
             <a:avLst/>
@@ -7049,9 +7041,9 @@
           <a:p>
             <a:pPr>
               <a:defRPr>
-                <a:latin typeface="+mn-lt"/>
-                <a:ea typeface="+mn-ea"/>
-                <a:cs typeface="+mn-cs"/>
+                <a:latin typeface="+mj-lt"/>
+                <a:ea typeface="+mj-ea"/>
+                <a:cs typeface="+mj-cs"/>
                 <a:sym typeface="Arial"/>
               </a:defRPr>
             </a:pPr>
@@ -7094,9 +7086,9 @@
           <a:p>
             <a:pPr>
               <a:defRPr>
-                <a:latin typeface="+mn-lt"/>
-                <a:ea typeface="+mn-ea"/>
-                <a:cs typeface="+mn-cs"/>
+                <a:latin typeface="+mj-lt"/>
+                <a:ea typeface="+mj-ea"/>
+                <a:cs typeface="+mj-cs"/>
                 <a:sym typeface="Arial"/>
               </a:defRPr>
             </a:pPr>
@@ -7112,7 +7104,7 @@
         <p:spPr>
           <a:xfrm>
             <a:off x="849998" y="1384998"/>
-            <a:ext cx="680005" cy="680005"/>
+            <a:ext cx="680009" cy="680009"/>
           </a:xfrm>
           <a:prstGeom prst="ellipse">
             <a:avLst/>
@@ -7130,9 +7122,9 @@
           <a:p>
             <a:pPr>
               <a:defRPr>
-                <a:latin typeface="+mn-lt"/>
-                <a:ea typeface="+mn-ea"/>
-                <a:cs typeface="+mn-cs"/>
+                <a:latin typeface="+mj-lt"/>
+                <a:ea typeface="+mj-ea"/>
+                <a:cs typeface="+mj-cs"/>
                 <a:sym typeface="Arial"/>
               </a:defRPr>
             </a:pPr>
@@ -7158,7 +7150,7 @@
         <p:spPr>
           <a:xfrm>
             <a:off x="990000" y="1525000"/>
-            <a:ext cx="400003" cy="400003"/>
+            <a:ext cx="400005" cy="400005"/>
           </a:xfrm>
           <a:prstGeom prst="rect">
             <a:avLst/>
@@ -7177,7 +7169,7 @@
         <p:spPr>
           <a:xfrm>
             <a:off x="1827999" y="1309999"/>
-            <a:ext cx="6448003" cy="830002"/>
+            <a:ext cx="6448005" cy="830002"/>
           </a:xfrm>
           <a:prstGeom prst="rect">
             <a:avLst/>
@@ -7288,9 +7280,9 @@
           <a:p>
             <a:pPr>
               <a:defRPr>
-                <a:latin typeface="+mn-lt"/>
-                <a:ea typeface="+mn-ea"/>
-                <a:cs typeface="+mn-cs"/>
+                <a:latin typeface="+mj-lt"/>
+                <a:ea typeface="+mj-ea"/>
+                <a:cs typeface="+mj-cs"/>
                 <a:sym typeface="Arial"/>
               </a:defRPr>
             </a:pPr>
@@ -7306,7 +7298,7 @@
         <p:spPr>
           <a:xfrm>
             <a:off x="4722000" y="2470000"/>
-            <a:ext cx="3872003" cy="2130002"/>
+            <a:ext cx="3872005" cy="2130002"/>
           </a:xfrm>
           <a:prstGeom prst="roundRect">
             <a:avLst>
@@ -7333,9 +7325,9 @@
           <a:p>
             <a:pPr>
               <a:defRPr>
-                <a:latin typeface="+mn-lt"/>
-                <a:ea typeface="+mn-ea"/>
-                <a:cs typeface="+mn-cs"/>
+                <a:latin typeface="+mj-lt"/>
+                <a:ea typeface="+mj-ea"/>
+                <a:cs typeface="+mj-cs"/>
                 <a:sym typeface="Arial"/>
               </a:defRPr>
             </a:pPr>
@@ -7350,8 +7342,8 @@
         </p:nvSpPr>
         <p:spPr>
           <a:xfrm>
-            <a:off x="849998" y="2769997"/>
-            <a:ext cx="640005" cy="640005"/>
+            <a:off x="849998" y="2769996"/>
+            <a:ext cx="640009" cy="640010"/>
           </a:xfrm>
           <a:prstGeom prst="ellipse">
             <a:avLst/>
@@ -7369,9 +7361,9 @@
           <a:p>
             <a:pPr>
               <a:defRPr>
-                <a:latin typeface="+mn-lt"/>
-                <a:ea typeface="+mn-ea"/>
-                <a:cs typeface="+mn-cs"/>
+                <a:latin typeface="+mj-lt"/>
+                <a:ea typeface="+mj-ea"/>
+                <a:cs typeface="+mj-cs"/>
                 <a:sym typeface="Arial"/>
               </a:defRPr>
             </a:pPr>
@@ -7386,8 +7378,8 @@
         </p:nvSpPr>
         <p:spPr>
           <a:xfrm>
-            <a:off x="5022000" y="2769997"/>
-            <a:ext cx="640005" cy="640005"/>
+            <a:off x="5022000" y="2769996"/>
+            <a:ext cx="640009" cy="640010"/>
           </a:xfrm>
           <a:prstGeom prst="ellipse">
             <a:avLst/>
@@ -7405,9 +7397,9 @@
           <a:p>
             <a:pPr>
               <a:defRPr>
-                <a:latin typeface="+mn-lt"/>
-                <a:ea typeface="+mn-ea"/>
-                <a:cs typeface="+mn-cs"/>
+                <a:latin typeface="+mj-lt"/>
+                <a:ea typeface="+mj-ea"/>
+                <a:cs typeface="+mj-cs"/>
                 <a:sym typeface="Arial"/>
               </a:defRPr>
             </a:pPr>
@@ -7433,7 +7425,7 @@
         <p:spPr>
           <a:xfrm>
             <a:off x="979998" y="2899997"/>
-            <a:ext cx="380004" cy="380003"/>
+            <a:ext cx="380006" cy="380005"/>
           </a:xfrm>
           <a:prstGeom prst="rect">
             <a:avLst/>
@@ -7462,7 +7454,7 @@
         <p:spPr>
           <a:xfrm>
             <a:off x="5151999" y="2899997"/>
-            <a:ext cx="380003" cy="380003"/>
+            <a:ext cx="380005" cy="380005"/>
           </a:xfrm>
           <a:prstGeom prst="rect">
             <a:avLst/>
@@ -7481,7 +7473,7 @@
         <p:spPr>
           <a:xfrm>
             <a:off x="1727998" y="2769997"/>
-            <a:ext cx="2376004" cy="640003"/>
+            <a:ext cx="2376005" cy="640005"/>
           </a:xfrm>
           <a:prstGeom prst="rect">
             <a:avLst/>
@@ -7528,8 +7520,8 @@
         </p:nvSpPr>
         <p:spPr>
           <a:xfrm>
-            <a:off x="867999" y="3549998"/>
-            <a:ext cx="3236003" cy="750003"/>
+            <a:off x="867997" y="3549998"/>
+            <a:ext cx="3236006" cy="750005"/>
           </a:xfrm>
           <a:prstGeom prst="rect">
             <a:avLst/>
@@ -7577,7 +7569,7 @@
         <p:spPr>
           <a:xfrm>
             <a:off x="5899999" y="2769997"/>
-            <a:ext cx="2376004" cy="640003"/>
+            <a:ext cx="2376006" cy="640005"/>
           </a:xfrm>
           <a:prstGeom prst="rect">
             <a:avLst/>
@@ -7625,7 +7617,7 @@
         <p:spPr>
           <a:xfrm>
             <a:off x="5040000" y="3549998"/>
-            <a:ext cx="3236003" cy="750003"/>
+            <a:ext cx="3236005" cy="750005"/>
           </a:xfrm>
           <a:prstGeom prst="rect">
             <a:avLst/>
@@ -7718,15 +7710,15 @@
         </p:nvSpPr>
         <p:spPr>
           <a:xfrm>
-            <a:off x="1192661" y="403305"/>
-            <a:ext cx="5315107" cy="533107"/>
+            <a:off x="1192660" y="403305"/>
+            <a:ext cx="5315110" cy="533109"/>
           </a:xfrm>
           <a:prstGeom prst="rect">
             <a:avLst/>
           </a:prstGeom>
         </p:spPr>
         <p:txBody>
-          <a:bodyPr/>
+          <a:bodyPr anchor="ctr"/>
           <a:lstStyle>
             <a:lvl1pPr defTabSz="822958">
               <a:defRPr sz="2200">
@@ -7775,9 +7767,9 @@
           <a:p>
             <a:pPr>
               <a:defRPr>
-                <a:latin typeface="+mn-lt"/>
-                <a:ea typeface="+mn-ea"/>
-                <a:cs typeface="+mn-cs"/>
+                <a:latin typeface="+mj-lt"/>
+                <a:ea typeface="+mj-ea"/>
+                <a:cs typeface="+mj-cs"/>
                 <a:sym typeface="Arial"/>
               </a:defRPr>
             </a:pPr>
@@ -7803,7 +7795,7 @@
         <p:spPr>
           <a:xfrm>
             <a:off x="463375" y="482852"/>
-            <a:ext cx="576901" cy="385908"/>
+            <a:ext cx="576901" cy="385910"/>
           </a:xfrm>
           <a:prstGeom prst="rect">
             <a:avLst/>
@@ -7822,7 +7814,7 @@
         <p:spPr>
           <a:xfrm>
             <a:off x="550000" y="1646749"/>
-            <a:ext cx="2441334" cy="1850004"/>
+            <a:ext cx="2441334" cy="1850006"/>
           </a:xfrm>
           <a:prstGeom prst="roundRect">
             <a:avLst>
@@ -7849,9 +7841,9 @@
           <a:p>
             <a:pPr>
               <a:defRPr>
-                <a:latin typeface="+mn-lt"/>
-                <a:ea typeface="+mn-ea"/>
-                <a:cs typeface="+mn-cs"/>
+                <a:latin typeface="+mj-lt"/>
+                <a:ea typeface="+mj-ea"/>
+                <a:cs typeface="+mj-cs"/>
                 <a:sym typeface="Arial"/>
               </a:defRPr>
             </a:pPr>
@@ -7867,7 +7859,7 @@
         <p:spPr>
           <a:xfrm>
             <a:off x="3351333" y="1646749"/>
-            <a:ext cx="2441334" cy="1850004"/>
+            <a:ext cx="2441334" cy="1850006"/>
           </a:xfrm>
           <a:prstGeom prst="roundRect">
             <a:avLst>
@@ -7894,9 +7886,9 @@
           <a:p>
             <a:pPr>
               <a:defRPr>
-                <a:latin typeface="+mn-lt"/>
-                <a:ea typeface="+mn-ea"/>
-                <a:cs typeface="+mn-cs"/>
+                <a:latin typeface="+mj-lt"/>
+                <a:ea typeface="+mj-ea"/>
+                <a:cs typeface="+mj-cs"/>
                 <a:sym typeface="Arial"/>
               </a:defRPr>
             </a:pPr>
@@ -7912,7 +7904,7 @@
         <p:spPr>
           <a:xfrm>
             <a:off x="6152665" y="1646749"/>
-            <a:ext cx="2441336" cy="1850004"/>
+            <a:ext cx="2441338" cy="1850006"/>
           </a:xfrm>
           <a:prstGeom prst="roundRect">
             <a:avLst>
@@ -7939,9 +7931,9 @@
           <a:p>
             <a:pPr>
               <a:defRPr>
-                <a:latin typeface="+mn-lt"/>
-                <a:ea typeface="+mn-ea"/>
-                <a:cs typeface="+mn-cs"/>
+                <a:latin typeface="+mj-lt"/>
+                <a:ea typeface="+mj-ea"/>
+                <a:cs typeface="+mj-cs"/>
                 <a:sym typeface="Arial"/>
               </a:defRPr>
             </a:pPr>
@@ -7957,7 +7949,7 @@
         <p:spPr>
           <a:xfrm>
             <a:off x="3041331" y="2066749"/>
-            <a:ext cx="260004" cy="120003"/>
+            <a:ext cx="260006" cy="120005"/>
           </a:xfrm>
           <a:prstGeom prst="rightArrow">
             <a:avLst>
@@ -7978,9 +7970,9 @@
           <a:p>
             <a:pPr>
               <a:defRPr>
-                <a:latin typeface="+mn-lt"/>
-                <a:ea typeface="+mn-ea"/>
-                <a:cs typeface="+mn-cs"/>
+                <a:latin typeface="+mj-lt"/>
+                <a:ea typeface="+mj-ea"/>
+                <a:cs typeface="+mj-cs"/>
                 <a:sym typeface="Arial"/>
               </a:defRPr>
             </a:pPr>
@@ -7996,7 +7988,7 @@
         <p:spPr>
           <a:xfrm>
             <a:off x="5842665" y="2066749"/>
-            <a:ext cx="260003" cy="120003"/>
+            <a:ext cx="260005" cy="120005"/>
           </a:xfrm>
           <a:prstGeom prst="rightArrow">
             <a:avLst>
@@ -8017,9 +8009,9 @@
           <a:p>
             <a:pPr>
               <a:defRPr>
-                <a:latin typeface="+mn-lt"/>
-                <a:ea typeface="+mn-ea"/>
-                <a:cs typeface="+mn-cs"/>
+                <a:latin typeface="+mj-lt"/>
+                <a:ea typeface="+mj-ea"/>
+                <a:cs typeface="+mj-cs"/>
                 <a:sym typeface="Arial"/>
               </a:defRPr>
             </a:pPr>
@@ -8035,7 +8027,7 @@
         <p:spPr>
           <a:xfrm>
             <a:off x="1460665" y="1816748"/>
-            <a:ext cx="620005" cy="620005"/>
+            <a:ext cx="620009" cy="620009"/>
           </a:xfrm>
           <a:prstGeom prst="ellipse">
             <a:avLst/>
@@ -8053,9 +8045,9 @@
           <a:p>
             <a:pPr>
               <a:defRPr>
-                <a:latin typeface="+mn-lt"/>
-                <a:ea typeface="+mn-ea"/>
-                <a:cs typeface="+mn-cs"/>
+                <a:latin typeface="+mj-lt"/>
+                <a:ea typeface="+mj-ea"/>
+                <a:cs typeface="+mj-cs"/>
                 <a:sym typeface="Arial"/>
               </a:defRPr>
             </a:pPr>
@@ -8071,7 +8063,7 @@
         <p:spPr>
           <a:xfrm>
             <a:off x="4261999" y="1816748"/>
-            <a:ext cx="620005" cy="620005"/>
+            <a:ext cx="620009" cy="620009"/>
           </a:xfrm>
           <a:prstGeom prst="ellipse">
             <a:avLst/>
@@ -8089,9 +8081,9 @@
           <a:p>
             <a:pPr>
               <a:defRPr>
-                <a:latin typeface="+mn-lt"/>
-                <a:ea typeface="+mn-ea"/>
-                <a:cs typeface="+mn-cs"/>
+                <a:latin typeface="+mj-lt"/>
+                <a:ea typeface="+mj-ea"/>
+                <a:cs typeface="+mj-cs"/>
                 <a:sym typeface="Arial"/>
               </a:defRPr>
             </a:pPr>
@@ -8107,7 +8099,7 @@
         <p:spPr>
           <a:xfrm>
             <a:off x="7063330" y="1816748"/>
-            <a:ext cx="620005" cy="620005"/>
+            <a:ext cx="620009" cy="620009"/>
           </a:xfrm>
           <a:prstGeom prst="ellipse">
             <a:avLst/>
@@ -8125,9 +8117,9 @@
           <a:p>
             <a:pPr>
               <a:defRPr>
-                <a:latin typeface="+mn-lt"/>
-                <a:ea typeface="+mn-ea"/>
-                <a:cs typeface="+mn-cs"/>
+                <a:latin typeface="+mj-lt"/>
+                <a:ea typeface="+mj-ea"/>
+                <a:cs typeface="+mj-cs"/>
                 <a:sym typeface="Arial"/>
               </a:defRPr>
             </a:pPr>
@@ -8153,7 +8145,7 @@
         <p:spPr>
           <a:xfrm>
             <a:off x="1580666" y="1936749"/>
-            <a:ext cx="380003" cy="380003"/>
+            <a:ext cx="380005" cy="380005"/>
           </a:xfrm>
           <a:prstGeom prst="rect">
             <a:avLst/>
@@ -8182,7 +8174,7 @@
         <p:spPr>
           <a:xfrm>
             <a:off x="4381998" y="1936749"/>
-            <a:ext cx="380003" cy="380003"/>
+            <a:ext cx="380005" cy="380005"/>
           </a:xfrm>
           <a:prstGeom prst="rect">
             <a:avLst/>
@@ -8211,7 +8203,7 @@
         <p:spPr>
           <a:xfrm>
             <a:off x="7183332" y="1936749"/>
-            <a:ext cx="380003" cy="380003"/>
+            <a:ext cx="380005" cy="380005"/>
           </a:xfrm>
           <a:prstGeom prst="rect">
             <a:avLst/>
@@ -8230,7 +8222,7 @@
         <p:spPr>
           <a:xfrm>
             <a:off x="638000" y="2546749"/>
-            <a:ext cx="2265336" cy="300003"/>
+            <a:ext cx="2265336" cy="300005"/>
           </a:xfrm>
           <a:prstGeom prst="rect">
             <a:avLst/>
@@ -8278,7 +8270,7 @@
         <p:spPr>
           <a:xfrm>
             <a:off x="657998" y="2886748"/>
-            <a:ext cx="2225338" cy="540003"/>
+            <a:ext cx="2225340" cy="540005"/>
           </a:xfrm>
           <a:prstGeom prst="rect">
             <a:avLst/>
@@ -8326,7 +8318,7 @@
         <p:spPr>
           <a:xfrm>
             <a:off x="3439333" y="2546749"/>
-            <a:ext cx="2265336" cy="300003"/>
+            <a:ext cx="2265338" cy="300005"/>
           </a:xfrm>
           <a:prstGeom prst="rect">
             <a:avLst/>
@@ -8374,7 +8366,7 @@
         <p:spPr>
           <a:xfrm>
             <a:off x="3459331" y="2886748"/>
-            <a:ext cx="2225337" cy="540003"/>
+            <a:ext cx="2225339" cy="540005"/>
           </a:xfrm>
           <a:prstGeom prst="rect">
             <a:avLst/>
@@ -8422,7 +8414,7 @@
         <p:spPr>
           <a:xfrm>
             <a:off x="6240664" y="2546749"/>
-            <a:ext cx="2265336" cy="300003"/>
+            <a:ext cx="2265337" cy="300005"/>
           </a:xfrm>
           <a:prstGeom prst="rect">
             <a:avLst/>
@@ -8470,7 +8462,7 @@
         <p:spPr>
           <a:xfrm>
             <a:off x="6260665" y="2886748"/>
-            <a:ext cx="2225336" cy="540003"/>
+            <a:ext cx="2225338" cy="540005"/>
           </a:xfrm>
           <a:prstGeom prst="rect">
             <a:avLst/>
@@ -8575,19 +8567,19 @@
         </p:nvSpPr>
         <p:spPr>
           <a:xfrm>
-            <a:off x="1192661" y="403305"/>
-            <a:ext cx="5315108" cy="533108"/>
+            <a:off x="1192659" y="403305"/>
+            <a:ext cx="5315111" cy="533110"/>
           </a:xfrm>
           <a:prstGeom prst="rect">
             <a:avLst/>
           </a:prstGeom>
         </p:spPr>
         <p:txBody>
-          <a:bodyPr/>
+          <a:bodyPr anchor="ctr"/>
           <a:lstStyle/>
           <a:p>
-            <a:pPr defTabSz="757121">
-              <a:defRPr sz="1748">
+            <a:pPr defTabSz="598125">
+              <a:defRPr sz="1700">
                 <a:solidFill>
                   <a:srgbClr val="0E3449"/>
                 </a:solidFill>
@@ -8636,7 +8628,7 @@
         <p:spPr>
           <a:xfrm>
             <a:off x="463375" y="482852"/>
-            <a:ext cx="576901" cy="385909"/>
+            <a:ext cx="576901" cy="385911"/>
           </a:xfrm>
           <a:prstGeom prst="rect">
             <a:avLst/>
@@ -8673,9 +8665,9 @@
           <a:p>
             <a:pPr>
               <a:defRPr>
-                <a:latin typeface="+mn-lt"/>
-                <a:ea typeface="+mn-ea"/>
-                <a:cs typeface="+mn-cs"/>
+                <a:latin typeface="+mj-lt"/>
+                <a:ea typeface="+mj-ea"/>
+                <a:cs typeface="+mj-cs"/>
                 <a:sym typeface="Arial"/>
               </a:defRPr>
             </a:pPr>
@@ -8718,9 +8710,9 @@
           <a:p>
             <a:pPr>
               <a:defRPr>
-                <a:latin typeface="+mn-lt"/>
-                <a:ea typeface="+mn-ea"/>
-                <a:cs typeface="+mn-cs"/>
+                <a:latin typeface="+mj-lt"/>
+                <a:ea typeface="+mj-ea"/>
+                <a:cs typeface="+mj-cs"/>
                 <a:sym typeface="Arial"/>
               </a:defRPr>
             </a:pPr>
@@ -8736,7 +8728,7 @@
         <p:spPr>
           <a:xfrm>
             <a:off x="4722000" y="1200000"/>
-            <a:ext cx="3872004" cy="1635001"/>
+            <a:ext cx="3872006" cy="1635001"/>
           </a:xfrm>
           <a:prstGeom prst="roundRect">
             <a:avLst>
@@ -8763,9 +8755,9 @@
           <a:p>
             <a:pPr>
               <a:defRPr>
-                <a:latin typeface="+mn-lt"/>
-                <a:ea typeface="+mn-ea"/>
-                <a:cs typeface="+mn-cs"/>
+                <a:latin typeface="+mj-lt"/>
+                <a:ea typeface="+mj-ea"/>
+                <a:cs typeface="+mj-cs"/>
                 <a:sym typeface="Arial"/>
               </a:defRPr>
             </a:pPr>
@@ -8808,9 +8800,9 @@
           <a:p>
             <a:pPr>
               <a:defRPr>
-                <a:latin typeface="+mn-lt"/>
-                <a:ea typeface="+mn-ea"/>
-                <a:cs typeface="+mn-cs"/>
+                <a:latin typeface="+mj-lt"/>
+                <a:ea typeface="+mj-ea"/>
+                <a:cs typeface="+mj-cs"/>
                 <a:sym typeface="Arial"/>
               </a:defRPr>
             </a:pPr>
@@ -8826,7 +8818,7 @@
         <p:spPr>
           <a:xfrm>
             <a:off x="4722000" y="3114999"/>
-            <a:ext cx="3872004" cy="1635001"/>
+            <a:ext cx="3872006" cy="1635001"/>
           </a:xfrm>
           <a:prstGeom prst="roundRect">
             <a:avLst>
@@ -8853,9 +8845,9 @@
           <a:p>
             <a:pPr>
               <a:defRPr>
-                <a:latin typeface="+mn-lt"/>
-                <a:ea typeface="+mn-ea"/>
-                <a:cs typeface="+mn-cs"/>
+                <a:latin typeface="+mj-lt"/>
+                <a:ea typeface="+mj-ea"/>
+                <a:cs typeface="+mj-cs"/>
                 <a:sym typeface="Arial"/>
               </a:defRPr>
             </a:pPr>
@@ -8871,7 +8863,7 @@
         <p:spPr>
           <a:xfrm>
             <a:off x="789999" y="1439999"/>
-            <a:ext cx="620007" cy="620007"/>
+            <a:ext cx="620011" cy="620011"/>
           </a:xfrm>
           <a:prstGeom prst="ellipse">
             <a:avLst/>
@@ -8889,9 +8881,9 @@
           <a:p>
             <a:pPr>
               <a:defRPr>
-                <a:latin typeface="+mn-lt"/>
-                <a:ea typeface="+mn-ea"/>
-                <a:cs typeface="+mn-cs"/>
+                <a:latin typeface="+mj-lt"/>
+                <a:ea typeface="+mj-ea"/>
+                <a:cs typeface="+mj-cs"/>
                 <a:sym typeface="Arial"/>
               </a:defRPr>
             </a:pPr>
@@ -8907,7 +8899,7 @@
         <p:spPr>
           <a:xfrm>
             <a:off x="4961999" y="1439999"/>
-            <a:ext cx="620007" cy="620007"/>
+            <a:ext cx="620011" cy="620011"/>
           </a:xfrm>
           <a:prstGeom prst="ellipse">
             <a:avLst/>
@@ -8925,9 +8917,9 @@
           <a:p>
             <a:pPr>
               <a:defRPr>
-                <a:latin typeface="+mn-lt"/>
-                <a:ea typeface="+mn-ea"/>
-                <a:cs typeface="+mn-cs"/>
+                <a:latin typeface="+mj-lt"/>
+                <a:ea typeface="+mj-ea"/>
+                <a:cs typeface="+mj-cs"/>
                 <a:sym typeface="Arial"/>
               </a:defRPr>
             </a:pPr>
@@ -8943,7 +8935,7 @@
         <p:spPr>
           <a:xfrm>
             <a:off x="789999" y="3354999"/>
-            <a:ext cx="620007" cy="620007"/>
+            <a:ext cx="620011" cy="620011"/>
           </a:xfrm>
           <a:prstGeom prst="ellipse">
             <a:avLst/>
@@ -8961,9 +8953,9 @@
           <a:p>
             <a:pPr>
               <a:defRPr>
-                <a:latin typeface="+mn-lt"/>
-                <a:ea typeface="+mn-ea"/>
-                <a:cs typeface="+mn-cs"/>
+                <a:latin typeface="+mj-lt"/>
+                <a:ea typeface="+mj-ea"/>
+                <a:cs typeface="+mj-cs"/>
                 <a:sym typeface="Arial"/>
               </a:defRPr>
             </a:pPr>
@@ -8979,7 +8971,7 @@
         <p:spPr>
           <a:xfrm>
             <a:off x="4961999" y="3354999"/>
-            <a:ext cx="620007" cy="620007"/>
+            <a:ext cx="620011" cy="620011"/>
           </a:xfrm>
           <a:prstGeom prst="ellipse">
             <a:avLst/>
@@ -8997,9 +8989,9 @@
           <a:p>
             <a:pPr>
               <a:defRPr>
-                <a:latin typeface="+mn-lt"/>
-                <a:ea typeface="+mn-ea"/>
-                <a:cs typeface="+mn-cs"/>
+                <a:latin typeface="+mj-lt"/>
+                <a:ea typeface="+mj-ea"/>
+                <a:cs typeface="+mj-cs"/>
                 <a:sym typeface="Arial"/>
               </a:defRPr>
             </a:pPr>
@@ -9025,7 +9017,7 @@
         <p:spPr>
           <a:xfrm>
             <a:off x="920000" y="1570000"/>
-            <a:ext cx="360004" cy="360001"/>
+            <a:ext cx="360006" cy="360001"/>
           </a:xfrm>
           <a:prstGeom prst="rect">
             <a:avLst/>
@@ -9054,7 +9046,7 @@
         <p:spPr>
           <a:xfrm>
             <a:off x="5092000" y="1570000"/>
-            <a:ext cx="360004" cy="360001"/>
+            <a:ext cx="360006" cy="360001"/>
           </a:xfrm>
           <a:prstGeom prst="rect">
             <a:avLst/>
@@ -9083,7 +9075,7 @@
         <p:spPr>
           <a:xfrm>
             <a:off x="920000" y="3485000"/>
-            <a:ext cx="360004" cy="360004"/>
+            <a:ext cx="360006" cy="360006"/>
           </a:xfrm>
           <a:prstGeom prst="rect">
             <a:avLst/>
@@ -9112,7 +9104,7 @@
         <p:spPr>
           <a:xfrm>
             <a:off x="5092000" y="3485000"/>
-            <a:ext cx="360004" cy="360004"/>
+            <a:ext cx="360006" cy="360006"/>
           </a:xfrm>
           <a:prstGeom prst="rect">
             <a:avLst/>
@@ -9131,7 +9123,7 @@
         <p:spPr>
           <a:xfrm>
             <a:off x="1607997" y="1439999"/>
-            <a:ext cx="2556007" cy="620004"/>
+            <a:ext cx="2556007" cy="620006"/>
           </a:xfrm>
           <a:prstGeom prst="rect">
             <a:avLst/>
@@ -9179,7 +9171,7 @@
         <p:spPr>
           <a:xfrm>
             <a:off x="807999" y="2130000"/>
-            <a:ext cx="3356002" cy="545004"/>
+            <a:ext cx="3356002" cy="545006"/>
           </a:xfrm>
           <a:prstGeom prst="rect">
             <a:avLst/>
@@ -9227,7 +9219,7 @@
         <p:spPr>
           <a:xfrm>
             <a:off x="5779999" y="1439999"/>
-            <a:ext cx="2556004" cy="620004"/>
+            <a:ext cx="2556006" cy="620006"/>
           </a:xfrm>
           <a:prstGeom prst="rect">
             <a:avLst/>
@@ -9275,7 +9267,7 @@
         <p:spPr>
           <a:xfrm>
             <a:off x="4979999" y="2130000"/>
-            <a:ext cx="3356002" cy="545004"/>
+            <a:ext cx="3356002" cy="545006"/>
           </a:xfrm>
           <a:prstGeom prst="rect">
             <a:avLst/>
@@ -9323,7 +9315,7 @@
         <p:spPr>
           <a:xfrm>
             <a:off x="1607997" y="3354999"/>
-            <a:ext cx="2556007" cy="620004"/>
+            <a:ext cx="2556007" cy="620006"/>
           </a:xfrm>
           <a:prstGeom prst="rect">
             <a:avLst/>
@@ -9371,7 +9363,7 @@
         <p:spPr>
           <a:xfrm>
             <a:off x="807999" y="4044998"/>
-            <a:ext cx="3356002" cy="545005"/>
+            <a:ext cx="3356002" cy="545007"/>
           </a:xfrm>
           <a:prstGeom prst="rect">
             <a:avLst/>
@@ -9419,7 +9411,7 @@
         <p:spPr>
           <a:xfrm>
             <a:off x="5779999" y="3354999"/>
-            <a:ext cx="2556004" cy="620004"/>
+            <a:ext cx="2556006" cy="620006"/>
           </a:xfrm>
           <a:prstGeom prst="rect">
             <a:avLst/>
@@ -9467,7 +9459,7 @@
         <p:spPr>
           <a:xfrm>
             <a:off x="4979999" y="4044998"/>
-            <a:ext cx="3356002" cy="545005"/>
+            <a:ext cx="3356002" cy="545007"/>
           </a:xfrm>
           <a:prstGeom prst="rect">
             <a:avLst/>
@@ -9572,15 +9564,15 @@
         </p:nvSpPr>
         <p:spPr>
           <a:xfrm>
-            <a:off x="1192663" y="403309"/>
-            <a:ext cx="6786772" cy="533103"/>
+            <a:off x="1192663" y="403307"/>
+            <a:ext cx="6786772" cy="533106"/>
           </a:xfrm>
           <a:prstGeom prst="rect">
             <a:avLst/>
           </a:prstGeom>
         </p:spPr>
         <p:txBody>
-          <a:bodyPr/>
+          <a:bodyPr anchor="ctr"/>
           <a:lstStyle>
             <a:lvl1pPr defTabSz="859536">
               <a:defRPr sz="2200">
@@ -9618,7 +9610,7 @@
         <p:spPr>
           <a:xfrm>
             <a:off x="463375" y="482852"/>
-            <a:ext cx="576901" cy="385907"/>
+            <a:ext cx="576901" cy="385909"/>
           </a:xfrm>
           <a:prstGeom prst="rect">
             <a:avLst/>
@@ -9655,9 +9647,9 @@
           <a:p>
             <a:pPr>
               <a:defRPr>
-                <a:latin typeface="+mn-lt"/>
-                <a:ea typeface="+mn-ea"/>
-                <a:cs typeface="+mn-cs"/>
+                <a:latin typeface="+mj-lt"/>
+                <a:ea typeface="+mj-ea"/>
+                <a:cs typeface="+mj-cs"/>
                 <a:sym typeface="Arial"/>
               </a:defRPr>
             </a:pPr>
@@ -9666,196 +9658,28 @@
       </p:sp>
       <p:grpSp>
         <p:nvGrpSpPr>
-          <p:cNvPr id="199" name="Groupe 13"/>
+          <p:cNvPr id="197" name="Groupe 13"/>
           <p:cNvGrpSpPr/>
           <p:nvPr/>
         </p:nvGrpSpPr>
         <p:grpSpPr>
           <a:xfrm>
-            <a:off x="817149" y="2657188"/>
-            <a:ext cx="5680330" cy="1343033"/>
-            <a:chOff x="0" y="0"/>
-            <a:chExt cx="5680329" cy="1343031"/>
-          </a:xfrm>
-        </p:grpSpPr>
-        <p:grpSp>
-          <p:nvGrpSpPr>
-            <p:cNvPr id="197" name="Groupe 12"/>
-            <p:cNvGrpSpPr/>
-            <p:nvPr/>
-          </p:nvGrpSpPr>
-          <p:grpSpPr>
-            <a:xfrm>
-              <a:off x="-1" y="0"/>
-              <a:ext cx="5680330" cy="1343033"/>
-              <a:chOff x="0" y="0"/>
-              <a:chExt cx="5680329" cy="1343031"/>
-            </a:xfrm>
-          </p:grpSpPr>
-          <p:sp>
-            <p:nvSpPr>
-              <p:cNvPr id="195" name="Rectangle"/>
-              <p:cNvSpPr/>
-              <p:nvPr/>
-            </p:nvSpPr>
-            <p:spPr>
-              <a:xfrm>
-                <a:off x="-1" y="0"/>
-                <a:ext cx="5680331" cy="1343033"/>
-              </a:xfrm>
-              <a:prstGeom prst="rect">
-                <a:avLst/>
-              </a:prstGeom>
-              <a:solidFill>
-                <a:schemeClr val="accent2">
-                  <a:lumOff val="80020"/>
-                </a:schemeClr>
-              </a:solidFill>
-              <a:ln w="12700" cap="flat">
-                <a:noFill/>
-                <a:miter lim="400000"/>
-              </a:ln>
-              <a:effectLst/>
-            </p:spPr>
-            <p:txBody>
-              <a:bodyPr wrap="square" lIns="45718" tIns="45718" rIns="45718" bIns="45718" numCol="1" anchor="t">
-                <a:noAutofit/>
-              </a:bodyPr>
-              <a:lstStyle/>
-              <a:p>
-                <a:pPr>
-                  <a:defRPr sz="1000">
-                    <a:latin typeface="+mn-lt"/>
-                    <a:ea typeface="+mn-ea"/>
-                    <a:cs typeface="+mn-cs"/>
-                    <a:sym typeface="Arial"/>
-                  </a:defRPr>
-                </a:pPr>
-              </a:p>
-            </p:txBody>
-          </p:sp>
-          <p:sp>
-            <p:nvSpPr>
-              <p:cNvPr id="196" name="Décision structurante"/>
-              <p:cNvSpPr txBox="1"/>
-              <p:nvPr/>
-            </p:nvSpPr>
-            <p:spPr>
-              <a:xfrm>
-                <a:off x="100268" y="309245"/>
-                <a:ext cx="2788929" cy="233679"/>
-              </a:xfrm>
-              <a:prstGeom prst="rect">
-                <a:avLst/>
-              </a:prstGeom>
-              <a:noFill/>
-              <a:ln w="12700" cap="flat">
-                <a:noFill/>
-                <a:miter lim="400000"/>
-              </a:ln>
-              <a:effectLst/>
-              <a:extLst>
-                <a:ext uri="{C572A759-6A51-4108-AA02-DFA0A04FC94B}">
-                  <ma14:wrappingTextBoxFlag xmlns:ma14="http://schemas.microsoft.com/office/mac/drawingml/2011/main" val="1"/>
-                </a:ext>
-              </a:extLst>
-            </p:spPr>
-            <p:txBody>
-              <a:bodyPr wrap="square" lIns="34289" tIns="34289" rIns="34289" bIns="34289" numCol="1" anchor="t">
-                <a:spAutoFit/>
-              </a:bodyPr>
-              <a:lstStyle>
-                <a:lvl1pPr>
-                  <a:defRPr b="1" sz="1100">
-                    <a:latin typeface="Inter"/>
-                    <a:ea typeface="Inter"/>
-                    <a:cs typeface="Inter"/>
-                    <a:sym typeface="Inter"/>
-                  </a:defRPr>
-                </a:lvl1pPr>
-              </a:lstStyle>
-              <a:p>
-                <a:pPr/>
-                <a:r>
-                  <a:t>Décision structurante</a:t>
-                </a:r>
-              </a:p>
-            </p:txBody>
-          </p:sp>
-        </p:grpSp>
-        <p:sp>
-          <p:nvSpPr>
-            <p:cNvPr id="198" name="Conserver l'information joueur détaillée, puis tester si les abstractions apportent vraiment de la performance."/>
-            <p:cNvSpPr txBox="1"/>
-            <p:nvPr/>
-          </p:nvSpPr>
-          <p:spPr>
-            <a:xfrm>
-              <a:off x="100268" y="682945"/>
-              <a:ext cx="5392023" cy="398779"/>
-            </a:xfrm>
-            <a:prstGeom prst="rect">
-              <a:avLst/>
-            </a:prstGeom>
-            <a:noFill/>
-            <a:ln w="12700" cap="flat">
-              <a:noFill/>
-              <a:miter lim="400000"/>
-            </a:ln>
-            <a:effectLst/>
-            <a:extLst>
-              <a:ext uri="{C572A759-6A51-4108-AA02-DFA0A04FC94B}">
-                <ma14:wrappingTextBoxFlag xmlns:ma14="http://schemas.microsoft.com/office/mac/drawingml/2011/main" val="1"/>
-              </a:ext>
-            </a:extLst>
-          </p:spPr>
-          <p:txBody>
-            <a:bodyPr wrap="square" lIns="34289" tIns="34289" rIns="34289" bIns="34289" numCol="1" anchor="t">
-              <a:spAutoFit/>
-            </a:bodyPr>
-            <a:lstStyle>
-              <a:lvl1pPr>
-                <a:defRPr sz="1100">
-                  <a:latin typeface="Inter"/>
-                  <a:ea typeface="Inter"/>
-                  <a:cs typeface="Inter"/>
-                  <a:sym typeface="Inter"/>
-                </a:defRPr>
-              </a:lvl1pPr>
-            </a:lstStyle>
-            <a:p>
-              <a:pPr/>
-              <a:r>
-                <a:t>Conserver l'information joueur détaillée, puis tester si les abstractions apportent vraiment de la performance.</a:t>
-              </a:r>
-            </a:p>
-          </p:txBody>
-        </p:sp>
-      </p:grpSp>
-      <p:grpSp>
-        <p:nvGrpSpPr>
-          <p:cNvPr id="202" name="Rectangle"/>
-          <p:cNvGrpSpPr/>
-          <p:nvPr/>
-        </p:nvGrpSpPr>
-        <p:grpSpPr>
-          <a:xfrm>
-            <a:off x="817148" y="1284868"/>
-            <a:ext cx="5778389" cy="911260"/>
-            <a:chOff x="-1" y="-1"/>
-            <a:chExt cx="5778387" cy="911258"/>
+            <a:off x="817144" y="2657187"/>
+            <a:ext cx="5680337" cy="1343040"/>
+            <a:chOff x="-1" y="0"/>
+            <a:chExt cx="5680336" cy="1343039"/>
           </a:xfrm>
         </p:grpSpPr>
         <p:sp>
           <p:nvSpPr>
-            <p:cNvPr id="200" name="Rectangle"/>
+            <p:cNvPr id="195" name="Groupe 12"/>
             <p:cNvSpPr/>
             <p:nvPr/>
           </p:nvSpPr>
           <p:spPr>
             <a:xfrm>
-              <a:off x="-2" y="-2"/>
-              <a:ext cx="5778389" cy="911260"/>
+              <a:off x="-2" y="-1"/>
+              <a:ext cx="5680337" cy="1343040"/>
             </a:xfrm>
             <a:prstGeom prst="rect">
               <a:avLst/>
@@ -9879,9 +9703,9 @@
             <a:p>
               <a:pPr>
                 <a:defRPr sz="1000">
-                  <a:latin typeface="+mn-lt"/>
-                  <a:ea typeface="+mn-ea"/>
-                  <a:cs typeface="+mn-cs"/>
+                  <a:latin typeface="+mj-lt"/>
+                  <a:ea typeface="+mj-ea"/>
+                  <a:cs typeface="+mj-cs"/>
                   <a:sym typeface="Arial"/>
                 </a:defRPr>
               </a:pPr>
@@ -9890,14 +9714,140 @@
         </p:sp>
         <p:sp>
           <p:nvSpPr>
-            <p:cNvPr id="201" name="Objectif: transformer des données football hétérogènes en datasets fiables pour entraîner et comparer les modèles."/>
+            <p:cNvPr id="196" name="Conserver l'information joueur détaillée, puis tester si les abstractions apportent vraiment de la performance."/>
             <p:cNvSpPr txBox="1"/>
             <p:nvPr/>
           </p:nvSpPr>
           <p:spPr>
             <a:xfrm>
-              <a:off x="110617" y="74627"/>
-              <a:ext cx="5557152" cy="762001"/>
+              <a:off x="56181" y="332429"/>
+              <a:ext cx="5392026" cy="678179"/>
+            </a:xfrm>
+            <a:prstGeom prst="rect">
+              <a:avLst/>
+            </a:prstGeom>
+            <a:noFill/>
+            <a:ln w="12700" cap="flat">
+              <a:noFill/>
+              <a:miter lim="400000"/>
+            </a:ln>
+            <a:effectLst/>
+            <a:extLst>
+              <a:ext uri="{C572A759-6A51-4108-AA02-DFA0A04FC94B}">
+                <ma14:wrappingTextBoxFlag xmlns:ma14="http://schemas.microsoft.com/office/mac/drawingml/2011/main" val="1"/>
+              </a:ext>
+            </a:extLst>
+          </p:spPr>
+          <p:txBody>
+            <a:bodyPr wrap="square" lIns="34289" tIns="34289" rIns="34289" bIns="34289" numCol="1" anchor="t">
+              <a:spAutoFit/>
+            </a:bodyPr>
+            <a:lstStyle/>
+            <a:p>
+              <a:pPr>
+                <a:defRPr b="1" sz="1000">
+                  <a:latin typeface="Inter"/>
+                  <a:ea typeface="Inter"/>
+                  <a:cs typeface="Inter"/>
+                  <a:sym typeface="Inter"/>
+                </a:defRPr>
+              </a:pPr>
+              <a:r>
+                <a:t>Décision structurante</a:t>
+              </a:r>
+            </a:p>
+            <a:p>
+              <a:pPr>
+                <a:defRPr sz="1000">
+                  <a:latin typeface="Inter"/>
+                  <a:ea typeface="Inter"/>
+                  <a:cs typeface="Inter"/>
+                  <a:sym typeface="Inter"/>
+                </a:defRPr>
+              </a:pPr>
+            </a:p>
+            <a:p>
+              <a:pPr>
+                <a:defRPr sz="1000">
+                  <a:latin typeface="Inter"/>
+                  <a:ea typeface="Inter"/>
+                  <a:cs typeface="Inter"/>
+                  <a:sym typeface="Inter"/>
+                </a:defRPr>
+              </a:pPr>
+              <a:r>
+                <a:t>Conserver l'information joueur détaillée, puis tester si les abstractions apportent vraiment de la performance.</a:t>
+              </a:r>
+            </a:p>
+          </p:txBody>
+        </p:sp>
+      </p:grpSp>
+      <p:grpSp>
+        <p:nvGrpSpPr>
+          <p:cNvPr id="200" name="Rectangle"/>
+          <p:cNvGrpSpPr/>
+          <p:nvPr/>
+        </p:nvGrpSpPr>
+        <p:grpSpPr>
+          <a:xfrm>
+            <a:off x="817144" y="1284864"/>
+            <a:ext cx="5778396" cy="911264"/>
+            <a:chOff x="-1" y="0"/>
+            <a:chExt cx="5778394" cy="911262"/>
+          </a:xfrm>
+        </p:grpSpPr>
+        <p:sp>
+          <p:nvSpPr>
+            <p:cNvPr id="198" name="Rectangle"/>
+            <p:cNvSpPr/>
+            <p:nvPr/>
+          </p:nvSpPr>
+          <p:spPr>
+            <a:xfrm>
+              <a:off x="-2" y="-1"/>
+              <a:ext cx="5778396" cy="911264"/>
+            </a:xfrm>
+            <a:prstGeom prst="rect">
+              <a:avLst/>
+            </a:prstGeom>
+            <a:solidFill>
+              <a:schemeClr val="accent2">
+                <a:lumOff val="80020"/>
+              </a:schemeClr>
+            </a:solidFill>
+            <a:ln w="12700" cap="flat">
+              <a:noFill/>
+              <a:miter lim="400000"/>
+            </a:ln>
+            <a:effectLst/>
+          </p:spPr>
+          <p:txBody>
+            <a:bodyPr wrap="square" lIns="45718" tIns="45718" rIns="45718" bIns="45718" numCol="1" anchor="t">
+              <a:noAutofit/>
+            </a:bodyPr>
+            <a:lstStyle/>
+            <a:p>
+              <a:pPr>
+                <a:defRPr sz="1000">
+                  <a:latin typeface="+mj-lt"/>
+                  <a:ea typeface="+mj-ea"/>
+                  <a:cs typeface="+mj-cs"/>
+                  <a:sym typeface="Arial"/>
+                </a:defRPr>
+              </a:pPr>
+            </a:p>
+          </p:txBody>
+        </p:sp>
+        <p:sp>
+          <p:nvSpPr>
+            <p:cNvPr id="199" name="Objectif: transformer des données football hétérogènes en datasets fiables pour entraîner et comparer les modèles."/>
+            <p:cNvSpPr txBox="1"/>
+            <p:nvPr/>
+          </p:nvSpPr>
+          <p:spPr>
+            <a:xfrm>
+              <a:off x="110617" y="74628"/>
+              <a:ext cx="5557160" cy="762001"/>
             </a:xfrm>
             <a:prstGeom prst="rect">
               <a:avLst/>
@@ -9996,7 +9946,7 @@
       </p:grpSpPr>
       <p:pic>
         <p:nvPicPr>
-          <p:cNvPr id="204" name="Fond Girondins de Bordeaux" descr="Fond Girondins de Bordeaux"/>
+          <p:cNvPr id="202" name="Fond Girondins de Bordeaux" descr="Fond Girondins de Bordeaux"/>
           <p:cNvPicPr>
             <a:picLocks noChangeAspect="1"/>
           </p:cNvPicPr>
@@ -10026,7 +9976,7 @@
       </p:pic>
       <p:sp>
         <p:nvSpPr>
-          <p:cNvPr id="205" name="Google Shape;75;p16"/>
+          <p:cNvPr id="203" name="Google Shape;75;p16"/>
           <p:cNvSpPr txBox="1"/>
           <p:nvPr>
             <p:ph type="title"/>
@@ -10034,19 +9984,19 @@
         </p:nvSpPr>
         <p:spPr>
           <a:xfrm>
-            <a:off x="1192663" y="403309"/>
-            <a:ext cx="8097985" cy="533103"/>
+            <a:off x="1192663" y="403307"/>
+            <a:ext cx="8097985" cy="533106"/>
           </a:xfrm>
           <a:prstGeom prst="rect">
             <a:avLst/>
           </a:prstGeom>
         </p:spPr>
         <p:txBody>
-          <a:bodyPr/>
+          <a:bodyPr anchor="ctr"/>
           <a:lstStyle/>
           <a:p>
             <a:pPr defTabSz="740662">
-              <a:defRPr sz="2000">
+              <a:defRPr sz="2200">
                 <a:solidFill>
                   <a:srgbClr val="0E3449"/>
                 </a:solidFill>
@@ -10065,22 +10015,14 @@
                   <a:srgbClr val="000000"/>
                 </a:solidFill>
               </a:rPr>
-              <a:t>données</a:t>
-            </a:r>
-            <a:r>
-              <a:rPr sz="2200">
-                <a:solidFill>
-                  <a:srgbClr val="000000"/>
-                </a:solidFill>
-              </a:rPr>
-              <a:t> passent par trois niveaux clairs</a:t>
+              <a:t>données passent par trois niveaux clairs</a:t>
             </a:r>
           </a:p>
         </p:txBody>
       </p:sp>
       <p:pic>
         <p:nvPicPr>
-          <p:cNvPr id="206" name="Google Shape;76;p16" descr="Google Shape;76;p16"/>
+          <p:cNvPr id="204" name="Google Shape;76;p16" descr="Google Shape;76;p16"/>
           <p:cNvPicPr>
             <a:picLocks noChangeAspect="1"/>
           </p:cNvPicPr>
@@ -10097,7 +10039,7 @@
         <p:spPr>
           <a:xfrm>
             <a:off x="463375" y="482852"/>
-            <a:ext cx="576901" cy="385907"/>
+            <a:ext cx="576901" cy="385909"/>
           </a:xfrm>
           <a:prstGeom prst="rect">
             <a:avLst/>
@@ -10109,7 +10051,7 @@
       </p:pic>
       <p:sp>
         <p:nvSpPr>
-          <p:cNvPr id="207" name="Google Shape;77;p16"/>
+          <p:cNvPr id="205" name="Google Shape;77;p16"/>
           <p:cNvSpPr/>
           <p:nvPr/>
         </p:nvSpPr>
@@ -10134,9 +10076,9 @@
           <a:p>
             <a:pPr>
               <a:defRPr>
-                <a:latin typeface="+mn-lt"/>
-                <a:ea typeface="+mn-ea"/>
-                <a:cs typeface="+mn-cs"/>
+                <a:latin typeface="+mj-lt"/>
+                <a:ea typeface="+mj-ea"/>
+                <a:cs typeface="+mj-cs"/>
                 <a:sym typeface="Arial"/>
               </a:defRPr>
             </a:pPr>
@@ -10145,28 +10087,28 @@
       </p:sp>
       <p:grpSp>
         <p:nvGrpSpPr>
-          <p:cNvPr id="213" name="Groupe 42"/>
+          <p:cNvPr id="211" name="Groupe 42"/>
           <p:cNvGrpSpPr/>
           <p:nvPr/>
         </p:nvGrpSpPr>
         <p:grpSpPr>
           <a:xfrm>
-            <a:off x="340860" y="1191902"/>
-            <a:ext cx="2510121" cy="1476052"/>
-            <a:chOff x="0" y="0"/>
-            <a:chExt cx="2510119" cy="1476051"/>
+            <a:off x="340854" y="1191899"/>
+            <a:ext cx="2510130" cy="1476058"/>
+            <a:chOff x="-2" y="0"/>
+            <a:chExt cx="2510128" cy="1476057"/>
           </a:xfrm>
         </p:grpSpPr>
         <p:sp>
           <p:nvSpPr>
-            <p:cNvPr id="208" name="Sources"/>
+            <p:cNvPr id="206" name="Sources"/>
             <p:cNvSpPr txBox="1"/>
             <p:nvPr/>
           </p:nvSpPr>
           <p:spPr>
             <a:xfrm>
-              <a:off x="351033" y="-1"/>
-              <a:ext cx="2159087" cy="233679"/>
+              <a:off x="351035" y="-1"/>
+              <a:ext cx="2159092" cy="233679"/>
             </a:xfrm>
             <a:prstGeom prst="rect">
               <a:avLst/>
@@ -10210,28 +10152,28 @@
         </p:sp>
         <p:grpSp>
           <p:nvGrpSpPr>
-            <p:cNvPr id="212" name="Groupe 29"/>
+            <p:cNvPr id="210" name="Groupe 29"/>
             <p:cNvGrpSpPr/>
             <p:nvPr/>
           </p:nvGrpSpPr>
           <p:grpSpPr>
             <a:xfrm>
-              <a:off x="-1" y="379059"/>
-              <a:ext cx="2320750" cy="1096992"/>
-              <a:chOff x="0" y="-1"/>
-              <a:chExt cx="2320749" cy="1096990"/>
+              <a:off x="-3" y="379058"/>
+              <a:ext cx="2320758" cy="1096999"/>
+              <a:chOff x="0" y="0"/>
+              <a:chExt cx="2320756" cy="1096997"/>
             </a:xfrm>
           </p:grpSpPr>
           <p:sp>
             <p:nvSpPr>
-              <p:cNvPr id="209" name="Rectangle"/>
+              <p:cNvPr id="207" name="Rectangle"/>
               <p:cNvSpPr/>
               <p:nvPr/>
             </p:nvSpPr>
             <p:spPr>
               <a:xfrm>
-                <a:off x="-1" y="-2"/>
-                <a:ext cx="2320750" cy="1096992"/>
+                <a:off x="-1" y="-1"/>
+                <a:ext cx="2320758" cy="1096998"/>
               </a:xfrm>
               <a:prstGeom prst="rect">
                 <a:avLst/>
@@ -10255,9 +10197,9 @@
               <a:p>
                 <a:pPr>
                   <a:defRPr sz="1000">
-                    <a:latin typeface="+mn-lt"/>
-                    <a:ea typeface="+mn-ea"/>
-                    <a:cs typeface="+mn-cs"/>
+                    <a:latin typeface="+mj-lt"/>
+                    <a:ea typeface="+mj-ea"/>
+                    <a:cs typeface="+mj-cs"/>
                     <a:sym typeface="Arial"/>
                   </a:defRPr>
                 </a:pPr>
@@ -10266,14 +10208,14 @@
           </p:sp>
           <p:sp>
             <p:nvSpPr>
-              <p:cNvPr id="210" name="SoFIFA"/>
+              <p:cNvPr id="208" name="SoFIFA"/>
               <p:cNvSpPr txBox="1"/>
               <p:nvPr/>
             </p:nvSpPr>
             <p:spPr>
               <a:xfrm>
-                <a:off x="110337" y="97961"/>
-                <a:ext cx="1564877" cy="233679"/>
+                <a:off x="110338" y="97963"/>
+                <a:ext cx="1564883" cy="233679"/>
               </a:xfrm>
               <a:prstGeom prst="rect">
                 <a:avLst/>
@@ -10317,14 +10259,14 @@
           </p:sp>
           <p:sp>
             <p:nvSpPr>
-              <p:cNvPr id="211" name="Scraping des notes détaillées joueurs: attaque, technique, mouvement, défense, gardien."/>
+              <p:cNvPr id="209" name="Scraping des notes détaillées joueurs: attaque, technique, mouvement, défense, gardien."/>
               <p:cNvSpPr txBox="1"/>
               <p:nvPr/>
             </p:nvSpPr>
             <p:spPr>
               <a:xfrm>
-                <a:off x="110336" y="387558"/>
-                <a:ext cx="2096154" cy="563879"/>
+                <a:off x="110337" y="387561"/>
+                <a:ext cx="2096160" cy="525779"/>
               </a:xfrm>
               <a:prstGeom prst="rect">
                 <a:avLst/>
@@ -10347,7 +10289,7 @@
               </a:bodyPr>
               <a:lstStyle>
                 <a:lvl1pPr>
-                  <a:defRPr sz="1100">
+                  <a:defRPr sz="1000">
                     <a:latin typeface="Inter"/>
                     <a:ea typeface="Inter"/>
                     <a:cs typeface="Inter"/>
@@ -10367,42 +10309,42 @@
       </p:grpSp>
       <p:grpSp>
         <p:nvGrpSpPr>
-          <p:cNvPr id="218" name="Groupe 28"/>
+          <p:cNvPr id="216" name="Groupe 28"/>
           <p:cNvGrpSpPr/>
           <p:nvPr/>
         </p:nvGrpSpPr>
         <p:grpSpPr>
           <a:xfrm>
-            <a:off x="340857" y="3612989"/>
-            <a:ext cx="2540371" cy="1071570"/>
-            <a:chOff x="-2" y="0"/>
-            <a:chExt cx="2540369" cy="1071568"/>
+            <a:off x="340853" y="3612986"/>
+            <a:ext cx="2540377" cy="1071579"/>
+            <a:chOff x="-1" y="-1"/>
+            <a:chExt cx="2540376" cy="1071577"/>
           </a:xfrm>
         </p:grpSpPr>
         <p:grpSp>
           <p:nvGrpSpPr>
-            <p:cNvPr id="216" name="Groupe 27"/>
+            <p:cNvPr id="214" name="Groupe 27"/>
             <p:cNvGrpSpPr/>
             <p:nvPr/>
           </p:nvGrpSpPr>
           <p:grpSpPr>
             <a:xfrm>
-              <a:off x="-3" y="-1"/>
-              <a:ext cx="2540371" cy="1071570"/>
-              <a:chOff x="-1" y="0"/>
-              <a:chExt cx="2540369" cy="1071568"/>
+              <a:off x="-2" y="-2"/>
+              <a:ext cx="2540377" cy="1071579"/>
+              <a:chOff x="0" y="0"/>
+              <a:chExt cx="2540376" cy="1071577"/>
             </a:xfrm>
           </p:grpSpPr>
           <p:sp>
             <p:nvSpPr>
-              <p:cNvPr id="214" name="Rectangle"/>
+              <p:cNvPr id="212" name="Rectangle"/>
               <p:cNvSpPr/>
               <p:nvPr/>
             </p:nvSpPr>
             <p:spPr>
               <a:xfrm>
-                <a:off x="-2" y="0"/>
-                <a:ext cx="2305920" cy="1071570"/>
+                <a:off x="-1" y="-1"/>
+                <a:ext cx="2305924" cy="1071578"/>
               </a:xfrm>
               <a:prstGeom prst="rect">
                 <a:avLst/>
@@ -10426,9 +10368,9 @@
               <a:p>
                 <a:pPr>
                   <a:defRPr sz="1000">
-                    <a:latin typeface="+mn-lt"/>
-                    <a:ea typeface="+mn-ea"/>
-                    <a:cs typeface="+mn-cs"/>
+                    <a:latin typeface="+mj-lt"/>
+                    <a:ea typeface="+mj-ea"/>
+                    <a:cs typeface="+mj-cs"/>
                     <a:sym typeface="Arial"/>
                   </a:defRPr>
                 </a:pPr>
@@ -10437,14 +10379,14 @@
           </p:sp>
           <p:sp>
             <p:nvSpPr>
-              <p:cNvPr id="215" name="Transfermarkt"/>
+              <p:cNvPr id="213" name="Transfermarkt"/>
               <p:cNvSpPr txBox="1"/>
               <p:nvPr/>
             </p:nvSpPr>
             <p:spPr>
               <a:xfrm>
-                <a:off x="127363" y="124925"/>
-                <a:ext cx="2413006" cy="233679"/>
+                <a:off x="127364" y="124925"/>
+                <a:ext cx="2413012" cy="233679"/>
               </a:xfrm>
               <a:prstGeom prst="rect">
                 <a:avLst/>
@@ -10489,14 +10431,14 @@
         </p:grpSp>
         <p:sp>
           <p:nvSpPr>
-            <p:cNvPr id="217" name="CSV GitHub: matchs, lineups, joueurs, clubs et transferts. Mise à jour régulière."/>
+            <p:cNvPr id="215" name="CSV GitHub: matchs, lineups, joueurs, clubs et transferts. Mise à jour régulière."/>
             <p:cNvSpPr txBox="1"/>
             <p:nvPr/>
           </p:nvSpPr>
           <p:spPr>
             <a:xfrm>
-              <a:off x="111577" y="452479"/>
-              <a:ext cx="2082757" cy="563879"/>
+              <a:off x="111579" y="452480"/>
+              <a:ext cx="2082761" cy="525779"/>
             </a:xfrm>
             <a:prstGeom prst="rect">
               <a:avLst/>
@@ -10519,7 +10461,7 @@
             </a:bodyPr>
             <a:lstStyle>
               <a:lvl1pPr>
-                <a:defRPr sz="1100">
+                <a:defRPr sz="1000">
                   <a:latin typeface="Inter"/>
                   <a:ea typeface="Inter"/>
                   <a:cs typeface="Inter"/>
@@ -10538,28 +10480,28 @@
       </p:grpSp>
       <p:grpSp>
         <p:nvGrpSpPr>
-          <p:cNvPr id="221" name="Groupe 31"/>
+          <p:cNvPr id="219" name="Groupe 31"/>
           <p:cNvGrpSpPr/>
           <p:nvPr/>
         </p:nvGrpSpPr>
         <p:grpSpPr>
           <a:xfrm>
-            <a:off x="3010217" y="3001970"/>
-            <a:ext cx="866916" cy="418797"/>
-            <a:chOff x="-1" y="0"/>
-            <a:chExt cx="866915" cy="418795"/>
+            <a:off x="3010215" y="3001968"/>
+            <a:ext cx="866920" cy="418802"/>
+            <a:chOff x="0" y="-1"/>
+            <a:chExt cx="866918" cy="418800"/>
           </a:xfrm>
         </p:grpSpPr>
         <p:sp>
           <p:nvSpPr>
-            <p:cNvPr id="219" name="Rectangle"/>
+            <p:cNvPr id="217" name="Rectangle"/>
             <p:cNvSpPr/>
             <p:nvPr/>
           </p:nvSpPr>
           <p:spPr>
             <a:xfrm>
-              <a:off x="-2" y="-1"/>
-              <a:ext cx="866916" cy="418797"/>
+              <a:off x="-1" y="-2"/>
+              <a:ext cx="866920" cy="418802"/>
             </a:xfrm>
             <a:prstGeom prst="rect">
               <a:avLst/>
@@ -10583,9 +10525,9 @@
             <a:p>
               <a:pPr>
                 <a:defRPr sz="1000">
-                  <a:latin typeface="+mn-lt"/>
-                  <a:ea typeface="+mn-ea"/>
-                  <a:cs typeface="+mn-cs"/>
+                  <a:latin typeface="+mj-lt"/>
+                  <a:ea typeface="+mj-ea"/>
+                  <a:cs typeface="+mj-cs"/>
                   <a:sym typeface="Arial"/>
                 </a:defRPr>
               </a:pPr>
@@ -10594,14 +10536,14 @@
         </p:sp>
         <p:sp>
           <p:nvSpPr>
-            <p:cNvPr id="220" name="/raw"/>
+            <p:cNvPr id="218" name="/raw"/>
             <p:cNvSpPr txBox="1"/>
             <p:nvPr/>
           </p:nvSpPr>
           <p:spPr>
             <a:xfrm>
-              <a:off x="81356" y="11430"/>
-              <a:ext cx="661523" cy="233679"/>
+              <a:off x="81357" y="11430"/>
+              <a:ext cx="661526" cy="233679"/>
             </a:xfrm>
             <a:prstGeom prst="rect">
               <a:avLst/>
@@ -10646,28 +10588,28 @@
       </p:grpSp>
       <p:grpSp>
         <p:nvGrpSpPr>
-          <p:cNvPr id="225" name="Groupe 30"/>
+          <p:cNvPr id="223" name="Groupe 30"/>
           <p:cNvGrpSpPr/>
           <p:nvPr/>
         </p:nvGrpSpPr>
         <p:grpSpPr>
           <a:xfrm>
-            <a:off x="3776910" y="1101848"/>
-            <a:ext cx="2894653" cy="1071569"/>
+            <a:off x="3776909" y="1101845"/>
+            <a:ext cx="2894658" cy="1071573"/>
             <a:chOff x="0" y="0"/>
-            <a:chExt cx="2894652" cy="1071567"/>
+            <a:chExt cx="2894657" cy="1071571"/>
           </a:xfrm>
         </p:grpSpPr>
         <p:sp>
           <p:nvSpPr>
-            <p:cNvPr id="222" name="Rectangle"/>
+            <p:cNvPr id="220" name="Rectangle"/>
             <p:cNvSpPr/>
             <p:nvPr/>
           </p:nvSpPr>
           <p:spPr>
             <a:xfrm>
-              <a:off x="0" y="-1"/>
-              <a:ext cx="2894653" cy="1071568"/>
+              <a:off x="-1" y="-1"/>
+              <a:ext cx="2894658" cy="1071573"/>
             </a:xfrm>
             <a:prstGeom prst="rect">
               <a:avLst/>
@@ -10691,9 +10633,9 @@
             <a:p>
               <a:pPr>
                 <a:defRPr sz="1000">
-                  <a:latin typeface="+mn-lt"/>
-                  <a:ea typeface="+mn-ea"/>
-                  <a:cs typeface="+mn-cs"/>
+                  <a:latin typeface="+mj-lt"/>
+                  <a:ea typeface="+mj-ea"/>
+                  <a:cs typeface="+mj-cs"/>
                   <a:sym typeface="Arial"/>
                 </a:defRPr>
               </a:pPr>
@@ -10702,14 +10644,14 @@
         </p:sp>
         <p:sp>
           <p:nvSpPr>
-            <p:cNvPr id="223" name="/staging"/>
+            <p:cNvPr id="221" name="/staging"/>
             <p:cNvSpPr txBox="1"/>
             <p:nvPr/>
           </p:nvSpPr>
           <p:spPr>
             <a:xfrm>
               <a:off x="209306" y="102169"/>
-              <a:ext cx="2208843" cy="204124"/>
+              <a:ext cx="2208845" cy="233679"/>
             </a:xfrm>
             <a:prstGeom prst="rect">
               <a:avLst/>
@@ -10732,14 +10674,14 @@
             </a:bodyPr>
             <a:lstStyle>
               <a:lvl1pPr>
-                <a:defRPr b="1" sz="1000">
+                <a:defRPr b="1" sz="1100">
                   <a:solidFill>
                     <a:srgbClr val="2563EB"/>
                   </a:solidFill>
-                  <a:latin typeface="+mn-lt"/>
-                  <a:ea typeface="+mn-ea"/>
-                  <a:cs typeface="+mn-cs"/>
-                  <a:sym typeface="Arial"/>
+                  <a:latin typeface="Inter"/>
+                  <a:ea typeface="Inter"/>
+                  <a:cs typeface="Inter"/>
+                  <a:sym typeface="Inter"/>
                 </a:defRPr>
               </a:lvl1pPr>
             </a:lstStyle>
@@ -10753,14 +10695,14 @@
         </p:sp>
         <p:sp>
           <p:nvSpPr>
-            <p:cNvPr id="224" name="training_match_dataset et match_outcome_team_ratings dans NeonDB."/>
+            <p:cNvPr id="222" name="training_match_dataset et match_outcome_team_ratings dans NeonDB."/>
             <p:cNvSpPr txBox="1"/>
             <p:nvPr/>
           </p:nvSpPr>
           <p:spPr>
             <a:xfrm>
               <a:off x="209306" y="309196"/>
-              <a:ext cx="2535000" cy="597824"/>
+              <a:ext cx="2535003" cy="678179"/>
             </a:xfrm>
             <a:prstGeom prst="rect">
               <a:avLst/>
@@ -10790,11 +10732,11 @@
                 <a:buSzPct val="100000"/>
                 <a:buFont typeface="Arial"/>
                 <a:buChar char="•"/>
-                <a:defRPr sz="900">
-                  <a:latin typeface="+mn-lt"/>
-                  <a:ea typeface="+mn-ea"/>
-                  <a:cs typeface="+mn-cs"/>
-                  <a:sym typeface="Arial"/>
+                <a:defRPr sz="1000">
+                  <a:latin typeface="Inter"/>
+                  <a:ea typeface="Inter"/>
+                  <a:cs typeface="Inter"/>
+                  <a:sym typeface="Inter"/>
                 </a:defRPr>
               </a:pPr>
               <a:r>
@@ -10809,11 +10751,11 @@
                 <a:buSzPct val="100000"/>
                 <a:buFont typeface="Arial"/>
                 <a:buChar char="•"/>
-                <a:defRPr sz="900">
-                  <a:latin typeface="+mn-lt"/>
-                  <a:ea typeface="+mn-ea"/>
-                  <a:cs typeface="+mn-cs"/>
-                  <a:sym typeface="Arial"/>
+                <a:defRPr sz="1000">
+                  <a:latin typeface="Inter"/>
+                  <a:ea typeface="Inter"/>
+                  <a:cs typeface="Inter"/>
+                  <a:sym typeface="Inter"/>
                 </a:defRPr>
               </a:pPr>
               <a:r>
@@ -10829,10 +10771,10 @@
                 <a:buFont typeface="Arial"/>
                 <a:buChar char="•"/>
                 <a:defRPr sz="1000">
-                  <a:latin typeface="+mn-lt"/>
-                  <a:ea typeface="+mn-ea"/>
-                  <a:cs typeface="+mn-cs"/>
-                  <a:sym typeface="Arial"/>
+                  <a:latin typeface="Inter"/>
+                  <a:ea typeface="Inter"/>
+                  <a:cs typeface="Inter"/>
+                  <a:sym typeface="Inter"/>
                 </a:defRPr>
               </a:pPr>
               <a:r>
@@ -10844,28 +10786,28 @@
       </p:grpSp>
       <p:grpSp>
         <p:nvGrpSpPr>
-          <p:cNvPr id="232" name="Groupe 34"/>
+          <p:cNvPr id="230" name="Groupe 34"/>
           <p:cNvGrpSpPr/>
           <p:nvPr/>
         </p:nvGrpSpPr>
         <p:grpSpPr>
           <a:xfrm>
-            <a:off x="7019900" y="2015012"/>
-            <a:ext cx="1931684" cy="1386367"/>
-            <a:chOff x="-2" y="0"/>
-            <a:chExt cx="1931683" cy="1386366"/>
+            <a:off x="7019894" y="2015009"/>
+            <a:ext cx="1931694" cy="1386373"/>
+            <a:chOff x="-2" y="-1"/>
+            <a:chExt cx="1931692" cy="1386371"/>
           </a:xfrm>
         </p:grpSpPr>
         <p:sp>
           <p:nvSpPr>
-            <p:cNvPr id="226" name="Analyse et modeles"/>
+            <p:cNvPr id="224" name="Analyse et modeles"/>
             <p:cNvSpPr/>
             <p:nvPr/>
           </p:nvSpPr>
           <p:spPr>
             <a:xfrm>
-              <a:off x="106699" y="-1"/>
-              <a:ext cx="1788802" cy="1"/>
+              <a:off x="106704" y="-2"/>
+              <a:ext cx="1788806" cy="1"/>
             </a:xfrm>
             <a:custGeom>
               <a:avLst/>
@@ -10943,42 +10885,42 @@
         </p:sp>
         <p:grpSp>
           <p:nvGrpSpPr>
-            <p:cNvPr id="231" name="Groupe 33"/>
+            <p:cNvPr id="229" name="Groupe 33"/>
             <p:cNvGrpSpPr/>
             <p:nvPr/>
           </p:nvGrpSpPr>
           <p:grpSpPr>
             <a:xfrm>
-              <a:off x="-3" y="314797"/>
-              <a:ext cx="1931684" cy="1071570"/>
-              <a:chOff x="-1" y="0"/>
-              <a:chExt cx="1931683" cy="1071568"/>
+              <a:off x="-3" y="314794"/>
+              <a:ext cx="1931693" cy="1071577"/>
+              <a:chOff x="-1" y="-1"/>
+              <a:chExt cx="1931692" cy="1071575"/>
             </a:xfrm>
           </p:grpSpPr>
           <p:grpSp>
             <p:nvGrpSpPr>
-              <p:cNvPr id="229" name="Groupe 32"/>
+              <p:cNvPr id="227" name="Groupe 32"/>
               <p:cNvGrpSpPr/>
               <p:nvPr/>
             </p:nvGrpSpPr>
             <p:grpSpPr>
               <a:xfrm>
-                <a:off x="-2" y="-1"/>
-                <a:ext cx="1931684" cy="1071569"/>
+                <a:off x="-2" y="-2"/>
+                <a:ext cx="1931694" cy="1071577"/>
                 <a:chOff x="0" y="0"/>
-                <a:chExt cx="1931683" cy="1071568"/>
+                <a:chExt cx="1931692" cy="1071575"/>
               </a:xfrm>
             </p:grpSpPr>
             <p:sp>
               <p:nvSpPr>
-                <p:cNvPr id="227" name="Rectangle"/>
+                <p:cNvPr id="225" name="Rectangle"/>
                 <p:cNvSpPr/>
                 <p:nvPr/>
               </p:nvSpPr>
               <p:spPr>
                 <a:xfrm>
                   <a:off x="-1" y="-1"/>
-                  <a:ext cx="1931684" cy="1071570"/>
+                  <a:ext cx="1931694" cy="1071576"/>
                 </a:xfrm>
                 <a:prstGeom prst="rect">
                   <a:avLst/>
@@ -11002,9 +10944,9 @@
                 <a:p>
                   <a:pPr>
                     <a:defRPr sz="1000">
-                      <a:latin typeface="+mn-lt"/>
-                      <a:ea typeface="+mn-ea"/>
-                      <a:cs typeface="+mn-cs"/>
+                      <a:latin typeface="+mj-lt"/>
+                      <a:ea typeface="+mj-ea"/>
+                      <a:cs typeface="+mj-cs"/>
                       <a:sym typeface="Arial"/>
                     </a:defRPr>
                   </a:pPr>
@@ -11013,14 +10955,14 @@
             </p:sp>
             <p:sp>
               <p:nvSpPr>
-                <p:cNvPr id="228" name="/curated"/>
+                <p:cNvPr id="226" name="/curated"/>
                 <p:cNvSpPr/>
                 <p:nvPr/>
               </p:nvSpPr>
               <p:spPr>
                 <a:xfrm>
-                  <a:off x="78124" y="112065"/>
-                  <a:ext cx="1845957" cy="1"/>
+                  <a:off x="78125" y="112065"/>
+                  <a:ext cx="1845967" cy="1"/>
                 </a:xfrm>
                 <a:custGeom>
                   <a:avLst/>
@@ -11099,14 +11041,14 @@
           </p:grpSp>
           <p:sp>
             <p:nvSpPr>
-              <p:cNvPr id="230" name="Datasets locaux de notebook pour entraînement ML, dont training_dataset_df."/>
+              <p:cNvPr id="228" name="Datasets locaux de notebook pour entraînement ML, dont training_dataset_df."/>
               <p:cNvSpPr/>
               <p:nvPr/>
             </p:nvSpPr>
             <p:spPr>
               <a:xfrm>
-                <a:off x="42862" y="327649"/>
-                <a:ext cx="1845956" cy="1"/>
+                <a:off x="42865" y="327650"/>
+                <a:ext cx="1845963" cy="1"/>
               </a:xfrm>
               <a:custGeom>
                 <a:avLst/>
@@ -11163,7 +11105,7 @@
               </a:bodyPr>
               <a:lstStyle>
                 <a:lvl1pPr>
-                  <a:defRPr sz="1100">
+                  <a:defRPr sz="1000">
                     <a:latin typeface="Inter"/>
                     <a:ea typeface="Inter"/>
                     <a:cs typeface="Inter"/>
@@ -11183,21 +11125,21 @@
       </p:grpSp>
       <p:grpSp>
         <p:nvGrpSpPr>
-          <p:cNvPr id="235" name="Groupe 35"/>
+          <p:cNvPr id="233" name="Groupe 35"/>
           <p:cNvGrpSpPr/>
           <p:nvPr/>
         </p:nvGrpSpPr>
         <p:grpSpPr>
           <a:xfrm>
-            <a:off x="3132922" y="1101847"/>
-            <a:ext cx="621508" cy="1071570"/>
+            <a:off x="3132919" y="1101843"/>
+            <a:ext cx="621512" cy="1071576"/>
             <a:chOff x="0" y="-1"/>
-            <a:chExt cx="621507" cy="1071567"/>
+            <a:chExt cx="621511" cy="1071575"/>
           </a:xfrm>
         </p:grpSpPr>
         <p:pic>
           <p:nvPicPr>
-            <p:cNvPr id="233" name="Image 36" descr="Image 36"/>
+            <p:cNvPr id="231" name="Image 36" descr="Image 36"/>
             <p:cNvPicPr>
               <a:picLocks noChangeAspect="1"/>
             </p:cNvPicPr>
@@ -11214,7 +11156,7 @@
           <p:spPr>
             <a:xfrm>
               <a:off x="-1" y="-2"/>
-              <a:ext cx="585754" cy="538376"/>
+              <a:ext cx="585757" cy="538381"/>
             </a:xfrm>
             <a:prstGeom prst="rect">
               <a:avLst/>
@@ -11228,7 +11170,7 @@
         </p:pic>
         <p:pic>
           <p:nvPicPr>
-            <p:cNvPr id="234" name="Image 37" descr="Image 37"/>
+            <p:cNvPr id="232" name="Image 37" descr="Image 37"/>
             <p:cNvPicPr>
               <a:picLocks noChangeAspect="1"/>
             </p:cNvPicPr>
@@ -11244,8 +11186,8 @@
           </p:blipFill>
           <p:spPr>
             <a:xfrm>
-              <a:off x="35754" y="471529"/>
-              <a:ext cx="585754" cy="600038"/>
+              <a:off x="35755" y="471532"/>
+              <a:ext cx="585756" cy="600042"/>
             </a:xfrm>
             <a:prstGeom prst="rect">
               <a:avLst/>
@@ -11260,7 +11202,7 @@
       </p:grpSp>
       <p:pic>
         <p:nvPicPr>
-          <p:cNvPr id="236" name="Image 57" descr="Image 57"/>
+          <p:cNvPr id="234" name="Image 57" descr="Image 57"/>
           <p:cNvPicPr>
             <a:picLocks noChangeAspect="1"/>
           </p:cNvPicPr>
@@ -11277,7 +11219,7 @@
         <p:spPr>
           <a:xfrm>
             <a:off x="7387500" y="3484202"/>
-            <a:ext cx="1196485" cy="577615"/>
+            <a:ext cx="1196487" cy="577617"/>
           </a:xfrm>
           <a:prstGeom prst="rect">
             <a:avLst/>
@@ -11289,14 +11231,14 @@
       </p:pic>
       <p:sp>
         <p:nvSpPr>
-          <p:cNvPr id="237" name="Fleche FastAPI vers Render"/>
+          <p:cNvPr id="235" name="Fleche FastAPI vers Render"/>
           <p:cNvSpPr/>
           <p:nvPr/>
         </p:nvSpPr>
         <p:spPr>
           <a:xfrm>
             <a:off x="5293038" y="2249170"/>
-            <a:ext cx="1726871" cy="616425"/>
+            <a:ext cx="1726872" cy="616427"/>
           </a:xfrm>
           <a:prstGeom prst="line">
             <a:avLst/>
@@ -11318,14 +11260,14 @@
       </p:sp>
       <p:sp>
         <p:nvSpPr>
-          <p:cNvPr id="238" name="Fleche FastAPI vers Render"/>
+          <p:cNvPr id="236" name="Fleche FastAPI vers Render"/>
           <p:cNvSpPr/>
           <p:nvPr/>
         </p:nvSpPr>
         <p:spPr>
           <a:xfrm flipV="1">
-            <a:off x="3443675" y="2249846"/>
-            <a:ext cx="1810039" cy="752125"/>
+            <a:off x="3443675" y="2249845"/>
+            <a:ext cx="1810039" cy="752127"/>
           </a:xfrm>
           <a:prstGeom prst="line">
             <a:avLst/>
@@ -11347,14 +11289,14 @@
       </p:sp>
       <p:sp>
         <p:nvSpPr>
-          <p:cNvPr id="239" name="Fleche FastAPI vers Render"/>
+          <p:cNvPr id="237" name="Fleche FastAPI vers Render"/>
           <p:cNvSpPr/>
           <p:nvPr/>
         </p:nvSpPr>
         <p:spPr>
           <a:xfrm>
             <a:off x="2661604" y="2119458"/>
-            <a:ext cx="348618" cy="1091913"/>
+            <a:ext cx="348620" cy="1091915"/>
           </a:xfrm>
           <a:prstGeom prst="line">
             <a:avLst/>
@@ -11376,14 +11318,14 @@
       </p:sp>
       <p:sp>
         <p:nvSpPr>
-          <p:cNvPr id="240" name="Fleche FastAPI vers Render"/>
+          <p:cNvPr id="238" name="Fleche FastAPI vers Render"/>
           <p:cNvSpPr/>
           <p:nvPr/>
         </p:nvSpPr>
         <p:spPr>
           <a:xfrm flipV="1">
-            <a:off x="2646771" y="3211367"/>
-            <a:ext cx="363451" cy="937406"/>
+            <a:off x="2646770" y="3211367"/>
+            <a:ext cx="363453" cy="937406"/>
           </a:xfrm>
           <a:prstGeom prst="line">
             <a:avLst/>
@@ -11431,7 +11373,7 @@
       </p:grpSpPr>
       <p:pic>
         <p:nvPicPr>
-          <p:cNvPr id="242" name="Fond Pau FC" descr="Fond Pau FC"/>
+          <p:cNvPr id="240" name="Fond Pau FC" descr="Fond Pau FC"/>
           <p:cNvPicPr>
             <a:picLocks noChangeAspect="1"/>
           </p:cNvPicPr>
@@ -11461,7 +11403,7 @@
       </p:pic>
       <p:sp>
         <p:nvSpPr>
-          <p:cNvPr id="243" name="Google Shape;75;p16"/>
+          <p:cNvPr id="241" name="Google Shape;75;p16"/>
           <p:cNvSpPr txBox="1"/>
           <p:nvPr>
             <p:ph type="title"/>
@@ -11469,42 +11411,39 @@
         </p:nvSpPr>
         <p:spPr>
           <a:xfrm>
-            <a:off x="1192662" y="403309"/>
-            <a:ext cx="8218755" cy="533103"/>
+            <a:off x="1192662" y="403307"/>
+            <a:ext cx="8218755" cy="533106"/>
           </a:xfrm>
           <a:prstGeom prst="rect">
             <a:avLst/>
           </a:prstGeom>
         </p:spPr>
         <p:txBody>
-          <a:bodyPr/>
-          <a:lstStyle/>
-          <a:p>
-            <a:pPr defTabSz="365758">
-              <a:defRPr sz="1100">
+          <a:bodyPr anchor="ctr"/>
+          <a:lstStyle>
+            <a:lvl1pPr defTabSz="740662">
+              <a:defRPr sz="2200">
+                <a:solidFill>
+                  <a:srgbClr val="0E3449"/>
+                </a:solidFill>
                 <a:latin typeface="Inter SemiBold"/>
                 <a:ea typeface="Inter SemiBold"/>
                 <a:cs typeface="Inter SemiBold"/>
                 <a:sym typeface="Inter SemiBold"/>
               </a:defRPr>
-            </a:pPr>
+            </a:lvl1pPr>
+          </a:lstStyle>
+          <a:p>
+            <a:pPr/>
             <a:r>
-              <a:t>EDA : </a:t>
+              <a:t>EDA : sécurise le dataset d'entraînement</a:t>
             </a:r>
-            <a:r>
-              <a:rPr sz="1000"/>
-              <a:t>sécurise</a:t>
-            </a:r>
-            <a:r>
-              <a:t> le dataset d'entraînement</a:t>
-            </a:r>
-            <a:br/>
           </a:p>
         </p:txBody>
       </p:sp>
       <p:pic>
         <p:nvPicPr>
-          <p:cNvPr id="244" name="Google Shape;76;p16" descr="Google Shape;76;p16"/>
+          <p:cNvPr id="242" name="Google Shape;76;p16" descr="Google Shape;76;p16"/>
           <p:cNvPicPr>
             <a:picLocks noChangeAspect="1"/>
           </p:cNvPicPr>
@@ -11521,7 +11460,7 @@
         <p:spPr>
           <a:xfrm>
             <a:off x="463375" y="482852"/>
-            <a:ext cx="576901" cy="385907"/>
+            <a:ext cx="576901" cy="385909"/>
           </a:xfrm>
           <a:prstGeom prst="rect">
             <a:avLst/>
@@ -11533,7 +11472,7 @@
       </p:pic>
       <p:sp>
         <p:nvSpPr>
-          <p:cNvPr id="245" name="Google Shape;77;p16"/>
+          <p:cNvPr id="243" name="Google Shape;77;p16"/>
           <p:cNvSpPr/>
           <p:nvPr/>
         </p:nvSpPr>
@@ -11558,9 +11497,9 @@
           <a:p>
             <a:pPr>
               <a:defRPr>
-                <a:latin typeface="+mn-lt"/>
-                <a:ea typeface="+mn-ea"/>
-                <a:cs typeface="+mn-cs"/>
+                <a:latin typeface="+mj-lt"/>
+                <a:ea typeface="+mj-ea"/>
+                <a:cs typeface="+mj-cs"/>
                 <a:sym typeface="Arial"/>
               </a:defRPr>
             </a:pPr>
@@ -11569,7 +11508,7 @@
       </p:sp>
       <p:sp>
         <p:nvSpPr>
-          <p:cNvPr id="246" name="Périmètre: matchs UEFA des 5 dernières années, entre les 100 meilleurs clubs UEFA."/>
+          <p:cNvPr id="244" name="Périmètre: matchs UEFA des 5 dernières années, entre les 100 meilleurs clubs UEFA."/>
           <p:cNvSpPr txBox="1"/>
           <p:nvPr/>
         </p:nvSpPr>
@@ -11617,42 +11556,42 @@
       </p:sp>
       <p:grpSp>
         <p:nvGrpSpPr>
-          <p:cNvPr id="251" name="Groupe 33"/>
+          <p:cNvPr id="249" name="Groupe 33"/>
           <p:cNvGrpSpPr/>
           <p:nvPr/>
         </p:nvGrpSpPr>
         <p:grpSpPr>
           <a:xfrm>
-            <a:off x="751819" y="1784182"/>
-            <a:ext cx="1928825" cy="1985971"/>
-            <a:chOff x="-1" y="0"/>
-            <a:chExt cx="1928823" cy="1985970"/>
+            <a:off x="751814" y="1784178"/>
+            <a:ext cx="1928830" cy="1985977"/>
+            <a:chOff x="-1" y="-1"/>
+            <a:chExt cx="1928829" cy="1985976"/>
           </a:xfrm>
         </p:grpSpPr>
         <p:grpSp>
           <p:nvGrpSpPr>
-            <p:cNvPr id="249" name="Groupe 32"/>
+            <p:cNvPr id="247" name="Groupe 32"/>
             <p:cNvGrpSpPr/>
             <p:nvPr/>
           </p:nvGrpSpPr>
           <p:grpSpPr>
             <a:xfrm>
-              <a:off x="-2" y="-1"/>
-              <a:ext cx="1928825" cy="1985971"/>
-              <a:chOff x="0" y="0"/>
-              <a:chExt cx="1928823" cy="1985970"/>
+              <a:off x="-2" y="-2"/>
+              <a:ext cx="1928831" cy="1985977"/>
+              <a:chOff x="0" y="-1"/>
+              <a:chExt cx="1928829" cy="1985976"/>
             </a:xfrm>
           </p:grpSpPr>
           <p:sp>
             <p:nvSpPr>
-              <p:cNvPr id="247" name="Rectangle"/>
+              <p:cNvPr id="245" name="Rectangle"/>
               <p:cNvSpPr/>
               <p:nvPr/>
             </p:nvSpPr>
             <p:spPr>
               <a:xfrm>
-                <a:off x="-1" y="-1"/>
-                <a:ext cx="1928824" cy="1985971"/>
+                <a:off x="-1" y="-2"/>
+                <a:ext cx="1928830" cy="1985978"/>
               </a:xfrm>
               <a:prstGeom prst="rect">
                 <a:avLst/>
@@ -11676,9 +11615,9 @@
               <a:p>
                 <a:pPr>
                   <a:defRPr sz="1000">
-                    <a:latin typeface="+mn-lt"/>
-                    <a:ea typeface="+mn-ea"/>
-                    <a:cs typeface="+mn-cs"/>
+                    <a:latin typeface="+mj-lt"/>
+                    <a:ea typeface="+mj-ea"/>
+                    <a:cs typeface="+mj-cs"/>
                     <a:sym typeface="Arial"/>
                   </a:defRPr>
                 </a:pPr>
@@ -11687,14 +11626,14 @@
           </p:sp>
           <p:sp>
             <p:nvSpPr>
-              <p:cNvPr id="248" name="100"/>
+              <p:cNvPr id="246" name="100"/>
               <p:cNvSpPr txBox="1"/>
               <p:nvPr/>
             </p:nvSpPr>
             <p:spPr>
               <a:xfrm>
-                <a:off x="234316" y="268608"/>
-                <a:ext cx="1503056" cy="598891"/>
+                <a:off x="234317" y="268608"/>
+                <a:ext cx="1503062" cy="598891"/>
               </a:xfrm>
               <a:prstGeom prst="rect">
                 <a:avLst/>
@@ -11718,9 +11657,9 @@
               <a:lstStyle>
                 <a:lvl1pPr>
                   <a:defRPr b="1" sz="3800">
-                    <a:latin typeface="+mn-lt"/>
-                    <a:ea typeface="+mn-ea"/>
-                    <a:cs typeface="+mn-cs"/>
+                    <a:latin typeface="+mj-lt"/>
+                    <a:ea typeface="+mj-ea"/>
+                    <a:cs typeface="+mj-cs"/>
                     <a:sym typeface="Arial"/>
                   </a:defRPr>
                 </a:lvl1pPr>
@@ -11736,14 +11675,14 @@
         </p:grpSp>
         <p:sp>
           <p:nvSpPr>
-            <p:cNvPr id="250" name="meilleures équipes UEFA comme base de comparaison"/>
+            <p:cNvPr id="248" name="meilleures équipes UEFA comme base de comparaison"/>
             <p:cNvSpPr txBox="1"/>
             <p:nvPr/>
           </p:nvSpPr>
           <p:spPr>
             <a:xfrm>
-              <a:off x="248604" y="1154433"/>
-              <a:ext cx="1431614" cy="563879"/>
+              <a:off x="248607" y="1154435"/>
+              <a:ext cx="1431617" cy="563879"/>
             </a:xfrm>
             <a:prstGeom prst="rect">
               <a:avLst/>
@@ -11785,42 +11724,42 @@
       </p:grpSp>
       <p:grpSp>
         <p:nvGrpSpPr>
-          <p:cNvPr id="256" name="Groupe 31"/>
+          <p:cNvPr id="254" name="Groupe 31"/>
           <p:cNvGrpSpPr/>
           <p:nvPr/>
         </p:nvGrpSpPr>
         <p:grpSpPr>
           <a:xfrm>
-            <a:off x="3135522" y="1798528"/>
-            <a:ext cx="1928821" cy="1985971"/>
-            <a:chOff x="0" y="0"/>
-            <a:chExt cx="1928819" cy="1985970"/>
+            <a:off x="3135517" y="1798524"/>
+            <a:ext cx="1928829" cy="1985977"/>
+            <a:chOff x="-2" y="-1"/>
+            <a:chExt cx="1928828" cy="1985976"/>
           </a:xfrm>
         </p:grpSpPr>
         <p:grpSp>
           <p:nvGrpSpPr>
-            <p:cNvPr id="254" name="Groupe 30"/>
+            <p:cNvPr id="252" name="Groupe 30"/>
             <p:cNvGrpSpPr/>
             <p:nvPr/>
           </p:nvGrpSpPr>
           <p:grpSpPr>
             <a:xfrm>
-              <a:off x="-1" y="-1"/>
-              <a:ext cx="1928821" cy="1985971"/>
-              <a:chOff x="0" y="0"/>
-              <a:chExt cx="1928819" cy="1985970"/>
+              <a:off x="-3" y="-2"/>
+              <a:ext cx="1928829" cy="1985977"/>
+              <a:chOff x="-1" y="-1"/>
+              <a:chExt cx="1928828" cy="1985976"/>
             </a:xfrm>
           </p:grpSpPr>
           <p:sp>
             <p:nvSpPr>
-              <p:cNvPr id="252" name="Rectangle"/>
+              <p:cNvPr id="250" name="Rectangle"/>
               <p:cNvSpPr/>
               <p:nvPr/>
             </p:nvSpPr>
             <p:spPr>
               <a:xfrm>
-                <a:off x="-1" y="-1"/>
-                <a:ext cx="1928821" cy="1985971"/>
+                <a:off x="-2" y="-2"/>
+                <a:ext cx="1928829" cy="1985978"/>
               </a:xfrm>
               <a:prstGeom prst="rect">
                 <a:avLst/>
@@ -11844,9 +11783,9 @@
               <a:p>
                 <a:pPr>
                   <a:defRPr sz="1000">
-                    <a:latin typeface="+mn-lt"/>
-                    <a:ea typeface="+mn-ea"/>
-                    <a:cs typeface="+mn-cs"/>
+                    <a:latin typeface="+mj-lt"/>
+                    <a:ea typeface="+mj-ea"/>
+                    <a:cs typeface="+mj-cs"/>
                     <a:sym typeface="Arial"/>
                   </a:defRPr>
                 </a:pPr>
@@ -11855,14 +11794,14 @@
           </p:sp>
           <p:sp>
             <p:nvSpPr>
-              <p:cNvPr id="253" name="6000"/>
+              <p:cNvPr id="251" name="6000"/>
               <p:cNvSpPr txBox="1"/>
               <p:nvPr/>
             </p:nvSpPr>
             <p:spPr>
               <a:xfrm>
                 <a:off x="234315" y="268608"/>
-                <a:ext cx="1503054" cy="598891"/>
+                <a:ext cx="1503062" cy="598891"/>
               </a:xfrm>
               <a:prstGeom prst="rect">
                 <a:avLst/>
@@ -11886,9 +11825,9 @@
               <a:lstStyle>
                 <a:lvl1pPr>
                   <a:defRPr b="1" sz="3800">
-                    <a:latin typeface="+mn-lt"/>
-                    <a:ea typeface="+mn-ea"/>
-                    <a:cs typeface="+mn-cs"/>
+                    <a:latin typeface="+mj-lt"/>
+                    <a:ea typeface="+mj-ea"/>
+                    <a:cs typeface="+mj-cs"/>
                     <a:sym typeface="Arial"/>
                   </a:defRPr>
                 </a:lvl1pPr>
@@ -11904,14 +11843,14 @@
         </p:grpSp>
         <p:sp>
           <p:nvSpPr>
-            <p:cNvPr id="255" name="matchs environ avant jointure complète"/>
+            <p:cNvPr id="253" name="matchs environ avant jointure complète"/>
             <p:cNvSpPr txBox="1"/>
             <p:nvPr/>
           </p:nvSpPr>
           <p:spPr>
             <a:xfrm>
-              <a:off x="248604" y="1154433"/>
-              <a:ext cx="1431613" cy="398779"/>
+              <a:off x="248605" y="1154435"/>
+              <a:ext cx="1431617" cy="398779"/>
             </a:xfrm>
             <a:prstGeom prst="rect">
               <a:avLst/>
@@ -11953,42 +11892,42 @@
       </p:grpSp>
       <p:grpSp>
         <p:nvGrpSpPr>
-          <p:cNvPr id="261" name="Groupe 29"/>
+          <p:cNvPr id="259" name="Groupe 29"/>
           <p:cNvGrpSpPr/>
           <p:nvPr/>
         </p:nvGrpSpPr>
         <p:grpSpPr>
           <a:xfrm>
-            <a:off x="5915157" y="1784182"/>
-            <a:ext cx="1928820" cy="1985971"/>
-            <a:chOff x="0" y="0"/>
-            <a:chExt cx="1928819" cy="1985970"/>
+            <a:off x="5915152" y="1784178"/>
+            <a:ext cx="1928828" cy="1985977"/>
+            <a:chOff x="-1" y="-1"/>
+            <a:chExt cx="1928827" cy="1985976"/>
           </a:xfrm>
         </p:grpSpPr>
         <p:grpSp>
           <p:nvGrpSpPr>
-            <p:cNvPr id="259" name="Groupe 28"/>
+            <p:cNvPr id="257" name="Groupe 28"/>
             <p:cNvGrpSpPr/>
             <p:nvPr/>
           </p:nvGrpSpPr>
           <p:grpSpPr>
             <a:xfrm>
-              <a:off x="-1" y="-1"/>
-              <a:ext cx="1928821" cy="1985971"/>
-              <a:chOff x="0" y="0"/>
-              <a:chExt cx="1928819" cy="1985970"/>
+              <a:off x="-2" y="-2"/>
+              <a:ext cx="1928828" cy="1985977"/>
+              <a:chOff x="0" y="-1"/>
+              <a:chExt cx="1928827" cy="1985976"/>
             </a:xfrm>
           </p:grpSpPr>
           <p:sp>
             <p:nvSpPr>
-              <p:cNvPr id="257" name="Rectangle"/>
+              <p:cNvPr id="255" name="Rectangle"/>
               <p:cNvSpPr/>
               <p:nvPr/>
             </p:nvSpPr>
             <p:spPr>
               <a:xfrm>
-                <a:off x="-1" y="-1"/>
-                <a:ext cx="1928821" cy="1985971"/>
+                <a:off x="-1" y="-2"/>
+                <a:ext cx="1928828" cy="1985978"/>
               </a:xfrm>
               <a:prstGeom prst="rect">
                 <a:avLst/>
@@ -12012,9 +11951,9 @@
               <a:p>
                 <a:pPr>
                   <a:defRPr sz="1000">
-                    <a:latin typeface="+mn-lt"/>
-                    <a:ea typeface="+mn-ea"/>
-                    <a:cs typeface="+mn-cs"/>
+                    <a:latin typeface="+mj-lt"/>
+                    <a:ea typeface="+mj-ea"/>
+                    <a:cs typeface="+mj-cs"/>
                     <a:sym typeface="Arial"/>
                   </a:defRPr>
                 </a:pPr>
@@ -12023,14 +11962,14 @@
           </p:sp>
           <p:sp>
             <p:nvSpPr>
-              <p:cNvPr id="258" name="3800"/>
+              <p:cNvPr id="256" name="3800"/>
               <p:cNvSpPr txBox="1"/>
               <p:nvPr/>
             </p:nvSpPr>
             <p:spPr>
               <a:xfrm>
-                <a:off x="212885" y="268608"/>
-                <a:ext cx="1503054" cy="598891"/>
+                <a:off x="212886" y="268608"/>
+                <a:ext cx="1503060" cy="598891"/>
               </a:xfrm>
               <a:prstGeom prst="rect">
                 <a:avLst/>
@@ -12054,9 +11993,9 @@
               <a:lstStyle>
                 <a:lvl1pPr>
                   <a:defRPr b="1" sz="3800">
-                    <a:latin typeface="+mn-lt"/>
-                    <a:ea typeface="+mn-ea"/>
-                    <a:cs typeface="+mn-cs"/>
+                    <a:latin typeface="+mj-lt"/>
+                    <a:ea typeface="+mj-ea"/>
+                    <a:cs typeface="+mj-cs"/>
                     <a:sym typeface="Arial"/>
                   </a:defRPr>
                 </a:lvl1pPr>
@@ -12072,14 +12011,14 @@
         </p:grpSp>
         <p:sp>
           <p:nvSpPr>
-            <p:cNvPr id="260" name="matchs exploitables après retrait des NaN"/>
+            <p:cNvPr id="258" name="matchs exploitables après retrait des NaN"/>
             <p:cNvSpPr txBox="1"/>
             <p:nvPr/>
           </p:nvSpPr>
           <p:spPr>
             <a:xfrm>
-              <a:off x="227173" y="1154433"/>
-              <a:ext cx="1431613" cy="398779"/>
+              <a:off x="227175" y="1154435"/>
+              <a:ext cx="1431615" cy="398779"/>
             </a:xfrm>
             <a:prstGeom prst="rect">
               <a:avLst/>
@@ -12121,7 +12060,7 @@
       </p:grpSp>
       <p:sp>
         <p:nvSpPr>
-          <p:cNvPr id="262" name="Conclusion modele"/>
+          <p:cNvPr id="260" name="Conclusion modele"/>
           <p:cNvSpPr txBox="1"/>
           <p:nvPr/>
         </p:nvSpPr>
@@ -12159,21 +12098,21 @@
           <a:p>
             <a:pPr/>
             <a:r>
-              <a:t>Conclusion modele</a:t>
+              <a:t>Conclusion modèle</a:t>
             </a:r>
           </a:p>
         </p:txBody>
       </p:sp>
       <p:sp>
         <p:nvSpPr>
-          <p:cNvPr id="263" name="Le clustering joueurs a surtout séparé les niveaux de force, pas des profils techniques nets. Dans cette version, il réduit l'information et dégrade la performance."/>
+          <p:cNvPr id="261" name="Le clustering joueurs a surtout séparé les niveaux de force, pas des profils techniques nets. Dans cette version, il réduit l'information et dégrade la performance."/>
           <p:cNvSpPr txBox="1"/>
           <p:nvPr/>
         </p:nvSpPr>
         <p:spPr>
           <a:xfrm>
-            <a:off x="2384984" y="4168549"/>
-            <a:ext cx="5646427" cy="398779"/>
+            <a:off x="2384983" y="4168549"/>
+            <a:ext cx="5646430" cy="398779"/>
           </a:xfrm>
           <a:prstGeom prst="rect">
             <a:avLst/>
@@ -12211,14 +12150,14 @@
       </p:sp>
       <p:sp>
         <p:nvSpPr>
-          <p:cNvPr id="264" name="3"/>
+          <p:cNvPr id="262" name="3"/>
           <p:cNvSpPr txBox="1"/>
           <p:nvPr/>
         </p:nvSpPr>
         <p:spPr>
           <a:xfrm>
             <a:off x="8492489" y="4726306"/>
-            <a:ext cx="317187" cy="154570"/>
+            <a:ext cx="317189" cy="154570"/>
           </a:xfrm>
           <a:prstGeom prst="rect">
             <a:avLst/>
@@ -12242,9 +12181,9 @@
                 <a:solidFill>
                   <a:srgbClr val="555555"/>
                 </a:solidFill>
-                <a:latin typeface="+mn-lt"/>
-                <a:ea typeface="+mn-ea"/>
-                <a:cs typeface="+mn-cs"/>
+                <a:latin typeface="+mj-lt"/>
+                <a:ea typeface="+mj-ea"/>
+                <a:cs typeface="+mj-cs"/>
                 <a:sym typeface="Arial"/>
               </a:defRPr>
             </a:lvl1pPr>
@@ -12285,7 +12224,7 @@
       </p:grpSpPr>
       <p:pic>
         <p:nvPicPr>
-          <p:cNvPr id="266" name="Fond FC Barcelone" descr="Fond FC Barcelone"/>
+          <p:cNvPr id="264" name="Fond FC Barcelone" descr="Fond FC Barcelone"/>
           <p:cNvPicPr>
             <a:picLocks noChangeAspect="1"/>
           </p:cNvPicPr>
@@ -12315,7 +12254,7 @@
       </p:pic>
       <p:sp>
         <p:nvSpPr>
-          <p:cNvPr id="267" name="Google Shape;75;p16"/>
+          <p:cNvPr id="265" name="Google Shape;75;p16"/>
           <p:cNvSpPr txBox="1"/>
           <p:nvPr>
             <p:ph type="title"/>
@@ -12323,15 +12262,15 @@
         </p:nvSpPr>
         <p:spPr>
           <a:xfrm>
-            <a:off x="1192662" y="403309"/>
-            <a:ext cx="5315105" cy="533103"/>
+            <a:off x="1192661" y="403307"/>
+            <a:ext cx="5315108" cy="533106"/>
           </a:xfrm>
           <a:prstGeom prst="rect">
             <a:avLst/>
           </a:prstGeom>
         </p:spPr>
         <p:txBody>
-          <a:bodyPr/>
+          <a:bodyPr anchor="ctr"/>
           <a:lstStyle>
             <a:lvl1pPr defTabSz="822958">
               <a:defRPr sz="2200">
@@ -12355,7 +12294,7 @@
       </p:sp>
       <p:pic>
         <p:nvPicPr>
-          <p:cNvPr id="268" name="Google Shape;76;p16" descr="Google Shape;76;p16"/>
+          <p:cNvPr id="266" name="Google Shape;76;p16" descr="Google Shape;76;p16"/>
           <p:cNvPicPr>
             <a:picLocks noChangeAspect="1"/>
           </p:cNvPicPr>
@@ -12372,7 +12311,7 @@
         <p:spPr>
           <a:xfrm>
             <a:off x="463375" y="482852"/>
-            <a:ext cx="576901" cy="385907"/>
+            <a:ext cx="576901" cy="385909"/>
           </a:xfrm>
           <a:prstGeom prst="rect">
             <a:avLst/>
@@ -12384,7 +12323,7 @@
       </p:pic>
       <p:sp>
         <p:nvSpPr>
-          <p:cNvPr id="269" name="Google Shape;77;p16"/>
+          <p:cNvPr id="267" name="Google Shape;77;p16"/>
           <p:cNvSpPr/>
           <p:nvPr/>
         </p:nvSpPr>
@@ -12409,9 +12348,9 @@
           <a:p>
             <a:pPr>
               <a:defRPr>
-                <a:latin typeface="+mn-lt"/>
-                <a:ea typeface="+mn-ea"/>
-                <a:cs typeface="+mn-cs"/>
+                <a:latin typeface="+mj-lt"/>
+                <a:ea typeface="+mj-ea"/>
+                <a:cs typeface="+mj-cs"/>
                 <a:sym typeface="Arial"/>
               </a:defRPr>
             </a:pPr>
@@ -12420,21 +12359,21 @@
       </p:sp>
       <p:grpSp>
         <p:nvGrpSpPr>
-          <p:cNvPr id="272" name="Groupe 27"/>
+          <p:cNvPr id="270" name="Groupe 27"/>
           <p:cNvGrpSpPr/>
           <p:nvPr/>
         </p:nvGrpSpPr>
         <p:grpSpPr>
           <a:xfrm>
-            <a:off x="7096703" y="1678900"/>
-            <a:ext cx="1143104" cy="1615652"/>
-            <a:chOff x="0" y="0"/>
-            <a:chExt cx="1143102" cy="1615651"/>
+            <a:off x="7096703" y="1678898"/>
+            <a:ext cx="1143109" cy="1615655"/>
+            <a:chOff x="0" y="-1"/>
+            <a:chExt cx="1143107" cy="1615654"/>
           </a:xfrm>
         </p:grpSpPr>
         <p:pic>
           <p:nvPicPr>
-            <p:cNvPr id="270" name="Image 7" descr="Image 7"/>
+            <p:cNvPr id="268" name="Image 7" descr="Image 7"/>
             <p:cNvPicPr>
               <a:picLocks noChangeAspect="1"/>
             </p:cNvPicPr>
@@ -12451,7 +12390,7 @@
           <p:spPr>
             <a:xfrm>
               <a:off x="0" y="396341"/>
-              <a:ext cx="1143104" cy="1219310"/>
+              <a:ext cx="1143108" cy="1219313"/>
             </a:xfrm>
             <a:prstGeom prst="rect">
               <a:avLst/>
@@ -12465,7 +12404,7 @@
         </p:pic>
         <p:pic>
           <p:nvPicPr>
-            <p:cNvPr id="271" name="Image 13" descr="Image 13"/>
+            <p:cNvPr id="269" name="Image 13" descr="Image 13"/>
             <p:cNvPicPr>
               <a:picLocks noChangeAspect="1"/>
             </p:cNvPicPr>
@@ -12481,8 +12420,8 @@
           </p:blipFill>
           <p:spPr>
             <a:xfrm>
-              <a:off x="220147" y="-1"/>
-              <a:ext cx="844695" cy="530699"/>
+              <a:off x="220147" y="-2"/>
+              <a:ext cx="844699" cy="530702"/>
             </a:xfrm>
             <a:prstGeom prst="rect">
               <a:avLst/>
@@ -12497,21 +12436,21 @@
       </p:grpSp>
       <p:grpSp>
         <p:nvGrpSpPr>
-          <p:cNvPr id="276" name="Groupe 17"/>
+          <p:cNvPr id="274" name="Groupe 17"/>
           <p:cNvGrpSpPr/>
           <p:nvPr/>
         </p:nvGrpSpPr>
         <p:grpSpPr>
           <a:xfrm>
-            <a:off x="2546642" y="1488948"/>
-            <a:ext cx="2268731" cy="2356459"/>
+            <a:off x="2546640" y="1488945"/>
+            <a:ext cx="2278627" cy="2356461"/>
             <a:chOff x="0" y="0"/>
-            <a:chExt cx="2268729" cy="2356458"/>
+            <a:chExt cx="2278626" cy="2356460"/>
           </a:xfrm>
         </p:grpSpPr>
         <p:pic>
           <p:nvPicPr>
-            <p:cNvPr id="273" name="Image 2" descr="Image 2"/>
+            <p:cNvPr id="271" name="Image 2" descr="Image 2"/>
             <p:cNvPicPr>
               <a:picLocks noChangeAspect="1"/>
             </p:cNvPicPr>
@@ -12527,8 +12466,8 @@
           </p:blipFill>
           <p:spPr>
             <a:xfrm>
-              <a:off x="143865" y="837870"/>
-              <a:ext cx="1196486" cy="577615"/>
+              <a:off x="143865" y="837871"/>
+              <a:ext cx="1196490" cy="577618"/>
             </a:xfrm>
             <a:prstGeom prst="rect">
               <a:avLst/>
@@ -12542,7 +12481,7 @@
         </p:pic>
         <p:pic>
           <p:nvPicPr>
-            <p:cNvPr id="274" name="Image 15" descr="Image 15"/>
+            <p:cNvPr id="272" name="Image 15" descr="Image 15"/>
             <p:cNvPicPr>
               <a:picLocks noChangeAspect="1"/>
             </p:cNvPicPr>
@@ -12559,7 +12498,7 @@
           <p:spPr>
             <a:xfrm>
               <a:off x="392206" y="-1"/>
-              <a:ext cx="699803" cy="627210"/>
+              <a:ext cx="699806" cy="627213"/>
             </a:xfrm>
             <a:prstGeom prst="rect">
               <a:avLst/>
@@ -12573,14 +12512,14 @@
         </p:pic>
         <p:sp>
           <p:nvSpPr>
-            <p:cNvPr id="275" name="ZoneTexte 16"/>
+            <p:cNvPr id="273" name="ZoneTexte 16"/>
             <p:cNvSpPr txBox="1"/>
             <p:nvPr/>
           </p:nvSpPr>
           <p:spPr>
             <a:xfrm>
-              <a:off x="0" y="1617321"/>
-              <a:ext cx="2268730" cy="739137"/>
+              <a:off x="-1" y="1617323"/>
+              <a:ext cx="2278627" cy="739137"/>
             </a:xfrm>
             <a:prstGeom prst="rect">
               <a:avLst/>
@@ -12612,11 +12551,11 @@
                 </a:defRPr>
               </a:pPr>
               <a:r>
-                <a:t>Construction dataset</a:t>
+                <a:t>Construction des datasets</a:t>
               </a:r>
               <a:br/>
               <a:r>
-                <a:t>et entrainement du modèle </a:t>
+                <a:t>et entraînement du modèle </a:t>
               </a:r>
             </a:p>
             <a:p>
@@ -12629,7 +12568,7 @@
                 </a:defRPr>
               </a:pPr>
               <a:r>
-                <a:t>en Local</a:t>
+                <a:t>en local</a:t>
               </a:r>
             </a:p>
           </p:txBody>
@@ -12637,7 +12576,7 @@
       </p:grpSp>
       <p:sp>
         <p:nvSpPr>
-          <p:cNvPr id="277" name="Fleche FastAPI vers Render"/>
+          <p:cNvPr id="275" name="Fleche FastAPI vers Render"/>
           <p:cNvSpPr/>
           <p:nvPr/>
         </p:nvSpPr>
@@ -12666,14 +12605,14 @@
       </p:sp>
       <p:sp>
         <p:nvSpPr>
-          <p:cNvPr id="278" name="Fleche FastAPI vers Render"/>
+          <p:cNvPr id="276" name="Fleche FastAPI vers Render"/>
           <p:cNvSpPr/>
           <p:nvPr/>
         </p:nvSpPr>
         <p:spPr>
           <a:xfrm flipV="1">
             <a:off x="3886991" y="2579290"/>
-            <a:ext cx="863916" cy="70974"/>
+            <a:ext cx="863916" cy="70976"/>
           </a:xfrm>
           <a:prstGeom prst="line">
             <a:avLst/>
@@ -12695,14 +12634,14 @@
       </p:sp>
       <p:sp>
         <p:nvSpPr>
-          <p:cNvPr id="279" name="Fleche FastAPI vers Render"/>
+          <p:cNvPr id="277" name="Fleche FastAPI vers Render"/>
           <p:cNvSpPr/>
           <p:nvPr/>
         </p:nvSpPr>
         <p:spPr>
           <a:xfrm flipV="1">
             <a:off x="6259795" y="2494807"/>
-            <a:ext cx="836910" cy="11838"/>
+            <a:ext cx="836910" cy="11840"/>
           </a:xfrm>
           <a:prstGeom prst="line">
             <a:avLst/>
@@ -12724,21 +12663,21 @@
       </p:sp>
       <p:grpSp>
         <p:nvGrpSpPr>
-          <p:cNvPr id="282" name="Groupe 36"/>
+          <p:cNvPr id="280" name="Groupe 36"/>
           <p:cNvGrpSpPr/>
           <p:nvPr/>
         </p:nvGrpSpPr>
         <p:grpSpPr>
           <a:xfrm>
-            <a:off x="904196" y="2278924"/>
-            <a:ext cx="759827" cy="1350573"/>
+            <a:off x="904193" y="2278921"/>
+            <a:ext cx="759832" cy="1350578"/>
             <a:chOff x="-1" y="-1"/>
-            <a:chExt cx="759826" cy="1350572"/>
+            <a:chExt cx="759830" cy="1350577"/>
           </a:xfrm>
         </p:grpSpPr>
         <p:pic>
           <p:nvPicPr>
-            <p:cNvPr id="280" name="Image 9" descr="Image 9"/>
+            <p:cNvPr id="278" name="Image 9" descr="Image 9"/>
             <p:cNvPicPr>
               <a:picLocks noChangeAspect="1"/>
             </p:cNvPicPr>
@@ -12755,7 +12694,7 @@
           <p:spPr>
             <a:xfrm>
               <a:off x="-2" y="-2"/>
-              <a:ext cx="759828" cy="698370"/>
+              <a:ext cx="759832" cy="698374"/>
             </a:xfrm>
             <a:prstGeom prst="rect">
               <a:avLst/>
@@ -12769,7 +12708,7 @@
         </p:pic>
         <p:pic>
           <p:nvPicPr>
-            <p:cNvPr id="281" name="Image 35" descr="Image 35"/>
+            <p:cNvPr id="279" name="Image 35" descr="Image 35"/>
             <p:cNvPicPr>
               <a:picLocks noChangeAspect="1"/>
             </p:cNvPicPr>
@@ -12785,8 +12724,8 @@
           </p:blipFill>
           <p:spPr>
             <a:xfrm>
-              <a:off x="-2" y="572215"/>
-              <a:ext cx="759828" cy="778357"/>
+              <a:off x="-2" y="572217"/>
+              <a:ext cx="759832" cy="778360"/>
             </a:xfrm>
             <a:prstGeom prst="rect">
               <a:avLst/>
@@ -12801,49 +12740,49 @@
       </p:grpSp>
       <p:grpSp>
         <p:nvGrpSpPr>
-          <p:cNvPr id="289" name="Groupe 39"/>
+          <p:cNvPr id="287" name="Groupe 39"/>
           <p:cNvGrpSpPr/>
           <p:nvPr/>
         </p:nvGrpSpPr>
         <p:grpSpPr>
           <a:xfrm>
-            <a:off x="4750906" y="1740509"/>
-            <a:ext cx="1508900" cy="1553605"/>
-            <a:chOff x="0" y="-1"/>
-            <a:chExt cx="1508898" cy="1553604"/>
+            <a:off x="4750905" y="1740504"/>
+            <a:ext cx="1508909" cy="1553612"/>
+            <a:chOff x="0" y="-2"/>
+            <a:chExt cx="1508907" cy="1553610"/>
           </a:xfrm>
         </p:grpSpPr>
         <p:grpSp>
           <p:nvGrpSpPr>
-            <p:cNvPr id="287" name="Groupe 26"/>
+            <p:cNvPr id="285" name="Groupe 26"/>
             <p:cNvGrpSpPr/>
             <p:nvPr/>
           </p:nvGrpSpPr>
           <p:grpSpPr>
             <a:xfrm>
-              <a:off x="0" y="-2"/>
-              <a:ext cx="1508899" cy="1553606"/>
-              <a:chOff x="0" y="0"/>
-              <a:chExt cx="1508898" cy="1553604"/>
+              <a:off x="-1" y="-3"/>
+              <a:ext cx="1508908" cy="1553612"/>
+              <a:chOff x="0" y="-1"/>
+              <a:chExt cx="1508907" cy="1553610"/>
             </a:xfrm>
           </p:grpSpPr>
           <p:grpSp>
             <p:nvGrpSpPr>
-              <p:cNvPr id="285" name="Groupe 3"/>
+              <p:cNvPr id="283" name="Groupe 3"/>
               <p:cNvGrpSpPr/>
               <p:nvPr/>
             </p:nvGrpSpPr>
             <p:grpSpPr>
               <a:xfrm>
-                <a:off x="0" y="484198"/>
-                <a:ext cx="1508899" cy="1069407"/>
-                <a:chOff x="0" y="0"/>
-                <a:chExt cx="1508898" cy="1069405"/>
+                <a:off x="0" y="484197"/>
+                <a:ext cx="1508908" cy="1069413"/>
+                <a:chOff x="0" y="-1"/>
+                <a:chExt cx="1508907" cy="1069411"/>
               </a:xfrm>
             </p:grpSpPr>
             <p:pic>
               <p:nvPicPr>
-                <p:cNvPr id="283" name="Image 4" descr="Image 4"/>
+                <p:cNvPr id="281" name="Image 4" descr="Image 4"/>
                 <p:cNvPicPr>
                   <a:picLocks noChangeAspect="1"/>
                 </p:cNvPicPr>
@@ -12859,8 +12798,8 @@
               </p:blipFill>
               <p:spPr>
                 <a:xfrm>
-                  <a:off x="0" y="-1"/>
-                  <a:ext cx="1508899" cy="762073"/>
+                  <a:off x="0" y="-2"/>
+                  <a:ext cx="1508908" cy="762081"/>
                 </a:xfrm>
                 <a:prstGeom prst="rect">
                   <a:avLst/>
@@ -12874,13 +12813,13 @@
             </p:pic>
             <p:sp>
               <p:nvSpPr>
-                <p:cNvPr id="284" name="ZoneTexte 5"/>
+                <p:cNvPr id="282" name="ZoneTexte 5"/>
                 <p:cNvSpPr txBox="1"/>
                 <p:nvPr/>
               </p:nvSpPr>
               <p:spPr>
                 <a:xfrm>
-                  <a:off x="345738" y="762069"/>
+                  <a:off x="345739" y="762074"/>
                   <a:ext cx="779395" cy="307337"/>
                 </a:xfrm>
                 <a:prstGeom prst="rect">
@@ -12923,7 +12862,7 @@
           </p:grpSp>
           <p:pic>
             <p:nvPicPr>
-              <p:cNvPr id="286" name="Image 11" descr="Image 11"/>
+              <p:cNvPr id="284" name="Image 11" descr="Image 11"/>
               <p:cNvPicPr>
                 <a:picLocks noChangeAspect="1"/>
               </p:cNvPicPr>
@@ -12939,8 +12878,8 @@
             </p:blipFill>
             <p:spPr>
               <a:xfrm>
-                <a:off x="390419" y="-1"/>
-                <a:ext cx="728060" cy="599036"/>
+                <a:off x="390420" y="-2"/>
+                <a:ext cx="728065" cy="599042"/>
               </a:xfrm>
               <a:prstGeom prst="rect">
                 <a:avLst/>
@@ -12955,7 +12894,7 @@
         </p:grpSp>
         <p:pic>
           <p:nvPicPr>
-            <p:cNvPr id="288" name="Image 38" descr="Image 38"/>
+            <p:cNvPr id="286" name="Image 38" descr="Image 38"/>
             <p:cNvPicPr>
               <a:picLocks noChangeAspect="1"/>
             </p:cNvPicPr>
@@ -12971,8 +12910,8 @@
           </p:blipFill>
           <p:spPr>
             <a:xfrm>
-              <a:off x="1138059" y="320055"/>
-              <a:ext cx="351250" cy="213379"/>
+              <a:off x="1138061" y="320058"/>
+              <a:ext cx="351252" cy="213381"/>
             </a:xfrm>
             <a:prstGeom prst="rect">
               <a:avLst/>
@@ -12987,7 +12926,7 @@
       </p:grpSp>
       <p:pic>
         <p:nvPicPr>
-          <p:cNvPr id="290" name="Image 41" descr="Image 41"/>
+          <p:cNvPr id="288" name="Image 41" descr="Image 41"/>
           <p:cNvPicPr>
             <a:picLocks noChangeAspect="1"/>
           </p:cNvPicPr>
@@ -13004,7 +12943,7 @@
         <p:spPr>
           <a:xfrm>
             <a:off x="3092480" y="3816081"/>
-            <a:ext cx="759823" cy="410657"/>
+            <a:ext cx="759825" cy="410659"/>
           </a:xfrm>
           <a:prstGeom prst="rect">
             <a:avLst/>
@@ -13066,14 +13005,14 @@
     </a:clrScheme>
     <a:fontScheme name="Simple Light">
       <a:majorFont>
+        <a:latin typeface="Arial"/>
+        <a:ea typeface="Arial"/>
+        <a:cs typeface="Arial"/>
+      </a:majorFont>
+      <a:minorFont>
         <a:latin typeface="Helvetica"/>
         <a:ea typeface="Helvetica"/>
         <a:cs typeface="Helvetica"/>
-      </a:majorFont>
-      <a:minorFont>
-        <a:latin typeface="Arial"/>
-        <a:ea typeface="Arial"/>
-        <a:cs typeface="Arial"/>
       </a:minorFont>
     </a:fontScheme>
     <a:fmtScheme name="Simple Light">
@@ -13278,9 +13217,9 @@
             </a:solidFill>
             <a:effectLst/>
             <a:uFillTx/>
-            <a:latin typeface="+mj-lt"/>
-            <a:ea typeface="+mj-ea"/>
-            <a:cs typeface="+mj-cs"/>
+            <a:latin typeface="+mn-lt"/>
+            <a:ea typeface="+mn-ea"/>
+            <a:cs typeface="+mn-cs"/>
             <a:sym typeface="Helvetica"/>
           </a:defRPr>
         </a:defPPr>
@@ -13855,9 +13794,9 @@
             </a:solidFill>
             <a:effectLst/>
             <a:uFillTx/>
-            <a:latin typeface="+mj-lt"/>
-            <a:ea typeface="+mj-ea"/>
-            <a:cs typeface="+mj-cs"/>
+            <a:latin typeface="+mn-lt"/>
+            <a:ea typeface="+mn-ea"/>
+            <a:cs typeface="+mn-cs"/>
             <a:sym typeface="Helvetica"/>
           </a:defRPr>
         </a:defPPr>
@@ -14150,14 +14089,14 @@
     </a:clrScheme>
     <a:fontScheme name="Simple Light">
       <a:majorFont>
+        <a:latin typeface="Arial"/>
+        <a:ea typeface="Arial"/>
+        <a:cs typeface="Arial"/>
+      </a:majorFont>
+      <a:minorFont>
         <a:latin typeface="Helvetica"/>
         <a:ea typeface="Helvetica"/>
         <a:cs typeface="Helvetica"/>
-      </a:majorFont>
-      <a:minorFont>
-        <a:latin typeface="Arial"/>
-        <a:ea typeface="Arial"/>
-        <a:cs typeface="Arial"/>
       </a:minorFont>
     </a:fontScheme>
     <a:fmtScheme name="Simple Light">
@@ -14362,9 +14301,9 @@
             </a:solidFill>
             <a:effectLst/>
             <a:uFillTx/>
-            <a:latin typeface="+mj-lt"/>
-            <a:ea typeface="+mj-ea"/>
-            <a:cs typeface="+mj-cs"/>
+            <a:latin typeface="+mn-lt"/>
+            <a:ea typeface="+mn-ea"/>
+            <a:cs typeface="+mn-cs"/>
             <a:sym typeface="Helvetica"/>
           </a:defRPr>
         </a:defPPr>
@@ -14939,9 +14878,9 @@
             </a:solidFill>
             <a:effectLst/>
             <a:uFillTx/>
-            <a:latin typeface="+mj-lt"/>
-            <a:ea typeface="+mj-ea"/>
-            <a:cs typeface="+mj-cs"/>
+            <a:latin typeface="+mn-lt"/>
+            <a:ea typeface="+mn-ea"/>
+            <a:cs typeface="+mn-cs"/>
             <a:sym typeface="Helvetica"/>
           </a:defRPr>
         </a:defPPr>

--- a/docs/FootballPredictorDemoDay20260803.pptx
+++ b/docs/FootballPredictorDemoDay20260803.pptx
@@ -1,30 +1,29 @@
 
 <file path=ppt/presentation.xml><?xml version="1.0" encoding="utf-8"?>
-<p:presentation xmlns:a="http://schemas.openxmlformats.org/drawingml/2006/main" xmlns:r="http://schemas.openxmlformats.org/officeDocument/2006/relationships" xmlns:p="http://schemas.openxmlformats.org/presentationml/2006/main" xmlns:m="http://schemas.openxmlformats.org/officeDocument/2006/math" xmlns:a14="http://schemas.microsoft.com/office/drawing/2010/main">
+<p:presentation xmlns:a="http://schemas.openxmlformats.org/drawingml/2006/main" xmlns:r="http://schemas.openxmlformats.org/officeDocument/2006/relationships" xmlns:p="http://schemas.openxmlformats.org/presentationml/2006/main">
   <p:sldMasterIdLst>
-    <p:sldMasterId id="2147483648" r:id="rId5"/>
+    <p:sldMasterId id="2147483648" r:id="rId1"/>
   </p:sldMasterIdLst>
   <p:notesMasterIdLst>
-    <p:notesMasterId r:id="rId7"/>
+    <p:notesMasterId r:id="rId16"/>
   </p:notesMasterIdLst>
   <p:sldIdLst>
-    <p:sldId id="256" r:id="rId8"/>
-    <p:sldId id="257" r:id="rId9"/>
-    <p:sldId id="258" r:id="rId10"/>
-    <p:sldId id="259" r:id="rId11"/>
-    <p:sldId id="260" r:id="rId12"/>
-    <p:sldId id="261" r:id="rId13"/>
-    <p:sldId id="262" r:id="rId14"/>
-    <p:sldId id="263" r:id="rId15"/>
-    <p:sldId id="264" r:id="rId16"/>
-    <p:sldId id="265" r:id="rId17"/>
-    <p:sldId id="266" r:id="rId18"/>
-    <p:sldId id="267" r:id="rId19"/>
-    <p:sldId id="268" r:id="rId20"/>
-    <p:sldId id="269" r:id="rId21"/>
-    <p:sldId id="270" r:id="rId22"/>
+    <p:sldId id="256" r:id="rId2"/>
+    <p:sldId id="257" r:id="rId3"/>
+    <p:sldId id="258" r:id="rId4"/>
+    <p:sldId id="259" r:id="rId5"/>
+    <p:sldId id="260" r:id="rId6"/>
+    <p:sldId id="261" r:id="rId7"/>
+    <p:sldId id="262" r:id="rId8"/>
+    <p:sldId id="263" r:id="rId9"/>
+    <p:sldId id="264" r:id="rId10"/>
+    <p:sldId id="265" r:id="rId11"/>
+    <p:sldId id="267" r:id="rId12"/>
+    <p:sldId id="268" r:id="rId13"/>
+    <p:sldId id="269" r:id="rId14"/>
+    <p:sldId id="270" r:id="rId15"/>
   </p:sldIdLst>
-  <p:sldSz cx="9144000" cy="5143500"/>
+  <p:sldSz cx="9144000" cy="5143500" type="screen16x9"/>
   <p:notesSz cx="6858000" cy="9144000"/>
   <p:defaultTextStyle>
     <a:defPPr marL="0" marR="0" indent="0" algn="l" defTabSz="914400" rtl="0" fontAlgn="auto" latinLnBrk="1" hangingPunct="0">
@@ -42,7 +41,7 @@
       <a:buFontTx/>
       <a:buNone/>
       <a:tabLst/>
-      <a:defRPr b="0" baseline="0" cap="none" i="0" spc="0" strike="noStrike" sz="1800" u="none" kumimoji="0" normalizeH="0">
+      <a:defRPr kumimoji="0" sz="1800" b="0" i="0" u="none" strike="noStrike" cap="none" spc="0" normalizeH="0" baseline="0">
         <a:ln>
           <a:noFill/>
         </a:ln>
@@ -68,7 +67,7 @@
       <a:buFontTx/>
       <a:buNone/>
       <a:tabLst/>
-      <a:defRPr b="0" baseline="0" cap="none" i="0" spc="0" strike="noStrike" sz="1400" u="none" kumimoji="0" normalizeH="0">
+      <a:defRPr kumimoji="0" sz="1400" b="0" i="0" u="none" strike="noStrike" cap="none" spc="0" normalizeH="0" baseline="0">
         <a:ln>
           <a:noFill/>
         </a:ln>
@@ -98,7 +97,7 @@
       <a:buFontTx/>
       <a:buNone/>
       <a:tabLst/>
-      <a:defRPr b="0" baseline="0" cap="none" i="0" spc="0" strike="noStrike" sz="1400" u="none" kumimoji="0" normalizeH="0">
+      <a:defRPr kumimoji="0" sz="1400" b="0" i="0" u="none" strike="noStrike" cap="none" spc="0" normalizeH="0" baseline="0">
         <a:ln>
           <a:noFill/>
         </a:ln>
@@ -128,7 +127,7 @@
       <a:buFontTx/>
       <a:buNone/>
       <a:tabLst/>
-      <a:defRPr b="0" baseline="0" cap="none" i="0" spc="0" strike="noStrike" sz="1400" u="none" kumimoji="0" normalizeH="0">
+      <a:defRPr kumimoji="0" sz="1400" b="0" i="0" u="none" strike="noStrike" cap="none" spc="0" normalizeH="0" baseline="0">
         <a:ln>
           <a:noFill/>
         </a:ln>
@@ -158,7 +157,7 @@
       <a:buFontTx/>
       <a:buNone/>
       <a:tabLst/>
-      <a:defRPr b="0" baseline="0" cap="none" i="0" spc="0" strike="noStrike" sz="1400" u="none" kumimoji="0" normalizeH="0">
+      <a:defRPr kumimoji="0" sz="1400" b="0" i="0" u="none" strike="noStrike" cap="none" spc="0" normalizeH="0" baseline="0">
         <a:ln>
           <a:noFill/>
         </a:ln>
@@ -188,7 +187,7 @@
       <a:buFontTx/>
       <a:buNone/>
       <a:tabLst/>
-      <a:defRPr b="0" baseline="0" cap="none" i="0" spc="0" strike="noStrike" sz="1400" u="none" kumimoji="0" normalizeH="0">
+      <a:defRPr kumimoji="0" sz="1400" b="0" i="0" u="none" strike="noStrike" cap="none" spc="0" normalizeH="0" baseline="0">
         <a:ln>
           <a:noFill/>
         </a:ln>
@@ -218,7 +217,7 @@
       <a:buFontTx/>
       <a:buNone/>
       <a:tabLst/>
-      <a:defRPr b="0" baseline="0" cap="none" i="0" spc="0" strike="noStrike" sz="1400" u="none" kumimoji="0" normalizeH="0">
+      <a:defRPr kumimoji="0" sz="1400" b="0" i="0" u="none" strike="noStrike" cap="none" spc="0" normalizeH="0" baseline="0">
         <a:ln>
           <a:noFill/>
         </a:ln>
@@ -248,7 +247,7 @@
       <a:buFontTx/>
       <a:buNone/>
       <a:tabLst/>
-      <a:defRPr b="0" baseline="0" cap="none" i="0" spc="0" strike="noStrike" sz="1400" u="none" kumimoji="0" normalizeH="0">
+      <a:defRPr kumimoji="0" sz="1400" b="0" i="0" u="none" strike="noStrike" cap="none" spc="0" normalizeH="0" baseline="0">
         <a:ln>
           <a:noFill/>
         </a:ln>
@@ -278,7 +277,7 @@
       <a:buFontTx/>
       <a:buNone/>
       <a:tabLst/>
-      <a:defRPr b="0" baseline="0" cap="none" i="0" spc="0" strike="noStrike" sz="1400" u="none" kumimoji="0" normalizeH="0">
+      <a:defRPr kumimoji="0" sz="1400" b="0" i="0" u="none" strike="noStrike" cap="none" spc="0" normalizeH="0" baseline="0">
         <a:ln>
           <a:noFill/>
         </a:ln>
@@ -308,7 +307,7 @@
       <a:buFontTx/>
       <a:buNone/>
       <a:tabLst/>
-      <a:defRPr b="0" baseline="0" cap="none" i="0" spc="0" strike="noStrike" sz="1400" u="none" kumimoji="0" normalizeH="0">
+      <a:defRPr kumimoji="0" sz="1400" b="0" i="0" u="none" strike="noStrike" cap="none" spc="0" normalizeH="0" baseline="0">
         <a:ln>
           <a:noFill/>
         </a:ln>
@@ -327,13 +326,14 @@
 </p:presentation>
 </file>
 
-<file path=ppt/commentAuthors.xml><?xml version="1.0" encoding="utf-8"?>
-<p:cmAuthorLst xmlns:a="http://schemas.openxmlformats.org/drawingml/2006/main" xmlns:r="http://schemas.openxmlformats.org/officeDocument/2006/relationships" xmlns:p="http://schemas.openxmlformats.org/presentationml/2006/main" xmlns:m="http://schemas.openxmlformats.org/officeDocument/2006/math" xmlns:a14="http://schemas.microsoft.com/office/drawing/2010/main"/>
-</file>
-
 <file path=ppt/notesMasters/notesMaster1.xml><?xml version="1.0" encoding="utf-8"?>
-<p:notesMaster xmlns:a="http://schemas.openxmlformats.org/drawingml/2006/main" xmlns:r="http://schemas.openxmlformats.org/officeDocument/2006/relationships" xmlns:p="http://schemas.openxmlformats.org/presentationml/2006/main" xmlns:m="http://schemas.openxmlformats.org/officeDocument/2006/math" xmlns:a14="http://schemas.microsoft.com/office/drawing/2010/main">
+<p:notesMaster xmlns:a="http://schemas.openxmlformats.org/drawingml/2006/main" xmlns:r="http://schemas.openxmlformats.org/officeDocument/2006/relationships" xmlns:p="http://schemas.openxmlformats.org/presentationml/2006/main">
   <p:cSld>
+    <p:bg>
+      <p:bgRef idx="1001">
+        <a:schemeClr val="bg1"/>
+      </p:bgRef>
+    </p:bg>
     <p:spTree>
       <p:nvGrpSpPr>
         <p:cNvPr id="1" name=""/>
@@ -351,7 +351,9 @@
       <p:sp>
         <p:nvSpPr>
           <p:cNvPr id="115" name="Shape 115"/>
-          <p:cNvSpPr/>
+          <p:cNvSpPr>
+            <a:spLocks noGrp="1" noRot="1" noChangeAspect="1"/>
+          </p:cNvSpPr>
           <p:nvPr>
             <p:ph type="sldImg"/>
           </p:nvPr>
@@ -369,14 +371,16 @@
           <a:bodyPr/>
           <a:lstStyle/>
           <a:p>
-            <a:pPr/>
+            <a:endParaRPr/>
           </a:p>
         </p:txBody>
       </p:sp>
       <p:sp>
         <p:nvSpPr>
           <p:cNvPr id="116" name="Shape 116"/>
-          <p:cNvSpPr/>
+          <p:cNvSpPr>
+            <a:spLocks noGrp="1"/>
+          </p:cNvSpPr>
           <p:nvPr>
             <p:ph type="body" sz="quarter" idx="1"/>
           </p:nvPr>
@@ -394,7 +398,7 @@
           <a:bodyPr/>
           <a:lstStyle/>
           <a:p>
-            <a:pPr/>
+            <a:endParaRPr/>
           </a:p>
         </p:txBody>
       </p:sp>
@@ -479,7 +483,7 @@
 </file>
 
 <file path=ppt/slideLayouts/slideLayout1.xml><?xml version="1.0" encoding="utf-8"?>
-<p:sldLayout xmlns:a="http://schemas.openxmlformats.org/drawingml/2006/main" xmlns:r="http://schemas.openxmlformats.org/officeDocument/2006/relationships" xmlns:p="http://schemas.openxmlformats.org/presentationml/2006/main" xmlns:m="http://schemas.openxmlformats.org/officeDocument/2006/math" xmlns:a14="http://schemas.microsoft.com/office/drawing/2010/main" type="title" showMasterSp="1" showMasterPhAnim="1">
+<p:sldLayout xmlns:a="http://schemas.openxmlformats.org/drawingml/2006/main" xmlns:r="http://schemas.openxmlformats.org/officeDocument/2006/relationships" xmlns:p="http://schemas.openxmlformats.org/presentationml/2006/main" type="title">
   <p:cSld name="TITLE">
     <p:spTree>
       <p:nvGrpSpPr>
@@ -498,7 +502,9 @@
       <p:sp>
         <p:nvSpPr>
           <p:cNvPr id="11" name="Title Text"/>
-          <p:cNvSpPr txBox="1"/>
+          <p:cNvSpPr txBox="1">
+            <a:spLocks noGrp="1"/>
+          </p:cNvSpPr>
           <p:nvPr>
             <p:ph type="title"/>
           </p:nvPr>
@@ -520,7 +526,6 @@
             </a:lvl1pPr>
           </a:lstStyle>
           <a:p>
-            <a:pPr/>
             <a:r>
               <a:t>Title Text</a:t>
             </a:r>
@@ -530,7 +535,9 @@
       <p:sp>
         <p:nvSpPr>
           <p:cNvPr id="12" name="Body Level One…"/>
-          <p:cNvSpPr txBox="1"/>
+          <p:cNvSpPr txBox="1">
+            <a:spLocks noGrp="1"/>
+          </p:cNvSpPr>
           <p:nvPr>
             <p:ph type="body" sz="quarter" idx="1"/>
           </p:nvPr>
@@ -599,7 +606,6 @@
             </a:lvl5pPr>
           </a:lstStyle>
           <a:p>
-            <a:pPr/>
             <a:r>
               <a:t>Body Level One</a:t>
             </a:r>
@@ -633,7 +639,9 @@
       <p:sp>
         <p:nvSpPr>
           <p:cNvPr id="13" name="Slide Number"/>
-          <p:cNvSpPr txBox="1"/>
+          <p:cNvSpPr txBox="1">
+            <a:spLocks noGrp="1"/>
+          </p:cNvSpPr>
           <p:nvPr>
             <p:ph type="sldNum" sz="quarter" idx="2"/>
           </p:nvPr>
@@ -647,8 +655,10 @@
           <a:bodyPr/>
           <a:lstStyle/>
           <a:p>
-            <a:pPr/>
-            <a:fld id="{86CB4B4D-7CA3-9044-876B-883B54F8677D}" type="slidenum"/>
+            <a:fld id="{86CB4B4D-7CA3-9044-876B-883B54F8677D}" type="slidenum">
+              <a:t>‹N°›</a:t>
+            </a:fld>
+            <a:endParaRPr/>
           </a:p>
         </p:txBody>
       </p:sp>
@@ -657,12 +667,12 @@
   <p:clrMapOvr>
     <a:masterClrMapping/>
   </p:clrMapOvr>
-  <p:transition xmlns:p14="http://schemas.microsoft.com/office/powerpoint/2010/main" spd="med" advClick="1"/>
+  <p:transition spd="med"/>
 </p:sldLayout>
 </file>
 
 <file path=ppt/slideLayouts/slideLayout10.xml><?xml version="1.0" encoding="utf-8"?>
-<p:sldLayout xmlns:a="http://schemas.openxmlformats.org/drawingml/2006/main" xmlns:r="http://schemas.openxmlformats.org/officeDocument/2006/relationships" xmlns:p="http://schemas.openxmlformats.org/presentationml/2006/main" xmlns:m="http://schemas.openxmlformats.org/officeDocument/2006/math" xmlns:a14="http://schemas.microsoft.com/office/drawing/2010/main" type="tx" showMasterSp="1" showMasterPhAnim="1">
+<p:sldLayout xmlns:a="http://schemas.openxmlformats.org/drawingml/2006/main" xmlns:r="http://schemas.openxmlformats.org/officeDocument/2006/relationships" xmlns:p="http://schemas.openxmlformats.org/presentationml/2006/main" type="tx">
   <p:cSld name="BIG_NUMBER">
     <p:spTree>
       <p:nvGrpSpPr>
@@ -681,7 +691,9 @@
       <p:sp>
         <p:nvSpPr>
           <p:cNvPr id="91" name="xx%"/>
-          <p:cNvSpPr txBox="1"/>
+          <p:cNvSpPr txBox="1">
+            <a:spLocks noGrp="1"/>
+          </p:cNvSpPr>
           <p:nvPr>
             <p:ph type="title" hasCustomPrompt="1"/>
           </p:nvPr>
@@ -703,7 +715,6 @@
             </a:lvl1pPr>
           </a:lstStyle>
           <a:p>
-            <a:pPr/>
             <a:r>
               <a:t>xx%</a:t>
             </a:r>
@@ -713,7 +724,9 @@
       <p:sp>
         <p:nvSpPr>
           <p:cNvPr id="92" name="Body Level One…"/>
-          <p:cNvSpPr txBox="1"/>
+          <p:cNvSpPr txBox="1">
+            <a:spLocks noGrp="1"/>
+          </p:cNvSpPr>
           <p:nvPr>
             <p:ph type="body" sz="half" idx="1"/>
           </p:nvPr>
@@ -737,7 +750,6 @@
             <a:lvl5pPr algn="ctr"/>
           </a:lstStyle>
           <a:p>
-            <a:pPr/>
             <a:r>
               <a:t>Body Level One</a:t>
             </a:r>
@@ -771,7 +783,9 @@
       <p:sp>
         <p:nvSpPr>
           <p:cNvPr id="93" name="Slide Number"/>
-          <p:cNvSpPr txBox="1"/>
+          <p:cNvSpPr txBox="1">
+            <a:spLocks noGrp="1"/>
+          </p:cNvSpPr>
           <p:nvPr>
             <p:ph type="sldNum" sz="quarter" idx="2"/>
           </p:nvPr>
@@ -785,8 +799,10 @@
           <a:bodyPr/>
           <a:lstStyle/>
           <a:p>
-            <a:pPr/>
-            <a:fld id="{86CB4B4D-7CA3-9044-876B-883B54F8677D}" type="slidenum"/>
+            <a:fld id="{86CB4B4D-7CA3-9044-876B-883B54F8677D}" type="slidenum">
+              <a:t>‹N°›</a:t>
+            </a:fld>
+            <a:endParaRPr/>
           </a:p>
         </p:txBody>
       </p:sp>
@@ -795,12 +811,12 @@
   <p:clrMapOvr>
     <a:masterClrMapping/>
   </p:clrMapOvr>
-  <p:transition xmlns:p14="http://schemas.microsoft.com/office/powerpoint/2010/main" spd="med" advClick="1"/>
+  <p:transition spd="med"/>
 </p:sldLayout>
 </file>
 
 <file path=ppt/slideLayouts/slideLayout11.xml><?xml version="1.0" encoding="utf-8"?>
-<p:sldLayout xmlns:a="http://schemas.openxmlformats.org/drawingml/2006/main" xmlns:r="http://schemas.openxmlformats.org/officeDocument/2006/relationships" xmlns:p="http://schemas.openxmlformats.org/presentationml/2006/main" xmlns:m="http://schemas.openxmlformats.org/officeDocument/2006/math" xmlns:a14="http://schemas.microsoft.com/office/drawing/2010/main" type="tx" showMasterSp="1" showMasterPhAnim="1">
+<p:sldLayout xmlns:a="http://schemas.openxmlformats.org/drawingml/2006/main" xmlns:r="http://schemas.openxmlformats.org/officeDocument/2006/relationships" xmlns:p="http://schemas.openxmlformats.org/presentationml/2006/main" type="tx">
   <p:cSld name="BLANK">
     <p:spTree>
       <p:nvGrpSpPr>
@@ -819,7 +835,9 @@
       <p:sp>
         <p:nvSpPr>
           <p:cNvPr id="100" name="Slide Number"/>
-          <p:cNvSpPr txBox="1"/>
+          <p:cNvSpPr txBox="1">
+            <a:spLocks noGrp="1"/>
+          </p:cNvSpPr>
           <p:nvPr>
             <p:ph type="sldNum" sz="quarter" idx="2"/>
           </p:nvPr>
@@ -833,8 +851,10 @@
           <a:bodyPr/>
           <a:lstStyle/>
           <a:p>
-            <a:pPr/>
-            <a:fld id="{86CB4B4D-7CA3-9044-876B-883B54F8677D}" type="slidenum"/>
+            <a:fld id="{86CB4B4D-7CA3-9044-876B-883B54F8677D}" type="slidenum">
+              <a:t>‹N°›</a:t>
+            </a:fld>
+            <a:endParaRPr/>
           </a:p>
         </p:txBody>
       </p:sp>
@@ -843,12 +863,12 @@
   <p:clrMapOvr>
     <a:masterClrMapping/>
   </p:clrMapOvr>
-  <p:transition xmlns:p14="http://schemas.microsoft.com/office/powerpoint/2010/main" spd="med" advClick="1"/>
+  <p:transition spd="med"/>
 </p:sldLayout>
 </file>
 
 <file path=ppt/slideLayouts/slideLayout12.xml><?xml version="1.0" encoding="utf-8"?>
-<p:sldLayout xmlns:a="http://schemas.openxmlformats.org/drawingml/2006/main" xmlns:r="http://schemas.openxmlformats.org/officeDocument/2006/relationships" xmlns:p="http://schemas.openxmlformats.org/presentationml/2006/main" xmlns:m="http://schemas.openxmlformats.org/officeDocument/2006/math" xmlns:a14="http://schemas.microsoft.com/office/drawing/2010/main" type="tx" showMasterSp="1" showMasterPhAnim="1">
+<p:sldLayout xmlns:a="http://schemas.openxmlformats.org/drawingml/2006/main" xmlns:r="http://schemas.openxmlformats.org/officeDocument/2006/relationships" xmlns:p="http://schemas.openxmlformats.org/presentationml/2006/main" type="tx">
   <p:cSld name="TITLE_AND_BODY">
     <p:spTree>
       <p:nvGrpSpPr>
@@ -867,7 +887,9 @@
       <p:sp>
         <p:nvSpPr>
           <p:cNvPr id="107" name="Title Text"/>
-          <p:cNvSpPr txBox="1"/>
+          <p:cNvSpPr txBox="1">
+            <a:spLocks noGrp="1"/>
+          </p:cNvSpPr>
           <p:nvPr>
             <p:ph type="title"/>
           </p:nvPr>
@@ -881,7 +903,6 @@
           <a:bodyPr/>
           <a:lstStyle/>
           <a:p>
-            <a:pPr/>
             <a:r>
               <a:t>Title Text</a:t>
             </a:r>
@@ -891,7 +912,9 @@
       <p:sp>
         <p:nvSpPr>
           <p:cNvPr id="108" name="Body Level One…"/>
-          <p:cNvSpPr txBox="1"/>
+          <p:cNvSpPr txBox="1">
+            <a:spLocks noGrp="1"/>
+          </p:cNvSpPr>
           <p:nvPr>
             <p:ph type="body" idx="1"/>
           </p:nvPr>
@@ -905,7 +928,6 @@
           <a:bodyPr/>
           <a:lstStyle/>
           <a:p>
-            <a:pPr/>
             <a:r>
               <a:t>Body Level One</a:t>
             </a:r>
@@ -939,7 +961,9 @@
       <p:sp>
         <p:nvSpPr>
           <p:cNvPr id="109" name="Slide Number"/>
-          <p:cNvSpPr txBox="1"/>
+          <p:cNvSpPr txBox="1">
+            <a:spLocks noGrp="1"/>
+          </p:cNvSpPr>
           <p:nvPr>
             <p:ph type="sldNum" sz="quarter" idx="2"/>
           </p:nvPr>
@@ -957,8 +981,10 @@
           <a:bodyPr/>
           <a:lstStyle/>
           <a:p>
-            <a:pPr/>
-            <a:fld id="{86CB4B4D-7CA3-9044-876B-883B54F8677D}" type="slidenum"/>
+            <a:fld id="{86CB4B4D-7CA3-9044-876B-883B54F8677D}" type="slidenum">
+              <a:t>‹N°›</a:t>
+            </a:fld>
+            <a:endParaRPr/>
           </a:p>
         </p:txBody>
       </p:sp>
@@ -967,12 +993,12 @@
   <p:clrMapOvr>
     <a:masterClrMapping/>
   </p:clrMapOvr>
-  <p:transition xmlns:p14="http://schemas.microsoft.com/office/powerpoint/2010/main" spd="med" advClick="1"/>
+  <p:transition spd="med"/>
 </p:sldLayout>
 </file>
 
 <file path=ppt/slideLayouts/slideLayout2.xml><?xml version="1.0" encoding="utf-8"?>
-<p:sldLayout xmlns:a="http://schemas.openxmlformats.org/drawingml/2006/main" xmlns:r="http://schemas.openxmlformats.org/officeDocument/2006/relationships" xmlns:p="http://schemas.openxmlformats.org/presentationml/2006/main" xmlns:m="http://schemas.openxmlformats.org/officeDocument/2006/math" xmlns:a14="http://schemas.microsoft.com/office/drawing/2010/main" type="tx" showMasterSp="1" showMasterPhAnim="1">
+<p:sldLayout xmlns:a="http://schemas.openxmlformats.org/drawingml/2006/main" xmlns:r="http://schemas.openxmlformats.org/officeDocument/2006/relationships" xmlns:p="http://schemas.openxmlformats.org/presentationml/2006/main" type="tx">
   <p:cSld name="SECTION_HEADER">
     <p:spTree>
       <p:nvGrpSpPr>
@@ -991,7 +1017,9 @@
       <p:sp>
         <p:nvSpPr>
           <p:cNvPr id="20" name="Title Text"/>
-          <p:cNvSpPr txBox="1"/>
+          <p:cNvSpPr txBox="1">
+            <a:spLocks noGrp="1"/>
+          </p:cNvSpPr>
           <p:nvPr>
             <p:ph type="title"/>
           </p:nvPr>
@@ -1013,7 +1041,6 @@
             </a:lvl1pPr>
           </a:lstStyle>
           <a:p>
-            <a:pPr/>
             <a:r>
               <a:t>Title Text</a:t>
             </a:r>
@@ -1023,7 +1050,9 @@
       <p:sp>
         <p:nvSpPr>
           <p:cNvPr id="21" name="Slide Number"/>
-          <p:cNvSpPr txBox="1"/>
+          <p:cNvSpPr txBox="1">
+            <a:spLocks noGrp="1"/>
+          </p:cNvSpPr>
           <p:nvPr>
             <p:ph type="sldNum" sz="quarter" idx="2"/>
           </p:nvPr>
@@ -1037,8 +1066,10 @@
           <a:bodyPr/>
           <a:lstStyle/>
           <a:p>
-            <a:pPr/>
-            <a:fld id="{86CB4B4D-7CA3-9044-876B-883B54F8677D}" type="slidenum"/>
+            <a:fld id="{86CB4B4D-7CA3-9044-876B-883B54F8677D}" type="slidenum">
+              <a:t>‹N°›</a:t>
+            </a:fld>
+            <a:endParaRPr/>
           </a:p>
         </p:txBody>
       </p:sp>
@@ -1047,12 +1078,12 @@
   <p:clrMapOvr>
     <a:masterClrMapping/>
   </p:clrMapOvr>
-  <p:transition xmlns:p14="http://schemas.microsoft.com/office/powerpoint/2010/main" spd="med" advClick="1"/>
+  <p:transition spd="med"/>
 </p:sldLayout>
 </file>
 
 <file path=ppt/slideLayouts/slideLayout3.xml><?xml version="1.0" encoding="utf-8"?>
-<p:sldLayout xmlns:a="http://schemas.openxmlformats.org/drawingml/2006/main" xmlns:r="http://schemas.openxmlformats.org/officeDocument/2006/relationships" xmlns:p="http://schemas.openxmlformats.org/presentationml/2006/main" xmlns:m="http://schemas.openxmlformats.org/officeDocument/2006/math" xmlns:a14="http://schemas.microsoft.com/office/drawing/2010/main" type="tx" showMasterSp="1" showMasterPhAnim="1">
+<p:sldLayout xmlns:a="http://schemas.openxmlformats.org/drawingml/2006/main" xmlns:r="http://schemas.openxmlformats.org/officeDocument/2006/relationships" xmlns:p="http://schemas.openxmlformats.org/presentationml/2006/main" type="tx">
   <p:cSld name="1_TITLE_AND_BODY">
     <p:spTree>
       <p:nvGrpSpPr>
@@ -1071,7 +1102,9 @@
       <p:sp>
         <p:nvSpPr>
           <p:cNvPr id="28" name="Title Text"/>
-          <p:cNvSpPr txBox="1"/>
+          <p:cNvSpPr txBox="1">
+            <a:spLocks noGrp="1"/>
+          </p:cNvSpPr>
           <p:nvPr>
             <p:ph type="title"/>
           </p:nvPr>
@@ -1085,7 +1118,6 @@
           <a:bodyPr/>
           <a:lstStyle/>
           <a:p>
-            <a:pPr/>
             <a:r>
               <a:t>Title Text</a:t>
             </a:r>
@@ -1095,7 +1127,9 @@
       <p:sp>
         <p:nvSpPr>
           <p:cNvPr id="29" name="Body Level One…"/>
-          <p:cNvSpPr txBox="1"/>
+          <p:cNvSpPr txBox="1">
+            <a:spLocks noGrp="1"/>
+          </p:cNvSpPr>
           <p:nvPr>
             <p:ph type="body" idx="1"/>
           </p:nvPr>
@@ -1109,7 +1143,6 @@
           <a:bodyPr/>
           <a:lstStyle/>
           <a:p>
-            <a:pPr/>
             <a:r>
               <a:t>Body Level One</a:t>
             </a:r>
@@ -1143,7 +1176,9 @@
       <p:sp>
         <p:nvSpPr>
           <p:cNvPr id="30" name="Slide Number"/>
-          <p:cNvSpPr txBox="1"/>
+          <p:cNvSpPr txBox="1">
+            <a:spLocks noGrp="1"/>
+          </p:cNvSpPr>
           <p:nvPr>
             <p:ph type="sldNum" sz="quarter" idx="2"/>
           </p:nvPr>
@@ -1157,8 +1192,10 @@
           <a:bodyPr/>
           <a:lstStyle/>
           <a:p>
-            <a:pPr/>
-            <a:fld id="{86CB4B4D-7CA3-9044-876B-883B54F8677D}" type="slidenum"/>
+            <a:fld id="{86CB4B4D-7CA3-9044-876B-883B54F8677D}" type="slidenum">
+              <a:t>‹N°›</a:t>
+            </a:fld>
+            <a:endParaRPr/>
           </a:p>
         </p:txBody>
       </p:sp>
@@ -1167,12 +1204,12 @@
   <p:clrMapOvr>
     <a:masterClrMapping/>
   </p:clrMapOvr>
-  <p:transition xmlns:p14="http://schemas.microsoft.com/office/powerpoint/2010/main" spd="med" advClick="1"/>
+  <p:transition spd="med"/>
 </p:sldLayout>
 </file>
 
 <file path=ppt/slideLayouts/slideLayout4.xml><?xml version="1.0" encoding="utf-8"?>
-<p:sldLayout xmlns:a="http://schemas.openxmlformats.org/drawingml/2006/main" xmlns:r="http://schemas.openxmlformats.org/officeDocument/2006/relationships" xmlns:p="http://schemas.openxmlformats.org/presentationml/2006/main" xmlns:m="http://schemas.openxmlformats.org/officeDocument/2006/math" xmlns:a14="http://schemas.microsoft.com/office/drawing/2010/main" type="tx" showMasterSp="1" showMasterPhAnim="1">
+<p:sldLayout xmlns:a="http://schemas.openxmlformats.org/drawingml/2006/main" xmlns:r="http://schemas.openxmlformats.org/officeDocument/2006/relationships" xmlns:p="http://schemas.openxmlformats.org/presentationml/2006/main" type="tx">
   <p:cSld name="TITLE_AND_TWO_COLUMNS">
     <p:spTree>
       <p:nvGrpSpPr>
@@ -1191,7 +1228,9 @@
       <p:sp>
         <p:nvSpPr>
           <p:cNvPr id="37" name="Title Text"/>
-          <p:cNvSpPr txBox="1"/>
+          <p:cNvSpPr txBox="1">
+            <a:spLocks noGrp="1"/>
+          </p:cNvSpPr>
           <p:nvPr>
             <p:ph type="title"/>
           </p:nvPr>
@@ -1205,7 +1244,6 @@
           <a:bodyPr/>
           <a:lstStyle/>
           <a:p>
-            <a:pPr/>
             <a:r>
               <a:t>Title Text</a:t>
             </a:r>
@@ -1215,7 +1253,9 @@
       <p:sp>
         <p:nvSpPr>
           <p:cNvPr id="38" name="Body Level One…"/>
-          <p:cNvSpPr txBox="1"/>
+          <p:cNvSpPr txBox="1">
+            <a:spLocks noGrp="1"/>
+          </p:cNvSpPr>
           <p:nvPr>
             <p:ph type="body" sz="half" idx="1"/>
           </p:nvPr>
@@ -1254,7 +1294,6 @@
             </a:lvl5pPr>
           </a:lstStyle>
           <a:p>
-            <a:pPr/>
             <a:r>
               <a:t>Body Level One</a:t>
             </a:r>
@@ -1288,7 +1327,9 @@
       <p:sp>
         <p:nvSpPr>
           <p:cNvPr id="39" name="Google Shape;23;p5"/>
-          <p:cNvSpPr txBox="1"/>
+          <p:cNvSpPr txBox="1">
+            <a:spLocks noGrp="1"/>
+          </p:cNvSpPr>
           <p:nvPr>
             <p:ph type="body" sz="half" idx="21"/>
           </p:nvPr>
@@ -1306,14 +1347,16 @@
           <a:bodyPr/>
           <a:lstStyle/>
           <a:p>
-            <a:pPr/>
+            <a:endParaRPr/>
           </a:p>
         </p:txBody>
       </p:sp>
       <p:sp>
         <p:nvSpPr>
           <p:cNvPr id="40" name="Slide Number"/>
-          <p:cNvSpPr txBox="1"/>
+          <p:cNvSpPr txBox="1">
+            <a:spLocks noGrp="1"/>
+          </p:cNvSpPr>
           <p:nvPr>
             <p:ph type="sldNum" sz="quarter" idx="2"/>
           </p:nvPr>
@@ -1327,8 +1370,10 @@
           <a:bodyPr/>
           <a:lstStyle/>
           <a:p>
-            <a:pPr/>
-            <a:fld id="{86CB4B4D-7CA3-9044-876B-883B54F8677D}" type="slidenum"/>
+            <a:fld id="{86CB4B4D-7CA3-9044-876B-883B54F8677D}" type="slidenum">
+              <a:t>‹N°›</a:t>
+            </a:fld>
+            <a:endParaRPr/>
           </a:p>
         </p:txBody>
       </p:sp>
@@ -1337,12 +1382,12 @@
   <p:clrMapOvr>
     <a:masterClrMapping/>
   </p:clrMapOvr>
-  <p:transition xmlns:p14="http://schemas.microsoft.com/office/powerpoint/2010/main" spd="med" advClick="1"/>
+  <p:transition spd="med"/>
 </p:sldLayout>
 </file>
 
 <file path=ppt/slideLayouts/slideLayout5.xml><?xml version="1.0" encoding="utf-8"?>
-<p:sldLayout xmlns:a="http://schemas.openxmlformats.org/drawingml/2006/main" xmlns:r="http://schemas.openxmlformats.org/officeDocument/2006/relationships" xmlns:p="http://schemas.openxmlformats.org/presentationml/2006/main" xmlns:m="http://schemas.openxmlformats.org/officeDocument/2006/math" xmlns:a14="http://schemas.microsoft.com/office/drawing/2010/main" type="tx" showMasterSp="1" showMasterPhAnim="1">
+<p:sldLayout xmlns:a="http://schemas.openxmlformats.org/drawingml/2006/main" xmlns:r="http://schemas.openxmlformats.org/officeDocument/2006/relationships" xmlns:p="http://schemas.openxmlformats.org/presentationml/2006/main" type="tx">
   <p:cSld name="TITLE_ONLY">
     <p:spTree>
       <p:nvGrpSpPr>
@@ -1361,7 +1406,9 @@
       <p:sp>
         <p:nvSpPr>
           <p:cNvPr id="47" name="Title Text"/>
-          <p:cNvSpPr txBox="1"/>
+          <p:cNvSpPr txBox="1">
+            <a:spLocks noGrp="1"/>
+          </p:cNvSpPr>
           <p:nvPr>
             <p:ph type="title"/>
           </p:nvPr>
@@ -1375,7 +1422,6 @@
           <a:bodyPr/>
           <a:lstStyle/>
           <a:p>
-            <a:pPr/>
             <a:r>
               <a:t>Title Text</a:t>
             </a:r>
@@ -1385,7 +1431,9 @@
       <p:sp>
         <p:nvSpPr>
           <p:cNvPr id="48" name="Slide Number"/>
-          <p:cNvSpPr txBox="1"/>
+          <p:cNvSpPr txBox="1">
+            <a:spLocks noGrp="1"/>
+          </p:cNvSpPr>
           <p:nvPr>
             <p:ph type="sldNum" sz="quarter" idx="2"/>
           </p:nvPr>
@@ -1399,8 +1447,10 @@
           <a:bodyPr/>
           <a:lstStyle/>
           <a:p>
-            <a:pPr/>
-            <a:fld id="{86CB4B4D-7CA3-9044-876B-883B54F8677D}" type="slidenum"/>
+            <a:fld id="{86CB4B4D-7CA3-9044-876B-883B54F8677D}" type="slidenum">
+              <a:t>‹N°›</a:t>
+            </a:fld>
+            <a:endParaRPr/>
           </a:p>
         </p:txBody>
       </p:sp>
@@ -1409,12 +1459,12 @@
   <p:clrMapOvr>
     <a:masterClrMapping/>
   </p:clrMapOvr>
-  <p:transition xmlns:p14="http://schemas.microsoft.com/office/powerpoint/2010/main" spd="med" advClick="1"/>
+  <p:transition spd="med"/>
 </p:sldLayout>
 </file>
 
 <file path=ppt/slideLayouts/slideLayout6.xml><?xml version="1.0" encoding="utf-8"?>
-<p:sldLayout xmlns:a="http://schemas.openxmlformats.org/drawingml/2006/main" xmlns:r="http://schemas.openxmlformats.org/officeDocument/2006/relationships" xmlns:p="http://schemas.openxmlformats.org/presentationml/2006/main" xmlns:m="http://schemas.openxmlformats.org/officeDocument/2006/math" xmlns:a14="http://schemas.microsoft.com/office/drawing/2010/main" type="tx" showMasterSp="1" showMasterPhAnim="1">
+<p:sldLayout xmlns:a="http://schemas.openxmlformats.org/drawingml/2006/main" xmlns:r="http://schemas.openxmlformats.org/officeDocument/2006/relationships" xmlns:p="http://schemas.openxmlformats.org/presentationml/2006/main" type="tx">
   <p:cSld name="ONE_COLUMN_TEXT">
     <p:spTree>
       <p:nvGrpSpPr>
@@ -1433,7 +1483,9 @@
       <p:sp>
         <p:nvSpPr>
           <p:cNvPr id="55" name="Title Text"/>
-          <p:cNvSpPr txBox="1"/>
+          <p:cNvSpPr txBox="1">
+            <a:spLocks noGrp="1"/>
+          </p:cNvSpPr>
           <p:nvPr>
             <p:ph type="title"/>
           </p:nvPr>
@@ -1455,7 +1507,6 @@
             </a:lvl1pPr>
           </a:lstStyle>
           <a:p>
-            <a:pPr/>
             <a:r>
               <a:t>Title Text</a:t>
             </a:r>
@@ -1465,7 +1516,9 @@
       <p:sp>
         <p:nvSpPr>
           <p:cNvPr id="56" name="Body Level One…"/>
-          <p:cNvSpPr txBox="1"/>
+          <p:cNvSpPr txBox="1">
+            <a:spLocks noGrp="1"/>
+          </p:cNvSpPr>
           <p:nvPr>
             <p:ph type="body" sz="quarter" idx="1"/>
           </p:nvPr>
@@ -1504,7 +1557,6 @@
             </a:lvl5pPr>
           </a:lstStyle>
           <a:p>
-            <a:pPr/>
             <a:r>
               <a:t>Body Level One</a:t>
             </a:r>
@@ -1538,7 +1590,9 @@
       <p:sp>
         <p:nvSpPr>
           <p:cNvPr id="57" name="Slide Number"/>
-          <p:cNvSpPr txBox="1"/>
+          <p:cNvSpPr txBox="1">
+            <a:spLocks noGrp="1"/>
+          </p:cNvSpPr>
           <p:nvPr>
             <p:ph type="sldNum" sz="quarter" idx="2"/>
           </p:nvPr>
@@ -1552,8 +1606,10 @@
           <a:bodyPr/>
           <a:lstStyle/>
           <a:p>
-            <a:pPr/>
-            <a:fld id="{86CB4B4D-7CA3-9044-876B-883B54F8677D}" type="slidenum"/>
+            <a:fld id="{86CB4B4D-7CA3-9044-876B-883B54F8677D}" type="slidenum">
+              <a:t>‹N°›</a:t>
+            </a:fld>
+            <a:endParaRPr/>
           </a:p>
         </p:txBody>
       </p:sp>
@@ -1562,12 +1618,12 @@
   <p:clrMapOvr>
     <a:masterClrMapping/>
   </p:clrMapOvr>
-  <p:transition xmlns:p14="http://schemas.microsoft.com/office/powerpoint/2010/main" spd="med" advClick="1"/>
+  <p:transition spd="med"/>
 </p:sldLayout>
 </file>
 
 <file path=ppt/slideLayouts/slideLayout7.xml><?xml version="1.0" encoding="utf-8"?>
-<p:sldLayout xmlns:a="http://schemas.openxmlformats.org/drawingml/2006/main" xmlns:r="http://schemas.openxmlformats.org/officeDocument/2006/relationships" xmlns:p="http://schemas.openxmlformats.org/presentationml/2006/main" xmlns:m="http://schemas.openxmlformats.org/officeDocument/2006/math" xmlns:a14="http://schemas.microsoft.com/office/drawing/2010/main" type="tx" showMasterSp="1" showMasterPhAnim="1">
+<p:sldLayout xmlns:a="http://schemas.openxmlformats.org/drawingml/2006/main" xmlns:r="http://schemas.openxmlformats.org/officeDocument/2006/relationships" xmlns:p="http://schemas.openxmlformats.org/presentationml/2006/main" type="tx">
   <p:cSld name="MAIN_POINT">
     <p:spTree>
       <p:nvGrpSpPr>
@@ -1586,7 +1642,9 @@
       <p:sp>
         <p:nvSpPr>
           <p:cNvPr id="64" name="Title Text"/>
-          <p:cNvSpPr txBox="1"/>
+          <p:cNvSpPr txBox="1">
+            <a:spLocks noGrp="1"/>
+          </p:cNvSpPr>
           <p:nvPr>
             <p:ph type="title"/>
           </p:nvPr>
@@ -1608,7 +1666,6 @@
             </a:lvl1pPr>
           </a:lstStyle>
           <a:p>
-            <a:pPr/>
             <a:r>
               <a:t>Title Text</a:t>
             </a:r>
@@ -1618,7 +1675,9 @@
       <p:sp>
         <p:nvSpPr>
           <p:cNvPr id="65" name="Slide Number"/>
-          <p:cNvSpPr txBox="1"/>
+          <p:cNvSpPr txBox="1">
+            <a:spLocks noGrp="1"/>
+          </p:cNvSpPr>
           <p:nvPr>
             <p:ph type="sldNum" sz="quarter" idx="2"/>
           </p:nvPr>
@@ -1632,8 +1691,10 @@
           <a:bodyPr/>
           <a:lstStyle/>
           <a:p>
-            <a:pPr/>
-            <a:fld id="{86CB4B4D-7CA3-9044-876B-883B54F8677D}" type="slidenum"/>
+            <a:fld id="{86CB4B4D-7CA3-9044-876B-883B54F8677D}" type="slidenum">
+              <a:t>‹N°›</a:t>
+            </a:fld>
+            <a:endParaRPr/>
           </a:p>
         </p:txBody>
       </p:sp>
@@ -1642,12 +1703,12 @@
   <p:clrMapOvr>
     <a:masterClrMapping/>
   </p:clrMapOvr>
-  <p:transition xmlns:p14="http://schemas.microsoft.com/office/powerpoint/2010/main" spd="med" advClick="1"/>
+  <p:transition spd="med"/>
 </p:sldLayout>
 </file>
 
 <file path=ppt/slideLayouts/slideLayout8.xml><?xml version="1.0" encoding="utf-8"?>
-<p:sldLayout xmlns:a="http://schemas.openxmlformats.org/drawingml/2006/main" xmlns:r="http://schemas.openxmlformats.org/officeDocument/2006/relationships" xmlns:p="http://schemas.openxmlformats.org/presentationml/2006/main" xmlns:m="http://schemas.openxmlformats.org/officeDocument/2006/math" xmlns:a14="http://schemas.microsoft.com/office/drawing/2010/main" type="tx" showMasterSp="1" showMasterPhAnim="1">
+<p:sldLayout xmlns:a="http://schemas.openxmlformats.org/drawingml/2006/main" xmlns:r="http://schemas.openxmlformats.org/officeDocument/2006/relationships" xmlns:p="http://schemas.openxmlformats.org/presentationml/2006/main" type="tx">
   <p:cSld name="SECTION_TITLE_AND_DESCRIPTION">
     <p:spTree>
       <p:nvGrpSpPr>
@@ -1696,13 +1757,16 @@
                 <a:sym typeface="Arial"/>
               </a:defRPr>
             </a:pPr>
+            <a:endParaRPr/>
           </a:p>
         </p:txBody>
       </p:sp>
       <p:sp>
         <p:nvSpPr>
           <p:cNvPr id="73" name="Title Text"/>
-          <p:cNvSpPr txBox="1"/>
+          <p:cNvSpPr txBox="1">
+            <a:spLocks noGrp="1"/>
+          </p:cNvSpPr>
           <p:nvPr>
             <p:ph type="title"/>
           </p:nvPr>
@@ -1724,7 +1788,6 @@
             </a:lvl1pPr>
           </a:lstStyle>
           <a:p>
-            <a:pPr/>
             <a:r>
               <a:t>Title Text</a:t>
             </a:r>
@@ -1734,7 +1797,9 @@
       <p:sp>
         <p:nvSpPr>
           <p:cNvPr id="74" name="Body Level One…"/>
-          <p:cNvSpPr txBox="1"/>
+          <p:cNvSpPr txBox="1">
+            <a:spLocks noGrp="1"/>
+          </p:cNvSpPr>
           <p:nvPr>
             <p:ph type="body" sz="quarter" idx="1"/>
           </p:nvPr>
@@ -1803,7 +1868,6 @@
             </a:lvl5pPr>
           </a:lstStyle>
           <a:p>
-            <a:pPr/>
             <a:r>
               <a:t>Body Level One</a:t>
             </a:r>
@@ -1837,7 +1901,9 @@
       <p:sp>
         <p:nvSpPr>
           <p:cNvPr id="75" name="Google Shape;39;p9"/>
-          <p:cNvSpPr txBox="1"/>
+          <p:cNvSpPr txBox="1">
+            <a:spLocks noGrp="1"/>
+          </p:cNvSpPr>
           <p:nvPr>
             <p:ph type="body" sz="half" idx="21"/>
           </p:nvPr>
@@ -1855,14 +1921,16 @@
           <a:bodyPr anchor="ctr"/>
           <a:lstStyle/>
           <a:p>
-            <a:pPr/>
+            <a:endParaRPr/>
           </a:p>
         </p:txBody>
       </p:sp>
       <p:sp>
         <p:nvSpPr>
           <p:cNvPr id="76" name="Slide Number"/>
-          <p:cNvSpPr txBox="1"/>
+          <p:cNvSpPr txBox="1">
+            <a:spLocks noGrp="1"/>
+          </p:cNvSpPr>
           <p:nvPr>
             <p:ph type="sldNum" sz="quarter" idx="2"/>
           </p:nvPr>
@@ -1876,8 +1944,10 @@
           <a:bodyPr/>
           <a:lstStyle/>
           <a:p>
-            <a:pPr/>
-            <a:fld id="{86CB4B4D-7CA3-9044-876B-883B54F8677D}" type="slidenum"/>
+            <a:fld id="{86CB4B4D-7CA3-9044-876B-883B54F8677D}" type="slidenum">
+              <a:t>‹N°›</a:t>
+            </a:fld>
+            <a:endParaRPr/>
           </a:p>
         </p:txBody>
       </p:sp>
@@ -1886,12 +1956,12 @@
   <p:clrMapOvr>
     <a:masterClrMapping/>
   </p:clrMapOvr>
-  <p:transition xmlns:p14="http://schemas.microsoft.com/office/powerpoint/2010/main" spd="med" advClick="1"/>
+  <p:transition spd="med"/>
 </p:sldLayout>
 </file>
 
 <file path=ppt/slideLayouts/slideLayout9.xml><?xml version="1.0" encoding="utf-8"?>
-<p:sldLayout xmlns:a="http://schemas.openxmlformats.org/drawingml/2006/main" xmlns:r="http://schemas.openxmlformats.org/officeDocument/2006/relationships" xmlns:p="http://schemas.openxmlformats.org/presentationml/2006/main" xmlns:m="http://schemas.openxmlformats.org/officeDocument/2006/math" xmlns:a14="http://schemas.microsoft.com/office/drawing/2010/main" type="tx" showMasterSp="1" showMasterPhAnim="1">
+<p:sldLayout xmlns:a="http://schemas.openxmlformats.org/drawingml/2006/main" xmlns:r="http://schemas.openxmlformats.org/officeDocument/2006/relationships" xmlns:p="http://schemas.openxmlformats.org/presentationml/2006/main" type="tx">
   <p:cSld name="CAPTION_ONLY">
     <p:spTree>
       <p:nvGrpSpPr>
@@ -1910,7 +1980,9 @@
       <p:sp>
         <p:nvSpPr>
           <p:cNvPr id="83" name="Body Level One…"/>
-          <p:cNvSpPr txBox="1"/>
+          <p:cNvSpPr txBox="1">
+            <a:spLocks noGrp="1"/>
+          </p:cNvSpPr>
           <p:nvPr>
             <p:ph type="body" sz="quarter" idx="1"/>
           </p:nvPr>
@@ -1966,7 +2038,6 @@
             </a:lvl5pPr>
           </a:lstStyle>
           <a:p>
-            <a:pPr/>
             <a:r>
               <a:t>Body Level One</a:t>
             </a:r>
@@ -2000,7 +2071,9 @@
       <p:sp>
         <p:nvSpPr>
           <p:cNvPr id="84" name="Slide Number"/>
-          <p:cNvSpPr txBox="1"/>
+          <p:cNvSpPr txBox="1">
+            <a:spLocks noGrp="1"/>
+          </p:cNvSpPr>
           <p:nvPr>
             <p:ph type="sldNum" sz="quarter" idx="2"/>
           </p:nvPr>
@@ -2014,8 +2087,10 @@
           <a:bodyPr/>
           <a:lstStyle/>
           <a:p>
-            <a:pPr/>
-            <a:fld id="{86CB4B4D-7CA3-9044-876B-883B54F8677D}" type="slidenum"/>
+            <a:fld id="{86CB4B4D-7CA3-9044-876B-883B54F8677D}" type="slidenum">
+              <a:t>‹N°›</a:t>
+            </a:fld>
+            <a:endParaRPr/>
           </a:p>
         </p:txBody>
       </p:sp>
@@ -2024,18 +2099,19 @@
   <p:clrMapOvr>
     <a:masterClrMapping/>
   </p:clrMapOvr>
-  <p:transition xmlns:p14="http://schemas.microsoft.com/office/powerpoint/2010/main" spd="med" advClick="1"/>
+  <p:transition spd="med"/>
 </p:sldLayout>
 </file>
 
 <file path=ppt/slideMasters/slideMaster1.xml><?xml version="1.0" encoding="utf-8"?>
-<p:sldMaster xmlns:a="http://schemas.openxmlformats.org/drawingml/2006/main" xmlns:r="http://schemas.openxmlformats.org/officeDocument/2006/relationships" xmlns:p="http://schemas.openxmlformats.org/presentationml/2006/main" xmlns:m="http://schemas.openxmlformats.org/officeDocument/2006/math" xmlns:a14="http://schemas.microsoft.com/office/drawing/2010/main">
+<p:sldMaster xmlns:a="http://schemas.openxmlformats.org/drawingml/2006/main" xmlns:r="http://schemas.openxmlformats.org/officeDocument/2006/relationships" xmlns:p="http://schemas.openxmlformats.org/presentationml/2006/main">
   <p:cSld>
     <p:bg>
       <p:bgPr>
         <a:solidFill>
           <a:srgbClr val="FFFFFF"/>
         </a:solidFill>
+        <a:effectLst/>
       </p:bgPr>
     </p:bg>
     <p:spTree>
@@ -2055,7 +2131,9 @@
       <p:sp>
         <p:nvSpPr>
           <p:cNvPr id="2" name="Title Text"/>
-          <p:cNvSpPr txBox="1"/>
+          <p:cNvSpPr txBox="1">
+            <a:spLocks noGrp="1"/>
+          </p:cNvSpPr>
           <p:nvPr>
             <p:ph type="title"/>
           </p:nvPr>
@@ -2073,17 +2151,16 @@
           </a:ln>
           <a:extLst>
             <a:ext uri="{C572A759-6A51-4108-AA02-DFA0A04FC94B}">
-              <ma14:wrappingTextBoxFlag xmlns:ma14="http://schemas.microsoft.com/office/mac/drawingml/2011/main" val="1"/>
+              <ma14:wrappingTextBoxFlag xmlns:ma14="http://schemas.microsoft.com/office/mac/drawingml/2011/main" xmlns:a14="http://schemas.microsoft.com/office/drawing/2010/main" xmlns:m="http://schemas.openxmlformats.org/officeDocument/2006/math" xmlns="" val="1"/>
             </a:ext>
           </a:extLst>
         </p:spPr>
         <p:txBody>
           <a:bodyPr lIns="91421" tIns="91421" rIns="91421" bIns="91421">
-            <a:normAutofit fontScale="100000" lnSpcReduction="0"/>
+            <a:normAutofit/>
           </a:bodyPr>
           <a:lstStyle/>
           <a:p>
-            <a:pPr/>
             <a:r>
               <a:t>Title Text</a:t>
             </a:r>
@@ -2093,7 +2170,9 @@
       <p:sp>
         <p:nvSpPr>
           <p:cNvPr id="3" name="Body Level One…"/>
-          <p:cNvSpPr txBox="1"/>
+          <p:cNvSpPr txBox="1">
+            <a:spLocks noGrp="1"/>
+          </p:cNvSpPr>
           <p:nvPr>
             <p:ph type="body" idx="1"/>
           </p:nvPr>
@@ -2111,17 +2190,16 @@
           </a:ln>
           <a:extLst>
             <a:ext uri="{C572A759-6A51-4108-AA02-DFA0A04FC94B}">
-              <ma14:wrappingTextBoxFlag xmlns:ma14="http://schemas.microsoft.com/office/mac/drawingml/2011/main" val="1"/>
+              <ma14:wrappingTextBoxFlag xmlns:ma14="http://schemas.microsoft.com/office/mac/drawingml/2011/main" xmlns:a14="http://schemas.microsoft.com/office/drawing/2010/main" xmlns:m="http://schemas.openxmlformats.org/officeDocument/2006/math" xmlns="" val="1"/>
             </a:ext>
           </a:extLst>
         </p:spPr>
         <p:txBody>
           <a:bodyPr lIns="91421" tIns="91421" rIns="91421" bIns="91421">
-            <a:normAutofit fontScale="100000" lnSpcReduction="0"/>
+            <a:normAutofit/>
           </a:bodyPr>
           <a:lstStyle/>
           <a:p>
-            <a:pPr/>
             <a:r>
               <a:t>Body Level One</a:t>
             </a:r>
@@ -2155,7 +2233,9 @@
       <p:sp>
         <p:nvSpPr>
           <p:cNvPr id="4" name="Slide Number"/>
-          <p:cNvSpPr txBox="1"/>
+          <p:cNvSpPr txBox="1">
+            <a:spLocks noGrp="1"/>
+          </p:cNvSpPr>
           <p:nvPr>
             <p:ph type="sldNum" sz="quarter" idx="2"/>
           </p:nvPr>
@@ -2190,8 +2270,10 @@
             </a:lvl1pPr>
           </a:lstStyle>
           <a:p>
-            <a:pPr/>
-            <a:fld id="{86CB4B4D-7CA3-9044-876B-883B54F8677D}" type="slidenum"/>
+            <a:fld id="{86CB4B4D-7CA3-9044-876B-883B54F8677D}" type="slidenum">
+              <a:t>‹N°›</a:t>
+            </a:fld>
+            <a:endParaRPr/>
           </a:p>
         </p:txBody>
       </p:sp>
@@ -2199,20 +2281,20 @@
   </p:cSld>
   <p:clrMap bg1="lt1" tx1="dk1" bg2="lt2" tx2="dk2" accent1="accent1" accent2="accent2" accent3="accent3" accent4="accent4" accent5="accent5" accent6="accent6" hlink="hlink" folHlink="folHlink"/>
   <p:sldLayoutIdLst>
-    <p:sldLayoutId id="2147483649" r:id="rId2"/>
-    <p:sldLayoutId id="2147483650" r:id="rId3"/>
-    <p:sldLayoutId id="2147483651" r:id="rId4"/>
-    <p:sldLayoutId id="2147483652" r:id="rId5"/>
-    <p:sldLayoutId id="2147483653" r:id="rId6"/>
-    <p:sldLayoutId id="2147483654" r:id="rId7"/>
-    <p:sldLayoutId id="2147483655" r:id="rId8"/>
-    <p:sldLayoutId id="2147483656" r:id="rId9"/>
-    <p:sldLayoutId id="2147483657" r:id="rId10"/>
-    <p:sldLayoutId id="2147483658" r:id="rId11"/>
-    <p:sldLayoutId id="2147483659" r:id="rId12"/>
-    <p:sldLayoutId id="2147483660" r:id="rId13"/>
+    <p:sldLayoutId id="2147483649" r:id="rId1"/>
+    <p:sldLayoutId id="2147483650" r:id="rId2"/>
+    <p:sldLayoutId id="2147483651" r:id="rId3"/>
+    <p:sldLayoutId id="2147483652" r:id="rId4"/>
+    <p:sldLayoutId id="2147483653" r:id="rId5"/>
+    <p:sldLayoutId id="2147483654" r:id="rId6"/>
+    <p:sldLayoutId id="2147483655" r:id="rId7"/>
+    <p:sldLayoutId id="2147483656" r:id="rId8"/>
+    <p:sldLayoutId id="2147483657" r:id="rId9"/>
+    <p:sldLayoutId id="2147483658" r:id="rId10"/>
+    <p:sldLayoutId id="2147483659" r:id="rId11"/>
+    <p:sldLayoutId id="2147483660" r:id="rId12"/>
   </p:sldLayoutIdLst>
-  <p:transition xmlns:p14="http://schemas.microsoft.com/office/powerpoint/2010/main" spd="med" advClick="1"/>
+  <p:transition spd="med"/>
   <p:txStyles>
     <p:titleStyle>
       <a:lvl1pPr marL="0" marR="0" indent="0" algn="l" defTabSz="914400" rtl="0" latinLnBrk="0">
@@ -2230,7 +2312,7 @@
         <a:buFontTx/>
         <a:buNone/>
         <a:tabLst/>
-        <a:defRPr b="0" baseline="0" cap="none" i="0" spc="0" strike="noStrike" sz="2800" u="none">
+        <a:defRPr sz="2800" b="0" i="0" u="none" strike="noStrike" cap="none" spc="0" baseline="0">
           <a:solidFill>
             <a:srgbClr val="000000"/>
           </a:solidFill>
@@ -2256,7 +2338,7 @@
         <a:buFontTx/>
         <a:buNone/>
         <a:tabLst/>
-        <a:defRPr b="0" baseline="0" cap="none" i="0" spc="0" strike="noStrike" sz="2800" u="none">
+        <a:defRPr sz="2800" b="0" i="0" u="none" strike="noStrike" cap="none" spc="0" baseline="0">
           <a:solidFill>
             <a:srgbClr val="000000"/>
           </a:solidFill>
@@ -2282,7 +2364,7 @@
         <a:buFontTx/>
         <a:buNone/>
         <a:tabLst/>
-        <a:defRPr b="0" baseline="0" cap="none" i="0" spc="0" strike="noStrike" sz="2800" u="none">
+        <a:defRPr sz="2800" b="0" i="0" u="none" strike="noStrike" cap="none" spc="0" baseline="0">
           <a:solidFill>
             <a:srgbClr val="000000"/>
           </a:solidFill>
@@ -2308,7 +2390,7 @@
         <a:buFontTx/>
         <a:buNone/>
         <a:tabLst/>
-        <a:defRPr b="0" baseline="0" cap="none" i="0" spc="0" strike="noStrike" sz="2800" u="none">
+        <a:defRPr sz="2800" b="0" i="0" u="none" strike="noStrike" cap="none" spc="0" baseline="0">
           <a:solidFill>
             <a:srgbClr val="000000"/>
           </a:solidFill>
@@ -2334,7 +2416,7 @@
         <a:buFontTx/>
         <a:buNone/>
         <a:tabLst/>
-        <a:defRPr b="0" baseline="0" cap="none" i="0" spc="0" strike="noStrike" sz="2800" u="none">
+        <a:defRPr sz="2800" b="0" i="0" u="none" strike="noStrike" cap="none" spc="0" baseline="0">
           <a:solidFill>
             <a:srgbClr val="000000"/>
           </a:solidFill>
@@ -2360,7 +2442,7 @@
         <a:buFontTx/>
         <a:buNone/>
         <a:tabLst/>
-        <a:defRPr b="0" baseline="0" cap="none" i="0" spc="0" strike="noStrike" sz="2800" u="none">
+        <a:defRPr sz="2800" b="0" i="0" u="none" strike="noStrike" cap="none" spc="0" baseline="0">
           <a:solidFill>
             <a:srgbClr val="000000"/>
           </a:solidFill>
@@ -2386,7 +2468,7 @@
         <a:buFontTx/>
         <a:buNone/>
         <a:tabLst/>
-        <a:defRPr b="0" baseline="0" cap="none" i="0" spc="0" strike="noStrike" sz="2800" u="none">
+        <a:defRPr sz="2800" b="0" i="0" u="none" strike="noStrike" cap="none" spc="0" baseline="0">
           <a:solidFill>
             <a:srgbClr val="000000"/>
           </a:solidFill>
@@ -2412,7 +2494,7 @@
         <a:buFontTx/>
         <a:buNone/>
         <a:tabLst/>
-        <a:defRPr b="0" baseline="0" cap="none" i="0" spc="0" strike="noStrike" sz="2800" u="none">
+        <a:defRPr sz="2800" b="0" i="0" u="none" strike="noStrike" cap="none" spc="0" baseline="0">
           <a:solidFill>
             <a:srgbClr val="000000"/>
           </a:solidFill>
@@ -2438,7 +2520,7 @@
         <a:buFontTx/>
         <a:buNone/>
         <a:tabLst/>
-        <a:defRPr b="0" baseline="0" cap="none" i="0" spc="0" strike="noStrike" sz="2800" u="none">
+        <a:defRPr sz="2800" b="0" i="0" u="none" strike="noStrike" cap="none" spc="0" baseline="0">
           <a:solidFill>
             <a:srgbClr val="000000"/>
           </a:solidFill>
@@ -2468,7 +2550,7 @@
         <a:buFont typeface="Arial"/>
         <a:buChar char="●"/>
         <a:tabLst/>
-        <a:defRPr b="0" baseline="0" cap="none" i="0" spc="0" strike="noStrike" sz="1800" u="none">
+        <a:defRPr sz="1800" b="0" i="0" u="none" strike="noStrike" cap="none" spc="0" baseline="0">
           <a:solidFill>
             <a:srgbClr val="585858"/>
           </a:solidFill>
@@ -2496,7 +2578,7 @@
         <a:buFont typeface="Arial"/>
         <a:buChar char="○"/>
         <a:tabLst/>
-        <a:defRPr b="0" baseline="0" cap="none" i="0" spc="0" strike="noStrike" sz="1800" u="none">
+        <a:defRPr sz="1800" b="0" i="0" u="none" strike="noStrike" cap="none" spc="0" baseline="0">
           <a:solidFill>
             <a:srgbClr val="585858"/>
           </a:solidFill>
@@ -2524,7 +2606,7 @@
         <a:buFont typeface="Arial"/>
         <a:buChar char="■"/>
         <a:tabLst/>
-        <a:defRPr b="0" baseline="0" cap="none" i="0" spc="0" strike="noStrike" sz="1800" u="none">
+        <a:defRPr sz="1800" b="0" i="0" u="none" strike="noStrike" cap="none" spc="0" baseline="0">
           <a:solidFill>
             <a:srgbClr val="585858"/>
           </a:solidFill>
@@ -2552,7 +2634,7 @@
         <a:buFont typeface="Arial"/>
         <a:buChar char="●"/>
         <a:tabLst/>
-        <a:defRPr b="0" baseline="0" cap="none" i="0" spc="0" strike="noStrike" sz="1800" u="none">
+        <a:defRPr sz="1800" b="0" i="0" u="none" strike="noStrike" cap="none" spc="0" baseline="0">
           <a:solidFill>
             <a:srgbClr val="585858"/>
           </a:solidFill>
@@ -2580,7 +2662,7 @@
         <a:buFont typeface="Arial"/>
         <a:buChar char="○"/>
         <a:tabLst/>
-        <a:defRPr b="0" baseline="0" cap="none" i="0" spc="0" strike="noStrike" sz="1800" u="none">
+        <a:defRPr sz="1800" b="0" i="0" u="none" strike="noStrike" cap="none" spc="0" baseline="0">
           <a:solidFill>
             <a:srgbClr val="585858"/>
           </a:solidFill>
@@ -2608,7 +2690,7 @@
         <a:buFont typeface="Arial"/>
         <a:buChar char="■"/>
         <a:tabLst/>
-        <a:defRPr b="0" baseline="0" cap="none" i="0" spc="0" strike="noStrike" sz="1800" u="none">
+        <a:defRPr sz="1800" b="0" i="0" u="none" strike="noStrike" cap="none" spc="0" baseline="0">
           <a:solidFill>
             <a:srgbClr val="585858"/>
           </a:solidFill>
@@ -2636,7 +2718,7 @@
         <a:buFont typeface="Arial"/>
         <a:buChar char="●"/>
         <a:tabLst/>
-        <a:defRPr b="0" baseline="0" cap="none" i="0" spc="0" strike="noStrike" sz="1800" u="none">
+        <a:defRPr sz="1800" b="0" i="0" u="none" strike="noStrike" cap="none" spc="0" baseline="0">
           <a:solidFill>
             <a:srgbClr val="585858"/>
           </a:solidFill>
@@ -2664,7 +2746,7 @@
         <a:buFont typeface="Arial"/>
         <a:buChar char="○"/>
         <a:tabLst/>
-        <a:defRPr b="0" baseline="0" cap="none" i="0" spc="0" strike="noStrike" sz="1800" u="none">
+        <a:defRPr sz="1800" b="0" i="0" u="none" strike="noStrike" cap="none" spc="0" baseline="0">
           <a:solidFill>
             <a:srgbClr val="585858"/>
           </a:solidFill>
@@ -2692,7 +2774,7 @@
         <a:buFont typeface="Arial"/>
         <a:buChar char="■"/>
         <a:tabLst/>
-        <a:defRPr b="0" baseline="0" cap="none" i="0" spc="0" strike="noStrike" sz="1800" u="none">
+        <a:defRPr sz="1800" b="0" i="0" u="none" strike="noStrike" cap="none" spc="0" baseline="0">
           <a:solidFill>
             <a:srgbClr val="585858"/>
           </a:solidFill>
@@ -2720,7 +2802,7 @@
         <a:buFontTx/>
         <a:buNone/>
         <a:tabLst/>
-        <a:defRPr b="0" baseline="0" cap="none" i="0" spc="0" strike="noStrike" sz="1000" u="none">
+        <a:defRPr sz="1000" b="0" i="0" u="none" strike="noStrike" cap="none" spc="0" baseline="0">
           <a:solidFill>
             <a:schemeClr val="tx1"/>
           </a:solidFill>
@@ -2746,7 +2828,7 @@
         <a:buFontTx/>
         <a:buNone/>
         <a:tabLst/>
-        <a:defRPr b="0" baseline="0" cap="none" i="0" spc="0" strike="noStrike" sz="1000" u="none">
+        <a:defRPr sz="1000" b="0" i="0" u="none" strike="noStrike" cap="none" spc="0" baseline="0">
           <a:solidFill>
             <a:schemeClr val="tx1"/>
           </a:solidFill>
@@ -2772,7 +2854,7 @@
         <a:buFontTx/>
         <a:buNone/>
         <a:tabLst/>
-        <a:defRPr b="0" baseline="0" cap="none" i="0" spc="0" strike="noStrike" sz="1000" u="none">
+        <a:defRPr sz="1000" b="0" i="0" u="none" strike="noStrike" cap="none" spc="0" baseline="0">
           <a:solidFill>
             <a:schemeClr val="tx1"/>
           </a:solidFill>
@@ -2798,7 +2880,7 @@
         <a:buFontTx/>
         <a:buNone/>
         <a:tabLst/>
-        <a:defRPr b="0" baseline="0" cap="none" i="0" spc="0" strike="noStrike" sz="1000" u="none">
+        <a:defRPr sz="1000" b="0" i="0" u="none" strike="noStrike" cap="none" spc="0" baseline="0">
           <a:solidFill>
             <a:schemeClr val="tx1"/>
           </a:solidFill>
@@ -2824,7 +2906,7 @@
         <a:buFontTx/>
         <a:buNone/>
         <a:tabLst/>
-        <a:defRPr b="0" baseline="0" cap="none" i="0" spc="0" strike="noStrike" sz="1000" u="none">
+        <a:defRPr sz="1000" b="0" i="0" u="none" strike="noStrike" cap="none" spc="0" baseline="0">
           <a:solidFill>
             <a:schemeClr val="tx1"/>
           </a:solidFill>
@@ -2850,7 +2932,7 @@
         <a:buFontTx/>
         <a:buNone/>
         <a:tabLst/>
-        <a:defRPr b="0" baseline="0" cap="none" i="0" spc="0" strike="noStrike" sz="1000" u="none">
+        <a:defRPr sz="1000" b="0" i="0" u="none" strike="noStrike" cap="none" spc="0" baseline="0">
           <a:solidFill>
             <a:schemeClr val="tx1"/>
           </a:solidFill>
@@ -2876,7 +2958,7 @@
         <a:buFontTx/>
         <a:buNone/>
         <a:tabLst/>
-        <a:defRPr b="0" baseline="0" cap="none" i="0" spc="0" strike="noStrike" sz="1000" u="none">
+        <a:defRPr sz="1000" b="0" i="0" u="none" strike="noStrike" cap="none" spc="0" baseline="0">
           <a:solidFill>
             <a:schemeClr val="tx1"/>
           </a:solidFill>
@@ -2902,7 +2984,7 @@
         <a:buFontTx/>
         <a:buNone/>
         <a:tabLst/>
-        <a:defRPr b="0" baseline="0" cap="none" i="0" spc="0" strike="noStrike" sz="1000" u="none">
+        <a:defRPr sz="1000" b="0" i="0" u="none" strike="noStrike" cap="none" spc="0" baseline="0">
           <a:solidFill>
             <a:schemeClr val="tx1"/>
           </a:solidFill>
@@ -2928,7 +3010,7 @@
         <a:buFontTx/>
         <a:buNone/>
         <a:tabLst/>
-        <a:defRPr b="0" baseline="0" cap="none" i="0" spc="0" strike="noStrike" sz="1000" u="none">
+        <a:defRPr sz="1000" b="0" i="0" u="none" strike="noStrike" cap="none" spc="0" baseline="0">
           <a:solidFill>
             <a:schemeClr val="tx1"/>
           </a:solidFill>
@@ -2945,13 +3027,14 @@
 </file>
 
 <file path=ppt/slides/slide1.xml><?xml version="1.0" encoding="utf-8"?>
-<p:sld xmlns:a="http://schemas.openxmlformats.org/drawingml/2006/main" xmlns:r="http://schemas.openxmlformats.org/officeDocument/2006/relationships" xmlns:p="http://schemas.openxmlformats.org/presentationml/2006/main" xmlns:m="http://schemas.openxmlformats.org/officeDocument/2006/math" xmlns:a14="http://schemas.microsoft.com/office/drawing/2010/main" showMasterSp="1" showMasterPhAnim="1">
+<p:sld xmlns:a="http://schemas.openxmlformats.org/drawingml/2006/main" xmlns:r="http://schemas.openxmlformats.org/officeDocument/2006/relationships" xmlns:p="http://schemas.openxmlformats.org/presentationml/2006/main">
   <p:cSld>
     <p:bg>
       <p:bgPr>
         <a:solidFill>
           <a:srgbClr val="3FDAD2"/>
         </a:solidFill>
+        <a:effectLst/>
       </p:bgPr>
     </p:bg>
     <p:spTree>
@@ -2971,7 +3054,9 @@
       <p:sp>
         <p:nvSpPr>
           <p:cNvPr id="118" name="Google Shape;54;p13"/>
-          <p:cNvSpPr txBox="1"/>
+          <p:cNvSpPr txBox="1">
+            <a:spLocks noGrp="1"/>
+          </p:cNvSpPr>
           <p:nvPr>
             <p:ph type="ctrTitle"/>
           </p:nvPr>
@@ -3001,7 +3086,6 @@
             </a:lvl1pPr>
           </a:lstStyle>
           <a:p>
-            <a:pPr/>
             <a:r>
               <a:t>Your Tech Bootcamp</a:t>
             </a:r>
@@ -3017,9 +3101,7 @@
           <p:nvPr/>
         </p:nvPicPr>
         <p:blipFill>
-          <a:blip r:embed="rId2">
-            <a:extLst/>
-          </a:blip>
+          <a:blip r:embed="rId2"/>
           <a:stretch>
             <a:fillRect/>
           </a:stretch>
@@ -3056,13 +3138,13 @@
           </a:ln>
           <a:extLst>
             <a:ext uri="{C572A759-6A51-4108-AA02-DFA0A04FC94B}">
-              <ma14:wrappingTextBoxFlag xmlns:ma14="http://schemas.microsoft.com/office/mac/drawingml/2011/main" val="1"/>
+              <ma14:wrappingTextBoxFlag xmlns:ma14="http://schemas.microsoft.com/office/mac/drawingml/2011/main" xmlns:a14="http://schemas.microsoft.com/office/drawing/2010/main" xmlns:m="http://schemas.openxmlformats.org/officeDocument/2006/math" xmlns="" val="1"/>
             </a:ext>
           </a:extLst>
         </p:spPr>
         <p:txBody>
           <a:bodyPr lIns="91421" tIns="91421" rIns="91421" bIns="91421" anchor="b">
-            <a:normAutofit fontScale="100000" lnSpcReduction="0"/>
+            <a:normAutofit/>
           </a:bodyPr>
           <a:lstStyle>
             <a:lvl1pPr>
@@ -3078,7 +3160,6 @@
             </a:lvl1pPr>
           </a:lstStyle>
           <a:p>
-            <a:pPr/>
             <a:r>
               <a:t>Group # - Football Predictor</a:t>
             </a:r>
@@ -3090,12 +3171,12 @@
   <p:clrMapOvr>
     <a:masterClrMapping/>
   </p:clrMapOvr>
-  <p:transition xmlns:p14="http://schemas.microsoft.com/office/powerpoint/2010/main" spd="med" advClick="1"/>
+  <p:transition spd="med"/>
 </p:sld>
 </file>
 
 <file path=ppt/slides/slide10.xml><?xml version="1.0" encoding="utf-8"?>
-<p:sld xmlns:a="http://schemas.openxmlformats.org/drawingml/2006/main" xmlns:r="http://schemas.openxmlformats.org/officeDocument/2006/relationships" xmlns:p="http://schemas.openxmlformats.org/presentationml/2006/main" xmlns:m="http://schemas.openxmlformats.org/officeDocument/2006/math" xmlns:a14="http://schemas.microsoft.com/office/drawing/2010/main" showMasterSp="1" showMasterPhAnim="1">
+<p:sld xmlns:a="http://schemas.openxmlformats.org/drawingml/2006/main" xmlns:r="http://schemas.openxmlformats.org/officeDocument/2006/relationships" xmlns:p="http://schemas.openxmlformats.org/presentationml/2006/main">
   <p:cSld>
     <p:spTree>
       <p:nvGrpSpPr>
@@ -3120,10 +3201,8 @@
           <p:nvPr/>
         </p:nvPicPr>
         <p:blipFill>
-          <a:blip r:embed="rId2">
-            <a:extLst/>
-          </a:blip>
-          <a:srcRect l="0" t="7813" r="0" b="7812"/>
+          <a:blip r:embed="rId2"/>
+          <a:srcRect t="7813" b="7812"/>
           <a:stretch>
             <a:fillRect/>
           </a:stretch>
@@ -3163,7 +3242,7 @@
             </a:solidFill>
           </a:ln>
           <a:effectLst>
-            <a:outerShdw sx="100000" sy="100000" kx="0" ky="0" algn="b" rotWithShape="0" blurRad="76200" dist="20000" dir="5400000">
+            <a:outerShdw blurRad="76200" dist="20000" dir="5400000" rotWithShape="0">
               <a:srgbClr val="0E3449">
                 <a:alpha val="16000"/>
               </a:srgbClr>
@@ -3182,13 +3261,16 @@
                 <a:sym typeface="Arial"/>
               </a:defRPr>
             </a:pPr>
+            <a:endParaRPr/>
           </a:p>
         </p:txBody>
       </p:sp>
       <p:sp>
         <p:nvSpPr>
           <p:cNvPr id="292" name="Google Shape;75;p16"/>
-          <p:cNvSpPr txBox="1"/>
+          <p:cNvSpPr txBox="1">
+            <a:spLocks noGrp="1"/>
+          </p:cNvSpPr>
           <p:nvPr>
             <p:ph type="title"/>
           </p:nvPr>
@@ -3218,7 +3300,6 @@
             </a:lvl1pPr>
           </a:lstStyle>
           <a:p>
-            <a:pPr/>
             <a:r>
               <a:t>Architecture - Inference</a:t>
             </a:r>
@@ -3234,9 +3315,7 @@
           <p:nvPr/>
         </p:nvPicPr>
         <p:blipFill>
-          <a:blip r:embed="rId3">
-            <a:extLst/>
-          </a:blip>
+          <a:blip r:embed="rId3"/>
           <a:stretch>
             <a:fillRect/>
           </a:stretch>
@@ -3287,6 +3366,7 @@
                 <a:sym typeface="Arial"/>
               </a:defRPr>
             </a:pPr>
+            <a:endParaRPr/>
           </a:p>
         </p:txBody>
       </p:sp>
@@ -3299,9 +3379,7 @@
           <p:nvPr/>
         </p:nvPicPr>
         <p:blipFill>
-          <a:blip r:embed="rId4">
-            <a:extLst/>
-          </a:blip>
+          <a:blip r:embed="rId4"/>
           <a:stretch>
             <a:fillRect/>
           </a:stretch>
@@ -3342,9 +3420,7 @@
             <p:nvPr/>
           </p:nvPicPr>
           <p:blipFill>
-            <a:blip r:embed="rId5">
-              <a:extLst/>
-            </a:blip>
+            <a:blip r:embed="rId5"/>
             <a:stretch>
               <a:fillRect/>
             </a:stretch>
@@ -3373,9 +3449,7 @@
             <p:nvPr/>
           </p:nvPicPr>
           <p:blipFill>
-            <a:blip r:embed="rId6">
-              <a:extLst/>
-            </a:blip>
+            <a:blip r:embed="rId6"/>
             <a:stretch>
               <a:fillRect/>
             </a:stretch>
@@ -3421,7 +3495,7 @@
           <a:bodyPr lIns="45718" tIns="45718" rIns="45718" bIns="45718"/>
           <a:lstStyle/>
           <a:p>
-            <a:pPr/>
+            <a:endParaRPr/>
           </a:p>
         </p:txBody>
       </p:sp>
@@ -3450,7 +3524,7 @@
           <a:bodyPr lIns="45718" tIns="45718" rIns="45718" bIns="45718"/>
           <a:lstStyle/>
           <a:p>
-            <a:pPr/>
+            <a:endParaRPr/>
           </a:p>
         </p:txBody>
       </p:sp>
@@ -3479,7 +3553,7 @@
           <a:bodyPr lIns="45718" tIns="45718" rIns="45718" bIns="45718"/>
           <a:lstStyle/>
           <a:p>
-            <a:pPr/>
+            <a:endParaRPr/>
           </a:p>
         </p:txBody>
       </p:sp>
@@ -3508,7 +3582,7 @@
           <a:bodyPr lIns="45718" tIns="45718" rIns="45718" bIns="45718"/>
           <a:lstStyle/>
           <a:p>
-            <a:pPr/>
+            <a:endParaRPr/>
           </a:p>
         </p:txBody>
       </p:sp>
@@ -3537,7 +3611,7 @@
           <a:bodyPr lIns="45718" tIns="45718" rIns="45718" bIns="45718"/>
           <a:lstStyle/>
           <a:p>
-            <a:pPr/>
+            <a:endParaRPr/>
           </a:p>
         </p:txBody>
       </p:sp>
@@ -3566,7 +3640,7 @@
           <a:bodyPr lIns="45718" tIns="45718" rIns="45718" bIns="45718"/>
           <a:lstStyle/>
           <a:p>
-            <a:pPr/>
+            <a:endParaRPr/>
           </a:p>
         </p:txBody>
       </p:sp>
@@ -3595,7 +3669,7 @@
           <a:bodyPr lIns="45718" tIns="45718" rIns="45718" bIns="45718"/>
           <a:lstStyle/>
           <a:p>
-            <a:pPr/>
+            <a:endParaRPr/>
           </a:p>
         </p:txBody>
       </p:sp>
@@ -3624,7 +3698,7 @@
           <a:bodyPr lIns="45718" tIns="45718" rIns="45718" bIns="45718"/>
           <a:lstStyle/>
           <a:p>
-            <a:pPr/>
+            <a:endParaRPr/>
           </a:p>
         </p:txBody>
       </p:sp>
@@ -3651,9 +3725,7 @@
             <p:nvPr/>
           </p:nvPicPr>
           <p:blipFill>
-            <a:blip r:embed="rId7">
-              <a:extLst/>
-            </a:blip>
+            <a:blip r:embed="rId7"/>
             <a:stretch>
               <a:fillRect/>
             </a:stretch>
@@ -3682,9 +3754,7 @@
             <p:nvPr/>
           </p:nvPicPr>
           <p:blipFill>
-            <a:blip r:embed="rId8">
-              <a:extLst/>
-            </a:blip>
+            <a:blip r:embed="rId8"/>
             <a:stretch>
               <a:fillRect/>
             </a:stretch>
@@ -3714,9 +3784,7 @@
           <p:nvPr/>
         </p:nvPicPr>
         <p:blipFill>
-          <a:blip r:embed="rId9">
-            <a:extLst/>
-          </a:blip>
+          <a:blip r:embed="rId9"/>
           <a:stretch>
             <a:fillRect/>
           </a:stretch>
@@ -3759,7 +3827,7 @@
           <a:bodyPr lIns="45718" tIns="45718" rIns="45718" bIns="45718"/>
           <a:lstStyle/>
           <a:p>
-            <a:pPr/>
+            <a:endParaRPr/>
           </a:p>
         </p:txBody>
       </p:sp>
@@ -3814,9 +3882,7 @@
                 <p:nvPr/>
               </p:nvPicPr>
               <p:blipFill>
-                <a:blip r:embed="rId10">
-                  <a:extLst/>
-                </a:blip>
+                <a:blip r:embed="rId10"/>
                 <a:stretch>
                   <a:fillRect/>
                 </a:stretch>
@@ -3858,7 +3924,7 @@
                 <a:effectLst/>
                 <a:extLst>
                   <a:ext uri="{C572A759-6A51-4108-AA02-DFA0A04FC94B}">
-                    <ma14:wrappingTextBoxFlag xmlns:ma14="http://schemas.microsoft.com/office/mac/drawingml/2011/main" val="1"/>
+                    <ma14:wrappingTextBoxFlag xmlns:ma14="http://schemas.microsoft.com/office/mac/drawingml/2011/main" xmlns:a14="http://schemas.microsoft.com/office/drawing/2010/main" xmlns:m="http://schemas.openxmlformats.org/officeDocument/2006/math" xmlns="" val="1"/>
                   </a:ext>
                 </a:extLst>
               </p:spPr>
@@ -3877,7 +3943,6 @@
                   </a:lvl1pPr>
                 </a:lstStyle>
                 <a:p>
-                  <a:pPr/>
                   <a:r>
                     <a:t>Model</a:t>
                   </a:r>
@@ -3894,9 +3959,7 @@
               <p:nvPr/>
             </p:nvPicPr>
             <p:blipFill>
-              <a:blip r:embed="rId11">
-                <a:extLst/>
-              </a:blip>
+              <a:blip r:embed="rId11"/>
               <a:stretch>
                 <a:fillRect/>
               </a:stretch>
@@ -3926,9 +3989,7 @@
             <p:nvPr/>
           </p:nvPicPr>
           <p:blipFill>
-            <a:blip r:embed="rId12">
-              <a:extLst/>
-            </a:blip>
+            <a:blip r:embed="rId12"/>
             <a:stretch>
               <a:fillRect/>
             </a:stretch>
@@ -3985,7 +4046,7 @@
             <a:effectLst/>
             <a:extLst>
               <a:ext uri="{C572A759-6A51-4108-AA02-DFA0A04FC94B}">
-                <ma14:wrappingTextBoxFlag xmlns:ma14="http://schemas.microsoft.com/office/mac/drawingml/2011/main" val="1"/>
+                <ma14:wrappingTextBoxFlag xmlns:ma14="http://schemas.microsoft.com/office/mac/drawingml/2011/main" xmlns:a14="http://schemas.microsoft.com/office/drawing/2010/main" xmlns:m="http://schemas.openxmlformats.org/officeDocument/2006/math" xmlns="" val="1"/>
               </a:ext>
             </a:extLst>
           </p:spPr>
@@ -4004,7 +4065,6 @@
               </a:lvl1pPr>
             </a:lstStyle>
             <a:p>
-              <a:pPr/>
               <a:r>
                 <a:t>/tchat</a:t>
               </a:r>
@@ -4034,9 +4094,7 @@
               <p:nvPr/>
             </p:nvPicPr>
             <p:blipFill>
-              <a:blip r:embed="rId13">
-                <a:extLst/>
-              </a:blip>
+              <a:blip r:embed="rId13"/>
               <a:stretch>
                 <a:fillRect/>
               </a:stretch>
@@ -4065,9 +4123,7 @@
               <p:nvPr/>
             </p:nvPicPr>
             <p:blipFill>
-              <a:blip r:embed="rId12">
-                <a:extLst/>
-              </a:blip>
+              <a:blip r:embed="rId12"/>
               <a:stretch>
                 <a:fillRect/>
               </a:stretch>
@@ -4126,9 +4182,7 @@
               <p:nvPr/>
             </p:nvPicPr>
             <p:blipFill>
-              <a:blip r:embed="rId14">
-                <a:extLst/>
-              </a:blip>
+              <a:blip r:embed="rId14"/>
               <a:stretch>
                 <a:fillRect/>
               </a:stretch>
@@ -4170,7 +4224,7 @@
               <a:effectLst/>
               <a:extLst>
                 <a:ext uri="{C572A759-6A51-4108-AA02-DFA0A04FC94B}">
-                  <ma14:wrappingTextBoxFlag xmlns:ma14="http://schemas.microsoft.com/office/mac/drawingml/2011/main" val="1"/>
+                  <ma14:wrappingTextBoxFlag xmlns:ma14="http://schemas.microsoft.com/office/mac/drawingml/2011/main" xmlns:a14="http://schemas.microsoft.com/office/drawing/2010/main" xmlns:m="http://schemas.openxmlformats.org/officeDocument/2006/math" xmlns="" val="1"/>
                 </a:ext>
               </a:extLst>
             </p:spPr>
@@ -4189,7 +4243,6 @@
                 </a:lvl1pPr>
               </a:lstStyle>
               <a:p>
-                <a:pPr/>
                 <a:r>
                   <a:t>Front</a:t>
                 </a:r>
@@ -4206,9 +4259,7 @@
             <p:nvPr/>
           </p:nvPicPr>
           <p:blipFill>
-            <a:blip r:embed="rId12">
-              <a:extLst/>
-            </a:blip>
+            <a:blip r:embed="rId12"/>
             <a:stretch>
               <a:fillRect/>
             </a:stretch>
@@ -4266,9 +4317,7 @@
               <p:nvPr/>
             </p:nvPicPr>
             <p:blipFill>
-              <a:blip r:embed="rId13">
-                <a:extLst/>
-              </a:blip>
+              <a:blip r:embed="rId13"/>
               <a:stretch>
                 <a:fillRect/>
               </a:stretch>
@@ -4310,7 +4359,7 @@
               <a:effectLst/>
               <a:extLst>
                 <a:ext uri="{C572A759-6A51-4108-AA02-DFA0A04FC94B}">
-                  <ma14:wrappingTextBoxFlag xmlns:ma14="http://schemas.microsoft.com/office/mac/drawingml/2011/main" val="1"/>
+                  <ma14:wrappingTextBoxFlag xmlns:ma14="http://schemas.microsoft.com/office/mac/drawingml/2011/main" xmlns:a14="http://schemas.microsoft.com/office/drawing/2010/main" xmlns:m="http://schemas.openxmlformats.org/officeDocument/2006/math" xmlns="" val="1"/>
                 </a:ext>
               </a:extLst>
             </p:spPr>
@@ -4357,9 +4406,7 @@
             <p:nvPr/>
           </p:nvPicPr>
           <p:blipFill>
-            <a:blip r:embed="rId12">
-              <a:extLst/>
-            </a:blip>
+            <a:blip r:embed="rId12"/>
             <a:stretch>
               <a:fillRect/>
             </a:stretch>
@@ -4417,9 +4464,7 @@
               <p:nvPr/>
             </p:nvPicPr>
             <p:blipFill>
-              <a:blip r:embed="rId13">
-                <a:extLst/>
-              </a:blip>
+              <a:blip r:embed="rId13"/>
               <a:stretch>
                 <a:fillRect/>
               </a:stretch>
@@ -4461,7 +4506,7 @@
               <a:effectLst/>
               <a:extLst>
                 <a:ext uri="{C572A759-6A51-4108-AA02-DFA0A04FC94B}">
-                  <ma14:wrappingTextBoxFlag xmlns:ma14="http://schemas.microsoft.com/office/mac/drawingml/2011/main" val="1"/>
+                  <ma14:wrappingTextBoxFlag xmlns:ma14="http://schemas.microsoft.com/office/mac/drawingml/2011/main" xmlns:a14="http://schemas.microsoft.com/office/drawing/2010/main" xmlns:m="http://schemas.openxmlformats.org/officeDocument/2006/math" xmlns="" val="1"/>
                 </a:ext>
               </a:extLst>
             </p:spPr>
@@ -4504,9 +4549,7 @@
             <p:nvPr/>
           </p:nvPicPr>
           <p:blipFill>
-            <a:blip r:embed="rId12">
-              <a:extLst/>
-            </a:blip>
+            <a:blip r:embed="rId12"/>
             <a:stretch>
               <a:fillRect/>
             </a:stretch>
@@ -4564,9 +4607,7 @@
               <p:nvPr/>
             </p:nvPicPr>
             <p:blipFill>
-              <a:blip r:embed="rId15">
-                <a:extLst/>
-              </a:blip>
+              <a:blip r:embed="rId15"/>
               <a:stretch>
                 <a:fillRect/>
               </a:stretch>
@@ -4595,9 +4636,7 @@
               <p:nvPr/>
             </p:nvPicPr>
             <p:blipFill>
-              <a:blip r:embed="rId16">
-                <a:extLst/>
-              </a:blip>
+              <a:blip r:embed="rId16"/>
               <a:stretch>
                 <a:fillRect/>
               </a:stretch>
@@ -4627,9 +4666,7 @@
             <p:nvPr/>
           </p:nvPicPr>
           <p:blipFill>
-            <a:blip r:embed="rId12">
-              <a:extLst/>
-            </a:blip>
+            <a:blip r:embed="rId12"/>
             <a:stretch>
               <a:fillRect/>
             </a:stretch>
@@ -4655,12 +4692,12 @@
   <p:clrMapOvr>
     <a:masterClrMapping/>
   </p:clrMapOvr>
-  <p:transition xmlns:p14="http://schemas.microsoft.com/office/powerpoint/2010/main" spd="med" advClick="1"/>
+  <p:transition spd="med"/>
 </p:sld>
 </file>
 
 <file path=ppt/slides/slide11.xml><?xml version="1.0" encoding="utf-8"?>
-<p:sld xmlns:a="http://schemas.openxmlformats.org/drawingml/2006/main" xmlns:r="http://schemas.openxmlformats.org/officeDocument/2006/relationships" xmlns:p="http://schemas.openxmlformats.org/presentationml/2006/main" xmlns:m="http://schemas.openxmlformats.org/officeDocument/2006/math" xmlns:a14="http://schemas.microsoft.com/office/drawing/2010/main" showMasterSp="1" showMasterPhAnim="1">
+<p:sld xmlns:a="http://schemas.openxmlformats.org/drawingml/2006/main" xmlns:r="http://schemas.openxmlformats.org/officeDocument/2006/relationships" xmlns:p="http://schemas.openxmlformats.org/presentationml/2006/main">
   <p:cSld>
     <p:spTree>
       <p:nvGrpSpPr>
@@ -4678,17 +4715,15 @@
       </p:grpSpPr>
       <p:pic>
         <p:nvPicPr>
-          <p:cNvPr id="345" name="Fond Manchester United" descr="Fond Manchester United"/>
+          <p:cNvPr id="351" name="Fond Bayern Munich" descr="Fond Bayern Munich"/>
           <p:cNvPicPr>
             <a:picLocks noChangeAspect="1"/>
           </p:cNvPicPr>
           <p:nvPr/>
         </p:nvPicPr>
         <p:blipFill>
-          <a:blip r:embed="rId2">
-            <a:extLst/>
-          </a:blip>
-          <a:srcRect l="0" t="7813" r="0" b="7812"/>
+          <a:blip r:embed="rId2"/>
+          <a:srcRect t="7813" b="7812"/>
           <a:stretch>
             <a:fillRect/>
           </a:stretch>
@@ -4708,8 +4743,10 @@
       </p:pic>
       <p:sp>
         <p:nvSpPr>
-          <p:cNvPr id="346" name="Google Shape;75;p16"/>
-          <p:cNvSpPr txBox="1"/>
+          <p:cNvPr id="352" name="Google Shape;75;p16"/>
+          <p:cNvSpPr txBox="1">
+            <a:spLocks noGrp="1"/>
+          </p:cNvSpPr>
           <p:nvPr>
             <p:ph type="title"/>
           </p:nvPr>
@@ -4739,25 +4776,28 @@
             </a:lvl1pPr>
           </a:lstStyle>
           <a:p>
-            <a:pPr/>
             <a:r>
-              <a:t>Evolutions</a:t>
+              <a:rPr dirty="0"/>
+              <a:t>Conclusion</a:t>
             </a:r>
+            <a:r>
+              <a:rPr lang="fr-FR" dirty="0"/>
+              <a:t> - Evolutions</a:t>
+            </a:r>
+            <a:endParaRPr dirty="0"/>
           </a:p>
         </p:txBody>
       </p:sp>
       <p:pic>
         <p:nvPicPr>
-          <p:cNvPr id="347" name="Google Shape;76;p16" descr="Google Shape;76;p16"/>
+          <p:cNvPr id="353" name="Google Shape;76;p16" descr="Google Shape;76;p16"/>
           <p:cNvPicPr>
             <a:picLocks noChangeAspect="1"/>
           </p:cNvPicPr>
           <p:nvPr/>
         </p:nvPicPr>
         <p:blipFill>
-          <a:blip r:embed="rId3">
-            <a:extLst/>
-          </a:blip>
+          <a:blip r:embed="rId3"/>
           <a:stretch>
             <a:fillRect/>
           </a:stretch>
@@ -4777,7 +4817,7 @@
       </p:pic>
       <p:sp>
         <p:nvSpPr>
-          <p:cNvPr id="348" name="Google Shape;77;p16"/>
+          <p:cNvPr id="354" name="Google Shape;77;p16"/>
           <p:cNvSpPr/>
           <p:nvPr/>
         </p:nvSpPr>
@@ -4808,19 +4848,20 @@
                 <a:sym typeface="Arial"/>
               </a:defRPr>
             </a:pPr>
+            <a:endParaRPr/>
           </a:p>
         </p:txBody>
       </p:sp>
       <p:sp>
         <p:nvSpPr>
-          <p:cNvPr id="349" name="ZoneTexte 2"/>
+          <p:cNvPr id="355" name="ZoneTexte 2"/>
           <p:cNvSpPr txBox="1"/>
           <p:nvPr/>
         </p:nvSpPr>
         <p:spPr>
           <a:xfrm>
-            <a:off x="1238384" y="1975180"/>
-            <a:ext cx="7036935" cy="1635757"/>
+            <a:off x="1192661" y="1254970"/>
+            <a:ext cx="6974090" cy="2866935"/>
           </a:xfrm>
           <a:prstGeom prst="rect">
             <a:avLst/>
@@ -4830,7 +4871,7 @@
           </a:ln>
           <a:extLst>
             <a:ext uri="{C572A759-6A51-4108-AA02-DFA0A04FC94B}">
-              <ma14:wrappingTextBoxFlag xmlns:ma14="http://schemas.microsoft.com/office/mac/drawingml/2011/main" val="1"/>
+              <ma14:wrappingTextBoxFlag xmlns:ma14="http://schemas.microsoft.com/office/mac/drawingml/2011/main" xmlns:a14="http://schemas.microsoft.com/office/drawing/2010/main" xmlns:m="http://schemas.openxmlformats.org/officeDocument/2006/math" xmlns="" val="1"/>
             </a:ext>
           </a:extLst>
         </p:spPr>
@@ -4839,6 +4880,191 @@
             <a:spAutoFit/>
           </a:bodyPr>
           <a:lstStyle/>
+          <a:p>
+            <a:pPr>
+              <a:buClr>
+                <a:srgbClr val="000000"/>
+              </a:buClr>
+              <a:buSzPct val="100000"/>
+              <a:defRPr sz="1100">
+                <a:latin typeface="Inter"/>
+                <a:ea typeface="Inter"/>
+                <a:cs typeface="Inter"/>
+                <a:sym typeface="Inter"/>
+              </a:defRPr>
+            </a:pPr>
+            <a:r>
+              <a:rPr lang="fr-FR" sz="1600" b="1" dirty="0"/>
+              <a:t>Conclusion</a:t>
+            </a:r>
+          </a:p>
+          <a:p>
+            <a:pPr>
+              <a:buClr>
+                <a:srgbClr val="000000"/>
+              </a:buClr>
+              <a:buSzPct val="100000"/>
+              <a:defRPr sz="1100">
+                <a:latin typeface="Inter"/>
+                <a:ea typeface="Inter"/>
+                <a:cs typeface="Inter"/>
+                <a:sym typeface="Inter"/>
+              </a:defRPr>
+            </a:pPr>
+            <a:endParaRPr lang="fr-FR" b="1" dirty="0"/>
+          </a:p>
+          <a:p>
+            <a:pPr marL="171450" indent="-171450">
+              <a:buClr>
+                <a:srgbClr val="000000"/>
+              </a:buClr>
+              <a:buSzPct val="100000"/>
+              <a:buFont typeface="Arial"/>
+              <a:buChar char="•"/>
+              <a:defRPr sz="1100">
+                <a:latin typeface="Inter"/>
+                <a:ea typeface="Inter"/>
+                <a:cs typeface="Inter"/>
+                <a:sym typeface="Inter"/>
+              </a:defRPr>
+            </a:pPr>
+            <a:r>
+              <a:rPr dirty="0" err="1"/>
+              <a:t>Besoin</a:t>
+            </a:r>
+            <a:r>
+              <a:rPr dirty="0"/>
+              <a:t> : assister un </a:t>
+            </a:r>
+            <a:r>
+              <a:rPr dirty="0" err="1"/>
+              <a:t>entraineur</a:t>
+            </a:r>
+            <a:r>
+              <a:rPr dirty="0"/>
+              <a:t> de foot pour former son équipe</a:t>
+            </a:r>
+          </a:p>
+          <a:p>
+            <a:pPr marL="171450" indent="-171450">
+              <a:buClr>
+                <a:srgbClr val="000000"/>
+              </a:buClr>
+              <a:buSzPct val="100000"/>
+              <a:buFont typeface="Arial"/>
+              <a:buChar char="•"/>
+              <a:defRPr sz="1100">
+                <a:latin typeface="Inter"/>
+                <a:ea typeface="Inter"/>
+                <a:cs typeface="Inter"/>
+                <a:sym typeface="Inter"/>
+              </a:defRPr>
+            </a:pPr>
+            <a:r>
+              <a:rPr dirty="0"/>
+              <a:t>Proposition : </a:t>
+            </a:r>
+            <a:r>
+              <a:rPr dirty="0" err="1"/>
+              <a:t>une</a:t>
+            </a:r>
+            <a:r>
+              <a:rPr dirty="0"/>
+              <a:t> application pour </a:t>
+            </a:r>
+            <a:r>
+              <a:rPr dirty="0" err="1"/>
+              <a:t>l’aider</a:t>
+            </a:r>
+            <a:r>
+              <a:rPr dirty="0"/>
+              <a:t> à </a:t>
+            </a:r>
+            <a:r>
+              <a:rPr dirty="0" err="1"/>
+              <a:t>choisir</a:t>
+            </a:r>
+            <a:r>
+              <a:rPr dirty="0"/>
+              <a:t> </a:t>
+            </a:r>
+            <a:r>
+              <a:rPr dirty="0" err="1"/>
+              <a:t>ses</a:t>
+            </a:r>
+            <a:r>
+              <a:rPr dirty="0"/>
+              <a:t> </a:t>
+            </a:r>
+            <a:r>
+              <a:rPr dirty="0" err="1"/>
+              <a:t>joueurs</a:t>
+            </a:r>
+            <a:endParaRPr lang="fr-FR" dirty="0"/>
+          </a:p>
+          <a:p>
+            <a:pPr>
+              <a:buClr>
+                <a:srgbClr val="000000"/>
+              </a:buClr>
+              <a:buSzPct val="100000"/>
+              <a:defRPr sz="1100">
+                <a:latin typeface="Inter"/>
+                <a:ea typeface="Inter"/>
+                <a:cs typeface="Inter"/>
+                <a:sym typeface="Inter"/>
+              </a:defRPr>
+            </a:pPr>
+            <a:endParaRPr lang="fr-FR" dirty="0"/>
+          </a:p>
+          <a:p>
+            <a:pPr>
+              <a:buClr>
+                <a:srgbClr val="000000"/>
+              </a:buClr>
+              <a:buSzPct val="100000"/>
+              <a:defRPr sz="1100">
+                <a:latin typeface="Inter"/>
+                <a:ea typeface="Inter"/>
+                <a:cs typeface="Inter"/>
+                <a:sym typeface="Inter"/>
+              </a:defRPr>
+            </a:pPr>
+            <a:endParaRPr lang="fr-FR" dirty="0"/>
+          </a:p>
+          <a:p>
+            <a:pPr>
+              <a:buClr>
+                <a:srgbClr val="000000"/>
+              </a:buClr>
+              <a:buSzPct val="100000"/>
+              <a:defRPr sz="1100">
+                <a:latin typeface="Inter"/>
+                <a:ea typeface="Inter"/>
+                <a:cs typeface="Inter"/>
+                <a:sym typeface="Inter"/>
+              </a:defRPr>
+            </a:pPr>
+            <a:endParaRPr lang="fr-FR" dirty="0"/>
+          </a:p>
+          <a:p>
+            <a:pPr>
+              <a:buClr>
+                <a:srgbClr val="000000"/>
+              </a:buClr>
+              <a:buSzPct val="100000"/>
+              <a:defRPr sz="1100">
+                <a:latin typeface="Inter"/>
+                <a:ea typeface="Inter"/>
+                <a:cs typeface="Inter"/>
+                <a:sym typeface="Inter"/>
+              </a:defRPr>
+            </a:pPr>
+            <a:r>
+              <a:rPr lang="fr-FR" sz="1600" b="1" dirty="0"/>
+              <a:t>Perspectives</a:t>
+            </a:r>
+          </a:p>
           <a:p>
             <a:pPr marL="228600" indent="-228600">
               <a:lnSpc>
@@ -4864,27 +5090,9 @@
               </a:defRPr>
             </a:pPr>
             <a:r>
+              <a:rPr lang="fr-FR" dirty="0"/>
               <a:t>Améliorer le LLM (prompt engineering, les pré-remplissages des formulaires sur la vue « custom team »)</a:t>
             </a:r>
-          </a:p>
-          <a:p>
-            <a:pPr>
-              <a:lnSpc>
-                <a:spcPct val="120000"/>
-              </a:lnSpc>
-              <a:spcBef>
-                <a:spcPts val="300"/>
-              </a:spcBef>
-              <a:defRPr sz="1100">
-                <a:solidFill>
-                  <a:srgbClr val="0E3449"/>
-                </a:solidFill>
-                <a:latin typeface="Inter"/>
-                <a:ea typeface="Inter"/>
-                <a:cs typeface="Inter"/>
-                <a:sym typeface="Inter"/>
-              </a:defRPr>
-            </a:pPr>
           </a:p>
           <a:p>
             <a:pPr marL="228600" indent="-228600">
@@ -4911,33 +5119,17 @@
               </a:defRPr>
             </a:pPr>
             <a:r>
-              <a:t>Amélioration du modèle : passer à une target « probabilité de gagner un match »</a:t>
+              <a:rPr lang="fr-FR" dirty="0"/>
+              <a:t>Amélioration du modèle : passer à une </a:t>
             </a:r>
-          </a:p>
-          <a:p>
-            <a:pPr marL="228600" indent="-228600">
-              <a:lnSpc>
-                <a:spcPct val="120000"/>
-              </a:lnSpc>
-              <a:spcBef>
-                <a:spcPts val="300"/>
-              </a:spcBef>
-              <a:buClr>
-                <a:srgbClr val="015955"/>
-              </a:buClr>
-              <a:buSzPct val="100000"/>
-              <a:buFont typeface="Arial"/>
-              <a:buChar char="•"/>
-              <a:defRPr sz="1100">
-                <a:solidFill>
-                  <a:srgbClr val="0E3449"/>
-                </a:solidFill>
-                <a:latin typeface="Inter"/>
-                <a:ea typeface="Inter"/>
-                <a:cs typeface="Inter"/>
-                <a:sym typeface="Inter"/>
-              </a:defRPr>
-            </a:pPr>
+            <a:r>
+              <a:rPr lang="fr-FR" dirty="0" err="1"/>
+              <a:t>target</a:t>
+            </a:r>
+            <a:r>
+              <a:rPr lang="fr-FR" dirty="0"/>
+              <a:t> « probabilité de gagner un match »</a:t>
+            </a:r>
           </a:p>
           <a:p>
             <a:pPr marL="228600" indent="-228600">
@@ -4964,9 +5156,107 @@
               </a:defRPr>
             </a:pPr>
             <a:r>
+              <a:rPr lang="fr-FR" dirty="0"/>
               <a:t>Recherche d’autres sources de données pour mieux jauger les joueurs</a:t>
             </a:r>
           </a:p>
+          <a:p>
+            <a:pPr marL="228600" indent="-228600">
+              <a:lnSpc>
+                <a:spcPct val="120000"/>
+              </a:lnSpc>
+              <a:buClr>
+                <a:srgbClr val="015955"/>
+              </a:buClr>
+              <a:buSzPct val="100000"/>
+              <a:buFont typeface="Arial"/>
+              <a:buChar char="•"/>
+              <a:defRPr sz="1100">
+                <a:solidFill>
+                  <a:srgbClr val="0E3449"/>
+                </a:solidFill>
+                <a:latin typeface="Inter"/>
+                <a:ea typeface="Inter"/>
+                <a:cs typeface="Inter"/>
+                <a:sym typeface="Inter"/>
+              </a:defRPr>
+            </a:pPr>
+            <a:r>
+              <a:rPr lang="fr-FR" dirty="0" err="1"/>
+              <a:t>Ré-entrainement</a:t>
+            </a:r>
+            <a:r>
+              <a:rPr lang="fr-FR" dirty="0"/>
+              <a:t> du modèle après ajout des nouveaux matchs</a:t>
+            </a:r>
+          </a:p>
+          <a:p>
+            <a:pPr marL="171450" indent="-171450">
+              <a:buClr>
+                <a:srgbClr val="000000"/>
+              </a:buClr>
+              <a:buSzPct val="100000"/>
+              <a:buFont typeface="Arial"/>
+              <a:buChar char="•"/>
+              <a:defRPr sz="1100">
+                <a:latin typeface="Inter"/>
+                <a:ea typeface="Inter"/>
+                <a:cs typeface="Inter"/>
+                <a:sym typeface="Inter"/>
+              </a:defRPr>
+            </a:pPr>
+            <a:endParaRPr dirty="0"/>
+          </a:p>
+          <a:p>
+            <a:pPr>
+              <a:defRPr sz="1100">
+                <a:latin typeface="Inter"/>
+                <a:ea typeface="Inter"/>
+                <a:cs typeface="Inter"/>
+                <a:sym typeface="Inter"/>
+              </a:defRPr>
+            </a:pPr>
+            <a:r>
+              <a:rPr dirty="0"/>
+              <a:t> </a:t>
+            </a:r>
+          </a:p>
+        </p:txBody>
+      </p:sp>
+      <p:sp>
+        <p:nvSpPr>
+          <p:cNvPr id="3" name="ZoneTexte 2">
+            <a:extLst>
+              <a:ext uri="{FF2B5EF4-FFF2-40B4-BE49-F238E27FC236}">
+                <a16:creationId xmlns:a16="http://schemas.microsoft.com/office/drawing/2014/main" id="{4810C017-8610-2D04-0EA1-0F209918EB4F}"/>
+              </a:ext>
+            </a:extLst>
+          </p:cNvPr>
+          <p:cNvSpPr txBox="1"/>
+          <p:nvPr/>
+        </p:nvSpPr>
+        <p:spPr>
+          <a:xfrm>
+            <a:off x="1238384" y="1975180"/>
+            <a:ext cx="7036935" cy="281933"/>
+          </a:xfrm>
+          <a:prstGeom prst="rect">
+            <a:avLst/>
+          </a:prstGeom>
+          <a:ln w="12700">
+            <a:miter lim="400000"/>
+          </a:ln>
+          <a:extLst>
+            <a:ext uri="{C572A759-6A51-4108-AA02-DFA0A04FC94B}">
+              <ma14:wrappingTextBoxFlag xmlns="" xmlns:m="http://schemas.openxmlformats.org/officeDocument/2006/math" xmlns:a14="http://schemas.microsoft.com/office/drawing/2010/main" xmlns:ma14="http://schemas.microsoft.com/office/mac/drawingml/2011/main" val="1"/>
+            </a:ext>
+          </a:extLst>
+        </p:spPr>
+        <p:txBody>
+          <a:bodyPr lIns="45718" tIns="45718" rIns="45718" bIns="45718">
+            <a:spAutoFit/>
+          </a:bodyPr>
+          <a:lstStyle/>
           <a:p>
             <a:pPr marL="228600" indent="-228600">
               <a:lnSpc>
@@ -4991,31 +5281,7 @@
                 <a:sym typeface="Inter"/>
               </a:defRPr>
             </a:pPr>
-          </a:p>
-          <a:p>
-            <a:pPr marL="228600" indent="-228600">
-              <a:lnSpc>
-                <a:spcPct val="120000"/>
-              </a:lnSpc>
-              <a:buClr>
-                <a:srgbClr val="015955"/>
-              </a:buClr>
-              <a:buSzPct val="100000"/>
-              <a:buFont typeface="Arial"/>
-              <a:buChar char="•"/>
-              <a:defRPr sz="1100">
-                <a:solidFill>
-                  <a:srgbClr val="0E3449"/>
-                </a:solidFill>
-                <a:latin typeface="Inter"/>
-                <a:ea typeface="Inter"/>
-                <a:cs typeface="Inter"/>
-                <a:sym typeface="Inter"/>
-              </a:defRPr>
-            </a:pPr>
-            <a:r>
-              <a:t>Ré-entrainement du modèle après ajout des nouveaux matchs</a:t>
-            </a:r>
+            <a:endParaRPr dirty="0"/>
           </a:p>
         </p:txBody>
       </p:sp>
@@ -5024,388 +5290,19 @@
   <p:clrMapOvr>
     <a:masterClrMapping/>
   </p:clrMapOvr>
-  <p:transition xmlns:p14="http://schemas.microsoft.com/office/powerpoint/2010/main" spd="med" advClick="1"/>
+  <p:transition spd="med"/>
 </p:sld>
 </file>
 
 <file path=ppt/slides/slide12.xml><?xml version="1.0" encoding="utf-8"?>
-<p:sld xmlns:a="http://schemas.openxmlformats.org/drawingml/2006/main" xmlns:r="http://schemas.openxmlformats.org/officeDocument/2006/relationships" xmlns:p="http://schemas.openxmlformats.org/presentationml/2006/main" xmlns:m="http://schemas.openxmlformats.org/officeDocument/2006/math" xmlns:a14="http://schemas.microsoft.com/office/drawing/2010/main" showMasterSp="1" showMasterPhAnim="1">
-  <p:cSld>
-    <p:spTree>
-      <p:nvGrpSpPr>
-        <p:cNvPr id="1" name=""/>
-        <p:cNvGrpSpPr/>
-        <p:nvPr/>
-      </p:nvGrpSpPr>
-      <p:grpSpPr>
-        <a:xfrm>
-          <a:off x="0" y="0"/>
-          <a:ext cx="0" cy="0"/>
-          <a:chOff x="0" y="0"/>
-          <a:chExt cx="0" cy="0"/>
-        </a:xfrm>
-      </p:grpSpPr>
-      <p:pic>
-        <p:nvPicPr>
-          <p:cNvPr id="351" name="Fond Bayern Munich" descr="Fond Bayern Munich"/>
-          <p:cNvPicPr>
-            <a:picLocks noChangeAspect="1"/>
-          </p:cNvPicPr>
-          <p:nvPr/>
-        </p:nvPicPr>
-        <p:blipFill>
-          <a:blip r:embed="rId2">
-            <a:extLst/>
-          </a:blip>
-          <a:srcRect l="0" t="7813" r="0" b="7812"/>
-          <a:stretch>
-            <a:fillRect/>
-          </a:stretch>
-        </p:blipFill>
-        <p:spPr>
-          <a:xfrm>
-            <a:off x="0" y="0"/>
-            <a:ext cx="9144000" cy="5143500"/>
-          </a:xfrm>
-          <a:prstGeom prst="rect">
-            <a:avLst/>
-          </a:prstGeom>
-          <a:ln w="12700">
-            <a:miter lim="400000"/>
-          </a:ln>
-        </p:spPr>
-      </p:pic>
-      <p:sp>
-        <p:nvSpPr>
-          <p:cNvPr id="352" name="Google Shape;75;p16"/>
-          <p:cNvSpPr txBox="1"/>
-          <p:nvPr>
-            <p:ph type="title"/>
-          </p:nvPr>
-        </p:nvSpPr>
-        <p:spPr>
-          <a:xfrm>
-            <a:off x="1192661" y="403307"/>
-            <a:ext cx="5315108" cy="533106"/>
-          </a:xfrm>
-          <a:prstGeom prst="rect">
-            <a:avLst/>
-          </a:prstGeom>
-        </p:spPr>
-        <p:txBody>
-          <a:bodyPr anchor="ctr"/>
-          <a:lstStyle>
-            <a:lvl1pPr defTabSz="822958">
-              <a:defRPr sz="2200">
-                <a:solidFill>
-                  <a:srgbClr val="0E3449"/>
-                </a:solidFill>
-                <a:latin typeface="Inter SemiBold"/>
-                <a:ea typeface="Inter SemiBold"/>
-                <a:cs typeface="Inter SemiBold"/>
-                <a:sym typeface="Inter SemiBold"/>
-              </a:defRPr>
-            </a:lvl1pPr>
-          </a:lstStyle>
-          <a:p>
-            <a:pPr/>
-            <a:r>
-              <a:t>Conclusion</a:t>
-            </a:r>
-          </a:p>
-        </p:txBody>
-      </p:sp>
-      <p:pic>
-        <p:nvPicPr>
-          <p:cNvPr id="353" name="Google Shape;76;p16" descr="Google Shape;76;p16"/>
-          <p:cNvPicPr>
-            <a:picLocks noChangeAspect="1"/>
-          </p:cNvPicPr>
-          <p:nvPr/>
-        </p:nvPicPr>
-        <p:blipFill>
-          <a:blip r:embed="rId3">
-            <a:extLst/>
-          </a:blip>
-          <a:stretch>
-            <a:fillRect/>
-          </a:stretch>
-        </p:blipFill>
-        <p:spPr>
-          <a:xfrm>
-            <a:off x="463375" y="482852"/>
-            <a:ext cx="576901" cy="385909"/>
-          </a:xfrm>
-          <a:prstGeom prst="rect">
-            <a:avLst/>
-          </a:prstGeom>
-          <a:ln w="12700">
-            <a:miter lim="400000"/>
-          </a:ln>
-        </p:spPr>
-      </p:pic>
-      <p:sp>
-        <p:nvSpPr>
-          <p:cNvPr id="354" name="Google Shape;77;p16"/>
-          <p:cNvSpPr/>
-          <p:nvPr/>
-        </p:nvSpPr>
-        <p:spPr>
-          <a:xfrm>
-            <a:off x="10224" y="4892025"/>
-            <a:ext cx="9144001" cy="251400"/>
-          </a:xfrm>
-          <a:prstGeom prst="rect">
-            <a:avLst/>
-          </a:prstGeom>
-          <a:solidFill>
-            <a:srgbClr val="C3FFFC"/>
-          </a:solidFill>
-          <a:ln w="12700">
-            <a:miter lim="400000"/>
-          </a:ln>
-        </p:spPr>
-        <p:txBody>
-          <a:bodyPr lIns="45718" tIns="45718" rIns="45718" bIns="45718" anchor="ctr"/>
-          <a:lstStyle/>
-          <a:p>
-            <a:pPr>
-              <a:defRPr>
-                <a:latin typeface="+mj-lt"/>
-                <a:ea typeface="+mj-ea"/>
-                <a:cs typeface="+mj-cs"/>
-                <a:sym typeface="Arial"/>
-              </a:defRPr>
-            </a:pPr>
-          </a:p>
-        </p:txBody>
-      </p:sp>
-      <p:sp>
-        <p:nvSpPr>
-          <p:cNvPr id="355" name="ZoneTexte 2"/>
-          <p:cNvSpPr txBox="1"/>
-          <p:nvPr/>
-        </p:nvSpPr>
-        <p:spPr>
-          <a:xfrm>
-            <a:off x="1238383" y="1937023"/>
-            <a:ext cx="6974090" cy="1907537"/>
-          </a:xfrm>
-          <a:prstGeom prst="rect">
-            <a:avLst/>
-          </a:prstGeom>
-          <a:ln w="12700">
-            <a:miter lim="400000"/>
-          </a:ln>
-          <a:extLst>
-            <a:ext uri="{C572A759-6A51-4108-AA02-DFA0A04FC94B}">
-              <ma14:wrappingTextBoxFlag xmlns:ma14="http://schemas.microsoft.com/office/mac/drawingml/2011/main" val="1"/>
-            </a:ext>
-          </a:extLst>
-        </p:spPr>
-        <p:txBody>
-          <a:bodyPr lIns="45718" tIns="45718" rIns="45718" bIns="45718">
-            <a:spAutoFit/>
-          </a:bodyPr>
-          <a:lstStyle/>
-          <a:p>
-            <a:pPr marL="171450" indent="-171450">
-              <a:buClr>
-                <a:srgbClr val="000000"/>
-              </a:buClr>
-              <a:buSzPct val="100000"/>
-              <a:buFont typeface="Arial"/>
-              <a:buChar char="•"/>
-              <a:defRPr sz="1100">
-                <a:latin typeface="Inter"/>
-                <a:ea typeface="Inter"/>
-                <a:cs typeface="Inter"/>
-                <a:sym typeface="Inter"/>
-              </a:defRPr>
-            </a:pPr>
-            <a:r>
-              <a:t>Besoin : assister un entraineur de foot pour former son équipe</a:t>
-            </a:r>
-          </a:p>
-          <a:p>
-            <a:pPr marL="171450" indent="-171450">
-              <a:buClr>
-                <a:srgbClr val="000000"/>
-              </a:buClr>
-              <a:buSzPct val="100000"/>
-              <a:buFont typeface="Arial"/>
-              <a:buChar char="•"/>
-              <a:defRPr sz="1100">
-                <a:latin typeface="Inter"/>
-                <a:ea typeface="Inter"/>
-                <a:cs typeface="Inter"/>
-                <a:sym typeface="Inter"/>
-              </a:defRPr>
-            </a:pPr>
-          </a:p>
-          <a:p>
-            <a:pPr marL="171450" indent="-171450">
-              <a:buClr>
-                <a:srgbClr val="000000"/>
-              </a:buClr>
-              <a:buSzPct val="100000"/>
-              <a:buFont typeface="Arial"/>
-              <a:buChar char="•"/>
-              <a:defRPr sz="1100">
-                <a:latin typeface="Inter"/>
-                <a:ea typeface="Inter"/>
-                <a:cs typeface="Inter"/>
-                <a:sym typeface="Inter"/>
-              </a:defRPr>
-            </a:pPr>
-          </a:p>
-          <a:p>
-            <a:pPr marL="171450" indent="-171450">
-              <a:buClr>
-                <a:srgbClr val="000000"/>
-              </a:buClr>
-              <a:buSzPct val="100000"/>
-              <a:buFont typeface="Arial"/>
-              <a:buChar char="•"/>
-              <a:defRPr sz="1100">
-                <a:latin typeface="Inter"/>
-                <a:ea typeface="Inter"/>
-                <a:cs typeface="Inter"/>
-                <a:sym typeface="Inter"/>
-              </a:defRPr>
-            </a:pPr>
-            <a:r>
-              <a:t>Proposition : une application pour l’aider à choisir ses joueurs</a:t>
-            </a:r>
-          </a:p>
-          <a:p>
-            <a:pPr marL="171450" indent="-171450">
-              <a:buClr>
-                <a:srgbClr val="000000"/>
-              </a:buClr>
-              <a:buSzPct val="100000"/>
-              <a:buFont typeface="Arial"/>
-              <a:buChar char="•"/>
-              <a:defRPr sz="1100">
-                <a:latin typeface="Inter"/>
-                <a:ea typeface="Inter"/>
-                <a:cs typeface="Inter"/>
-                <a:sym typeface="Inter"/>
-              </a:defRPr>
-            </a:pPr>
-          </a:p>
-          <a:p>
-            <a:pPr>
-              <a:defRPr sz="1100">
-                <a:latin typeface="Inter"/>
-                <a:ea typeface="Inter"/>
-                <a:cs typeface="Inter"/>
-                <a:sym typeface="Inter"/>
-              </a:defRPr>
-            </a:pPr>
-          </a:p>
-          <a:p>
-            <a:pPr marL="171450" indent="-171450">
-              <a:buClr>
-                <a:srgbClr val="000000"/>
-              </a:buClr>
-              <a:buSzPct val="100000"/>
-              <a:buFont typeface="Arial"/>
-              <a:buChar char="•"/>
-              <a:defRPr sz="1100">
-                <a:latin typeface="Inter"/>
-                <a:ea typeface="Inter"/>
-                <a:cs typeface="Inter"/>
-                <a:sym typeface="Inter"/>
-              </a:defRPr>
-            </a:pPr>
-            <a:r>
-              <a:t>Plusieurs perspectives d’évolution</a:t>
-            </a:r>
-          </a:p>
-          <a:p>
-            <a:pPr marL="171450" indent="-171450">
-              <a:buClr>
-                <a:srgbClr val="000000"/>
-              </a:buClr>
-              <a:buSzPct val="100000"/>
-              <a:buFont typeface="Arial"/>
-              <a:buChar char="•"/>
-              <a:defRPr sz="1100">
-                <a:latin typeface="Inter"/>
-                <a:ea typeface="Inter"/>
-                <a:cs typeface="Inter"/>
-                <a:sym typeface="Inter"/>
-              </a:defRPr>
-            </a:pPr>
-          </a:p>
-          <a:p>
-            <a:pPr marL="171450" indent="-171450">
-              <a:buClr>
-                <a:srgbClr val="000000"/>
-              </a:buClr>
-              <a:buSzPct val="100000"/>
-              <a:buFont typeface="Arial"/>
-              <a:buChar char="•"/>
-              <a:defRPr sz="1100">
-                <a:latin typeface="Inter"/>
-                <a:ea typeface="Inter"/>
-                <a:cs typeface="Inter"/>
-                <a:sym typeface="Inter"/>
-              </a:defRPr>
-            </a:pPr>
-          </a:p>
-          <a:p>
-            <a:pPr marL="171450" indent="-171450">
-              <a:buClr>
-                <a:srgbClr val="000000"/>
-              </a:buClr>
-              <a:buSzPct val="100000"/>
-              <a:buFont typeface="Arial"/>
-              <a:buChar char="•"/>
-              <a:defRPr sz="1100">
-                <a:latin typeface="Inter"/>
-                <a:ea typeface="Inter"/>
-                <a:cs typeface="Inter"/>
-                <a:sym typeface="Inter"/>
-              </a:defRPr>
-            </a:pPr>
-            <a:r>
-              <a:t>Point fort du projet : ETL, EDA, comparaison modèles ML, intégration, déploiement sur Render</a:t>
-            </a:r>
-          </a:p>
-          <a:p>
-            <a:pPr>
-              <a:defRPr sz="1100">
-                <a:latin typeface="Inter"/>
-                <a:ea typeface="Inter"/>
-                <a:cs typeface="Inter"/>
-                <a:sym typeface="Inter"/>
-              </a:defRPr>
-            </a:pPr>
-            <a:r>
-              <a:t> </a:t>
-            </a:r>
-          </a:p>
-        </p:txBody>
-      </p:sp>
-    </p:spTree>
-  </p:cSld>
-  <p:clrMapOvr>
-    <a:masterClrMapping/>
-  </p:clrMapOvr>
-  <p:transition xmlns:p14="http://schemas.microsoft.com/office/powerpoint/2010/main" spd="med" advClick="1"/>
-</p:sld>
-</file>
-
-<file path=ppt/slides/slide13.xml><?xml version="1.0" encoding="utf-8"?>
-<p:sld xmlns:a="http://schemas.openxmlformats.org/drawingml/2006/main" xmlns:r="http://schemas.openxmlformats.org/officeDocument/2006/relationships" xmlns:p="http://schemas.openxmlformats.org/presentationml/2006/main" xmlns:m="http://schemas.openxmlformats.org/officeDocument/2006/math" xmlns:a14="http://schemas.microsoft.com/office/drawing/2010/main" showMasterSp="1" showMasterPhAnim="1">
+<p:sld xmlns:a="http://schemas.openxmlformats.org/drawingml/2006/main" xmlns:r="http://schemas.openxmlformats.org/officeDocument/2006/relationships" xmlns:p="http://schemas.openxmlformats.org/presentationml/2006/main">
   <p:cSld>
     <p:bg>
       <p:bgPr>
         <a:solidFill>
           <a:srgbClr val="00DBD0"/>
         </a:solidFill>
+        <a:effectLst/>
       </p:bgPr>
     </p:bg>
     <p:spTree>
@@ -5425,7 +5322,9 @@
       <p:sp>
         <p:nvSpPr>
           <p:cNvPr id="357" name="Google Shape;110;p21"/>
-          <p:cNvSpPr txBox="1"/>
+          <p:cNvSpPr txBox="1">
+            <a:spLocks noGrp="1"/>
+          </p:cNvSpPr>
           <p:nvPr>
             <p:ph type="title"/>
           </p:nvPr>
@@ -5455,7 +5354,6 @@
             </a:lvl1pPr>
           </a:lstStyle>
           <a:p>
-            <a:pPr/>
             <a:r>
               <a:t>Any questions ?</a:t>
             </a:r>
@@ -5471,9 +5369,7 @@
           <p:nvPr/>
         </p:nvPicPr>
         <p:blipFill>
-          <a:blip r:embed="rId2">
-            <a:extLst/>
-          </a:blip>
+          <a:blip r:embed="rId2"/>
           <a:stretch>
             <a:fillRect/>
           </a:stretch>
@@ -5500,9 +5396,7 @@
           <p:nvPr/>
         </p:nvPicPr>
         <p:blipFill>
-          <a:blip r:embed="rId3">
-            <a:extLst/>
-          </a:blip>
+          <a:blip r:embed="rId3"/>
           <a:stretch>
             <a:fillRect/>
           </a:stretch>
@@ -5525,12 +5419,12 @@
   <p:clrMapOvr>
     <a:masterClrMapping/>
   </p:clrMapOvr>
-  <p:transition xmlns:p14="http://schemas.microsoft.com/office/powerpoint/2010/main" spd="med" advClick="1"/>
+  <p:transition spd="med"/>
 </p:sld>
 </file>
 
-<file path=ppt/slides/slide14.xml><?xml version="1.0" encoding="utf-8"?>
-<p:sld xmlns:a="http://schemas.openxmlformats.org/drawingml/2006/main" xmlns:r="http://schemas.openxmlformats.org/officeDocument/2006/relationships" xmlns:p="http://schemas.openxmlformats.org/presentationml/2006/main" xmlns:m="http://schemas.openxmlformats.org/officeDocument/2006/math" xmlns:a14="http://schemas.microsoft.com/office/drawing/2010/main" showMasterSp="1" showMasterPhAnim="1">
+<file path=ppt/slides/slide13.xml><?xml version="1.0" encoding="utf-8"?>
+<p:sld xmlns:a="http://schemas.openxmlformats.org/drawingml/2006/main" xmlns:r="http://schemas.openxmlformats.org/officeDocument/2006/relationships" xmlns:p="http://schemas.openxmlformats.org/presentationml/2006/main">
   <p:cSld>
     <p:spTree>
       <p:nvGrpSpPr>
@@ -5557,9 +5451,8 @@
         <p:blipFill>
           <a:blip r:embed="rId2">
             <a:alphaModFix amt="22000"/>
-            <a:extLst/>
           </a:blip>
-          <a:srcRect l="0" t="21875" r="0" b="21875"/>
+          <a:srcRect t="21875" b="21875"/>
           <a:stretch>
             <a:fillRect/>
           </a:stretch>
@@ -5580,7 +5473,9 @@
       <p:sp>
         <p:nvSpPr>
           <p:cNvPr id="362" name="Google Shape;75;p16"/>
-          <p:cNvSpPr txBox="1"/>
+          <p:cNvSpPr txBox="1">
+            <a:spLocks noGrp="1"/>
+          </p:cNvSpPr>
           <p:nvPr>
             <p:ph type="title"/>
           </p:nvPr>
@@ -5610,7 +5505,6 @@
             </a:lvl1pPr>
           </a:lstStyle>
           <a:p>
-            <a:pPr/>
             <a:r>
               <a:t>Annexes</a:t>
             </a:r>
@@ -5626,9 +5520,7 @@
           <p:nvPr/>
         </p:nvPicPr>
         <p:blipFill>
-          <a:blip r:embed="rId3">
-            <a:extLst/>
-          </a:blip>
+          <a:blip r:embed="rId3"/>
           <a:stretch>
             <a:fillRect/>
           </a:stretch>
@@ -5679,6 +5571,7 @@
                 <a:sym typeface="Arial"/>
               </a:defRPr>
             </a:pPr>
+            <a:endParaRPr/>
           </a:p>
         </p:txBody>
       </p:sp>
@@ -5701,7 +5594,7 @@
           </a:ln>
           <a:extLst>
             <a:ext uri="{C572A759-6A51-4108-AA02-DFA0A04FC94B}">
-              <ma14:wrappingTextBoxFlag xmlns:ma14="http://schemas.microsoft.com/office/mac/drawingml/2011/main" val="1"/>
+              <ma14:wrappingTextBoxFlag xmlns:ma14="http://schemas.microsoft.com/office/mac/drawingml/2011/main" xmlns:a14="http://schemas.microsoft.com/office/drawing/2010/main" xmlns:m="http://schemas.openxmlformats.org/officeDocument/2006/math" xmlns="" val="1"/>
             </a:ext>
           </a:extLst>
         </p:spPr>
@@ -5718,7 +5611,7 @@
               <a:spcBef>
                 <a:spcPts val="500"/>
               </a:spcBef>
-              <a:defRPr b="1" spc="60" sz="1100">
+              <a:defRPr sz="1100" b="1" spc="60">
                 <a:solidFill>
                   <a:srgbClr val="015955"/>
                 </a:solidFill>
@@ -5806,7 +5699,7 @@
           </a:ln>
           <a:extLst>
             <a:ext uri="{C572A759-6A51-4108-AA02-DFA0A04FC94B}">
-              <ma14:wrappingTextBoxFlag xmlns:ma14="http://schemas.microsoft.com/office/mac/drawingml/2011/main" val="1"/>
+              <ma14:wrappingTextBoxFlag xmlns:ma14="http://schemas.microsoft.com/office/mac/drawingml/2011/main" xmlns:a14="http://schemas.microsoft.com/office/drawing/2010/main" xmlns:m="http://schemas.openxmlformats.org/officeDocument/2006/math" xmlns="" val="1"/>
             </a:ext>
           </a:extLst>
         </p:spPr>
@@ -5823,7 +5716,7 @@
               <a:spcBef>
                 <a:spcPts val="500"/>
               </a:spcBef>
-              <a:defRPr b="1" spc="60" sz="1100">
+              <a:defRPr sz="1100" b="1" spc="60">
                 <a:solidFill>
                   <a:srgbClr val="015955"/>
                 </a:solidFill>
@@ -5925,12 +5818,12 @@
   <p:clrMapOvr>
     <a:masterClrMapping/>
   </p:clrMapOvr>
-  <p:transition xmlns:p14="http://schemas.microsoft.com/office/powerpoint/2010/main" spd="med" advClick="1"/>
+  <p:transition spd="med"/>
 </p:sld>
 </file>
 
-<file path=ppt/slides/slide15.xml><?xml version="1.0" encoding="utf-8"?>
-<p:sld xmlns:a="http://schemas.openxmlformats.org/drawingml/2006/main" xmlns:r="http://schemas.openxmlformats.org/officeDocument/2006/relationships" xmlns:p="http://schemas.openxmlformats.org/presentationml/2006/main" xmlns:m="http://schemas.openxmlformats.org/officeDocument/2006/math" xmlns:a14="http://schemas.microsoft.com/office/drawing/2010/main" showMasterSp="1" showMasterPhAnim="1">
+<file path=ppt/slides/slide14.xml><?xml version="1.0" encoding="utf-8"?>
+<p:sld xmlns:a="http://schemas.openxmlformats.org/drawingml/2006/main" xmlns:r="http://schemas.openxmlformats.org/officeDocument/2006/relationships" xmlns:p="http://schemas.openxmlformats.org/presentationml/2006/main">
   <p:cSld>
     <p:spTree>
       <p:nvGrpSpPr>
@@ -5949,7 +5842,9 @@
       <p:sp>
         <p:nvSpPr>
           <p:cNvPr id="368" name="Google Shape;75;p16"/>
-          <p:cNvSpPr txBox="1"/>
+          <p:cNvSpPr txBox="1">
+            <a:spLocks noGrp="1"/>
+          </p:cNvSpPr>
           <p:nvPr>
             <p:ph type="title"/>
           </p:nvPr>
@@ -5979,7 +5874,6 @@
             </a:lvl1pPr>
           </a:lstStyle>
           <a:p>
-            <a:pPr/>
             <a:r>
               <a:t>Architecture – templates formes</a:t>
             </a:r>
@@ -5995,9 +5889,7 @@
           <p:nvPr/>
         </p:nvPicPr>
         <p:blipFill>
-          <a:blip r:embed="rId2">
-            <a:extLst/>
-          </a:blip>
+          <a:blip r:embed="rId2"/>
           <a:stretch>
             <a:fillRect/>
           </a:stretch>
@@ -6048,6 +5940,7 @@
                 <a:sym typeface="Arial"/>
               </a:defRPr>
             </a:pPr>
+            <a:endParaRPr/>
           </a:p>
         </p:txBody>
       </p:sp>
@@ -6060,9 +5953,7 @@
           <p:nvPr/>
         </p:nvPicPr>
         <p:blipFill>
-          <a:blip r:embed="rId3">
-            <a:extLst/>
-          </a:blip>
+          <a:blip r:embed="rId3"/>
           <a:stretch>
             <a:fillRect/>
           </a:stretch>
@@ -6103,9 +5994,7 @@
             <p:nvPr/>
           </p:nvPicPr>
           <p:blipFill>
-            <a:blip r:embed="rId4">
-              <a:extLst/>
-            </a:blip>
+            <a:blip r:embed="rId4"/>
             <a:stretch>
               <a:fillRect/>
             </a:stretch>
@@ -6147,7 +6036,7 @@
             <a:effectLst/>
             <a:extLst>
               <a:ext uri="{C572A759-6A51-4108-AA02-DFA0A04FC94B}">
-                <ma14:wrappingTextBoxFlag xmlns:ma14="http://schemas.microsoft.com/office/mac/drawingml/2011/main" val="1"/>
+                <ma14:wrappingTextBoxFlag xmlns:ma14="http://schemas.microsoft.com/office/mac/drawingml/2011/main" xmlns:a14="http://schemas.microsoft.com/office/drawing/2010/main" xmlns:m="http://schemas.openxmlformats.org/officeDocument/2006/math" xmlns="" val="1"/>
               </a:ext>
             </a:extLst>
           </p:spPr>
@@ -6166,7 +6055,6 @@
               </a:lvl1pPr>
             </a:lstStyle>
             <a:p>
-              <a:pPr/>
               <a:r>
                 <a:t>Tracking</a:t>
               </a:r>
@@ -6197,9 +6085,7 @@
             <p:nvPr/>
           </p:nvPicPr>
           <p:blipFill>
-            <a:blip r:embed="rId4">
-              <a:extLst/>
-            </a:blip>
+            <a:blip r:embed="rId4"/>
             <a:stretch>
               <a:fillRect/>
             </a:stretch>
@@ -6241,7 +6127,7 @@
             <a:effectLst/>
             <a:extLst>
               <a:ext uri="{C572A759-6A51-4108-AA02-DFA0A04FC94B}">
-                <ma14:wrappingTextBoxFlag xmlns:ma14="http://schemas.microsoft.com/office/mac/drawingml/2011/main" val="1"/>
+                <ma14:wrappingTextBoxFlag xmlns:ma14="http://schemas.microsoft.com/office/mac/drawingml/2011/main" xmlns:a14="http://schemas.microsoft.com/office/drawing/2010/main" xmlns:m="http://schemas.openxmlformats.org/officeDocument/2006/math" xmlns="" val="1"/>
               </a:ext>
             </a:extLst>
           </p:spPr>
@@ -6260,7 +6146,6 @@
               </a:lvl1pPr>
             </a:lstStyle>
             <a:p>
-              <a:pPr/>
               <a:r>
                 <a:t>Model</a:t>
               </a:r>
@@ -6277,9 +6162,7 @@
           <p:nvPr/>
         </p:nvPicPr>
         <p:blipFill>
-          <a:blip r:embed="rId5">
-            <a:extLst/>
-          </a:blip>
+          <a:blip r:embed="rId5"/>
           <a:stretch>
             <a:fillRect/>
           </a:stretch>
@@ -6306,9 +6189,7 @@
           <p:nvPr/>
         </p:nvPicPr>
         <p:blipFill>
-          <a:blip r:embed="rId6">
-            <a:extLst/>
-          </a:blip>
+          <a:blip r:embed="rId6"/>
           <a:stretch>
             <a:fillRect/>
           </a:stretch>
@@ -6335,9 +6216,7 @@
           <p:nvPr/>
         </p:nvPicPr>
         <p:blipFill>
-          <a:blip r:embed="rId7">
-            <a:extLst/>
-          </a:blip>
+          <a:blip r:embed="rId7"/>
           <a:stretch>
             <a:fillRect/>
           </a:stretch>
@@ -6364,9 +6243,7 @@
           <p:nvPr/>
         </p:nvPicPr>
         <p:blipFill>
-          <a:blip r:embed="rId8">
-            <a:extLst/>
-          </a:blip>
+          <a:blip r:embed="rId8"/>
           <a:stretch>
             <a:fillRect/>
           </a:stretch>
@@ -6393,9 +6270,7 @@
           <p:nvPr/>
         </p:nvPicPr>
         <p:blipFill>
-          <a:blip r:embed="rId9">
-            <a:extLst/>
-          </a:blip>
+          <a:blip r:embed="rId9"/>
           <a:stretch>
             <a:fillRect/>
           </a:stretch>
@@ -6422,9 +6297,7 @@
           <p:nvPr/>
         </p:nvPicPr>
         <p:blipFill>
-          <a:blip r:embed="rId10">
-            <a:extLst/>
-          </a:blip>
+          <a:blip r:embed="rId10"/>
           <a:stretch>
             <a:fillRect/>
           </a:stretch>
@@ -6451,9 +6324,7 @@
           <p:nvPr/>
         </p:nvPicPr>
         <p:blipFill>
-          <a:blip r:embed="rId11">
-            <a:extLst/>
-          </a:blip>
+          <a:blip r:embed="rId11"/>
           <a:stretch>
             <a:fillRect/>
           </a:stretch>
@@ -6480,9 +6351,7 @@
           <p:nvPr/>
         </p:nvPicPr>
         <p:blipFill>
-          <a:blip r:embed="rId12">
-            <a:extLst/>
-          </a:blip>
+          <a:blip r:embed="rId12"/>
           <a:stretch>
             <a:fillRect/>
           </a:stretch>
@@ -6509,9 +6378,7 @@
           <p:nvPr/>
         </p:nvPicPr>
         <p:blipFill>
-          <a:blip r:embed="rId13">
-            <a:extLst/>
-          </a:blip>
+          <a:blip r:embed="rId13"/>
           <a:stretch>
             <a:fillRect/>
           </a:stretch>
@@ -6538,9 +6405,7 @@
           <p:nvPr/>
         </p:nvPicPr>
         <p:blipFill>
-          <a:blip r:embed="rId14">
-            <a:extLst/>
-          </a:blip>
+          <a:blip r:embed="rId14"/>
           <a:stretch>
             <a:fillRect/>
           </a:stretch>
@@ -6567,9 +6432,7 @@
           <p:nvPr/>
         </p:nvPicPr>
         <p:blipFill>
-          <a:blip r:embed="rId15">
-            <a:extLst/>
-          </a:blip>
+          <a:blip r:embed="rId15"/>
           <a:stretch>
             <a:fillRect/>
           </a:stretch>
@@ -6596,9 +6459,7 @@
           <p:nvPr/>
         </p:nvPicPr>
         <p:blipFill>
-          <a:blip r:embed="rId16">
-            <a:extLst/>
-          </a:blip>
+          <a:blip r:embed="rId16"/>
           <a:stretch>
             <a:fillRect/>
           </a:stretch>
@@ -6625,9 +6486,7 @@
           <p:nvPr/>
         </p:nvPicPr>
         <p:blipFill>
-          <a:blip r:embed="rId17">
-            <a:extLst/>
-          </a:blip>
+          <a:blip r:embed="rId17"/>
           <a:stretch>
             <a:fillRect/>
           </a:stretch>
@@ -6654,9 +6513,7 @@
           <p:nvPr/>
         </p:nvPicPr>
         <p:blipFill>
-          <a:blip r:embed="rId18">
-            <a:extLst/>
-          </a:blip>
+          <a:blip r:embed="rId18"/>
           <a:stretch>
             <a:fillRect/>
           </a:stretch>
@@ -6679,12 +6536,12 @@
   <p:clrMapOvr>
     <a:masterClrMapping/>
   </p:clrMapOvr>
-  <p:transition xmlns:p14="http://schemas.microsoft.com/office/powerpoint/2010/main" spd="med" advClick="1"/>
+  <p:transition spd="med"/>
 </p:sld>
 </file>
 
 <file path=ppt/slides/slide2.xml><?xml version="1.0" encoding="utf-8"?>
-<p:sld xmlns:a="http://schemas.openxmlformats.org/drawingml/2006/main" xmlns:r="http://schemas.openxmlformats.org/officeDocument/2006/relationships" xmlns:p="http://schemas.openxmlformats.org/presentationml/2006/main" xmlns:m="http://schemas.openxmlformats.org/officeDocument/2006/math" xmlns:a14="http://schemas.microsoft.com/office/drawing/2010/main" showMasterSp="1" showMasterPhAnim="1">
+<p:sld xmlns:a="http://schemas.openxmlformats.org/drawingml/2006/main" xmlns:r="http://schemas.openxmlformats.org/officeDocument/2006/relationships" xmlns:p="http://schemas.openxmlformats.org/presentationml/2006/main">
   <p:cSld>
     <p:spTree>
       <p:nvGrpSpPr>
@@ -6733,13 +6590,16 @@
                 <a:sym typeface="Arial"/>
               </a:defRPr>
             </a:pPr>
+            <a:endParaRPr/>
           </a:p>
         </p:txBody>
       </p:sp>
       <p:sp>
         <p:nvSpPr>
           <p:cNvPr id="123" name="Google Shape;62;p14"/>
-          <p:cNvSpPr txBox="1"/>
+          <p:cNvSpPr txBox="1">
+            <a:spLocks noGrp="1"/>
+          </p:cNvSpPr>
           <p:nvPr>
             <p:ph type="title"/>
           </p:nvPr>
@@ -6784,6 +6644,7 @@
                 <a:sym typeface="Inter"/>
               </a:defRPr>
             </a:pPr>
+            <a:endParaRPr/>
           </a:p>
           <a:p>
             <a:pPr>
@@ -6797,6 +6658,7 @@
                 <a:sym typeface="Inter"/>
               </a:defRPr>
             </a:pPr>
+            <a:endParaRPr/>
           </a:p>
           <a:p>
             <a:pPr>
@@ -6810,6 +6672,7 @@
                 <a:sym typeface="Inter"/>
               </a:defRPr>
             </a:pPr>
+            <a:endParaRPr/>
           </a:p>
           <a:p>
             <a:pPr>
@@ -6870,9 +6733,7 @@
           <p:nvPr/>
         </p:nvPicPr>
         <p:blipFill>
-          <a:blip r:embed="rId2">
-            <a:extLst/>
-          </a:blip>
+          <a:blip r:embed="rId2"/>
           <a:stretch>
             <a:fillRect/>
           </a:stretch>
@@ -6899,9 +6760,7 @@
           <p:nvPr/>
         </p:nvPicPr>
         <p:blipFill>
-          <a:blip r:embed="rId3">
-            <a:extLst/>
-          </a:blip>
+          <a:blip r:embed="rId3"/>
           <a:stretch>
             <a:fillRect/>
           </a:stretch>
@@ -6924,12 +6783,12 @@
   <p:clrMapOvr>
     <a:masterClrMapping/>
   </p:clrMapOvr>
-  <p:transition xmlns:p14="http://schemas.microsoft.com/office/powerpoint/2010/main" spd="med" advClick="1"/>
+  <p:transition spd="med"/>
 </p:sld>
 </file>
 
 <file path=ppt/slides/slide3.xml><?xml version="1.0" encoding="utf-8"?>
-<p:sld xmlns:a="http://schemas.openxmlformats.org/drawingml/2006/main" xmlns:r="http://schemas.openxmlformats.org/officeDocument/2006/relationships" xmlns:p="http://schemas.openxmlformats.org/presentationml/2006/main" xmlns:m="http://schemas.openxmlformats.org/officeDocument/2006/math" xmlns:a14="http://schemas.microsoft.com/office/drawing/2010/main" showMasterSp="1" showMasterPhAnim="1">
+<p:sld xmlns:a="http://schemas.openxmlformats.org/drawingml/2006/main" xmlns:r="http://schemas.openxmlformats.org/officeDocument/2006/relationships" xmlns:p="http://schemas.openxmlformats.org/presentationml/2006/main">
   <p:cSld>
     <p:spTree>
       <p:nvGrpSpPr>
@@ -6948,7 +6807,9 @@
       <p:sp>
         <p:nvSpPr>
           <p:cNvPr id="127" name="title"/>
-          <p:cNvSpPr txBox="1"/>
+          <p:cNvSpPr txBox="1">
+            <a:spLocks noGrp="1"/>
+          </p:cNvSpPr>
           <p:nvPr>
             <p:ph type="title"/>
           </p:nvPr>
@@ -6978,7 +6839,6 @@
             </a:lvl1pPr>
           </a:lstStyle>
           <a:p>
-            <a:pPr/>
             <a:r>
               <a:t>Pitch</a:t>
             </a:r>
@@ -6994,9 +6854,7 @@
           <p:nvPr/>
         </p:nvPicPr>
         <p:blipFill>
-          <a:blip r:embed="rId2">
-            <a:extLst/>
-          </a:blip>
+          <a:blip r:embed="rId2"/>
           <a:stretch>
             <a:fillRect/>
           </a:stretch>
@@ -7047,6 +6905,7 @@
                 <a:sym typeface="Arial"/>
               </a:defRPr>
             </a:pPr>
+            <a:endParaRPr/>
           </a:p>
         </p:txBody>
       </p:sp>
@@ -7073,7 +6932,7 @@
             <a:miter lim="400000"/>
           </a:ln>
           <a:effectLst>
-            <a:outerShdw sx="100000" sy="100000" kx="0" ky="0" algn="b" rotWithShape="0" blurRad="88900" dist="26000" dir="5400000">
+            <a:outerShdw blurRad="88900" dist="26000" dir="5400000" rotWithShape="0">
               <a:srgbClr val="0E3449">
                 <a:alpha val="12000"/>
               </a:srgbClr>
@@ -7092,6 +6951,7 @@
                 <a:sym typeface="Arial"/>
               </a:defRPr>
             </a:pPr>
+            <a:endParaRPr/>
           </a:p>
         </p:txBody>
       </p:sp>
@@ -7128,6 +6988,7 @@
                 <a:sym typeface="Arial"/>
               </a:defRPr>
             </a:pPr>
+            <a:endParaRPr/>
           </a:p>
         </p:txBody>
       </p:sp>
@@ -7140,9 +7001,7 @@
           <p:nvPr/>
         </p:nvPicPr>
         <p:blipFill>
-          <a:blip r:embed="rId3">
-            <a:extLst/>
-          </a:blip>
+          <a:blip r:embed="rId3"/>
           <a:stretch>
             <a:fillRect/>
           </a:stretch>
@@ -7179,13 +7038,13 @@
           </a:ln>
           <a:extLst>
             <a:ext uri="{C572A759-6A51-4108-AA02-DFA0A04FC94B}">
-              <ma14:wrappingTextBoxFlag xmlns:ma14="http://schemas.microsoft.com/office/mac/drawingml/2011/main" val="1"/>
+              <ma14:wrappingTextBoxFlag xmlns:ma14="http://schemas.microsoft.com/office/mac/drawingml/2011/main" xmlns:a14="http://schemas.microsoft.com/office/drawing/2010/main" xmlns:m="http://schemas.openxmlformats.org/officeDocument/2006/math" xmlns="" val="1"/>
             </a:ext>
           </a:extLst>
         </p:spPr>
         <p:txBody>
           <a:bodyPr lIns="18000" tIns="18000" rIns="18000" bIns="18000" anchor="ctr">
-            <a:normAutofit fontScale="100000" lnSpcReduction="0"/>
+            <a:normAutofit/>
           </a:bodyPr>
           <a:lstStyle/>
           <a:p>
@@ -7193,7 +7052,7 @@
               <a:spcBef>
                 <a:spcPts val="300"/>
               </a:spcBef>
-              <a:defRPr b="1" sz="1300">
+              <a:defRPr sz="1300" b="1">
                 <a:solidFill>
                   <a:srgbClr val="0E3449"/>
                 </a:solidFill>
@@ -7212,7 +7071,7 @@
               <a:spcBef>
                 <a:spcPts val="300"/>
               </a:spcBef>
-              <a:defRPr b="1" sz="1300">
+              <a:defRPr sz="1300" b="1">
                 <a:solidFill>
                   <a:srgbClr val="0E3449"/>
                 </a:solidFill>
@@ -7222,6 +7081,7 @@
                 <a:sym typeface="Inter SemiBold"/>
               </a:defRPr>
             </a:pPr>
+            <a:endParaRPr/>
           </a:p>
           <a:p>
             <a:pPr>
@@ -7267,7 +7127,7 @@
             <a:miter lim="400000"/>
           </a:ln>
           <a:effectLst>
-            <a:outerShdw sx="100000" sy="100000" kx="0" ky="0" algn="b" rotWithShape="0" blurRad="88900" dist="26000" dir="5400000">
+            <a:outerShdw blurRad="88900" dist="26000" dir="5400000" rotWithShape="0">
               <a:srgbClr val="0E3449">
                 <a:alpha val="12000"/>
               </a:srgbClr>
@@ -7286,6 +7146,7 @@
                 <a:sym typeface="Arial"/>
               </a:defRPr>
             </a:pPr>
+            <a:endParaRPr/>
           </a:p>
         </p:txBody>
       </p:sp>
@@ -7312,7 +7173,7 @@
             <a:miter lim="400000"/>
           </a:ln>
           <a:effectLst>
-            <a:outerShdw sx="100000" sy="100000" kx="0" ky="0" algn="b" rotWithShape="0" blurRad="88900" dist="26000" dir="5400000">
+            <a:outerShdw blurRad="88900" dist="26000" dir="5400000" rotWithShape="0">
               <a:srgbClr val="0E3449">
                 <a:alpha val="12000"/>
               </a:srgbClr>
@@ -7331,6 +7192,7 @@
                 <a:sym typeface="Arial"/>
               </a:defRPr>
             </a:pPr>
+            <a:endParaRPr/>
           </a:p>
         </p:txBody>
       </p:sp>
@@ -7367,6 +7229,7 @@
                 <a:sym typeface="Arial"/>
               </a:defRPr>
             </a:pPr>
+            <a:endParaRPr/>
           </a:p>
         </p:txBody>
       </p:sp>
@@ -7403,6 +7266,7 @@
                 <a:sym typeface="Arial"/>
               </a:defRPr>
             </a:pPr>
+            <a:endParaRPr/>
           </a:p>
         </p:txBody>
       </p:sp>
@@ -7415,9 +7279,7 @@
           <p:nvPr/>
         </p:nvPicPr>
         <p:blipFill>
-          <a:blip r:embed="rId4">
-            <a:extLst/>
-          </a:blip>
+          <a:blip r:embed="rId4"/>
           <a:stretch>
             <a:fillRect/>
           </a:stretch>
@@ -7444,9 +7306,7 @@
           <p:nvPr/>
         </p:nvPicPr>
         <p:blipFill>
-          <a:blip r:embed="rId5">
-            <a:extLst/>
-          </a:blip>
+          <a:blip r:embed="rId5"/>
           <a:stretch>
             <a:fillRect/>
           </a:stretch>
@@ -7483,13 +7343,13 @@
           </a:ln>
           <a:extLst>
             <a:ext uri="{C572A759-6A51-4108-AA02-DFA0A04FC94B}">
-              <ma14:wrappingTextBoxFlag xmlns:ma14="http://schemas.microsoft.com/office/mac/drawingml/2011/main" val="1"/>
+              <ma14:wrappingTextBoxFlag xmlns:ma14="http://schemas.microsoft.com/office/mac/drawingml/2011/main" xmlns:a14="http://schemas.microsoft.com/office/drawing/2010/main" xmlns:m="http://schemas.openxmlformats.org/officeDocument/2006/math" xmlns="" val="1"/>
             </a:ext>
           </a:extLst>
         </p:spPr>
         <p:txBody>
           <a:bodyPr lIns="18000" tIns="18000" rIns="18000" bIns="18000" anchor="ctr">
-            <a:normAutofit fontScale="100000" lnSpcReduction="0"/>
+            <a:normAutofit/>
           </a:bodyPr>
           <a:lstStyle>
             <a:lvl1pPr>
@@ -7505,7 +7365,6 @@
             </a:lvl1pPr>
           </a:lstStyle>
           <a:p>
-            <a:pPr/>
             <a:r>
               <a:t>Notre solution</a:t>
             </a:r>
@@ -7531,13 +7390,13 @@
           </a:ln>
           <a:extLst>
             <a:ext uri="{C572A759-6A51-4108-AA02-DFA0A04FC94B}">
-              <ma14:wrappingTextBoxFlag xmlns:ma14="http://schemas.microsoft.com/office/mac/drawingml/2011/main" val="1"/>
+              <ma14:wrappingTextBoxFlag xmlns:ma14="http://schemas.microsoft.com/office/mac/drawingml/2011/main" xmlns:a14="http://schemas.microsoft.com/office/drawing/2010/main" xmlns:m="http://schemas.openxmlformats.org/officeDocument/2006/math" xmlns="" val="1"/>
             </a:ext>
           </a:extLst>
         </p:spPr>
         <p:txBody>
           <a:bodyPr lIns="18000" tIns="18000" rIns="18000" bIns="18000">
-            <a:normAutofit fontScale="100000" lnSpcReduction="0"/>
+            <a:normAutofit/>
           </a:bodyPr>
           <a:lstStyle>
             <a:lvl1pPr>
@@ -7553,7 +7412,6 @@
             </a:lvl1pPr>
           </a:lstStyle>
           <a:p>
-            <a:pPr/>
             <a:r>
               <a:t>Une appli qui exploite les données du foot moderne pour prédire l’issue d’un match, à partir des infos équipes, joueurs et résultats des championnats européens.</a:t>
             </a:r>
@@ -7579,13 +7437,13 @@
           </a:ln>
           <a:extLst>
             <a:ext uri="{C572A759-6A51-4108-AA02-DFA0A04FC94B}">
-              <ma14:wrappingTextBoxFlag xmlns:ma14="http://schemas.microsoft.com/office/mac/drawingml/2011/main" val="1"/>
+              <ma14:wrappingTextBoxFlag xmlns:ma14="http://schemas.microsoft.com/office/mac/drawingml/2011/main" xmlns:a14="http://schemas.microsoft.com/office/drawing/2010/main" xmlns:m="http://schemas.openxmlformats.org/officeDocument/2006/math" xmlns="" val="1"/>
             </a:ext>
           </a:extLst>
         </p:spPr>
         <p:txBody>
           <a:bodyPr lIns="18000" tIns="18000" rIns="18000" bIns="18000" anchor="ctr">
-            <a:normAutofit fontScale="100000" lnSpcReduction="0"/>
+            <a:normAutofit/>
           </a:bodyPr>
           <a:lstStyle>
             <a:lvl1pPr>
@@ -7601,7 +7459,6 @@
             </a:lvl1pPr>
           </a:lstStyle>
           <a:p>
-            <a:pPr/>
             <a:r>
               <a:t>Pour qui ?</a:t>
             </a:r>
@@ -7627,13 +7484,13 @@
           </a:ln>
           <a:extLst>
             <a:ext uri="{C572A759-6A51-4108-AA02-DFA0A04FC94B}">
-              <ma14:wrappingTextBoxFlag xmlns:ma14="http://schemas.microsoft.com/office/mac/drawingml/2011/main" val="1"/>
+              <ma14:wrappingTextBoxFlag xmlns:ma14="http://schemas.microsoft.com/office/mac/drawingml/2011/main" xmlns:a14="http://schemas.microsoft.com/office/drawing/2010/main" xmlns:m="http://schemas.openxmlformats.org/officeDocument/2006/math" xmlns="" val="1"/>
             </a:ext>
           </a:extLst>
         </p:spPr>
         <p:txBody>
           <a:bodyPr lIns="18000" tIns="18000" rIns="18000" bIns="18000">
-            <a:normAutofit fontScale="100000" lnSpcReduction="0"/>
+            <a:normAutofit/>
           </a:bodyPr>
           <a:lstStyle/>
           <a:p>
@@ -7679,12 +7536,12 @@
   <p:clrMapOvr>
     <a:masterClrMapping/>
   </p:clrMapOvr>
-  <p:transition xmlns:p14="http://schemas.microsoft.com/office/powerpoint/2010/main" spd="med" advClick="1"/>
+  <p:transition spd="med"/>
 </p:sld>
 </file>
 
 <file path=ppt/slides/slide4.xml><?xml version="1.0" encoding="utf-8"?>
-<p:sld xmlns:a="http://schemas.openxmlformats.org/drawingml/2006/main" xmlns:r="http://schemas.openxmlformats.org/officeDocument/2006/relationships" xmlns:p="http://schemas.openxmlformats.org/presentationml/2006/main" xmlns:m="http://schemas.openxmlformats.org/officeDocument/2006/math" xmlns:a14="http://schemas.microsoft.com/office/drawing/2010/main" showMasterSp="1" showMasterPhAnim="1">
+<p:sld xmlns:a="http://schemas.openxmlformats.org/drawingml/2006/main" xmlns:r="http://schemas.openxmlformats.org/officeDocument/2006/relationships" xmlns:p="http://schemas.openxmlformats.org/presentationml/2006/main">
   <p:cSld>
     <p:spTree>
       <p:nvGrpSpPr>
@@ -7703,7 +7560,9 @@
       <p:sp>
         <p:nvSpPr>
           <p:cNvPr id="145" name="Google Shape;68;p15"/>
-          <p:cNvSpPr txBox="1"/>
+          <p:cNvSpPr txBox="1">
+            <a:spLocks noGrp="1"/>
+          </p:cNvSpPr>
           <p:nvPr>
             <p:ph type="title"/>
           </p:nvPr>
@@ -7733,7 +7592,6 @@
             </a:lvl1pPr>
           </a:lstStyle>
           <a:p>
-            <a:pPr/>
             <a:r>
               <a:t>Description du modèle</a:t>
             </a:r>
@@ -7773,6 +7631,7 @@
                 <a:sym typeface="Arial"/>
               </a:defRPr>
             </a:pPr>
+            <a:endParaRPr/>
           </a:p>
         </p:txBody>
       </p:sp>
@@ -7785,9 +7644,7 @@
           <p:nvPr/>
         </p:nvPicPr>
         <p:blipFill>
-          <a:blip r:embed="rId2">
-            <a:extLst/>
-          </a:blip>
+          <a:blip r:embed="rId2"/>
           <a:stretch>
             <a:fillRect/>
           </a:stretch>
@@ -7828,7 +7685,7 @@
             <a:miter lim="400000"/>
           </a:ln>
           <a:effectLst>
-            <a:outerShdw sx="100000" sy="100000" kx="0" ky="0" algn="b" rotWithShape="0" blurRad="88900" dist="26000" dir="5400000">
+            <a:outerShdw blurRad="88900" dist="26000" dir="5400000" rotWithShape="0">
               <a:srgbClr val="0E3449">
                 <a:alpha val="13000"/>
               </a:srgbClr>
@@ -7847,6 +7704,7 @@
                 <a:sym typeface="Arial"/>
               </a:defRPr>
             </a:pPr>
+            <a:endParaRPr/>
           </a:p>
         </p:txBody>
       </p:sp>
@@ -7873,7 +7731,7 @@
             <a:miter lim="400000"/>
           </a:ln>
           <a:effectLst>
-            <a:outerShdw sx="100000" sy="100000" kx="0" ky="0" algn="b" rotWithShape="0" blurRad="88900" dist="26000" dir="5400000">
+            <a:outerShdw blurRad="88900" dist="26000" dir="5400000" rotWithShape="0">
               <a:srgbClr val="0E3449">
                 <a:alpha val="13000"/>
               </a:srgbClr>
@@ -7892,6 +7750,7 @@
                 <a:sym typeface="Arial"/>
               </a:defRPr>
             </a:pPr>
+            <a:endParaRPr/>
           </a:p>
         </p:txBody>
       </p:sp>
@@ -7918,7 +7777,7 @@
             <a:miter lim="400000"/>
           </a:ln>
           <a:effectLst>
-            <a:outerShdw sx="100000" sy="100000" kx="0" ky="0" algn="b" rotWithShape="0" blurRad="88900" dist="26000" dir="5400000">
+            <a:outerShdw blurRad="88900" dist="26000" dir="5400000" rotWithShape="0">
               <a:srgbClr val="0E3449">
                 <a:alpha val="13000"/>
               </a:srgbClr>
@@ -7937,6 +7796,7 @@
                 <a:sym typeface="Arial"/>
               </a:defRPr>
             </a:pPr>
+            <a:endParaRPr/>
           </a:p>
         </p:txBody>
       </p:sp>
@@ -7976,6 +7836,7 @@
                 <a:sym typeface="Arial"/>
               </a:defRPr>
             </a:pPr>
+            <a:endParaRPr/>
           </a:p>
         </p:txBody>
       </p:sp>
@@ -8015,6 +7876,7 @@
                 <a:sym typeface="Arial"/>
               </a:defRPr>
             </a:pPr>
+            <a:endParaRPr/>
           </a:p>
         </p:txBody>
       </p:sp>
@@ -8051,6 +7913,7 @@
                 <a:sym typeface="Arial"/>
               </a:defRPr>
             </a:pPr>
+            <a:endParaRPr/>
           </a:p>
         </p:txBody>
       </p:sp>
@@ -8087,6 +7950,7 @@
                 <a:sym typeface="Arial"/>
               </a:defRPr>
             </a:pPr>
+            <a:endParaRPr/>
           </a:p>
         </p:txBody>
       </p:sp>
@@ -8123,6 +7987,7 @@
                 <a:sym typeface="Arial"/>
               </a:defRPr>
             </a:pPr>
+            <a:endParaRPr/>
           </a:p>
         </p:txBody>
       </p:sp>
@@ -8135,9 +8000,7 @@
           <p:nvPr/>
         </p:nvPicPr>
         <p:blipFill>
-          <a:blip r:embed="rId3">
-            <a:extLst/>
-          </a:blip>
+          <a:blip r:embed="rId3"/>
           <a:stretch>
             <a:fillRect/>
           </a:stretch>
@@ -8164,9 +8027,7 @@
           <p:nvPr/>
         </p:nvPicPr>
         <p:blipFill>
-          <a:blip r:embed="rId4">
-            <a:extLst/>
-          </a:blip>
+          <a:blip r:embed="rId4"/>
           <a:stretch>
             <a:fillRect/>
           </a:stretch>
@@ -8193,9 +8054,7 @@
           <p:nvPr/>
         </p:nvPicPr>
         <p:blipFill>
-          <a:blip r:embed="rId5">
-            <a:extLst/>
-          </a:blip>
+          <a:blip r:embed="rId5"/>
           <a:stretch>
             <a:fillRect/>
           </a:stretch>
@@ -8232,17 +8091,17 @@
           </a:ln>
           <a:extLst>
             <a:ext uri="{C572A759-6A51-4108-AA02-DFA0A04FC94B}">
-              <ma14:wrappingTextBoxFlag xmlns:ma14="http://schemas.microsoft.com/office/mac/drawingml/2011/main" val="1"/>
+              <ma14:wrappingTextBoxFlag xmlns:ma14="http://schemas.microsoft.com/office/mac/drawingml/2011/main" xmlns:a14="http://schemas.microsoft.com/office/drawing/2010/main" xmlns:m="http://schemas.openxmlformats.org/officeDocument/2006/math" xmlns="" val="1"/>
             </a:ext>
           </a:extLst>
         </p:spPr>
         <p:txBody>
           <a:bodyPr lIns="18000" tIns="18000" rIns="18000" bIns="18000" anchor="ctr">
-            <a:normAutofit fontScale="100000" lnSpcReduction="0"/>
+            <a:normAutofit/>
           </a:bodyPr>
           <a:lstStyle>
             <a:lvl1pPr algn="ctr">
-              <a:defRPr b="1" sz="1300">
+              <a:defRPr sz="1300" b="1">
                 <a:solidFill>
                   <a:srgbClr val="0E3449"/>
                 </a:solidFill>
@@ -8254,7 +8113,6 @@
             </a:lvl1pPr>
           </a:lstStyle>
           <a:p>
-            <a:pPr/>
             <a:r>
               <a:t>Les données</a:t>
             </a:r>
@@ -8280,13 +8138,13 @@
           </a:ln>
           <a:extLst>
             <a:ext uri="{C572A759-6A51-4108-AA02-DFA0A04FC94B}">
-              <ma14:wrappingTextBoxFlag xmlns:ma14="http://schemas.microsoft.com/office/mac/drawingml/2011/main" val="1"/>
+              <ma14:wrappingTextBoxFlag xmlns:ma14="http://schemas.microsoft.com/office/mac/drawingml/2011/main" xmlns:a14="http://schemas.microsoft.com/office/drawing/2010/main" xmlns:m="http://schemas.openxmlformats.org/officeDocument/2006/math" xmlns="" val="1"/>
             </a:ext>
           </a:extLst>
         </p:spPr>
         <p:txBody>
           <a:bodyPr lIns="18000" tIns="18000" rIns="18000" bIns="18000">
-            <a:normAutofit fontScale="100000" lnSpcReduction="0"/>
+            <a:normAutofit/>
           </a:bodyPr>
           <a:lstStyle>
             <a:lvl1pPr algn="ctr">
@@ -8302,7 +8160,6 @@
             </a:lvl1pPr>
           </a:lstStyle>
           <a:p>
-            <a:pPr/>
             <a:r>
               <a:t>matchs, équipes et joueurs des championnats européens</a:t>
             </a:r>
@@ -8328,17 +8185,17 @@
           </a:ln>
           <a:extLst>
             <a:ext uri="{C572A759-6A51-4108-AA02-DFA0A04FC94B}">
-              <ma14:wrappingTextBoxFlag xmlns:ma14="http://schemas.microsoft.com/office/mac/drawingml/2011/main" val="1"/>
+              <ma14:wrappingTextBoxFlag xmlns:ma14="http://schemas.microsoft.com/office/mac/drawingml/2011/main" xmlns:a14="http://schemas.microsoft.com/office/drawing/2010/main" xmlns:m="http://schemas.openxmlformats.org/officeDocument/2006/math" xmlns="" val="1"/>
             </a:ext>
           </a:extLst>
         </p:spPr>
         <p:txBody>
           <a:bodyPr lIns="18000" tIns="18000" rIns="18000" bIns="18000" anchor="ctr">
-            <a:normAutofit fontScale="100000" lnSpcReduction="0"/>
+            <a:normAutofit/>
           </a:bodyPr>
           <a:lstStyle>
             <a:lvl1pPr algn="ctr">
-              <a:defRPr b="1" sz="1300">
+              <a:defRPr sz="1300" b="1">
                 <a:solidFill>
                   <a:srgbClr val="0E3449"/>
                 </a:solidFill>
@@ -8350,7 +8207,6 @@
             </a:lvl1pPr>
           </a:lstStyle>
           <a:p>
-            <a:pPr/>
             <a:r>
               <a:t>Le modèle</a:t>
             </a:r>
@@ -8376,13 +8232,13 @@
           </a:ln>
           <a:extLst>
             <a:ext uri="{C572A759-6A51-4108-AA02-DFA0A04FC94B}">
-              <ma14:wrappingTextBoxFlag xmlns:ma14="http://schemas.microsoft.com/office/mac/drawingml/2011/main" val="1"/>
+              <ma14:wrappingTextBoxFlag xmlns:ma14="http://schemas.microsoft.com/office/mac/drawingml/2011/main" xmlns:a14="http://schemas.microsoft.com/office/drawing/2010/main" xmlns:m="http://schemas.openxmlformats.org/officeDocument/2006/math" xmlns="" val="1"/>
             </a:ext>
           </a:extLst>
         </p:spPr>
         <p:txBody>
           <a:bodyPr lIns="18000" tIns="18000" rIns="18000" bIns="18000">
-            <a:normAutofit fontScale="100000" lnSpcReduction="0"/>
+            <a:normAutofit/>
           </a:bodyPr>
           <a:lstStyle>
             <a:lvl1pPr algn="ctr">
@@ -8398,7 +8254,6 @@
             </a:lvl1pPr>
           </a:lstStyle>
           <a:p>
-            <a:pPr/>
             <a:r>
               <a:t>à partir des notes FIFA 26 des joueurs</a:t>
             </a:r>
@@ -8424,17 +8279,17 @@
           </a:ln>
           <a:extLst>
             <a:ext uri="{C572A759-6A51-4108-AA02-DFA0A04FC94B}">
-              <ma14:wrappingTextBoxFlag xmlns:ma14="http://schemas.microsoft.com/office/mac/drawingml/2011/main" val="1"/>
+              <ma14:wrappingTextBoxFlag xmlns:ma14="http://schemas.microsoft.com/office/mac/drawingml/2011/main" xmlns:a14="http://schemas.microsoft.com/office/drawing/2010/main" xmlns:m="http://schemas.openxmlformats.org/officeDocument/2006/math" xmlns="" val="1"/>
             </a:ext>
           </a:extLst>
         </p:spPr>
         <p:txBody>
           <a:bodyPr lIns="18000" tIns="18000" rIns="18000" bIns="18000" anchor="ctr">
-            <a:normAutofit fontScale="100000" lnSpcReduction="0"/>
+            <a:normAutofit/>
           </a:bodyPr>
           <a:lstStyle>
             <a:lvl1pPr algn="ctr">
-              <a:defRPr b="1" sz="1300">
+              <a:defRPr sz="1300" b="1">
                 <a:solidFill>
                   <a:srgbClr val="0E3449"/>
                 </a:solidFill>
@@ -8446,7 +8301,6 @@
             </a:lvl1pPr>
           </a:lstStyle>
           <a:p>
-            <a:pPr/>
             <a:r>
               <a:t>La prédiction</a:t>
             </a:r>
@@ -8472,13 +8326,13 @@
           </a:ln>
           <a:extLst>
             <a:ext uri="{C572A759-6A51-4108-AA02-DFA0A04FC94B}">
-              <ma14:wrappingTextBoxFlag xmlns:ma14="http://schemas.microsoft.com/office/mac/drawingml/2011/main" val="1"/>
+              <ma14:wrappingTextBoxFlag xmlns:ma14="http://schemas.microsoft.com/office/mac/drawingml/2011/main" xmlns:a14="http://schemas.microsoft.com/office/drawing/2010/main" xmlns:m="http://schemas.openxmlformats.org/officeDocument/2006/math" xmlns="" val="1"/>
             </a:ext>
           </a:extLst>
         </p:spPr>
         <p:txBody>
           <a:bodyPr lIns="18000" tIns="18000" rIns="18000" bIns="18000">
-            <a:normAutofit fontScale="100000" lnSpcReduction="0"/>
+            <a:normAutofit/>
           </a:bodyPr>
           <a:lstStyle>
             <a:lvl1pPr algn="ctr">
@@ -8494,7 +8348,6 @@
             </a:lvl1pPr>
           </a:lstStyle>
           <a:p>
-            <a:pPr/>
             <a:r>
               <a:t>le résultat d’un match entre deux équipes</a:t>
             </a:r>
@@ -8506,12 +8359,12 @@
   <p:clrMapOvr>
     <a:masterClrMapping/>
   </p:clrMapOvr>
-  <p:transition xmlns:p14="http://schemas.microsoft.com/office/powerpoint/2010/main" spd="med" advClick="1"/>
+  <p:transition spd="med"/>
 </p:sld>
 </file>
 
 <file path=ppt/slides/slide5.xml><?xml version="1.0" encoding="utf-8"?>
-<p:sld xmlns:a="http://schemas.openxmlformats.org/drawingml/2006/main" xmlns:r="http://schemas.openxmlformats.org/officeDocument/2006/relationships" xmlns:p="http://schemas.openxmlformats.org/presentationml/2006/main" xmlns:m="http://schemas.openxmlformats.org/officeDocument/2006/math" xmlns:a14="http://schemas.microsoft.com/office/drawing/2010/main" showMasterSp="1" showMasterPhAnim="1">
+<p:sld xmlns:a="http://schemas.openxmlformats.org/drawingml/2006/main" xmlns:r="http://schemas.openxmlformats.org/officeDocument/2006/relationships" xmlns:p="http://schemas.openxmlformats.org/presentationml/2006/main">
   <p:cSld>
     <p:spTree>
       <p:nvGrpSpPr>
@@ -8536,10 +8389,8 @@
           <p:nvPr/>
         </p:nvPicPr>
         <p:blipFill>
-          <a:blip r:embed="rId2">
-            <a:extLst/>
-          </a:blip>
-          <a:srcRect l="0" t="7813" r="0" b="7812"/>
+          <a:blip r:embed="rId2"/>
+          <a:srcRect t="7813" b="7812"/>
           <a:stretch>
             <a:fillRect/>
           </a:stretch>
@@ -8560,7 +8411,9 @@
       <p:sp>
         <p:nvSpPr>
           <p:cNvPr id="167" name="Google Shape;89;p18"/>
-          <p:cNvSpPr txBox="1"/>
+          <p:cNvSpPr txBox="1">
+            <a:spLocks noGrp="1"/>
+          </p:cNvSpPr>
           <p:nvPr>
             <p:ph type="title"/>
           </p:nvPr>
@@ -8602,7 +8455,7 @@
                     <a:srgbClr val="0000FF"/>
                   </a:solidFill>
                 </a:uFill>
-                <a:hlinkClick r:id="rId3" invalidUrl="" action="" tgtFrame="" tooltip="" history="1" highlightClick="0" endSnd="0"/>
+                <a:hlinkClick r:id="rId3"/>
               </a:rPr>
               <a:t>Vidéo </a:t>
             </a:r>
@@ -8618,9 +8471,7 @@
           <p:nvPr/>
         </p:nvPicPr>
         <p:blipFill>
-          <a:blip r:embed="rId4">
-            <a:extLst/>
-          </a:blip>
+          <a:blip r:embed="rId4"/>
           <a:stretch>
             <a:fillRect/>
           </a:stretch>
@@ -8671,6 +8522,7 @@
                 <a:sym typeface="Arial"/>
               </a:defRPr>
             </a:pPr>
+            <a:endParaRPr/>
           </a:p>
         </p:txBody>
       </p:sp>
@@ -8697,7 +8549,7 @@
             <a:miter lim="400000"/>
           </a:ln>
           <a:effectLst>
-            <a:outerShdw sx="100000" sy="100000" kx="0" ky="0" algn="b" rotWithShape="0" blurRad="88900" dist="26000" dir="5400000">
+            <a:outerShdw blurRad="88900" dist="26000" dir="5400000" rotWithShape="0">
               <a:srgbClr val="0E3449">
                 <a:alpha val="13000"/>
               </a:srgbClr>
@@ -8716,6 +8568,7 @@
                 <a:sym typeface="Arial"/>
               </a:defRPr>
             </a:pPr>
+            <a:endParaRPr/>
           </a:p>
         </p:txBody>
       </p:sp>
@@ -8742,7 +8595,7 @@
             <a:miter lim="400000"/>
           </a:ln>
           <a:effectLst>
-            <a:outerShdw sx="100000" sy="100000" kx="0" ky="0" algn="b" rotWithShape="0" blurRad="88900" dist="26000" dir="5400000">
+            <a:outerShdw blurRad="88900" dist="26000" dir="5400000" rotWithShape="0">
               <a:srgbClr val="0E3449">
                 <a:alpha val="13000"/>
               </a:srgbClr>
@@ -8761,6 +8614,7 @@
                 <a:sym typeface="Arial"/>
               </a:defRPr>
             </a:pPr>
+            <a:endParaRPr/>
           </a:p>
         </p:txBody>
       </p:sp>
@@ -8787,7 +8641,7 @@
             <a:miter lim="400000"/>
           </a:ln>
           <a:effectLst>
-            <a:outerShdw sx="100000" sy="100000" kx="0" ky="0" algn="b" rotWithShape="0" blurRad="88900" dist="26000" dir="5400000">
+            <a:outerShdw blurRad="88900" dist="26000" dir="5400000" rotWithShape="0">
               <a:srgbClr val="0E3449">
                 <a:alpha val="13000"/>
               </a:srgbClr>
@@ -8806,6 +8660,7 @@
                 <a:sym typeface="Arial"/>
               </a:defRPr>
             </a:pPr>
+            <a:endParaRPr/>
           </a:p>
         </p:txBody>
       </p:sp>
@@ -8832,7 +8687,7 @@
             <a:miter lim="400000"/>
           </a:ln>
           <a:effectLst>
-            <a:outerShdw sx="100000" sy="100000" kx="0" ky="0" algn="b" rotWithShape="0" blurRad="88900" dist="26000" dir="5400000">
+            <a:outerShdw blurRad="88900" dist="26000" dir="5400000" rotWithShape="0">
               <a:srgbClr val="0E3449">
                 <a:alpha val="13000"/>
               </a:srgbClr>
@@ -8851,6 +8706,7 @@
                 <a:sym typeface="Arial"/>
               </a:defRPr>
             </a:pPr>
+            <a:endParaRPr/>
           </a:p>
         </p:txBody>
       </p:sp>
@@ -8887,6 +8743,7 @@
                 <a:sym typeface="Arial"/>
               </a:defRPr>
             </a:pPr>
+            <a:endParaRPr/>
           </a:p>
         </p:txBody>
       </p:sp>
@@ -8923,6 +8780,7 @@
                 <a:sym typeface="Arial"/>
               </a:defRPr>
             </a:pPr>
+            <a:endParaRPr/>
           </a:p>
         </p:txBody>
       </p:sp>
@@ -8959,6 +8817,7 @@
                 <a:sym typeface="Arial"/>
               </a:defRPr>
             </a:pPr>
+            <a:endParaRPr/>
           </a:p>
         </p:txBody>
       </p:sp>
@@ -8995,6 +8854,7 @@
                 <a:sym typeface="Arial"/>
               </a:defRPr>
             </a:pPr>
+            <a:endParaRPr/>
           </a:p>
         </p:txBody>
       </p:sp>
@@ -9007,9 +8867,7 @@
           <p:nvPr/>
         </p:nvPicPr>
         <p:blipFill>
-          <a:blip r:embed="rId5">
-            <a:extLst/>
-          </a:blip>
+          <a:blip r:embed="rId5"/>
           <a:stretch>
             <a:fillRect/>
           </a:stretch>
@@ -9036,9 +8894,7 @@
           <p:nvPr/>
         </p:nvPicPr>
         <p:blipFill>
-          <a:blip r:embed="rId6">
-            <a:extLst/>
-          </a:blip>
+          <a:blip r:embed="rId6"/>
           <a:stretch>
             <a:fillRect/>
           </a:stretch>
@@ -9065,9 +8921,7 @@
           <p:nvPr/>
         </p:nvPicPr>
         <p:blipFill>
-          <a:blip r:embed="rId7">
-            <a:extLst/>
-          </a:blip>
+          <a:blip r:embed="rId7"/>
           <a:stretch>
             <a:fillRect/>
           </a:stretch>
@@ -9094,9 +8948,7 @@
           <p:nvPr/>
         </p:nvPicPr>
         <p:blipFill>
-          <a:blip r:embed="rId8">
-            <a:extLst/>
-          </a:blip>
+          <a:blip r:embed="rId8"/>
           <a:stretch>
             <a:fillRect/>
           </a:stretch>
@@ -9133,17 +8985,17 @@
           </a:ln>
           <a:extLst>
             <a:ext uri="{C572A759-6A51-4108-AA02-DFA0A04FC94B}">
-              <ma14:wrappingTextBoxFlag xmlns:ma14="http://schemas.microsoft.com/office/mac/drawingml/2011/main" val="1"/>
+              <ma14:wrappingTextBoxFlag xmlns:ma14="http://schemas.microsoft.com/office/mac/drawingml/2011/main" xmlns:a14="http://schemas.microsoft.com/office/drawing/2010/main" xmlns:m="http://schemas.openxmlformats.org/officeDocument/2006/math" xmlns="" val="1"/>
             </a:ext>
           </a:extLst>
         </p:spPr>
         <p:txBody>
           <a:bodyPr lIns="18000" tIns="18000" rIns="18000" bIns="18000" anchor="ctr">
-            <a:normAutofit fontScale="100000" lnSpcReduction="0"/>
+            <a:normAutofit/>
           </a:bodyPr>
           <a:lstStyle>
             <a:lvl1pPr>
-              <a:defRPr b="1" sz="1300">
+              <a:defRPr sz="1300" b="1">
                 <a:solidFill>
                   <a:srgbClr val="0E3449"/>
                 </a:solidFill>
@@ -9155,7 +9007,6 @@
             </a:lvl1pPr>
           </a:lstStyle>
           <a:p>
-            <a:pPr/>
             <a:r>
               <a:t>Équipes &amp; effectifs</a:t>
             </a:r>
@@ -9181,13 +9032,13 @@
           </a:ln>
           <a:extLst>
             <a:ext uri="{C572A759-6A51-4108-AA02-DFA0A04FC94B}">
-              <ma14:wrappingTextBoxFlag xmlns:ma14="http://schemas.microsoft.com/office/mac/drawingml/2011/main" val="1"/>
+              <ma14:wrappingTextBoxFlag xmlns:ma14="http://schemas.microsoft.com/office/mac/drawingml/2011/main" xmlns:a14="http://schemas.microsoft.com/office/drawing/2010/main" xmlns:m="http://schemas.openxmlformats.org/officeDocument/2006/math" xmlns="" val="1"/>
             </a:ext>
           </a:extLst>
         </p:spPr>
         <p:txBody>
           <a:bodyPr lIns="18000" tIns="18000" rIns="18000" bIns="18000">
-            <a:normAutofit fontScale="100000" lnSpcReduction="0"/>
+            <a:normAutofit/>
           </a:bodyPr>
           <a:lstStyle>
             <a:lvl1pPr>
@@ -9203,7 +9054,6 @@
             </a:lvl1pPr>
           </a:lstStyle>
           <a:p>
-            <a:pPr/>
             <a:r>
               <a:t>effectif de la saison, notes &amp; valeur marchande, dernière composition officielle</a:t>
             </a:r>
@@ -9229,17 +9079,17 @@
           </a:ln>
           <a:extLst>
             <a:ext uri="{C572A759-6A51-4108-AA02-DFA0A04FC94B}">
-              <ma14:wrappingTextBoxFlag xmlns:ma14="http://schemas.microsoft.com/office/mac/drawingml/2011/main" val="1"/>
+              <ma14:wrappingTextBoxFlag xmlns:ma14="http://schemas.microsoft.com/office/mac/drawingml/2011/main" xmlns:a14="http://schemas.microsoft.com/office/drawing/2010/main" xmlns:m="http://schemas.openxmlformats.org/officeDocument/2006/math" xmlns="" val="1"/>
             </a:ext>
           </a:extLst>
         </p:spPr>
         <p:txBody>
           <a:bodyPr lIns="18000" tIns="18000" rIns="18000" bIns="18000" anchor="ctr">
-            <a:normAutofit fontScale="100000" lnSpcReduction="0"/>
+            <a:normAutofit/>
           </a:bodyPr>
           <a:lstStyle>
             <a:lvl1pPr>
-              <a:defRPr b="1" sz="1300">
+              <a:defRPr sz="1300" b="1">
                 <a:solidFill>
                   <a:srgbClr val="0E3449"/>
                 </a:solidFill>
@@ -9251,7 +9101,6 @@
             </a:lvl1pPr>
           </a:lstStyle>
           <a:p>
-            <a:pPr/>
             <a:r>
               <a:t>Prédiction de match</a:t>
             </a:r>
@@ -9277,13 +9126,13 @@
           </a:ln>
           <a:extLst>
             <a:ext uri="{C572A759-6A51-4108-AA02-DFA0A04FC94B}">
-              <ma14:wrappingTextBoxFlag xmlns:ma14="http://schemas.microsoft.com/office/mac/drawingml/2011/main" val="1"/>
+              <ma14:wrappingTextBoxFlag xmlns:ma14="http://schemas.microsoft.com/office/mac/drawingml/2011/main" xmlns:a14="http://schemas.microsoft.com/office/drawing/2010/main" xmlns:m="http://schemas.openxmlformats.org/officeDocument/2006/math" xmlns="" val="1"/>
             </a:ext>
           </a:extLst>
         </p:spPr>
         <p:txBody>
           <a:bodyPr lIns="18000" tIns="18000" rIns="18000" bIns="18000">
-            <a:normAutofit fontScale="100000" lnSpcReduction="0"/>
+            <a:normAutofit/>
           </a:bodyPr>
           <a:lstStyle>
             <a:lvl1pPr>
@@ -9299,7 +9148,6 @@
             </a:lvl1pPr>
           </a:lstStyle>
           <a:p>
-            <a:pPr/>
             <a:r>
               <a:t>résultat prédit entre deux équipes données</a:t>
             </a:r>
@@ -9325,17 +9173,17 @@
           </a:ln>
           <a:extLst>
             <a:ext uri="{C572A759-6A51-4108-AA02-DFA0A04FC94B}">
-              <ma14:wrappingTextBoxFlag xmlns:ma14="http://schemas.microsoft.com/office/mac/drawingml/2011/main" val="1"/>
+              <ma14:wrappingTextBoxFlag xmlns:ma14="http://schemas.microsoft.com/office/mac/drawingml/2011/main" xmlns:a14="http://schemas.microsoft.com/office/drawing/2010/main" xmlns:m="http://schemas.openxmlformats.org/officeDocument/2006/math" xmlns="" val="1"/>
             </a:ext>
           </a:extLst>
         </p:spPr>
         <p:txBody>
           <a:bodyPr lIns="18000" tIns="18000" rIns="18000" bIns="18000" anchor="ctr">
-            <a:normAutofit fontScale="100000" lnSpcReduction="0"/>
+            <a:normAutofit/>
           </a:bodyPr>
           <a:lstStyle>
             <a:lvl1pPr>
-              <a:defRPr b="1" sz="1300">
+              <a:defRPr sz="1300" b="1">
                 <a:solidFill>
                   <a:srgbClr val="0E3449"/>
                 </a:solidFill>
@@ -9347,7 +9195,6 @@
             </a:lvl1pPr>
           </a:lstStyle>
           <a:p>
-            <a:pPr/>
             <a:r>
               <a:t>Mode Fantasy</a:t>
             </a:r>
@@ -9373,13 +9220,13 @@
           </a:ln>
           <a:extLst>
             <a:ext uri="{C572A759-6A51-4108-AA02-DFA0A04FC94B}">
-              <ma14:wrappingTextBoxFlag xmlns:ma14="http://schemas.microsoft.com/office/mac/drawingml/2011/main" val="1"/>
+              <ma14:wrappingTextBoxFlag xmlns:ma14="http://schemas.microsoft.com/office/mac/drawingml/2011/main" xmlns:a14="http://schemas.microsoft.com/office/drawing/2010/main" xmlns:m="http://schemas.openxmlformats.org/officeDocument/2006/math" xmlns="" val="1"/>
             </a:ext>
           </a:extLst>
         </p:spPr>
         <p:txBody>
           <a:bodyPr lIns="18000" tIns="18000" rIns="18000" bIns="18000">
-            <a:normAutofit fontScale="100000" lnSpcReduction="0"/>
+            <a:normAutofit/>
           </a:bodyPr>
           <a:lstStyle>
             <a:lvl1pPr>
@@ -9395,7 +9242,6 @@
             </a:lvl1pPr>
           </a:lstStyle>
           <a:p>
-            <a:pPr/>
             <a:r>
               <a:t>créer sa dream team et lancer un tournoi (équipes fictives ou réelles)</a:t>
             </a:r>
@@ -9421,17 +9267,17 @@
           </a:ln>
           <a:extLst>
             <a:ext uri="{C572A759-6A51-4108-AA02-DFA0A04FC94B}">
-              <ma14:wrappingTextBoxFlag xmlns:ma14="http://schemas.microsoft.com/office/mac/drawingml/2011/main" val="1"/>
+              <ma14:wrappingTextBoxFlag xmlns:ma14="http://schemas.microsoft.com/office/mac/drawingml/2011/main" xmlns:a14="http://schemas.microsoft.com/office/drawing/2010/main" xmlns:m="http://schemas.openxmlformats.org/officeDocument/2006/math" xmlns="" val="1"/>
             </a:ext>
           </a:extLst>
         </p:spPr>
         <p:txBody>
           <a:bodyPr lIns="18000" tIns="18000" rIns="18000" bIns="18000" anchor="ctr">
-            <a:normAutofit fontScale="100000" lnSpcReduction="0"/>
+            <a:normAutofit/>
           </a:bodyPr>
           <a:lstStyle>
             <a:lvl1pPr>
-              <a:defRPr b="1" sz="1300">
+              <a:defRPr sz="1300" b="1">
                 <a:solidFill>
                   <a:srgbClr val="0E3449"/>
                 </a:solidFill>
@@ -9443,7 +9289,6 @@
             </a:lvl1pPr>
           </a:lstStyle>
           <a:p>
-            <a:pPr/>
             <a:r>
               <a:t>Chatbot IA</a:t>
             </a:r>
@@ -9469,13 +9314,13 @@
           </a:ln>
           <a:extLst>
             <a:ext uri="{C572A759-6A51-4108-AA02-DFA0A04FC94B}">
-              <ma14:wrappingTextBoxFlag xmlns:ma14="http://schemas.microsoft.com/office/mac/drawingml/2011/main" val="1"/>
+              <ma14:wrappingTextBoxFlag xmlns:ma14="http://schemas.microsoft.com/office/mac/drawingml/2011/main" xmlns:a14="http://schemas.microsoft.com/office/drawing/2010/main" xmlns:m="http://schemas.openxmlformats.org/officeDocument/2006/math" xmlns="" val="1"/>
             </a:ext>
           </a:extLst>
         </p:spPr>
         <p:txBody>
           <a:bodyPr lIns="18000" tIns="18000" rIns="18000" bIns="18000">
-            <a:normAutofit fontScale="100000" lnSpcReduction="0"/>
+            <a:normAutofit/>
           </a:bodyPr>
           <a:lstStyle>
             <a:lvl1pPr>
@@ -9491,7 +9336,6 @@
             </a:lvl1pPr>
           </a:lstStyle>
           <a:p>
-            <a:pPr/>
             <a:r>
               <a:t>réponses générées depuis les bases neondb &amp; Transfermarkt</a:t>
             </a:r>
@@ -9503,12 +9347,12 @@
   <p:clrMapOvr>
     <a:masterClrMapping/>
   </p:clrMapOvr>
-  <p:transition xmlns:p14="http://schemas.microsoft.com/office/powerpoint/2010/main" spd="med" advClick="1"/>
+  <p:transition spd="med"/>
 </p:sld>
 </file>
 
 <file path=ppt/slides/slide6.xml><?xml version="1.0" encoding="utf-8"?>
-<p:sld xmlns:a="http://schemas.openxmlformats.org/drawingml/2006/main" xmlns:r="http://schemas.openxmlformats.org/officeDocument/2006/relationships" xmlns:p="http://schemas.openxmlformats.org/presentationml/2006/main" xmlns:m="http://schemas.openxmlformats.org/officeDocument/2006/math" xmlns:a14="http://schemas.microsoft.com/office/drawing/2010/main" showMasterSp="1" showMasterPhAnim="1">
+<p:sld xmlns:a="http://schemas.openxmlformats.org/drawingml/2006/main" xmlns:r="http://schemas.openxmlformats.org/officeDocument/2006/relationships" xmlns:p="http://schemas.openxmlformats.org/presentationml/2006/main">
   <p:cSld>
     <p:spTree>
       <p:nvGrpSpPr>
@@ -9533,10 +9377,8 @@
           <p:nvPr/>
         </p:nvPicPr>
         <p:blipFill>
-          <a:blip r:embed="rId2">
-            <a:extLst/>
-          </a:blip>
-          <a:srcRect l="0" t="7813" r="0" b="7812"/>
+          <a:blip r:embed="rId2"/>
+          <a:srcRect t="7813" b="7812"/>
           <a:stretch>
             <a:fillRect/>
           </a:stretch>
@@ -9557,7 +9399,9 @@
       <p:sp>
         <p:nvSpPr>
           <p:cNvPr id="192" name="Google Shape;75;p16"/>
-          <p:cNvSpPr txBox="1"/>
+          <p:cNvSpPr txBox="1">
+            <a:spLocks noGrp="1"/>
+          </p:cNvSpPr>
           <p:nvPr>
             <p:ph type="title"/>
           </p:nvPr>
@@ -9584,7 +9428,6 @@
             </a:lvl1pPr>
           </a:lstStyle>
           <a:p>
-            <a:pPr/>
             <a:r>
               <a:t>ETL, EDA et choix de données modèle</a:t>
             </a:r>
@@ -9600,9 +9443,7 @@
           <p:nvPr/>
         </p:nvPicPr>
         <p:blipFill>
-          <a:blip r:embed="rId3">
-            <a:extLst/>
-          </a:blip>
+          <a:blip r:embed="rId3"/>
           <a:stretch>
             <a:fillRect/>
           </a:stretch>
@@ -9653,6 +9494,7 @@
                 <a:sym typeface="Arial"/>
               </a:defRPr>
             </a:pPr>
+            <a:endParaRPr/>
           </a:p>
         </p:txBody>
       </p:sp>
@@ -9709,6 +9551,7 @@
                   <a:sym typeface="Arial"/>
                 </a:defRPr>
               </a:pPr>
+              <a:endParaRPr/>
             </a:p>
           </p:txBody>
         </p:sp>
@@ -9734,7 +9577,7 @@
             <a:effectLst/>
             <a:extLst>
               <a:ext uri="{C572A759-6A51-4108-AA02-DFA0A04FC94B}">
-                <ma14:wrappingTextBoxFlag xmlns:ma14="http://schemas.microsoft.com/office/mac/drawingml/2011/main" val="1"/>
+                <ma14:wrappingTextBoxFlag xmlns:ma14="http://schemas.microsoft.com/office/mac/drawingml/2011/main" xmlns:a14="http://schemas.microsoft.com/office/drawing/2010/main" xmlns:m="http://schemas.openxmlformats.org/officeDocument/2006/math" xmlns="" val="1"/>
               </a:ext>
             </a:extLst>
           </p:spPr>
@@ -9745,7 +9588,7 @@
             <a:lstStyle/>
             <a:p>
               <a:pPr>
-                <a:defRPr b="1" sz="1000">
+                <a:defRPr sz="1000" b="1">
                   <a:latin typeface="Inter"/>
                   <a:ea typeface="Inter"/>
                   <a:cs typeface="Inter"/>
@@ -9765,6 +9608,7 @@
                   <a:sym typeface="Inter"/>
                 </a:defRPr>
               </a:pPr>
+              <a:endParaRPr/>
             </a:p>
             <a:p>
               <a:pPr>
@@ -9835,6 +9679,7 @@
                   <a:sym typeface="Arial"/>
                 </a:defRPr>
               </a:pPr>
+              <a:endParaRPr/>
             </a:p>
           </p:txBody>
         </p:sp>
@@ -9860,7 +9705,7 @@
             <a:effectLst/>
             <a:extLst>
               <a:ext uri="{C572A759-6A51-4108-AA02-DFA0A04FC94B}">
-                <ma14:wrappingTextBoxFlag xmlns:ma14="http://schemas.microsoft.com/office/mac/drawingml/2011/main" val="1"/>
+                <ma14:wrappingTextBoxFlag xmlns:ma14="http://schemas.microsoft.com/office/mac/drawingml/2011/main" xmlns:a14="http://schemas.microsoft.com/office/drawing/2010/main" xmlns:m="http://schemas.openxmlformats.org/officeDocument/2006/math" xmlns="" val="1"/>
               </a:ext>
             </a:extLst>
           </p:spPr>
@@ -9871,17 +9716,18 @@
             <a:lstStyle/>
             <a:p>
               <a:pPr lvl="3">
-                <a:defRPr b="1" sz="1000">
+                <a:defRPr sz="1000" b="1">
                   <a:latin typeface="Inter"/>
                   <a:ea typeface="Inter"/>
                   <a:cs typeface="Inter"/>
                   <a:sym typeface="Inter"/>
                 </a:defRPr>
               </a:pPr>
+              <a:endParaRPr/>
             </a:p>
             <a:p>
               <a:pPr lvl="3">
-                <a:defRPr b="1" sz="1000">
+                <a:defRPr sz="1000" b="1">
                   <a:latin typeface="Inter"/>
                   <a:ea typeface="Inter"/>
                   <a:cs typeface="Inter"/>
@@ -9901,6 +9747,7 @@
                   <a:sym typeface="Inter"/>
                 </a:defRPr>
               </a:pPr>
+              <a:endParaRPr/>
             </a:p>
             <a:p>
               <a:pPr>
@@ -9923,12 +9770,12 @@
   <p:clrMapOvr>
     <a:masterClrMapping/>
   </p:clrMapOvr>
-  <p:transition xmlns:p14="http://schemas.microsoft.com/office/powerpoint/2010/main" spd="med" advClick="1"/>
+  <p:transition spd="med"/>
 </p:sld>
 </file>
 
 <file path=ppt/slides/slide7.xml><?xml version="1.0" encoding="utf-8"?>
-<p:sld xmlns:a="http://schemas.openxmlformats.org/drawingml/2006/main" xmlns:r="http://schemas.openxmlformats.org/officeDocument/2006/relationships" xmlns:p="http://schemas.openxmlformats.org/presentationml/2006/main" xmlns:m="http://schemas.openxmlformats.org/officeDocument/2006/math" xmlns:a14="http://schemas.microsoft.com/office/drawing/2010/main" showMasterSp="1" showMasterPhAnim="1">
+<p:sld xmlns:a="http://schemas.openxmlformats.org/drawingml/2006/main" xmlns:r="http://schemas.openxmlformats.org/officeDocument/2006/relationships" xmlns:p="http://schemas.openxmlformats.org/presentationml/2006/main">
   <p:cSld>
     <p:spTree>
       <p:nvGrpSpPr>
@@ -9953,10 +9800,8 @@
           <p:nvPr/>
         </p:nvPicPr>
         <p:blipFill>
-          <a:blip r:embed="rId2">
-            <a:extLst/>
-          </a:blip>
-          <a:srcRect l="0" t="2750" r="5496" b="12874"/>
+          <a:blip r:embed="rId2"/>
+          <a:srcRect t="2750" r="5496" b="12874"/>
           <a:stretch>
             <a:fillRect/>
           </a:stretch>
@@ -9977,7 +9822,9 @@
       <p:sp>
         <p:nvSpPr>
           <p:cNvPr id="203" name="Google Shape;75;p16"/>
-          <p:cNvSpPr txBox="1"/>
+          <p:cNvSpPr txBox="1">
+            <a:spLocks noGrp="1"/>
+          </p:cNvSpPr>
           <p:nvPr>
             <p:ph type="title"/>
           </p:nvPr>
@@ -10029,9 +9876,7 @@
           <p:nvPr/>
         </p:nvPicPr>
         <p:blipFill>
-          <a:blip r:embed="rId3">
-            <a:extLst/>
-          </a:blip>
+          <a:blip r:embed="rId3"/>
           <a:stretch>
             <a:fillRect/>
           </a:stretch>
@@ -10082,6 +9927,7 @@
                 <a:sym typeface="Arial"/>
               </a:defRPr>
             </a:pPr>
+            <a:endParaRPr/>
           </a:p>
         </p:txBody>
       </p:sp>
@@ -10121,7 +9967,7 @@
             <a:effectLst/>
             <a:extLst>
               <a:ext uri="{C572A759-6A51-4108-AA02-DFA0A04FC94B}">
-                <ma14:wrappingTextBoxFlag xmlns:ma14="http://schemas.microsoft.com/office/mac/drawingml/2011/main" val="1"/>
+                <ma14:wrappingTextBoxFlag xmlns:ma14="http://schemas.microsoft.com/office/mac/drawingml/2011/main" xmlns:a14="http://schemas.microsoft.com/office/drawing/2010/main" xmlns:m="http://schemas.openxmlformats.org/officeDocument/2006/math" xmlns="" val="1"/>
               </a:ext>
             </a:extLst>
           </p:spPr>
@@ -10131,7 +9977,7 @@
             </a:bodyPr>
             <a:lstStyle>
               <a:lvl1pPr>
-                <a:defRPr b="1" sz="1100">
+                <a:defRPr sz="1100" b="1">
                   <a:solidFill>
                     <a:srgbClr val="555555"/>
                   </a:solidFill>
@@ -10143,7 +9989,6 @@
               </a:lvl1pPr>
             </a:lstStyle>
             <a:p>
-              <a:pPr/>
               <a:r>
                 <a:t>Sources</a:t>
               </a:r>
@@ -10203,6 +10048,7 @@
                     <a:sym typeface="Arial"/>
                   </a:defRPr>
                 </a:pPr>
+                <a:endParaRPr/>
               </a:p>
             </p:txBody>
           </p:sp>
@@ -10228,7 +10074,7 @@
               <a:effectLst/>
               <a:extLst>
                 <a:ext uri="{C572A759-6A51-4108-AA02-DFA0A04FC94B}">
-                  <ma14:wrappingTextBoxFlag xmlns:ma14="http://schemas.microsoft.com/office/mac/drawingml/2011/main" val="1"/>
+                  <ma14:wrappingTextBoxFlag xmlns:ma14="http://schemas.microsoft.com/office/mac/drawingml/2011/main" xmlns:a14="http://schemas.microsoft.com/office/drawing/2010/main" xmlns:m="http://schemas.openxmlformats.org/officeDocument/2006/math" xmlns="" val="1"/>
                 </a:ext>
               </a:extLst>
             </p:spPr>
@@ -10238,7 +10084,7 @@
               </a:bodyPr>
               <a:lstStyle>
                 <a:lvl1pPr>
-                  <a:defRPr b="1" sz="1100">
+                  <a:defRPr sz="1100" b="1">
                     <a:solidFill>
                       <a:srgbClr val="FF4B4B"/>
                     </a:solidFill>
@@ -10250,7 +10096,6 @@
                 </a:lvl1pPr>
               </a:lstStyle>
               <a:p>
-                <a:pPr/>
                 <a:r>
                   <a:t>SoFIFA</a:t>
                 </a:r>
@@ -10279,7 +10124,7 @@
               <a:effectLst/>
               <a:extLst>
                 <a:ext uri="{C572A759-6A51-4108-AA02-DFA0A04FC94B}">
-                  <ma14:wrappingTextBoxFlag xmlns:ma14="http://schemas.microsoft.com/office/mac/drawingml/2011/main" val="1"/>
+                  <ma14:wrappingTextBoxFlag xmlns:ma14="http://schemas.microsoft.com/office/mac/drawingml/2011/main" xmlns:a14="http://schemas.microsoft.com/office/drawing/2010/main" xmlns:m="http://schemas.openxmlformats.org/officeDocument/2006/math" xmlns="" val="1"/>
                 </a:ext>
               </a:extLst>
             </p:spPr>
@@ -10298,7 +10143,6 @@
                 </a:lvl1pPr>
               </a:lstStyle>
               <a:p>
-                <a:pPr/>
                 <a:r>
                   <a:t>Scraping des notes détaillées joueurs: attaque, technique, mouvement, défense, gardien.</a:t>
                 </a:r>
@@ -10374,6 +10218,7 @@
                     <a:sym typeface="Arial"/>
                   </a:defRPr>
                 </a:pPr>
+                <a:endParaRPr/>
               </a:p>
             </p:txBody>
           </p:sp>
@@ -10399,7 +10244,7 @@
               <a:effectLst/>
               <a:extLst>
                 <a:ext uri="{C572A759-6A51-4108-AA02-DFA0A04FC94B}">
-                  <ma14:wrappingTextBoxFlag xmlns:ma14="http://schemas.microsoft.com/office/mac/drawingml/2011/main" val="1"/>
+                  <ma14:wrappingTextBoxFlag xmlns:ma14="http://schemas.microsoft.com/office/mac/drawingml/2011/main" xmlns:a14="http://schemas.microsoft.com/office/drawing/2010/main" xmlns:m="http://schemas.openxmlformats.org/officeDocument/2006/math" xmlns="" val="1"/>
                 </a:ext>
               </a:extLst>
             </p:spPr>
@@ -10409,7 +10254,7 @@
               </a:bodyPr>
               <a:lstStyle>
                 <a:lvl1pPr>
-                  <a:defRPr b="1" sz="1100">
+                  <a:defRPr sz="1100" b="1">
                     <a:solidFill>
                       <a:srgbClr val="FF4B4B"/>
                     </a:solidFill>
@@ -10421,7 +10266,6 @@
                 </a:lvl1pPr>
               </a:lstStyle>
               <a:p>
-                <a:pPr/>
                 <a:r>
                   <a:t>Transfermarkt</a:t>
                 </a:r>
@@ -10451,7 +10295,7 @@
             <a:effectLst/>
             <a:extLst>
               <a:ext uri="{C572A759-6A51-4108-AA02-DFA0A04FC94B}">
-                <ma14:wrappingTextBoxFlag xmlns:ma14="http://schemas.microsoft.com/office/mac/drawingml/2011/main" val="1"/>
+                <ma14:wrappingTextBoxFlag xmlns:ma14="http://schemas.microsoft.com/office/mac/drawingml/2011/main" xmlns:a14="http://schemas.microsoft.com/office/drawing/2010/main" xmlns:m="http://schemas.openxmlformats.org/officeDocument/2006/math" xmlns="" val="1"/>
               </a:ext>
             </a:extLst>
           </p:spPr>
@@ -10470,7 +10314,6 @@
               </a:lvl1pPr>
             </a:lstStyle>
             <a:p>
-              <a:pPr/>
               <a:r>
                 <a:t>CSV GitHub: matchs, lineups, joueurs, clubs et transferts. Mise à jour régulière.</a:t>
               </a:r>
@@ -10531,6 +10374,7 @@
                   <a:sym typeface="Arial"/>
                 </a:defRPr>
               </a:pPr>
+              <a:endParaRPr/>
             </a:p>
           </p:txBody>
         </p:sp>
@@ -10556,7 +10400,7 @@
             <a:effectLst/>
             <a:extLst>
               <a:ext uri="{C572A759-6A51-4108-AA02-DFA0A04FC94B}">
-                <ma14:wrappingTextBoxFlag xmlns:ma14="http://schemas.microsoft.com/office/mac/drawingml/2011/main" val="1"/>
+                <ma14:wrappingTextBoxFlag xmlns:ma14="http://schemas.microsoft.com/office/mac/drawingml/2011/main" xmlns:a14="http://schemas.microsoft.com/office/drawing/2010/main" xmlns:m="http://schemas.openxmlformats.org/officeDocument/2006/math" xmlns="" val="1"/>
               </a:ext>
             </a:extLst>
           </p:spPr>
@@ -10566,7 +10410,7 @@
             </a:bodyPr>
             <a:lstStyle>
               <a:lvl1pPr>
-                <a:defRPr b="1" sz="1100">
+                <a:defRPr sz="1100" b="1">
                   <a:solidFill>
                     <a:srgbClr val="2563EB"/>
                   </a:solidFill>
@@ -10578,7 +10422,6 @@
               </a:lvl1pPr>
             </a:lstStyle>
             <a:p>
-              <a:pPr/>
               <a:r>
                 <a:t>/raw</a:t>
               </a:r>
@@ -10639,6 +10482,7 @@
                   <a:sym typeface="Arial"/>
                 </a:defRPr>
               </a:pPr>
+              <a:endParaRPr/>
             </a:p>
           </p:txBody>
         </p:sp>
@@ -10664,7 +10508,7 @@
             <a:effectLst/>
             <a:extLst>
               <a:ext uri="{C572A759-6A51-4108-AA02-DFA0A04FC94B}">
-                <ma14:wrappingTextBoxFlag xmlns:ma14="http://schemas.microsoft.com/office/mac/drawingml/2011/main" val="1"/>
+                <ma14:wrappingTextBoxFlag xmlns:ma14="http://schemas.microsoft.com/office/mac/drawingml/2011/main" xmlns:a14="http://schemas.microsoft.com/office/drawing/2010/main" xmlns:m="http://schemas.openxmlformats.org/officeDocument/2006/math" xmlns="" val="1"/>
               </a:ext>
             </a:extLst>
           </p:spPr>
@@ -10674,7 +10518,7 @@
             </a:bodyPr>
             <a:lstStyle>
               <a:lvl1pPr>
-                <a:defRPr b="1" sz="1100">
+                <a:defRPr sz="1100" b="1">
                   <a:solidFill>
                     <a:srgbClr val="2563EB"/>
                   </a:solidFill>
@@ -10686,7 +10530,6 @@
               </a:lvl1pPr>
             </a:lstStyle>
             <a:p>
-              <a:pPr/>
               <a:r>
                 <a:t>/staging</a:t>
               </a:r>
@@ -10715,7 +10558,7 @@
             <a:effectLst/>
             <a:extLst>
               <a:ext uri="{C572A759-6A51-4108-AA02-DFA0A04FC94B}">
-                <ma14:wrappingTextBoxFlag xmlns:ma14="http://schemas.microsoft.com/office/mac/drawingml/2011/main" val="1"/>
+                <ma14:wrappingTextBoxFlag xmlns:ma14="http://schemas.microsoft.com/office/mac/drawingml/2011/main" xmlns:a14="http://schemas.microsoft.com/office/drawing/2010/main" xmlns:m="http://schemas.openxmlformats.org/officeDocument/2006/math" xmlns="" val="1"/>
               </a:ext>
             </a:extLst>
           </p:spPr>
@@ -10829,7 +10672,7 @@
               </a:cxnLst>
               <a:rect l="0" t="0" r="r" b="b"/>
               <a:pathLst>
-                <a:path w="21600" h="0" fill="norm" stroke="1" extrusionOk="0">
+                <a:path w="21600" extrusionOk="0">
                   <a:moveTo>
                     <a:pt x="0" y="0"/>
                   </a:moveTo>
@@ -10854,7 +10697,7 @@
             <a:effectLst/>
             <a:extLst>
               <a:ext uri="{C572A759-6A51-4108-AA02-DFA0A04FC94B}">
-                <ma14:wrappingTextBoxFlag xmlns:ma14="http://schemas.microsoft.com/office/mac/drawingml/2011/main" val="1"/>
+                <ma14:wrappingTextBoxFlag xmlns:ma14="http://schemas.microsoft.com/office/mac/drawingml/2011/main" xmlns:a14="http://schemas.microsoft.com/office/drawing/2010/main" xmlns:m="http://schemas.openxmlformats.org/officeDocument/2006/math" xmlns="" val="1"/>
               </a:ext>
             </a:extLst>
           </p:spPr>
@@ -10864,7 +10707,7 @@
             </a:bodyPr>
             <a:lstStyle>
               <a:lvl1pPr>
-                <a:defRPr b="1" sz="1100">
+                <a:defRPr sz="1100" b="1">
                   <a:solidFill>
                     <a:srgbClr val="555555"/>
                   </a:solidFill>
@@ -10876,7 +10719,6 @@
               </a:lvl1pPr>
             </a:lstStyle>
             <a:p>
-              <a:pPr/>
               <a:r>
                 <a:t>Analyse et modèles</a:t>
               </a:r>
@@ -10950,6 +10792,7 @@
                       <a:sym typeface="Arial"/>
                     </a:defRPr>
                   </a:pPr>
+                  <a:endParaRPr/>
                 </a:p>
               </p:txBody>
             </p:sp>
@@ -10984,7 +10827,7 @@
                   </a:cxnLst>
                   <a:rect l="0" t="0" r="r" b="b"/>
                   <a:pathLst>
-                    <a:path w="21600" h="0" fill="norm" stroke="1" extrusionOk="0">
+                    <a:path w="21600" extrusionOk="0">
                       <a:moveTo>
                         <a:pt x="0" y="0"/>
                       </a:moveTo>
@@ -11009,7 +10852,7 @@
                 <a:effectLst/>
                 <a:extLst>
                   <a:ext uri="{C572A759-6A51-4108-AA02-DFA0A04FC94B}">
-                    <ma14:wrappingTextBoxFlag xmlns:ma14="http://schemas.microsoft.com/office/mac/drawingml/2011/main" val="1"/>
+                    <ma14:wrappingTextBoxFlag xmlns:ma14="http://schemas.microsoft.com/office/mac/drawingml/2011/main" xmlns:a14="http://schemas.microsoft.com/office/drawing/2010/main" xmlns:m="http://schemas.openxmlformats.org/officeDocument/2006/math" xmlns="" val="1"/>
                   </a:ext>
                 </a:extLst>
               </p:spPr>
@@ -11019,7 +10862,7 @@
                 </a:bodyPr>
                 <a:lstStyle>
                   <a:lvl1pPr>
-                    <a:defRPr b="1" sz="1100">
+                    <a:defRPr sz="1100" b="1">
                       <a:solidFill>
                         <a:srgbClr val="15803D"/>
                       </a:solidFill>
@@ -11031,7 +10874,6 @@
                   </a:lvl1pPr>
                 </a:lstStyle>
                 <a:p>
-                  <a:pPr/>
                   <a:r>
                     <a:t>/curated</a:t>
                   </a:r>
@@ -11070,7 +10912,7 @@
                 </a:cxnLst>
                 <a:rect l="0" t="0" r="r" b="b"/>
                 <a:pathLst>
-                  <a:path w="21600" h="0" fill="norm" stroke="1" extrusionOk="0">
+                  <a:path w="21600" extrusionOk="0">
                     <a:moveTo>
                       <a:pt x="0" y="0"/>
                     </a:moveTo>
@@ -11095,7 +10937,7 @@
               <a:effectLst/>
               <a:extLst>
                 <a:ext uri="{C572A759-6A51-4108-AA02-DFA0A04FC94B}">
-                  <ma14:wrappingTextBoxFlag xmlns:ma14="http://schemas.microsoft.com/office/mac/drawingml/2011/main" val="1"/>
+                  <ma14:wrappingTextBoxFlag xmlns:ma14="http://schemas.microsoft.com/office/mac/drawingml/2011/main" xmlns:a14="http://schemas.microsoft.com/office/drawing/2010/main" xmlns:m="http://schemas.openxmlformats.org/officeDocument/2006/math" xmlns="" val="1"/>
                 </a:ext>
               </a:extLst>
             </p:spPr>
@@ -11114,7 +10956,6 @@
                 </a:lvl1pPr>
               </a:lstStyle>
               <a:p>
-                <a:pPr/>
                 <a:r>
                   <a:t>Datasets locaux de notebook pour entraînement ML, dont training_dataset_df.</a:t>
                 </a:r>
@@ -11146,9 +10987,7 @@
             <p:nvPr/>
           </p:nvPicPr>
           <p:blipFill>
-            <a:blip r:embed="rId4">
-              <a:extLst/>
-            </a:blip>
+            <a:blip r:embed="rId4"/>
             <a:stretch>
               <a:fillRect/>
             </a:stretch>
@@ -11177,9 +11016,7 @@
             <p:nvPr/>
           </p:nvPicPr>
           <p:blipFill>
-            <a:blip r:embed="rId5">
-              <a:extLst/>
-            </a:blip>
+            <a:blip r:embed="rId5"/>
             <a:stretch>
               <a:fillRect/>
             </a:stretch>
@@ -11209,9 +11046,7 @@
           <p:nvPr/>
         </p:nvPicPr>
         <p:blipFill>
-          <a:blip r:embed="rId6">
-            <a:extLst/>
-          </a:blip>
+          <a:blip r:embed="rId6"/>
           <a:stretch>
             <a:fillRect/>
           </a:stretch>
@@ -11254,7 +11089,7 @@
           <a:bodyPr lIns="45718" tIns="45718" rIns="45718" bIns="45718"/>
           <a:lstStyle/>
           <a:p>
-            <a:pPr/>
+            <a:endParaRPr/>
           </a:p>
         </p:txBody>
       </p:sp>
@@ -11283,7 +11118,7 @@
           <a:bodyPr lIns="45718" tIns="45718" rIns="45718" bIns="45718"/>
           <a:lstStyle/>
           <a:p>
-            <a:pPr/>
+            <a:endParaRPr/>
           </a:p>
         </p:txBody>
       </p:sp>
@@ -11312,7 +11147,7 @@
           <a:bodyPr lIns="45718" tIns="45718" rIns="45718" bIns="45718"/>
           <a:lstStyle/>
           <a:p>
-            <a:pPr/>
+            <a:endParaRPr/>
           </a:p>
         </p:txBody>
       </p:sp>
@@ -11341,7 +11176,7 @@
           <a:bodyPr lIns="45718" tIns="45718" rIns="45718" bIns="45718"/>
           <a:lstStyle/>
           <a:p>
-            <a:pPr/>
+            <a:endParaRPr/>
           </a:p>
         </p:txBody>
       </p:sp>
@@ -11350,12 +11185,12 @@
   <p:clrMapOvr>
     <a:masterClrMapping/>
   </p:clrMapOvr>
-  <p:transition xmlns:p14="http://schemas.microsoft.com/office/powerpoint/2010/main" spd="med" advClick="1"/>
+  <p:transition spd="med"/>
 </p:sld>
 </file>
 
 <file path=ppt/slides/slide8.xml><?xml version="1.0" encoding="utf-8"?>
-<p:sld xmlns:a="http://schemas.openxmlformats.org/drawingml/2006/main" xmlns:r="http://schemas.openxmlformats.org/officeDocument/2006/relationships" xmlns:p="http://schemas.openxmlformats.org/presentationml/2006/main" xmlns:m="http://schemas.openxmlformats.org/officeDocument/2006/math" xmlns:a14="http://schemas.microsoft.com/office/drawing/2010/main" showMasterSp="1" showMasterPhAnim="1">
+<p:sld xmlns:a="http://schemas.openxmlformats.org/drawingml/2006/main" xmlns:r="http://schemas.openxmlformats.org/officeDocument/2006/relationships" xmlns:p="http://schemas.openxmlformats.org/presentationml/2006/main">
   <p:cSld>
     <p:spTree>
       <p:nvGrpSpPr>
@@ -11380,10 +11215,8 @@
           <p:nvPr/>
         </p:nvPicPr>
         <p:blipFill>
-          <a:blip r:embed="rId2">
-            <a:extLst/>
-          </a:blip>
-          <a:srcRect l="0" t="7813" r="0" b="7812"/>
+          <a:blip r:embed="rId2"/>
+          <a:srcRect t="7813" b="7812"/>
           <a:stretch>
             <a:fillRect/>
           </a:stretch>
@@ -11404,7 +11237,9 @@
       <p:sp>
         <p:nvSpPr>
           <p:cNvPr id="241" name="Google Shape;75;p16"/>
-          <p:cNvSpPr txBox="1"/>
+          <p:cNvSpPr txBox="1">
+            <a:spLocks noGrp="1"/>
+          </p:cNvSpPr>
           <p:nvPr>
             <p:ph type="title"/>
           </p:nvPr>
@@ -11434,7 +11269,6 @@
             </a:lvl1pPr>
           </a:lstStyle>
           <a:p>
-            <a:pPr/>
             <a:r>
               <a:t>EDA : sécurise le dataset d'entraînement</a:t>
             </a:r>
@@ -11450,9 +11284,7 @@
           <p:nvPr/>
         </p:nvPicPr>
         <p:blipFill>
-          <a:blip r:embed="rId3">
-            <a:extLst/>
-          </a:blip>
+          <a:blip r:embed="rId3"/>
           <a:stretch>
             <a:fillRect/>
           </a:stretch>
@@ -11503,6 +11335,7 @@
                 <a:sym typeface="Arial"/>
               </a:defRPr>
             </a:pPr>
+            <a:endParaRPr/>
           </a:p>
         </p:txBody>
       </p:sp>
@@ -11525,7 +11358,7 @@
           </a:ln>
           <a:extLst>
             <a:ext uri="{C572A759-6A51-4108-AA02-DFA0A04FC94B}">
-              <ma14:wrappingTextBoxFlag xmlns:ma14="http://schemas.microsoft.com/office/mac/drawingml/2011/main" val="1"/>
+              <ma14:wrappingTextBoxFlag xmlns:ma14="http://schemas.microsoft.com/office/mac/drawingml/2011/main" xmlns:a14="http://schemas.microsoft.com/office/drawing/2010/main" xmlns:m="http://schemas.openxmlformats.org/officeDocument/2006/math" xmlns="" val="1"/>
             </a:ext>
           </a:extLst>
         </p:spPr>
@@ -11547,7 +11380,6 @@
             </a:lvl1pPr>
           </a:lstStyle>
           <a:p>
-            <a:pPr/>
             <a:r>
               <a:t>Périmètre: matchs UEFA des 5 dernières années, entre les 100 meilleurs clubs UEFA.</a:t>
             </a:r>
@@ -11621,6 +11453,7 @@
                     <a:sym typeface="Arial"/>
                   </a:defRPr>
                 </a:pPr>
+                <a:endParaRPr/>
               </a:p>
             </p:txBody>
           </p:sp>
@@ -11646,7 +11479,7 @@
               <a:effectLst/>
               <a:extLst>
                 <a:ext uri="{C572A759-6A51-4108-AA02-DFA0A04FC94B}">
-                  <ma14:wrappingTextBoxFlag xmlns:ma14="http://schemas.microsoft.com/office/mac/drawingml/2011/main" val="1"/>
+                  <ma14:wrappingTextBoxFlag xmlns:ma14="http://schemas.microsoft.com/office/mac/drawingml/2011/main" xmlns:a14="http://schemas.microsoft.com/office/drawing/2010/main" xmlns:m="http://schemas.openxmlformats.org/officeDocument/2006/math" xmlns="" val="1"/>
                 </a:ext>
               </a:extLst>
             </p:spPr>
@@ -11656,7 +11489,7 @@
               </a:bodyPr>
               <a:lstStyle>
                 <a:lvl1pPr>
-                  <a:defRPr b="1" sz="3800">
+                  <a:defRPr sz="3800" b="1">
                     <a:latin typeface="+mj-lt"/>
                     <a:ea typeface="+mj-ea"/>
                     <a:cs typeface="+mj-cs"/>
@@ -11665,7 +11498,6 @@
                 </a:lvl1pPr>
               </a:lstStyle>
               <a:p>
-                <a:pPr/>
                 <a:r>
                   <a:t>100</a:t>
                 </a:r>
@@ -11695,7 +11527,7 @@
             <a:effectLst/>
             <a:extLst>
               <a:ext uri="{C572A759-6A51-4108-AA02-DFA0A04FC94B}">
-                <ma14:wrappingTextBoxFlag xmlns:ma14="http://schemas.microsoft.com/office/mac/drawingml/2011/main" val="1"/>
+                <ma14:wrappingTextBoxFlag xmlns:ma14="http://schemas.microsoft.com/office/mac/drawingml/2011/main" xmlns:a14="http://schemas.microsoft.com/office/drawing/2010/main" xmlns:m="http://schemas.openxmlformats.org/officeDocument/2006/math" xmlns="" val="1"/>
               </a:ext>
             </a:extLst>
           </p:spPr>
@@ -11714,7 +11546,6 @@
               </a:lvl1pPr>
             </a:lstStyle>
             <a:p>
-              <a:pPr/>
               <a:r>
                 <a:t>meilleures équipes UEFA comme base de comparaison</a:t>
               </a:r>
@@ -11789,6 +11620,7 @@
                     <a:sym typeface="Arial"/>
                   </a:defRPr>
                 </a:pPr>
+                <a:endParaRPr/>
               </a:p>
             </p:txBody>
           </p:sp>
@@ -11814,7 +11646,7 @@
               <a:effectLst/>
               <a:extLst>
                 <a:ext uri="{C572A759-6A51-4108-AA02-DFA0A04FC94B}">
-                  <ma14:wrappingTextBoxFlag xmlns:ma14="http://schemas.microsoft.com/office/mac/drawingml/2011/main" val="1"/>
+                  <ma14:wrappingTextBoxFlag xmlns:ma14="http://schemas.microsoft.com/office/mac/drawingml/2011/main" xmlns:a14="http://schemas.microsoft.com/office/drawing/2010/main" xmlns:m="http://schemas.openxmlformats.org/officeDocument/2006/math" xmlns="" val="1"/>
                 </a:ext>
               </a:extLst>
             </p:spPr>
@@ -11824,7 +11656,7 @@
               </a:bodyPr>
               <a:lstStyle>
                 <a:lvl1pPr>
-                  <a:defRPr b="1" sz="3800">
+                  <a:defRPr sz="3800" b="1">
                     <a:latin typeface="+mj-lt"/>
                     <a:ea typeface="+mj-ea"/>
                     <a:cs typeface="+mj-cs"/>
@@ -11833,7 +11665,6 @@
                 </a:lvl1pPr>
               </a:lstStyle>
               <a:p>
-                <a:pPr/>
                 <a:r>
                   <a:t>6000</a:t>
                 </a:r>
@@ -11863,7 +11694,7 @@
             <a:effectLst/>
             <a:extLst>
               <a:ext uri="{C572A759-6A51-4108-AA02-DFA0A04FC94B}">
-                <ma14:wrappingTextBoxFlag xmlns:ma14="http://schemas.microsoft.com/office/mac/drawingml/2011/main" val="1"/>
+                <ma14:wrappingTextBoxFlag xmlns:ma14="http://schemas.microsoft.com/office/mac/drawingml/2011/main" xmlns:a14="http://schemas.microsoft.com/office/drawing/2010/main" xmlns:m="http://schemas.openxmlformats.org/officeDocument/2006/math" xmlns="" val="1"/>
               </a:ext>
             </a:extLst>
           </p:spPr>
@@ -11882,7 +11713,6 @@
               </a:lvl1pPr>
             </a:lstStyle>
             <a:p>
-              <a:pPr/>
               <a:r>
                 <a:t>matchs environ avant jointure complète</a:t>
               </a:r>
@@ -11957,6 +11787,7 @@
                     <a:sym typeface="Arial"/>
                   </a:defRPr>
                 </a:pPr>
+                <a:endParaRPr/>
               </a:p>
             </p:txBody>
           </p:sp>
@@ -11982,7 +11813,7 @@
               <a:effectLst/>
               <a:extLst>
                 <a:ext uri="{C572A759-6A51-4108-AA02-DFA0A04FC94B}">
-                  <ma14:wrappingTextBoxFlag xmlns:ma14="http://schemas.microsoft.com/office/mac/drawingml/2011/main" val="1"/>
+                  <ma14:wrappingTextBoxFlag xmlns:ma14="http://schemas.microsoft.com/office/mac/drawingml/2011/main" xmlns:a14="http://schemas.microsoft.com/office/drawing/2010/main" xmlns:m="http://schemas.openxmlformats.org/officeDocument/2006/math" xmlns="" val="1"/>
                 </a:ext>
               </a:extLst>
             </p:spPr>
@@ -11992,7 +11823,7 @@
               </a:bodyPr>
               <a:lstStyle>
                 <a:lvl1pPr>
-                  <a:defRPr b="1" sz="3800">
+                  <a:defRPr sz="3800" b="1">
                     <a:latin typeface="+mj-lt"/>
                     <a:ea typeface="+mj-ea"/>
                     <a:cs typeface="+mj-cs"/>
@@ -12001,7 +11832,6 @@
                 </a:lvl1pPr>
               </a:lstStyle>
               <a:p>
-                <a:pPr/>
                 <a:r>
                   <a:t>3800</a:t>
                 </a:r>
@@ -12031,7 +11861,7 @@
             <a:effectLst/>
             <a:extLst>
               <a:ext uri="{C572A759-6A51-4108-AA02-DFA0A04FC94B}">
-                <ma14:wrappingTextBoxFlag xmlns:ma14="http://schemas.microsoft.com/office/mac/drawingml/2011/main" val="1"/>
+                <ma14:wrappingTextBoxFlag xmlns:ma14="http://schemas.microsoft.com/office/mac/drawingml/2011/main" xmlns:a14="http://schemas.microsoft.com/office/drawing/2010/main" xmlns:m="http://schemas.openxmlformats.org/officeDocument/2006/math" xmlns="" val="1"/>
               </a:ext>
             </a:extLst>
           </p:spPr>
@@ -12050,7 +11880,6 @@
               </a:lvl1pPr>
             </a:lstStyle>
             <a:p>
-              <a:pPr/>
               <a:r>
                 <a:t>matchs exploitables après retrait des NaN</a:t>
               </a:r>
@@ -12077,7 +11906,7 @@
           </a:ln>
           <a:extLst>
             <a:ext uri="{C572A759-6A51-4108-AA02-DFA0A04FC94B}">
-              <ma14:wrappingTextBoxFlag xmlns:ma14="http://schemas.microsoft.com/office/mac/drawingml/2011/main" val="1"/>
+              <ma14:wrappingTextBoxFlag xmlns:ma14="http://schemas.microsoft.com/office/mac/drawingml/2011/main" xmlns:a14="http://schemas.microsoft.com/office/drawing/2010/main" xmlns:m="http://schemas.openxmlformats.org/officeDocument/2006/math" xmlns="" val="1"/>
             </a:ext>
           </a:extLst>
         </p:spPr>
@@ -12087,7 +11916,7 @@
           </a:bodyPr>
           <a:lstStyle>
             <a:lvl1pPr>
-              <a:defRPr b="1" sz="1100">
+              <a:defRPr sz="1100" b="1">
                 <a:latin typeface="Inter"/>
                 <a:ea typeface="Inter"/>
                 <a:cs typeface="Inter"/>
@@ -12096,7 +11925,6 @@
             </a:lvl1pPr>
           </a:lstStyle>
           <a:p>
-            <a:pPr/>
             <a:r>
               <a:t>Conclusion modèle</a:t>
             </a:r>
@@ -12122,7 +11950,7 @@
           </a:ln>
           <a:extLst>
             <a:ext uri="{C572A759-6A51-4108-AA02-DFA0A04FC94B}">
-              <ma14:wrappingTextBoxFlag xmlns:ma14="http://schemas.microsoft.com/office/mac/drawingml/2011/main" val="1"/>
+              <ma14:wrappingTextBoxFlag xmlns:ma14="http://schemas.microsoft.com/office/mac/drawingml/2011/main" xmlns:a14="http://schemas.microsoft.com/office/drawing/2010/main" xmlns:m="http://schemas.openxmlformats.org/officeDocument/2006/math" xmlns="" val="1"/>
             </a:ext>
           </a:extLst>
         </p:spPr>
@@ -12141,7 +11969,6 @@
             </a:lvl1pPr>
           </a:lstStyle>
           <a:p>
-            <a:pPr/>
             <a:r>
               <a:t>Le clustering joueurs a surtout séparé les niveaux de force, pas des profils techniques nets. Dans cette version, il réduit l'information et dégrade la performance.</a:t>
             </a:r>
@@ -12167,7 +11994,7 @@
           </a:ln>
           <a:extLst>
             <a:ext uri="{C572A759-6A51-4108-AA02-DFA0A04FC94B}">
-              <ma14:wrappingTextBoxFlag xmlns:ma14="http://schemas.microsoft.com/office/mac/drawingml/2011/main" val="1"/>
+              <ma14:wrappingTextBoxFlag xmlns:ma14="http://schemas.microsoft.com/office/mac/drawingml/2011/main" xmlns:a14="http://schemas.microsoft.com/office/drawing/2010/main" xmlns:m="http://schemas.openxmlformats.org/officeDocument/2006/math" xmlns="" val="1"/>
             </a:ext>
           </a:extLst>
         </p:spPr>
@@ -12189,7 +12016,6 @@
             </a:lvl1pPr>
           </a:lstStyle>
           <a:p>
-            <a:pPr/>
             <a:r>
               <a:t>3</a:t>
             </a:r>
@@ -12201,12 +12027,12 @@
   <p:clrMapOvr>
     <a:masterClrMapping/>
   </p:clrMapOvr>
-  <p:transition xmlns:p14="http://schemas.microsoft.com/office/powerpoint/2010/main" spd="med" advClick="1"/>
+  <p:transition spd="med"/>
 </p:sld>
 </file>
 
 <file path=ppt/slides/slide9.xml><?xml version="1.0" encoding="utf-8"?>
-<p:sld xmlns:a="http://schemas.openxmlformats.org/drawingml/2006/main" xmlns:r="http://schemas.openxmlformats.org/officeDocument/2006/relationships" xmlns:p="http://schemas.openxmlformats.org/presentationml/2006/main" xmlns:m="http://schemas.openxmlformats.org/officeDocument/2006/math" xmlns:a14="http://schemas.microsoft.com/office/drawing/2010/main" showMasterSp="1" showMasterPhAnim="1">
+<p:sld xmlns:a="http://schemas.openxmlformats.org/drawingml/2006/main" xmlns:r="http://schemas.openxmlformats.org/officeDocument/2006/relationships" xmlns:p="http://schemas.openxmlformats.org/presentationml/2006/main">
   <p:cSld>
     <p:spTree>
       <p:nvGrpSpPr>
@@ -12231,10 +12057,8 @@
           <p:nvPr/>
         </p:nvPicPr>
         <p:blipFill>
-          <a:blip r:embed="rId2">
-            <a:extLst/>
-          </a:blip>
-          <a:srcRect l="0" t="7812" r="8100" b="7812"/>
+          <a:blip r:embed="rId2"/>
+          <a:srcRect t="7812" r="8100" b="7812"/>
           <a:stretch>
             <a:fillRect/>
           </a:stretch>
@@ -12255,7 +12079,9 @@
       <p:sp>
         <p:nvSpPr>
           <p:cNvPr id="265" name="Google Shape;75;p16"/>
-          <p:cNvSpPr txBox="1"/>
+          <p:cNvSpPr txBox="1">
+            <a:spLocks noGrp="1"/>
+          </p:cNvSpPr>
           <p:nvPr>
             <p:ph type="title"/>
           </p:nvPr>
@@ -12285,7 +12111,6 @@
             </a:lvl1pPr>
           </a:lstStyle>
           <a:p>
-            <a:pPr/>
             <a:r>
               <a:t>Architecture - Entrainement</a:t>
             </a:r>
@@ -12301,9 +12126,7 @@
           <p:nvPr/>
         </p:nvPicPr>
         <p:blipFill>
-          <a:blip r:embed="rId3">
-            <a:extLst/>
-          </a:blip>
+          <a:blip r:embed="rId3"/>
           <a:stretch>
             <a:fillRect/>
           </a:stretch>
@@ -12354,6 +12177,7 @@
                 <a:sym typeface="Arial"/>
               </a:defRPr>
             </a:pPr>
+            <a:endParaRPr/>
           </a:p>
         </p:txBody>
       </p:sp>
@@ -12380,9 +12204,7 @@
             <p:nvPr/>
           </p:nvPicPr>
           <p:blipFill>
-            <a:blip r:embed="rId4">
-              <a:extLst/>
-            </a:blip>
+            <a:blip r:embed="rId4"/>
             <a:stretch>
               <a:fillRect/>
             </a:stretch>
@@ -12411,9 +12233,7 @@
             <p:nvPr/>
           </p:nvPicPr>
           <p:blipFill>
-            <a:blip r:embed="rId5">
-              <a:extLst/>
-            </a:blip>
+            <a:blip r:embed="rId5"/>
             <a:stretch>
               <a:fillRect/>
             </a:stretch>
@@ -12457,9 +12277,7 @@
             <p:nvPr/>
           </p:nvPicPr>
           <p:blipFill>
-            <a:blip r:embed="rId6">
-              <a:extLst/>
-            </a:blip>
+            <a:blip r:embed="rId6"/>
             <a:stretch>
               <a:fillRect/>
             </a:stretch>
@@ -12488,9 +12306,7 @@
             <p:nvPr/>
           </p:nvPicPr>
           <p:blipFill>
-            <a:blip r:embed="rId7">
-              <a:extLst/>
-            </a:blip>
+            <a:blip r:embed="rId7"/>
             <a:stretch>
               <a:fillRect/>
             </a:stretch>
@@ -12532,7 +12348,7 @@
             <a:effectLst/>
             <a:extLst>
               <a:ext uri="{C572A759-6A51-4108-AA02-DFA0A04FC94B}">
-                <ma14:wrappingTextBoxFlag xmlns:ma14="http://schemas.microsoft.com/office/mac/drawingml/2011/main" val="1"/>
+                <ma14:wrappingTextBoxFlag xmlns:ma14="http://schemas.microsoft.com/office/mac/drawingml/2011/main" xmlns:a14="http://schemas.microsoft.com/office/drawing/2010/main" xmlns:m="http://schemas.openxmlformats.org/officeDocument/2006/math" xmlns="" val="1"/>
               </a:ext>
             </a:extLst>
           </p:spPr>
@@ -12599,7 +12415,7 @@
           <a:bodyPr lIns="45718" tIns="45718" rIns="45718" bIns="45718"/>
           <a:lstStyle/>
           <a:p>
-            <a:pPr/>
+            <a:endParaRPr/>
           </a:p>
         </p:txBody>
       </p:sp>
@@ -12628,7 +12444,7 @@
           <a:bodyPr lIns="45718" tIns="45718" rIns="45718" bIns="45718"/>
           <a:lstStyle/>
           <a:p>
-            <a:pPr/>
+            <a:endParaRPr/>
           </a:p>
         </p:txBody>
       </p:sp>
@@ -12657,7 +12473,7 @@
           <a:bodyPr lIns="45718" tIns="45718" rIns="45718" bIns="45718"/>
           <a:lstStyle/>
           <a:p>
-            <a:pPr/>
+            <a:endParaRPr/>
           </a:p>
         </p:txBody>
       </p:sp>
@@ -12684,9 +12500,7 @@
             <p:nvPr/>
           </p:nvPicPr>
           <p:blipFill>
-            <a:blip r:embed="rId8">
-              <a:extLst/>
-            </a:blip>
+            <a:blip r:embed="rId8"/>
             <a:stretch>
               <a:fillRect/>
             </a:stretch>
@@ -12715,9 +12529,7 @@
             <p:nvPr/>
           </p:nvPicPr>
           <p:blipFill>
-            <a:blip r:embed="rId9">
-              <a:extLst/>
-            </a:blip>
+            <a:blip r:embed="rId9"/>
             <a:stretch>
               <a:fillRect/>
             </a:stretch>
@@ -12789,9 +12601,7 @@
                 <p:nvPr/>
               </p:nvPicPr>
               <p:blipFill>
-                <a:blip r:embed="rId10">
-                  <a:extLst/>
-                </a:blip>
+                <a:blip r:embed="rId10"/>
                 <a:stretch>
                   <a:fillRect/>
                 </a:stretch>
@@ -12833,7 +12643,7 @@
                 <a:effectLst/>
                 <a:extLst>
                   <a:ext uri="{C572A759-6A51-4108-AA02-DFA0A04FC94B}">
-                    <ma14:wrappingTextBoxFlag xmlns:ma14="http://schemas.microsoft.com/office/mac/drawingml/2011/main" val="1"/>
+                    <ma14:wrappingTextBoxFlag xmlns:ma14="http://schemas.microsoft.com/office/mac/drawingml/2011/main" xmlns:a14="http://schemas.microsoft.com/office/drawing/2010/main" xmlns:m="http://schemas.openxmlformats.org/officeDocument/2006/math" xmlns="" val="1"/>
                   </a:ext>
                 </a:extLst>
               </p:spPr>
@@ -12852,7 +12662,6 @@
                   </a:lvl1pPr>
                 </a:lstStyle>
                 <a:p>
-                  <a:pPr/>
                   <a:r>
                     <a:t>Tracking</a:t>
                   </a:r>
@@ -12869,9 +12678,7 @@
               <p:nvPr/>
             </p:nvPicPr>
             <p:blipFill>
-              <a:blip r:embed="rId11">
-                <a:extLst/>
-              </a:blip>
+              <a:blip r:embed="rId11"/>
               <a:stretch>
                 <a:fillRect/>
               </a:stretch>
@@ -12901,9 +12708,7 @@
             <p:nvPr/>
           </p:nvPicPr>
           <p:blipFill>
-            <a:blip r:embed="rId12">
-              <a:extLst/>
-            </a:blip>
+            <a:blip r:embed="rId12"/>
             <a:stretch>
               <a:fillRect/>
             </a:stretch>
@@ -12933,9 +12738,7 @@
           <p:nvPr/>
         </p:nvPicPr>
         <p:blipFill>
-          <a:blip r:embed="rId13">
-            <a:extLst/>
-          </a:blip>
+          <a:blip r:embed="rId13"/>
           <a:stretch>
             <a:fillRect/>
           </a:stretch>
@@ -12958,12 +12761,12 @@
   <p:clrMapOvr>
     <a:masterClrMapping/>
   </p:clrMapOvr>
-  <p:transition xmlns:p14="http://schemas.microsoft.com/office/powerpoint/2010/main" spd="med" advClick="1"/>
+  <p:transition spd="med"/>
 </p:sld>
 </file>
 
 <file path=ppt/theme/theme1.xml><?xml version="1.0" encoding="utf-8"?>
-<a:theme xmlns:a="http://schemas.openxmlformats.org/drawingml/2006/main" xmlns:r="http://schemas.openxmlformats.org/officeDocument/2006/relationships" name="Simple Light">
+<a:theme xmlns:a="http://schemas.openxmlformats.org/drawingml/2006/main" name="Simple Light">
   <a:themeElements>
     <a:clrScheme name="Simple Light">
       <a:dk1>
@@ -13089,7 +12892,7 @@
       <a:effectStyleLst>
         <a:effectStyle>
           <a:effectLst>
-            <a:outerShdw sx="100000" sy="100000" kx="0" ky="0" algn="b" rotWithShape="0" blurRad="38100" dist="23000" dir="5400000">
+            <a:outerShdw blurRad="38100" dist="23000" dir="5400000" rotWithShape="0">
               <a:srgbClr val="000000">
                 <a:alpha val="35000"/>
               </a:srgbClr>
@@ -13098,7 +12901,7 @@
         </a:effectStyle>
         <a:effectStyle>
           <a:effectLst>
-            <a:outerShdw sx="100000" sy="100000" kx="0" ky="0" algn="b" rotWithShape="0" blurRad="38100" dist="23000" dir="5400000">
+            <a:outerShdw blurRad="38100" dist="23000" dir="5400000" rotWithShape="0">
               <a:srgbClr val="000000">
                 <a:alpha val="35000"/>
               </a:srgbClr>
@@ -13107,7 +12910,7 @@
         </a:effectStyle>
         <a:effectStyle>
           <a:effectLst>
-            <a:outerShdw sx="100000" sy="100000" kx="0" ky="0" algn="b" rotWithShape="0" blurRad="38100" dist="23000" dir="5400000">
+            <a:outerShdw blurRad="38100" dist="23000" dir="5400000" rotWithShape="0">
               <a:srgbClr val="000000">
                 <a:alpha val="35000"/>
               </a:srgbClr>
@@ -13181,7 +12984,7 @@
           <a:round/>
         </a:ln>
         <a:effectLst>
-          <a:outerShdw sx="100000" sy="100000" kx="0" ky="0" algn="b" rotWithShape="0" blurRad="38100" dist="23000" dir="5400000">
+          <a:outerShdw blurRad="38100" dist="23000" dir="5400000" rotWithShape="0">
             <a:srgbClr val="000000">
               <a:alpha val="35000"/>
             </a:srgbClr>
@@ -13189,7 +12992,7 @@
         </a:effectLst>
         <a:sp3d/>
       </a:spPr>
-      <a:bodyPr rot="0" spcFirstLastPara="1" vertOverflow="overflow" horzOverflow="overflow" vert="horz" wrap="square" lIns="45718" tIns="45718" rIns="45718" bIns="45718" numCol="1" spcCol="38100" rtlCol="0" anchor="ctr" upright="0">
+      <a:bodyPr rot="0" spcFirstLastPara="1" vertOverflow="overflow" horzOverflow="overflow" vert="horz" wrap="square" lIns="45718" tIns="45718" rIns="45718" bIns="45718" numCol="1" spcCol="38100" rtlCol="0" anchor="ctr">
         <a:spAutoFit/>
       </a:bodyPr>
       <a:lstStyle>
@@ -13208,7 +13011,7 @@
           <a:buFontTx/>
           <a:buNone/>
           <a:tabLst/>
-          <a:defRPr b="0" baseline="0" cap="none" i="0" spc="0" strike="noStrike" sz="1400" u="none" kumimoji="0" normalizeH="0">
+          <a:defRPr kumimoji="0" sz="1400" b="0" i="0" u="none" strike="noStrike" cap="none" spc="0" normalizeH="0" baseline="0">
             <a:ln>
               <a:noFill/>
             </a:ln>
@@ -13238,7 +13041,7 @@
           <a:buFontTx/>
           <a:buNone/>
           <a:tabLst/>
-          <a:defRPr b="0" baseline="0" cap="none" i="0" spc="0" strike="noStrike" sz="1800" u="none" kumimoji="0" normalizeH="0">
+          <a:defRPr kumimoji="0" sz="1800" b="0" i="0" u="none" strike="noStrike" cap="none" spc="0" normalizeH="0" baseline="0">
             <a:ln>
               <a:noFill/>
             </a:ln>
@@ -13264,7 +13067,7 @@
           <a:buFontTx/>
           <a:buNone/>
           <a:tabLst/>
-          <a:defRPr b="0" baseline="0" cap="none" i="0" spc="0" strike="noStrike" sz="1800" u="none" kumimoji="0" normalizeH="0">
+          <a:defRPr kumimoji="0" sz="1800" b="0" i="0" u="none" strike="noStrike" cap="none" spc="0" normalizeH="0" baseline="0">
             <a:ln>
               <a:noFill/>
             </a:ln>
@@ -13290,7 +13093,7 @@
           <a:buFontTx/>
           <a:buNone/>
           <a:tabLst/>
-          <a:defRPr b="0" baseline="0" cap="none" i="0" spc="0" strike="noStrike" sz="1800" u="none" kumimoji="0" normalizeH="0">
+          <a:defRPr kumimoji="0" sz="1800" b="0" i="0" u="none" strike="noStrike" cap="none" spc="0" normalizeH="0" baseline="0">
             <a:ln>
               <a:noFill/>
             </a:ln>
@@ -13316,7 +13119,7 @@
           <a:buFontTx/>
           <a:buNone/>
           <a:tabLst/>
-          <a:defRPr b="0" baseline="0" cap="none" i="0" spc="0" strike="noStrike" sz="1800" u="none" kumimoji="0" normalizeH="0">
+          <a:defRPr kumimoji="0" sz="1800" b="0" i="0" u="none" strike="noStrike" cap="none" spc="0" normalizeH="0" baseline="0">
             <a:ln>
               <a:noFill/>
             </a:ln>
@@ -13342,7 +13145,7 @@
           <a:buFontTx/>
           <a:buNone/>
           <a:tabLst/>
-          <a:defRPr b="0" baseline="0" cap="none" i="0" spc="0" strike="noStrike" sz="1800" u="none" kumimoji="0" normalizeH="0">
+          <a:defRPr kumimoji="0" sz="1800" b="0" i="0" u="none" strike="noStrike" cap="none" spc="0" normalizeH="0" baseline="0">
             <a:ln>
               <a:noFill/>
             </a:ln>
@@ -13368,7 +13171,7 @@
           <a:buFontTx/>
           <a:buNone/>
           <a:tabLst/>
-          <a:defRPr b="0" baseline="0" cap="none" i="0" spc="0" strike="noStrike" sz="1800" u="none" kumimoji="0" normalizeH="0">
+          <a:defRPr kumimoji="0" sz="1800" b="0" i="0" u="none" strike="noStrike" cap="none" spc="0" normalizeH="0" baseline="0">
             <a:ln>
               <a:noFill/>
             </a:ln>
@@ -13394,7 +13197,7 @@
           <a:buFontTx/>
           <a:buNone/>
           <a:tabLst/>
-          <a:defRPr b="0" baseline="0" cap="none" i="0" spc="0" strike="noStrike" sz="1800" u="none" kumimoji="0" normalizeH="0">
+          <a:defRPr kumimoji="0" sz="1800" b="0" i="0" u="none" strike="noStrike" cap="none" spc="0" normalizeH="0" baseline="0">
             <a:ln>
               <a:noFill/>
             </a:ln>
@@ -13420,7 +13223,7 @@
           <a:buFontTx/>
           <a:buNone/>
           <a:tabLst/>
-          <a:defRPr b="0" baseline="0" cap="none" i="0" spc="0" strike="noStrike" sz="1800" u="none" kumimoji="0" normalizeH="0">
+          <a:defRPr kumimoji="0" sz="1800" b="0" i="0" u="none" strike="noStrike" cap="none" spc="0" normalizeH="0" baseline="0">
             <a:ln>
               <a:noFill/>
             </a:ln>
@@ -13446,7 +13249,7 @@
           <a:buFontTx/>
           <a:buNone/>
           <a:tabLst/>
-          <a:defRPr b="0" baseline="0" cap="none" i="0" spc="0" strike="noStrike" sz="1800" u="none" kumimoji="0" normalizeH="0">
+          <a:defRPr kumimoji="0" sz="1800" b="0" i="0" u="none" strike="noStrike" cap="none" spc="0" normalizeH="0" baseline="0">
             <a:ln>
               <a:noFill/>
             </a:ln>
@@ -13459,9 +13262,15 @@
         </a:lvl9pPr>
       </a:lstStyle>
       <a:style>
-        <a:lnRef idx="0"/>
-        <a:fillRef idx="0"/>
-        <a:effectRef idx="0"/>
+        <a:lnRef idx="0">
+          <a:scrgbClr r="0" g="0" b="0"/>
+        </a:lnRef>
+        <a:fillRef idx="0">
+          <a:scrgbClr r="0" g="0" b="0"/>
+        </a:fillRef>
+        <a:effectRef idx="0">
+          <a:scrgbClr r="0" g="0" b="0"/>
+        </a:effectRef>
         <a:fontRef idx="none"/>
       </a:style>
     </a:spDef>
@@ -13476,7 +13285,7 @@
           <a:round/>
         </a:ln>
         <a:effectLst>
-          <a:outerShdw sx="100000" sy="100000" kx="0" ky="0" algn="b" rotWithShape="0" blurRad="38100" dist="23000" dir="5400000">
+          <a:outerShdw blurRad="38100" dist="23000" dir="5400000" rotWithShape="0">
             <a:srgbClr val="000000">
               <a:alpha val="35000"/>
             </a:srgbClr>
@@ -13484,7 +13293,7 @@
         </a:effectLst>
         <a:sp3d/>
       </a:spPr>
-      <a:bodyPr rot="0" spcFirstLastPara="1" vertOverflow="overflow" horzOverflow="overflow" vert="horz" wrap="square" lIns="91439" tIns="45719" rIns="91439" bIns="45719" numCol="1" spcCol="38100" rtlCol="0" anchor="t" upright="0">
+      <a:bodyPr rot="0" spcFirstLastPara="1" vertOverflow="overflow" horzOverflow="overflow" vert="horz" wrap="square" lIns="91439" tIns="45719" rIns="91439" bIns="45719" numCol="1" spcCol="38100" rtlCol="0" anchor="t">
         <a:noAutofit/>
       </a:bodyPr>
       <a:lstStyle>
@@ -13503,7 +13312,7 @@
           <a:buFontTx/>
           <a:buNone/>
           <a:tabLst/>
-          <a:defRPr b="0" baseline="0" cap="none" i="0" spc="0" strike="noStrike" sz="1800" u="none" kumimoji="0" normalizeH="0">
+          <a:defRPr kumimoji="0" sz="1800" b="0" i="0" u="none" strike="noStrike" cap="none" spc="0" normalizeH="0" baseline="0">
             <a:ln>
               <a:noFill/>
             </a:ln>
@@ -13529,7 +13338,7 @@
           <a:buFontTx/>
           <a:buNone/>
           <a:tabLst/>
-          <a:defRPr b="0" baseline="0" cap="none" i="0" spc="0" strike="noStrike" sz="1800" u="none" kumimoji="0" normalizeH="0">
+          <a:defRPr kumimoji="0" sz="1800" b="0" i="0" u="none" strike="noStrike" cap="none" spc="0" normalizeH="0" baseline="0">
             <a:ln>
               <a:noFill/>
             </a:ln>
@@ -13555,7 +13364,7 @@
           <a:buFontTx/>
           <a:buNone/>
           <a:tabLst/>
-          <a:defRPr b="0" baseline="0" cap="none" i="0" spc="0" strike="noStrike" sz="1800" u="none" kumimoji="0" normalizeH="0">
+          <a:defRPr kumimoji="0" sz="1800" b="0" i="0" u="none" strike="noStrike" cap="none" spc="0" normalizeH="0" baseline="0">
             <a:ln>
               <a:noFill/>
             </a:ln>
@@ -13581,7 +13390,7 @@
           <a:buFontTx/>
           <a:buNone/>
           <a:tabLst/>
-          <a:defRPr b="0" baseline="0" cap="none" i="0" spc="0" strike="noStrike" sz="1800" u="none" kumimoji="0" normalizeH="0">
+          <a:defRPr kumimoji="0" sz="1800" b="0" i="0" u="none" strike="noStrike" cap="none" spc="0" normalizeH="0" baseline="0">
             <a:ln>
               <a:noFill/>
             </a:ln>
@@ -13607,7 +13416,7 @@
           <a:buFontTx/>
           <a:buNone/>
           <a:tabLst/>
-          <a:defRPr b="0" baseline="0" cap="none" i="0" spc="0" strike="noStrike" sz="1800" u="none" kumimoji="0" normalizeH="0">
+          <a:defRPr kumimoji="0" sz="1800" b="0" i="0" u="none" strike="noStrike" cap="none" spc="0" normalizeH="0" baseline="0">
             <a:ln>
               <a:noFill/>
             </a:ln>
@@ -13633,7 +13442,7 @@
           <a:buFontTx/>
           <a:buNone/>
           <a:tabLst/>
-          <a:defRPr b="0" baseline="0" cap="none" i="0" spc="0" strike="noStrike" sz="1800" u="none" kumimoji="0" normalizeH="0">
+          <a:defRPr kumimoji="0" sz="1800" b="0" i="0" u="none" strike="noStrike" cap="none" spc="0" normalizeH="0" baseline="0">
             <a:ln>
               <a:noFill/>
             </a:ln>
@@ -13659,7 +13468,7 @@
           <a:buFontTx/>
           <a:buNone/>
           <a:tabLst/>
-          <a:defRPr b="0" baseline="0" cap="none" i="0" spc="0" strike="noStrike" sz="1800" u="none" kumimoji="0" normalizeH="0">
+          <a:defRPr kumimoji="0" sz="1800" b="0" i="0" u="none" strike="noStrike" cap="none" spc="0" normalizeH="0" baseline="0">
             <a:ln>
               <a:noFill/>
             </a:ln>
@@ -13685,7 +13494,7 @@
           <a:buFontTx/>
           <a:buNone/>
           <a:tabLst/>
-          <a:defRPr b="0" baseline="0" cap="none" i="0" spc="0" strike="noStrike" sz="1800" u="none" kumimoji="0" normalizeH="0">
+          <a:defRPr kumimoji="0" sz="1800" b="0" i="0" u="none" strike="noStrike" cap="none" spc="0" normalizeH="0" baseline="0">
             <a:ln>
               <a:noFill/>
             </a:ln>
@@ -13711,7 +13520,7 @@
           <a:buFontTx/>
           <a:buNone/>
           <a:tabLst/>
-          <a:defRPr b="0" baseline="0" cap="none" i="0" spc="0" strike="noStrike" sz="1800" u="none" kumimoji="0" normalizeH="0">
+          <a:defRPr kumimoji="0" sz="1800" b="0" i="0" u="none" strike="noStrike" cap="none" spc="0" normalizeH="0" baseline="0">
             <a:ln>
               <a:noFill/>
             </a:ln>
@@ -13737,7 +13546,7 @@
           <a:buFontTx/>
           <a:buNone/>
           <a:tabLst/>
-          <a:defRPr b="0" baseline="0" cap="none" i="0" spc="0" strike="noStrike" sz="1800" u="none" kumimoji="0" normalizeH="0">
+          <a:defRPr kumimoji="0" sz="1800" b="0" i="0" u="none" strike="noStrike" cap="none" spc="0" normalizeH="0" baseline="0">
             <a:ln>
               <a:noFill/>
             </a:ln>
@@ -13750,9 +13559,15 @@
         </a:lvl9pPr>
       </a:lstStyle>
       <a:style>
-        <a:lnRef idx="0"/>
-        <a:fillRef idx="0"/>
-        <a:effectRef idx="0"/>
+        <a:lnRef idx="0">
+          <a:scrgbClr r="0" g="0" b="0"/>
+        </a:lnRef>
+        <a:fillRef idx="0">
+          <a:scrgbClr r="0" g="0" b="0"/>
+        </a:fillRef>
+        <a:effectRef idx="0">
+          <a:scrgbClr r="0" g="0" b="0"/>
+        </a:effectRef>
         <a:fontRef idx="none"/>
       </a:style>
     </a:lnDef>
@@ -13766,7 +13581,7 @@
         <a:effectLst/>
         <a:sp3d/>
       </a:spPr>
-      <a:bodyPr rot="0" spcFirstLastPara="1" vertOverflow="overflow" horzOverflow="overflow" vert="horz" wrap="square" lIns="45718" tIns="45718" rIns="45718" bIns="45718" numCol="1" spcCol="38100" rtlCol="0" anchor="t" upright="0">
+      <a:bodyPr rot="0" spcFirstLastPara="1" vertOverflow="overflow" horzOverflow="overflow" vert="horz" wrap="square" lIns="45718" tIns="45718" rIns="45718" bIns="45718" numCol="1" spcCol="38100" rtlCol="0" anchor="t">
         <a:spAutoFit/>
       </a:bodyPr>
       <a:lstStyle>
@@ -13785,7 +13600,7 @@
           <a:buFontTx/>
           <a:buNone/>
           <a:tabLst/>
-          <a:defRPr b="0" baseline="0" cap="none" i="0" spc="0" strike="noStrike" sz="1400" u="none" kumimoji="0" normalizeH="0">
+          <a:defRPr kumimoji="0" sz="1400" b="0" i="0" u="none" strike="noStrike" cap="none" spc="0" normalizeH="0" baseline="0">
             <a:ln>
               <a:noFill/>
             </a:ln>
@@ -13815,7 +13630,7 @@
           <a:buFontTx/>
           <a:buNone/>
           <a:tabLst/>
-          <a:defRPr b="0" baseline="0" cap="none" i="0" spc="0" strike="noStrike" sz="1800" u="none" kumimoji="0" normalizeH="0">
+          <a:defRPr kumimoji="0" sz="1800" b="0" i="0" u="none" strike="noStrike" cap="none" spc="0" normalizeH="0" baseline="0">
             <a:ln>
               <a:noFill/>
             </a:ln>
@@ -13841,7 +13656,7 @@
           <a:buFontTx/>
           <a:buNone/>
           <a:tabLst/>
-          <a:defRPr b="0" baseline="0" cap="none" i="0" spc="0" strike="noStrike" sz="1800" u="none" kumimoji="0" normalizeH="0">
+          <a:defRPr kumimoji="0" sz="1800" b="0" i="0" u="none" strike="noStrike" cap="none" spc="0" normalizeH="0" baseline="0">
             <a:ln>
               <a:noFill/>
             </a:ln>
@@ -13867,7 +13682,7 @@
           <a:buFontTx/>
           <a:buNone/>
           <a:tabLst/>
-          <a:defRPr b="0" baseline="0" cap="none" i="0" spc="0" strike="noStrike" sz="1800" u="none" kumimoji="0" normalizeH="0">
+          <a:defRPr kumimoji="0" sz="1800" b="0" i="0" u="none" strike="noStrike" cap="none" spc="0" normalizeH="0" baseline="0">
             <a:ln>
               <a:noFill/>
             </a:ln>
@@ -13893,7 +13708,7 @@
           <a:buFontTx/>
           <a:buNone/>
           <a:tabLst/>
-          <a:defRPr b="0" baseline="0" cap="none" i="0" spc="0" strike="noStrike" sz="1800" u="none" kumimoji="0" normalizeH="0">
+          <a:defRPr kumimoji="0" sz="1800" b="0" i="0" u="none" strike="noStrike" cap="none" spc="0" normalizeH="0" baseline="0">
             <a:ln>
               <a:noFill/>
             </a:ln>
@@ -13919,7 +13734,7 @@
           <a:buFontTx/>
           <a:buNone/>
           <a:tabLst/>
-          <a:defRPr b="0" baseline="0" cap="none" i="0" spc="0" strike="noStrike" sz="1800" u="none" kumimoji="0" normalizeH="0">
+          <a:defRPr kumimoji="0" sz="1800" b="0" i="0" u="none" strike="noStrike" cap="none" spc="0" normalizeH="0" baseline="0">
             <a:ln>
               <a:noFill/>
             </a:ln>
@@ -13945,7 +13760,7 @@
           <a:buFontTx/>
           <a:buNone/>
           <a:tabLst/>
-          <a:defRPr b="0" baseline="0" cap="none" i="0" spc="0" strike="noStrike" sz="1800" u="none" kumimoji="0" normalizeH="0">
+          <a:defRPr kumimoji="0" sz="1800" b="0" i="0" u="none" strike="noStrike" cap="none" spc="0" normalizeH="0" baseline="0">
             <a:ln>
               <a:noFill/>
             </a:ln>
@@ -13971,7 +13786,7 @@
           <a:buFontTx/>
           <a:buNone/>
           <a:tabLst/>
-          <a:defRPr b="0" baseline="0" cap="none" i="0" spc="0" strike="noStrike" sz="1800" u="none" kumimoji="0" normalizeH="0">
+          <a:defRPr kumimoji="0" sz="1800" b="0" i="0" u="none" strike="noStrike" cap="none" spc="0" normalizeH="0" baseline="0">
             <a:ln>
               <a:noFill/>
             </a:ln>
@@ -13997,7 +13812,7 @@
           <a:buFontTx/>
           <a:buNone/>
           <a:tabLst/>
-          <a:defRPr b="0" baseline="0" cap="none" i="0" spc="0" strike="noStrike" sz="1800" u="none" kumimoji="0" normalizeH="0">
+          <a:defRPr kumimoji="0" sz="1800" b="0" i="0" u="none" strike="noStrike" cap="none" spc="0" normalizeH="0" baseline="0">
             <a:ln>
               <a:noFill/>
             </a:ln>
@@ -14023,7 +13838,7 @@
           <a:buFontTx/>
           <a:buNone/>
           <a:tabLst/>
-          <a:defRPr b="0" baseline="0" cap="none" i="0" spc="0" strike="noStrike" sz="1800" u="none" kumimoji="0" normalizeH="0">
+          <a:defRPr kumimoji="0" sz="1800" b="0" i="0" u="none" strike="noStrike" cap="none" spc="0" normalizeH="0" baseline="0">
             <a:ln>
               <a:noFill/>
             </a:ln>
@@ -14036,18 +13851,25 @@
         </a:lvl9pPr>
       </a:lstStyle>
       <a:style>
-        <a:lnRef idx="0"/>
-        <a:fillRef idx="0"/>
-        <a:effectRef idx="0"/>
+        <a:lnRef idx="0">
+          <a:scrgbClr r="0" g="0" b="0"/>
+        </a:lnRef>
+        <a:fillRef idx="0">
+          <a:scrgbClr r="0" g="0" b="0"/>
+        </a:fillRef>
+        <a:effectRef idx="0">
+          <a:scrgbClr r="0" g="0" b="0"/>
+        </a:effectRef>
         <a:fontRef idx="none"/>
       </a:style>
     </a:txDef>
   </a:objectDefaults>
+  <a:extraClrSchemeLst/>
 </a:theme>
 </file>
 
 <file path=ppt/theme/theme2.xml><?xml version="1.0" encoding="utf-8"?>
-<a:theme xmlns:a="http://schemas.openxmlformats.org/drawingml/2006/main" xmlns:r="http://schemas.openxmlformats.org/officeDocument/2006/relationships" name="Simple Light">
+<a:theme xmlns:a="http://schemas.openxmlformats.org/drawingml/2006/main" name="Simple Light">
   <a:themeElements>
     <a:clrScheme name="Simple Light">
       <a:dk1>
@@ -14173,7 +13995,7 @@
       <a:effectStyleLst>
         <a:effectStyle>
           <a:effectLst>
-            <a:outerShdw sx="100000" sy="100000" kx="0" ky="0" algn="b" rotWithShape="0" blurRad="38100" dist="23000" dir="5400000">
+            <a:outerShdw blurRad="38100" dist="23000" dir="5400000" rotWithShape="0">
               <a:srgbClr val="000000">
                 <a:alpha val="35000"/>
               </a:srgbClr>
@@ -14182,7 +14004,7 @@
         </a:effectStyle>
         <a:effectStyle>
           <a:effectLst>
-            <a:outerShdw sx="100000" sy="100000" kx="0" ky="0" algn="b" rotWithShape="0" blurRad="38100" dist="23000" dir="5400000">
+            <a:outerShdw blurRad="38100" dist="23000" dir="5400000" rotWithShape="0">
               <a:srgbClr val="000000">
                 <a:alpha val="35000"/>
               </a:srgbClr>
@@ -14191,7 +14013,7 @@
         </a:effectStyle>
         <a:effectStyle>
           <a:effectLst>
-            <a:outerShdw sx="100000" sy="100000" kx="0" ky="0" algn="b" rotWithShape="0" blurRad="38100" dist="23000" dir="5400000">
+            <a:outerShdw blurRad="38100" dist="23000" dir="5400000" rotWithShape="0">
               <a:srgbClr val="000000">
                 <a:alpha val="35000"/>
               </a:srgbClr>
@@ -14265,7 +14087,7 @@
           <a:round/>
         </a:ln>
         <a:effectLst>
-          <a:outerShdw sx="100000" sy="100000" kx="0" ky="0" algn="b" rotWithShape="0" blurRad="38100" dist="23000" dir="5400000">
+          <a:outerShdw blurRad="38100" dist="23000" dir="5400000" rotWithShape="0">
             <a:srgbClr val="000000">
               <a:alpha val="35000"/>
             </a:srgbClr>
@@ -14273,7 +14095,7 @@
         </a:effectLst>
         <a:sp3d/>
       </a:spPr>
-      <a:bodyPr rot="0" spcFirstLastPara="1" vertOverflow="overflow" horzOverflow="overflow" vert="horz" wrap="square" lIns="45718" tIns="45718" rIns="45718" bIns="45718" numCol="1" spcCol="38100" rtlCol="0" anchor="ctr" upright="0">
+      <a:bodyPr rot="0" spcFirstLastPara="1" vertOverflow="overflow" horzOverflow="overflow" vert="horz" wrap="square" lIns="45718" tIns="45718" rIns="45718" bIns="45718" numCol="1" spcCol="38100" rtlCol="0" anchor="ctr">
         <a:spAutoFit/>
       </a:bodyPr>
       <a:lstStyle>
@@ -14292,7 +14114,7 @@
           <a:buFontTx/>
           <a:buNone/>
           <a:tabLst/>
-          <a:defRPr b="0" baseline="0" cap="none" i="0" spc="0" strike="noStrike" sz="1400" u="none" kumimoji="0" normalizeH="0">
+          <a:defRPr kumimoji="0" sz="1400" b="0" i="0" u="none" strike="noStrike" cap="none" spc="0" normalizeH="0" baseline="0">
             <a:ln>
               <a:noFill/>
             </a:ln>
@@ -14322,7 +14144,7 @@
           <a:buFontTx/>
           <a:buNone/>
           <a:tabLst/>
-          <a:defRPr b="0" baseline="0" cap="none" i="0" spc="0" strike="noStrike" sz="1800" u="none" kumimoji="0" normalizeH="0">
+          <a:defRPr kumimoji="0" sz="1800" b="0" i="0" u="none" strike="noStrike" cap="none" spc="0" normalizeH="0" baseline="0">
             <a:ln>
               <a:noFill/>
             </a:ln>
@@ -14348,7 +14170,7 @@
           <a:buFontTx/>
           <a:buNone/>
           <a:tabLst/>
-          <a:defRPr b="0" baseline="0" cap="none" i="0" spc="0" strike="noStrike" sz="1800" u="none" kumimoji="0" normalizeH="0">
+          <a:defRPr kumimoji="0" sz="1800" b="0" i="0" u="none" strike="noStrike" cap="none" spc="0" normalizeH="0" baseline="0">
             <a:ln>
               <a:noFill/>
             </a:ln>
@@ -14374,7 +14196,7 @@
           <a:buFontTx/>
           <a:buNone/>
           <a:tabLst/>
-          <a:defRPr b="0" baseline="0" cap="none" i="0" spc="0" strike="noStrike" sz="1800" u="none" kumimoji="0" normalizeH="0">
+          <a:defRPr kumimoji="0" sz="1800" b="0" i="0" u="none" strike="noStrike" cap="none" spc="0" normalizeH="0" baseline="0">
             <a:ln>
               <a:noFill/>
             </a:ln>
@@ -14400,7 +14222,7 @@
           <a:buFontTx/>
           <a:buNone/>
           <a:tabLst/>
-          <a:defRPr b="0" baseline="0" cap="none" i="0" spc="0" strike="noStrike" sz="1800" u="none" kumimoji="0" normalizeH="0">
+          <a:defRPr kumimoji="0" sz="1800" b="0" i="0" u="none" strike="noStrike" cap="none" spc="0" normalizeH="0" baseline="0">
             <a:ln>
               <a:noFill/>
             </a:ln>
@@ -14426,7 +14248,7 @@
           <a:buFontTx/>
           <a:buNone/>
           <a:tabLst/>
-          <a:defRPr b="0" baseline="0" cap="none" i="0" spc="0" strike="noStrike" sz="1800" u="none" kumimoji="0" normalizeH="0">
+          <a:defRPr kumimoji="0" sz="1800" b="0" i="0" u="none" strike="noStrike" cap="none" spc="0" normalizeH="0" baseline="0">
             <a:ln>
               <a:noFill/>
             </a:ln>
@@ -14452,7 +14274,7 @@
           <a:buFontTx/>
           <a:buNone/>
           <a:tabLst/>
-          <a:defRPr b="0" baseline="0" cap="none" i="0" spc="0" strike="noStrike" sz="1800" u="none" kumimoji="0" normalizeH="0">
+          <a:defRPr kumimoji="0" sz="1800" b="0" i="0" u="none" strike="noStrike" cap="none" spc="0" normalizeH="0" baseline="0">
             <a:ln>
               <a:noFill/>
             </a:ln>
@@ -14478,7 +14300,7 @@
           <a:buFontTx/>
           <a:buNone/>
           <a:tabLst/>
-          <a:defRPr b="0" baseline="0" cap="none" i="0" spc="0" strike="noStrike" sz="1800" u="none" kumimoji="0" normalizeH="0">
+          <a:defRPr kumimoji="0" sz="1800" b="0" i="0" u="none" strike="noStrike" cap="none" spc="0" normalizeH="0" baseline="0">
             <a:ln>
               <a:noFill/>
             </a:ln>
@@ -14504,7 +14326,7 @@
           <a:buFontTx/>
           <a:buNone/>
           <a:tabLst/>
-          <a:defRPr b="0" baseline="0" cap="none" i="0" spc="0" strike="noStrike" sz="1800" u="none" kumimoji="0" normalizeH="0">
+          <a:defRPr kumimoji="0" sz="1800" b="0" i="0" u="none" strike="noStrike" cap="none" spc="0" normalizeH="0" baseline="0">
             <a:ln>
               <a:noFill/>
             </a:ln>
@@ -14530,7 +14352,7 @@
           <a:buFontTx/>
           <a:buNone/>
           <a:tabLst/>
-          <a:defRPr b="0" baseline="0" cap="none" i="0" spc="0" strike="noStrike" sz="1800" u="none" kumimoji="0" normalizeH="0">
+          <a:defRPr kumimoji="0" sz="1800" b="0" i="0" u="none" strike="noStrike" cap="none" spc="0" normalizeH="0" baseline="0">
             <a:ln>
               <a:noFill/>
             </a:ln>
@@ -14543,9 +14365,15 @@
         </a:lvl9pPr>
       </a:lstStyle>
       <a:style>
-        <a:lnRef idx="0"/>
-        <a:fillRef idx="0"/>
-        <a:effectRef idx="0"/>
+        <a:lnRef idx="0">
+          <a:scrgbClr r="0" g="0" b="0"/>
+        </a:lnRef>
+        <a:fillRef idx="0">
+          <a:scrgbClr r="0" g="0" b="0"/>
+        </a:fillRef>
+        <a:effectRef idx="0">
+          <a:scrgbClr r="0" g="0" b="0"/>
+        </a:effectRef>
         <a:fontRef idx="none"/>
       </a:style>
     </a:spDef>
@@ -14560,7 +14388,7 @@
           <a:round/>
         </a:ln>
         <a:effectLst>
-          <a:outerShdw sx="100000" sy="100000" kx="0" ky="0" algn="b" rotWithShape="0" blurRad="38100" dist="23000" dir="5400000">
+          <a:outerShdw blurRad="38100" dist="23000" dir="5400000" rotWithShape="0">
             <a:srgbClr val="000000">
               <a:alpha val="35000"/>
             </a:srgbClr>
@@ -14568,7 +14396,7 @@
         </a:effectLst>
         <a:sp3d/>
       </a:spPr>
-      <a:bodyPr rot="0" spcFirstLastPara="1" vertOverflow="overflow" horzOverflow="overflow" vert="horz" wrap="square" lIns="91439" tIns="45719" rIns="91439" bIns="45719" numCol="1" spcCol="38100" rtlCol="0" anchor="t" upright="0">
+      <a:bodyPr rot="0" spcFirstLastPara="1" vertOverflow="overflow" horzOverflow="overflow" vert="horz" wrap="square" lIns="91439" tIns="45719" rIns="91439" bIns="45719" numCol="1" spcCol="38100" rtlCol="0" anchor="t">
         <a:noAutofit/>
       </a:bodyPr>
       <a:lstStyle>
@@ -14587,7 +14415,7 @@
           <a:buFontTx/>
           <a:buNone/>
           <a:tabLst/>
-          <a:defRPr b="0" baseline="0" cap="none" i="0" spc="0" strike="noStrike" sz="1800" u="none" kumimoji="0" normalizeH="0">
+          <a:defRPr kumimoji="0" sz="1800" b="0" i="0" u="none" strike="noStrike" cap="none" spc="0" normalizeH="0" baseline="0">
             <a:ln>
               <a:noFill/>
             </a:ln>
@@ -14613,7 +14441,7 @@
           <a:buFontTx/>
           <a:buNone/>
           <a:tabLst/>
-          <a:defRPr b="0" baseline="0" cap="none" i="0" spc="0" strike="noStrike" sz="1800" u="none" kumimoji="0" normalizeH="0">
+          <a:defRPr kumimoji="0" sz="1800" b="0" i="0" u="none" strike="noStrike" cap="none" spc="0" normalizeH="0" baseline="0">
             <a:ln>
               <a:noFill/>
             </a:ln>
@@ -14639,7 +14467,7 @@
           <a:buFontTx/>
           <a:buNone/>
           <a:tabLst/>
-          <a:defRPr b="0" baseline="0" cap="none" i="0" spc="0" strike="noStrike" sz="1800" u="none" kumimoji="0" normalizeH="0">
+          <a:defRPr kumimoji="0" sz="1800" b="0" i="0" u="none" strike="noStrike" cap="none" spc="0" normalizeH="0" baseline="0">
             <a:ln>
               <a:noFill/>
             </a:ln>
@@ -14665,7 +14493,7 @@
           <a:buFontTx/>
           <a:buNone/>
           <a:tabLst/>
-          <a:defRPr b="0" baseline="0" cap="none" i="0" spc="0" strike="noStrike" sz="1800" u="none" kumimoji="0" normalizeH="0">
+          <a:defRPr kumimoji="0" sz="1800" b="0" i="0" u="none" strike="noStrike" cap="none" spc="0" normalizeH="0" baseline="0">
             <a:ln>
               <a:noFill/>
             </a:ln>
@@ -14691,7 +14519,7 @@
           <a:buFontTx/>
           <a:buNone/>
           <a:tabLst/>
-          <a:defRPr b="0" baseline="0" cap="none" i="0" spc="0" strike="noStrike" sz="1800" u="none" kumimoji="0" normalizeH="0">
+          <a:defRPr kumimoji="0" sz="1800" b="0" i="0" u="none" strike="noStrike" cap="none" spc="0" normalizeH="0" baseline="0">
             <a:ln>
               <a:noFill/>
             </a:ln>
@@ -14717,7 +14545,7 @@
           <a:buFontTx/>
           <a:buNone/>
           <a:tabLst/>
-          <a:defRPr b="0" baseline="0" cap="none" i="0" spc="0" strike="noStrike" sz="1800" u="none" kumimoji="0" normalizeH="0">
+          <a:defRPr kumimoji="0" sz="1800" b="0" i="0" u="none" strike="noStrike" cap="none" spc="0" normalizeH="0" baseline="0">
             <a:ln>
               <a:noFill/>
             </a:ln>
@@ -14743,7 +14571,7 @@
           <a:buFontTx/>
           <a:buNone/>
           <a:tabLst/>
-          <a:defRPr b="0" baseline="0" cap="none" i="0" spc="0" strike="noStrike" sz="1800" u="none" kumimoji="0" normalizeH="0">
+          <a:defRPr kumimoji="0" sz="1800" b="0" i="0" u="none" strike="noStrike" cap="none" spc="0" normalizeH="0" baseline="0">
             <a:ln>
               <a:noFill/>
             </a:ln>
@@ -14769,7 +14597,7 @@
           <a:buFontTx/>
           <a:buNone/>
           <a:tabLst/>
-          <a:defRPr b="0" baseline="0" cap="none" i="0" spc="0" strike="noStrike" sz="1800" u="none" kumimoji="0" normalizeH="0">
+          <a:defRPr kumimoji="0" sz="1800" b="0" i="0" u="none" strike="noStrike" cap="none" spc="0" normalizeH="0" baseline="0">
             <a:ln>
               <a:noFill/>
             </a:ln>
@@ -14795,7 +14623,7 @@
           <a:buFontTx/>
           <a:buNone/>
           <a:tabLst/>
-          <a:defRPr b="0" baseline="0" cap="none" i="0" spc="0" strike="noStrike" sz="1800" u="none" kumimoji="0" normalizeH="0">
+          <a:defRPr kumimoji="0" sz="1800" b="0" i="0" u="none" strike="noStrike" cap="none" spc="0" normalizeH="0" baseline="0">
             <a:ln>
               <a:noFill/>
             </a:ln>
@@ -14821,7 +14649,7 @@
           <a:buFontTx/>
           <a:buNone/>
           <a:tabLst/>
-          <a:defRPr b="0" baseline="0" cap="none" i="0" spc="0" strike="noStrike" sz="1800" u="none" kumimoji="0" normalizeH="0">
+          <a:defRPr kumimoji="0" sz="1800" b="0" i="0" u="none" strike="noStrike" cap="none" spc="0" normalizeH="0" baseline="0">
             <a:ln>
               <a:noFill/>
             </a:ln>
@@ -14834,9 +14662,15 @@
         </a:lvl9pPr>
       </a:lstStyle>
       <a:style>
-        <a:lnRef idx="0"/>
-        <a:fillRef idx="0"/>
-        <a:effectRef idx="0"/>
+        <a:lnRef idx="0">
+          <a:scrgbClr r="0" g="0" b="0"/>
+        </a:lnRef>
+        <a:fillRef idx="0">
+          <a:scrgbClr r="0" g="0" b="0"/>
+        </a:fillRef>
+        <a:effectRef idx="0">
+          <a:scrgbClr r="0" g="0" b="0"/>
+        </a:effectRef>
         <a:fontRef idx="none"/>
       </a:style>
     </a:lnDef>
@@ -14850,7 +14684,7 @@
         <a:effectLst/>
         <a:sp3d/>
       </a:spPr>
-      <a:bodyPr rot="0" spcFirstLastPara="1" vertOverflow="overflow" horzOverflow="overflow" vert="horz" wrap="square" lIns="45718" tIns="45718" rIns="45718" bIns="45718" numCol="1" spcCol="38100" rtlCol="0" anchor="t" upright="0">
+      <a:bodyPr rot="0" spcFirstLastPara="1" vertOverflow="overflow" horzOverflow="overflow" vert="horz" wrap="square" lIns="45718" tIns="45718" rIns="45718" bIns="45718" numCol="1" spcCol="38100" rtlCol="0" anchor="t">
         <a:spAutoFit/>
       </a:bodyPr>
       <a:lstStyle>
@@ -14869,7 +14703,7 @@
           <a:buFontTx/>
           <a:buNone/>
           <a:tabLst/>
-          <a:defRPr b="0" baseline="0" cap="none" i="0" spc="0" strike="noStrike" sz="1400" u="none" kumimoji="0" normalizeH="0">
+          <a:defRPr kumimoji="0" sz="1400" b="0" i="0" u="none" strike="noStrike" cap="none" spc="0" normalizeH="0" baseline="0">
             <a:ln>
               <a:noFill/>
             </a:ln>
@@ -14899,7 +14733,7 @@
           <a:buFontTx/>
           <a:buNone/>
           <a:tabLst/>
-          <a:defRPr b="0" baseline="0" cap="none" i="0" spc="0" strike="noStrike" sz="1800" u="none" kumimoji="0" normalizeH="0">
+          <a:defRPr kumimoji="0" sz="1800" b="0" i="0" u="none" strike="noStrike" cap="none" spc="0" normalizeH="0" baseline="0">
             <a:ln>
               <a:noFill/>
             </a:ln>
@@ -14925,7 +14759,7 @@
           <a:buFontTx/>
           <a:buNone/>
           <a:tabLst/>
-          <a:defRPr b="0" baseline="0" cap="none" i="0" spc="0" strike="noStrike" sz="1800" u="none" kumimoji="0" normalizeH="0">
+          <a:defRPr kumimoji="0" sz="1800" b="0" i="0" u="none" strike="noStrike" cap="none" spc="0" normalizeH="0" baseline="0">
             <a:ln>
               <a:noFill/>
             </a:ln>
@@ -14951,7 +14785,7 @@
           <a:buFontTx/>
           <a:buNone/>
           <a:tabLst/>
-          <a:defRPr b="0" baseline="0" cap="none" i="0" spc="0" strike="noStrike" sz="1800" u="none" kumimoji="0" normalizeH="0">
+          <a:defRPr kumimoji="0" sz="1800" b="0" i="0" u="none" strike="noStrike" cap="none" spc="0" normalizeH="0" baseline="0">
             <a:ln>
               <a:noFill/>
             </a:ln>
@@ -14977,7 +14811,7 @@
           <a:buFontTx/>
           <a:buNone/>
           <a:tabLst/>
-          <a:defRPr b="0" baseline="0" cap="none" i="0" spc="0" strike="noStrike" sz="1800" u="none" kumimoji="0" normalizeH="0">
+          <a:defRPr kumimoji="0" sz="1800" b="0" i="0" u="none" strike="noStrike" cap="none" spc="0" normalizeH="0" baseline="0">
             <a:ln>
               <a:noFill/>
             </a:ln>
@@ -15003,7 +14837,7 @@
           <a:buFontTx/>
           <a:buNone/>
           <a:tabLst/>
-          <a:defRPr b="0" baseline="0" cap="none" i="0" spc="0" strike="noStrike" sz="1800" u="none" kumimoji="0" normalizeH="0">
+          <a:defRPr kumimoji="0" sz="1800" b="0" i="0" u="none" strike="noStrike" cap="none" spc="0" normalizeH="0" baseline="0">
             <a:ln>
               <a:noFill/>
             </a:ln>
@@ -15029,7 +14863,7 @@
           <a:buFontTx/>
           <a:buNone/>
           <a:tabLst/>
-          <a:defRPr b="0" baseline="0" cap="none" i="0" spc="0" strike="noStrike" sz="1800" u="none" kumimoji="0" normalizeH="0">
+          <a:defRPr kumimoji="0" sz="1800" b="0" i="0" u="none" strike="noStrike" cap="none" spc="0" normalizeH="0" baseline="0">
             <a:ln>
               <a:noFill/>
             </a:ln>
@@ -15055,7 +14889,7 @@
           <a:buFontTx/>
           <a:buNone/>
           <a:tabLst/>
-          <a:defRPr b="0" baseline="0" cap="none" i="0" spc="0" strike="noStrike" sz="1800" u="none" kumimoji="0" normalizeH="0">
+          <a:defRPr kumimoji="0" sz="1800" b="0" i="0" u="none" strike="noStrike" cap="none" spc="0" normalizeH="0" baseline="0">
             <a:ln>
               <a:noFill/>
             </a:ln>
@@ -15081,7 +14915,7 @@
           <a:buFontTx/>
           <a:buNone/>
           <a:tabLst/>
-          <a:defRPr b="0" baseline="0" cap="none" i="0" spc="0" strike="noStrike" sz="1800" u="none" kumimoji="0" normalizeH="0">
+          <a:defRPr kumimoji="0" sz="1800" b="0" i="0" u="none" strike="noStrike" cap="none" spc="0" normalizeH="0" baseline="0">
             <a:ln>
               <a:noFill/>
             </a:ln>
@@ -15107,7 +14941,7 @@
           <a:buFontTx/>
           <a:buNone/>
           <a:tabLst/>
-          <a:defRPr b="0" baseline="0" cap="none" i="0" spc="0" strike="noStrike" sz="1800" u="none" kumimoji="0" normalizeH="0">
+          <a:defRPr kumimoji="0" sz="1800" b="0" i="0" u="none" strike="noStrike" cap="none" spc="0" normalizeH="0" baseline="0">
             <a:ln>
               <a:noFill/>
             </a:ln>
@@ -15120,12 +14954,19 @@
         </a:lvl9pPr>
       </a:lstStyle>
       <a:style>
-        <a:lnRef idx="0"/>
-        <a:fillRef idx="0"/>
-        <a:effectRef idx="0"/>
+        <a:lnRef idx="0">
+          <a:scrgbClr r="0" g="0" b="0"/>
+        </a:lnRef>
+        <a:fillRef idx="0">
+          <a:scrgbClr r="0" g="0" b="0"/>
+        </a:fillRef>
+        <a:effectRef idx="0">
+          <a:scrgbClr r="0" g="0" b="0"/>
+        </a:effectRef>
         <a:fontRef idx="none"/>
       </a:style>
     </a:txDef>
   </a:objectDefaults>
+  <a:extraClrSchemeLst/>
 </a:theme>
 </file>
--- a/docs/FootballPredictorDemoDay20260803.pptx
+++ b/docs/FootballPredictorDemoDay20260803.pptx
@@ -5,23 +5,22 @@
     <p:sldMasterId id="2147483648" r:id="rId1"/>
   </p:sldMasterIdLst>
   <p:notesMasterIdLst>
-    <p:notesMasterId r:id="rId16"/>
+    <p:notesMasterId r:id="rId15"/>
   </p:notesMasterIdLst>
   <p:sldIdLst>
-    <p:sldId id="256" r:id="rId2"/>
-    <p:sldId id="257" r:id="rId3"/>
-    <p:sldId id="258" r:id="rId4"/>
-    <p:sldId id="259" r:id="rId5"/>
-    <p:sldId id="260" r:id="rId6"/>
-    <p:sldId id="261" r:id="rId7"/>
-    <p:sldId id="262" r:id="rId8"/>
-    <p:sldId id="263" r:id="rId9"/>
-    <p:sldId id="264" r:id="rId10"/>
-    <p:sldId id="265" r:id="rId11"/>
-    <p:sldId id="267" r:id="rId12"/>
-    <p:sldId id="268" r:id="rId13"/>
-    <p:sldId id="269" r:id="rId14"/>
-    <p:sldId id="270" r:id="rId15"/>
+    <p:sldId id="257" r:id="rId2"/>
+    <p:sldId id="258" r:id="rId3"/>
+    <p:sldId id="259" r:id="rId4"/>
+    <p:sldId id="260" r:id="rId5"/>
+    <p:sldId id="261" r:id="rId6"/>
+    <p:sldId id="262" r:id="rId7"/>
+    <p:sldId id="263" r:id="rId8"/>
+    <p:sldId id="264" r:id="rId9"/>
+    <p:sldId id="265" r:id="rId10"/>
+    <p:sldId id="267" r:id="rId11"/>
+    <p:sldId id="268" r:id="rId12"/>
+    <p:sldId id="269" r:id="rId13"/>
+    <p:sldId id="270" r:id="rId14"/>
   </p:sldIdLst>
   <p:sldSz cx="9144000" cy="5143500" type="screen16x9"/>
   <p:notesSz cx="6858000" cy="9144000"/>
@@ -323,6 +322,11 @@
       </a:defRPr>
     </a:lvl9pPr>
   </p:defaultTextStyle>
+  <p:extLst>
+    <p:ext uri="{EFAFB233-063F-42B5-8137-9DF3F51BA10A}">
+      <p15:sldGuideLst xmlns:p15="http://schemas.microsoft.com/office/powerpoint/2012/main"/>
+    </p:ext>
+  </p:extLst>
 </p:presentation>
 </file>
 
@@ -483,8 +487,8 @@
 </file>
 
 <file path=ppt/slideLayouts/slideLayout1.xml><?xml version="1.0" encoding="utf-8"?>
-<p:sldLayout xmlns:a="http://schemas.openxmlformats.org/drawingml/2006/main" xmlns:r="http://schemas.openxmlformats.org/officeDocument/2006/relationships" xmlns:p="http://schemas.openxmlformats.org/presentationml/2006/main" type="title">
-  <p:cSld name="TITLE">
+<p:sldLayout xmlns:a="http://schemas.openxmlformats.org/drawingml/2006/main" xmlns:r="http://schemas.openxmlformats.org/officeDocument/2006/relationships" xmlns:p="http://schemas.openxmlformats.org/presentationml/2006/main" type="tx">
+  <p:cSld name="SECTION_HEADER">
     <p:spTree>
       <p:nvGrpSpPr>
         <p:cNvPr id="1" name=""/>
@@ -501,7 +505,7 @@
       </p:grpSpPr>
       <p:sp>
         <p:nvSpPr>
-          <p:cNvPr id="11" name="Title Text"/>
+          <p:cNvPr id="20" name="Title Text"/>
           <p:cNvSpPr txBox="1">
             <a:spLocks noGrp="1"/>
           </p:cNvSpPr>
@@ -511,18 +515,18 @@
         </p:nvSpPr>
         <p:spPr>
           <a:xfrm>
-            <a:off x="311708" y="744573"/>
-            <a:ext cx="8520601" cy="2052604"/>
+            <a:off x="311698" y="2150847"/>
+            <a:ext cx="8520604" cy="841803"/>
           </a:xfrm>
           <a:prstGeom prst="rect">
             <a:avLst/>
           </a:prstGeom>
         </p:spPr>
         <p:txBody>
-          <a:bodyPr anchor="b"/>
+          <a:bodyPr anchor="ctr"/>
           <a:lstStyle>
             <a:lvl1pPr algn="ctr">
-              <a:defRPr sz="5200"/>
+              <a:defRPr sz="3600"/>
             </a:lvl1pPr>
           </a:lstStyle>
           <a:p>
@@ -534,111 +538,7 @@
       </p:sp>
       <p:sp>
         <p:nvSpPr>
-          <p:cNvPr id="12" name="Body Level One…"/>
-          <p:cNvSpPr txBox="1">
-            <a:spLocks noGrp="1"/>
-          </p:cNvSpPr>
-          <p:nvPr>
-            <p:ph type="body" sz="quarter" idx="1"/>
-          </p:nvPr>
-        </p:nvSpPr>
-        <p:spPr>
-          <a:xfrm>
-            <a:off x="311698" y="2834125"/>
-            <a:ext cx="8520604" cy="792605"/>
-          </a:xfrm>
-          <a:prstGeom prst="rect">
-            <a:avLst/>
-          </a:prstGeom>
-        </p:spPr>
-        <p:txBody>
-          <a:bodyPr/>
-          <a:lstStyle>
-            <a:lvl1pPr marL="0" indent="114300" algn="ctr">
-              <a:lnSpc>
-                <a:spcPct val="100000"/>
-              </a:lnSpc>
-              <a:buClrTx/>
-              <a:buSzTx/>
-              <a:buFontTx/>
-              <a:buNone/>
-              <a:defRPr sz="2800"/>
-            </a:lvl1pPr>
-            <a:lvl2pPr marL="0" indent="114300" algn="ctr">
-              <a:lnSpc>
-                <a:spcPct val="100000"/>
-              </a:lnSpc>
-              <a:buClrTx/>
-              <a:buSzTx/>
-              <a:buFontTx/>
-              <a:buNone/>
-              <a:defRPr sz="2800"/>
-            </a:lvl2pPr>
-            <a:lvl3pPr marL="0" indent="114300" algn="ctr">
-              <a:lnSpc>
-                <a:spcPct val="100000"/>
-              </a:lnSpc>
-              <a:buClrTx/>
-              <a:buSzTx/>
-              <a:buFontTx/>
-              <a:buNone/>
-              <a:defRPr sz="2800"/>
-            </a:lvl3pPr>
-            <a:lvl4pPr marL="0" indent="114300" algn="ctr">
-              <a:lnSpc>
-                <a:spcPct val="100000"/>
-              </a:lnSpc>
-              <a:buClrTx/>
-              <a:buSzTx/>
-              <a:buFontTx/>
-              <a:buNone/>
-              <a:defRPr sz="2800"/>
-            </a:lvl4pPr>
-            <a:lvl5pPr marL="0" indent="114300" algn="ctr">
-              <a:lnSpc>
-                <a:spcPct val="100000"/>
-              </a:lnSpc>
-              <a:buClrTx/>
-              <a:buSzTx/>
-              <a:buFontTx/>
-              <a:buNone/>
-              <a:defRPr sz="2800"/>
-            </a:lvl5pPr>
-          </a:lstStyle>
-          <a:p>
-            <a:r>
-              <a:t>Body Level One</a:t>
-            </a:r>
-          </a:p>
-          <a:p>
-            <a:pPr lvl="1"/>
-            <a:r>
-              <a:t>Body Level Two</a:t>
-            </a:r>
-          </a:p>
-          <a:p>
-            <a:pPr lvl="2"/>
-            <a:r>
-              <a:t>Body Level Three</a:t>
-            </a:r>
-          </a:p>
-          <a:p>
-            <a:pPr lvl="3"/>
-            <a:r>
-              <a:t>Body Level Four</a:t>
-            </a:r>
-          </a:p>
-          <a:p>
-            <a:pPr lvl="4"/>
-            <a:r>
-              <a:t>Body Level Five</a:t>
-            </a:r>
-          </a:p>
-        </p:txBody>
-      </p:sp>
-      <p:sp>
-        <p:nvSpPr>
-          <p:cNvPr id="13" name="Slide Number"/>
+          <p:cNvPr id="21" name="Slide Number"/>
           <p:cNvSpPr txBox="1">
             <a:spLocks noGrp="1"/>
           </p:cNvSpPr>
@@ -672,150 +572,6 @@
 </file>
 
 <file path=ppt/slideLayouts/slideLayout10.xml><?xml version="1.0" encoding="utf-8"?>
-<p:sldLayout xmlns:a="http://schemas.openxmlformats.org/drawingml/2006/main" xmlns:r="http://schemas.openxmlformats.org/officeDocument/2006/relationships" xmlns:p="http://schemas.openxmlformats.org/presentationml/2006/main" type="tx">
-  <p:cSld name="BIG_NUMBER">
-    <p:spTree>
-      <p:nvGrpSpPr>
-        <p:cNvPr id="1" name=""/>
-        <p:cNvGrpSpPr/>
-        <p:nvPr/>
-      </p:nvGrpSpPr>
-      <p:grpSpPr>
-        <a:xfrm>
-          <a:off x="0" y="0"/>
-          <a:ext cx="0" cy="0"/>
-          <a:chOff x="0" y="0"/>
-          <a:chExt cx="0" cy="0"/>
-        </a:xfrm>
-      </p:grpSpPr>
-      <p:sp>
-        <p:nvSpPr>
-          <p:cNvPr id="91" name="xx%"/>
-          <p:cNvSpPr txBox="1">
-            <a:spLocks noGrp="1"/>
-          </p:cNvSpPr>
-          <p:nvPr>
-            <p:ph type="title" hasCustomPrompt="1"/>
-          </p:nvPr>
-        </p:nvSpPr>
-        <p:spPr>
-          <a:xfrm>
-            <a:off x="311698" y="1106125"/>
-            <a:ext cx="8520604" cy="1963500"/>
-          </a:xfrm>
-          <a:prstGeom prst="rect">
-            <a:avLst/>
-          </a:prstGeom>
-        </p:spPr>
-        <p:txBody>
-          <a:bodyPr anchor="b"/>
-          <a:lstStyle>
-            <a:lvl1pPr algn="ctr">
-              <a:defRPr sz="12000"/>
-            </a:lvl1pPr>
-          </a:lstStyle>
-          <a:p>
-            <a:r>
-              <a:t>xx%</a:t>
-            </a:r>
-          </a:p>
-        </p:txBody>
-      </p:sp>
-      <p:sp>
-        <p:nvSpPr>
-          <p:cNvPr id="92" name="Body Level One…"/>
-          <p:cNvSpPr txBox="1">
-            <a:spLocks noGrp="1"/>
-          </p:cNvSpPr>
-          <p:nvPr>
-            <p:ph type="body" sz="half" idx="1"/>
-          </p:nvPr>
-        </p:nvSpPr>
-        <p:spPr>
-          <a:xfrm>
-            <a:off x="311698" y="3152225"/>
-            <a:ext cx="8520604" cy="1300800"/>
-          </a:xfrm>
-          <a:prstGeom prst="rect">
-            <a:avLst/>
-          </a:prstGeom>
-        </p:spPr>
-        <p:txBody>
-          <a:bodyPr/>
-          <a:lstStyle>
-            <a:lvl1pPr algn="ctr"/>
-            <a:lvl2pPr algn="ctr"/>
-            <a:lvl3pPr algn="ctr"/>
-            <a:lvl4pPr algn="ctr"/>
-            <a:lvl5pPr algn="ctr"/>
-          </a:lstStyle>
-          <a:p>
-            <a:r>
-              <a:t>Body Level One</a:t>
-            </a:r>
-          </a:p>
-          <a:p>
-            <a:pPr lvl="1"/>
-            <a:r>
-              <a:t>Body Level Two</a:t>
-            </a:r>
-          </a:p>
-          <a:p>
-            <a:pPr lvl="2"/>
-            <a:r>
-              <a:t>Body Level Three</a:t>
-            </a:r>
-          </a:p>
-          <a:p>
-            <a:pPr lvl="3"/>
-            <a:r>
-              <a:t>Body Level Four</a:t>
-            </a:r>
-          </a:p>
-          <a:p>
-            <a:pPr lvl="4"/>
-            <a:r>
-              <a:t>Body Level Five</a:t>
-            </a:r>
-          </a:p>
-        </p:txBody>
-      </p:sp>
-      <p:sp>
-        <p:nvSpPr>
-          <p:cNvPr id="93" name="Slide Number"/>
-          <p:cNvSpPr txBox="1">
-            <a:spLocks noGrp="1"/>
-          </p:cNvSpPr>
-          <p:nvPr>
-            <p:ph type="sldNum" sz="quarter" idx="2"/>
-          </p:nvPr>
-        </p:nvSpPr>
-        <p:spPr>
-          <a:prstGeom prst="rect">
-            <a:avLst/>
-          </a:prstGeom>
-        </p:spPr>
-        <p:txBody>
-          <a:bodyPr/>
-          <a:lstStyle/>
-          <a:p>
-            <a:fld id="{86CB4B4D-7CA3-9044-876B-883B54F8677D}" type="slidenum">
-              <a:t>‹N°›</a:t>
-            </a:fld>
-            <a:endParaRPr/>
-          </a:p>
-        </p:txBody>
-      </p:sp>
-    </p:spTree>
-  </p:cSld>
-  <p:clrMapOvr>
-    <a:masterClrMapping/>
-  </p:clrMapOvr>
-  <p:transition spd="med"/>
-</p:sldLayout>
-</file>
-
-<file path=ppt/slideLayouts/slideLayout11.xml><?xml version="1.0" encoding="utf-8"?>
 <p:sldLayout xmlns:a="http://schemas.openxmlformats.org/drawingml/2006/main" xmlns:r="http://schemas.openxmlformats.org/officeDocument/2006/relationships" xmlns:p="http://schemas.openxmlformats.org/presentationml/2006/main" type="tx">
   <p:cSld name="BLANK">
     <p:spTree>
@@ -867,7 +623,7 @@
 </p:sldLayout>
 </file>
 
-<file path=ppt/slideLayouts/slideLayout12.xml><?xml version="1.0" encoding="utf-8"?>
+<file path=ppt/slideLayouts/slideLayout11.xml><?xml version="1.0" encoding="utf-8"?>
 <p:sldLayout xmlns:a="http://schemas.openxmlformats.org/drawingml/2006/main" xmlns:r="http://schemas.openxmlformats.org/officeDocument/2006/relationships" xmlns:p="http://schemas.openxmlformats.org/presentationml/2006/main" type="tx">
   <p:cSld name="TITLE_AND_BODY">
     <p:spTree>
@@ -999,91 +755,6 @@
 
 <file path=ppt/slideLayouts/slideLayout2.xml><?xml version="1.0" encoding="utf-8"?>
 <p:sldLayout xmlns:a="http://schemas.openxmlformats.org/drawingml/2006/main" xmlns:r="http://schemas.openxmlformats.org/officeDocument/2006/relationships" xmlns:p="http://schemas.openxmlformats.org/presentationml/2006/main" type="tx">
-  <p:cSld name="SECTION_HEADER">
-    <p:spTree>
-      <p:nvGrpSpPr>
-        <p:cNvPr id="1" name=""/>
-        <p:cNvGrpSpPr/>
-        <p:nvPr/>
-      </p:nvGrpSpPr>
-      <p:grpSpPr>
-        <a:xfrm>
-          <a:off x="0" y="0"/>
-          <a:ext cx="0" cy="0"/>
-          <a:chOff x="0" y="0"/>
-          <a:chExt cx="0" cy="0"/>
-        </a:xfrm>
-      </p:grpSpPr>
-      <p:sp>
-        <p:nvSpPr>
-          <p:cNvPr id="20" name="Title Text"/>
-          <p:cNvSpPr txBox="1">
-            <a:spLocks noGrp="1"/>
-          </p:cNvSpPr>
-          <p:nvPr>
-            <p:ph type="title"/>
-          </p:nvPr>
-        </p:nvSpPr>
-        <p:spPr>
-          <a:xfrm>
-            <a:off x="311698" y="2150847"/>
-            <a:ext cx="8520604" cy="841803"/>
-          </a:xfrm>
-          <a:prstGeom prst="rect">
-            <a:avLst/>
-          </a:prstGeom>
-        </p:spPr>
-        <p:txBody>
-          <a:bodyPr anchor="ctr"/>
-          <a:lstStyle>
-            <a:lvl1pPr algn="ctr">
-              <a:defRPr sz="3600"/>
-            </a:lvl1pPr>
-          </a:lstStyle>
-          <a:p>
-            <a:r>
-              <a:t>Title Text</a:t>
-            </a:r>
-          </a:p>
-        </p:txBody>
-      </p:sp>
-      <p:sp>
-        <p:nvSpPr>
-          <p:cNvPr id="21" name="Slide Number"/>
-          <p:cNvSpPr txBox="1">
-            <a:spLocks noGrp="1"/>
-          </p:cNvSpPr>
-          <p:nvPr>
-            <p:ph type="sldNum" sz="quarter" idx="2"/>
-          </p:nvPr>
-        </p:nvSpPr>
-        <p:spPr>
-          <a:prstGeom prst="rect">
-            <a:avLst/>
-          </a:prstGeom>
-        </p:spPr>
-        <p:txBody>
-          <a:bodyPr/>
-          <a:lstStyle/>
-          <a:p>
-            <a:fld id="{86CB4B4D-7CA3-9044-876B-883B54F8677D}" type="slidenum">
-              <a:t>‹N°›</a:t>
-            </a:fld>
-            <a:endParaRPr/>
-          </a:p>
-        </p:txBody>
-      </p:sp>
-    </p:spTree>
-  </p:cSld>
-  <p:clrMapOvr>
-    <a:masterClrMapping/>
-  </p:clrMapOvr>
-  <p:transition spd="med"/>
-</p:sldLayout>
-</file>
-
-<file path=ppt/slideLayouts/slideLayout3.xml><?xml version="1.0" encoding="utf-8"?>
-<p:sldLayout xmlns:a="http://schemas.openxmlformats.org/drawingml/2006/main" xmlns:r="http://schemas.openxmlformats.org/officeDocument/2006/relationships" xmlns:p="http://schemas.openxmlformats.org/presentationml/2006/main" type="tx">
   <p:cSld name="1_TITLE_AND_BODY">
     <p:spTree>
       <p:nvGrpSpPr>
@@ -1208,7 +879,7 @@
 </p:sldLayout>
 </file>
 
-<file path=ppt/slideLayouts/slideLayout4.xml><?xml version="1.0" encoding="utf-8"?>
+<file path=ppt/slideLayouts/slideLayout3.xml><?xml version="1.0" encoding="utf-8"?>
 <p:sldLayout xmlns:a="http://schemas.openxmlformats.org/drawingml/2006/main" xmlns:r="http://schemas.openxmlformats.org/officeDocument/2006/relationships" xmlns:p="http://schemas.openxmlformats.org/presentationml/2006/main" type="tx">
   <p:cSld name="TITLE_AND_TWO_COLUMNS">
     <p:spTree>
@@ -1386,7 +1057,7 @@
 </p:sldLayout>
 </file>
 
-<file path=ppt/slideLayouts/slideLayout5.xml><?xml version="1.0" encoding="utf-8"?>
+<file path=ppt/slideLayouts/slideLayout4.xml><?xml version="1.0" encoding="utf-8"?>
 <p:sldLayout xmlns:a="http://schemas.openxmlformats.org/drawingml/2006/main" xmlns:r="http://schemas.openxmlformats.org/officeDocument/2006/relationships" xmlns:p="http://schemas.openxmlformats.org/presentationml/2006/main" type="tx">
   <p:cSld name="TITLE_ONLY">
     <p:spTree>
@@ -1463,7 +1134,7 @@
 </p:sldLayout>
 </file>
 
-<file path=ppt/slideLayouts/slideLayout6.xml><?xml version="1.0" encoding="utf-8"?>
+<file path=ppt/slideLayouts/slideLayout5.xml><?xml version="1.0" encoding="utf-8"?>
 <p:sldLayout xmlns:a="http://schemas.openxmlformats.org/drawingml/2006/main" xmlns:r="http://schemas.openxmlformats.org/officeDocument/2006/relationships" xmlns:p="http://schemas.openxmlformats.org/presentationml/2006/main" type="tx">
   <p:cSld name="ONE_COLUMN_TEXT">
     <p:spTree>
@@ -1622,7 +1293,7 @@
 </p:sldLayout>
 </file>
 
-<file path=ppt/slideLayouts/slideLayout7.xml><?xml version="1.0" encoding="utf-8"?>
+<file path=ppt/slideLayouts/slideLayout6.xml><?xml version="1.0" encoding="utf-8"?>
 <p:sldLayout xmlns:a="http://schemas.openxmlformats.org/drawingml/2006/main" xmlns:r="http://schemas.openxmlformats.org/officeDocument/2006/relationships" xmlns:p="http://schemas.openxmlformats.org/presentationml/2006/main" type="tx">
   <p:cSld name="MAIN_POINT">
     <p:spTree>
@@ -1707,7 +1378,7 @@
 </p:sldLayout>
 </file>
 
-<file path=ppt/slideLayouts/slideLayout8.xml><?xml version="1.0" encoding="utf-8"?>
+<file path=ppt/slideLayouts/slideLayout7.xml><?xml version="1.0" encoding="utf-8"?>
 <p:sldLayout xmlns:a="http://schemas.openxmlformats.org/drawingml/2006/main" xmlns:r="http://schemas.openxmlformats.org/officeDocument/2006/relationships" xmlns:p="http://schemas.openxmlformats.org/presentationml/2006/main" type="tx">
   <p:cSld name="SECTION_TITLE_AND_DESCRIPTION">
     <p:spTree>
@@ -1960,7 +1631,7 @@
 </p:sldLayout>
 </file>
 
-<file path=ppt/slideLayouts/slideLayout9.xml><?xml version="1.0" encoding="utf-8"?>
+<file path=ppt/slideLayouts/slideLayout8.xml><?xml version="1.0" encoding="utf-8"?>
 <p:sldLayout xmlns:a="http://schemas.openxmlformats.org/drawingml/2006/main" xmlns:r="http://schemas.openxmlformats.org/officeDocument/2006/relationships" xmlns:p="http://schemas.openxmlformats.org/presentationml/2006/main" type="tx">
   <p:cSld name="CAPTION_ONLY">
     <p:spTree>
@@ -2071,6 +1742,150 @@
       <p:sp>
         <p:nvSpPr>
           <p:cNvPr id="84" name="Slide Number"/>
+          <p:cNvSpPr txBox="1">
+            <a:spLocks noGrp="1"/>
+          </p:cNvSpPr>
+          <p:nvPr>
+            <p:ph type="sldNum" sz="quarter" idx="2"/>
+          </p:nvPr>
+        </p:nvSpPr>
+        <p:spPr>
+          <a:prstGeom prst="rect">
+            <a:avLst/>
+          </a:prstGeom>
+        </p:spPr>
+        <p:txBody>
+          <a:bodyPr/>
+          <a:lstStyle/>
+          <a:p>
+            <a:fld id="{86CB4B4D-7CA3-9044-876B-883B54F8677D}" type="slidenum">
+              <a:t>‹N°›</a:t>
+            </a:fld>
+            <a:endParaRPr/>
+          </a:p>
+        </p:txBody>
+      </p:sp>
+    </p:spTree>
+  </p:cSld>
+  <p:clrMapOvr>
+    <a:masterClrMapping/>
+  </p:clrMapOvr>
+  <p:transition spd="med"/>
+</p:sldLayout>
+</file>
+
+<file path=ppt/slideLayouts/slideLayout9.xml><?xml version="1.0" encoding="utf-8"?>
+<p:sldLayout xmlns:a="http://schemas.openxmlformats.org/drawingml/2006/main" xmlns:r="http://schemas.openxmlformats.org/officeDocument/2006/relationships" xmlns:p="http://schemas.openxmlformats.org/presentationml/2006/main" type="tx">
+  <p:cSld name="BIG_NUMBER">
+    <p:spTree>
+      <p:nvGrpSpPr>
+        <p:cNvPr id="1" name=""/>
+        <p:cNvGrpSpPr/>
+        <p:nvPr/>
+      </p:nvGrpSpPr>
+      <p:grpSpPr>
+        <a:xfrm>
+          <a:off x="0" y="0"/>
+          <a:ext cx="0" cy="0"/>
+          <a:chOff x="0" y="0"/>
+          <a:chExt cx="0" cy="0"/>
+        </a:xfrm>
+      </p:grpSpPr>
+      <p:sp>
+        <p:nvSpPr>
+          <p:cNvPr id="91" name="xx%"/>
+          <p:cNvSpPr txBox="1">
+            <a:spLocks noGrp="1"/>
+          </p:cNvSpPr>
+          <p:nvPr>
+            <p:ph type="title" hasCustomPrompt="1"/>
+          </p:nvPr>
+        </p:nvSpPr>
+        <p:spPr>
+          <a:xfrm>
+            <a:off x="311698" y="1106125"/>
+            <a:ext cx="8520604" cy="1963500"/>
+          </a:xfrm>
+          <a:prstGeom prst="rect">
+            <a:avLst/>
+          </a:prstGeom>
+        </p:spPr>
+        <p:txBody>
+          <a:bodyPr anchor="b"/>
+          <a:lstStyle>
+            <a:lvl1pPr algn="ctr">
+              <a:defRPr sz="12000"/>
+            </a:lvl1pPr>
+          </a:lstStyle>
+          <a:p>
+            <a:r>
+              <a:t>xx%</a:t>
+            </a:r>
+          </a:p>
+        </p:txBody>
+      </p:sp>
+      <p:sp>
+        <p:nvSpPr>
+          <p:cNvPr id="92" name="Body Level One…"/>
+          <p:cNvSpPr txBox="1">
+            <a:spLocks noGrp="1"/>
+          </p:cNvSpPr>
+          <p:nvPr>
+            <p:ph type="body" sz="half" idx="1"/>
+          </p:nvPr>
+        </p:nvSpPr>
+        <p:spPr>
+          <a:xfrm>
+            <a:off x="311698" y="3152225"/>
+            <a:ext cx="8520604" cy="1300800"/>
+          </a:xfrm>
+          <a:prstGeom prst="rect">
+            <a:avLst/>
+          </a:prstGeom>
+        </p:spPr>
+        <p:txBody>
+          <a:bodyPr/>
+          <a:lstStyle>
+            <a:lvl1pPr algn="ctr"/>
+            <a:lvl2pPr algn="ctr"/>
+            <a:lvl3pPr algn="ctr"/>
+            <a:lvl4pPr algn="ctr"/>
+            <a:lvl5pPr algn="ctr"/>
+          </a:lstStyle>
+          <a:p>
+            <a:r>
+              <a:t>Body Level One</a:t>
+            </a:r>
+          </a:p>
+          <a:p>
+            <a:pPr lvl="1"/>
+            <a:r>
+              <a:t>Body Level Two</a:t>
+            </a:r>
+          </a:p>
+          <a:p>
+            <a:pPr lvl="2"/>
+            <a:r>
+              <a:t>Body Level Three</a:t>
+            </a:r>
+          </a:p>
+          <a:p>
+            <a:pPr lvl="3"/>
+            <a:r>
+              <a:t>Body Level Four</a:t>
+            </a:r>
+          </a:p>
+          <a:p>
+            <a:pPr lvl="4"/>
+            <a:r>
+              <a:t>Body Level Five</a:t>
+            </a:r>
+          </a:p>
+        </p:txBody>
+      </p:sp>
+      <p:sp>
+        <p:nvSpPr>
+          <p:cNvPr id="93" name="Slide Number"/>
           <p:cNvSpPr txBox="1">
             <a:spLocks noGrp="1"/>
           </p:cNvSpPr>
@@ -2151,7 +1966,7 @@
           </a:ln>
           <a:extLst>
             <a:ext uri="{C572A759-6A51-4108-AA02-DFA0A04FC94B}">
-              <ma14:wrappingTextBoxFlag xmlns:ma14="http://schemas.microsoft.com/office/mac/drawingml/2011/main" xmlns:a14="http://schemas.microsoft.com/office/drawing/2010/main" xmlns:m="http://schemas.openxmlformats.org/officeDocument/2006/math" xmlns="" val="1"/>
+              <ma14:wrappingTextBoxFlag xmlns="" xmlns:m="http://schemas.openxmlformats.org/officeDocument/2006/math" xmlns:a14="http://schemas.microsoft.com/office/drawing/2010/main" xmlns:ma14="http://schemas.microsoft.com/office/mac/drawingml/2011/main" val="1"/>
             </a:ext>
           </a:extLst>
         </p:spPr>
@@ -2190,7 +2005,7 @@
           </a:ln>
           <a:extLst>
             <a:ext uri="{C572A759-6A51-4108-AA02-DFA0A04FC94B}">
-              <ma14:wrappingTextBoxFlag xmlns:ma14="http://schemas.microsoft.com/office/mac/drawingml/2011/main" xmlns:a14="http://schemas.microsoft.com/office/drawing/2010/main" xmlns:m="http://schemas.openxmlformats.org/officeDocument/2006/math" xmlns="" val="1"/>
+              <ma14:wrappingTextBoxFlag xmlns="" xmlns:m="http://schemas.openxmlformats.org/officeDocument/2006/math" xmlns:a14="http://schemas.microsoft.com/office/drawing/2010/main" xmlns:ma14="http://schemas.microsoft.com/office/mac/drawingml/2011/main" val="1"/>
             </a:ext>
           </a:extLst>
         </p:spPr>
@@ -2281,18 +2096,17 @@
   </p:cSld>
   <p:clrMap bg1="lt1" tx1="dk1" bg2="lt2" tx2="dk2" accent1="accent1" accent2="accent2" accent3="accent3" accent4="accent4" accent5="accent5" accent6="accent6" hlink="hlink" folHlink="folHlink"/>
   <p:sldLayoutIdLst>
-    <p:sldLayoutId id="2147483649" r:id="rId1"/>
-    <p:sldLayoutId id="2147483650" r:id="rId2"/>
-    <p:sldLayoutId id="2147483651" r:id="rId3"/>
-    <p:sldLayoutId id="2147483652" r:id="rId4"/>
-    <p:sldLayoutId id="2147483653" r:id="rId5"/>
-    <p:sldLayoutId id="2147483654" r:id="rId6"/>
-    <p:sldLayoutId id="2147483655" r:id="rId7"/>
-    <p:sldLayoutId id="2147483656" r:id="rId8"/>
-    <p:sldLayoutId id="2147483657" r:id="rId9"/>
-    <p:sldLayoutId id="2147483658" r:id="rId10"/>
-    <p:sldLayoutId id="2147483659" r:id="rId11"/>
-    <p:sldLayoutId id="2147483660" r:id="rId12"/>
+    <p:sldLayoutId id="2147483650" r:id="rId1"/>
+    <p:sldLayoutId id="2147483651" r:id="rId2"/>
+    <p:sldLayoutId id="2147483652" r:id="rId3"/>
+    <p:sldLayoutId id="2147483653" r:id="rId4"/>
+    <p:sldLayoutId id="2147483654" r:id="rId5"/>
+    <p:sldLayoutId id="2147483655" r:id="rId6"/>
+    <p:sldLayoutId id="2147483656" r:id="rId7"/>
+    <p:sldLayoutId id="2147483657" r:id="rId8"/>
+    <p:sldLayoutId id="2147483658" r:id="rId9"/>
+    <p:sldLayoutId id="2147483659" r:id="rId10"/>
+    <p:sldLayoutId id="2147483660" r:id="rId11"/>
   </p:sldLayoutIdLst>
   <p:transition spd="med"/>
   <p:txStyles>
@@ -3029,14 +2843,6 @@
 <file path=ppt/slides/slide1.xml><?xml version="1.0" encoding="utf-8"?>
 <p:sld xmlns:a="http://schemas.openxmlformats.org/drawingml/2006/main" xmlns:r="http://schemas.openxmlformats.org/officeDocument/2006/relationships" xmlns:p="http://schemas.openxmlformats.org/presentationml/2006/main">
   <p:cSld>
-    <p:bg>
-      <p:bgPr>
-        <a:solidFill>
-          <a:srgbClr val="3FDAD2"/>
-        </a:solidFill>
-        <a:effectLst/>
-      </p:bgPr>
-    </p:bg>
     <p:spTree>
       <p:nvGrpSpPr>
         <p:cNvPr id="1" name=""/>
@@ -3053,18 +2859,55 @@
       </p:grpSpPr>
       <p:sp>
         <p:nvSpPr>
-          <p:cNvPr id="118" name="Google Shape;54;p13"/>
+          <p:cNvPr id="122" name="Google Shape;61;p14"/>
+          <p:cNvSpPr/>
+          <p:nvPr/>
+        </p:nvSpPr>
+        <p:spPr>
+          <a:xfrm>
+            <a:off x="5500" y="-17777"/>
+            <a:ext cx="3335400" cy="5161204"/>
+          </a:xfrm>
+          <a:prstGeom prst="rect">
+            <a:avLst/>
+          </a:prstGeom>
+          <a:solidFill>
+            <a:srgbClr val="C3FFFC"/>
+          </a:solidFill>
+          <a:ln w="12700">
+            <a:miter lim="400000"/>
+          </a:ln>
+        </p:spPr>
+        <p:txBody>
+          <a:bodyPr lIns="45718" tIns="45718" rIns="45718" bIns="45718" anchor="ctr"/>
+          <a:lstStyle/>
+          <a:p>
+            <a:pPr>
+              <a:defRPr>
+                <a:latin typeface="+mj-lt"/>
+                <a:ea typeface="+mj-ea"/>
+                <a:cs typeface="+mj-cs"/>
+                <a:sym typeface="Arial"/>
+              </a:defRPr>
+            </a:pPr>
+            <a:endParaRPr/>
+          </a:p>
+        </p:txBody>
+      </p:sp>
+      <p:sp>
+        <p:nvSpPr>
+          <p:cNvPr id="123" name="Google Shape;62;p14"/>
           <p:cNvSpPr txBox="1">
             <a:spLocks noGrp="1"/>
           </p:cNvSpPr>
           <p:nvPr>
-            <p:ph type="ctrTitle"/>
+            <p:ph type="title"/>
           </p:nvPr>
         </p:nvSpPr>
         <p:spPr>
           <a:xfrm>
-            <a:off x="1718097" y="866768"/>
-            <a:ext cx="6478207" cy="617702"/>
+            <a:off x="390595" y="1138673"/>
+            <a:ext cx="2513111" cy="3458105"/>
           </a:xfrm>
           <a:prstGeom prst="rect">
             <a:avLst/>
@@ -3072,29 +2915,126 @@
         </p:spPr>
         <p:txBody>
           <a:bodyPr/>
-          <a:lstStyle>
-            <a:lvl1pPr algn="l">
-              <a:defRPr sz="2100">
+          <a:lstStyle/>
+          <a:p>
+            <a:pPr>
+              <a:defRPr sz="2400">
                 <a:solidFill>
-                  <a:srgbClr val="0E3449"/>
+                  <a:srgbClr val="015955"/>
                 </a:solidFill>
                 <a:latin typeface="Inter"/>
                 <a:ea typeface="Inter"/>
                 <a:cs typeface="Inter"/>
                 <a:sym typeface="Inter"/>
               </a:defRPr>
-            </a:lvl1pPr>
-          </a:lstStyle>
-          <a:p>
+            </a:pPr>
             <a:r>
-              <a:t>Your Tech Bootcamp</a:t>
+              <a:rPr dirty="0"/>
+              <a:t>Group members</a:t>
+            </a:r>
+          </a:p>
+          <a:p>
+            <a:pPr>
+              <a:defRPr sz="2400">
+                <a:solidFill>
+                  <a:srgbClr val="015955"/>
+                </a:solidFill>
+                <a:latin typeface="Inter"/>
+                <a:ea typeface="Inter"/>
+                <a:cs typeface="Inter"/>
+                <a:sym typeface="Inter"/>
+              </a:defRPr>
+            </a:pPr>
+            <a:endParaRPr dirty="0"/>
+          </a:p>
+          <a:p>
+            <a:pPr>
+              <a:defRPr sz="1500">
+                <a:solidFill>
+                  <a:srgbClr val="015955"/>
+                </a:solidFill>
+                <a:latin typeface="Inter"/>
+                <a:ea typeface="Inter"/>
+                <a:cs typeface="Inter"/>
+                <a:sym typeface="Inter"/>
+              </a:defRPr>
+            </a:pPr>
+            <a:endParaRPr dirty="0"/>
+          </a:p>
+          <a:p>
+            <a:pPr>
+              <a:defRPr sz="1500">
+                <a:solidFill>
+                  <a:srgbClr val="015955"/>
+                </a:solidFill>
+                <a:latin typeface="Inter"/>
+                <a:ea typeface="Inter"/>
+                <a:cs typeface="Inter"/>
+                <a:sym typeface="Inter"/>
+              </a:defRPr>
+            </a:pPr>
+            <a:endParaRPr dirty="0"/>
+          </a:p>
+          <a:p>
+            <a:pPr>
+              <a:defRPr sz="1500">
+                <a:solidFill>
+                  <a:srgbClr val="015955"/>
+                </a:solidFill>
+                <a:latin typeface="Inter"/>
+                <a:ea typeface="Inter"/>
+                <a:cs typeface="Inter"/>
+                <a:sym typeface="Inter"/>
+              </a:defRPr>
+            </a:pPr>
+            <a:r>
+              <a:rPr dirty="0"/>
+              <a:t>Franck IDDA</a:t>
+            </a:r>
+          </a:p>
+          <a:p>
+            <a:pPr>
+              <a:defRPr sz="1500">
+                <a:solidFill>
+                  <a:srgbClr val="015955"/>
+                </a:solidFill>
+                <a:latin typeface="Inter"/>
+                <a:ea typeface="Inter"/>
+                <a:cs typeface="Inter"/>
+                <a:sym typeface="Inter"/>
+              </a:defRPr>
+            </a:pPr>
+            <a:r>
+              <a:rPr dirty="0"/>
+              <a:t>Hugo PIERRE</a:t>
+            </a:r>
+          </a:p>
+          <a:p>
+            <a:pPr>
+              <a:defRPr sz="1500">
+                <a:solidFill>
+                  <a:srgbClr val="015955"/>
+                </a:solidFill>
+                <a:latin typeface="Inter"/>
+                <a:ea typeface="Inter"/>
+                <a:cs typeface="Inter"/>
+                <a:sym typeface="Inter"/>
+              </a:defRPr>
+            </a:pPr>
+            <a:r>
+              <a:rPr dirty="0" err="1"/>
+              <a:t>Safidy</a:t>
+            </a:r>
+            <a:r>
+              <a:rPr dirty="0"/>
+              <a:t> RAMAHERISON</a:t>
             </a:r>
           </a:p>
         </p:txBody>
       </p:sp>
       <p:pic>
         <p:nvPicPr>
-          <p:cNvPr id="119" name="Google Shape;55;p13" descr="Google Shape;55;p13"/>
+          <p:cNvPr id="124" name="Google Shape;63;p14" descr="Google Shape;63;p14"/>
           <p:cNvPicPr>
             <a:picLocks noChangeAspect="1"/>
           </p:cNvPicPr>
@@ -3108,8 +3048,8 @@
         </p:blipFill>
         <p:spPr>
           <a:xfrm>
-            <a:off x="844500" y="795925"/>
-            <a:ext cx="721025" cy="759376"/>
+            <a:off x="463375" y="482852"/>
+            <a:ext cx="576901" cy="385911"/>
           </a:xfrm>
           <a:prstGeom prst="rect">
             <a:avLst/>
@@ -3119,15 +3059,48 @@
           </a:ln>
         </p:spPr>
       </p:pic>
+      <p:pic>
+        <p:nvPicPr>
+          <p:cNvPr id="125" name="pasted-movie.png" descr="pasted-movie.png"/>
+          <p:cNvPicPr>
+            <a:picLocks noChangeAspect="1"/>
+          </p:cNvPicPr>
+          <p:nvPr/>
+        </p:nvPicPr>
+        <p:blipFill>
+          <a:blip r:embed="rId3"/>
+          <a:stretch>
+            <a:fillRect/>
+          </a:stretch>
+        </p:blipFill>
+        <p:spPr>
+          <a:xfrm>
+            <a:off x="3605986" y="1389002"/>
+            <a:ext cx="5018376" cy="2962239"/>
+          </a:xfrm>
+          <a:prstGeom prst="rect">
+            <a:avLst/>
+          </a:prstGeom>
+          <a:ln w="12700">
+            <a:miter lim="400000"/>
+          </a:ln>
+        </p:spPr>
+      </p:pic>
       <p:sp>
         <p:nvSpPr>
-          <p:cNvPr id="120" name="Google Shape;56;p13"/>
+          <p:cNvPr id="5" name="Google Shape;56;p13">
+            <a:extLst>
+              <a:ext uri="{FF2B5EF4-FFF2-40B4-BE49-F238E27FC236}">
+                <a16:creationId xmlns:a16="http://schemas.microsoft.com/office/drawing/2014/main" id="{0F3BB75E-7F3E-35F4-96FD-44A87FBC2D3F}"/>
+              </a:ext>
+            </a:extLst>
+          </p:cNvPr>
           <p:cNvSpPr txBox="1"/>
           <p:nvPr/>
         </p:nvSpPr>
         <p:spPr>
           <a:xfrm>
-            <a:off x="844499" y="2225275"/>
+            <a:off x="1949244" y="79118"/>
             <a:ext cx="7271702" cy="924600"/>
           </a:xfrm>
           <a:prstGeom prst="rect">
@@ -3161,7 +3134,16 @@
           </a:lstStyle>
           <a:p>
             <a:r>
-              <a:t>Group # - Football Predictor</a:t>
+              <a:rPr dirty="0"/>
+              <a:t>Group </a:t>
+            </a:r>
+            <a:r>
+              <a:rPr lang="fr-FR" dirty="0"/>
+              <a:t>4</a:t>
+            </a:r>
+            <a:r>
+              <a:rPr dirty="0"/>
+              <a:t> - Football Predictor</a:t>
             </a:r>
           </a:p>
         </p:txBody>
@@ -3194,7 +3176,7 @@
       </p:grpSpPr>
       <p:pic>
         <p:nvPicPr>
-          <p:cNvPr id="290" name="Fond OM" descr="Fond OM"/>
+          <p:cNvPr id="351" name="Fond Bayern Munich" descr="Fond Bayern Munich"/>
           <p:cNvPicPr>
             <a:picLocks noChangeAspect="1"/>
           </p:cNvPicPr>
@@ -3222,52 +3204,7 @@
       </p:pic>
       <p:sp>
         <p:nvSpPr>
-          <p:cNvPr id="291" name="Zone API-Front"/>
-          <p:cNvSpPr/>
-          <p:nvPr/>
-        </p:nvSpPr>
-        <p:spPr>
-          <a:xfrm>
-            <a:off x="4857472" y="1433652"/>
-            <a:ext cx="3777005" cy="3123615"/>
-          </a:xfrm>
-          <a:prstGeom prst="roundRect">
-            <a:avLst>
-              <a:gd name="adj" fmla="val 5500"/>
-            </a:avLst>
-          </a:prstGeom>
-          <a:ln w="28575" cap="rnd">
-            <a:solidFill>
-              <a:srgbClr val="0FB2BE"/>
-            </a:solidFill>
-          </a:ln>
-          <a:effectLst>
-            <a:outerShdw blurRad="76200" dist="20000" dir="5400000" rotWithShape="0">
-              <a:srgbClr val="0E3449">
-                <a:alpha val="16000"/>
-              </a:srgbClr>
-            </a:outerShdw>
-          </a:effectLst>
-        </p:spPr>
-        <p:txBody>
-          <a:bodyPr lIns="45718" tIns="45718" rIns="45718" bIns="45718"/>
-          <a:lstStyle/>
-          <a:p>
-            <a:pPr>
-              <a:defRPr>
-                <a:latin typeface="+mj-lt"/>
-                <a:ea typeface="+mj-ea"/>
-                <a:cs typeface="+mj-cs"/>
-                <a:sym typeface="Arial"/>
-              </a:defRPr>
-            </a:pPr>
-            <a:endParaRPr/>
-          </a:p>
-        </p:txBody>
-      </p:sp>
-      <p:sp>
-        <p:nvSpPr>
-          <p:cNvPr id="292" name="Google Shape;75;p16"/>
+          <p:cNvPr id="352" name="Google Shape;75;p16"/>
           <p:cNvSpPr txBox="1">
             <a:spLocks noGrp="1"/>
           </p:cNvSpPr>
@@ -3301,14 +3238,20 @@
           </a:lstStyle>
           <a:p>
             <a:r>
-              <a:t>Architecture - Inference</a:t>
+              <a:rPr dirty="0"/>
+              <a:t>Conclusion</a:t>
             </a:r>
+            <a:r>
+              <a:rPr lang="fr-FR" dirty="0"/>
+              <a:t> - Evolutions</a:t>
+            </a:r>
+            <a:endParaRPr dirty="0"/>
           </a:p>
         </p:txBody>
       </p:sp>
       <p:pic>
         <p:nvPicPr>
-          <p:cNvPr id="293" name="Google Shape;76;p16" descr="Google Shape;76;p16"/>
+          <p:cNvPr id="353" name="Google Shape;76;p16" descr="Google Shape;76;p16"/>
           <p:cNvPicPr>
             <a:picLocks noChangeAspect="1"/>
           </p:cNvPicPr>
@@ -3335,7 +3278,7 @@
       </p:pic>
       <p:sp>
         <p:nvSpPr>
-          <p:cNvPr id="294" name="Google Shape;77;p16"/>
+          <p:cNvPr id="354" name="Google Shape;77;p16"/>
           <p:cNvSpPr/>
           <p:nvPr/>
         </p:nvSpPr>
@@ -3370,1488 +3313,6 @@
           </a:p>
         </p:txBody>
       </p:sp>
-      <p:pic>
-        <p:nvPicPr>
-          <p:cNvPr id="295" name="Image 19" descr="Image 19"/>
-          <p:cNvPicPr>
-            <a:picLocks noChangeAspect="1"/>
-          </p:cNvPicPr>
-          <p:nvPr/>
-        </p:nvPicPr>
-        <p:blipFill>
-          <a:blip r:embed="rId4"/>
-          <a:stretch>
-            <a:fillRect/>
-          </a:stretch>
-        </p:blipFill>
-        <p:spPr>
-          <a:xfrm>
-            <a:off x="5074482" y="1035810"/>
-            <a:ext cx="1010884" cy="319064"/>
-          </a:xfrm>
-          <a:prstGeom prst="rect">
-            <a:avLst/>
-          </a:prstGeom>
-          <a:ln w="12700">
-            <a:miter lim="400000"/>
-          </a:ln>
-        </p:spPr>
-      </p:pic>
-      <p:grpSp>
-        <p:nvGrpSpPr>
-          <p:cNvPr id="298" name="Groupe 83"/>
-          <p:cNvGrpSpPr/>
-          <p:nvPr/>
-        </p:nvGrpSpPr>
-        <p:grpSpPr>
-          <a:xfrm>
-            <a:off x="372627" y="3143063"/>
-            <a:ext cx="1143113" cy="1543948"/>
-            <a:chOff x="-1" y="-1"/>
-            <a:chExt cx="1143111" cy="1543947"/>
-          </a:xfrm>
-        </p:grpSpPr>
-        <p:pic>
-          <p:nvPicPr>
-            <p:cNvPr id="296" name="Image 11" descr="Image 11"/>
-            <p:cNvPicPr>
-              <a:picLocks noChangeAspect="1"/>
-            </p:cNvPicPr>
-            <p:nvPr/>
-          </p:nvPicPr>
-          <p:blipFill>
-            <a:blip r:embed="rId5"/>
-            <a:stretch>
-              <a:fillRect/>
-            </a:stretch>
-          </p:blipFill>
-          <p:spPr>
-            <a:xfrm>
-              <a:off x="-2" y="324632"/>
-              <a:ext cx="1143113" cy="1219315"/>
-            </a:xfrm>
-            <a:prstGeom prst="rect">
-              <a:avLst/>
-            </a:prstGeom>
-            <a:ln w="12700" cap="flat">
-              <a:noFill/>
-              <a:miter lim="400000"/>
-            </a:ln>
-            <a:effectLst/>
-          </p:spPr>
-        </p:pic>
-        <p:pic>
-          <p:nvPicPr>
-            <p:cNvPr id="297" name="Image 23" descr="Image 23"/>
-            <p:cNvPicPr>
-              <a:picLocks noChangeAspect="1"/>
-            </p:cNvPicPr>
-            <p:nvPr/>
-          </p:nvPicPr>
-          <p:blipFill>
-            <a:blip r:embed="rId6"/>
-            <a:stretch>
-              <a:fillRect/>
-            </a:stretch>
-          </p:blipFill>
-          <p:spPr>
-            <a:xfrm>
-              <a:off x="204526" y="-2"/>
-              <a:ext cx="844698" cy="530704"/>
-            </a:xfrm>
-            <a:prstGeom prst="rect">
-              <a:avLst/>
-            </a:prstGeom>
-            <a:ln w="12700" cap="flat">
-              <a:noFill/>
-              <a:miter lim="400000"/>
-            </a:ln>
-            <a:effectLst/>
-          </p:spPr>
-        </p:pic>
-      </p:grpSp>
-      <p:sp>
-        <p:nvSpPr>
-          <p:cNvPr id="299" name="Fleche FastAPI vers LLM"/>
-          <p:cNvSpPr/>
-          <p:nvPr/>
-        </p:nvSpPr>
-        <p:spPr>
-          <a:xfrm flipV="1">
-            <a:off x="5789912" y="3528815"/>
-            <a:ext cx="1337340" cy="425772"/>
-          </a:xfrm>
-          <a:prstGeom prst="line">
-            <a:avLst/>
-          </a:prstGeom>
-          <a:ln w="19050" cap="rnd">
-            <a:solidFill>
-              <a:srgbClr val="015955"/>
-            </a:solidFill>
-            <a:tailEnd type="triangle"/>
-          </a:ln>
-        </p:spPr>
-        <p:txBody>
-          <a:bodyPr lIns="45718" tIns="45718" rIns="45718" bIns="45718"/>
-          <a:lstStyle/>
-          <a:p>
-            <a:endParaRPr/>
-          </a:p>
-        </p:txBody>
-      </p:sp>
-      <p:sp>
-        <p:nvSpPr>
-          <p:cNvPr id="300" name="Fleche FastAPI vers App"/>
-          <p:cNvSpPr/>
-          <p:nvPr/>
-        </p:nvSpPr>
-        <p:spPr>
-          <a:xfrm flipV="1">
-            <a:off x="2994767" y="2074135"/>
-            <a:ext cx="125592" cy="297453"/>
-          </a:xfrm>
-          <a:prstGeom prst="line">
-            <a:avLst/>
-          </a:prstGeom>
-          <a:ln w="19050" cap="rnd">
-            <a:solidFill>
-              <a:srgbClr val="015955"/>
-            </a:solidFill>
-            <a:tailEnd type="triangle"/>
-          </a:ln>
-        </p:spPr>
-        <p:txBody>
-          <a:bodyPr lIns="45718" tIns="45718" rIns="45718" bIns="45718"/>
-          <a:lstStyle/>
-          <a:p>
-            <a:endParaRPr/>
-          </a:p>
-        </p:txBody>
-      </p:sp>
-      <p:sp>
-        <p:nvSpPr>
-          <p:cNvPr id="301" name="Fleche FastAPI vers App"/>
-          <p:cNvSpPr/>
-          <p:nvPr/>
-        </p:nvSpPr>
-        <p:spPr>
-          <a:xfrm flipV="1">
-            <a:off x="4321883" y="4040701"/>
-            <a:ext cx="710217" cy="62687"/>
-          </a:xfrm>
-          <a:prstGeom prst="line">
-            <a:avLst/>
-          </a:prstGeom>
-          <a:ln w="19050" cap="rnd">
-            <a:solidFill>
-              <a:srgbClr val="015955"/>
-            </a:solidFill>
-            <a:tailEnd type="triangle"/>
-          </a:ln>
-        </p:spPr>
-        <p:txBody>
-          <a:bodyPr lIns="45718" tIns="45718" rIns="45718" bIns="45718"/>
-          <a:lstStyle/>
-          <a:p>
-            <a:endParaRPr/>
-          </a:p>
-        </p:txBody>
-      </p:sp>
-      <p:sp>
-        <p:nvSpPr>
-          <p:cNvPr id="302" name="Fleche FastAPI vers App"/>
-          <p:cNvSpPr/>
-          <p:nvPr/>
-        </p:nvSpPr>
-        <p:spPr>
-          <a:xfrm flipV="1">
-            <a:off x="3104418" y="2995964"/>
-            <a:ext cx="1887400" cy="58199"/>
-          </a:xfrm>
-          <a:prstGeom prst="line">
-            <a:avLst/>
-          </a:prstGeom>
-          <a:ln w="19050" cap="rnd">
-            <a:solidFill>
-              <a:srgbClr val="015955"/>
-            </a:solidFill>
-            <a:tailEnd type="triangle"/>
-          </a:ln>
-        </p:spPr>
-        <p:txBody>
-          <a:bodyPr lIns="45718" tIns="45718" rIns="45718" bIns="45718"/>
-          <a:lstStyle/>
-          <a:p>
-            <a:endParaRPr/>
-          </a:p>
-        </p:txBody>
-      </p:sp>
-      <p:sp>
-        <p:nvSpPr>
-          <p:cNvPr id="303" name="Fleche FastAPI vers Render"/>
-          <p:cNvSpPr/>
-          <p:nvPr/>
-        </p:nvSpPr>
-        <p:spPr>
-          <a:xfrm>
-            <a:off x="3935236" y="1606811"/>
-            <a:ext cx="1139250" cy="201293"/>
-          </a:xfrm>
-          <a:prstGeom prst="line">
-            <a:avLst/>
-          </a:prstGeom>
-          <a:ln w="19050" cap="rnd">
-            <a:solidFill>
-              <a:srgbClr val="015955"/>
-            </a:solidFill>
-            <a:tailEnd type="triangle"/>
-          </a:ln>
-        </p:spPr>
-        <p:txBody>
-          <a:bodyPr lIns="45718" tIns="45718" rIns="45718" bIns="45718"/>
-          <a:lstStyle/>
-          <a:p>
-            <a:endParaRPr/>
-          </a:p>
-        </p:txBody>
-      </p:sp>
-      <p:sp>
-        <p:nvSpPr>
-          <p:cNvPr id="304" name="Fleche FastAPI vers LLM"/>
-          <p:cNvSpPr/>
-          <p:nvPr/>
-        </p:nvSpPr>
-        <p:spPr>
-          <a:xfrm>
-            <a:off x="5788223" y="1974294"/>
-            <a:ext cx="1339028" cy="989341"/>
-          </a:xfrm>
-          <a:prstGeom prst="line">
-            <a:avLst/>
-          </a:prstGeom>
-          <a:ln w="19050" cap="rnd">
-            <a:solidFill>
-              <a:srgbClr val="015955"/>
-            </a:solidFill>
-            <a:tailEnd type="triangle"/>
-          </a:ln>
-        </p:spPr>
-        <p:txBody>
-          <a:bodyPr lIns="45718" tIns="45718" rIns="45718" bIns="45718"/>
-          <a:lstStyle/>
-          <a:p>
-            <a:endParaRPr/>
-          </a:p>
-        </p:txBody>
-      </p:sp>
-      <p:sp>
-        <p:nvSpPr>
-          <p:cNvPr id="305" name="Fleche FastAPI vers LLM"/>
-          <p:cNvSpPr/>
-          <p:nvPr/>
-        </p:nvSpPr>
-        <p:spPr>
-          <a:xfrm>
-            <a:off x="6176093" y="3086255"/>
-            <a:ext cx="951157" cy="174367"/>
-          </a:xfrm>
-          <a:prstGeom prst="line">
-            <a:avLst/>
-          </a:prstGeom>
-          <a:ln w="19050" cap="rnd">
-            <a:solidFill>
-              <a:srgbClr val="015955"/>
-            </a:solidFill>
-            <a:tailEnd type="triangle"/>
-          </a:ln>
-        </p:spPr>
-        <p:txBody>
-          <a:bodyPr lIns="45718" tIns="45718" rIns="45718" bIns="45718"/>
-          <a:lstStyle/>
-          <a:p>
-            <a:endParaRPr/>
-          </a:p>
-        </p:txBody>
-      </p:sp>
-      <p:sp>
-        <p:nvSpPr>
-          <p:cNvPr id="306" name="Fleche FastAPI vers Render"/>
-          <p:cNvSpPr/>
-          <p:nvPr/>
-        </p:nvSpPr>
-        <p:spPr>
-          <a:xfrm>
-            <a:off x="1515729" y="3970582"/>
-            <a:ext cx="1297267" cy="126075"/>
-          </a:xfrm>
-          <a:prstGeom prst="line">
-            <a:avLst/>
-          </a:prstGeom>
-          <a:ln w="19050" cap="rnd">
-            <a:solidFill>
-              <a:srgbClr val="015955"/>
-            </a:solidFill>
-            <a:tailEnd type="triangle"/>
-          </a:ln>
-        </p:spPr>
-        <p:txBody>
-          <a:bodyPr lIns="45718" tIns="45718" rIns="45718" bIns="45718"/>
-          <a:lstStyle/>
-          <a:p>
-            <a:endParaRPr/>
-          </a:p>
-        </p:txBody>
-      </p:sp>
-      <p:grpSp>
-        <p:nvGrpSpPr>
-          <p:cNvPr id="309" name="Groupe 91"/>
-          <p:cNvGrpSpPr/>
-          <p:nvPr/>
-        </p:nvGrpSpPr>
-        <p:grpSpPr>
-          <a:xfrm>
-            <a:off x="2298216" y="2371578"/>
-            <a:ext cx="806211" cy="1390023"/>
-            <a:chOff x="0" y="-1"/>
-            <a:chExt cx="806209" cy="1390022"/>
-          </a:xfrm>
-        </p:grpSpPr>
-        <p:pic>
-          <p:nvPicPr>
-            <p:cNvPr id="307" name="Image 15" descr="Image 15"/>
-            <p:cNvPicPr>
-              <a:picLocks noChangeAspect="1"/>
-            </p:cNvPicPr>
-            <p:nvPr/>
-          </p:nvPicPr>
-          <p:blipFill>
-            <a:blip r:embed="rId7"/>
-            <a:stretch>
-              <a:fillRect/>
-            </a:stretch>
-          </p:blipFill>
-          <p:spPr>
-            <a:xfrm>
-              <a:off x="-1" y="-2"/>
-              <a:ext cx="759829" cy="698374"/>
-            </a:xfrm>
-            <a:prstGeom prst="rect">
-              <a:avLst/>
-            </a:prstGeom>
-            <a:ln w="12700" cap="flat">
-              <a:noFill/>
-              <a:miter lim="400000"/>
-            </a:ln>
-            <a:effectLst/>
-          </p:spPr>
-        </p:pic>
-        <p:pic>
-          <p:nvPicPr>
-            <p:cNvPr id="308" name="Image 90" descr="Image 90"/>
-            <p:cNvPicPr>
-              <a:picLocks noChangeAspect="1"/>
-            </p:cNvPicPr>
-            <p:nvPr/>
-          </p:nvPicPr>
-          <p:blipFill>
-            <a:blip r:embed="rId8"/>
-            <a:stretch>
-              <a:fillRect/>
-            </a:stretch>
-          </p:blipFill>
-          <p:spPr>
-            <a:xfrm>
-              <a:off x="46381" y="611661"/>
-              <a:ext cx="759829" cy="778361"/>
-            </a:xfrm>
-            <a:prstGeom prst="rect">
-              <a:avLst/>
-            </a:prstGeom>
-            <a:ln w="12700" cap="flat">
-              <a:noFill/>
-              <a:miter lim="400000"/>
-            </a:ln>
-            <a:effectLst/>
-          </p:spPr>
-        </p:pic>
-      </p:grpSp>
-      <p:pic>
-        <p:nvPicPr>
-          <p:cNvPr id="310" name="Image 93" descr="Image 93"/>
-          <p:cNvPicPr>
-            <a:picLocks noChangeAspect="1"/>
-          </p:cNvPicPr>
-          <p:nvPr/>
-        </p:nvPicPr>
-        <p:blipFill>
-          <a:blip r:embed="rId9"/>
-          <a:stretch>
-            <a:fillRect/>
-          </a:stretch>
-        </p:blipFill>
-        <p:spPr>
-          <a:xfrm>
-            <a:off x="7307905" y="328872"/>
-            <a:ext cx="707871" cy="681975"/>
-          </a:xfrm>
-          <a:prstGeom prst="rect">
-            <a:avLst/>
-          </a:prstGeom>
-          <a:ln w="12700">
-            <a:miter lim="400000"/>
-          </a:ln>
-        </p:spPr>
-      </p:pic>
-      <p:sp>
-        <p:nvSpPr>
-          <p:cNvPr id="311" name="Fleche FastAPI vers Render"/>
-          <p:cNvSpPr/>
-          <p:nvPr/>
-        </p:nvSpPr>
-        <p:spPr>
-          <a:xfrm flipH="1">
-            <a:off x="6015517" y="979022"/>
-            <a:ext cx="1652007" cy="216319"/>
-          </a:xfrm>
-          <a:prstGeom prst="line">
-            <a:avLst/>
-          </a:prstGeom>
-          <a:ln w="19050" cap="rnd">
-            <a:solidFill>
-              <a:srgbClr val="015955"/>
-            </a:solidFill>
-            <a:tailEnd type="triangle"/>
-          </a:ln>
-        </p:spPr>
-        <p:txBody>
-          <a:bodyPr lIns="45718" tIns="45718" rIns="45718" bIns="45718"/>
-          <a:lstStyle/>
-          <a:p>
-            <a:endParaRPr/>
-          </a:p>
-        </p:txBody>
-      </p:sp>
-      <p:grpSp>
-        <p:nvGrpSpPr>
-          <p:cNvPr id="318" name="Groupe 212"/>
-          <p:cNvGrpSpPr/>
-          <p:nvPr/>
-        </p:nvGrpSpPr>
-        <p:grpSpPr>
-          <a:xfrm>
-            <a:off x="2812990" y="3443890"/>
-            <a:ext cx="1508909" cy="1452153"/>
-            <a:chOff x="-1" y="-1"/>
-            <a:chExt cx="1508908" cy="1452152"/>
-          </a:xfrm>
-        </p:grpSpPr>
-        <p:grpSp>
-          <p:nvGrpSpPr>
-            <p:cNvPr id="316" name="Groupe 52"/>
-            <p:cNvGrpSpPr/>
-            <p:nvPr/>
-          </p:nvGrpSpPr>
-          <p:grpSpPr>
-            <a:xfrm>
-              <a:off x="-2" y="-2"/>
-              <a:ext cx="1508909" cy="1452153"/>
-              <a:chOff x="0" y="-1"/>
-              <a:chExt cx="1508908" cy="1452152"/>
-            </a:xfrm>
-          </p:grpSpPr>
-          <p:grpSp>
-            <p:nvGrpSpPr>
-              <p:cNvPr id="314" name="Groupe 7"/>
-              <p:cNvGrpSpPr/>
-              <p:nvPr/>
-            </p:nvGrpSpPr>
-            <p:grpSpPr>
-              <a:xfrm>
-                <a:off x="-1" y="401256"/>
-                <a:ext cx="1508909" cy="1050896"/>
-                <a:chOff x="0" y="-1"/>
-                <a:chExt cx="1508908" cy="1050894"/>
-              </a:xfrm>
-            </p:grpSpPr>
-            <p:pic>
-              <p:nvPicPr>
-                <p:cNvPr id="312" name="Image 8" descr="Image 8"/>
-                <p:cNvPicPr>
-                  <a:picLocks noChangeAspect="1"/>
-                </p:cNvPicPr>
-                <p:nvPr/>
-              </p:nvPicPr>
-              <p:blipFill>
-                <a:blip r:embed="rId10"/>
-                <a:stretch>
-                  <a:fillRect/>
-                </a:stretch>
-              </p:blipFill>
-              <p:spPr>
-                <a:xfrm>
-                  <a:off x="0" y="-2"/>
-                  <a:ext cx="1508909" cy="762081"/>
-                </a:xfrm>
-                <a:prstGeom prst="rect">
-                  <a:avLst/>
-                </a:prstGeom>
-                <a:ln w="12700" cap="flat">
-                  <a:noFill/>
-                  <a:miter lim="400000"/>
-                </a:ln>
-                <a:effectLst/>
-              </p:spPr>
-            </p:pic>
-            <p:sp>
-              <p:nvSpPr>
-                <p:cNvPr id="313" name="ZoneTexte 9"/>
-                <p:cNvSpPr txBox="1"/>
-                <p:nvPr/>
-              </p:nvSpPr>
-              <p:spPr>
-                <a:xfrm>
-                  <a:off x="345740" y="762074"/>
-                  <a:ext cx="588399" cy="288820"/>
-                </a:xfrm>
-                <a:prstGeom prst="rect">
-                  <a:avLst/>
-                </a:prstGeom>
-                <a:noFill/>
-                <a:ln w="12700" cap="flat">
-                  <a:noFill/>
-                  <a:miter lim="400000"/>
-                </a:ln>
-                <a:effectLst/>
-                <a:extLst>
-                  <a:ext uri="{C572A759-6A51-4108-AA02-DFA0A04FC94B}">
-                    <ma14:wrappingTextBoxFlag xmlns:ma14="http://schemas.microsoft.com/office/mac/drawingml/2011/main" xmlns:a14="http://schemas.microsoft.com/office/drawing/2010/main" xmlns:m="http://schemas.openxmlformats.org/officeDocument/2006/math" xmlns="" val="1"/>
-                  </a:ext>
-                </a:extLst>
-              </p:spPr>
-              <p:txBody>
-                <a:bodyPr wrap="none" lIns="45718" tIns="45718" rIns="45718" bIns="45718" numCol="1" anchor="t">
-                  <a:spAutoFit/>
-                </a:bodyPr>
-                <a:lstStyle>
-                  <a:lvl1pPr>
-                    <a:defRPr>
-                      <a:latin typeface="+mj-lt"/>
-                      <a:ea typeface="+mj-ea"/>
-                      <a:cs typeface="+mj-cs"/>
-                      <a:sym typeface="Arial"/>
-                    </a:defRPr>
-                  </a:lvl1pPr>
-                </a:lstStyle>
-                <a:p>
-                  <a:r>
-                    <a:t>Model</a:t>
-                  </a:r>
-                </a:p>
-              </p:txBody>
-            </p:sp>
-          </p:grpSp>
-          <p:pic>
-            <p:nvPicPr>
-              <p:cNvPr id="315" name="Image 21" descr="Image 21"/>
-              <p:cNvPicPr>
-                <a:picLocks noChangeAspect="1"/>
-              </p:cNvPicPr>
-              <p:nvPr/>
-            </p:nvPicPr>
-            <p:blipFill>
-              <a:blip r:embed="rId11"/>
-              <a:stretch>
-                <a:fillRect/>
-              </a:stretch>
-            </p:blipFill>
-            <p:spPr>
-              <a:xfrm>
-                <a:off x="422991" y="-2"/>
-                <a:ext cx="728066" cy="599041"/>
-              </a:xfrm>
-              <a:prstGeom prst="rect">
-                <a:avLst/>
-              </a:prstGeom>
-              <a:ln w="12700" cap="flat">
-                <a:noFill/>
-                <a:miter lim="400000"/>
-              </a:ln>
-              <a:effectLst/>
-            </p:spPr>
-          </p:pic>
-        </p:grpSp>
-        <p:pic>
-          <p:nvPicPr>
-            <p:cNvPr id="317" name="Image 126" descr="Image 126"/>
-            <p:cNvPicPr>
-              <a:picLocks noChangeAspect="1"/>
-            </p:cNvPicPr>
-            <p:nvPr/>
-          </p:nvPicPr>
-          <p:blipFill>
-            <a:blip r:embed="rId12"/>
-            <a:stretch>
-              <a:fillRect/>
-            </a:stretch>
-          </p:blipFill>
-          <p:spPr>
-            <a:xfrm>
-              <a:off x="1086755" y="271675"/>
-              <a:ext cx="351252" cy="213380"/>
-            </a:xfrm>
-            <a:prstGeom prst="rect">
-              <a:avLst/>
-            </a:prstGeom>
-            <a:ln w="12700" cap="flat">
-              <a:noFill/>
-              <a:miter lim="400000"/>
-            </a:ln>
-            <a:effectLst/>
-          </p:spPr>
-        </p:pic>
-      </p:grpSp>
-      <p:grpSp>
-        <p:nvGrpSpPr>
-          <p:cNvPr id="323" name="Groupe 203"/>
-          <p:cNvGrpSpPr/>
-          <p:nvPr/>
-        </p:nvGrpSpPr>
-        <p:grpSpPr>
-          <a:xfrm>
-            <a:off x="5074475" y="1489790"/>
-            <a:ext cx="1284881" cy="863624"/>
-            <a:chOff x="-1" y="-1"/>
-            <a:chExt cx="1284880" cy="863622"/>
-          </a:xfrm>
-        </p:grpSpPr>
-        <p:sp>
-          <p:nvSpPr>
-            <p:cNvPr id="319" name="ZoneTexte 119"/>
-            <p:cNvSpPr txBox="1"/>
-            <p:nvPr/>
-          </p:nvSpPr>
-          <p:spPr>
-            <a:xfrm>
-              <a:off x="281172" y="556284"/>
-              <a:ext cx="1003707" cy="307337"/>
-            </a:xfrm>
-            <a:prstGeom prst="rect">
-              <a:avLst/>
-            </a:prstGeom>
-            <a:noFill/>
-            <a:ln w="12700" cap="flat">
-              <a:noFill/>
-              <a:miter lim="400000"/>
-            </a:ln>
-            <a:effectLst/>
-            <a:extLst>
-              <a:ext uri="{C572A759-6A51-4108-AA02-DFA0A04FC94B}">
-                <ma14:wrappingTextBoxFlag xmlns:ma14="http://schemas.microsoft.com/office/mac/drawingml/2011/main" xmlns:a14="http://schemas.microsoft.com/office/drawing/2010/main" xmlns:m="http://schemas.openxmlformats.org/officeDocument/2006/math" xmlns="" val="1"/>
-              </a:ext>
-            </a:extLst>
-          </p:spPr>
-          <p:txBody>
-            <a:bodyPr wrap="square" lIns="45718" tIns="45718" rIns="45718" bIns="45718" numCol="1" anchor="t">
-              <a:spAutoFit/>
-            </a:bodyPr>
-            <a:lstStyle>
-              <a:lvl1pPr>
-                <a:defRPr>
-                  <a:latin typeface="Inter"/>
-                  <a:ea typeface="Inter"/>
-                  <a:cs typeface="Inter"/>
-                  <a:sym typeface="Inter"/>
-                </a:defRPr>
-              </a:lvl1pPr>
-            </a:lstStyle>
-            <a:p>
-              <a:r>
-                <a:t>/tchat</a:t>
-              </a:r>
-            </a:p>
-          </p:txBody>
-        </p:sp>
-        <p:grpSp>
-          <p:nvGrpSpPr>
-            <p:cNvPr id="322" name="Groupe 202"/>
-            <p:cNvGrpSpPr/>
-            <p:nvPr/>
-          </p:nvGrpSpPr>
-          <p:grpSpPr>
-            <a:xfrm>
-              <a:off x="-2" y="-2"/>
-              <a:ext cx="1134281" cy="632048"/>
-              <a:chOff x="0" y="0"/>
-              <a:chExt cx="1134280" cy="632047"/>
-            </a:xfrm>
-          </p:grpSpPr>
-          <p:pic>
-            <p:nvPicPr>
-              <p:cNvPr id="320" name="Image 6" descr="Image 6"/>
-              <p:cNvPicPr>
-                <a:picLocks noChangeAspect="1"/>
-              </p:cNvPicPr>
-              <p:nvPr/>
-            </p:nvPicPr>
-            <p:blipFill>
-              <a:blip r:embed="rId13"/>
-              <a:stretch>
-                <a:fillRect/>
-              </a:stretch>
-            </p:blipFill>
-            <p:spPr>
-              <a:xfrm>
-                <a:off x="-1" y="-1"/>
-                <a:ext cx="713754" cy="632048"/>
-              </a:xfrm>
-              <a:prstGeom prst="rect">
-                <a:avLst/>
-              </a:prstGeom>
-              <a:ln w="12700" cap="flat">
-                <a:noFill/>
-                <a:miter lim="400000"/>
-              </a:ln>
-              <a:effectLst/>
-            </p:spPr>
-          </p:pic>
-          <p:pic>
-            <p:nvPicPr>
-              <p:cNvPr id="321" name="Image 192" descr="Image 192"/>
-              <p:cNvPicPr>
-                <a:picLocks noChangeAspect="1"/>
-              </p:cNvPicPr>
-              <p:nvPr/>
-            </p:nvPicPr>
-            <p:blipFill>
-              <a:blip r:embed="rId12"/>
-              <a:stretch>
-                <a:fillRect/>
-              </a:stretch>
-            </p:blipFill>
-            <p:spPr>
-              <a:xfrm>
-                <a:off x="783024" y="207980"/>
-                <a:ext cx="351256" cy="213384"/>
-              </a:xfrm>
-              <a:prstGeom prst="rect">
-                <a:avLst/>
-              </a:prstGeom>
-              <a:ln w="12700" cap="flat">
-                <a:noFill/>
-                <a:miter lim="400000"/>
-              </a:ln>
-              <a:effectLst/>
-            </p:spPr>
-          </p:pic>
-        </p:grpSp>
-      </p:grpSp>
-      <p:grpSp>
-        <p:nvGrpSpPr>
-          <p:cNvPr id="328" name="Groupe 211"/>
-          <p:cNvGrpSpPr/>
-          <p:nvPr/>
-        </p:nvGrpSpPr>
-        <p:grpSpPr>
-          <a:xfrm>
-            <a:off x="6998001" y="2855756"/>
-            <a:ext cx="1327684" cy="1005711"/>
-            <a:chOff x="-1" y="-2"/>
-            <a:chExt cx="1327683" cy="1005709"/>
-          </a:xfrm>
-        </p:grpSpPr>
-        <p:grpSp>
-          <p:nvGrpSpPr>
-            <p:cNvPr id="326" name="Groupe 122"/>
-            <p:cNvGrpSpPr/>
-            <p:nvPr/>
-          </p:nvGrpSpPr>
-          <p:grpSpPr>
-            <a:xfrm>
-              <a:off x="129242" y="-3"/>
-              <a:ext cx="1198441" cy="1005711"/>
-              <a:chOff x="-1" y="-1"/>
-              <a:chExt cx="1198439" cy="1005709"/>
-            </a:xfrm>
-          </p:grpSpPr>
-          <p:pic>
-            <p:nvPicPr>
-              <p:cNvPr id="324" name="Image 13" descr="Image 13"/>
-              <p:cNvPicPr>
-                <a:picLocks noChangeAspect="1"/>
-              </p:cNvPicPr>
-              <p:nvPr/>
-            </p:nvPicPr>
-            <p:blipFill>
-              <a:blip r:embed="rId14"/>
-              <a:stretch>
-                <a:fillRect/>
-              </a:stretch>
-            </p:blipFill>
-            <p:spPr>
-              <a:xfrm>
-                <a:off x="-2" y="-2"/>
-                <a:ext cx="1198441" cy="698379"/>
-              </a:xfrm>
-              <a:prstGeom prst="rect">
-                <a:avLst/>
-              </a:prstGeom>
-              <a:ln w="12700" cap="flat">
-                <a:noFill/>
-                <a:miter lim="400000"/>
-              </a:ln>
-              <a:effectLst/>
-            </p:spPr>
-          </p:pic>
-          <p:sp>
-            <p:nvSpPr>
-              <p:cNvPr id="325" name="ZoneTexte 114"/>
-              <p:cNvSpPr txBox="1"/>
-              <p:nvPr/>
-            </p:nvSpPr>
-            <p:spPr>
-              <a:xfrm>
-                <a:off x="386154" y="698372"/>
-                <a:ext cx="519120" cy="307337"/>
-              </a:xfrm>
-              <a:prstGeom prst="rect">
-                <a:avLst/>
-              </a:prstGeom>
-              <a:noFill/>
-              <a:ln w="12700" cap="flat">
-                <a:noFill/>
-                <a:miter lim="400000"/>
-              </a:ln>
-              <a:effectLst/>
-              <a:extLst>
-                <a:ext uri="{C572A759-6A51-4108-AA02-DFA0A04FC94B}">
-                  <ma14:wrappingTextBoxFlag xmlns:ma14="http://schemas.microsoft.com/office/mac/drawingml/2011/main" xmlns:a14="http://schemas.microsoft.com/office/drawing/2010/main" xmlns:m="http://schemas.openxmlformats.org/officeDocument/2006/math" xmlns="" val="1"/>
-                </a:ext>
-              </a:extLst>
-            </p:spPr>
-            <p:txBody>
-              <a:bodyPr wrap="none" lIns="45718" tIns="45718" rIns="45718" bIns="45718" numCol="1" anchor="t">
-                <a:spAutoFit/>
-              </a:bodyPr>
-              <a:lstStyle>
-                <a:lvl1pPr>
-                  <a:defRPr>
-                    <a:latin typeface="Inter"/>
-                    <a:ea typeface="Inter"/>
-                    <a:cs typeface="Inter"/>
-                    <a:sym typeface="Inter"/>
-                  </a:defRPr>
-                </a:lvl1pPr>
-              </a:lstStyle>
-              <a:p>
-                <a:r>
-                  <a:t>Front</a:t>
-                </a:r>
-              </a:p>
-            </p:txBody>
-          </p:sp>
-        </p:grpSp>
-        <p:pic>
-          <p:nvPicPr>
-            <p:cNvPr id="327" name="Image 194" descr="Image 194"/>
-            <p:cNvPicPr>
-              <a:picLocks noChangeAspect="1"/>
-            </p:cNvPicPr>
-            <p:nvPr/>
-          </p:nvPicPr>
-          <p:blipFill>
-            <a:blip r:embed="rId12"/>
-            <a:stretch>
-              <a:fillRect/>
-            </a:stretch>
-          </p:blipFill>
-          <p:spPr>
-            <a:xfrm>
-              <a:off x="-2" y="455334"/>
-              <a:ext cx="351254" cy="213380"/>
-            </a:xfrm>
-            <a:prstGeom prst="rect">
-              <a:avLst/>
-            </a:prstGeom>
-            <a:ln w="12700" cap="flat">
-              <a:noFill/>
-              <a:miter lim="400000"/>
-            </a:ln>
-            <a:effectLst/>
-          </p:spPr>
-        </p:pic>
-      </p:grpSp>
-      <p:grpSp>
-        <p:nvGrpSpPr>
-          <p:cNvPr id="333" name="Groupe 204"/>
-          <p:cNvGrpSpPr/>
-          <p:nvPr/>
-        </p:nvGrpSpPr>
-        <p:grpSpPr>
-          <a:xfrm>
-            <a:off x="4991808" y="2520991"/>
-            <a:ext cx="1184282" cy="913432"/>
-            <a:chOff x="-1" y="-1"/>
-            <a:chExt cx="1184280" cy="913430"/>
-          </a:xfrm>
-        </p:grpSpPr>
-        <p:grpSp>
-          <p:nvGrpSpPr>
-            <p:cNvPr id="331" name="Groupe 120"/>
-            <p:cNvGrpSpPr/>
-            <p:nvPr/>
-          </p:nvGrpSpPr>
-          <p:grpSpPr>
-            <a:xfrm>
-              <a:off x="-2" y="27495"/>
-              <a:ext cx="1184281" cy="885935"/>
-              <a:chOff x="0" y="0"/>
-              <a:chExt cx="1184280" cy="885934"/>
-            </a:xfrm>
-          </p:grpSpPr>
-          <p:pic>
-            <p:nvPicPr>
-              <p:cNvPr id="329" name="Image 4" descr="Image 4"/>
-              <p:cNvPicPr>
-                <a:picLocks noChangeAspect="1"/>
-              </p:cNvPicPr>
-              <p:nvPr/>
-            </p:nvPicPr>
-            <p:blipFill>
-              <a:blip r:embed="rId13"/>
-              <a:stretch>
-                <a:fillRect/>
-              </a:stretch>
-            </p:blipFill>
-            <p:spPr>
-              <a:xfrm>
-                <a:off x="-1" y="-1"/>
-                <a:ext cx="713754" cy="632046"/>
-              </a:xfrm>
-              <a:prstGeom prst="rect">
-                <a:avLst/>
-              </a:prstGeom>
-              <a:ln w="12700" cap="flat">
-                <a:noFill/>
-                <a:miter lim="400000"/>
-              </a:ln>
-              <a:effectLst/>
-            </p:spPr>
-          </p:pic>
-          <p:sp>
-            <p:nvSpPr>
-              <p:cNvPr id="330" name="ZoneTexte 117"/>
-              <p:cNvSpPr txBox="1"/>
-              <p:nvPr/>
-            </p:nvSpPr>
-            <p:spPr>
-              <a:xfrm>
-                <a:off x="546482" y="362697"/>
-                <a:ext cx="637798" cy="523237"/>
-              </a:xfrm>
-              <a:prstGeom prst="rect">
-                <a:avLst/>
-              </a:prstGeom>
-              <a:noFill/>
-              <a:ln w="12700" cap="flat">
-                <a:noFill/>
-                <a:miter lim="400000"/>
-              </a:ln>
-              <a:effectLst/>
-              <a:extLst>
-                <a:ext uri="{C572A759-6A51-4108-AA02-DFA0A04FC94B}">
-                  <ma14:wrappingTextBoxFlag xmlns:ma14="http://schemas.microsoft.com/office/mac/drawingml/2011/main" xmlns:a14="http://schemas.microsoft.com/office/drawing/2010/main" xmlns:m="http://schemas.openxmlformats.org/officeDocument/2006/math" xmlns="" val="1"/>
-                </a:ext>
-              </a:extLst>
-            </p:spPr>
-            <p:txBody>
-              <a:bodyPr wrap="none" lIns="45718" tIns="45718" rIns="45718" bIns="45718" numCol="1" anchor="t">
-                <a:spAutoFit/>
-              </a:bodyPr>
-              <a:lstStyle/>
-              <a:p>
-                <a:pPr>
-                  <a:defRPr>
-                    <a:latin typeface="Inter"/>
-                    <a:ea typeface="Inter"/>
-                    <a:cs typeface="Inter"/>
-                    <a:sym typeface="Inter"/>
-                  </a:defRPr>
-                </a:pPr>
-                <a:r>
-                  <a:t>/team</a:t>
-                </a:r>
-              </a:p>
-              <a:p>
-                <a:pPr>
-                  <a:defRPr>
-                    <a:latin typeface="Inter"/>
-                    <a:ea typeface="Inter"/>
-                    <a:cs typeface="Inter"/>
-                    <a:sym typeface="Inter"/>
-                  </a:defRPr>
-                </a:pPr>
-                <a:r>
-                  <a:t>/player</a:t>
-                </a:r>
-              </a:p>
-            </p:txBody>
-          </p:sp>
-        </p:grpSp>
-        <p:pic>
-          <p:nvPicPr>
-            <p:cNvPr id="332" name="Image 196" descr="Image 196"/>
-            <p:cNvPicPr>
-              <a:picLocks noChangeAspect="1"/>
-            </p:cNvPicPr>
-            <p:nvPr/>
-          </p:nvPicPr>
-          <p:blipFill>
-            <a:blip r:embed="rId12"/>
-            <a:stretch>
-              <a:fillRect/>
-            </a:stretch>
-          </p:blipFill>
-          <p:spPr>
-            <a:xfrm>
-              <a:off x="642631" y="-2"/>
-              <a:ext cx="351252" cy="213382"/>
-            </a:xfrm>
-            <a:prstGeom prst="rect">
-              <a:avLst/>
-            </a:prstGeom>
-            <a:ln w="12700" cap="flat">
-              <a:noFill/>
-              <a:miter lim="400000"/>
-            </a:ln>
-            <a:effectLst/>
-          </p:spPr>
-        </p:pic>
-      </p:grpSp>
-      <p:grpSp>
-        <p:nvGrpSpPr>
-          <p:cNvPr id="338" name="Groupe 210"/>
-          <p:cNvGrpSpPr/>
-          <p:nvPr/>
-        </p:nvGrpSpPr>
-        <p:grpSpPr>
-          <a:xfrm>
-            <a:off x="5032090" y="3665180"/>
-            <a:ext cx="1348456" cy="632048"/>
-            <a:chOff x="-1" y="0"/>
-            <a:chExt cx="1348454" cy="632046"/>
-          </a:xfrm>
-        </p:grpSpPr>
-        <p:grpSp>
-          <p:nvGrpSpPr>
-            <p:cNvPr id="336" name="Groupe 121"/>
-            <p:cNvGrpSpPr/>
-            <p:nvPr/>
-          </p:nvGrpSpPr>
-          <p:grpSpPr>
-            <a:xfrm>
-              <a:off x="-2" y="0"/>
-              <a:ext cx="1348455" cy="632047"/>
-              <a:chOff x="0" y="0"/>
-              <a:chExt cx="1348454" cy="632046"/>
-            </a:xfrm>
-          </p:grpSpPr>
-          <p:pic>
-            <p:nvPicPr>
-              <p:cNvPr id="334" name="Image 2" descr="Image 2"/>
-              <p:cNvPicPr>
-                <a:picLocks noChangeAspect="1"/>
-              </p:cNvPicPr>
-              <p:nvPr/>
-            </p:nvPicPr>
-            <p:blipFill>
-              <a:blip r:embed="rId13"/>
-              <a:stretch>
-                <a:fillRect/>
-              </a:stretch>
-            </p:blipFill>
-            <p:spPr>
-              <a:xfrm>
-                <a:off x="-1" y="0"/>
-                <a:ext cx="713755" cy="632047"/>
-              </a:xfrm>
-              <a:prstGeom prst="rect">
-                <a:avLst/>
-              </a:prstGeom>
-              <a:ln w="12700" cap="flat">
-                <a:noFill/>
-                <a:miter lim="400000"/>
-              </a:ln>
-              <a:effectLst/>
-            </p:spPr>
-          </p:pic>
-          <p:sp>
-            <p:nvSpPr>
-              <p:cNvPr id="335" name="ZoneTexte 115"/>
-              <p:cNvSpPr txBox="1"/>
-              <p:nvPr/>
-            </p:nvSpPr>
-            <p:spPr>
-              <a:xfrm>
-                <a:off x="661258" y="289408"/>
-                <a:ext cx="687196" cy="307337"/>
-              </a:xfrm>
-              <a:prstGeom prst="rect">
-                <a:avLst/>
-              </a:prstGeom>
-              <a:noFill/>
-              <a:ln w="12700" cap="flat">
-                <a:noFill/>
-                <a:miter lim="400000"/>
-              </a:ln>
-              <a:effectLst/>
-              <a:extLst>
-                <a:ext uri="{C572A759-6A51-4108-AA02-DFA0A04FC94B}">
-                  <ma14:wrappingTextBoxFlag xmlns:ma14="http://schemas.microsoft.com/office/mac/drawingml/2011/main" xmlns:a14="http://schemas.microsoft.com/office/drawing/2010/main" xmlns:m="http://schemas.openxmlformats.org/officeDocument/2006/math" xmlns="" val="1"/>
-                </a:ext>
-              </a:extLst>
-            </p:spPr>
-            <p:txBody>
-              <a:bodyPr wrap="none" lIns="45718" tIns="45718" rIns="45718" bIns="45718" numCol="1" anchor="t">
-                <a:spAutoFit/>
-              </a:bodyPr>
-              <a:lstStyle/>
-              <a:p>
-                <a:pPr>
-                  <a:defRPr>
-                    <a:latin typeface="+mj-lt"/>
-                    <a:ea typeface="+mj-ea"/>
-                    <a:cs typeface="+mj-cs"/>
-                    <a:sym typeface="Arial"/>
-                  </a:defRPr>
-                </a:pPr>
-                <a:r>
-                  <a:t>/</a:t>
-                </a:r>
-                <a:r>
-                  <a:rPr>
-                    <a:latin typeface="Inter"/>
-                    <a:ea typeface="Inter"/>
-                    <a:cs typeface="Inter"/>
-                    <a:sym typeface="Inter"/>
-                  </a:rPr>
-                  <a:t>predict</a:t>
-                </a:r>
-              </a:p>
-            </p:txBody>
-          </p:sp>
-        </p:grpSp>
-        <p:pic>
-          <p:nvPicPr>
-            <p:cNvPr id="337" name="Image 198" descr="Image 198"/>
-            <p:cNvPicPr>
-              <a:picLocks noChangeAspect="1"/>
-            </p:cNvPicPr>
-            <p:nvPr/>
-          </p:nvPicPr>
-          <p:blipFill>
-            <a:blip r:embed="rId12"/>
-            <a:stretch>
-              <a:fillRect/>
-            </a:stretch>
-          </p:blipFill>
-          <p:spPr>
-            <a:xfrm>
-              <a:off x="618103" y="50390"/>
-              <a:ext cx="351254" cy="213380"/>
-            </a:xfrm>
-            <a:prstGeom prst="rect">
-              <a:avLst/>
-            </a:prstGeom>
-            <a:ln w="12700" cap="flat">
-              <a:noFill/>
-              <a:miter lim="400000"/>
-            </a:ln>
-            <a:effectLst/>
-          </p:spPr>
-        </p:pic>
-      </p:grpSp>
-      <p:grpSp>
-        <p:nvGrpSpPr>
-          <p:cNvPr id="343" name="Groupe 213"/>
-          <p:cNvGrpSpPr/>
-          <p:nvPr/>
-        </p:nvGrpSpPr>
-        <p:grpSpPr>
-          <a:xfrm>
-            <a:off x="2785852" y="936399"/>
-            <a:ext cx="1149397" cy="1137743"/>
-            <a:chOff x="-1" y="-1"/>
-            <a:chExt cx="1149396" cy="1137741"/>
-          </a:xfrm>
-        </p:grpSpPr>
-        <p:grpSp>
-          <p:nvGrpSpPr>
-            <p:cNvPr id="341" name="Groupe 37"/>
-            <p:cNvGrpSpPr/>
-            <p:nvPr/>
-          </p:nvGrpSpPr>
-          <p:grpSpPr>
-            <a:xfrm>
-              <a:off x="209350" y="-2"/>
-              <a:ext cx="940046" cy="1137742"/>
-              <a:chOff x="0" y="0"/>
-              <a:chExt cx="940044" cy="1137741"/>
-            </a:xfrm>
-          </p:grpSpPr>
-          <p:pic>
-            <p:nvPicPr>
-              <p:cNvPr id="339" name="Image 27" descr="Image 27"/>
-              <p:cNvPicPr>
-                <a:picLocks noChangeAspect="1"/>
-              </p:cNvPicPr>
-              <p:nvPr/>
-            </p:nvPicPr>
-            <p:blipFill>
-              <a:blip r:embed="rId15"/>
-              <a:stretch>
-                <a:fillRect/>
-              </a:stretch>
-            </p:blipFill>
-            <p:spPr>
-              <a:xfrm>
-                <a:off x="152389" y="-1"/>
-                <a:ext cx="571741" cy="638222"/>
-              </a:xfrm>
-              <a:prstGeom prst="rect">
-                <a:avLst/>
-              </a:prstGeom>
-              <a:ln w="12700" cap="flat">
-                <a:noFill/>
-                <a:miter lim="400000"/>
-              </a:ln>
-              <a:effectLst/>
-            </p:spPr>
-          </p:pic>
-          <p:pic>
-            <p:nvPicPr>
-              <p:cNvPr id="340" name="Image 17" descr="Image 17"/>
-              <p:cNvPicPr>
-                <a:picLocks noChangeAspect="1"/>
-              </p:cNvPicPr>
-              <p:nvPr/>
-            </p:nvPicPr>
-            <p:blipFill>
-              <a:blip r:embed="rId16"/>
-              <a:stretch>
-                <a:fillRect/>
-              </a:stretch>
-            </p:blipFill>
-            <p:spPr>
-              <a:xfrm>
-                <a:off x="0" y="555409"/>
-                <a:ext cx="940045" cy="582332"/>
-              </a:xfrm>
-              <a:prstGeom prst="rect">
-                <a:avLst/>
-              </a:prstGeom>
-              <a:ln w="12700" cap="flat">
-                <a:noFill/>
-                <a:miter lim="400000"/>
-              </a:ln>
-              <a:effectLst/>
-            </p:spPr>
-          </p:pic>
-        </p:grpSp>
-        <p:pic>
-          <p:nvPicPr>
-            <p:cNvPr id="342" name="Image 201" descr="Image 201"/>
-            <p:cNvPicPr>
-              <a:picLocks noChangeAspect="1"/>
-            </p:cNvPicPr>
-            <p:nvPr/>
-          </p:nvPicPr>
-          <p:blipFill>
-            <a:blip r:embed="rId12"/>
-            <a:stretch>
-              <a:fillRect/>
-            </a:stretch>
-          </p:blipFill>
-          <p:spPr>
-            <a:xfrm>
-              <a:off x="-2" y="419992"/>
-              <a:ext cx="351254" cy="213382"/>
-            </a:xfrm>
-            <a:prstGeom prst="rect">
-              <a:avLst/>
-            </a:prstGeom>
-            <a:ln w="12700" cap="flat">
-              <a:noFill/>
-              <a:miter lim="400000"/>
-            </a:ln>
-            <a:effectLst/>
-          </p:spPr>
-        </p:pic>
-      </p:grpSp>
-    </p:spTree>
-  </p:cSld>
-  <p:clrMapOvr>
-    <a:masterClrMapping/>
-  </p:clrMapOvr>
-  <p:transition spd="med"/>
-</p:sld>
-</file>
-
-<file path=ppt/slides/slide11.xml><?xml version="1.0" encoding="utf-8"?>
-<p:sld xmlns:a="http://schemas.openxmlformats.org/drawingml/2006/main" xmlns:r="http://schemas.openxmlformats.org/officeDocument/2006/relationships" xmlns:p="http://schemas.openxmlformats.org/presentationml/2006/main">
-  <p:cSld>
-    <p:spTree>
-      <p:nvGrpSpPr>
-        <p:cNvPr id="1" name=""/>
-        <p:cNvGrpSpPr/>
-        <p:nvPr/>
-      </p:nvGrpSpPr>
-      <p:grpSpPr>
-        <a:xfrm>
-          <a:off x="0" y="0"/>
-          <a:ext cx="0" cy="0"/>
-          <a:chOff x="0" y="0"/>
-          <a:chExt cx="0" cy="0"/>
-        </a:xfrm>
-      </p:grpSpPr>
-      <p:pic>
-        <p:nvPicPr>
-          <p:cNvPr id="351" name="Fond Bayern Munich" descr="Fond Bayern Munich"/>
-          <p:cNvPicPr>
-            <a:picLocks noChangeAspect="1"/>
-          </p:cNvPicPr>
-          <p:nvPr/>
-        </p:nvPicPr>
-        <p:blipFill>
-          <a:blip r:embed="rId2"/>
-          <a:srcRect t="7813" b="7812"/>
-          <a:stretch>
-            <a:fillRect/>
-          </a:stretch>
-        </p:blipFill>
-        <p:spPr>
-          <a:xfrm>
-            <a:off x="0" y="0"/>
-            <a:ext cx="9144000" cy="5143500"/>
-          </a:xfrm>
-          <a:prstGeom prst="rect">
-            <a:avLst/>
-          </a:prstGeom>
-          <a:ln w="12700">
-            <a:miter lim="400000"/>
-          </a:ln>
-        </p:spPr>
-      </p:pic>
-      <p:sp>
-        <p:nvSpPr>
-          <p:cNvPr id="352" name="Google Shape;75;p16"/>
-          <p:cNvSpPr txBox="1">
-            <a:spLocks noGrp="1"/>
-          </p:cNvSpPr>
-          <p:nvPr>
-            <p:ph type="title"/>
-          </p:nvPr>
-        </p:nvSpPr>
-        <p:spPr>
-          <a:xfrm>
-            <a:off x="1192661" y="403307"/>
-            <a:ext cx="5315108" cy="533106"/>
-          </a:xfrm>
-          <a:prstGeom prst="rect">
-            <a:avLst/>
-          </a:prstGeom>
-        </p:spPr>
-        <p:txBody>
-          <a:bodyPr anchor="ctr"/>
-          <a:lstStyle>
-            <a:lvl1pPr defTabSz="822958">
-              <a:defRPr sz="2200">
-                <a:solidFill>
-                  <a:srgbClr val="0E3449"/>
-                </a:solidFill>
-                <a:latin typeface="Inter SemiBold"/>
-                <a:ea typeface="Inter SemiBold"/>
-                <a:cs typeface="Inter SemiBold"/>
-                <a:sym typeface="Inter SemiBold"/>
-              </a:defRPr>
-            </a:lvl1pPr>
-          </a:lstStyle>
-          <a:p>
-            <a:r>
-              <a:rPr dirty="0"/>
-              <a:t>Conclusion</a:t>
-            </a:r>
-            <a:r>
-              <a:rPr lang="fr-FR" dirty="0"/>
-              <a:t> - Evolutions</a:t>
-            </a:r>
-            <a:endParaRPr dirty="0"/>
-          </a:p>
-        </p:txBody>
-      </p:sp>
-      <p:pic>
-        <p:nvPicPr>
-          <p:cNvPr id="353" name="Google Shape;76;p16" descr="Google Shape;76;p16"/>
-          <p:cNvPicPr>
-            <a:picLocks noChangeAspect="1"/>
-          </p:cNvPicPr>
-          <p:nvPr/>
-        </p:nvPicPr>
-        <p:blipFill>
-          <a:blip r:embed="rId3"/>
-          <a:stretch>
-            <a:fillRect/>
-          </a:stretch>
-        </p:blipFill>
-        <p:spPr>
-          <a:xfrm>
-            <a:off x="463375" y="482852"/>
-            <a:ext cx="576901" cy="385909"/>
-          </a:xfrm>
-          <a:prstGeom prst="rect">
-            <a:avLst/>
-          </a:prstGeom>
-          <a:ln w="12700">
-            <a:miter lim="400000"/>
-          </a:ln>
-        </p:spPr>
-      </p:pic>
-      <p:sp>
-        <p:nvSpPr>
-          <p:cNvPr id="354" name="Google Shape;77;p16"/>
-          <p:cNvSpPr/>
-          <p:nvPr/>
-        </p:nvSpPr>
-        <p:spPr>
-          <a:xfrm>
-            <a:off x="10224" y="4892025"/>
-            <a:ext cx="9144001" cy="251400"/>
-          </a:xfrm>
-          <a:prstGeom prst="rect">
-            <a:avLst/>
-          </a:prstGeom>
-          <a:solidFill>
-            <a:srgbClr val="C3FFFC"/>
-          </a:solidFill>
-          <a:ln w="12700">
-            <a:miter lim="400000"/>
-          </a:ln>
-        </p:spPr>
-        <p:txBody>
-          <a:bodyPr lIns="45718" tIns="45718" rIns="45718" bIns="45718" anchor="ctr"/>
-          <a:lstStyle/>
-          <a:p>
-            <a:pPr>
-              <a:defRPr>
-                <a:latin typeface="+mj-lt"/>
-                <a:ea typeface="+mj-ea"/>
-                <a:cs typeface="+mj-cs"/>
-                <a:sym typeface="Arial"/>
-              </a:defRPr>
-            </a:pPr>
-            <a:endParaRPr/>
-          </a:p>
-        </p:txBody>
-      </p:sp>
       <p:sp>
         <p:nvSpPr>
           <p:cNvPr id="355" name="ZoneTexte 2"/>
@@ -4871,7 +3332,7 @@
           </a:ln>
           <a:extLst>
             <a:ext uri="{C572A759-6A51-4108-AA02-DFA0A04FC94B}">
-              <ma14:wrappingTextBoxFlag xmlns:ma14="http://schemas.microsoft.com/office/mac/drawingml/2011/main" xmlns:a14="http://schemas.microsoft.com/office/drawing/2010/main" xmlns:m="http://schemas.openxmlformats.org/officeDocument/2006/math" xmlns="" val="1"/>
+              <ma14:wrappingTextBoxFlag xmlns="" xmlns:m="http://schemas.openxmlformats.org/officeDocument/2006/math" xmlns:a14="http://schemas.microsoft.com/office/drawing/2010/main" xmlns:ma14="http://schemas.microsoft.com/office/mac/drawingml/2011/main" val="1"/>
             </a:ext>
           </a:extLst>
         </p:spPr>
@@ -5248,7 +3709,7 @@
           </a:ln>
           <a:extLst>
             <a:ext uri="{C572A759-6A51-4108-AA02-DFA0A04FC94B}">
-              <ma14:wrappingTextBoxFlag xmlns="" xmlns:m="http://schemas.openxmlformats.org/officeDocument/2006/math" xmlns:a14="http://schemas.microsoft.com/office/drawing/2010/main" xmlns:ma14="http://schemas.microsoft.com/office/mac/drawingml/2011/main" val="1"/>
+              <ma14:wrappingTextBoxFlag xmlns:ma14="http://schemas.microsoft.com/office/mac/drawingml/2011/main" xmlns:a14="http://schemas.microsoft.com/office/drawing/2010/main" xmlns:m="http://schemas.openxmlformats.org/officeDocument/2006/math" xmlns="" val="1"/>
             </a:ext>
           </a:extLst>
         </p:spPr>
@@ -5294,7 +3755,7 @@
 </p:sld>
 </file>
 
-<file path=ppt/slides/slide12.xml><?xml version="1.0" encoding="utf-8"?>
+<file path=ppt/slides/slide11.xml><?xml version="1.0" encoding="utf-8"?>
 <p:sld xmlns:a="http://schemas.openxmlformats.org/drawingml/2006/main" xmlns:r="http://schemas.openxmlformats.org/officeDocument/2006/relationships" xmlns:p="http://schemas.openxmlformats.org/presentationml/2006/main">
   <p:cSld>
     <p:bg>
@@ -5423,7 +3884,7 @@
 </p:sld>
 </file>
 
-<file path=ppt/slides/slide13.xml><?xml version="1.0" encoding="utf-8"?>
+<file path=ppt/slides/slide12.xml><?xml version="1.0" encoding="utf-8"?>
 <p:sld xmlns:a="http://schemas.openxmlformats.org/drawingml/2006/main" xmlns:r="http://schemas.openxmlformats.org/officeDocument/2006/relationships" xmlns:p="http://schemas.openxmlformats.org/presentationml/2006/main">
   <p:cSld>
     <p:spTree>
@@ -5594,7 +4055,7 @@
           </a:ln>
           <a:extLst>
             <a:ext uri="{C572A759-6A51-4108-AA02-DFA0A04FC94B}">
-              <ma14:wrappingTextBoxFlag xmlns:ma14="http://schemas.microsoft.com/office/mac/drawingml/2011/main" xmlns:a14="http://schemas.microsoft.com/office/drawing/2010/main" xmlns:m="http://schemas.openxmlformats.org/officeDocument/2006/math" xmlns="" val="1"/>
+              <ma14:wrappingTextBoxFlag xmlns="" xmlns:m="http://schemas.openxmlformats.org/officeDocument/2006/math" xmlns:a14="http://schemas.microsoft.com/office/drawing/2010/main" xmlns:ma14="http://schemas.microsoft.com/office/mac/drawingml/2011/main" val="1"/>
             </a:ext>
           </a:extLst>
         </p:spPr>
@@ -5699,7 +4160,7 @@
           </a:ln>
           <a:extLst>
             <a:ext uri="{C572A759-6A51-4108-AA02-DFA0A04FC94B}">
-              <ma14:wrappingTextBoxFlag xmlns:ma14="http://schemas.microsoft.com/office/mac/drawingml/2011/main" xmlns:a14="http://schemas.microsoft.com/office/drawing/2010/main" xmlns:m="http://schemas.openxmlformats.org/officeDocument/2006/math" xmlns="" val="1"/>
+              <ma14:wrappingTextBoxFlag xmlns="" xmlns:m="http://schemas.openxmlformats.org/officeDocument/2006/math" xmlns:a14="http://schemas.microsoft.com/office/drawing/2010/main" xmlns:ma14="http://schemas.microsoft.com/office/mac/drawingml/2011/main" val="1"/>
             </a:ext>
           </a:extLst>
         </p:spPr>
@@ -5822,7 +4283,7 @@
 </p:sld>
 </file>
 
-<file path=ppt/slides/slide14.xml><?xml version="1.0" encoding="utf-8"?>
+<file path=ppt/slides/slide13.xml><?xml version="1.0" encoding="utf-8"?>
 <p:sld xmlns:a="http://schemas.openxmlformats.org/drawingml/2006/main" xmlns:r="http://schemas.openxmlformats.org/officeDocument/2006/relationships" xmlns:p="http://schemas.openxmlformats.org/presentationml/2006/main">
   <p:cSld>
     <p:spTree>
@@ -6036,7 +4497,7 @@
             <a:effectLst/>
             <a:extLst>
               <a:ext uri="{C572A759-6A51-4108-AA02-DFA0A04FC94B}">
-                <ma14:wrappingTextBoxFlag xmlns:ma14="http://schemas.microsoft.com/office/mac/drawingml/2011/main" xmlns:a14="http://schemas.microsoft.com/office/drawing/2010/main" xmlns:m="http://schemas.openxmlformats.org/officeDocument/2006/math" xmlns="" val="1"/>
+                <ma14:wrappingTextBoxFlag xmlns="" xmlns:m="http://schemas.openxmlformats.org/officeDocument/2006/math" xmlns:a14="http://schemas.microsoft.com/office/drawing/2010/main" xmlns:ma14="http://schemas.microsoft.com/office/mac/drawingml/2011/main" val="1"/>
               </a:ext>
             </a:extLst>
           </p:spPr>
@@ -6127,7 +4588,7 @@
             <a:effectLst/>
             <a:extLst>
               <a:ext uri="{C572A759-6A51-4108-AA02-DFA0A04FC94B}">
-                <ma14:wrappingTextBoxFlag xmlns:ma14="http://schemas.microsoft.com/office/mac/drawingml/2011/main" xmlns:a14="http://schemas.microsoft.com/office/drawing/2010/main" xmlns:m="http://schemas.openxmlformats.org/officeDocument/2006/math" xmlns="" val="1"/>
+                <ma14:wrappingTextBoxFlag xmlns="" xmlns:m="http://schemas.openxmlformats.org/officeDocument/2006/math" xmlns:a14="http://schemas.microsoft.com/office/drawing/2010/main" xmlns:ma14="http://schemas.microsoft.com/office/mac/drawingml/2011/main" val="1"/>
               </a:ext>
             </a:extLst>
           </p:spPr>
@@ -6559,14 +5020,82 @@
       </p:grpSpPr>
       <p:sp>
         <p:nvSpPr>
-          <p:cNvPr id="122" name="Google Shape;61;p14"/>
+          <p:cNvPr id="127" name="title"/>
+          <p:cNvSpPr txBox="1">
+            <a:spLocks noGrp="1"/>
+          </p:cNvSpPr>
+          <p:nvPr>
+            <p:ph type="title"/>
+          </p:nvPr>
+        </p:nvSpPr>
+        <p:spPr>
+          <a:xfrm>
+            <a:off x="1192660" y="403305"/>
+            <a:ext cx="5315110" cy="533109"/>
+          </a:xfrm>
+          <a:prstGeom prst="rect">
+            <a:avLst/>
+          </a:prstGeom>
+        </p:spPr>
+        <p:txBody>
+          <a:bodyPr anchor="ctr"/>
+          <a:lstStyle>
+            <a:lvl1pPr defTabSz="822958">
+              <a:defRPr sz="2200">
+                <a:solidFill>
+                  <a:srgbClr val="0E3449"/>
+                </a:solidFill>
+                <a:latin typeface="Inter SemiBold"/>
+                <a:ea typeface="Inter SemiBold"/>
+                <a:cs typeface="Inter SemiBold"/>
+                <a:sym typeface="Inter SemiBold"/>
+              </a:defRPr>
+            </a:lvl1pPr>
+          </a:lstStyle>
+          <a:p>
+            <a:r>
+              <a:t>Pitch</a:t>
+            </a:r>
+          </a:p>
+        </p:txBody>
+      </p:sp>
+      <p:pic>
+        <p:nvPicPr>
+          <p:cNvPr id="128" name="logo" descr="logo"/>
+          <p:cNvPicPr>
+            <a:picLocks noChangeAspect="1"/>
+          </p:cNvPicPr>
+          <p:nvPr/>
+        </p:nvPicPr>
+        <p:blipFill>
+          <a:blip r:embed="rId2"/>
+          <a:stretch>
+            <a:fillRect/>
+          </a:stretch>
+        </p:blipFill>
+        <p:spPr>
+          <a:xfrm>
+            <a:off x="463375" y="482852"/>
+            <a:ext cx="576901" cy="385910"/>
+          </a:xfrm>
+          <a:prstGeom prst="rect">
+            <a:avLst/>
+          </a:prstGeom>
+          <a:ln w="12700">
+            <a:miter lim="400000"/>
+          </a:ln>
+        </p:spPr>
+      </p:pic>
+      <p:sp>
+        <p:nvSpPr>
+          <p:cNvPr id="129" name="bar"/>
           <p:cNvSpPr/>
           <p:nvPr/>
         </p:nvSpPr>
         <p:spPr>
           <a:xfrm>
-            <a:off x="5500" y="-17777"/>
-            <a:ext cx="3335400" cy="5161204"/>
+            <a:off x="10224" y="4892025"/>
+            <a:ext cx="9144001" cy="251400"/>
           </a:xfrm>
           <a:prstGeom prst="rect">
             <a:avLst/>
@@ -6596,164 +5125,90 @@
       </p:sp>
       <p:sp>
         <p:nvSpPr>
-          <p:cNvPr id="123" name="Google Shape;62;p14"/>
-          <p:cNvSpPr txBox="1">
-            <a:spLocks noGrp="1"/>
-          </p:cNvSpPr>
-          <p:nvPr>
-            <p:ph type="title"/>
-          </p:nvPr>
+          <p:cNvPr id="130" name="motiv"/>
+          <p:cNvSpPr/>
+          <p:nvPr/>
         </p:nvSpPr>
         <p:spPr>
           <a:xfrm>
-            <a:off x="390595" y="1138673"/>
-            <a:ext cx="2513111" cy="3458105"/>
-          </a:xfrm>
-          <a:prstGeom prst="rect">
-            <a:avLst/>
-          </a:prstGeom>
+            <a:off x="550000" y="1149998"/>
+            <a:ext cx="8044000" cy="1150003"/>
+          </a:xfrm>
+          <a:prstGeom prst="roundRect">
+            <a:avLst>
+              <a:gd name="adj" fmla="val 7000"/>
+            </a:avLst>
+          </a:prstGeom>
+          <a:solidFill>
+            <a:srgbClr val="EAF2F6"/>
+          </a:solidFill>
+          <a:ln w="12700">
+            <a:miter lim="400000"/>
+          </a:ln>
+          <a:effectLst>
+            <a:outerShdw blurRad="88900" dist="26000" dir="5400000" rotWithShape="0">
+              <a:srgbClr val="0E3449">
+                <a:alpha val="12000"/>
+              </a:srgbClr>
+            </a:outerShdw>
+          </a:effectLst>
         </p:spPr>
         <p:txBody>
-          <a:bodyPr/>
+          <a:bodyPr lIns="45718" tIns="45718" rIns="45718" bIns="45718"/>
           <a:lstStyle/>
           <a:p>
             <a:pPr>
-              <a:defRPr sz="2400">
-                <a:solidFill>
-                  <a:srgbClr val="015955"/>
-                </a:solidFill>
-                <a:latin typeface="Inter"/>
-                <a:ea typeface="Inter"/>
-                <a:cs typeface="Inter"/>
-                <a:sym typeface="Inter"/>
-              </a:defRPr>
-            </a:pPr>
-            <a:r>
-              <a:t>Group members</a:t>
-            </a:r>
-          </a:p>
-          <a:p>
-            <a:pPr>
-              <a:defRPr sz="2400">
-                <a:solidFill>
-                  <a:srgbClr val="015955"/>
-                </a:solidFill>
-                <a:latin typeface="Inter"/>
-                <a:ea typeface="Inter"/>
-                <a:cs typeface="Inter"/>
-                <a:sym typeface="Inter"/>
+              <a:defRPr>
+                <a:latin typeface="+mj-lt"/>
+                <a:ea typeface="+mj-ea"/>
+                <a:cs typeface="+mj-cs"/>
+                <a:sym typeface="Arial"/>
               </a:defRPr>
             </a:pPr>
             <a:endParaRPr/>
           </a:p>
+        </p:txBody>
+      </p:sp>
+      <p:sp>
+        <p:nvSpPr>
+          <p:cNvPr id="131" name="mcirc"/>
+          <p:cNvSpPr/>
+          <p:nvPr/>
+        </p:nvSpPr>
+        <p:spPr>
+          <a:xfrm>
+            <a:off x="849998" y="1384998"/>
+            <a:ext cx="680009" cy="680009"/>
+          </a:xfrm>
+          <a:prstGeom prst="ellipse">
+            <a:avLst/>
+          </a:prstGeom>
+          <a:solidFill>
+            <a:srgbClr val="0E3449"/>
+          </a:solidFill>
+          <a:ln w="12700">
+            <a:miter lim="400000"/>
+          </a:ln>
+        </p:spPr>
+        <p:txBody>
+          <a:bodyPr lIns="45718" tIns="45718" rIns="45718" bIns="45718"/>
+          <a:lstStyle/>
           <a:p>
             <a:pPr>
-              <a:defRPr sz="1500">
-                <a:solidFill>
-                  <a:srgbClr val="015955"/>
-                </a:solidFill>
-                <a:latin typeface="Inter"/>
-                <a:ea typeface="Inter"/>
-                <a:cs typeface="Inter"/>
-                <a:sym typeface="Inter"/>
+              <a:defRPr>
+                <a:latin typeface="+mj-lt"/>
+                <a:ea typeface="+mj-ea"/>
+                <a:cs typeface="+mj-cs"/>
+                <a:sym typeface="Arial"/>
               </a:defRPr>
             </a:pPr>
             <a:endParaRPr/>
-          </a:p>
-          <a:p>
-            <a:pPr>
-              <a:defRPr sz="1500">
-                <a:solidFill>
-                  <a:srgbClr val="015955"/>
-                </a:solidFill>
-                <a:latin typeface="Inter"/>
-                <a:ea typeface="Inter"/>
-                <a:cs typeface="Inter"/>
-                <a:sym typeface="Inter"/>
-              </a:defRPr>
-            </a:pPr>
-            <a:endParaRPr/>
-          </a:p>
-          <a:p>
-            <a:pPr>
-              <a:defRPr sz="1500">
-                <a:solidFill>
-                  <a:srgbClr val="015955"/>
-                </a:solidFill>
-                <a:latin typeface="Inter"/>
-                <a:ea typeface="Inter"/>
-                <a:cs typeface="Inter"/>
-                <a:sym typeface="Inter"/>
-              </a:defRPr>
-            </a:pPr>
-            <a:r>
-              <a:t>Franck IDDA</a:t>
-            </a:r>
-          </a:p>
-          <a:p>
-            <a:pPr>
-              <a:defRPr sz="1500">
-                <a:solidFill>
-                  <a:srgbClr val="015955"/>
-                </a:solidFill>
-                <a:latin typeface="Inter"/>
-                <a:ea typeface="Inter"/>
-                <a:cs typeface="Inter"/>
-                <a:sym typeface="Inter"/>
-              </a:defRPr>
-            </a:pPr>
-            <a:r>
-              <a:t>Hugo PIERRE</a:t>
-            </a:r>
-          </a:p>
-          <a:p>
-            <a:pPr>
-              <a:defRPr sz="1500">
-                <a:solidFill>
-                  <a:srgbClr val="015955"/>
-                </a:solidFill>
-                <a:latin typeface="Inter"/>
-                <a:ea typeface="Inter"/>
-                <a:cs typeface="Inter"/>
-                <a:sym typeface="Inter"/>
-              </a:defRPr>
-            </a:pPr>
-            <a:r>
-              <a:t>Safidy RAMAHERISON</a:t>
-            </a:r>
           </a:p>
         </p:txBody>
       </p:sp>
       <p:pic>
         <p:nvPicPr>
-          <p:cNvPr id="124" name="Google Shape;63;p14" descr="Google Shape;63;p14"/>
-          <p:cNvPicPr>
-            <a:picLocks noChangeAspect="1"/>
-          </p:cNvPicPr>
-          <p:nvPr/>
-        </p:nvPicPr>
-        <p:blipFill>
-          <a:blip r:embed="rId2"/>
-          <a:stretch>
-            <a:fillRect/>
-          </a:stretch>
-        </p:blipFill>
-        <p:spPr>
-          <a:xfrm>
-            <a:off x="463375" y="482852"/>
-            <a:ext cx="576901" cy="385911"/>
-          </a:xfrm>
-          <a:prstGeom prst="rect">
-            <a:avLst/>
-          </a:prstGeom>
-          <a:ln w="12700">
-            <a:miter lim="400000"/>
-          </a:ln>
-        </p:spPr>
-      </p:pic>
-      <p:pic>
-        <p:nvPicPr>
-          <p:cNvPr id="125" name="pasted-movie.png" descr="pasted-movie.png"/>
+          <p:cNvPr id="132" name="micon" descr="micon"/>
           <p:cNvPicPr>
             <a:picLocks noChangeAspect="1"/>
           </p:cNvPicPr>
@@ -6767,8 +5222,8 @@
         </p:blipFill>
         <p:spPr>
           <a:xfrm>
-            <a:off x="3605986" y="1081707"/>
-            <a:ext cx="5018376" cy="2962239"/>
+            <a:off x="990000" y="1525000"/>
+            <a:ext cx="400005" cy="400005"/>
           </a:xfrm>
           <a:prstGeom prst="rect">
             <a:avLst/>
@@ -6778,6 +5233,518 @@
           </a:ln>
         </p:spPr>
       </p:pic>
+      <p:sp>
+        <p:nvSpPr>
+          <p:cNvPr id="133" name="mtext"/>
+          <p:cNvSpPr txBox="1"/>
+          <p:nvPr/>
+        </p:nvSpPr>
+        <p:spPr>
+          <a:xfrm>
+            <a:off x="1827999" y="1309999"/>
+            <a:ext cx="6448005" cy="830002"/>
+          </a:xfrm>
+          <a:prstGeom prst="rect">
+            <a:avLst/>
+          </a:prstGeom>
+          <a:ln w="12700">
+            <a:miter lim="400000"/>
+          </a:ln>
+          <a:extLst>
+            <a:ext uri="{C572A759-6A51-4108-AA02-DFA0A04FC94B}">
+              <ma14:wrappingTextBoxFlag xmlns="" xmlns:m="http://schemas.openxmlformats.org/officeDocument/2006/math" xmlns:a14="http://schemas.microsoft.com/office/drawing/2010/main" xmlns:ma14="http://schemas.microsoft.com/office/mac/drawingml/2011/main" val="1"/>
+            </a:ext>
+          </a:extLst>
+        </p:spPr>
+        <p:txBody>
+          <a:bodyPr lIns="18000" tIns="18000" rIns="18000" bIns="18000" anchor="ctr">
+            <a:normAutofit/>
+          </a:bodyPr>
+          <a:lstStyle/>
+          <a:p>
+            <a:pPr>
+              <a:spcBef>
+                <a:spcPts val="300"/>
+              </a:spcBef>
+              <a:defRPr sz="1300" b="1">
+                <a:solidFill>
+                  <a:srgbClr val="0E3449"/>
+                </a:solidFill>
+                <a:latin typeface="Inter SemiBold"/>
+                <a:ea typeface="Inter SemiBold"/>
+                <a:cs typeface="Inter SemiBold"/>
+                <a:sym typeface="Inter SemiBold"/>
+              </a:defRPr>
+            </a:pPr>
+            <a:r>
+              <a:t>Notre objectif</a:t>
+            </a:r>
+          </a:p>
+          <a:p>
+            <a:pPr>
+              <a:spcBef>
+                <a:spcPts val="300"/>
+              </a:spcBef>
+              <a:defRPr sz="1300" b="1">
+                <a:solidFill>
+                  <a:srgbClr val="0E3449"/>
+                </a:solidFill>
+                <a:latin typeface="Inter SemiBold"/>
+                <a:ea typeface="Inter SemiBold"/>
+                <a:cs typeface="Inter SemiBold"/>
+                <a:sym typeface="Inter SemiBold"/>
+              </a:defRPr>
+            </a:pPr>
+            <a:endParaRPr/>
+          </a:p>
+          <a:p>
+            <a:pPr>
+              <a:spcBef>
+                <a:spcPts val="300"/>
+              </a:spcBef>
+              <a:defRPr sz="1300">
+                <a:solidFill>
+                  <a:srgbClr val="0E3449"/>
+                </a:solidFill>
+                <a:latin typeface="Inter SemiBold"/>
+                <a:ea typeface="Inter SemiBold"/>
+                <a:cs typeface="Inter SemiBold"/>
+                <a:sym typeface="Inter SemiBold"/>
+              </a:defRPr>
+            </a:pPr>
+            <a:r>
+              <a:t>Aider les entraîneurs à prendre les meilleures décisions grâce à la data</a:t>
+            </a:r>
+          </a:p>
+        </p:txBody>
+      </p:sp>
+      <p:sp>
+        <p:nvSpPr>
+          <p:cNvPr id="134" name="card"/>
+          <p:cNvSpPr/>
+          <p:nvPr/>
+        </p:nvSpPr>
+        <p:spPr>
+          <a:xfrm>
+            <a:off x="550000" y="2470000"/>
+            <a:ext cx="3872001" cy="2130002"/>
+          </a:xfrm>
+          <a:prstGeom prst="roundRect">
+            <a:avLst>
+              <a:gd name="adj" fmla="val 7000"/>
+            </a:avLst>
+          </a:prstGeom>
+          <a:solidFill>
+            <a:srgbClr val="F3F7FA"/>
+          </a:solidFill>
+          <a:ln w="12700">
+            <a:miter lim="400000"/>
+          </a:ln>
+          <a:effectLst>
+            <a:outerShdw blurRad="88900" dist="26000" dir="5400000" rotWithShape="0">
+              <a:srgbClr val="0E3449">
+                <a:alpha val="12000"/>
+              </a:srgbClr>
+            </a:outerShdw>
+          </a:effectLst>
+        </p:spPr>
+        <p:txBody>
+          <a:bodyPr lIns="45718" tIns="45718" rIns="45718" bIns="45718"/>
+          <a:lstStyle/>
+          <a:p>
+            <a:pPr>
+              <a:defRPr>
+                <a:latin typeface="+mj-lt"/>
+                <a:ea typeface="+mj-ea"/>
+                <a:cs typeface="+mj-cs"/>
+                <a:sym typeface="Arial"/>
+              </a:defRPr>
+            </a:pPr>
+            <a:endParaRPr/>
+          </a:p>
+        </p:txBody>
+      </p:sp>
+      <p:sp>
+        <p:nvSpPr>
+          <p:cNvPr id="135" name="card"/>
+          <p:cNvSpPr/>
+          <p:nvPr/>
+        </p:nvSpPr>
+        <p:spPr>
+          <a:xfrm>
+            <a:off x="4722000" y="2470000"/>
+            <a:ext cx="3872005" cy="2130002"/>
+          </a:xfrm>
+          <a:prstGeom prst="roundRect">
+            <a:avLst>
+              <a:gd name="adj" fmla="val 7000"/>
+            </a:avLst>
+          </a:prstGeom>
+          <a:solidFill>
+            <a:srgbClr val="F3F7FA"/>
+          </a:solidFill>
+          <a:ln w="12700">
+            <a:miter lim="400000"/>
+          </a:ln>
+          <a:effectLst>
+            <a:outerShdw blurRad="88900" dist="26000" dir="5400000" rotWithShape="0">
+              <a:srgbClr val="0E3449">
+                <a:alpha val="12000"/>
+              </a:srgbClr>
+            </a:outerShdw>
+          </a:effectLst>
+        </p:spPr>
+        <p:txBody>
+          <a:bodyPr lIns="45718" tIns="45718" rIns="45718" bIns="45718"/>
+          <a:lstStyle/>
+          <a:p>
+            <a:pPr>
+              <a:defRPr>
+                <a:latin typeface="+mj-lt"/>
+                <a:ea typeface="+mj-ea"/>
+                <a:cs typeface="+mj-cs"/>
+                <a:sym typeface="Arial"/>
+              </a:defRPr>
+            </a:pPr>
+            <a:endParaRPr/>
+          </a:p>
+        </p:txBody>
+      </p:sp>
+      <p:sp>
+        <p:nvSpPr>
+          <p:cNvPr id="136" name="ccirc"/>
+          <p:cNvSpPr/>
+          <p:nvPr/>
+        </p:nvSpPr>
+        <p:spPr>
+          <a:xfrm>
+            <a:off x="849998" y="2769996"/>
+            <a:ext cx="640009" cy="640010"/>
+          </a:xfrm>
+          <a:prstGeom prst="ellipse">
+            <a:avLst/>
+          </a:prstGeom>
+          <a:solidFill>
+            <a:srgbClr val="0E3449"/>
+          </a:solidFill>
+          <a:ln w="12700">
+            <a:miter lim="400000"/>
+          </a:ln>
+        </p:spPr>
+        <p:txBody>
+          <a:bodyPr lIns="45718" tIns="45718" rIns="45718" bIns="45718"/>
+          <a:lstStyle/>
+          <a:p>
+            <a:pPr>
+              <a:defRPr>
+                <a:latin typeface="+mj-lt"/>
+                <a:ea typeface="+mj-ea"/>
+                <a:cs typeface="+mj-cs"/>
+                <a:sym typeface="Arial"/>
+              </a:defRPr>
+            </a:pPr>
+            <a:endParaRPr/>
+          </a:p>
+        </p:txBody>
+      </p:sp>
+      <p:sp>
+        <p:nvSpPr>
+          <p:cNvPr id="137" name="ccirc"/>
+          <p:cNvSpPr/>
+          <p:nvPr/>
+        </p:nvSpPr>
+        <p:spPr>
+          <a:xfrm>
+            <a:off x="5022000" y="2769996"/>
+            <a:ext cx="640009" cy="640010"/>
+          </a:xfrm>
+          <a:prstGeom prst="ellipse">
+            <a:avLst/>
+          </a:prstGeom>
+          <a:solidFill>
+            <a:srgbClr val="0E3449"/>
+          </a:solidFill>
+          <a:ln w="12700">
+            <a:miter lim="400000"/>
+          </a:ln>
+        </p:spPr>
+        <p:txBody>
+          <a:bodyPr lIns="45718" tIns="45718" rIns="45718" bIns="45718"/>
+          <a:lstStyle/>
+          <a:p>
+            <a:pPr>
+              <a:defRPr>
+                <a:latin typeface="+mj-lt"/>
+                <a:ea typeface="+mj-ea"/>
+                <a:cs typeface="+mj-cs"/>
+                <a:sym typeface="Arial"/>
+              </a:defRPr>
+            </a:pPr>
+            <a:endParaRPr/>
+          </a:p>
+        </p:txBody>
+      </p:sp>
+      <p:pic>
+        <p:nvPicPr>
+          <p:cNvPr id="138" name="cicon" descr="cicon"/>
+          <p:cNvPicPr>
+            <a:picLocks noChangeAspect="1"/>
+          </p:cNvPicPr>
+          <p:nvPr/>
+        </p:nvPicPr>
+        <p:blipFill>
+          <a:blip r:embed="rId4"/>
+          <a:stretch>
+            <a:fillRect/>
+          </a:stretch>
+        </p:blipFill>
+        <p:spPr>
+          <a:xfrm>
+            <a:off x="979998" y="2899997"/>
+            <a:ext cx="380006" cy="380005"/>
+          </a:xfrm>
+          <a:prstGeom prst="rect">
+            <a:avLst/>
+          </a:prstGeom>
+          <a:ln w="12700">
+            <a:miter lim="400000"/>
+          </a:ln>
+        </p:spPr>
+      </p:pic>
+      <p:pic>
+        <p:nvPicPr>
+          <p:cNvPr id="139" name="cicon" descr="cicon"/>
+          <p:cNvPicPr>
+            <a:picLocks noChangeAspect="1"/>
+          </p:cNvPicPr>
+          <p:nvPr/>
+        </p:nvPicPr>
+        <p:blipFill>
+          <a:blip r:embed="rId5"/>
+          <a:stretch>
+            <a:fillRect/>
+          </a:stretch>
+        </p:blipFill>
+        <p:spPr>
+          <a:xfrm>
+            <a:off x="5151999" y="2899997"/>
+            <a:ext cx="380005" cy="380005"/>
+          </a:xfrm>
+          <a:prstGeom prst="rect">
+            <a:avLst/>
+          </a:prstGeom>
+          <a:ln w="12700">
+            <a:miter lim="400000"/>
+          </a:ln>
+        </p:spPr>
+      </p:pic>
+      <p:sp>
+        <p:nvSpPr>
+          <p:cNvPr id="140" name="ctitle"/>
+          <p:cNvSpPr txBox="1"/>
+          <p:nvPr/>
+        </p:nvSpPr>
+        <p:spPr>
+          <a:xfrm>
+            <a:off x="1727998" y="2769997"/>
+            <a:ext cx="2376005" cy="640005"/>
+          </a:xfrm>
+          <a:prstGeom prst="rect">
+            <a:avLst/>
+          </a:prstGeom>
+          <a:ln w="12700">
+            <a:miter lim="400000"/>
+          </a:ln>
+          <a:extLst>
+            <a:ext uri="{C572A759-6A51-4108-AA02-DFA0A04FC94B}">
+              <ma14:wrappingTextBoxFlag xmlns="" xmlns:m="http://schemas.openxmlformats.org/officeDocument/2006/math" xmlns:a14="http://schemas.microsoft.com/office/drawing/2010/main" xmlns:ma14="http://schemas.microsoft.com/office/mac/drawingml/2011/main" val="1"/>
+            </a:ext>
+          </a:extLst>
+        </p:spPr>
+        <p:txBody>
+          <a:bodyPr lIns="18000" tIns="18000" rIns="18000" bIns="18000" anchor="ctr">
+            <a:normAutofit/>
+          </a:bodyPr>
+          <a:lstStyle>
+            <a:lvl1pPr>
+              <a:defRPr b="1">
+                <a:solidFill>
+                  <a:srgbClr val="0E3449"/>
+                </a:solidFill>
+                <a:latin typeface="Inter SemiBold"/>
+                <a:ea typeface="Inter SemiBold"/>
+                <a:cs typeface="Inter SemiBold"/>
+                <a:sym typeface="Inter SemiBold"/>
+              </a:defRPr>
+            </a:lvl1pPr>
+          </a:lstStyle>
+          <a:p>
+            <a:r>
+              <a:t>Notre solution</a:t>
+            </a:r>
+          </a:p>
+        </p:txBody>
+      </p:sp>
+      <p:sp>
+        <p:nvSpPr>
+          <p:cNvPr id="141" name="cdesc"/>
+          <p:cNvSpPr txBox="1"/>
+          <p:nvPr/>
+        </p:nvSpPr>
+        <p:spPr>
+          <a:xfrm>
+            <a:off x="867997" y="3549998"/>
+            <a:ext cx="3236006" cy="750005"/>
+          </a:xfrm>
+          <a:prstGeom prst="rect">
+            <a:avLst/>
+          </a:prstGeom>
+          <a:ln w="12700">
+            <a:miter lim="400000"/>
+          </a:ln>
+          <a:extLst>
+            <a:ext uri="{C572A759-6A51-4108-AA02-DFA0A04FC94B}">
+              <ma14:wrappingTextBoxFlag xmlns="" xmlns:m="http://schemas.openxmlformats.org/officeDocument/2006/math" xmlns:a14="http://schemas.microsoft.com/office/drawing/2010/main" xmlns:ma14="http://schemas.microsoft.com/office/mac/drawingml/2011/main" val="1"/>
+            </a:ext>
+          </a:extLst>
+        </p:spPr>
+        <p:txBody>
+          <a:bodyPr lIns="18000" tIns="18000" rIns="18000" bIns="18000">
+            <a:normAutofit/>
+          </a:bodyPr>
+          <a:lstStyle>
+            <a:lvl1pPr>
+              <a:defRPr sz="1100">
+                <a:solidFill>
+                  <a:srgbClr val="4C6B7C"/>
+                </a:solidFill>
+                <a:latin typeface="Inter SemiBold"/>
+                <a:ea typeface="Inter SemiBold"/>
+                <a:cs typeface="Inter SemiBold"/>
+                <a:sym typeface="Inter SemiBold"/>
+              </a:defRPr>
+            </a:lvl1pPr>
+          </a:lstStyle>
+          <a:p>
+            <a:r>
+              <a:t>Une appli qui exploite les données du foot moderne pour prédire l’issue d’un match, à partir des infos équipes, joueurs et résultats des championnats européens.</a:t>
+            </a:r>
+          </a:p>
+        </p:txBody>
+      </p:sp>
+      <p:sp>
+        <p:nvSpPr>
+          <p:cNvPr id="142" name="ctitle"/>
+          <p:cNvSpPr txBox="1"/>
+          <p:nvPr/>
+        </p:nvSpPr>
+        <p:spPr>
+          <a:xfrm>
+            <a:off x="5899999" y="2769997"/>
+            <a:ext cx="2376006" cy="640005"/>
+          </a:xfrm>
+          <a:prstGeom prst="rect">
+            <a:avLst/>
+          </a:prstGeom>
+          <a:ln w="12700">
+            <a:miter lim="400000"/>
+          </a:ln>
+          <a:extLst>
+            <a:ext uri="{C572A759-6A51-4108-AA02-DFA0A04FC94B}">
+              <ma14:wrappingTextBoxFlag xmlns="" xmlns:m="http://schemas.openxmlformats.org/officeDocument/2006/math" xmlns:a14="http://schemas.microsoft.com/office/drawing/2010/main" xmlns:ma14="http://schemas.microsoft.com/office/mac/drawingml/2011/main" val="1"/>
+            </a:ext>
+          </a:extLst>
+        </p:spPr>
+        <p:txBody>
+          <a:bodyPr lIns="18000" tIns="18000" rIns="18000" bIns="18000" anchor="ctr">
+            <a:normAutofit/>
+          </a:bodyPr>
+          <a:lstStyle>
+            <a:lvl1pPr>
+              <a:defRPr b="1">
+                <a:solidFill>
+                  <a:srgbClr val="0E3449"/>
+                </a:solidFill>
+                <a:latin typeface="Inter SemiBold"/>
+                <a:ea typeface="Inter SemiBold"/>
+                <a:cs typeface="Inter SemiBold"/>
+                <a:sym typeface="Inter SemiBold"/>
+              </a:defRPr>
+            </a:lvl1pPr>
+          </a:lstStyle>
+          <a:p>
+            <a:r>
+              <a:t>Pour qui ?</a:t>
+            </a:r>
+          </a:p>
+        </p:txBody>
+      </p:sp>
+      <p:sp>
+        <p:nvSpPr>
+          <p:cNvPr id="143" name="cdesc"/>
+          <p:cNvSpPr txBox="1"/>
+          <p:nvPr/>
+        </p:nvSpPr>
+        <p:spPr>
+          <a:xfrm>
+            <a:off x="5040000" y="3549998"/>
+            <a:ext cx="3236005" cy="750005"/>
+          </a:xfrm>
+          <a:prstGeom prst="rect">
+            <a:avLst/>
+          </a:prstGeom>
+          <a:ln w="12700">
+            <a:miter lim="400000"/>
+          </a:ln>
+          <a:extLst>
+            <a:ext uri="{C572A759-6A51-4108-AA02-DFA0A04FC94B}">
+              <ma14:wrappingTextBoxFlag xmlns="" xmlns:m="http://schemas.openxmlformats.org/officeDocument/2006/math" xmlns:a14="http://schemas.microsoft.com/office/drawing/2010/main" xmlns:ma14="http://schemas.microsoft.com/office/mac/drawingml/2011/main" val="1"/>
+            </a:ext>
+          </a:extLst>
+        </p:spPr>
+        <p:txBody>
+          <a:bodyPr lIns="18000" tIns="18000" rIns="18000" bIns="18000">
+            <a:normAutofit/>
+          </a:bodyPr>
+          <a:lstStyle/>
+          <a:p>
+            <a:pPr marL="110289" indent="-110289">
+              <a:buSzPct val="100000"/>
+              <a:buChar char="•"/>
+              <a:defRPr sz="1100">
+                <a:solidFill>
+                  <a:srgbClr val="4C6B7C"/>
+                </a:solidFill>
+                <a:latin typeface="Inter SemiBold"/>
+                <a:ea typeface="Inter SemiBold"/>
+                <a:cs typeface="Inter SemiBold"/>
+                <a:sym typeface="Inter SemiBold"/>
+              </a:defRPr>
+            </a:pPr>
+            <a:r>
+              <a:t>Les entraîneurs, pour optimiser leur composition et leur stratégie de recrutement.</a:t>
+            </a:r>
+          </a:p>
+          <a:p>
+            <a:pPr marL="110289" indent="-110289">
+              <a:buSzPct val="100000"/>
+              <a:buChar char="•"/>
+              <a:defRPr sz="1100">
+                <a:solidFill>
+                  <a:srgbClr val="4C6B7C"/>
+                </a:solidFill>
+                <a:latin typeface="Inter SemiBold"/>
+                <a:ea typeface="Inter SemiBold"/>
+                <a:cs typeface="Inter SemiBold"/>
+                <a:sym typeface="Inter SemiBold"/>
+              </a:defRPr>
+            </a:pPr>
+            <a:r>
+              <a:t>Les détecteurs et chasseurs de tête, pour repérer les joueurs à fort potentiel.</a:t>
+            </a:r>
+          </a:p>
+        </p:txBody>
+      </p:sp>
     </p:spTree>
   </p:cSld>
   <p:clrMapOvr>
@@ -6806,7 +5773,7 @@
       </p:grpSpPr>
       <p:sp>
         <p:nvSpPr>
-          <p:cNvPr id="127" name="title"/>
+          <p:cNvPr id="145" name="Google Shape;68;p15"/>
           <p:cNvSpPr txBox="1">
             <a:spLocks noGrp="1"/>
           </p:cNvSpPr>
@@ -6840,41 +5807,14 @@
           </a:lstStyle>
           <a:p>
             <a:r>
-              <a:t>Pitch</a:t>
+              <a:t>Description du modèle</a:t>
             </a:r>
           </a:p>
         </p:txBody>
       </p:sp>
-      <p:pic>
-        <p:nvPicPr>
-          <p:cNvPr id="128" name="logo" descr="logo"/>
-          <p:cNvPicPr>
-            <a:picLocks noChangeAspect="1"/>
-          </p:cNvPicPr>
-          <p:nvPr/>
-        </p:nvPicPr>
-        <p:blipFill>
-          <a:blip r:embed="rId2"/>
-          <a:stretch>
-            <a:fillRect/>
-          </a:stretch>
-        </p:blipFill>
-        <p:spPr>
-          <a:xfrm>
-            <a:off x="463375" y="482852"/>
-            <a:ext cx="576901" cy="385910"/>
-          </a:xfrm>
-          <a:prstGeom prst="rect">
-            <a:avLst/>
-          </a:prstGeom>
-          <a:ln w="12700">
-            <a:miter lim="400000"/>
-          </a:ln>
-        </p:spPr>
-      </p:pic>
       <p:sp>
         <p:nvSpPr>
-          <p:cNvPr id="129" name="bar"/>
+          <p:cNvPr id="146" name="Google Shape;69;p15"/>
           <p:cNvSpPr/>
           <p:nvPr/>
         </p:nvSpPr>
@@ -6909,16 +5849,43 @@
           </a:p>
         </p:txBody>
       </p:sp>
+      <p:pic>
+        <p:nvPicPr>
+          <p:cNvPr id="147" name="Google Shape;70;p15" descr="Google Shape;70;p15"/>
+          <p:cNvPicPr>
+            <a:picLocks noChangeAspect="1"/>
+          </p:cNvPicPr>
+          <p:nvPr/>
+        </p:nvPicPr>
+        <p:blipFill>
+          <a:blip r:embed="rId2"/>
+          <a:stretch>
+            <a:fillRect/>
+          </a:stretch>
+        </p:blipFill>
+        <p:spPr>
+          <a:xfrm>
+            <a:off x="463375" y="482852"/>
+            <a:ext cx="576901" cy="385910"/>
+          </a:xfrm>
+          <a:prstGeom prst="rect">
+            <a:avLst/>
+          </a:prstGeom>
+          <a:ln w="12700">
+            <a:miter lim="400000"/>
+          </a:ln>
+        </p:spPr>
+      </p:pic>
       <p:sp>
         <p:nvSpPr>
-          <p:cNvPr id="130" name="motiv"/>
+          <p:cNvPr id="148" name="fcard"/>
           <p:cNvSpPr/>
           <p:nvPr/>
         </p:nvSpPr>
         <p:spPr>
           <a:xfrm>
-            <a:off x="550000" y="1149998"/>
-            <a:ext cx="8044000" cy="1150003"/>
+            <a:off x="550000" y="1646749"/>
+            <a:ext cx="2441334" cy="1850006"/>
           </a:xfrm>
           <a:prstGeom prst="roundRect">
             <a:avLst>
@@ -6926,7 +5893,7 @@
             </a:avLst>
           </a:prstGeom>
           <a:solidFill>
-            <a:srgbClr val="EAF2F6"/>
+            <a:srgbClr val="F3F7FA"/>
           </a:solidFill>
           <a:ln w="12700">
             <a:miter lim="400000"/>
@@ -6934,7 +5901,7 @@
           <a:effectLst>
             <a:outerShdw blurRad="88900" dist="26000" dir="5400000" rotWithShape="0">
               <a:srgbClr val="0E3449">
-                <a:alpha val="12000"/>
+                <a:alpha val="13000"/>
               </a:srgbClr>
             </a:outerShdw>
           </a:effectLst>
@@ -6957,24 +5924,33 @@
       </p:sp>
       <p:sp>
         <p:nvSpPr>
-          <p:cNvPr id="131" name="mcirc"/>
+          <p:cNvPr id="149" name="fcard"/>
           <p:cNvSpPr/>
           <p:nvPr/>
         </p:nvSpPr>
         <p:spPr>
           <a:xfrm>
-            <a:off x="849998" y="1384998"/>
-            <a:ext cx="680009" cy="680009"/>
-          </a:xfrm>
-          <a:prstGeom prst="ellipse">
-            <a:avLst/>
+            <a:off x="3351333" y="1646749"/>
+            <a:ext cx="2441334" cy="1850006"/>
+          </a:xfrm>
+          <a:prstGeom prst="roundRect">
+            <a:avLst>
+              <a:gd name="adj" fmla="val 7000"/>
+            </a:avLst>
           </a:prstGeom>
           <a:solidFill>
-            <a:srgbClr val="0E3449"/>
+            <a:srgbClr val="F3F7FA"/>
           </a:solidFill>
           <a:ln w="12700">
             <a:miter lim="400000"/>
           </a:ln>
+          <a:effectLst>
+            <a:outerShdw blurRad="88900" dist="26000" dir="5400000" rotWithShape="0">
+              <a:srgbClr val="0E3449">
+                <a:alpha val="13000"/>
+              </a:srgbClr>
+            </a:outerShdw>
+          </a:effectLst>
         </p:spPr>
         <p:txBody>
           <a:bodyPr lIns="45718" tIns="45718" rIns="45718" bIns="45718"/>
@@ -6992,128 +5968,16 @@
           </a:p>
         </p:txBody>
       </p:sp>
-      <p:pic>
-        <p:nvPicPr>
-          <p:cNvPr id="132" name="micon" descr="micon"/>
-          <p:cNvPicPr>
-            <a:picLocks noChangeAspect="1"/>
-          </p:cNvPicPr>
-          <p:nvPr/>
-        </p:nvPicPr>
-        <p:blipFill>
-          <a:blip r:embed="rId3"/>
-          <a:stretch>
-            <a:fillRect/>
-          </a:stretch>
-        </p:blipFill>
-        <p:spPr>
-          <a:xfrm>
-            <a:off x="990000" y="1525000"/>
-            <a:ext cx="400005" cy="400005"/>
-          </a:xfrm>
-          <a:prstGeom prst="rect">
-            <a:avLst/>
-          </a:prstGeom>
-          <a:ln w="12700">
-            <a:miter lim="400000"/>
-          </a:ln>
-        </p:spPr>
-      </p:pic>
       <p:sp>
         <p:nvSpPr>
-          <p:cNvPr id="133" name="mtext"/>
-          <p:cNvSpPr txBox="1"/>
+          <p:cNvPr id="150" name="fcard"/>
+          <p:cNvSpPr/>
           <p:nvPr/>
         </p:nvSpPr>
         <p:spPr>
           <a:xfrm>
-            <a:off x="1827999" y="1309999"/>
-            <a:ext cx="6448005" cy="830002"/>
-          </a:xfrm>
-          <a:prstGeom prst="rect">
-            <a:avLst/>
-          </a:prstGeom>
-          <a:ln w="12700">
-            <a:miter lim="400000"/>
-          </a:ln>
-          <a:extLst>
-            <a:ext uri="{C572A759-6A51-4108-AA02-DFA0A04FC94B}">
-              <ma14:wrappingTextBoxFlag xmlns:ma14="http://schemas.microsoft.com/office/mac/drawingml/2011/main" xmlns:a14="http://schemas.microsoft.com/office/drawing/2010/main" xmlns:m="http://schemas.openxmlformats.org/officeDocument/2006/math" xmlns="" val="1"/>
-            </a:ext>
-          </a:extLst>
-        </p:spPr>
-        <p:txBody>
-          <a:bodyPr lIns="18000" tIns="18000" rIns="18000" bIns="18000" anchor="ctr">
-            <a:normAutofit/>
-          </a:bodyPr>
-          <a:lstStyle/>
-          <a:p>
-            <a:pPr>
-              <a:spcBef>
-                <a:spcPts val="300"/>
-              </a:spcBef>
-              <a:defRPr sz="1300" b="1">
-                <a:solidFill>
-                  <a:srgbClr val="0E3449"/>
-                </a:solidFill>
-                <a:latin typeface="Inter SemiBold"/>
-                <a:ea typeface="Inter SemiBold"/>
-                <a:cs typeface="Inter SemiBold"/>
-                <a:sym typeface="Inter SemiBold"/>
-              </a:defRPr>
-            </a:pPr>
-            <a:r>
-              <a:t>Notre objectif</a:t>
-            </a:r>
-          </a:p>
-          <a:p>
-            <a:pPr>
-              <a:spcBef>
-                <a:spcPts val="300"/>
-              </a:spcBef>
-              <a:defRPr sz="1300" b="1">
-                <a:solidFill>
-                  <a:srgbClr val="0E3449"/>
-                </a:solidFill>
-                <a:latin typeface="Inter SemiBold"/>
-                <a:ea typeface="Inter SemiBold"/>
-                <a:cs typeface="Inter SemiBold"/>
-                <a:sym typeface="Inter SemiBold"/>
-              </a:defRPr>
-            </a:pPr>
-            <a:endParaRPr/>
-          </a:p>
-          <a:p>
-            <a:pPr>
-              <a:spcBef>
-                <a:spcPts val="300"/>
-              </a:spcBef>
-              <a:defRPr sz="1300">
-                <a:solidFill>
-                  <a:srgbClr val="0E3449"/>
-                </a:solidFill>
-                <a:latin typeface="Inter SemiBold"/>
-                <a:ea typeface="Inter SemiBold"/>
-                <a:cs typeface="Inter SemiBold"/>
-                <a:sym typeface="Inter SemiBold"/>
-              </a:defRPr>
-            </a:pPr>
-            <a:r>
-              <a:t>Aider les entraîneurs à prendre les meilleures décisions grâce à la data</a:t>
-            </a:r>
-          </a:p>
-        </p:txBody>
-      </p:sp>
-      <p:sp>
-        <p:nvSpPr>
-          <p:cNvPr id="134" name="card"/>
-          <p:cNvSpPr/>
-          <p:nvPr/>
-        </p:nvSpPr>
-        <p:spPr>
-          <a:xfrm>
-            <a:off x="550000" y="2470000"/>
-            <a:ext cx="3872001" cy="2130002"/>
+            <a:off x="6152665" y="1646749"/>
+            <a:ext cx="2441338" cy="1850006"/>
           </a:xfrm>
           <a:prstGeom prst="roundRect">
             <a:avLst>
@@ -7129,7 +5993,7 @@
           <a:effectLst>
             <a:outerShdw blurRad="88900" dist="26000" dir="5400000" rotWithShape="0">
               <a:srgbClr val="0E3449">
-                <a:alpha val="12000"/>
+                <a:alpha val="13000"/>
               </a:srgbClr>
             </a:outerShdw>
           </a:effectLst>
@@ -7152,33 +6016,27 @@
       </p:sp>
       <p:sp>
         <p:nvSpPr>
-          <p:cNvPr id="135" name="card"/>
+          <p:cNvPr id="151" name="arrow304"/>
           <p:cNvSpPr/>
           <p:nvPr/>
         </p:nvSpPr>
         <p:spPr>
           <a:xfrm>
-            <a:off x="4722000" y="2470000"/>
-            <a:ext cx="3872005" cy="2130002"/>
-          </a:xfrm>
-          <a:prstGeom prst="roundRect">
+            <a:off x="3041331" y="2066749"/>
+            <a:ext cx="260006" cy="120005"/>
+          </a:xfrm>
+          <a:prstGeom prst="rightArrow">
             <a:avLst>
-              <a:gd name="adj" fmla="val 7000"/>
+              <a:gd name="adj1" fmla="val 55000"/>
+              <a:gd name="adj2" fmla="val 55000"/>
             </a:avLst>
           </a:prstGeom>
           <a:solidFill>
-            <a:srgbClr val="F3F7FA"/>
+            <a:srgbClr val="9BB4C2"/>
           </a:solidFill>
           <a:ln w="12700">
             <a:miter lim="400000"/>
           </a:ln>
-          <a:effectLst>
-            <a:outerShdw blurRad="88900" dist="26000" dir="5400000" rotWithShape="0">
-              <a:srgbClr val="0E3449">
-                <a:alpha val="12000"/>
-              </a:srgbClr>
-            </a:outerShdw>
-          </a:effectLst>
         </p:spPr>
         <p:txBody>
           <a:bodyPr lIns="45718" tIns="45718" rIns="45718" bIns="45718"/>
@@ -7198,20 +6056,23 @@
       </p:sp>
       <p:sp>
         <p:nvSpPr>
-          <p:cNvPr id="136" name="ccirc"/>
+          <p:cNvPr id="152" name="arrow305"/>
           <p:cNvSpPr/>
           <p:nvPr/>
         </p:nvSpPr>
         <p:spPr>
           <a:xfrm>
-            <a:off x="849998" y="2769996"/>
-            <a:ext cx="640009" cy="640010"/>
-          </a:xfrm>
-          <a:prstGeom prst="ellipse">
-            <a:avLst/>
+            <a:off x="5842665" y="2066749"/>
+            <a:ext cx="260005" cy="120005"/>
+          </a:xfrm>
+          <a:prstGeom prst="rightArrow">
+            <a:avLst>
+              <a:gd name="adj1" fmla="val 55000"/>
+              <a:gd name="adj2" fmla="val 55000"/>
+            </a:avLst>
           </a:prstGeom>
           <a:solidFill>
-            <a:srgbClr val="0E3449"/>
+            <a:srgbClr val="9BB4C2"/>
           </a:solidFill>
           <a:ln w="12700">
             <a:miter lim="400000"/>
@@ -7235,14 +6096,14 @@
       </p:sp>
       <p:sp>
         <p:nvSpPr>
-          <p:cNvPr id="137" name="ccirc"/>
+          <p:cNvPr id="153" name="fcirc"/>
           <p:cNvSpPr/>
           <p:nvPr/>
         </p:nvSpPr>
         <p:spPr>
           <a:xfrm>
-            <a:off x="5022000" y="2769996"/>
-            <a:ext cx="640009" cy="640010"/>
+            <a:off x="1460665" y="1816748"/>
+            <a:ext cx="620009" cy="620009"/>
           </a:xfrm>
           <a:prstGeom prst="ellipse">
             <a:avLst/>
@@ -7270,9 +6131,110 @@
           </a:p>
         </p:txBody>
       </p:sp>
+      <p:sp>
+        <p:nvSpPr>
+          <p:cNvPr id="154" name="fcirc"/>
+          <p:cNvSpPr/>
+          <p:nvPr/>
+        </p:nvSpPr>
+        <p:spPr>
+          <a:xfrm>
+            <a:off x="4261999" y="1816748"/>
+            <a:ext cx="620009" cy="620009"/>
+          </a:xfrm>
+          <a:prstGeom prst="ellipse">
+            <a:avLst/>
+          </a:prstGeom>
+          <a:solidFill>
+            <a:srgbClr val="0E3449"/>
+          </a:solidFill>
+          <a:ln w="12700">
+            <a:miter lim="400000"/>
+          </a:ln>
+        </p:spPr>
+        <p:txBody>
+          <a:bodyPr lIns="45718" tIns="45718" rIns="45718" bIns="45718"/>
+          <a:lstStyle/>
+          <a:p>
+            <a:pPr>
+              <a:defRPr>
+                <a:latin typeface="+mj-lt"/>
+                <a:ea typeface="+mj-ea"/>
+                <a:cs typeface="+mj-cs"/>
+                <a:sym typeface="Arial"/>
+              </a:defRPr>
+            </a:pPr>
+            <a:endParaRPr/>
+          </a:p>
+        </p:txBody>
+      </p:sp>
+      <p:sp>
+        <p:nvSpPr>
+          <p:cNvPr id="155" name="fcirc"/>
+          <p:cNvSpPr/>
+          <p:nvPr/>
+        </p:nvSpPr>
+        <p:spPr>
+          <a:xfrm>
+            <a:off x="7063330" y="1816748"/>
+            <a:ext cx="620009" cy="620009"/>
+          </a:xfrm>
+          <a:prstGeom prst="ellipse">
+            <a:avLst/>
+          </a:prstGeom>
+          <a:solidFill>
+            <a:srgbClr val="0E3449"/>
+          </a:solidFill>
+          <a:ln w="12700">
+            <a:miter lim="400000"/>
+          </a:ln>
+        </p:spPr>
+        <p:txBody>
+          <a:bodyPr lIns="45718" tIns="45718" rIns="45718" bIns="45718"/>
+          <a:lstStyle/>
+          <a:p>
+            <a:pPr>
+              <a:defRPr>
+                <a:latin typeface="+mj-lt"/>
+                <a:ea typeface="+mj-ea"/>
+                <a:cs typeface="+mj-cs"/>
+                <a:sym typeface="Arial"/>
+              </a:defRPr>
+            </a:pPr>
+            <a:endParaRPr/>
+          </a:p>
+        </p:txBody>
+      </p:sp>
       <p:pic>
         <p:nvPicPr>
-          <p:cNvPr id="138" name="cicon" descr="cicon"/>
+          <p:cNvPr id="156" name="ficon" descr="ficon"/>
+          <p:cNvPicPr>
+            <a:picLocks noChangeAspect="1"/>
+          </p:cNvPicPr>
+          <p:nvPr/>
+        </p:nvPicPr>
+        <p:blipFill>
+          <a:blip r:embed="rId3"/>
+          <a:stretch>
+            <a:fillRect/>
+          </a:stretch>
+        </p:blipFill>
+        <p:spPr>
+          <a:xfrm>
+            <a:off x="1580666" y="1936749"/>
+            <a:ext cx="380005" cy="380005"/>
+          </a:xfrm>
+          <a:prstGeom prst="rect">
+            <a:avLst/>
+          </a:prstGeom>
+          <a:ln w="12700">
+            <a:miter lim="400000"/>
+          </a:ln>
+        </p:spPr>
+      </p:pic>
+      <p:pic>
+        <p:nvPicPr>
+          <p:cNvPr id="157" name="ficon" descr="ficon"/>
           <p:cNvPicPr>
             <a:picLocks noChangeAspect="1"/>
           </p:cNvPicPr>
@@ -7286,8 +6248,8 @@
         </p:blipFill>
         <p:spPr>
           <a:xfrm>
-            <a:off x="979998" y="2899997"/>
-            <a:ext cx="380006" cy="380005"/>
+            <a:off x="4381998" y="1936749"/>
+            <a:ext cx="380005" cy="380005"/>
           </a:xfrm>
           <a:prstGeom prst="rect">
             <a:avLst/>
@@ -7299,7 +6261,7 @@
       </p:pic>
       <p:pic>
         <p:nvPicPr>
-          <p:cNvPr id="139" name="cicon" descr="cicon"/>
+          <p:cNvPr id="158" name="ficon" descr="ficon"/>
           <p:cNvPicPr>
             <a:picLocks noChangeAspect="1"/>
           </p:cNvPicPr>
@@ -7313,7 +6275,7 @@
         </p:blipFill>
         <p:spPr>
           <a:xfrm>
-            <a:off x="5151999" y="2899997"/>
+            <a:off x="7183332" y="1936749"/>
             <a:ext cx="380005" cy="380005"/>
           </a:xfrm>
           <a:prstGeom prst="rect">
@@ -7326,14 +6288,14 @@
       </p:pic>
       <p:sp>
         <p:nvSpPr>
-          <p:cNvPr id="140" name="ctitle"/>
+          <p:cNvPr id="159" name="flab"/>
           <p:cNvSpPr txBox="1"/>
           <p:nvPr/>
         </p:nvSpPr>
         <p:spPr>
           <a:xfrm>
-            <a:off x="1727998" y="2769997"/>
-            <a:ext cx="2376005" cy="640005"/>
+            <a:off x="638000" y="2546749"/>
+            <a:ext cx="2265336" cy="300005"/>
           </a:xfrm>
           <a:prstGeom prst="rect">
             <a:avLst/>
@@ -7343,7 +6305,7 @@
           </a:ln>
           <a:extLst>
             <a:ext uri="{C572A759-6A51-4108-AA02-DFA0A04FC94B}">
-              <ma14:wrappingTextBoxFlag xmlns:ma14="http://schemas.microsoft.com/office/mac/drawingml/2011/main" xmlns:a14="http://schemas.microsoft.com/office/drawing/2010/main" xmlns:m="http://schemas.openxmlformats.org/officeDocument/2006/math" xmlns="" val="1"/>
+              <ma14:wrappingTextBoxFlag xmlns="" xmlns:m="http://schemas.openxmlformats.org/officeDocument/2006/math" xmlns:a14="http://schemas.microsoft.com/office/drawing/2010/main" xmlns:ma14="http://schemas.microsoft.com/office/mac/drawingml/2011/main" val="1"/>
             </a:ext>
           </a:extLst>
         </p:spPr>
@@ -7352,8 +6314,8 @@
             <a:normAutofit/>
           </a:bodyPr>
           <a:lstStyle>
-            <a:lvl1pPr>
-              <a:defRPr b="1">
+            <a:lvl1pPr algn="ctr">
+              <a:defRPr sz="1300" b="1">
                 <a:solidFill>
                   <a:srgbClr val="0E3449"/>
                 </a:solidFill>
@@ -7366,21 +6328,21 @@
           </a:lstStyle>
           <a:p>
             <a:r>
-              <a:t>Notre solution</a:t>
+              <a:t>Les données</a:t>
             </a:r>
           </a:p>
         </p:txBody>
       </p:sp>
       <p:sp>
         <p:nvSpPr>
-          <p:cNvPr id="141" name="cdesc"/>
+          <p:cNvPr id="160" name="fsub"/>
           <p:cNvSpPr txBox="1"/>
           <p:nvPr/>
         </p:nvSpPr>
         <p:spPr>
           <a:xfrm>
-            <a:off x="867997" y="3549998"/>
-            <a:ext cx="3236006" cy="750005"/>
+            <a:off x="657998" y="2886748"/>
+            <a:ext cx="2225340" cy="540005"/>
           </a:xfrm>
           <a:prstGeom prst="rect">
             <a:avLst/>
@@ -7390,7 +6352,7 @@
           </a:ln>
           <a:extLst>
             <a:ext uri="{C572A759-6A51-4108-AA02-DFA0A04FC94B}">
-              <ma14:wrappingTextBoxFlag xmlns:ma14="http://schemas.microsoft.com/office/mac/drawingml/2011/main" xmlns:a14="http://schemas.microsoft.com/office/drawing/2010/main" xmlns:m="http://schemas.openxmlformats.org/officeDocument/2006/math" xmlns="" val="1"/>
+              <ma14:wrappingTextBoxFlag xmlns="" xmlns:m="http://schemas.openxmlformats.org/officeDocument/2006/math" xmlns:a14="http://schemas.microsoft.com/office/drawing/2010/main" xmlns:ma14="http://schemas.microsoft.com/office/mac/drawingml/2011/main" val="1"/>
             </a:ext>
           </a:extLst>
         </p:spPr>
@@ -7399,8 +6361,8 @@
             <a:normAutofit/>
           </a:bodyPr>
           <a:lstStyle>
-            <a:lvl1pPr>
-              <a:defRPr sz="1100">
+            <a:lvl1pPr algn="ctr">
+              <a:defRPr sz="1000">
                 <a:solidFill>
                   <a:srgbClr val="4C6B7C"/>
                 </a:solidFill>
@@ -7413,21 +6375,21 @@
           </a:lstStyle>
           <a:p>
             <a:r>
-              <a:t>Une appli qui exploite les données du foot moderne pour prédire l’issue d’un match, à partir des infos équipes, joueurs et résultats des championnats européens.</a:t>
+              <a:t>matchs, équipes et joueurs des championnats européens</a:t>
             </a:r>
           </a:p>
         </p:txBody>
       </p:sp>
       <p:sp>
         <p:nvSpPr>
-          <p:cNvPr id="142" name="ctitle"/>
+          <p:cNvPr id="161" name="flab"/>
           <p:cNvSpPr txBox="1"/>
           <p:nvPr/>
         </p:nvSpPr>
         <p:spPr>
           <a:xfrm>
-            <a:off x="5899999" y="2769997"/>
-            <a:ext cx="2376006" cy="640005"/>
+            <a:off x="3439333" y="2546749"/>
+            <a:ext cx="2265338" cy="300005"/>
           </a:xfrm>
           <a:prstGeom prst="rect">
             <a:avLst/>
@@ -7437,7 +6399,7 @@
           </a:ln>
           <a:extLst>
             <a:ext uri="{C572A759-6A51-4108-AA02-DFA0A04FC94B}">
-              <ma14:wrappingTextBoxFlag xmlns:ma14="http://schemas.microsoft.com/office/mac/drawingml/2011/main" xmlns:a14="http://schemas.microsoft.com/office/drawing/2010/main" xmlns:m="http://schemas.openxmlformats.org/officeDocument/2006/math" xmlns="" val="1"/>
+              <ma14:wrappingTextBoxFlag xmlns="" xmlns:m="http://schemas.openxmlformats.org/officeDocument/2006/math" xmlns:a14="http://schemas.microsoft.com/office/drawing/2010/main" xmlns:ma14="http://schemas.microsoft.com/office/mac/drawingml/2011/main" val="1"/>
             </a:ext>
           </a:extLst>
         </p:spPr>
@@ -7446,8 +6408,8 @@
             <a:normAutofit/>
           </a:bodyPr>
           <a:lstStyle>
-            <a:lvl1pPr>
-              <a:defRPr b="1">
+            <a:lvl1pPr algn="ctr">
+              <a:defRPr sz="1300" b="1">
                 <a:solidFill>
                   <a:srgbClr val="0E3449"/>
                 </a:solidFill>
@@ -7460,21 +6422,21 @@
           </a:lstStyle>
           <a:p>
             <a:r>
-              <a:t>Pour qui ?</a:t>
+              <a:t>Le modèle</a:t>
             </a:r>
           </a:p>
         </p:txBody>
       </p:sp>
       <p:sp>
         <p:nvSpPr>
-          <p:cNvPr id="143" name="cdesc"/>
+          <p:cNvPr id="162" name="fsub"/>
           <p:cNvSpPr txBox="1"/>
           <p:nvPr/>
         </p:nvSpPr>
         <p:spPr>
           <a:xfrm>
-            <a:off x="5040000" y="3549998"/>
-            <a:ext cx="3236005" cy="750005"/>
+            <a:off x="3459331" y="2886748"/>
+            <a:ext cx="2225339" cy="540005"/>
           </a:xfrm>
           <a:prstGeom prst="rect">
             <a:avLst/>
@@ -7484,7 +6446,7 @@
           </a:ln>
           <a:extLst>
             <a:ext uri="{C572A759-6A51-4108-AA02-DFA0A04FC94B}">
-              <ma14:wrappingTextBoxFlag xmlns:ma14="http://schemas.microsoft.com/office/mac/drawingml/2011/main" xmlns:a14="http://schemas.microsoft.com/office/drawing/2010/main" xmlns:m="http://schemas.openxmlformats.org/officeDocument/2006/math" xmlns="" val="1"/>
+              <ma14:wrappingTextBoxFlag xmlns="" xmlns:m="http://schemas.openxmlformats.org/officeDocument/2006/math" xmlns:a14="http://schemas.microsoft.com/office/drawing/2010/main" xmlns:ma14="http://schemas.microsoft.com/office/mac/drawingml/2011/main" val="1"/>
             </a:ext>
           </a:extLst>
         </p:spPr>
@@ -7492,12 +6454,9 @@
           <a:bodyPr lIns="18000" tIns="18000" rIns="18000" bIns="18000">
             <a:normAutofit/>
           </a:bodyPr>
-          <a:lstStyle/>
-          <a:p>
-            <a:pPr marL="110289" indent="-110289">
-              <a:buSzPct val="100000"/>
-              <a:buChar char="•"/>
-              <a:defRPr sz="1100">
+          <a:lstStyle>
+            <a:lvl1pPr algn="ctr">
+              <a:defRPr sz="1000">
                 <a:solidFill>
                   <a:srgbClr val="4C6B7C"/>
                 </a:solidFill>
@@ -7506,16 +6465,92 @@
                 <a:cs typeface="Inter SemiBold"/>
                 <a:sym typeface="Inter SemiBold"/>
               </a:defRPr>
-            </a:pPr>
+            </a:lvl1pPr>
+          </a:lstStyle>
+          <a:p>
             <a:r>
-              <a:t>Les entraîneurs, pour optimiser leur composition et leur stratégie de recrutement.</a:t>
+              <a:t>à partir des notes FIFA 26 des joueurs</a:t>
             </a:r>
           </a:p>
-          <a:p>
-            <a:pPr marL="110289" indent="-110289">
-              <a:buSzPct val="100000"/>
-              <a:buChar char="•"/>
-              <a:defRPr sz="1100">
+        </p:txBody>
+      </p:sp>
+      <p:sp>
+        <p:nvSpPr>
+          <p:cNvPr id="163" name="flab"/>
+          <p:cNvSpPr txBox="1"/>
+          <p:nvPr/>
+        </p:nvSpPr>
+        <p:spPr>
+          <a:xfrm>
+            <a:off x="6240664" y="2546749"/>
+            <a:ext cx="2265337" cy="300005"/>
+          </a:xfrm>
+          <a:prstGeom prst="rect">
+            <a:avLst/>
+          </a:prstGeom>
+          <a:ln w="12700">
+            <a:miter lim="400000"/>
+          </a:ln>
+          <a:extLst>
+            <a:ext uri="{C572A759-6A51-4108-AA02-DFA0A04FC94B}">
+              <ma14:wrappingTextBoxFlag xmlns="" xmlns:m="http://schemas.openxmlformats.org/officeDocument/2006/math" xmlns:a14="http://schemas.microsoft.com/office/drawing/2010/main" xmlns:ma14="http://schemas.microsoft.com/office/mac/drawingml/2011/main" val="1"/>
+            </a:ext>
+          </a:extLst>
+        </p:spPr>
+        <p:txBody>
+          <a:bodyPr lIns="18000" tIns="18000" rIns="18000" bIns="18000" anchor="ctr">
+            <a:normAutofit/>
+          </a:bodyPr>
+          <a:lstStyle>
+            <a:lvl1pPr algn="ctr">
+              <a:defRPr sz="1300" b="1">
+                <a:solidFill>
+                  <a:srgbClr val="0E3449"/>
+                </a:solidFill>
+                <a:latin typeface="Inter SemiBold"/>
+                <a:ea typeface="Inter SemiBold"/>
+                <a:cs typeface="Inter SemiBold"/>
+                <a:sym typeface="Inter SemiBold"/>
+              </a:defRPr>
+            </a:lvl1pPr>
+          </a:lstStyle>
+          <a:p>
+            <a:r>
+              <a:t>La prédiction</a:t>
+            </a:r>
+          </a:p>
+        </p:txBody>
+      </p:sp>
+      <p:sp>
+        <p:nvSpPr>
+          <p:cNvPr id="164" name="fsub"/>
+          <p:cNvSpPr txBox="1"/>
+          <p:nvPr/>
+        </p:nvSpPr>
+        <p:spPr>
+          <a:xfrm>
+            <a:off x="6260665" y="2886748"/>
+            <a:ext cx="2225338" cy="540005"/>
+          </a:xfrm>
+          <a:prstGeom prst="rect">
+            <a:avLst/>
+          </a:prstGeom>
+          <a:ln w="12700">
+            <a:miter lim="400000"/>
+          </a:ln>
+          <a:extLst>
+            <a:ext uri="{C572A759-6A51-4108-AA02-DFA0A04FC94B}">
+              <ma14:wrappingTextBoxFlag xmlns="" xmlns:m="http://schemas.openxmlformats.org/officeDocument/2006/math" xmlns:a14="http://schemas.microsoft.com/office/drawing/2010/main" xmlns:ma14="http://schemas.microsoft.com/office/mac/drawingml/2011/main" val="1"/>
+            </a:ext>
+          </a:extLst>
+        </p:spPr>
+        <p:txBody>
+          <a:bodyPr lIns="18000" tIns="18000" rIns="18000" bIns="18000">
+            <a:normAutofit/>
+          </a:bodyPr>
+          <a:lstStyle>
+            <a:lvl1pPr algn="ctr">
+              <a:defRPr sz="1000">
                 <a:solidFill>
                   <a:srgbClr val="4C6B7C"/>
                 </a:solidFill>
@@ -7524,9 +6559,11 @@
                 <a:cs typeface="Inter SemiBold"/>
                 <a:sym typeface="Inter SemiBold"/>
               </a:defRPr>
-            </a:pPr>
+            </a:lvl1pPr>
+          </a:lstStyle>
+          <a:p>
             <a:r>
-              <a:t>Les détecteurs et chasseurs de tête, pour repérer les joueurs à fort potentiel.</a:t>
+              <a:t>le résultat d’un match entre deux équipes</a:t>
             </a:r>
           </a:p>
         </p:txBody>
@@ -7557,829 +6594,6 @@
           <a:chExt cx="0" cy="0"/>
         </a:xfrm>
       </p:grpSpPr>
-      <p:sp>
-        <p:nvSpPr>
-          <p:cNvPr id="145" name="Google Shape;68;p15"/>
-          <p:cNvSpPr txBox="1">
-            <a:spLocks noGrp="1"/>
-          </p:cNvSpPr>
-          <p:nvPr>
-            <p:ph type="title"/>
-          </p:nvPr>
-        </p:nvSpPr>
-        <p:spPr>
-          <a:xfrm>
-            <a:off x="1192660" y="403305"/>
-            <a:ext cx="5315110" cy="533109"/>
-          </a:xfrm>
-          <a:prstGeom prst="rect">
-            <a:avLst/>
-          </a:prstGeom>
-        </p:spPr>
-        <p:txBody>
-          <a:bodyPr anchor="ctr"/>
-          <a:lstStyle>
-            <a:lvl1pPr defTabSz="822958">
-              <a:defRPr sz="2200">
-                <a:solidFill>
-                  <a:srgbClr val="0E3449"/>
-                </a:solidFill>
-                <a:latin typeface="Inter SemiBold"/>
-                <a:ea typeface="Inter SemiBold"/>
-                <a:cs typeface="Inter SemiBold"/>
-                <a:sym typeface="Inter SemiBold"/>
-              </a:defRPr>
-            </a:lvl1pPr>
-          </a:lstStyle>
-          <a:p>
-            <a:r>
-              <a:t>Description du modèle</a:t>
-            </a:r>
-          </a:p>
-        </p:txBody>
-      </p:sp>
-      <p:sp>
-        <p:nvSpPr>
-          <p:cNvPr id="146" name="Google Shape;69;p15"/>
-          <p:cNvSpPr/>
-          <p:nvPr/>
-        </p:nvSpPr>
-        <p:spPr>
-          <a:xfrm>
-            <a:off x="10224" y="4892025"/>
-            <a:ext cx="9144001" cy="251400"/>
-          </a:xfrm>
-          <a:prstGeom prst="rect">
-            <a:avLst/>
-          </a:prstGeom>
-          <a:solidFill>
-            <a:srgbClr val="C3FFFC"/>
-          </a:solidFill>
-          <a:ln w="12700">
-            <a:miter lim="400000"/>
-          </a:ln>
-        </p:spPr>
-        <p:txBody>
-          <a:bodyPr lIns="45718" tIns="45718" rIns="45718" bIns="45718" anchor="ctr"/>
-          <a:lstStyle/>
-          <a:p>
-            <a:pPr>
-              <a:defRPr>
-                <a:latin typeface="+mj-lt"/>
-                <a:ea typeface="+mj-ea"/>
-                <a:cs typeface="+mj-cs"/>
-                <a:sym typeface="Arial"/>
-              </a:defRPr>
-            </a:pPr>
-            <a:endParaRPr/>
-          </a:p>
-        </p:txBody>
-      </p:sp>
-      <p:pic>
-        <p:nvPicPr>
-          <p:cNvPr id="147" name="Google Shape;70;p15" descr="Google Shape;70;p15"/>
-          <p:cNvPicPr>
-            <a:picLocks noChangeAspect="1"/>
-          </p:cNvPicPr>
-          <p:nvPr/>
-        </p:nvPicPr>
-        <p:blipFill>
-          <a:blip r:embed="rId2"/>
-          <a:stretch>
-            <a:fillRect/>
-          </a:stretch>
-        </p:blipFill>
-        <p:spPr>
-          <a:xfrm>
-            <a:off x="463375" y="482852"/>
-            <a:ext cx="576901" cy="385910"/>
-          </a:xfrm>
-          <a:prstGeom prst="rect">
-            <a:avLst/>
-          </a:prstGeom>
-          <a:ln w="12700">
-            <a:miter lim="400000"/>
-          </a:ln>
-        </p:spPr>
-      </p:pic>
-      <p:sp>
-        <p:nvSpPr>
-          <p:cNvPr id="148" name="fcard"/>
-          <p:cNvSpPr/>
-          <p:nvPr/>
-        </p:nvSpPr>
-        <p:spPr>
-          <a:xfrm>
-            <a:off x="550000" y="1646749"/>
-            <a:ext cx="2441334" cy="1850006"/>
-          </a:xfrm>
-          <a:prstGeom prst="roundRect">
-            <a:avLst>
-              <a:gd name="adj" fmla="val 7000"/>
-            </a:avLst>
-          </a:prstGeom>
-          <a:solidFill>
-            <a:srgbClr val="F3F7FA"/>
-          </a:solidFill>
-          <a:ln w="12700">
-            <a:miter lim="400000"/>
-          </a:ln>
-          <a:effectLst>
-            <a:outerShdw blurRad="88900" dist="26000" dir="5400000" rotWithShape="0">
-              <a:srgbClr val="0E3449">
-                <a:alpha val="13000"/>
-              </a:srgbClr>
-            </a:outerShdw>
-          </a:effectLst>
-        </p:spPr>
-        <p:txBody>
-          <a:bodyPr lIns="45718" tIns="45718" rIns="45718" bIns="45718"/>
-          <a:lstStyle/>
-          <a:p>
-            <a:pPr>
-              <a:defRPr>
-                <a:latin typeface="+mj-lt"/>
-                <a:ea typeface="+mj-ea"/>
-                <a:cs typeface="+mj-cs"/>
-                <a:sym typeface="Arial"/>
-              </a:defRPr>
-            </a:pPr>
-            <a:endParaRPr/>
-          </a:p>
-        </p:txBody>
-      </p:sp>
-      <p:sp>
-        <p:nvSpPr>
-          <p:cNvPr id="149" name="fcard"/>
-          <p:cNvSpPr/>
-          <p:nvPr/>
-        </p:nvSpPr>
-        <p:spPr>
-          <a:xfrm>
-            <a:off x="3351333" y="1646749"/>
-            <a:ext cx="2441334" cy="1850006"/>
-          </a:xfrm>
-          <a:prstGeom prst="roundRect">
-            <a:avLst>
-              <a:gd name="adj" fmla="val 7000"/>
-            </a:avLst>
-          </a:prstGeom>
-          <a:solidFill>
-            <a:srgbClr val="F3F7FA"/>
-          </a:solidFill>
-          <a:ln w="12700">
-            <a:miter lim="400000"/>
-          </a:ln>
-          <a:effectLst>
-            <a:outerShdw blurRad="88900" dist="26000" dir="5400000" rotWithShape="0">
-              <a:srgbClr val="0E3449">
-                <a:alpha val="13000"/>
-              </a:srgbClr>
-            </a:outerShdw>
-          </a:effectLst>
-        </p:spPr>
-        <p:txBody>
-          <a:bodyPr lIns="45718" tIns="45718" rIns="45718" bIns="45718"/>
-          <a:lstStyle/>
-          <a:p>
-            <a:pPr>
-              <a:defRPr>
-                <a:latin typeface="+mj-lt"/>
-                <a:ea typeface="+mj-ea"/>
-                <a:cs typeface="+mj-cs"/>
-                <a:sym typeface="Arial"/>
-              </a:defRPr>
-            </a:pPr>
-            <a:endParaRPr/>
-          </a:p>
-        </p:txBody>
-      </p:sp>
-      <p:sp>
-        <p:nvSpPr>
-          <p:cNvPr id="150" name="fcard"/>
-          <p:cNvSpPr/>
-          <p:nvPr/>
-        </p:nvSpPr>
-        <p:spPr>
-          <a:xfrm>
-            <a:off x="6152665" y="1646749"/>
-            <a:ext cx="2441338" cy="1850006"/>
-          </a:xfrm>
-          <a:prstGeom prst="roundRect">
-            <a:avLst>
-              <a:gd name="adj" fmla="val 7000"/>
-            </a:avLst>
-          </a:prstGeom>
-          <a:solidFill>
-            <a:srgbClr val="F3F7FA"/>
-          </a:solidFill>
-          <a:ln w="12700">
-            <a:miter lim="400000"/>
-          </a:ln>
-          <a:effectLst>
-            <a:outerShdw blurRad="88900" dist="26000" dir="5400000" rotWithShape="0">
-              <a:srgbClr val="0E3449">
-                <a:alpha val="13000"/>
-              </a:srgbClr>
-            </a:outerShdw>
-          </a:effectLst>
-        </p:spPr>
-        <p:txBody>
-          <a:bodyPr lIns="45718" tIns="45718" rIns="45718" bIns="45718"/>
-          <a:lstStyle/>
-          <a:p>
-            <a:pPr>
-              <a:defRPr>
-                <a:latin typeface="+mj-lt"/>
-                <a:ea typeface="+mj-ea"/>
-                <a:cs typeface="+mj-cs"/>
-                <a:sym typeface="Arial"/>
-              </a:defRPr>
-            </a:pPr>
-            <a:endParaRPr/>
-          </a:p>
-        </p:txBody>
-      </p:sp>
-      <p:sp>
-        <p:nvSpPr>
-          <p:cNvPr id="151" name="arrow304"/>
-          <p:cNvSpPr/>
-          <p:nvPr/>
-        </p:nvSpPr>
-        <p:spPr>
-          <a:xfrm>
-            <a:off x="3041331" y="2066749"/>
-            <a:ext cx="260006" cy="120005"/>
-          </a:xfrm>
-          <a:prstGeom prst="rightArrow">
-            <a:avLst>
-              <a:gd name="adj1" fmla="val 55000"/>
-              <a:gd name="adj2" fmla="val 55000"/>
-            </a:avLst>
-          </a:prstGeom>
-          <a:solidFill>
-            <a:srgbClr val="9BB4C2"/>
-          </a:solidFill>
-          <a:ln w="12700">
-            <a:miter lim="400000"/>
-          </a:ln>
-        </p:spPr>
-        <p:txBody>
-          <a:bodyPr lIns="45718" tIns="45718" rIns="45718" bIns="45718"/>
-          <a:lstStyle/>
-          <a:p>
-            <a:pPr>
-              <a:defRPr>
-                <a:latin typeface="+mj-lt"/>
-                <a:ea typeface="+mj-ea"/>
-                <a:cs typeface="+mj-cs"/>
-                <a:sym typeface="Arial"/>
-              </a:defRPr>
-            </a:pPr>
-            <a:endParaRPr/>
-          </a:p>
-        </p:txBody>
-      </p:sp>
-      <p:sp>
-        <p:nvSpPr>
-          <p:cNvPr id="152" name="arrow305"/>
-          <p:cNvSpPr/>
-          <p:nvPr/>
-        </p:nvSpPr>
-        <p:spPr>
-          <a:xfrm>
-            <a:off x="5842665" y="2066749"/>
-            <a:ext cx="260005" cy="120005"/>
-          </a:xfrm>
-          <a:prstGeom prst="rightArrow">
-            <a:avLst>
-              <a:gd name="adj1" fmla="val 55000"/>
-              <a:gd name="adj2" fmla="val 55000"/>
-            </a:avLst>
-          </a:prstGeom>
-          <a:solidFill>
-            <a:srgbClr val="9BB4C2"/>
-          </a:solidFill>
-          <a:ln w="12700">
-            <a:miter lim="400000"/>
-          </a:ln>
-        </p:spPr>
-        <p:txBody>
-          <a:bodyPr lIns="45718" tIns="45718" rIns="45718" bIns="45718"/>
-          <a:lstStyle/>
-          <a:p>
-            <a:pPr>
-              <a:defRPr>
-                <a:latin typeface="+mj-lt"/>
-                <a:ea typeface="+mj-ea"/>
-                <a:cs typeface="+mj-cs"/>
-                <a:sym typeface="Arial"/>
-              </a:defRPr>
-            </a:pPr>
-            <a:endParaRPr/>
-          </a:p>
-        </p:txBody>
-      </p:sp>
-      <p:sp>
-        <p:nvSpPr>
-          <p:cNvPr id="153" name="fcirc"/>
-          <p:cNvSpPr/>
-          <p:nvPr/>
-        </p:nvSpPr>
-        <p:spPr>
-          <a:xfrm>
-            <a:off x="1460665" y="1816748"/>
-            <a:ext cx="620009" cy="620009"/>
-          </a:xfrm>
-          <a:prstGeom prst="ellipse">
-            <a:avLst/>
-          </a:prstGeom>
-          <a:solidFill>
-            <a:srgbClr val="0E3449"/>
-          </a:solidFill>
-          <a:ln w="12700">
-            <a:miter lim="400000"/>
-          </a:ln>
-        </p:spPr>
-        <p:txBody>
-          <a:bodyPr lIns="45718" tIns="45718" rIns="45718" bIns="45718"/>
-          <a:lstStyle/>
-          <a:p>
-            <a:pPr>
-              <a:defRPr>
-                <a:latin typeface="+mj-lt"/>
-                <a:ea typeface="+mj-ea"/>
-                <a:cs typeface="+mj-cs"/>
-                <a:sym typeface="Arial"/>
-              </a:defRPr>
-            </a:pPr>
-            <a:endParaRPr/>
-          </a:p>
-        </p:txBody>
-      </p:sp>
-      <p:sp>
-        <p:nvSpPr>
-          <p:cNvPr id="154" name="fcirc"/>
-          <p:cNvSpPr/>
-          <p:nvPr/>
-        </p:nvSpPr>
-        <p:spPr>
-          <a:xfrm>
-            <a:off x="4261999" y="1816748"/>
-            <a:ext cx="620009" cy="620009"/>
-          </a:xfrm>
-          <a:prstGeom prst="ellipse">
-            <a:avLst/>
-          </a:prstGeom>
-          <a:solidFill>
-            <a:srgbClr val="0E3449"/>
-          </a:solidFill>
-          <a:ln w="12700">
-            <a:miter lim="400000"/>
-          </a:ln>
-        </p:spPr>
-        <p:txBody>
-          <a:bodyPr lIns="45718" tIns="45718" rIns="45718" bIns="45718"/>
-          <a:lstStyle/>
-          <a:p>
-            <a:pPr>
-              <a:defRPr>
-                <a:latin typeface="+mj-lt"/>
-                <a:ea typeface="+mj-ea"/>
-                <a:cs typeface="+mj-cs"/>
-                <a:sym typeface="Arial"/>
-              </a:defRPr>
-            </a:pPr>
-            <a:endParaRPr/>
-          </a:p>
-        </p:txBody>
-      </p:sp>
-      <p:sp>
-        <p:nvSpPr>
-          <p:cNvPr id="155" name="fcirc"/>
-          <p:cNvSpPr/>
-          <p:nvPr/>
-        </p:nvSpPr>
-        <p:spPr>
-          <a:xfrm>
-            <a:off x="7063330" y="1816748"/>
-            <a:ext cx="620009" cy="620009"/>
-          </a:xfrm>
-          <a:prstGeom prst="ellipse">
-            <a:avLst/>
-          </a:prstGeom>
-          <a:solidFill>
-            <a:srgbClr val="0E3449"/>
-          </a:solidFill>
-          <a:ln w="12700">
-            <a:miter lim="400000"/>
-          </a:ln>
-        </p:spPr>
-        <p:txBody>
-          <a:bodyPr lIns="45718" tIns="45718" rIns="45718" bIns="45718"/>
-          <a:lstStyle/>
-          <a:p>
-            <a:pPr>
-              <a:defRPr>
-                <a:latin typeface="+mj-lt"/>
-                <a:ea typeface="+mj-ea"/>
-                <a:cs typeface="+mj-cs"/>
-                <a:sym typeface="Arial"/>
-              </a:defRPr>
-            </a:pPr>
-            <a:endParaRPr/>
-          </a:p>
-        </p:txBody>
-      </p:sp>
-      <p:pic>
-        <p:nvPicPr>
-          <p:cNvPr id="156" name="ficon" descr="ficon"/>
-          <p:cNvPicPr>
-            <a:picLocks noChangeAspect="1"/>
-          </p:cNvPicPr>
-          <p:nvPr/>
-        </p:nvPicPr>
-        <p:blipFill>
-          <a:blip r:embed="rId3"/>
-          <a:stretch>
-            <a:fillRect/>
-          </a:stretch>
-        </p:blipFill>
-        <p:spPr>
-          <a:xfrm>
-            <a:off x="1580666" y="1936749"/>
-            <a:ext cx="380005" cy="380005"/>
-          </a:xfrm>
-          <a:prstGeom prst="rect">
-            <a:avLst/>
-          </a:prstGeom>
-          <a:ln w="12700">
-            <a:miter lim="400000"/>
-          </a:ln>
-        </p:spPr>
-      </p:pic>
-      <p:pic>
-        <p:nvPicPr>
-          <p:cNvPr id="157" name="ficon" descr="ficon"/>
-          <p:cNvPicPr>
-            <a:picLocks noChangeAspect="1"/>
-          </p:cNvPicPr>
-          <p:nvPr/>
-        </p:nvPicPr>
-        <p:blipFill>
-          <a:blip r:embed="rId4"/>
-          <a:stretch>
-            <a:fillRect/>
-          </a:stretch>
-        </p:blipFill>
-        <p:spPr>
-          <a:xfrm>
-            <a:off x="4381998" y="1936749"/>
-            <a:ext cx="380005" cy="380005"/>
-          </a:xfrm>
-          <a:prstGeom prst="rect">
-            <a:avLst/>
-          </a:prstGeom>
-          <a:ln w="12700">
-            <a:miter lim="400000"/>
-          </a:ln>
-        </p:spPr>
-      </p:pic>
-      <p:pic>
-        <p:nvPicPr>
-          <p:cNvPr id="158" name="ficon" descr="ficon"/>
-          <p:cNvPicPr>
-            <a:picLocks noChangeAspect="1"/>
-          </p:cNvPicPr>
-          <p:nvPr/>
-        </p:nvPicPr>
-        <p:blipFill>
-          <a:blip r:embed="rId5"/>
-          <a:stretch>
-            <a:fillRect/>
-          </a:stretch>
-        </p:blipFill>
-        <p:spPr>
-          <a:xfrm>
-            <a:off x="7183332" y="1936749"/>
-            <a:ext cx="380005" cy="380005"/>
-          </a:xfrm>
-          <a:prstGeom prst="rect">
-            <a:avLst/>
-          </a:prstGeom>
-          <a:ln w="12700">
-            <a:miter lim="400000"/>
-          </a:ln>
-        </p:spPr>
-      </p:pic>
-      <p:sp>
-        <p:nvSpPr>
-          <p:cNvPr id="159" name="flab"/>
-          <p:cNvSpPr txBox="1"/>
-          <p:nvPr/>
-        </p:nvSpPr>
-        <p:spPr>
-          <a:xfrm>
-            <a:off x="638000" y="2546749"/>
-            <a:ext cx="2265336" cy="300005"/>
-          </a:xfrm>
-          <a:prstGeom prst="rect">
-            <a:avLst/>
-          </a:prstGeom>
-          <a:ln w="12700">
-            <a:miter lim="400000"/>
-          </a:ln>
-          <a:extLst>
-            <a:ext uri="{C572A759-6A51-4108-AA02-DFA0A04FC94B}">
-              <ma14:wrappingTextBoxFlag xmlns:ma14="http://schemas.microsoft.com/office/mac/drawingml/2011/main" xmlns:a14="http://schemas.microsoft.com/office/drawing/2010/main" xmlns:m="http://schemas.openxmlformats.org/officeDocument/2006/math" xmlns="" val="1"/>
-            </a:ext>
-          </a:extLst>
-        </p:spPr>
-        <p:txBody>
-          <a:bodyPr lIns="18000" tIns="18000" rIns="18000" bIns="18000" anchor="ctr">
-            <a:normAutofit/>
-          </a:bodyPr>
-          <a:lstStyle>
-            <a:lvl1pPr algn="ctr">
-              <a:defRPr sz="1300" b="1">
-                <a:solidFill>
-                  <a:srgbClr val="0E3449"/>
-                </a:solidFill>
-                <a:latin typeface="Inter SemiBold"/>
-                <a:ea typeface="Inter SemiBold"/>
-                <a:cs typeface="Inter SemiBold"/>
-                <a:sym typeface="Inter SemiBold"/>
-              </a:defRPr>
-            </a:lvl1pPr>
-          </a:lstStyle>
-          <a:p>
-            <a:r>
-              <a:t>Les données</a:t>
-            </a:r>
-          </a:p>
-        </p:txBody>
-      </p:sp>
-      <p:sp>
-        <p:nvSpPr>
-          <p:cNvPr id="160" name="fsub"/>
-          <p:cNvSpPr txBox="1"/>
-          <p:nvPr/>
-        </p:nvSpPr>
-        <p:spPr>
-          <a:xfrm>
-            <a:off x="657998" y="2886748"/>
-            <a:ext cx="2225340" cy="540005"/>
-          </a:xfrm>
-          <a:prstGeom prst="rect">
-            <a:avLst/>
-          </a:prstGeom>
-          <a:ln w="12700">
-            <a:miter lim="400000"/>
-          </a:ln>
-          <a:extLst>
-            <a:ext uri="{C572A759-6A51-4108-AA02-DFA0A04FC94B}">
-              <ma14:wrappingTextBoxFlag xmlns:ma14="http://schemas.microsoft.com/office/mac/drawingml/2011/main" xmlns:a14="http://schemas.microsoft.com/office/drawing/2010/main" xmlns:m="http://schemas.openxmlformats.org/officeDocument/2006/math" xmlns="" val="1"/>
-            </a:ext>
-          </a:extLst>
-        </p:spPr>
-        <p:txBody>
-          <a:bodyPr lIns="18000" tIns="18000" rIns="18000" bIns="18000">
-            <a:normAutofit/>
-          </a:bodyPr>
-          <a:lstStyle>
-            <a:lvl1pPr algn="ctr">
-              <a:defRPr sz="1000">
-                <a:solidFill>
-                  <a:srgbClr val="4C6B7C"/>
-                </a:solidFill>
-                <a:latin typeface="Inter SemiBold"/>
-                <a:ea typeface="Inter SemiBold"/>
-                <a:cs typeface="Inter SemiBold"/>
-                <a:sym typeface="Inter SemiBold"/>
-              </a:defRPr>
-            </a:lvl1pPr>
-          </a:lstStyle>
-          <a:p>
-            <a:r>
-              <a:t>matchs, équipes et joueurs des championnats européens</a:t>
-            </a:r>
-          </a:p>
-        </p:txBody>
-      </p:sp>
-      <p:sp>
-        <p:nvSpPr>
-          <p:cNvPr id="161" name="flab"/>
-          <p:cNvSpPr txBox="1"/>
-          <p:nvPr/>
-        </p:nvSpPr>
-        <p:spPr>
-          <a:xfrm>
-            <a:off x="3439333" y="2546749"/>
-            <a:ext cx="2265338" cy="300005"/>
-          </a:xfrm>
-          <a:prstGeom prst="rect">
-            <a:avLst/>
-          </a:prstGeom>
-          <a:ln w="12700">
-            <a:miter lim="400000"/>
-          </a:ln>
-          <a:extLst>
-            <a:ext uri="{C572A759-6A51-4108-AA02-DFA0A04FC94B}">
-              <ma14:wrappingTextBoxFlag xmlns:ma14="http://schemas.microsoft.com/office/mac/drawingml/2011/main" xmlns:a14="http://schemas.microsoft.com/office/drawing/2010/main" xmlns:m="http://schemas.openxmlformats.org/officeDocument/2006/math" xmlns="" val="1"/>
-            </a:ext>
-          </a:extLst>
-        </p:spPr>
-        <p:txBody>
-          <a:bodyPr lIns="18000" tIns="18000" rIns="18000" bIns="18000" anchor="ctr">
-            <a:normAutofit/>
-          </a:bodyPr>
-          <a:lstStyle>
-            <a:lvl1pPr algn="ctr">
-              <a:defRPr sz="1300" b="1">
-                <a:solidFill>
-                  <a:srgbClr val="0E3449"/>
-                </a:solidFill>
-                <a:latin typeface="Inter SemiBold"/>
-                <a:ea typeface="Inter SemiBold"/>
-                <a:cs typeface="Inter SemiBold"/>
-                <a:sym typeface="Inter SemiBold"/>
-              </a:defRPr>
-            </a:lvl1pPr>
-          </a:lstStyle>
-          <a:p>
-            <a:r>
-              <a:t>Le modèle</a:t>
-            </a:r>
-          </a:p>
-        </p:txBody>
-      </p:sp>
-      <p:sp>
-        <p:nvSpPr>
-          <p:cNvPr id="162" name="fsub"/>
-          <p:cNvSpPr txBox="1"/>
-          <p:nvPr/>
-        </p:nvSpPr>
-        <p:spPr>
-          <a:xfrm>
-            <a:off x="3459331" y="2886748"/>
-            <a:ext cx="2225339" cy="540005"/>
-          </a:xfrm>
-          <a:prstGeom prst="rect">
-            <a:avLst/>
-          </a:prstGeom>
-          <a:ln w="12700">
-            <a:miter lim="400000"/>
-          </a:ln>
-          <a:extLst>
-            <a:ext uri="{C572A759-6A51-4108-AA02-DFA0A04FC94B}">
-              <ma14:wrappingTextBoxFlag xmlns:ma14="http://schemas.microsoft.com/office/mac/drawingml/2011/main" xmlns:a14="http://schemas.microsoft.com/office/drawing/2010/main" xmlns:m="http://schemas.openxmlformats.org/officeDocument/2006/math" xmlns="" val="1"/>
-            </a:ext>
-          </a:extLst>
-        </p:spPr>
-        <p:txBody>
-          <a:bodyPr lIns="18000" tIns="18000" rIns="18000" bIns="18000">
-            <a:normAutofit/>
-          </a:bodyPr>
-          <a:lstStyle>
-            <a:lvl1pPr algn="ctr">
-              <a:defRPr sz="1000">
-                <a:solidFill>
-                  <a:srgbClr val="4C6B7C"/>
-                </a:solidFill>
-                <a:latin typeface="Inter SemiBold"/>
-                <a:ea typeface="Inter SemiBold"/>
-                <a:cs typeface="Inter SemiBold"/>
-                <a:sym typeface="Inter SemiBold"/>
-              </a:defRPr>
-            </a:lvl1pPr>
-          </a:lstStyle>
-          <a:p>
-            <a:r>
-              <a:t>à partir des notes FIFA 26 des joueurs</a:t>
-            </a:r>
-          </a:p>
-        </p:txBody>
-      </p:sp>
-      <p:sp>
-        <p:nvSpPr>
-          <p:cNvPr id="163" name="flab"/>
-          <p:cNvSpPr txBox="1"/>
-          <p:nvPr/>
-        </p:nvSpPr>
-        <p:spPr>
-          <a:xfrm>
-            <a:off x="6240664" y="2546749"/>
-            <a:ext cx="2265337" cy="300005"/>
-          </a:xfrm>
-          <a:prstGeom prst="rect">
-            <a:avLst/>
-          </a:prstGeom>
-          <a:ln w="12700">
-            <a:miter lim="400000"/>
-          </a:ln>
-          <a:extLst>
-            <a:ext uri="{C572A759-6A51-4108-AA02-DFA0A04FC94B}">
-              <ma14:wrappingTextBoxFlag xmlns:ma14="http://schemas.microsoft.com/office/mac/drawingml/2011/main" xmlns:a14="http://schemas.microsoft.com/office/drawing/2010/main" xmlns:m="http://schemas.openxmlformats.org/officeDocument/2006/math" xmlns="" val="1"/>
-            </a:ext>
-          </a:extLst>
-        </p:spPr>
-        <p:txBody>
-          <a:bodyPr lIns="18000" tIns="18000" rIns="18000" bIns="18000" anchor="ctr">
-            <a:normAutofit/>
-          </a:bodyPr>
-          <a:lstStyle>
-            <a:lvl1pPr algn="ctr">
-              <a:defRPr sz="1300" b="1">
-                <a:solidFill>
-                  <a:srgbClr val="0E3449"/>
-                </a:solidFill>
-                <a:latin typeface="Inter SemiBold"/>
-                <a:ea typeface="Inter SemiBold"/>
-                <a:cs typeface="Inter SemiBold"/>
-                <a:sym typeface="Inter SemiBold"/>
-              </a:defRPr>
-            </a:lvl1pPr>
-          </a:lstStyle>
-          <a:p>
-            <a:r>
-              <a:t>La prédiction</a:t>
-            </a:r>
-          </a:p>
-        </p:txBody>
-      </p:sp>
-      <p:sp>
-        <p:nvSpPr>
-          <p:cNvPr id="164" name="fsub"/>
-          <p:cNvSpPr txBox="1"/>
-          <p:nvPr/>
-        </p:nvSpPr>
-        <p:spPr>
-          <a:xfrm>
-            <a:off x="6260665" y="2886748"/>
-            <a:ext cx="2225338" cy="540005"/>
-          </a:xfrm>
-          <a:prstGeom prst="rect">
-            <a:avLst/>
-          </a:prstGeom>
-          <a:ln w="12700">
-            <a:miter lim="400000"/>
-          </a:ln>
-          <a:extLst>
-            <a:ext uri="{C572A759-6A51-4108-AA02-DFA0A04FC94B}">
-              <ma14:wrappingTextBoxFlag xmlns:ma14="http://schemas.microsoft.com/office/mac/drawingml/2011/main" xmlns:a14="http://schemas.microsoft.com/office/drawing/2010/main" xmlns:m="http://schemas.openxmlformats.org/officeDocument/2006/math" xmlns="" val="1"/>
-            </a:ext>
-          </a:extLst>
-        </p:spPr>
-        <p:txBody>
-          <a:bodyPr lIns="18000" tIns="18000" rIns="18000" bIns="18000">
-            <a:normAutofit/>
-          </a:bodyPr>
-          <a:lstStyle>
-            <a:lvl1pPr algn="ctr">
-              <a:defRPr sz="1000">
-                <a:solidFill>
-                  <a:srgbClr val="4C6B7C"/>
-                </a:solidFill>
-                <a:latin typeface="Inter SemiBold"/>
-                <a:ea typeface="Inter SemiBold"/>
-                <a:cs typeface="Inter SemiBold"/>
-                <a:sym typeface="Inter SemiBold"/>
-              </a:defRPr>
-            </a:lvl1pPr>
-          </a:lstStyle>
-          <a:p>
-            <a:r>
-              <a:t>le résultat d’un match entre deux équipes</a:t>
-            </a:r>
-          </a:p>
-        </p:txBody>
-      </p:sp>
-    </p:spTree>
-  </p:cSld>
-  <p:clrMapOvr>
-    <a:masterClrMapping/>
-  </p:clrMapOvr>
-  <p:transition spd="med"/>
-</p:sld>
-</file>
-
-<file path=ppt/slides/slide5.xml><?xml version="1.0" encoding="utf-8"?>
-<p:sld xmlns:a="http://schemas.openxmlformats.org/drawingml/2006/main" xmlns:r="http://schemas.openxmlformats.org/officeDocument/2006/relationships" xmlns:p="http://schemas.openxmlformats.org/presentationml/2006/main">
-  <p:cSld>
-    <p:spTree>
-      <p:nvGrpSpPr>
-        <p:cNvPr id="1" name=""/>
-        <p:cNvGrpSpPr/>
-        <p:nvPr/>
-      </p:nvGrpSpPr>
-      <p:grpSpPr>
-        <a:xfrm>
-          <a:off x="0" y="0"/>
-          <a:ext cx="0" cy="0"/>
-          <a:chOff x="0" y="0"/>
-          <a:chExt cx="0" cy="0"/>
-        </a:xfrm>
-      </p:grpSpPr>
       <p:pic>
         <p:nvPicPr>
           <p:cNvPr id="166" name="Fond Sporting Portugal" descr="Fond Sporting Portugal"/>
@@ -8985,7 +7199,7 @@
           </a:ln>
           <a:extLst>
             <a:ext uri="{C572A759-6A51-4108-AA02-DFA0A04FC94B}">
-              <ma14:wrappingTextBoxFlag xmlns:ma14="http://schemas.microsoft.com/office/mac/drawingml/2011/main" xmlns:a14="http://schemas.microsoft.com/office/drawing/2010/main" xmlns:m="http://schemas.openxmlformats.org/officeDocument/2006/math" xmlns="" val="1"/>
+              <ma14:wrappingTextBoxFlag xmlns="" xmlns:m="http://schemas.openxmlformats.org/officeDocument/2006/math" xmlns:a14="http://schemas.microsoft.com/office/drawing/2010/main" xmlns:ma14="http://schemas.microsoft.com/office/mac/drawingml/2011/main" val="1"/>
             </a:ext>
           </a:extLst>
         </p:spPr>
@@ -9032,7 +7246,7 @@
           </a:ln>
           <a:extLst>
             <a:ext uri="{C572A759-6A51-4108-AA02-DFA0A04FC94B}">
-              <ma14:wrappingTextBoxFlag xmlns:ma14="http://schemas.microsoft.com/office/mac/drawingml/2011/main" xmlns:a14="http://schemas.microsoft.com/office/drawing/2010/main" xmlns:m="http://schemas.openxmlformats.org/officeDocument/2006/math" xmlns="" val="1"/>
+              <ma14:wrappingTextBoxFlag xmlns="" xmlns:m="http://schemas.openxmlformats.org/officeDocument/2006/math" xmlns:a14="http://schemas.microsoft.com/office/drawing/2010/main" xmlns:ma14="http://schemas.microsoft.com/office/mac/drawingml/2011/main" val="1"/>
             </a:ext>
           </a:extLst>
         </p:spPr>
@@ -9079,7 +7293,7 @@
           </a:ln>
           <a:extLst>
             <a:ext uri="{C572A759-6A51-4108-AA02-DFA0A04FC94B}">
-              <ma14:wrappingTextBoxFlag xmlns:ma14="http://schemas.microsoft.com/office/mac/drawingml/2011/main" xmlns:a14="http://schemas.microsoft.com/office/drawing/2010/main" xmlns:m="http://schemas.openxmlformats.org/officeDocument/2006/math" xmlns="" val="1"/>
+              <ma14:wrappingTextBoxFlag xmlns="" xmlns:m="http://schemas.openxmlformats.org/officeDocument/2006/math" xmlns:a14="http://schemas.microsoft.com/office/drawing/2010/main" xmlns:ma14="http://schemas.microsoft.com/office/mac/drawingml/2011/main" val="1"/>
             </a:ext>
           </a:extLst>
         </p:spPr>
@@ -9126,7 +7340,7 @@
           </a:ln>
           <a:extLst>
             <a:ext uri="{C572A759-6A51-4108-AA02-DFA0A04FC94B}">
-              <ma14:wrappingTextBoxFlag xmlns:ma14="http://schemas.microsoft.com/office/mac/drawingml/2011/main" xmlns:a14="http://schemas.microsoft.com/office/drawing/2010/main" xmlns:m="http://schemas.openxmlformats.org/officeDocument/2006/math" xmlns="" val="1"/>
+              <ma14:wrappingTextBoxFlag xmlns="" xmlns:m="http://schemas.openxmlformats.org/officeDocument/2006/math" xmlns:a14="http://schemas.microsoft.com/office/drawing/2010/main" xmlns:ma14="http://schemas.microsoft.com/office/mac/drawingml/2011/main" val="1"/>
             </a:ext>
           </a:extLst>
         </p:spPr>
@@ -9173,7 +7387,7 @@
           </a:ln>
           <a:extLst>
             <a:ext uri="{C572A759-6A51-4108-AA02-DFA0A04FC94B}">
-              <ma14:wrappingTextBoxFlag xmlns:ma14="http://schemas.microsoft.com/office/mac/drawingml/2011/main" xmlns:a14="http://schemas.microsoft.com/office/drawing/2010/main" xmlns:m="http://schemas.openxmlformats.org/officeDocument/2006/math" xmlns="" val="1"/>
+              <ma14:wrappingTextBoxFlag xmlns="" xmlns:m="http://schemas.openxmlformats.org/officeDocument/2006/math" xmlns:a14="http://schemas.microsoft.com/office/drawing/2010/main" xmlns:ma14="http://schemas.microsoft.com/office/mac/drawingml/2011/main" val="1"/>
             </a:ext>
           </a:extLst>
         </p:spPr>
@@ -9220,7 +7434,7 @@
           </a:ln>
           <a:extLst>
             <a:ext uri="{C572A759-6A51-4108-AA02-DFA0A04FC94B}">
-              <ma14:wrappingTextBoxFlag xmlns:ma14="http://schemas.microsoft.com/office/mac/drawingml/2011/main" xmlns:a14="http://schemas.microsoft.com/office/drawing/2010/main" xmlns:m="http://schemas.openxmlformats.org/officeDocument/2006/math" xmlns="" val="1"/>
+              <ma14:wrappingTextBoxFlag xmlns="" xmlns:m="http://schemas.openxmlformats.org/officeDocument/2006/math" xmlns:a14="http://schemas.microsoft.com/office/drawing/2010/main" xmlns:ma14="http://schemas.microsoft.com/office/mac/drawingml/2011/main" val="1"/>
             </a:ext>
           </a:extLst>
         </p:spPr>
@@ -9267,7 +7481,7 @@
           </a:ln>
           <a:extLst>
             <a:ext uri="{C572A759-6A51-4108-AA02-DFA0A04FC94B}">
-              <ma14:wrappingTextBoxFlag xmlns:ma14="http://schemas.microsoft.com/office/mac/drawingml/2011/main" xmlns:a14="http://schemas.microsoft.com/office/drawing/2010/main" xmlns:m="http://schemas.openxmlformats.org/officeDocument/2006/math" xmlns="" val="1"/>
+              <ma14:wrappingTextBoxFlag xmlns="" xmlns:m="http://schemas.openxmlformats.org/officeDocument/2006/math" xmlns:a14="http://schemas.microsoft.com/office/drawing/2010/main" xmlns:ma14="http://schemas.microsoft.com/office/mac/drawingml/2011/main" val="1"/>
             </a:ext>
           </a:extLst>
         </p:spPr>
@@ -9314,7 +7528,7 @@
           </a:ln>
           <a:extLst>
             <a:ext uri="{C572A759-6A51-4108-AA02-DFA0A04FC94B}">
-              <ma14:wrappingTextBoxFlag xmlns:ma14="http://schemas.microsoft.com/office/mac/drawingml/2011/main" xmlns:a14="http://schemas.microsoft.com/office/drawing/2010/main" xmlns:m="http://schemas.openxmlformats.org/officeDocument/2006/math" xmlns="" val="1"/>
+              <ma14:wrappingTextBoxFlag xmlns="" xmlns:m="http://schemas.openxmlformats.org/officeDocument/2006/math" xmlns:a14="http://schemas.microsoft.com/office/drawing/2010/main" xmlns:ma14="http://schemas.microsoft.com/office/mac/drawingml/2011/main" val="1"/>
             </a:ext>
           </a:extLst>
         </p:spPr>
@@ -9351,7 +7565,7 @@
 </p:sld>
 </file>
 
-<file path=ppt/slides/slide6.xml><?xml version="1.0" encoding="utf-8"?>
+<file path=ppt/slides/slide5.xml><?xml version="1.0" encoding="utf-8"?>
 <p:sld xmlns:a="http://schemas.openxmlformats.org/drawingml/2006/main" xmlns:r="http://schemas.openxmlformats.org/officeDocument/2006/relationships" xmlns:p="http://schemas.openxmlformats.org/presentationml/2006/main">
   <p:cSld>
     <p:spTree>
@@ -9577,7 +7791,7 @@
             <a:effectLst/>
             <a:extLst>
               <a:ext uri="{C572A759-6A51-4108-AA02-DFA0A04FC94B}">
-                <ma14:wrappingTextBoxFlag xmlns:ma14="http://schemas.microsoft.com/office/mac/drawingml/2011/main" xmlns:a14="http://schemas.microsoft.com/office/drawing/2010/main" xmlns:m="http://schemas.openxmlformats.org/officeDocument/2006/math" xmlns="" val="1"/>
+                <ma14:wrappingTextBoxFlag xmlns="" xmlns:m="http://schemas.openxmlformats.org/officeDocument/2006/math" xmlns:a14="http://schemas.microsoft.com/office/drawing/2010/main" xmlns:ma14="http://schemas.microsoft.com/office/mac/drawingml/2011/main" val="1"/>
               </a:ext>
             </a:extLst>
           </p:spPr>
@@ -9705,7 +7919,7 @@
             <a:effectLst/>
             <a:extLst>
               <a:ext uri="{C572A759-6A51-4108-AA02-DFA0A04FC94B}">
-                <ma14:wrappingTextBoxFlag xmlns:ma14="http://schemas.microsoft.com/office/mac/drawingml/2011/main" xmlns:a14="http://schemas.microsoft.com/office/drawing/2010/main" xmlns:m="http://schemas.openxmlformats.org/officeDocument/2006/math" xmlns="" val="1"/>
+                <ma14:wrappingTextBoxFlag xmlns="" xmlns:m="http://schemas.openxmlformats.org/officeDocument/2006/math" xmlns:a14="http://schemas.microsoft.com/office/drawing/2010/main" xmlns:ma14="http://schemas.microsoft.com/office/mac/drawingml/2011/main" val="1"/>
               </a:ext>
             </a:extLst>
           </p:spPr>
@@ -9774,7 +7988,7 @@
 </p:sld>
 </file>
 
-<file path=ppt/slides/slide7.xml><?xml version="1.0" encoding="utf-8"?>
+<file path=ppt/slides/slide6.xml><?xml version="1.0" encoding="utf-8"?>
 <p:sld xmlns:a="http://schemas.openxmlformats.org/drawingml/2006/main" xmlns:r="http://schemas.openxmlformats.org/officeDocument/2006/relationships" xmlns:p="http://schemas.openxmlformats.org/presentationml/2006/main">
   <p:cSld>
     <p:spTree>
@@ -9967,7 +8181,7 @@
             <a:effectLst/>
             <a:extLst>
               <a:ext uri="{C572A759-6A51-4108-AA02-DFA0A04FC94B}">
-                <ma14:wrappingTextBoxFlag xmlns:ma14="http://schemas.microsoft.com/office/mac/drawingml/2011/main" xmlns:a14="http://schemas.microsoft.com/office/drawing/2010/main" xmlns:m="http://schemas.openxmlformats.org/officeDocument/2006/math" xmlns="" val="1"/>
+                <ma14:wrappingTextBoxFlag xmlns="" xmlns:m="http://schemas.openxmlformats.org/officeDocument/2006/math" xmlns:a14="http://schemas.microsoft.com/office/drawing/2010/main" xmlns:ma14="http://schemas.microsoft.com/office/mac/drawingml/2011/main" val="1"/>
               </a:ext>
             </a:extLst>
           </p:spPr>
@@ -10074,7 +8288,7 @@
               <a:effectLst/>
               <a:extLst>
                 <a:ext uri="{C572A759-6A51-4108-AA02-DFA0A04FC94B}">
-                  <ma14:wrappingTextBoxFlag xmlns:ma14="http://schemas.microsoft.com/office/mac/drawingml/2011/main" xmlns:a14="http://schemas.microsoft.com/office/drawing/2010/main" xmlns:m="http://schemas.openxmlformats.org/officeDocument/2006/math" xmlns="" val="1"/>
+                  <ma14:wrappingTextBoxFlag xmlns="" xmlns:m="http://schemas.openxmlformats.org/officeDocument/2006/math" xmlns:a14="http://schemas.microsoft.com/office/drawing/2010/main" xmlns:ma14="http://schemas.microsoft.com/office/mac/drawingml/2011/main" val="1"/>
                 </a:ext>
               </a:extLst>
             </p:spPr>
@@ -10124,7 +8338,7 @@
               <a:effectLst/>
               <a:extLst>
                 <a:ext uri="{C572A759-6A51-4108-AA02-DFA0A04FC94B}">
-                  <ma14:wrappingTextBoxFlag xmlns:ma14="http://schemas.microsoft.com/office/mac/drawingml/2011/main" xmlns:a14="http://schemas.microsoft.com/office/drawing/2010/main" xmlns:m="http://schemas.openxmlformats.org/officeDocument/2006/math" xmlns="" val="1"/>
+                  <ma14:wrappingTextBoxFlag xmlns="" xmlns:m="http://schemas.openxmlformats.org/officeDocument/2006/math" xmlns:a14="http://schemas.microsoft.com/office/drawing/2010/main" xmlns:ma14="http://schemas.microsoft.com/office/mac/drawingml/2011/main" val="1"/>
                 </a:ext>
               </a:extLst>
             </p:spPr>
@@ -10244,7 +8458,7 @@
               <a:effectLst/>
               <a:extLst>
                 <a:ext uri="{C572A759-6A51-4108-AA02-DFA0A04FC94B}">
-                  <ma14:wrappingTextBoxFlag xmlns:ma14="http://schemas.microsoft.com/office/mac/drawingml/2011/main" xmlns:a14="http://schemas.microsoft.com/office/drawing/2010/main" xmlns:m="http://schemas.openxmlformats.org/officeDocument/2006/math" xmlns="" val="1"/>
+                  <ma14:wrappingTextBoxFlag xmlns="" xmlns:m="http://schemas.openxmlformats.org/officeDocument/2006/math" xmlns:a14="http://schemas.microsoft.com/office/drawing/2010/main" xmlns:ma14="http://schemas.microsoft.com/office/mac/drawingml/2011/main" val="1"/>
                 </a:ext>
               </a:extLst>
             </p:spPr>
@@ -10295,7 +8509,7 @@
             <a:effectLst/>
             <a:extLst>
               <a:ext uri="{C572A759-6A51-4108-AA02-DFA0A04FC94B}">
-                <ma14:wrappingTextBoxFlag xmlns:ma14="http://schemas.microsoft.com/office/mac/drawingml/2011/main" xmlns:a14="http://schemas.microsoft.com/office/drawing/2010/main" xmlns:m="http://schemas.openxmlformats.org/officeDocument/2006/math" xmlns="" val="1"/>
+                <ma14:wrappingTextBoxFlag xmlns="" xmlns:m="http://schemas.openxmlformats.org/officeDocument/2006/math" xmlns:a14="http://schemas.microsoft.com/office/drawing/2010/main" xmlns:ma14="http://schemas.microsoft.com/office/mac/drawingml/2011/main" val="1"/>
               </a:ext>
             </a:extLst>
           </p:spPr>
@@ -10400,7 +8614,7 @@
             <a:effectLst/>
             <a:extLst>
               <a:ext uri="{C572A759-6A51-4108-AA02-DFA0A04FC94B}">
-                <ma14:wrappingTextBoxFlag xmlns:ma14="http://schemas.microsoft.com/office/mac/drawingml/2011/main" xmlns:a14="http://schemas.microsoft.com/office/drawing/2010/main" xmlns:m="http://schemas.openxmlformats.org/officeDocument/2006/math" xmlns="" val="1"/>
+                <ma14:wrappingTextBoxFlag xmlns="" xmlns:m="http://schemas.openxmlformats.org/officeDocument/2006/math" xmlns:a14="http://schemas.microsoft.com/office/drawing/2010/main" xmlns:ma14="http://schemas.microsoft.com/office/mac/drawingml/2011/main" val="1"/>
               </a:ext>
             </a:extLst>
           </p:spPr>
@@ -10508,7 +8722,7 @@
             <a:effectLst/>
             <a:extLst>
               <a:ext uri="{C572A759-6A51-4108-AA02-DFA0A04FC94B}">
-                <ma14:wrappingTextBoxFlag xmlns:ma14="http://schemas.microsoft.com/office/mac/drawingml/2011/main" xmlns:a14="http://schemas.microsoft.com/office/drawing/2010/main" xmlns:m="http://schemas.openxmlformats.org/officeDocument/2006/math" xmlns="" val="1"/>
+                <ma14:wrappingTextBoxFlag xmlns="" xmlns:m="http://schemas.openxmlformats.org/officeDocument/2006/math" xmlns:a14="http://schemas.microsoft.com/office/drawing/2010/main" xmlns:ma14="http://schemas.microsoft.com/office/mac/drawingml/2011/main" val="1"/>
               </a:ext>
             </a:extLst>
           </p:spPr>
@@ -10558,7 +8772,7 @@
             <a:effectLst/>
             <a:extLst>
               <a:ext uri="{C572A759-6A51-4108-AA02-DFA0A04FC94B}">
-                <ma14:wrappingTextBoxFlag xmlns:ma14="http://schemas.microsoft.com/office/mac/drawingml/2011/main" xmlns:a14="http://schemas.microsoft.com/office/drawing/2010/main" xmlns:m="http://schemas.openxmlformats.org/officeDocument/2006/math" xmlns="" val="1"/>
+                <ma14:wrappingTextBoxFlag xmlns="" xmlns:m="http://schemas.openxmlformats.org/officeDocument/2006/math" xmlns:a14="http://schemas.microsoft.com/office/drawing/2010/main" xmlns:ma14="http://schemas.microsoft.com/office/mac/drawingml/2011/main" val="1"/>
               </a:ext>
             </a:extLst>
           </p:spPr>
@@ -10697,7 +8911,7 @@
             <a:effectLst/>
             <a:extLst>
               <a:ext uri="{C572A759-6A51-4108-AA02-DFA0A04FC94B}">
-                <ma14:wrappingTextBoxFlag xmlns:ma14="http://schemas.microsoft.com/office/mac/drawingml/2011/main" xmlns:a14="http://schemas.microsoft.com/office/drawing/2010/main" xmlns:m="http://schemas.openxmlformats.org/officeDocument/2006/math" xmlns="" val="1"/>
+                <ma14:wrappingTextBoxFlag xmlns="" xmlns:m="http://schemas.openxmlformats.org/officeDocument/2006/math" xmlns:a14="http://schemas.microsoft.com/office/drawing/2010/main" xmlns:ma14="http://schemas.microsoft.com/office/mac/drawingml/2011/main" val="1"/>
               </a:ext>
             </a:extLst>
           </p:spPr>
@@ -10852,7 +9066,7 @@
                 <a:effectLst/>
                 <a:extLst>
                   <a:ext uri="{C572A759-6A51-4108-AA02-DFA0A04FC94B}">
-                    <ma14:wrappingTextBoxFlag xmlns:ma14="http://schemas.microsoft.com/office/mac/drawingml/2011/main" xmlns:a14="http://schemas.microsoft.com/office/drawing/2010/main" xmlns:m="http://schemas.openxmlformats.org/officeDocument/2006/math" xmlns="" val="1"/>
+                    <ma14:wrappingTextBoxFlag xmlns="" xmlns:m="http://schemas.openxmlformats.org/officeDocument/2006/math" xmlns:a14="http://schemas.microsoft.com/office/drawing/2010/main" xmlns:ma14="http://schemas.microsoft.com/office/mac/drawingml/2011/main" val="1"/>
                   </a:ext>
                 </a:extLst>
               </p:spPr>
@@ -10937,7 +9151,7 @@
               <a:effectLst/>
               <a:extLst>
                 <a:ext uri="{C572A759-6A51-4108-AA02-DFA0A04FC94B}">
-                  <ma14:wrappingTextBoxFlag xmlns:ma14="http://schemas.microsoft.com/office/mac/drawingml/2011/main" xmlns:a14="http://schemas.microsoft.com/office/drawing/2010/main" xmlns:m="http://schemas.openxmlformats.org/officeDocument/2006/math" xmlns="" val="1"/>
+                  <ma14:wrappingTextBoxFlag xmlns="" xmlns:m="http://schemas.openxmlformats.org/officeDocument/2006/math" xmlns:a14="http://schemas.microsoft.com/office/drawing/2010/main" xmlns:ma14="http://schemas.microsoft.com/office/mac/drawingml/2011/main" val="1"/>
                 </a:ext>
               </a:extLst>
             </p:spPr>
@@ -11189,7 +9403,7 @@
 </p:sld>
 </file>
 
-<file path=ppt/slides/slide8.xml><?xml version="1.0" encoding="utf-8"?>
+<file path=ppt/slides/slide7.xml><?xml version="1.0" encoding="utf-8"?>
 <p:sld xmlns:a="http://schemas.openxmlformats.org/drawingml/2006/main" xmlns:r="http://schemas.openxmlformats.org/officeDocument/2006/relationships" xmlns:p="http://schemas.openxmlformats.org/presentationml/2006/main">
   <p:cSld>
     <p:spTree>
@@ -11358,7 +9572,7 @@
           </a:ln>
           <a:extLst>
             <a:ext uri="{C572A759-6A51-4108-AA02-DFA0A04FC94B}">
-              <ma14:wrappingTextBoxFlag xmlns:ma14="http://schemas.microsoft.com/office/mac/drawingml/2011/main" xmlns:a14="http://schemas.microsoft.com/office/drawing/2010/main" xmlns:m="http://schemas.openxmlformats.org/officeDocument/2006/math" xmlns="" val="1"/>
+              <ma14:wrappingTextBoxFlag xmlns="" xmlns:m="http://schemas.openxmlformats.org/officeDocument/2006/math" xmlns:a14="http://schemas.microsoft.com/office/drawing/2010/main" xmlns:ma14="http://schemas.microsoft.com/office/mac/drawingml/2011/main" val="1"/>
             </a:ext>
           </a:extLst>
         </p:spPr>
@@ -11479,7 +9693,7 @@
               <a:effectLst/>
               <a:extLst>
                 <a:ext uri="{C572A759-6A51-4108-AA02-DFA0A04FC94B}">
-                  <ma14:wrappingTextBoxFlag xmlns:ma14="http://schemas.microsoft.com/office/mac/drawingml/2011/main" xmlns:a14="http://schemas.microsoft.com/office/drawing/2010/main" xmlns:m="http://schemas.openxmlformats.org/officeDocument/2006/math" xmlns="" val="1"/>
+                  <ma14:wrappingTextBoxFlag xmlns="" xmlns:m="http://schemas.openxmlformats.org/officeDocument/2006/math" xmlns:a14="http://schemas.microsoft.com/office/drawing/2010/main" xmlns:ma14="http://schemas.microsoft.com/office/mac/drawingml/2011/main" val="1"/>
                 </a:ext>
               </a:extLst>
             </p:spPr>
@@ -11527,7 +9741,7 @@
             <a:effectLst/>
             <a:extLst>
               <a:ext uri="{C572A759-6A51-4108-AA02-DFA0A04FC94B}">
-                <ma14:wrappingTextBoxFlag xmlns:ma14="http://schemas.microsoft.com/office/mac/drawingml/2011/main" xmlns:a14="http://schemas.microsoft.com/office/drawing/2010/main" xmlns:m="http://schemas.openxmlformats.org/officeDocument/2006/math" xmlns="" val="1"/>
+                <ma14:wrappingTextBoxFlag xmlns="" xmlns:m="http://schemas.openxmlformats.org/officeDocument/2006/math" xmlns:a14="http://schemas.microsoft.com/office/drawing/2010/main" xmlns:ma14="http://schemas.microsoft.com/office/mac/drawingml/2011/main" val="1"/>
               </a:ext>
             </a:extLst>
           </p:spPr>
@@ -11646,7 +9860,7 @@
               <a:effectLst/>
               <a:extLst>
                 <a:ext uri="{C572A759-6A51-4108-AA02-DFA0A04FC94B}">
-                  <ma14:wrappingTextBoxFlag xmlns:ma14="http://schemas.microsoft.com/office/mac/drawingml/2011/main" xmlns:a14="http://schemas.microsoft.com/office/drawing/2010/main" xmlns:m="http://schemas.openxmlformats.org/officeDocument/2006/math" xmlns="" val="1"/>
+                  <ma14:wrappingTextBoxFlag xmlns="" xmlns:m="http://schemas.openxmlformats.org/officeDocument/2006/math" xmlns:a14="http://schemas.microsoft.com/office/drawing/2010/main" xmlns:ma14="http://schemas.microsoft.com/office/mac/drawingml/2011/main" val="1"/>
                 </a:ext>
               </a:extLst>
             </p:spPr>
@@ -11694,7 +9908,7 @@
             <a:effectLst/>
             <a:extLst>
               <a:ext uri="{C572A759-6A51-4108-AA02-DFA0A04FC94B}">
-                <ma14:wrappingTextBoxFlag xmlns:ma14="http://schemas.microsoft.com/office/mac/drawingml/2011/main" xmlns:a14="http://schemas.microsoft.com/office/drawing/2010/main" xmlns:m="http://schemas.openxmlformats.org/officeDocument/2006/math" xmlns="" val="1"/>
+                <ma14:wrappingTextBoxFlag xmlns="" xmlns:m="http://schemas.openxmlformats.org/officeDocument/2006/math" xmlns:a14="http://schemas.microsoft.com/office/drawing/2010/main" xmlns:ma14="http://schemas.microsoft.com/office/mac/drawingml/2011/main" val="1"/>
               </a:ext>
             </a:extLst>
           </p:spPr>
@@ -11813,7 +10027,7 @@
               <a:effectLst/>
               <a:extLst>
                 <a:ext uri="{C572A759-6A51-4108-AA02-DFA0A04FC94B}">
-                  <ma14:wrappingTextBoxFlag xmlns:ma14="http://schemas.microsoft.com/office/mac/drawingml/2011/main" xmlns:a14="http://schemas.microsoft.com/office/drawing/2010/main" xmlns:m="http://schemas.openxmlformats.org/officeDocument/2006/math" xmlns="" val="1"/>
+                  <ma14:wrappingTextBoxFlag xmlns="" xmlns:m="http://schemas.openxmlformats.org/officeDocument/2006/math" xmlns:a14="http://schemas.microsoft.com/office/drawing/2010/main" xmlns:ma14="http://schemas.microsoft.com/office/mac/drawingml/2011/main" val="1"/>
                 </a:ext>
               </a:extLst>
             </p:spPr>
@@ -11861,7 +10075,7 @@
             <a:effectLst/>
             <a:extLst>
               <a:ext uri="{C572A759-6A51-4108-AA02-DFA0A04FC94B}">
-                <ma14:wrappingTextBoxFlag xmlns:ma14="http://schemas.microsoft.com/office/mac/drawingml/2011/main" xmlns:a14="http://schemas.microsoft.com/office/drawing/2010/main" xmlns:m="http://schemas.openxmlformats.org/officeDocument/2006/math" xmlns="" val="1"/>
+                <ma14:wrappingTextBoxFlag xmlns="" xmlns:m="http://schemas.openxmlformats.org/officeDocument/2006/math" xmlns:a14="http://schemas.microsoft.com/office/drawing/2010/main" xmlns:ma14="http://schemas.microsoft.com/office/mac/drawingml/2011/main" val="1"/>
               </a:ext>
             </a:extLst>
           </p:spPr>
@@ -11906,7 +10120,7 @@
           </a:ln>
           <a:extLst>
             <a:ext uri="{C572A759-6A51-4108-AA02-DFA0A04FC94B}">
-              <ma14:wrappingTextBoxFlag xmlns:ma14="http://schemas.microsoft.com/office/mac/drawingml/2011/main" xmlns:a14="http://schemas.microsoft.com/office/drawing/2010/main" xmlns:m="http://schemas.openxmlformats.org/officeDocument/2006/math" xmlns="" val="1"/>
+              <ma14:wrappingTextBoxFlag xmlns="" xmlns:m="http://schemas.openxmlformats.org/officeDocument/2006/math" xmlns:a14="http://schemas.microsoft.com/office/drawing/2010/main" xmlns:ma14="http://schemas.microsoft.com/office/mac/drawingml/2011/main" val="1"/>
             </a:ext>
           </a:extLst>
         </p:spPr>
@@ -11950,7 +10164,7 @@
           </a:ln>
           <a:extLst>
             <a:ext uri="{C572A759-6A51-4108-AA02-DFA0A04FC94B}">
-              <ma14:wrappingTextBoxFlag xmlns:ma14="http://schemas.microsoft.com/office/mac/drawingml/2011/main" xmlns:a14="http://schemas.microsoft.com/office/drawing/2010/main" xmlns:m="http://schemas.openxmlformats.org/officeDocument/2006/math" xmlns="" val="1"/>
+              <ma14:wrappingTextBoxFlag xmlns="" xmlns:m="http://schemas.openxmlformats.org/officeDocument/2006/math" xmlns:a14="http://schemas.microsoft.com/office/drawing/2010/main" xmlns:ma14="http://schemas.microsoft.com/office/mac/drawingml/2011/main" val="1"/>
             </a:ext>
           </a:extLst>
         </p:spPr>
@@ -11994,7 +10208,7 @@
           </a:ln>
           <a:extLst>
             <a:ext uri="{C572A759-6A51-4108-AA02-DFA0A04FC94B}">
-              <ma14:wrappingTextBoxFlag xmlns:ma14="http://schemas.microsoft.com/office/mac/drawingml/2011/main" xmlns:a14="http://schemas.microsoft.com/office/drawing/2010/main" xmlns:m="http://schemas.openxmlformats.org/officeDocument/2006/math" xmlns="" val="1"/>
+              <ma14:wrappingTextBoxFlag xmlns="" xmlns:m="http://schemas.openxmlformats.org/officeDocument/2006/math" xmlns:a14="http://schemas.microsoft.com/office/drawing/2010/main" xmlns:ma14="http://schemas.microsoft.com/office/mac/drawingml/2011/main" val="1"/>
             </a:ext>
           </a:extLst>
         </p:spPr>
@@ -12031,7 +10245,7 @@
 </p:sld>
 </file>
 
-<file path=ppt/slides/slide9.xml><?xml version="1.0" encoding="utf-8"?>
+<file path=ppt/slides/slide8.xml><?xml version="1.0" encoding="utf-8"?>
 <p:sld xmlns:a="http://schemas.openxmlformats.org/drawingml/2006/main" xmlns:r="http://schemas.openxmlformats.org/officeDocument/2006/relationships" xmlns:p="http://schemas.openxmlformats.org/presentationml/2006/main">
   <p:cSld>
     <p:spTree>
@@ -12348,7 +10562,7 @@
             <a:effectLst/>
             <a:extLst>
               <a:ext uri="{C572A759-6A51-4108-AA02-DFA0A04FC94B}">
-                <ma14:wrappingTextBoxFlag xmlns:ma14="http://schemas.microsoft.com/office/mac/drawingml/2011/main" xmlns:a14="http://schemas.microsoft.com/office/drawing/2010/main" xmlns:m="http://schemas.openxmlformats.org/officeDocument/2006/math" xmlns="" val="1"/>
+                <ma14:wrappingTextBoxFlag xmlns="" xmlns:m="http://schemas.openxmlformats.org/officeDocument/2006/math" xmlns:a14="http://schemas.microsoft.com/office/drawing/2010/main" xmlns:ma14="http://schemas.microsoft.com/office/mac/drawingml/2011/main" val="1"/>
               </a:ext>
             </a:extLst>
           </p:spPr>
@@ -12643,7 +10857,7 @@
                 <a:effectLst/>
                 <a:extLst>
                   <a:ext uri="{C572A759-6A51-4108-AA02-DFA0A04FC94B}">
-                    <ma14:wrappingTextBoxFlag xmlns:ma14="http://schemas.microsoft.com/office/mac/drawingml/2011/main" xmlns:a14="http://schemas.microsoft.com/office/drawing/2010/main" xmlns:m="http://schemas.openxmlformats.org/officeDocument/2006/math" xmlns="" val="1"/>
+                    <ma14:wrappingTextBoxFlag xmlns="" xmlns:m="http://schemas.openxmlformats.org/officeDocument/2006/math" xmlns:a14="http://schemas.microsoft.com/office/drawing/2010/main" xmlns:ma14="http://schemas.microsoft.com/office/mac/drawingml/2011/main" val="1"/>
                   </a:ext>
                 </a:extLst>
               </p:spPr>
@@ -12756,6 +10970,1527 @@
           </a:ln>
         </p:spPr>
       </p:pic>
+    </p:spTree>
+  </p:cSld>
+  <p:clrMapOvr>
+    <a:masterClrMapping/>
+  </p:clrMapOvr>
+  <p:transition spd="med"/>
+</p:sld>
+</file>
+
+<file path=ppt/slides/slide9.xml><?xml version="1.0" encoding="utf-8"?>
+<p:sld xmlns:a="http://schemas.openxmlformats.org/drawingml/2006/main" xmlns:r="http://schemas.openxmlformats.org/officeDocument/2006/relationships" xmlns:p="http://schemas.openxmlformats.org/presentationml/2006/main">
+  <p:cSld>
+    <p:spTree>
+      <p:nvGrpSpPr>
+        <p:cNvPr id="1" name=""/>
+        <p:cNvGrpSpPr/>
+        <p:nvPr/>
+      </p:nvGrpSpPr>
+      <p:grpSpPr>
+        <a:xfrm>
+          <a:off x="0" y="0"/>
+          <a:ext cx="0" cy="0"/>
+          <a:chOff x="0" y="0"/>
+          <a:chExt cx="0" cy="0"/>
+        </a:xfrm>
+      </p:grpSpPr>
+      <p:pic>
+        <p:nvPicPr>
+          <p:cNvPr id="290" name="Fond OM" descr="Fond OM"/>
+          <p:cNvPicPr>
+            <a:picLocks noChangeAspect="1"/>
+          </p:cNvPicPr>
+          <p:nvPr/>
+        </p:nvPicPr>
+        <p:blipFill>
+          <a:blip r:embed="rId2"/>
+          <a:srcRect t="7813" b="7812"/>
+          <a:stretch>
+            <a:fillRect/>
+          </a:stretch>
+        </p:blipFill>
+        <p:spPr>
+          <a:xfrm>
+            <a:off x="0" y="0"/>
+            <a:ext cx="9144000" cy="5143500"/>
+          </a:xfrm>
+          <a:prstGeom prst="rect">
+            <a:avLst/>
+          </a:prstGeom>
+          <a:ln w="12700">
+            <a:miter lim="400000"/>
+          </a:ln>
+        </p:spPr>
+      </p:pic>
+      <p:sp>
+        <p:nvSpPr>
+          <p:cNvPr id="291" name="Zone API-Front"/>
+          <p:cNvSpPr/>
+          <p:nvPr/>
+        </p:nvSpPr>
+        <p:spPr>
+          <a:xfrm>
+            <a:off x="4857472" y="1433652"/>
+            <a:ext cx="3777005" cy="3123615"/>
+          </a:xfrm>
+          <a:prstGeom prst="roundRect">
+            <a:avLst>
+              <a:gd name="adj" fmla="val 5500"/>
+            </a:avLst>
+          </a:prstGeom>
+          <a:ln w="28575" cap="rnd">
+            <a:solidFill>
+              <a:srgbClr val="0FB2BE"/>
+            </a:solidFill>
+          </a:ln>
+          <a:effectLst>
+            <a:outerShdw blurRad="76200" dist="20000" dir="5400000" rotWithShape="0">
+              <a:srgbClr val="0E3449">
+                <a:alpha val="16000"/>
+              </a:srgbClr>
+            </a:outerShdw>
+          </a:effectLst>
+        </p:spPr>
+        <p:txBody>
+          <a:bodyPr lIns="45718" tIns="45718" rIns="45718" bIns="45718"/>
+          <a:lstStyle/>
+          <a:p>
+            <a:pPr>
+              <a:defRPr>
+                <a:latin typeface="+mj-lt"/>
+                <a:ea typeface="+mj-ea"/>
+                <a:cs typeface="+mj-cs"/>
+                <a:sym typeface="Arial"/>
+              </a:defRPr>
+            </a:pPr>
+            <a:endParaRPr/>
+          </a:p>
+        </p:txBody>
+      </p:sp>
+      <p:sp>
+        <p:nvSpPr>
+          <p:cNvPr id="292" name="Google Shape;75;p16"/>
+          <p:cNvSpPr txBox="1">
+            <a:spLocks noGrp="1"/>
+          </p:cNvSpPr>
+          <p:nvPr>
+            <p:ph type="title"/>
+          </p:nvPr>
+        </p:nvSpPr>
+        <p:spPr>
+          <a:xfrm>
+            <a:off x="1192661" y="403307"/>
+            <a:ext cx="5315108" cy="533106"/>
+          </a:xfrm>
+          <a:prstGeom prst="rect">
+            <a:avLst/>
+          </a:prstGeom>
+        </p:spPr>
+        <p:txBody>
+          <a:bodyPr anchor="ctr"/>
+          <a:lstStyle>
+            <a:lvl1pPr defTabSz="822958">
+              <a:defRPr sz="2200">
+                <a:solidFill>
+                  <a:srgbClr val="0E3449"/>
+                </a:solidFill>
+                <a:latin typeface="Inter SemiBold"/>
+                <a:ea typeface="Inter SemiBold"/>
+                <a:cs typeface="Inter SemiBold"/>
+                <a:sym typeface="Inter SemiBold"/>
+              </a:defRPr>
+            </a:lvl1pPr>
+          </a:lstStyle>
+          <a:p>
+            <a:r>
+              <a:t>Architecture - Inference</a:t>
+            </a:r>
+          </a:p>
+        </p:txBody>
+      </p:sp>
+      <p:pic>
+        <p:nvPicPr>
+          <p:cNvPr id="293" name="Google Shape;76;p16" descr="Google Shape;76;p16"/>
+          <p:cNvPicPr>
+            <a:picLocks noChangeAspect="1"/>
+          </p:cNvPicPr>
+          <p:nvPr/>
+        </p:nvPicPr>
+        <p:blipFill>
+          <a:blip r:embed="rId3"/>
+          <a:stretch>
+            <a:fillRect/>
+          </a:stretch>
+        </p:blipFill>
+        <p:spPr>
+          <a:xfrm>
+            <a:off x="463375" y="482852"/>
+            <a:ext cx="576901" cy="385909"/>
+          </a:xfrm>
+          <a:prstGeom prst="rect">
+            <a:avLst/>
+          </a:prstGeom>
+          <a:ln w="12700">
+            <a:miter lim="400000"/>
+          </a:ln>
+        </p:spPr>
+      </p:pic>
+      <p:sp>
+        <p:nvSpPr>
+          <p:cNvPr id="294" name="Google Shape;77;p16"/>
+          <p:cNvSpPr/>
+          <p:nvPr/>
+        </p:nvSpPr>
+        <p:spPr>
+          <a:xfrm>
+            <a:off x="10224" y="4892025"/>
+            <a:ext cx="9144001" cy="251400"/>
+          </a:xfrm>
+          <a:prstGeom prst="rect">
+            <a:avLst/>
+          </a:prstGeom>
+          <a:solidFill>
+            <a:srgbClr val="C3FFFC"/>
+          </a:solidFill>
+          <a:ln w="12700">
+            <a:miter lim="400000"/>
+          </a:ln>
+        </p:spPr>
+        <p:txBody>
+          <a:bodyPr lIns="45718" tIns="45718" rIns="45718" bIns="45718" anchor="ctr"/>
+          <a:lstStyle/>
+          <a:p>
+            <a:pPr>
+              <a:defRPr>
+                <a:latin typeface="+mj-lt"/>
+                <a:ea typeface="+mj-ea"/>
+                <a:cs typeface="+mj-cs"/>
+                <a:sym typeface="Arial"/>
+              </a:defRPr>
+            </a:pPr>
+            <a:endParaRPr/>
+          </a:p>
+        </p:txBody>
+      </p:sp>
+      <p:pic>
+        <p:nvPicPr>
+          <p:cNvPr id="295" name="Image 19" descr="Image 19"/>
+          <p:cNvPicPr>
+            <a:picLocks noChangeAspect="1"/>
+          </p:cNvPicPr>
+          <p:nvPr/>
+        </p:nvPicPr>
+        <p:blipFill>
+          <a:blip r:embed="rId4"/>
+          <a:stretch>
+            <a:fillRect/>
+          </a:stretch>
+        </p:blipFill>
+        <p:spPr>
+          <a:xfrm>
+            <a:off x="5074482" y="1035810"/>
+            <a:ext cx="1010884" cy="319064"/>
+          </a:xfrm>
+          <a:prstGeom prst="rect">
+            <a:avLst/>
+          </a:prstGeom>
+          <a:ln w="12700">
+            <a:miter lim="400000"/>
+          </a:ln>
+        </p:spPr>
+      </p:pic>
+      <p:grpSp>
+        <p:nvGrpSpPr>
+          <p:cNvPr id="298" name="Groupe 83"/>
+          <p:cNvGrpSpPr/>
+          <p:nvPr/>
+        </p:nvGrpSpPr>
+        <p:grpSpPr>
+          <a:xfrm>
+            <a:off x="372627" y="3143063"/>
+            <a:ext cx="1143113" cy="1543948"/>
+            <a:chOff x="-1" y="-1"/>
+            <a:chExt cx="1143111" cy="1543947"/>
+          </a:xfrm>
+        </p:grpSpPr>
+        <p:pic>
+          <p:nvPicPr>
+            <p:cNvPr id="296" name="Image 11" descr="Image 11"/>
+            <p:cNvPicPr>
+              <a:picLocks noChangeAspect="1"/>
+            </p:cNvPicPr>
+            <p:nvPr/>
+          </p:nvPicPr>
+          <p:blipFill>
+            <a:blip r:embed="rId5"/>
+            <a:stretch>
+              <a:fillRect/>
+            </a:stretch>
+          </p:blipFill>
+          <p:spPr>
+            <a:xfrm>
+              <a:off x="-2" y="324632"/>
+              <a:ext cx="1143113" cy="1219315"/>
+            </a:xfrm>
+            <a:prstGeom prst="rect">
+              <a:avLst/>
+            </a:prstGeom>
+            <a:ln w="12700" cap="flat">
+              <a:noFill/>
+              <a:miter lim="400000"/>
+            </a:ln>
+            <a:effectLst/>
+          </p:spPr>
+        </p:pic>
+        <p:pic>
+          <p:nvPicPr>
+            <p:cNvPr id="297" name="Image 23" descr="Image 23"/>
+            <p:cNvPicPr>
+              <a:picLocks noChangeAspect="1"/>
+            </p:cNvPicPr>
+            <p:nvPr/>
+          </p:nvPicPr>
+          <p:blipFill>
+            <a:blip r:embed="rId6"/>
+            <a:stretch>
+              <a:fillRect/>
+            </a:stretch>
+          </p:blipFill>
+          <p:spPr>
+            <a:xfrm>
+              <a:off x="204526" y="-2"/>
+              <a:ext cx="844698" cy="530704"/>
+            </a:xfrm>
+            <a:prstGeom prst="rect">
+              <a:avLst/>
+            </a:prstGeom>
+            <a:ln w="12700" cap="flat">
+              <a:noFill/>
+              <a:miter lim="400000"/>
+            </a:ln>
+            <a:effectLst/>
+          </p:spPr>
+        </p:pic>
+      </p:grpSp>
+      <p:sp>
+        <p:nvSpPr>
+          <p:cNvPr id="299" name="Fleche FastAPI vers LLM"/>
+          <p:cNvSpPr/>
+          <p:nvPr/>
+        </p:nvSpPr>
+        <p:spPr>
+          <a:xfrm flipV="1">
+            <a:off x="5789912" y="3528815"/>
+            <a:ext cx="1337340" cy="425772"/>
+          </a:xfrm>
+          <a:prstGeom prst="line">
+            <a:avLst/>
+          </a:prstGeom>
+          <a:ln w="19050" cap="rnd">
+            <a:solidFill>
+              <a:srgbClr val="015955"/>
+            </a:solidFill>
+            <a:tailEnd type="triangle"/>
+          </a:ln>
+        </p:spPr>
+        <p:txBody>
+          <a:bodyPr lIns="45718" tIns="45718" rIns="45718" bIns="45718"/>
+          <a:lstStyle/>
+          <a:p>
+            <a:endParaRPr/>
+          </a:p>
+        </p:txBody>
+      </p:sp>
+      <p:sp>
+        <p:nvSpPr>
+          <p:cNvPr id="300" name="Fleche FastAPI vers App"/>
+          <p:cNvSpPr/>
+          <p:nvPr/>
+        </p:nvSpPr>
+        <p:spPr>
+          <a:xfrm flipV="1">
+            <a:off x="2994767" y="2074135"/>
+            <a:ext cx="125592" cy="297453"/>
+          </a:xfrm>
+          <a:prstGeom prst="line">
+            <a:avLst/>
+          </a:prstGeom>
+          <a:ln w="19050" cap="rnd">
+            <a:solidFill>
+              <a:srgbClr val="015955"/>
+            </a:solidFill>
+            <a:tailEnd type="triangle"/>
+          </a:ln>
+        </p:spPr>
+        <p:txBody>
+          <a:bodyPr lIns="45718" tIns="45718" rIns="45718" bIns="45718"/>
+          <a:lstStyle/>
+          <a:p>
+            <a:endParaRPr/>
+          </a:p>
+        </p:txBody>
+      </p:sp>
+      <p:sp>
+        <p:nvSpPr>
+          <p:cNvPr id="301" name="Fleche FastAPI vers App"/>
+          <p:cNvSpPr/>
+          <p:nvPr/>
+        </p:nvSpPr>
+        <p:spPr>
+          <a:xfrm flipV="1">
+            <a:off x="4321883" y="4040701"/>
+            <a:ext cx="710217" cy="62687"/>
+          </a:xfrm>
+          <a:prstGeom prst="line">
+            <a:avLst/>
+          </a:prstGeom>
+          <a:ln w="19050" cap="rnd">
+            <a:solidFill>
+              <a:srgbClr val="015955"/>
+            </a:solidFill>
+            <a:tailEnd type="triangle"/>
+          </a:ln>
+        </p:spPr>
+        <p:txBody>
+          <a:bodyPr lIns="45718" tIns="45718" rIns="45718" bIns="45718"/>
+          <a:lstStyle/>
+          <a:p>
+            <a:endParaRPr/>
+          </a:p>
+        </p:txBody>
+      </p:sp>
+      <p:sp>
+        <p:nvSpPr>
+          <p:cNvPr id="302" name="Fleche FastAPI vers App"/>
+          <p:cNvSpPr/>
+          <p:nvPr/>
+        </p:nvSpPr>
+        <p:spPr>
+          <a:xfrm flipV="1">
+            <a:off x="3104418" y="2995964"/>
+            <a:ext cx="1887400" cy="58199"/>
+          </a:xfrm>
+          <a:prstGeom prst="line">
+            <a:avLst/>
+          </a:prstGeom>
+          <a:ln w="19050" cap="rnd">
+            <a:solidFill>
+              <a:srgbClr val="015955"/>
+            </a:solidFill>
+            <a:tailEnd type="triangle"/>
+          </a:ln>
+        </p:spPr>
+        <p:txBody>
+          <a:bodyPr lIns="45718" tIns="45718" rIns="45718" bIns="45718"/>
+          <a:lstStyle/>
+          <a:p>
+            <a:endParaRPr/>
+          </a:p>
+        </p:txBody>
+      </p:sp>
+      <p:sp>
+        <p:nvSpPr>
+          <p:cNvPr id="303" name="Fleche FastAPI vers Render"/>
+          <p:cNvSpPr/>
+          <p:nvPr/>
+        </p:nvSpPr>
+        <p:spPr>
+          <a:xfrm>
+            <a:off x="3935236" y="1606811"/>
+            <a:ext cx="1139250" cy="201293"/>
+          </a:xfrm>
+          <a:prstGeom prst="line">
+            <a:avLst/>
+          </a:prstGeom>
+          <a:ln w="19050" cap="rnd">
+            <a:solidFill>
+              <a:srgbClr val="015955"/>
+            </a:solidFill>
+            <a:tailEnd type="triangle"/>
+          </a:ln>
+        </p:spPr>
+        <p:txBody>
+          <a:bodyPr lIns="45718" tIns="45718" rIns="45718" bIns="45718"/>
+          <a:lstStyle/>
+          <a:p>
+            <a:endParaRPr/>
+          </a:p>
+        </p:txBody>
+      </p:sp>
+      <p:sp>
+        <p:nvSpPr>
+          <p:cNvPr id="304" name="Fleche FastAPI vers LLM"/>
+          <p:cNvSpPr/>
+          <p:nvPr/>
+        </p:nvSpPr>
+        <p:spPr>
+          <a:xfrm>
+            <a:off x="5788223" y="1974294"/>
+            <a:ext cx="1339028" cy="989341"/>
+          </a:xfrm>
+          <a:prstGeom prst="line">
+            <a:avLst/>
+          </a:prstGeom>
+          <a:ln w="19050" cap="rnd">
+            <a:solidFill>
+              <a:srgbClr val="015955"/>
+            </a:solidFill>
+            <a:tailEnd type="triangle"/>
+          </a:ln>
+        </p:spPr>
+        <p:txBody>
+          <a:bodyPr lIns="45718" tIns="45718" rIns="45718" bIns="45718"/>
+          <a:lstStyle/>
+          <a:p>
+            <a:endParaRPr/>
+          </a:p>
+        </p:txBody>
+      </p:sp>
+      <p:sp>
+        <p:nvSpPr>
+          <p:cNvPr id="305" name="Fleche FastAPI vers LLM"/>
+          <p:cNvSpPr/>
+          <p:nvPr/>
+        </p:nvSpPr>
+        <p:spPr>
+          <a:xfrm>
+            <a:off x="6176093" y="3086255"/>
+            <a:ext cx="951157" cy="174367"/>
+          </a:xfrm>
+          <a:prstGeom prst="line">
+            <a:avLst/>
+          </a:prstGeom>
+          <a:ln w="19050" cap="rnd">
+            <a:solidFill>
+              <a:srgbClr val="015955"/>
+            </a:solidFill>
+            <a:tailEnd type="triangle"/>
+          </a:ln>
+        </p:spPr>
+        <p:txBody>
+          <a:bodyPr lIns="45718" tIns="45718" rIns="45718" bIns="45718"/>
+          <a:lstStyle/>
+          <a:p>
+            <a:endParaRPr/>
+          </a:p>
+        </p:txBody>
+      </p:sp>
+      <p:sp>
+        <p:nvSpPr>
+          <p:cNvPr id="306" name="Fleche FastAPI vers Render"/>
+          <p:cNvSpPr/>
+          <p:nvPr/>
+        </p:nvSpPr>
+        <p:spPr>
+          <a:xfrm>
+            <a:off x="1515729" y="3970582"/>
+            <a:ext cx="1297267" cy="126075"/>
+          </a:xfrm>
+          <a:prstGeom prst="line">
+            <a:avLst/>
+          </a:prstGeom>
+          <a:ln w="19050" cap="rnd">
+            <a:solidFill>
+              <a:srgbClr val="015955"/>
+            </a:solidFill>
+            <a:tailEnd type="triangle"/>
+          </a:ln>
+        </p:spPr>
+        <p:txBody>
+          <a:bodyPr lIns="45718" tIns="45718" rIns="45718" bIns="45718"/>
+          <a:lstStyle/>
+          <a:p>
+            <a:endParaRPr/>
+          </a:p>
+        </p:txBody>
+      </p:sp>
+      <p:grpSp>
+        <p:nvGrpSpPr>
+          <p:cNvPr id="309" name="Groupe 91"/>
+          <p:cNvGrpSpPr/>
+          <p:nvPr/>
+        </p:nvGrpSpPr>
+        <p:grpSpPr>
+          <a:xfrm>
+            <a:off x="2298216" y="2371578"/>
+            <a:ext cx="806211" cy="1390023"/>
+            <a:chOff x="0" y="-1"/>
+            <a:chExt cx="806209" cy="1390022"/>
+          </a:xfrm>
+        </p:grpSpPr>
+        <p:pic>
+          <p:nvPicPr>
+            <p:cNvPr id="307" name="Image 15" descr="Image 15"/>
+            <p:cNvPicPr>
+              <a:picLocks noChangeAspect="1"/>
+            </p:cNvPicPr>
+            <p:nvPr/>
+          </p:nvPicPr>
+          <p:blipFill>
+            <a:blip r:embed="rId7"/>
+            <a:stretch>
+              <a:fillRect/>
+            </a:stretch>
+          </p:blipFill>
+          <p:spPr>
+            <a:xfrm>
+              <a:off x="-1" y="-2"/>
+              <a:ext cx="759829" cy="698374"/>
+            </a:xfrm>
+            <a:prstGeom prst="rect">
+              <a:avLst/>
+            </a:prstGeom>
+            <a:ln w="12700" cap="flat">
+              <a:noFill/>
+              <a:miter lim="400000"/>
+            </a:ln>
+            <a:effectLst/>
+          </p:spPr>
+        </p:pic>
+        <p:pic>
+          <p:nvPicPr>
+            <p:cNvPr id="308" name="Image 90" descr="Image 90"/>
+            <p:cNvPicPr>
+              <a:picLocks noChangeAspect="1"/>
+            </p:cNvPicPr>
+            <p:nvPr/>
+          </p:nvPicPr>
+          <p:blipFill>
+            <a:blip r:embed="rId8"/>
+            <a:stretch>
+              <a:fillRect/>
+            </a:stretch>
+          </p:blipFill>
+          <p:spPr>
+            <a:xfrm>
+              <a:off x="46381" y="611661"/>
+              <a:ext cx="759829" cy="778361"/>
+            </a:xfrm>
+            <a:prstGeom prst="rect">
+              <a:avLst/>
+            </a:prstGeom>
+            <a:ln w="12700" cap="flat">
+              <a:noFill/>
+              <a:miter lim="400000"/>
+            </a:ln>
+            <a:effectLst/>
+          </p:spPr>
+        </p:pic>
+      </p:grpSp>
+      <p:pic>
+        <p:nvPicPr>
+          <p:cNvPr id="310" name="Image 93" descr="Image 93"/>
+          <p:cNvPicPr>
+            <a:picLocks noChangeAspect="1"/>
+          </p:cNvPicPr>
+          <p:nvPr/>
+        </p:nvPicPr>
+        <p:blipFill>
+          <a:blip r:embed="rId9"/>
+          <a:stretch>
+            <a:fillRect/>
+          </a:stretch>
+        </p:blipFill>
+        <p:spPr>
+          <a:xfrm>
+            <a:off x="7307905" y="328872"/>
+            <a:ext cx="707871" cy="681975"/>
+          </a:xfrm>
+          <a:prstGeom prst="rect">
+            <a:avLst/>
+          </a:prstGeom>
+          <a:ln w="12700">
+            <a:miter lim="400000"/>
+          </a:ln>
+        </p:spPr>
+      </p:pic>
+      <p:sp>
+        <p:nvSpPr>
+          <p:cNvPr id="311" name="Fleche FastAPI vers Render"/>
+          <p:cNvSpPr/>
+          <p:nvPr/>
+        </p:nvSpPr>
+        <p:spPr>
+          <a:xfrm flipH="1">
+            <a:off x="6015517" y="979022"/>
+            <a:ext cx="1652007" cy="216319"/>
+          </a:xfrm>
+          <a:prstGeom prst="line">
+            <a:avLst/>
+          </a:prstGeom>
+          <a:ln w="19050" cap="rnd">
+            <a:solidFill>
+              <a:srgbClr val="015955"/>
+            </a:solidFill>
+            <a:tailEnd type="triangle"/>
+          </a:ln>
+        </p:spPr>
+        <p:txBody>
+          <a:bodyPr lIns="45718" tIns="45718" rIns="45718" bIns="45718"/>
+          <a:lstStyle/>
+          <a:p>
+            <a:endParaRPr/>
+          </a:p>
+        </p:txBody>
+      </p:sp>
+      <p:grpSp>
+        <p:nvGrpSpPr>
+          <p:cNvPr id="318" name="Groupe 212"/>
+          <p:cNvGrpSpPr/>
+          <p:nvPr/>
+        </p:nvGrpSpPr>
+        <p:grpSpPr>
+          <a:xfrm>
+            <a:off x="2812990" y="3443890"/>
+            <a:ext cx="1508909" cy="1452153"/>
+            <a:chOff x="-1" y="-1"/>
+            <a:chExt cx="1508908" cy="1452152"/>
+          </a:xfrm>
+        </p:grpSpPr>
+        <p:grpSp>
+          <p:nvGrpSpPr>
+            <p:cNvPr id="316" name="Groupe 52"/>
+            <p:cNvGrpSpPr/>
+            <p:nvPr/>
+          </p:nvGrpSpPr>
+          <p:grpSpPr>
+            <a:xfrm>
+              <a:off x="-2" y="-2"/>
+              <a:ext cx="1508909" cy="1452153"/>
+              <a:chOff x="0" y="-1"/>
+              <a:chExt cx="1508908" cy="1452152"/>
+            </a:xfrm>
+          </p:grpSpPr>
+          <p:grpSp>
+            <p:nvGrpSpPr>
+              <p:cNvPr id="314" name="Groupe 7"/>
+              <p:cNvGrpSpPr/>
+              <p:nvPr/>
+            </p:nvGrpSpPr>
+            <p:grpSpPr>
+              <a:xfrm>
+                <a:off x="-1" y="401256"/>
+                <a:ext cx="1508909" cy="1050896"/>
+                <a:chOff x="0" y="-1"/>
+                <a:chExt cx="1508908" cy="1050894"/>
+              </a:xfrm>
+            </p:grpSpPr>
+            <p:pic>
+              <p:nvPicPr>
+                <p:cNvPr id="312" name="Image 8" descr="Image 8"/>
+                <p:cNvPicPr>
+                  <a:picLocks noChangeAspect="1"/>
+                </p:cNvPicPr>
+                <p:nvPr/>
+              </p:nvPicPr>
+              <p:blipFill>
+                <a:blip r:embed="rId10"/>
+                <a:stretch>
+                  <a:fillRect/>
+                </a:stretch>
+              </p:blipFill>
+              <p:spPr>
+                <a:xfrm>
+                  <a:off x="0" y="-2"/>
+                  <a:ext cx="1508909" cy="762081"/>
+                </a:xfrm>
+                <a:prstGeom prst="rect">
+                  <a:avLst/>
+                </a:prstGeom>
+                <a:ln w="12700" cap="flat">
+                  <a:noFill/>
+                  <a:miter lim="400000"/>
+                </a:ln>
+                <a:effectLst/>
+              </p:spPr>
+            </p:pic>
+            <p:sp>
+              <p:nvSpPr>
+                <p:cNvPr id="313" name="ZoneTexte 9"/>
+                <p:cNvSpPr txBox="1"/>
+                <p:nvPr/>
+              </p:nvSpPr>
+              <p:spPr>
+                <a:xfrm>
+                  <a:off x="345740" y="762074"/>
+                  <a:ext cx="588399" cy="288820"/>
+                </a:xfrm>
+                <a:prstGeom prst="rect">
+                  <a:avLst/>
+                </a:prstGeom>
+                <a:noFill/>
+                <a:ln w="12700" cap="flat">
+                  <a:noFill/>
+                  <a:miter lim="400000"/>
+                </a:ln>
+                <a:effectLst/>
+                <a:extLst>
+                  <a:ext uri="{C572A759-6A51-4108-AA02-DFA0A04FC94B}">
+                    <ma14:wrappingTextBoxFlag xmlns="" xmlns:m="http://schemas.openxmlformats.org/officeDocument/2006/math" xmlns:a14="http://schemas.microsoft.com/office/drawing/2010/main" xmlns:ma14="http://schemas.microsoft.com/office/mac/drawingml/2011/main" val="1"/>
+                  </a:ext>
+                </a:extLst>
+              </p:spPr>
+              <p:txBody>
+                <a:bodyPr wrap="none" lIns="45718" tIns="45718" rIns="45718" bIns="45718" numCol="1" anchor="t">
+                  <a:spAutoFit/>
+                </a:bodyPr>
+                <a:lstStyle>
+                  <a:lvl1pPr>
+                    <a:defRPr>
+                      <a:latin typeface="+mj-lt"/>
+                      <a:ea typeface="+mj-ea"/>
+                      <a:cs typeface="+mj-cs"/>
+                      <a:sym typeface="Arial"/>
+                    </a:defRPr>
+                  </a:lvl1pPr>
+                </a:lstStyle>
+                <a:p>
+                  <a:r>
+                    <a:t>Model</a:t>
+                  </a:r>
+                </a:p>
+              </p:txBody>
+            </p:sp>
+          </p:grpSp>
+          <p:pic>
+            <p:nvPicPr>
+              <p:cNvPr id="315" name="Image 21" descr="Image 21"/>
+              <p:cNvPicPr>
+                <a:picLocks noChangeAspect="1"/>
+              </p:cNvPicPr>
+              <p:nvPr/>
+            </p:nvPicPr>
+            <p:blipFill>
+              <a:blip r:embed="rId11"/>
+              <a:stretch>
+                <a:fillRect/>
+              </a:stretch>
+            </p:blipFill>
+            <p:spPr>
+              <a:xfrm>
+                <a:off x="422991" y="-2"/>
+                <a:ext cx="728066" cy="599041"/>
+              </a:xfrm>
+              <a:prstGeom prst="rect">
+                <a:avLst/>
+              </a:prstGeom>
+              <a:ln w="12700" cap="flat">
+                <a:noFill/>
+                <a:miter lim="400000"/>
+              </a:ln>
+              <a:effectLst/>
+            </p:spPr>
+          </p:pic>
+        </p:grpSp>
+        <p:pic>
+          <p:nvPicPr>
+            <p:cNvPr id="317" name="Image 126" descr="Image 126"/>
+            <p:cNvPicPr>
+              <a:picLocks noChangeAspect="1"/>
+            </p:cNvPicPr>
+            <p:nvPr/>
+          </p:nvPicPr>
+          <p:blipFill>
+            <a:blip r:embed="rId12"/>
+            <a:stretch>
+              <a:fillRect/>
+            </a:stretch>
+          </p:blipFill>
+          <p:spPr>
+            <a:xfrm>
+              <a:off x="1086755" y="271675"/>
+              <a:ext cx="351252" cy="213380"/>
+            </a:xfrm>
+            <a:prstGeom prst="rect">
+              <a:avLst/>
+            </a:prstGeom>
+            <a:ln w="12700" cap="flat">
+              <a:noFill/>
+              <a:miter lim="400000"/>
+            </a:ln>
+            <a:effectLst/>
+          </p:spPr>
+        </p:pic>
+      </p:grpSp>
+      <p:grpSp>
+        <p:nvGrpSpPr>
+          <p:cNvPr id="323" name="Groupe 203"/>
+          <p:cNvGrpSpPr/>
+          <p:nvPr/>
+        </p:nvGrpSpPr>
+        <p:grpSpPr>
+          <a:xfrm>
+            <a:off x="5074475" y="1489790"/>
+            <a:ext cx="1284881" cy="863624"/>
+            <a:chOff x="-1" y="-1"/>
+            <a:chExt cx="1284880" cy="863622"/>
+          </a:xfrm>
+        </p:grpSpPr>
+        <p:sp>
+          <p:nvSpPr>
+            <p:cNvPr id="319" name="ZoneTexte 119"/>
+            <p:cNvSpPr txBox="1"/>
+            <p:nvPr/>
+          </p:nvSpPr>
+          <p:spPr>
+            <a:xfrm>
+              <a:off x="281172" y="556284"/>
+              <a:ext cx="1003707" cy="307337"/>
+            </a:xfrm>
+            <a:prstGeom prst="rect">
+              <a:avLst/>
+            </a:prstGeom>
+            <a:noFill/>
+            <a:ln w="12700" cap="flat">
+              <a:noFill/>
+              <a:miter lim="400000"/>
+            </a:ln>
+            <a:effectLst/>
+            <a:extLst>
+              <a:ext uri="{C572A759-6A51-4108-AA02-DFA0A04FC94B}">
+                <ma14:wrappingTextBoxFlag xmlns="" xmlns:m="http://schemas.openxmlformats.org/officeDocument/2006/math" xmlns:a14="http://schemas.microsoft.com/office/drawing/2010/main" xmlns:ma14="http://schemas.microsoft.com/office/mac/drawingml/2011/main" val="1"/>
+              </a:ext>
+            </a:extLst>
+          </p:spPr>
+          <p:txBody>
+            <a:bodyPr wrap="square" lIns="45718" tIns="45718" rIns="45718" bIns="45718" numCol="1" anchor="t">
+              <a:spAutoFit/>
+            </a:bodyPr>
+            <a:lstStyle>
+              <a:lvl1pPr>
+                <a:defRPr>
+                  <a:latin typeface="Inter"/>
+                  <a:ea typeface="Inter"/>
+                  <a:cs typeface="Inter"/>
+                  <a:sym typeface="Inter"/>
+                </a:defRPr>
+              </a:lvl1pPr>
+            </a:lstStyle>
+            <a:p>
+              <a:r>
+                <a:t>/tchat</a:t>
+              </a:r>
+            </a:p>
+          </p:txBody>
+        </p:sp>
+        <p:grpSp>
+          <p:nvGrpSpPr>
+            <p:cNvPr id="322" name="Groupe 202"/>
+            <p:cNvGrpSpPr/>
+            <p:nvPr/>
+          </p:nvGrpSpPr>
+          <p:grpSpPr>
+            <a:xfrm>
+              <a:off x="-2" y="-2"/>
+              <a:ext cx="1134281" cy="632048"/>
+              <a:chOff x="0" y="0"/>
+              <a:chExt cx="1134280" cy="632047"/>
+            </a:xfrm>
+          </p:grpSpPr>
+          <p:pic>
+            <p:nvPicPr>
+              <p:cNvPr id="320" name="Image 6" descr="Image 6"/>
+              <p:cNvPicPr>
+                <a:picLocks noChangeAspect="1"/>
+              </p:cNvPicPr>
+              <p:nvPr/>
+            </p:nvPicPr>
+            <p:blipFill>
+              <a:blip r:embed="rId13"/>
+              <a:stretch>
+                <a:fillRect/>
+              </a:stretch>
+            </p:blipFill>
+            <p:spPr>
+              <a:xfrm>
+                <a:off x="-1" y="-1"/>
+                <a:ext cx="713754" cy="632048"/>
+              </a:xfrm>
+              <a:prstGeom prst="rect">
+                <a:avLst/>
+              </a:prstGeom>
+              <a:ln w="12700" cap="flat">
+                <a:noFill/>
+                <a:miter lim="400000"/>
+              </a:ln>
+              <a:effectLst/>
+            </p:spPr>
+          </p:pic>
+          <p:pic>
+            <p:nvPicPr>
+              <p:cNvPr id="321" name="Image 192" descr="Image 192"/>
+              <p:cNvPicPr>
+                <a:picLocks noChangeAspect="1"/>
+              </p:cNvPicPr>
+              <p:nvPr/>
+            </p:nvPicPr>
+            <p:blipFill>
+              <a:blip r:embed="rId12"/>
+              <a:stretch>
+                <a:fillRect/>
+              </a:stretch>
+            </p:blipFill>
+            <p:spPr>
+              <a:xfrm>
+                <a:off x="783024" y="207980"/>
+                <a:ext cx="351256" cy="213384"/>
+              </a:xfrm>
+              <a:prstGeom prst="rect">
+                <a:avLst/>
+              </a:prstGeom>
+              <a:ln w="12700" cap="flat">
+                <a:noFill/>
+                <a:miter lim="400000"/>
+              </a:ln>
+              <a:effectLst/>
+            </p:spPr>
+          </p:pic>
+        </p:grpSp>
+      </p:grpSp>
+      <p:grpSp>
+        <p:nvGrpSpPr>
+          <p:cNvPr id="328" name="Groupe 211"/>
+          <p:cNvGrpSpPr/>
+          <p:nvPr/>
+        </p:nvGrpSpPr>
+        <p:grpSpPr>
+          <a:xfrm>
+            <a:off x="6998001" y="2855756"/>
+            <a:ext cx="1327684" cy="1005711"/>
+            <a:chOff x="-1" y="-2"/>
+            <a:chExt cx="1327683" cy="1005709"/>
+          </a:xfrm>
+        </p:grpSpPr>
+        <p:grpSp>
+          <p:nvGrpSpPr>
+            <p:cNvPr id="326" name="Groupe 122"/>
+            <p:cNvGrpSpPr/>
+            <p:nvPr/>
+          </p:nvGrpSpPr>
+          <p:grpSpPr>
+            <a:xfrm>
+              <a:off x="129242" y="-3"/>
+              <a:ext cx="1198441" cy="1005711"/>
+              <a:chOff x="-1" y="-1"/>
+              <a:chExt cx="1198439" cy="1005709"/>
+            </a:xfrm>
+          </p:grpSpPr>
+          <p:pic>
+            <p:nvPicPr>
+              <p:cNvPr id="324" name="Image 13" descr="Image 13"/>
+              <p:cNvPicPr>
+                <a:picLocks noChangeAspect="1"/>
+              </p:cNvPicPr>
+              <p:nvPr/>
+            </p:nvPicPr>
+            <p:blipFill>
+              <a:blip r:embed="rId14"/>
+              <a:stretch>
+                <a:fillRect/>
+              </a:stretch>
+            </p:blipFill>
+            <p:spPr>
+              <a:xfrm>
+                <a:off x="-2" y="-2"/>
+                <a:ext cx="1198441" cy="698379"/>
+              </a:xfrm>
+              <a:prstGeom prst="rect">
+                <a:avLst/>
+              </a:prstGeom>
+              <a:ln w="12700" cap="flat">
+                <a:noFill/>
+                <a:miter lim="400000"/>
+              </a:ln>
+              <a:effectLst/>
+            </p:spPr>
+          </p:pic>
+          <p:sp>
+            <p:nvSpPr>
+              <p:cNvPr id="325" name="ZoneTexte 114"/>
+              <p:cNvSpPr txBox="1"/>
+              <p:nvPr/>
+            </p:nvSpPr>
+            <p:spPr>
+              <a:xfrm>
+                <a:off x="386154" y="698372"/>
+                <a:ext cx="519120" cy="307337"/>
+              </a:xfrm>
+              <a:prstGeom prst="rect">
+                <a:avLst/>
+              </a:prstGeom>
+              <a:noFill/>
+              <a:ln w="12700" cap="flat">
+                <a:noFill/>
+                <a:miter lim="400000"/>
+              </a:ln>
+              <a:effectLst/>
+              <a:extLst>
+                <a:ext uri="{C572A759-6A51-4108-AA02-DFA0A04FC94B}">
+                  <ma14:wrappingTextBoxFlag xmlns="" xmlns:m="http://schemas.openxmlformats.org/officeDocument/2006/math" xmlns:a14="http://schemas.microsoft.com/office/drawing/2010/main" xmlns:ma14="http://schemas.microsoft.com/office/mac/drawingml/2011/main" val="1"/>
+                </a:ext>
+              </a:extLst>
+            </p:spPr>
+            <p:txBody>
+              <a:bodyPr wrap="none" lIns="45718" tIns="45718" rIns="45718" bIns="45718" numCol="1" anchor="t">
+                <a:spAutoFit/>
+              </a:bodyPr>
+              <a:lstStyle>
+                <a:lvl1pPr>
+                  <a:defRPr>
+                    <a:latin typeface="Inter"/>
+                    <a:ea typeface="Inter"/>
+                    <a:cs typeface="Inter"/>
+                    <a:sym typeface="Inter"/>
+                  </a:defRPr>
+                </a:lvl1pPr>
+              </a:lstStyle>
+              <a:p>
+                <a:r>
+                  <a:t>Front</a:t>
+                </a:r>
+              </a:p>
+            </p:txBody>
+          </p:sp>
+        </p:grpSp>
+        <p:pic>
+          <p:nvPicPr>
+            <p:cNvPr id="327" name="Image 194" descr="Image 194"/>
+            <p:cNvPicPr>
+              <a:picLocks noChangeAspect="1"/>
+            </p:cNvPicPr>
+            <p:nvPr/>
+          </p:nvPicPr>
+          <p:blipFill>
+            <a:blip r:embed="rId12"/>
+            <a:stretch>
+              <a:fillRect/>
+            </a:stretch>
+          </p:blipFill>
+          <p:spPr>
+            <a:xfrm>
+              <a:off x="-2" y="455334"/>
+              <a:ext cx="351254" cy="213380"/>
+            </a:xfrm>
+            <a:prstGeom prst="rect">
+              <a:avLst/>
+            </a:prstGeom>
+            <a:ln w="12700" cap="flat">
+              <a:noFill/>
+              <a:miter lim="400000"/>
+            </a:ln>
+            <a:effectLst/>
+          </p:spPr>
+        </p:pic>
+      </p:grpSp>
+      <p:grpSp>
+        <p:nvGrpSpPr>
+          <p:cNvPr id="333" name="Groupe 204"/>
+          <p:cNvGrpSpPr/>
+          <p:nvPr/>
+        </p:nvGrpSpPr>
+        <p:grpSpPr>
+          <a:xfrm>
+            <a:off x="4991808" y="2520991"/>
+            <a:ext cx="1184282" cy="913432"/>
+            <a:chOff x="-1" y="-1"/>
+            <a:chExt cx="1184280" cy="913430"/>
+          </a:xfrm>
+        </p:grpSpPr>
+        <p:grpSp>
+          <p:nvGrpSpPr>
+            <p:cNvPr id="331" name="Groupe 120"/>
+            <p:cNvGrpSpPr/>
+            <p:nvPr/>
+          </p:nvGrpSpPr>
+          <p:grpSpPr>
+            <a:xfrm>
+              <a:off x="-2" y="27495"/>
+              <a:ext cx="1184281" cy="885935"/>
+              <a:chOff x="0" y="0"/>
+              <a:chExt cx="1184280" cy="885934"/>
+            </a:xfrm>
+          </p:grpSpPr>
+          <p:pic>
+            <p:nvPicPr>
+              <p:cNvPr id="329" name="Image 4" descr="Image 4"/>
+              <p:cNvPicPr>
+                <a:picLocks noChangeAspect="1"/>
+              </p:cNvPicPr>
+              <p:nvPr/>
+            </p:nvPicPr>
+            <p:blipFill>
+              <a:blip r:embed="rId13"/>
+              <a:stretch>
+                <a:fillRect/>
+              </a:stretch>
+            </p:blipFill>
+            <p:spPr>
+              <a:xfrm>
+                <a:off x="-1" y="-1"/>
+                <a:ext cx="713754" cy="632046"/>
+              </a:xfrm>
+              <a:prstGeom prst="rect">
+                <a:avLst/>
+              </a:prstGeom>
+              <a:ln w="12700" cap="flat">
+                <a:noFill/>
+                <a:miter lim="400000"/>
+              </a:ln>
+              <a:effectLst/>
+            </p:spPr>
+          </p:pic>
+          <p:sp>
+            <p:nvSpPr>
+              <p:cNvPr id="330" name="ZoneTexte 117"/>
+              <p:cNvSpPr txBox="1"/>
+              <p:nvPr/>
+            </p:nvSpPr>
+            <p:spPr>
+              <a:xfrm>
+                <a:off x="546482" y="362697"/>
+                <a:ext cx="637798" cy="523237"/>
+              </a:xfrm>
+              <a:prstGeom prst="rect">
+                <a:avLst/>
+              </a:prstGeom>
+              <a:noFill/>
+              <a:ln w="12700" cap="flat">
+                <a:noFill/>
+                <a:miter lim="400000"/>
+              </a:ln>
+              <a:effectLst/>
+              <a:extLst>
+                <a:ext uri="{C572A759-6A51-4108-AA02-DFA0A04FC94B}">
+                  <ma14:wrappingTextBoxFlag xmlns="" xmlns:m="http://schemas.openxmlformats.org/officeDocument/2006/math" xmlns:a14="http://schemas.microsoft.com/office/drawing/2010/main" xmlns:ma14="http://schemas.microsoft.com/office/mac/drawingml/2011/main" val="1"/>
+                </a:ext>
+              </a:extLst>
+            </p:spPr>
+            <p:txBody>
+              <a:bodyPr wrap="none" lIns="45718" tIns="45718" rIns="45718" bIns="45718" numCol="1" anchor="t">
+                <a:spAutoFit/>
+              </a:bodyPr>
+              <a:lstStyle/>
+              <a:p>
+                <a:pPr>
+                  <a:defRPr>
+                    <a:latin typeface="Inter"/>
+                    <a:ea typeface="Inter"/>
+                    <a:cs typeface="Inter"/>
+                    <a:sym typeface="Inter"/>
+                  </a:defRPr>
+                </a:pPr>
+                <a:r>
+                  <a:t>/team</a:t>
+                </a:r>
+              </a:p>
+              <a:p>
+                <a:pPr>
+                  <a:defRPr>
+                    <a:latin typeface="Inter"/>
+                    <a:ea typeface="Inter"/>
+                    <a:cs typeface="Inter"/>
+                    <a:sym typeface="Inter"/>
+                  </a:defRPr>
+                </a:pPr>
+                <a:r>
+                  <a:t>/player</a:t>
+                </a:r>
+              </a:p>
+            </p:txBody>
+          </p:sp>
+        </p:grpSp>
+        <p:pic>
+          <p:nvPicPr>
+            <p:cNvPr id="332" name="Image 196" descr="Image 196"/>
+            <p:cNvPicPr>
+              <a:picLocks noChangeAspect="1"/>
+            </p:cNvPicPr>
+            <p:nvPr/>
+          </p:nvPicPr>
+          <p:blipFill>
+            <a:blip r:embed="rId12"/>
+            <a:stretch>
+              <a:fillRect/>
+            </a:stretch>
+          </p:blipFill>
+          <p:spPr>
+            <a:xfrm>
+              <a:off x="642631" y="-2"/>
+              <a:ext cx="351252" cy="213382"/>
+            </a:xfrm>
+            <a:prstGeom prst="rect">
+              <a:avLst/>
+            </a:prstGeom>
+            <a:ln w="12700" cap="flat">
+              <a:noFill/>
+              <a:miter lim="400000"/>
+            </a:ln>
+            <a:effectLst/>
+          </p:spPr>
+        </p:pic>
+      </p:grpSp>
+      <p:grpSp>
+        <p:nvGrpSpPr>
+          <p:cNvPr id="338" name="Groupe 210"/>
+          <p:cNvGrpSpPr/>
+          <p:nvPr/>
+        </p:nvGrpSpPr>
+        <p:grpSpPr>
+          <a:xfrm>
+            <a:off x="5032090" y="3665180"/>
+            <a:ext cx="1348456" cy="632048"/>
+            <a:chOff x="-1" y="0"/>
+            <a:chExt cx="1348454" cy="632046"/>
+          </a:xfrm>
+        </p:grpSpPr>
+        <p:grpSp>
+          <p:nvGrpSpPr>
+            <p:cNvPr id="336" name="Groupe 121"/>
+            <p:cNvGrpSpPr/>
+            <p:nvPr/>
+          </p:nvGrpSpPr>
+          <p:grpSpPr>
+            <a:xfrm>
+              <a:off x="-2" y="0"/>
+              <a:ext cx="1348455" cy="632047"/>
+              <a:chOff x="0" y="0"/>
+              <a:chExt cx="1348454" cy="632046"/>
+            </a:xfrm>
+          </p:grpSpPr>
+          <p:pic>
+            <p:nvPicPr>
+              <p:cNvPr id="334" name="Image 2" descr="Image 2"/>
+              <p:cNvPicPr>
+                <a:picLocks noChangeAspect="1"/>
+              </p:cNvPicPr>
+              <p:nvPr/>
+            </p:nvPicPr>
+            <p:blipFill>
+              <a:blip r:embed="rId13"/>
+              <a:stretch>
+                <a:fillRect/>
+              </a:stretch>
+            </p:blipFill>
+            <p:spPr>
+              <a:xfrm>
+                <a:off x="-1" y="0"/>
+                <a:ext cx="713755" cy="632047"/>
+              </a:xfrm>
+              <a:prstGeom prst="rect">
+                <a:avLst/>
+              </a:prstGeom>
+              <a:ln w="12700" cap="flat">
+                <a:noFill/>
+                <a:miter lim="400000"/>
+              </a:ln>
+              <a:effectLst/>
+            </p:spPr>
+          </p:pic>
+          <p:sp>
+            <p:nvSpPr>
+              <p:cNvPr id="335" name="ZoneTexte 115"/>
+              <p:cNvSpPr txBox="1"/>
+              <p:nvPr/>
+            </p:nvSpPr>
+            <p:spPr>
+              <a:xfrm>
+                <a:off x="661258" y="289408"/>
+                <a:ext cx="687196" cy="307337"/>
+              </a:xfrm>
+              <a:prstGeom prst="rect">
+                <a:avLst/>
+              </a:prstGeom>
+              <a:noFill/>
+              <a:ln w="12700" cap="flat">
+                <a:noFill/>
+                <a:miter lim="400000"/>
+              </a:ln>
+              <a:effectLst/>
+              <a:extLst>
+                <a:ext uri="{C572A759-6A51-4108-AA02-DFA0A04FC94B}">
+                  <ma14:wrappingTextBoxFlag xmlns="" xmlns:m="http://schemas.openxmlformats.org/officeDocument/2006/math" xmlns:a14="http://schemas.microsoft.com/office/drawing/2010/main" xmlns:ma14="http://schemas.microsoft.com/office/mac/drawingml/2011/main" val="1"/>
+                </a:ext>
+              </a:extLst>
+            </p:spPr>
+            <p:txBody>
+              <a:bodyPr wrap="none" lIns="45718" tIns="45718" rIns="45718" bIns="45718" numCol="1" anchor="t">
+                <a:spAutoFit/>
+              </a:bodyPr>
+              <a:lstStyle/>
+              <a:p>
+                <a:pPr>
+                  <a:defRPr>
+                    <a:latin typeface="+mj-lt"/>
+                    <a:ea typeface="+mj-ea"/>
+                    <a:cs typeface="+mj-cs"/>
+                    <a:sym typeface="Arial"/>
+                  </a:defRPr>
+                </a:pPr>
+                <a:r>
+                  <a:t>/</a:t>
+                </a:r>
+                <a:r>
+                  <a:rPr>
+                    <a:latin typeface="Inter"/>
+                    <a:ea typeface="Inter"/>
+                    <a:cs typeface="Inter"/>
+                    <a:sym typeface="Inter"/>
+                  </a:rPr>
+                  <a:t>predict</a:t>
+                </a:r>
+              </a:p>
+            </p:txBody>
+          </p:sp>
+        </p:grpSp>
+        <p:pic>
+          <p:nvPicPr>
+            <p:cNvPr id="337" name="Image 198" descr="Image 198"/>
+            <p:cNvPicPr>
+              <a:picLocks noChangeAspect="1"/>
+            </p:cNvPicPr>
+            <p:nvPr/>
+          </p:nvPicPr>
+          <p:blipFill>
+            <a:blip r:embed="rId12"/>
+            <a:stretch>
+              <a:fillRect/>
+            </a:stretch>
+          </p:blipFill>
+          <p:spPr>
+            <a:xfrm>
+              <a:off x="618103" y="50390"/>
+              <a:ext cx="351254" cy="213380"/>
+            </a:xfrm>
+            <a:prstGeom prst="rect">
+              <a:avLst/>
+            </a:prstGeom>
+            <a:ln w="12700" cap="flat">
+              <a:noFill/>
+              <a:miter lim="400000"/>
+            </a:ln>
+            <a:effectLst/>
+          </p:spPr>
+        </p:pic>
+      </p:grpSp>
+      <p:grpSp>
+        <p:nvGrpSpPr>
+          <p:cNvPr id="343" name="Groupe 213"/>
+          <p:cNvGrpSpPr/>
+          <p:nvPr/>
+        </p:nvGrpSpPr>
+        <p:grpSpPr>
+          <a:xfrm>
+            <a:off x="2785852" y="936399"/>
+            <a:ext cx="1149397" cy="1137743"/>
+            <a:chOff x="-1" y="-1"/>
+            <a:chExt cx="1149396" cy="1137741"/>
+          </a:xfrm>
+        </p:grpSpPr>
+        <p:grpSp>
+          <p:nvGrpSpPr>
+            <p:cNvPr id="341" name="Groupe 37"/>
+            <p:cNvGrpSpPr/>
+            <p:nvPr/>
+          </p:nvGrpSpPr>
+          <p:grpSpPr>
+            <a:xfrm>
+              <a:off x="209350" y="-2"/>
+              <a:ext cx="940046" cy="1137742"/>
+              <a:chOff x="0" y="0"/>
+              <a:chExt cx="940044" cy="1137741"/>
+            </a:xfrm>
+          </p:grpSpPr>
+          <p:pic>
+            <p:nvPicPr>
+              <p:cNvPr id="339" name="Image 27" descr="Image 27"/>
+              <p:cNvPicPr>
+                <a:picLocks noChangeAspect="1"/>
+              </p:cNvPicPr>
+              <p:nvPr/>
+            </p:nvPicPr>
+            <p:blipFill>
+              <a:blip r:embed="rId15"/>
+              <a:stretch>
+                <a:fillRect/>
+              </a:stretch>
+            </p:blipFill>
+            <p:spPr>
+              <a:xfrm>
+                <a:off x="152389" y="-1"/>
+                <a:ext cx="571741" cy="638222"/>
+              </a:xfrm>
+              <a:prstGeom prst="rect">
+                <a:avLst/>
+              </a:prstGeom>
+              <a:ln w="12700" cap="flat">
+                <a:noFill/>
+                <a:miter lim="400000"/>
+              </a:ln>
+              <a:effectLst/>
+            </p:spPr>
+          </p:pic>
+          <p:pic>
+            <p:nvPicPr>
+              <p:cNvPr id="340" name="Image 17" descr="Image 17"/>
+              <p:cNvPicPr>
+                <a:picLocks noChangeAspect="1"/>
+              </p:cNvPicPr>
+              <p:nvPr/>
+            </p:nvPicPr>
+            <p:blipFill>
+              <a:blip r:embed="rId16"/>
+              <a:stretch>
+                <a:fillRect/>
+              </a:stretch>
+            </p:blipFill>
+            <p:spPr>
+              <a:xfrm>
+                <a:off x="0" y="555409"/>
+                <a:ext cx="940045" cy="582332"/>
+              </a:xfrm>
+              <a:prstGeom prst="rect">
+                <a:avLst/>
+              </a:prstGeom>
+              <a:ln w="12700" cap="flat">
+                <a:noFill/>
+                <a:miter lim="400000"/>
+              </a:ln>
+              <a:effectLst/>
+            </p:spPr>
+          </p:pic>
+        </p:grpSp>
+        <p:pic>
+          <p:nvPicPr>
+            <p:cNvPr id="342" name="Image 201" descr="Image 201"/>
+            <p:cNvPicPr>
+              <a:picLocks noChangeAspect="1"/>
+            </p:cNvPicPr>
+            <p:nvPr/>
+          </p:nvPicPr>
+          <p:blipFill>
+            <a:blip r:embed="rId12"/>
+            <a:stretch>
+              <a:fillRect/>
+            </a:stretch>
+          </p:blipFill>
+          <p:spPr>
+            <a:xfrm>
+              <a:off x="-2" y="419992"/>
+              <a:ext cx="351254" cy="213382"/>
+            </a:xfrm>
+            <a:prstGeom prst="rect">
+              <a:avLst/>
+            </a:prstGeom>
+            <a:ln w="12700" cap="flat">
+              <a:noFill/>
+              <a:miter lim="400000"/>
+            </a:ln>
+            <a:effectLst/>
+          </p:spPr>
+        </p:pic>
+      </p:grpSp>
     </p:spTree>
   </p:cSld>
   <p:clrMapOvr>

--- a/docs/FootballPredictorDemoDay20260803.pptx
+++ b/docs/FootballPredictorDemoDay20260803.pptx
@@ -1966,7 +1966,7 @@
           </a:ln>
           <a:extLst>
             <a:ext uri="{C572A759-6A51-4108-AA02-DFA0A04FC94B}">
-              <ma14:wrappingTextBoxFlag xmlns="" xmlns:m="http://schemas.openxmlformats.org/officeDocument/2006/math" xmlns:a14="http://schemas.microsoft.com/office/drawing/2010/main" xmlns:ma14="http://schemas.microsoft.com/office/mac/drawingml/2011/main" val="1"/>
+              <ma14:wrappingTextBoxFlag xmlns:ma14="http://schemas.microsoft.com/office/mac/drawingml/2011/main" xmlns:a14="http://schemas.microsoft.com/office/drawing/2010/main" xmlns:m="http://schemas.openxmlformats.org/officeDocument/2006/math" xmlns="" val="1"/>
             </a:ext>
           </a:extLst>
         </p:spPr>
@@ -2005,7 +2005,7 @@
           </a:ln>
           <a:extLst>
             <a:ext uri="{C572A759-6A51-4108-AA02-DFA0A04FC94B}">
-              <ma14:wrappingTextBoxFlag xmlns="" xmlns:m="http://schemas.openxmlformats.org/officeDocument/2006/math" xmlns:a14="http://schemas.microsoft.com/office/drawing/2010/main" xmlns:ma14="http://schemas.microsoft.com/office/mac/drawingml/2011/main" val="1"/>
+              <ma14:wrappingTextBoxFlag xmlns:ma14="http://schemas.microsoft.com/office/mac/drawingml/2011/main" xmlns:a14="http://schemas.microsoft.com/office/drawing/2010/main" xmlns:m="http://schemas.openxmlformats.org/officeDocument/2006/math" xmlns="" val="1"/>
             </a:ext>
           </a:extLst>
         </p:spPr>
@@ -3111,7 +3111,7 @@
           </a:ln>
           <a:extLst>
             <a:ext uri="{C572A759-6A51-4108-AA02-DFA0A04FC94B}">
-              <ma14:wrappingTextBoxFlag xmlns:ma14="http://schemas.microsoft.com/office/mac/drawingml/2011/main" xmlns:a14="http://schemas.microsoft.com/office/drawing/2010/main" xmlns:m="http://schemas.openxmlformats.org/officeDocument/2006/math" xmlns="" val="1"/>
+              <ma14:wrappingTextBoxFlag xmlns="" xmlns:m="http://schemas.openxmlformats.org/officeDocument/2006/math" xmlns:a14="http://schemas.microsoft.com/office/drawing/2010/main" xmlns:ma14="http://schemas.microsoft.com/office/mac/drawingml/2011/main" val="1"/>
             </a:ext>
           </a:extLst>
         </p:spPr>
@@ -3332,7 +3332,7 @@
           </a:ln>
           <a:extLst>
             <a:ext uri="{C572A759-6A51-4108-AA02-DFA0A04FC94B}">
-              <ma14:wrappingTextBoxFlag xmlns="" xmlns:m="http://schemas.openxmlformats.org/officeDocument/2006/math" xmlns:a14="http://schemas.microsoft.com/office/drawing/2010/main" xmlns:ma14="http://schemas.microsoft.com/office/mac/drawingml/2011/main" val="1"/>
+              <ma14:wrappingTextBoxFlag xmlns:ma14="http://schemas.microsoft.com/office/mac/drawingml/2011/main" xmlns:a14="http://schemas.microsoft.com/office/drawing/2010/main" xmlns:m="http://schemas.openxmlformats.org/officeDocument/2006/math" xmlns="" val="1"/>
             </a:ext>
           </a:extLst>
         </p:spPr>
@@ -3390,19 +3390,53 @@
               </a:defRPr>
             </a:pPr>
             <a:r>
-              <a:rPr dirty="0" err="1"/>
+              <a:rPr lang="fr-FR" dirty="0">
+                <a:solidFill>
+                  <a:schemeClr val="accent3">
+                    <a:lumMod val="50000"/>
+                  </a:schemeClr>
+                </a:solidFill>
+              </a:rPr>
+              <a:t>  </a:t>
+            </a:r>
+            <a:r>
+              <a:rPr dirty="0" err="1">
+                <a:solidFill>
+                  <a:schemeClr val="accent3">
+                    <a:lumMod val="50000"/>
+                  </a:schemeClr>
+                </a:solidFill>
+              </a:rPr>
               <a:t>Besoin</a:t>
             </a:r>
             <a:r>
-              <a:rPr dirty="0"/>
+              <a:rPr dirty="0">
+                <a:solidFill>
+                  <a:schemeClr val="accent3">
+                    <a:lumMod val="50000"/>
+                  </a:schemeClr>
+                </a:solidFill>
+              </a:rPr>
               <a:t> : assister un </a:t>
             </a:r>
             <a:r>
-              <a:rPr dirty="0" err="1"/>
+              <a:rPr dirty="0" err="1">
+                <a:solidFill>
+                  <a:schemeClr val="accent3">
+                    <a:lumMod val="50000"/>
+                  </a:schemeClr>
+                </a:solidFill>
+              </a:rPr>
               <a:t>entraineur</a:t>
             </a:r>
             <a:r>
-              <a:rPr dirty="0"/>
+              <a:rPr dirty="0">
+                <a:solidFill>
+                  <a:schemeClr val="accent3">
+                    <a:lumMod val="50000"/>
+                  </a:schemeClr>
+                </a:solidFill>
+              </a:rPr>
               <a:t> de foot pour former son équipe</a:t>
             </a:r>
           </a:p>
@@ -3422,46 +3456,122 @@
               </a:defRPr>
             </a:pPr>
             <a:r>
-              <a:rPr dirty="0"/>
+              <a:rPr lang="fr-FR" dirty="0">
+                <a:solidFill>
+                  <a:schemeClr val="accent3">
+                    <a:lumMod val="50000"/>
+                  </a:schemeClr>
+                </a:solidFill>
+              </a:rPr>
+              <a:t>  </a:t>
+            </a:r>
+            <a:r>
+              <a:rPr dirty="0">
+                <a:solidFill>
+                  <a:schemeClr val="accent3">
+                    <a:lumMod val="50000"/>
+                  </a:schemeClr>
+                </a:solidFill>
+              </a:rPr>
               <a:t>Proposition : </a:t>
             </a:r>
             <a:r>
-              <a:rPr dirty="0" err="1"/>
+              <a:rPr dirty="0" err="1">
+                <a:solidFill>
+                  <a:schemeClr val="accent3">
+                    <a:lumMod val="50000"/>
+                  </a:schemeClr>
+                </a:solidFill>
+              </a:rPr>
               <a:t>une</a:t>
             </a:r>
             <a:r>
-              <a:rPr dirty="0"/>
+              <a:rPr dirty="0">
+                <a:solidFill>
+                  <a:schemeClr val="accent3">
+                    <a:lumMod val="50000"/>
+                  </a:schemeClr>
+                </a:solidFill>
+              </a:rPr>
               <a:t> application pour </a:t>
             </a:r>
             <a:r>
-              <a:rPr dirty="0" err="1"/>
+              <a:rPr dirty="0" err="1">
+                <a:solidFill>
+                  <a:schemeClr val="accent3">
+                    <a:lumMod val="50000"/>
+                  </a:schemeClr>
+                </a:solidFill>
+              </a:rPr>
               <a:t>l’aider</a:t>
             </a:r>
             <a:r>
-              <a:rPr dirty="0"/>
+              <a:rPr dirty="0">
+                <a:solidFill>
+                  <a:schemeClr val="accent3">
+                    <a:lumMod val="50000"/>
+                  </a:schemeClr>
+                </a:solidFill>
+              </a:rPr>
               <a:t> à </a:t>
             </a:r>
             <a:r>
-              <a:rPr dirty="0" err="1"/>
+              <a:rPr dirty="0" err="1">
+                <a:solidFill>
+                  <a:schemeClr val="accent3">
+                    <a:lumMod val="50000"/>
+                  </a:schemeClr>
+                </a:solidFill>
+              </a:rPr>
               <a:t>choisir</a:t>
             </a:r>
             <a:r>
-              <a:rPr dirty="0"/>
+              <a:rPr dirty="0">
+                <a:solidFill>
+                  <a:schemeClr val="accent3">
+                    <a:lumMod val="50000"/>
+                  </a:schemeClr>
+                </a:solidFill>
+              </a:rPr>
               <a:t> </a:t>
             </a:r>
             <a:r>
-              <a:rPr dirty="0" err="1"/>
+              <a:rPr dirty="0" err="1">
+                <a:solidFill>
+                  <a:schemeClr val="accent3">
+                    <a:lumMod val="50000"/>
+                  </a:schemeClr>
+                </a:solidFill>
+              </a:rPr>
               <a:t>ses</a:t>
             </a:r>
             <a:r>
-              <a:rPr dirty="0"/>
+              <a:rPr dirty="0">
+                <a:solidFill>
+                  <a:schemeClr val="accent3">
+                    <a:lumMod val="50000"/>
+                  </a:schemeClr>
+                </a:solidFill>
+              </a:rPr>
               <a:t> </a:t>
             </a:r>
             <a:r>
-              <a:rPr dirty="0" err="1"/>
+              <a:rPr dirty="0" err="1">
+                <a:solidFill>
+                  <a:schemeClr val="accent3">
+                    <a:lumMod val="50000"/>
+                  </a:schemeClr>
+                </a:solidFill>
+              </a:rPr>
               <a:t>joueurs</a:t>
             </a:r>
-            <a:endParaRPr lang="fr-FR" dirty="0"/>
+            <a:endParaRPr lang="fr-FR" dirty="0">
+              <a:solidFill>
+                <a:schemeClr val="accent3">
+                  <a:lumMod val="50000"/>
+                </a:schemeClr>
+              </a:solidFill>
+            </a:endParaRPr>
           </a:p>
           <a:p>
             <a:pPr>
@@ -3709,7 +3819,7 @@
           </a:ln>
           <a:extLst>
             <a:ext uri="{C572A759-6A51-4108-AA02-DFA0A04FC94B}">
-              <ma14:wrappingTextBoxFlag xmlns:ma14="http://schemas.microsoft.com/office/mac/drawingml/2011/main" xmlns:a14="http://schemas.microsoft.com/office/drawing/2010/main" xmlns:m="http://schemas.openxmlformats.org/officeDocument/2006/math" xmlns="" val="1"/>
+              <ma14:wrappingTextBoxFlag xmlns="" xmlns:m="http://schemas.openxmlformats.org/officeDocument/2006/math" xmlns:a14="http://schemas.microsoft.com/office/drawing/2010/main" xmlns:ma14="http://schemas.microsoft.com/office/mac/drawingml/2011/main" val="1"/>
             </a:ext>
           </a:extLst>
         </p:spPr>
@@ -4055,7 +4165,7 @@
           </a:ln>
           <a:extLst>
             <a:ext uri="{C572A759-6A51-4108-AA02-DFA0A04FC94B}">
-              <ma14:wrappingTextBoxFlag xmlns="" xmlns:m="http://schemas.openxmlformats.org/officeDocument/2006/math" xmlns:a14="http://schemas.microsoft.com/office/drawing/2010/main" xmlns:ma14="http://schemas.microsoft.com/office/mac/drawingml/2011/main" val="1"/>
+              <ma14:wrappingTextBoxFlag xmlns:ma14="http://schemas.microsoft.com/office/mac/drawingml/2011/main" xmlns:a14="http://schemas.microsoft.com/office/drawing/2010/main" xmlns:m="http://schemas.openxmlformats.org/officeDocument/2006/math" xmlns="" val="1"/>
             </a:ext>
           </a:extLst>
         </p:spPr>
@@ -4160,7 +4270,7 @@
           </a:ln>
           <a:extLst>
             <a:ext uri="{C572A759-6A51-4108-AA02-DFA0A04FC94B}">
-              <ma14:wrappingTextBoxFlag xmlns="" xmlns:m="http://schemas.openxmlformats.org/officeDocument/2006/math" xmlns:a14="http://schemas.microsoft.com/office/drawing/2010/main" xmlns:ma14="http://schemas.microsoft.com/office/mac/drawingml/2011/main" val="1"/>
+              <ma14:wrappingTextBoxFlag xmlns:ma14="http://schemas.microsoft.com/office/mac/drawingml/2011/main" xmlns:a14="http://schemas.microsoft.com/office/drawing/2010/main" xmlns:m="http://schemas.openxmlformats.org/officeDocument/2006/math" xmlns="" val="1"/>
             </a:ext>
           </a:extLst>
         </p:spPr>
@@ -4497,7 +4607,7 @@
             <a:effectLst/>
             <a:extLst>
               <a:ext uri="{C572A759-6A51-4108-AA02-DFA0A04FC94B}">
-                <ma14:wrappingTextBoxFlag xmlns="" xmlns:m="http://schemas.openxmlformats.org/officeDocument/2006/math" xmlns:a14="http://schemas.microsoft.com/office/drawing/2010/main" xmlns:ma14="http://schemas.microsoft.com/office/mac/drawingml/2011/main" val="1"/>
+                <ma14:wrappingTextBoxFlag xmlns:ma14="http://schemas.microsoft.com/office/mac/drawingml/2011/main" xmlns:a14="http://schemas.microsoft.com/office/drawing/2010/main" xmlns:m="http://schemas.openxmlformats.org/officeDocument/2006/math" xmlns="" val="1"/>
               </a:ext>
             </a:extLst>
           </p:spPr>
@@ -4588,7 +4698,7 @@
             <a:effectLst/>
             <a:extLst>
               <a:ext uri="{C572A759-6A51-4108-AA02-DFA0A04FC94B}">
-                <ma14:wrappingTextBoxFlag xmlns="" xmlns:m="http://schemas.openxmlformats.org/officeDocument/2006/math" xmlns:a14="http://schemas.microsoft.com/office/drawing/2010/main" xmlns:ma14="http://schemas.microsoft.com/office/mac/drawingml/2011/main" val="1"/>
+                <ma14:wrappingTextBoxFlag xmlns:ma14="http://schemas.microsoft.com/office/mac/drawingml/2011/main" xmlns:a14="http://schemas.microsoft.com/office/drawing/2010/main" xmlns:m="http://schemas.openxmlformats.org/officeDocument/2006/math" xmlns="" val="1"/>
               </a:ext>
             </a:extLst>
           </p:spPr>
@@ -5252,7 +5362,7 @@
           </a:ln>
           <a:extLst>
             <a:ext uri="{C572A759-6A51-4108-AA02-DFA0A04FC94B}">
-              <ma14:wrappingTextBoxFlag xmlns="" xmlns:m="http://schemas.openxmlformats.org/officeDocument/2006/math" xmlns:a14="http://schemas.microsoft.com/office/drawing/2010/main" xmlns:ma14="http://schemas.microsoft.com/office/mac/drawingml/2011/main" val="1"/>
+              <ma14:wrappingTextBoxFlag xmlns:ma14="http://schemas.microsoft.com/office/mac/drawingml/2011/main" xmlns:a14="http://schemas.microsoft.com/office/drawing/2010/main" xmlns:m="http://schemas.openxmlformats.org/officeDocument/2006/math" xmlns="" val="1"/>
             </a:ext>
           </a:extLst>
         </p:spPr>
@@ -5557,7 +5667,7 @@
           </a:ln>
           <a:extLst>
             <a:ext uri="{C572A759-6A51-4108-AA02-DFA0A04FC94B}">
-              <ma14:wrappingTextBoxFlag xmlns="" xmlns:m="http://schemas.openxmlformats.org/officeDocument/2006/math" xmlns:a14="http://schemas.microsoft.com/office/drawing/2010/main" xmlns:ma14="http://schemas.microsoft.com/office/mac/drawingml/2011/main" val="1"/>
+              <ma14:wrappingTextBoxFlag xmlns:ma14="http://schemas.microsoft.com/office/mac/drawingml/2011/main" xmlns:a14="http://schemas.microsoft.com/office/drawing/2010/main" xmlns:m="http://schemas.openxmlformats.org/officeDocument/2006/math" xmlns="" val="1"/>
             </a:ext>
           </a:extLst>
         </p:spPr>
@@ -5604,7 +5714,7 @@
           </a:ln>
           <a:extLst>
             <a:ext uri="{C572A759-6A51-4108-AA02-DFA0A04FC94B}">
-              <ma14:wrappingTextBoxFlag xmlns="" xmlns:m="http://schemas.openxmlformats.org/officeDocument/2006/math" xmlns:a14="http://schemas.microsoft.com/office/drawing/2010/main" xmlns:ma14="http://schemas.microsoft.com/office/mac/drawingml/2011/main" val="1"/>
+              <ma14:wrappingTextBoxFlag xmlns:ma14="http://schemas.microsoft.com/office/mac/drawingml/2011/main" xmlns:a14="http://schemas.microsoft.com/office/drawing/2010/main" xmlns:m="http://schemas.openxmlformats.org/officeDocument/2006/math" xmlns="" val="1"/>
             </a:ext>
           </a:extLst>
         </p:spPr>
@@ -5651,7 +5761,7 @@
           </a:ln>
           <a:extLst>
             <a:ext uri="{C572A759-6A51-4108-AA02-DFA0A04FC94B}">
-              <ma14:wrappingTextBoxFlag xmlns="" xmlns:m="http://schemas.openxmlformats.org/officeDocument/2006/math" xmlns:a14="http://schemas.microsoft.com/office/drawing/2010/main" xmlns:ma14="http://schemas.microsoft.com/office/mac/drawingml/2011/main" val="1"/>
+              <ma14:wrappingTextBoxFlag xmlns:ma14="http://schemas.microsoft.com/office/mac/drawingml/2011/main" xmlns:a14="http://schemas.microsoft.com/office/drawing/2010/main" xmlns:m="http://schemas.openxmlformats.org/officeDocument/2006/math" xmlns="" val="1"/>
             </a:ext>
           </a:extLst>
         </p:spPr>
@@ -5698,7 +5808,7 @@
           </a:ln>
           <a:extLst>
             <a:ext uri="{C572A759-6A51-4108-AA02-DFA0A04FC94B}">
-              <ma14:wrappingTextBoxFlag xmlns="" xmlns:m="http://schemas.openxmlformats.org/officeDocument/2006/math" xmlns:a14="http://schemas.microsoft.com/office/drawing/2010/main" xmlns:ma14="http://schemas.microsoft.com/office/mac/drawingml/2011/main" val="1"/>
+              <ma14:wrappingTextBoxFlag xmlns:ma14="http://schemas.microsoft.com/office/mac/drawingml/2011/main" xmlns:a14="http://schemas.microsoft.com/office/drawing/2010/main" xmlns:m="http://schemas.openxmlformats.org/officeDocument/2006/math" xmlns="" val="1"/>
             </a:ext>
           </a:extLst>
         </p:spPr>
@@ -6305,7 +6415,7 @@
           </a:ln>
           <a:extLst>
             <a:ext uri="{C572A759-6A51-4108-AA02-DFA0A04FC94B}">
-              <ma14:wrappingTextBoxFlag xmlns="" xmlns:m="http://schemas.openxmlformats.org/officeDocument/2006/math" xmlns:a14="http://schemas.microsoft.com/office/drawing/2010/main" xmlns:ma14="http://schemas.microsoft.com/office/mac/drawingml/2011/main" val="1"/>
+              <ma14:wrappingTextBoxFlag xmlns:ma14="http://schemas.microsoft.com/office/mac/drawingml/2011/main" xmlns:a14="http://schemas.microsoft.com/office/drawing/2010/main" xmlns:m="http://schemas.openxmlformats.org/officeDocument/2006/math" xmlns="" val="1"/>
             </a:ext>
           </a:extLst>
         </p:spPr>
@@ -6352,7 +6462,7 @@
           </a:ln>
           <a:extLst>
             <a:ext uri="{C572A759-6A51-4108-AA02-DFA0A04FC94B}">
-              <ma14:wrappingTextBoxFlag xmlns="" xmlns:m="http://schemas.openxmlformats.org/officeDocument/2006/math" xmlns:a14="http://schemas.microsoft.com/office/drawing/2010/main" xmlns:ma14="http://schemas.microsoft.com/office/mac/drawingml/2011/main" val="1"/>
+              <ma14:wrappingTextBoxFlag xmlns:ma14="http://schemas.microsoft.com/office/mac/drawingml/2011/main" xmlns:a14="http://schemas.microsoft.com/office/drawing/2010/main" xmlns:m="http://schemas.openxmlformats.org/officeDocument/2006/math" xmlns="" val="1"/>
             </a:ext>
           </a:extLst>
         </p:spPr>
@@ -6399,7 +6509,7 @@
           </a:ln>
           <a:extLst>
             <a:ext uri="{C572A759-6A51-4108-AA02-DFA0A04FC94B}">
-              <ma14:wrappingTextBoxFlag xmlns="" xmlns:m="http://schemas.openxmlformats.org/officeDocument/2006/math" xmlns:a14="http://schemas.microsoft.com/office/drawing/2010/main" xmlns:ma14="http://schemas.microsoft.com/office/mac/drawingml/2011/main" val="1"/>
+              <ma14:wrappingTextBoxFlag xmlns:ma14="http://schemas.microsoft.com/office/mac/drawingml/2011/main" xmlns:a14="http://schemas.microsoft.com/office/drawing/2010/main" xmlns:m="http://schemas.openxmlformats.org/officeDocument/2006/math" xmlns="" val="1"/>
             </a:ext>
           </a:extLst>
         </p:spPr>
@@ -6446,7 +6556,7 @@
           </a:ln>
           <a:extLst>
             <a:ext uri="{C572A759-6A51-4108-AA02-DFA0A04FC94B}">
-              <ma14:wrappingTextBoxFlag xmlns="" xmlns:m="http://schemas.openxmlformats.org/officeDocument/2006/math" xmlns:a14="http://schemas.microsoft.com/office/drawing/2010/main" xmlns:ma14="http://schemas.microsoft.com/office/mac/drawingml/2011/main" val="1"/>
+              <ma14:wrappingTextBoxFlag xmlns:ma14="http://schemas.microsoft.com/office/mac/drawingml/2011/main" xmlns:a14="http://schemas.microsoft.com/office/drawing/2010/main" xmlns:m="http://schemas.openxmlformats.org/officeDocument/2006/math" xmlns="" val="1"/>
             </a:ext>
           </a:extLst>
         </p:spPr>
@@ -6493,7 +6603,7 @@
           </a:ln>
           <a:extLst>
             <a:ext uri="{C572A759-6A51-4108-AA02-DFA0A04FC94B}">
-              <ma14:wrappingTextBoxFlag xmlns="" xmlns:m="http://schemas.openxmlformats.org/officeDocument/2006/math" xmlns:a14="http://schemas.microsoft.com/office/drawing/2010/main" xmlns:ma14="http://schemas.microsoft.com/office/mac/drawingml/2011/main" val="1"/>
+              <ma14:wrappingTextBoxFlag xmlns:ma14="http://schemas.microsoft.com/office/mac/drawingml/2011/main" xmlns:a14="http://schemas.microsoft.com/office/drawing/2010/main" xmlns:m="http://schemas.openxmlformats.org/officeDocument/2006/math" xmlns="" val="1"/>
             </a:ext>
           </a:extLst>
         </p:spPr>
@@ -6540,7 +6650,7 @@
           </a:ln>
           <a:extLst>
             <a:ext uri="{C572A759-6A51-4108-AA02-DFA0A04FC94B}">
-              <ma14:wrappingTextBoxFlag xmlns="" xmlns:m="http://schemas.openxmlformats.org/officeDocument/2006/math" xmlns:a14="http://schemas.microsoft.com/office/drawing/2010/main" xmlns:ma14="http://schemas.microsoft.com/office/mac/drawingml/2011/main" val="1"/>
+              <ma14:wrappingTextBoxFlag xmlns:ma14="http://schemas.microsoft.com/office/mac/drawingml/2011/main" xmlns:a14="http://schemas.microsoft.com/office/drawing/2010/main" xmlns:m="http://schemas.openxmlformats.org/officeDocument/2006/math" xmlns="" val="1"/>
             </a:ext>
           </a:extLst>
         </p:spPr>
@@ -6611,7 +6721,7 @@
         </p:blipFill>
         <p:spPr>
           <a:xfrm>
-            <a:off x="0" y="0"/>
+            <a:off x="10225" y="0"/>
             <a:ext cx="9144000" cy="5143500"/>
           </a:xfrm>
           <a:prstGeom prst="rect">
@@ -6657,10 +6767,19 @@
               </a:defRPr>
             </a:pPr>
             <a:r>
-              <a:t>Football predictor application - Démonstration </a:t>
+              <a:rPr dirty="0"/>
+              <a:t>Football predictor application - </a:t>
             </a:r>
             <a:r>
-              <a:rPr u="sng">
+              <a:rPr dirty="0" err="1"/>
+              <a:t>Démonstration</a:t>
+            </a:r>
+            <a:r>
+              <a:rPr dirty="0"/>
+              <a:t> </a:t>
+            </a:r>
+            <a:r>
+              <a:rPr u="sng" dirty="0" err="1">
                 <a:solidFill>
                   <a:srgbClr val="0000FF"/>
                 </a:solidFill>
@@ -6671,7 +6790,21 @@
                 </a:uFill>
                 <a:hlinkClick r:id="rId3"/>
               </a:rPr>
-              <a:t>Vidéo </a:t>
+              <a:t>Vidéo</a:t>
+            </a:r>
+            <a:r>
+              <a:rPr u="sng" dirty="0">
+                <a:solidFill>
+                  <a:srgbClr val="0000FF"/>
+                </a:solidFill>
+                <a:uFill>
+                  <a:solidFill>
+                    <a:srgbClr val="0000FF"/>
+                  </a:solidFill>
+                </a:uFill>
+                <a:hlinkClick r:id="rId4"/>
+              </a:rPr>
+              <a:t> </a:t>
             </a:r>
           </a:p>
         </p:txBody>
@@ -6685,7 +6818,7 @@
           <p:nvPr/>
         </p:nvPicPr>
         <p:blipFill>
-          <a:blip r:embed="rId4"/>
+          <a:blip r:embed="rId5"/>
           <a:stretch>
             <a:fillRect/>
           </a:stretch>
@@ -7081,7 +7214,7 @@
           <p:nvPr/>
         </p:nvPicPr>
         <p:blipFill>
-          <a:blip r:embed="rId5"/>
+          <a:blip r:embed="rId6"/>
           <a:stretch>
             <a:fillRect/>
           </a:stretch>
@@ -7108,7 +7241,7 @@
           <p:nvPr/>
         </p:nvPicPr>
         <p:blipFill>
-          <a:blip r:embed="rId6"/>
+          <a:blip r:embed="rId7"/>
           <a:stretch>
             <a:fillRect/>
           </a:stretch>
@@ -7135,7 +7268,7 @@
           <p:nvPr/>
         </p:nvPicPr>
         <p:blipFill>
-          <a:blip r:embed="rId7"/>
+          <a:blip r:embed="rId8"/>
           <a:stretch>
             <a:fillRect/>
           </a:stretch>
@@ -7162,7 +7295,7 @@
           <p:nvPr/>
         </p:nvPicPr>
         <p:blipFill>
-          <a:blip r:embed="rId8"/>
+          <a:blip r:embed="rId9"/>
           <a:stretch>
             <a:fillRect/>
           </a:stretch>
@@ -7199,7 +7332,7 @@
           </a:ln>
           <a:extLst>
             <a:ext uri="{C572A759-6A51-4108-AA02-DFA0A04FC94B}">
-              <ma14:wrappingTextBoxFlag xmlns="" xmlns:m="http://schemas.openxmlformats.org/officeDocument/2006/math" xmlns:a14="http://schemas.microsoft.com/office/drawing/2010/main" xmlns:ma14="http://schemas.microsoft.com/office/mac/drawingml/2011/main" val="1"/>
+              <ma14:wrappingTextBoxFlag xmlns:ma14="http://schemas.microsoft.com/office/mac/drawingml/2011/main" xmlns:a14="http://schemas.microsoft.com/office/drawing/2010/main" xmlns:m="http://schemas.openxmlformats.org/officeDocument/2006/math" xmlns="" val="1"/>
             </a:ext>
           </a:extLst>
         </p:spPr>
@@ -7246,7 +7379,7 @@
           </a:ln>
           <a:extLst>
             <a:ext uri="{C572A759-6A51-4108-AA02-DFA0A04FC94B}">
-              <ma14:wrappingTextBoxFlag xmlns="" xmlns:m="http://schemas.openxmlformats.org/officeDocument/2006/math" xmlns:a14="http://schemas.microsoft.com/office/drawing/2010/main" xmlns:ma14="http://schemas.microsoft.com/office/mac/drawingml/2011/main" val="1"/>
+              <ma14:wrappingTextBoxFlag xmlns:ma14="http://schemas.microsoft.com/office/mac/drawingml/2011/main" xmlns:a14="http://schemas.microsoft.com/office/drawing/2010/main" xmlns:m="http://schemas.openxmlformats.org/officeDocument/2006/math" xmlns="" val="1"/>
             </a:ext>
           </a:extLst>
         </p:spPr>
@@ -7293,7 +7426,7 @@
           </a:ln>
           <a:extLst>
             <a:ext uri="{C572A759-6A51-4108-AA02-DFA0A04FC94B}">
-              <ma14:wrappingTextBoxFlag xmlns="" xmlns:m="http://schemas.openxmlformats.org/officeDocument/2006/math" xmlns:a14="http://schemas.microsoft.com/office/drawing/2010/main" xmlns:ma14="http://schemas.microsoft.com/office/mac/drawingml/2011/main" val="1"/>
+              <ma14:wrappingTextBoxFlag xmlns:ma14="http://schemas.microsoft.com/office/mac/drawingml/2011/main" xmlns:a14="http://schemas.microsoft.com/office/drawing/2010/main" xmlns:m="http://schemas.openxmlformats.org/officeDocument/2006/math" xmlns="" val="1"/>
             </a:ext>
           </a:extLst>
         </p:spPr>
@@ -7340,7 +7473,7 @@
           </a:ln>
           <a:extLst>
             <a:ext uri="{C572A759-6A51-4108-AA02-DFA0A04FC94B}">
-              <ma14:wrappingTextBoxFlag xmlns="" xmlns:m="http://schemas.openxmlformats.org/officeDocument/2006/math" xmlns:a14="http://schemas.microsoft.com/office/drawing/2010/main" xmlns:ma14="http://schemas.microsoft.com/office/mac/drawingml/2011/main" val="1"/>
+              <ma14:wrappingTextBoxFlag xmlns:ma14="http://schemas.microsoft.com/office/mac/drawingml/2011/main" xmlns:a14="http://schemas.microsoft.com/office/drawing/2010/main" xmlns:m="http://schemas.openxmlformats.org/officeDocument/2006/math" xmlns="" val="1"/>
             </a:ext>
           </a:extLst>
         </p:spPr>
@@ -7387,7 +7520,7 @@
           </a:ln>
           <a:extLst>
             <a:ext uri="{C572A759-6A51-4108-AA02-DFA0A04FC94B}">
-              <ma14:wrappingTextBoxFlag xmlns="" xmlns:m="http://schemas.openxmlformats.org/officeDocument/2006/math" xmlns:a14="http://schemas.microsoft.com/office/drawing/2010/main" xmlns:ma14="http://schemas.microsoft.com/office/mac/drawingml/2011/main" val="1"/>
+              <ma14:wrappingTextBoxFlag xmlns:ma14="http://schemas.microsoft.com/office/mac/drawingml/2011/main" xmlns:a14="http://schemas.microsoft.com/office/drawing/2010/main" xmlns:m="http://schemas.openxmlformats.org/officeDocument/2006/math" xmlns="" val="1"/>
             </a:ext>
           </a:extLst>
         </p:spPr>
@@ -7434,7 +7567,7 @@
           </a:ln>
           <a:extLst>
             <a:ext uri="{C572A759-6A51-4108-AA02-DFA0A04FC94B}">
-              <ma14:wrappingTextBoxFlag xmlns="" xmlns:m="http://schemas.openxmlformats.org/officeDocument/2006/math" xmlns:a14="http://schemas.microsoft.com/office/drawing/2010/main" xmlns:ma14="http://schemas.microsoft.com/office/mac/drawingml/2011/main" val="1"/>
+              <ma14:wrappingTextBoxFlag xmlns:ma14="http://schemas.microsoft.com/office/mac/drawingml/2011/main" xmlns:a14="http://schemas.microsoft.com/office/drawing/2010/main" xmlns:m="http://schemas.openxmlformats.org/officeDocument/2006/math" xmlns="" val="1"/>
             </a:ext>
           </a:extLst>
         </p:spPr>
@@ -7481,7 +7614,7 @@
           </a:ln>
           <a:extLst>
             <a:ext uri="{C572A759-6A51-4108-AA02-DFA0A04FC94B}">
-              <ma14:wrappingTextBoxFlag xmlns="" xmlns:m="http://schemas.openxmlformats.org/officeDocument/2006/math" xmlns:a14="http://schemas.microsoft.com/office/drawing/2010/main" xmlns:ma14="http://schemas.microsoft.com/office/mac/drawingml/2011/main" val="1"/>
+              <ma14:wrappingTextBoxFlag xmlns:ma14="http://schemas.microsoft.com/office/mac/drawingml/2011/main" xmlns:a14="http://schemas.microsoft.com/office/drawing/2010/main" xmlns:m="http://schemas.openxmlformats.org/officeDocument/2006/math" xmlns="" val="1"/>
             </a:ext>
           </a:extLst>
         </p:spPr>
@@ -7528,7 +7661,7 @@
           </a:ln>
           <a:extLst>
             <a:ext uri="{C572A759-6A51-4108-AA02-DFA0A04FC94B}">
-              <ma14:wrappingTextBoxFlag xmlns="" xmlns:m="http://schemas.openxmlformats.org/officeDocument/2006/math" xmlns:a14="http://schemas.microsoft.com/office/drawing/2010/main" xmlns:ma14="http://schemas.microsoft.com/office/mac/drawingml/2011/main" val="1"/>
+              <ma14:wrappingTextBoxFlag xmlns:ma14="http://schemas.microsoft.com/office/mac/drawingml/2011/main" xmlns:a14="http://schemas.microsoft.com/office/drawing/2010/main" xmlns:m="http://schemas.openxmlformats.org/officeDocument/2006/math" xmlns="" val="1"/>
             </a:ext>
           </a:extLst>
         </p:spPr>
@@ -7791,7 +7924,7 @@
             <a:effectLst/>
             <a:extLst>
               <a:ext uri="{C572A759-6A51-4108-AA02-DFA0A04FC94B}">
-                <ma14:wrappingTextBoxFlag xmlns="" xmlns:m="http://schemas.openxmlformats.org/officeDocument/2006/math" xmlns:a14="http://schemas.microsoft.com/office/drawing/2010/main" xmlns:ma14="http://schemas.microsoft.com/office/mac/drawingml/2011/main" val="1"/>
+                <ma14:wrappingTextBoxFlag xmlns:ma14="http://schemas.microsoft.com/office/mac/drawingml/2011/main" xmlns:a14="http://schemas.microsoft.com/office/drawing/2010/main" xmlns:m="http://schemas.openxmlformats.org/officeDocument/2006/math" xmlns="" val="1"/>
               </a:ext>
             </a:extLst>
           </p:spPr>
@@ -7919,7 +8052,7 @@
             <a:effectLst/>
             <a:extLst>
               <a:ext uri="{C572A759-6A51-4108-AA02-DFA0A04FC94B}">
-                <ma14:wrappingTextBoxFlag xmlns="" xmlns:m="http://schemas.openxmlformats.org/officeDocument/2006/math" xmlns:a14="http://schemas.microsoft.com/office/drawing/2010/main" xmlns:ma14="http://schemas.microsoft.com/office/mac/drawingml/2011/main" val="1"/>
+                <ma14:wrappingTextBoxFlag xmlns:ma14="http://schemas.microsoft.com/office/mac/drawingml/2011/main" xmlns:a14="http://schemas.microsoft.com/office/drawing/2010/main" xmlns:m="http://schemas.openxmlformats.org/officeDocument/2006/math" xmlns="" val="1"/>
               </a:ext>
             </a:extLst>
           </p:spPr>
@@ -8181,7 +8314,7 @@
             <a:effectLst/>
             <a:extLst>
               <a:ext uri="{C572A759-6A51-4108-AA02-DFA0A04FC94B}">
-                <ma14:wrappingTextBoxFlag xmlns="" xmlns:m="http://schemas.openxmlformats.org/officeDocument/2006/math" xmlns:a14="http://schemas.microsoft.com/office/drawing/2010/main" xmlns:ma14="http://schemas.microsoft.com/office/mac/drawingml/2011/main" val="1"/>
+                <ma14:wrappingTextBoxFlag xmlns:ma14="http://schemas.microsoft.com/office/mac/drawingml/2011/main" xmlns:a14="http://schemas.microsoft.com/office/drawing/2010/main" xmlns:m="http://schemas.openxmlformats.org/officeDocument/2006/math" xmlns="" val="1"/>
               </a:ext>
             </a:extLst>
           </p:spPr>
@@ -8288,7 +8421,7 @@
               <a:effectLst/>
               <a:extLst>
                 <a:ext uri="{C572A759-6A51-4108-AA02-DFA0A04FC94B}">
-                  <ma14:wrappingTextBoxFlag xmlns="" xmlns:m="http://schemas.openxmlformats.org/officeDocument/2006/math" xmlns:a14="http://schemas.microsoft.com/office/drawing/2010/main" xmlns:ma14="http://schemas.microsoft.com/office/mac/drawingml/2011/main" val="1"/>
+                  <ma14:wrappingTextBoxFlag xmlns:ma14="http://schemas.microsoft.com/office/mac/drawingml/2011/main" xmlns:a14="http://schemas.microsoft.com/office/drawing/2010/main" xmlns:m="http://schemas.openxmlformats.org/officeDocument/2006/math" xmlns="" val="1"/>
                 </a:ext>
               </a:extLst>
             </p:spPr>
@@ -8338,7 +8471,7 @@
               <a:effectLst/>
               <a:extLst>
                 <a:ext uri="{C572A759-6A51-4108-AA02-DFA0A04FC94B}">
-                  <ma14:wrappingTextBoxFlag xmlns="" xmlns:m="http://schemas.openxmlformats.org/officeDocument/2006/math" xmlns:a14="http://schemas.microsoft.com/office/drawing/2010/main" xmlns:ma14="http://schemas.microsoft.com/office/mac/drawingml/2011/main" val="1"/>
+                  <ma14:wrappingTextBoxFlag xmlns:ma14="http://schemas.microsoft.com/office/mac/drawingml/2011/main" xmlns:a14="http://schemas.microsoft.com/office/drawing/2010/main" xmlns:m="http://schemas.openxmlformats.org/officeDocument/2006/math" xmlns="" val="1"/>
                 </a:ext>
               </a:extLst>
             </p:spPr>
@@ -8458,7 +8591,7 @@
               <a:effectLst/>
               <a:extLst>
                 <a:ext uri="{C572A759-6A51-4108-AA02-DFA0A04FC94B}">
-                  <ma14:wrappingTextBoxFlag xmlns="" xmlns:m="http://schemas.openxmlformats.org/officeDocument/2006/math" xmlns:a14="http://schemas.microsoft.com/office/drawing/2010/main" xmlns:ma14="http://schemas.microsoft.com/office/mac/drawingml/2011/main" val="1"/>
+                  <ma14:wrappingTextBoxFlag xmlns:ma14="http://schemas.microsoft.com/office/mac/drawingml/2011/main" xmlns:a14="http://schemas.microsoft.com/office/drawing/2010/main" xmlns:m="http://schemas.openxmlformats.org/officeDocument/2006/math" xmlns="" val="1"/>
                 </a:ext>
               </a:extLst>
             </p:spPr>
@@ -8509,7 +8642,7 @@
             <a:effectLst/>
             <a:extLst>
               <a:ext uri="{C572A759-6A51-4108-AA02-DFA0A04FC94B}">
-                <ma14:wrappingTextBoxFlag xmlns="" xmlns:m="http://schemas.openxmlformats.org/officeDocument/2006/math" xmlns:a14="http://schemas.microsoft.com/office/drawing/2010/main" xmlns:ma14="http://schemas.microsoft.com/office/mac/drawingml/2011/main" val="1"/>
+                <ma14:wrappingTextBoxFlag xmlns:ma14="http://schemas.microsoft.com/office/mac/drawingml/2011/main" xmlns:a14="http://schemas.microsoft.com/office/drawing/2010/main" xmlns:m="http://schemas.openxmlformats.org/officeDocument/2006/math" xmlns="" val="1"/>
               </a:ext>
             </a:extLst>
           </p:spPr>
@@ -8614,7 +8747,7 @@
             <a:effectLst/>
             <a:extLst>
               <a:ext uri="{C572A759-6A51-4108-AA02-DFA0A04FC94B}">
-                <ma14:wrappingTextBoxFlag xmlns="" xmlns:m="http://schemas.openxmlformats.org/officeDocument/2006/math" xmlns:a14="http://schemas.microsoft.com/office/drawing/2010/main" xmlns:ma14="http://schemas.microsoft.com/office/mac/drawingml/2011/main" val="1"/>
+                <ma14:wrappingTextBoxFlag xmlns:ma14="http://schemas.microsoft.com/office/mac/drawingml/2011/main" xmlns:a14="http://schemas.microsoft.com/office/drawing/2010/main" xmlns:m="http://schemas.openxmlformats.org/officeDocument/2006/math" xmlns="" val="1"/>
               </a:ext>
             </a:extLst>
           </p:spPr>
@@ -8722,7 +8855,7 @@
             <a:effectLst/>
             <a:extLst>
               <a:ext uri="{C572A759-6A51-4108-AA02-DFA0A04FC94B}">
-                <ma14:wrappingTextBoxFlag xmlns="" xmlns:m="http://schemas.openxmlformats.org/officeDocument/2006/math" xmlns:a14="http://schemas.microsoft.com/office/drawing/2010/main" xmlns:ma14="http://schemas.microsoft.com/office/mac/drawingml/2011/main" val="1"/>
+                <ma14:wrappingTextBoxFlag xmlns:ma14="http://schemas.microsoft.com/office/mac/drawingml/2011/main" xmlns:a14="http://schemas.microsoft.com/office/drawing/2010/main" xmlns:m="http://schemas.openxmlformats.org/officeDocument/2006/math" xmlns="" val="1"/>
               </a:ext>
             </a:extLst>
           </p:spPr>
@@ -8772,7 +8905,7 @@
             <a:effectLst/>
             <a:extLst>
               <a:ext uri="{C572A759-6A51-4108-AA02-DFA0A04FC94B}">
-                <ma14:wrappingTextBoxFlag xmlns="" xmlns:m="http://schemas.openxmlformats.org/officeDocument/2006/math" xmlns:a14="http://schemas.microsoft.com/office/drawing/2010/main" xmlns:ma14="http://schemas.microsoft.com/office/mac/drawingml/2011/main" val="1"/>
+                <ma14:wrappingTextBoxFlag xmlns:ma14="http://schemas.microsoft.com/office/mac/drawingml/2011/main" xmlns:a14="http://schemas.microsoft.com/office/drawing/2010/main" xmlns:m="http://schemas.openxmlformats.org/officeDocument/2006/math" xmlns="" val="1"/>
               </a:ext>
             </a:extLst>
           </p:spPr>
@@ -8911,7 +9044,7 @@
             <a:effectLst/>
             <a:extLst>
               <a:ext uri="{C572A759-6A51-4108-AA02-DFA0A04FC94B}">
-                <ma14:wrappingTextBoxFlag xmlns="" xmlns:m="http://schemas.openxmlformats.org/officeDocument/2006/math" xmlns:a14="http://schemas.microsoft.com/office/drawing/2010/main" xmlns:ma14="http://schemas.microsoft.com/office/mac/drawingml/2011/main" val="1"/>
+                <ma14:wrappingTextBoxFlag xmlns:ma14="http://schemas.microsoft.com/office/mac/drawingml/2011/main" xmlns:a14="http://schemas.microsoft.com/office/drawing/2010/main" xmlns:m="http://schemas.openxmlformats.org/officeDocument/2006/math" xmlns="" val="1"/>
               </a:ext>
             </a:extLst>
           </p:spPr>
@@ -9066,7 +9199,7 @@
                 <a:effectLst/>
                 <a:extLst>
                   <a:ext uri="{C572A759-6A51-4108-AA02-DFA0A04FC94B}">
-                    <ma14:wrappingTextBoxFlag xmlns="" xmlns:m="http://schemas.openxmlformats.org/officeDocument/2006/math" xmlns:a14="http://schemas.microsoft.com/office/drawing/2010/main" xmlns:ma14="http://schemas.microsoft.com/office/mac/drawingml/2011/main" val="1"/>
+                    <ma14:wrappingTextBoxFlag xmlns:ma14="http://schemas.microsoft.com/office/mac/drawingml/2011/main" xmlns:a14="http://schemas.microsoft.com/office/drawing/2010/main" xmlns:m="http://schemas.openxmlformats.org/officeDocument/2006/math" xmlns="" val="1"/>
                   </a:ext>
                 </a:extLst>
               </p:spPr>
@@ -9151,7 +9284,7 @@
               <a:effectLst/>
               <a:extLst>
                 <a:ext uri="{C572A759-6A51-4108-AA02-DFA0A04FC94B}">
-                  <ma14:wrappingTextBoxFlag xmlns="" xmlns:m="http://schemas.openxmlformats.org/officeDocument/2006/math" xmlns:a14="http://schemas.microsoft.com/office/drawing/2010/main" xmlns:ma14="http://schemas.microsoft.com/office/mac/drawingml/2011/main" val="1"/>
+                  <ma14:wrappingTextBoxFlag xmlns:ma14="http://schemas.microsoft.com/office/mac/drawingml/2011/main" xmlns:a14="http://schemas.microsoft.com/office/drawing/2010/main" xmlns:m="http://schemas.openxmlformats.org/officeDocument/2006/math" xmlns="" val="1"/>
                 </a:ext>
               </a:extLst>
             </p:spPr>
@@ -9572,7 +9705,7 @@
           </a:ln>
           <a:extLst>
             <a:ext uri="{C572A759-6A51-4108-AA02-DFA0A04FC94B}">
-              <ma14:wrappingTextBoxFlag xmlns="" xmlns:m="http://schemas.openxmlformats.org/officeDocument/2006/math" xmlns:a14="http://schemas.microsoft.com/office/drawing/2010/main" xmlns:ma14="http://schemas.microsoft.com/office/mac/drawingml/2011/main" val="1"/>
+              <ma14:wrappingTextBoxFlag xmlns:ma14="http://schemas.microsoft.com/office/mac/drawingml/2011/main" xmlns:a14="http://schemas.microsoft.com/office/drawing/2010/main" xmlns:m="http://schemas.openxmlformats.org/officeDocument/2006/math" xmlns="" val="1"/>
             </a:ext>
           </a:extLst>
         </p:spPr>
@@ -9693,7 +9826,7 @@
               <a:effectLst/>
               <a:extLst>
                 <a:ext uri="{C572A759-6A51-4108-AA02-DFA0A04FC94B}">
-                  <ma14:wrappingTextBoxFlag xmlns="" xmlns:m="http://schemas.openxmlformats.org/officeDocument/2006/math" xmlns:a14="http://schemas.microsoft.com/office/drawing/2010/main" xmlns:ma14="http://schemas.microsoft.com/office/mac/drawingml/2011/main" val="1"/>
+                  <ma14:wrappingTextBoxFlag xmlns:ma14="http://schemas.microsoft.com/office/mac/drawingml/2011/main" xmlns:a14="http://schemas.microsoft.com/office/drawing/2010/main" xmlns:m="http://schemas.openxmlformats.org/officeDocument/2006/math" xmlns="" val="1"/>
                 </a:ext>
               </a:extLst>
             </p:spPr>
@@ -9741,7 +9874,7 @@
             <a:effectLst/>
             <a:extLst>
               <a:ext uri="{C572A759-6A51-4108-AA02-DFA0A04FC94B}">
-                <ma14:wrappingTextBoxFlag xmlns="" xmlns:m="http://schemas.openxmlformats.org/officeDocument/2006/math" xmlns:a14="http://schemas.microsoft.com/office/drawing/2010/main" xmlns:ma14="http://schemas.microsoft.com/office/mac/drawingml/2011/main" val="1"/>
+                <ma14:wrappingTextBoxFlag xmlns:ma14="http://schemas.microsoft.com/office/mac/drawingml/2011/main" xmlns:a14="http://schemas.microsoft.com/office/drawing/2010/main" xmlns:m="http://schemas.openxmlformats.org/officeDocument/2006/math" xmlns="" val="1"/>
               </a:ext>
             </a:extLst>
           </p:spPr>
@@ -9860,7 +9993,7 @@
               <a:effectLst/>
               <a:extLst>
                 <a:ext uri="{C572A759-6A51-4108-AA02-DFA0A04FC94B}">
-                  <ma14:wrappingTextBoxFlag xmlns="" xmlns:m="http://schemas.openxmlformats.org/officeDocument/2006/math" xmlns:a14="http://schemas.microsoft.com/office/drawing/2010/main" xmlns:ma14="http://schemas.microsoft.com/office/mac/drawingml/2011/main" val="1"/>
+                  <ma14:wrappingTextBoxFlag xmlns:ma14="http://schemas.microsoft.com/office/mac/drawingml/2011/main" xmlns:a14="http://schemas.microsoft.com/office/drawing/2010/main" xmlns:m="http://schemas.openxmlformats.org/officeDocument/2006/math" xmlns="" val="1"/>
                 </a:ext>
               </a:extLst>
             </p:spPr>
@@ -9908,7 +10041,7 @@
             <a:effectLst/>
             <a:extLst>
               <a:ext uri="{C572A759-6A51-4108-AA02-DFA0A04FC94B}">
-                <ma14:wrappingTextBoxFlag xmlns="" xmlns:m="http://schemas.openxmlformats.org/officeDocument/2006/math" xmlns:a14="http://schemas.microsoft.com/office/drawing/2010/main" xmlns:ma14="http://schemas.microsoft.com/office/mac/drawingml/2011/main" val="1"/>
+                <ma14:wrappingTextBoxFlag xmlns:ma14="http://schemas.microsoft.com/office/mac/drawingml/2011/main" xmlns:a14="http://schemas.microsoft.com/office/drawing/2010/main" xmlns:m="http://schemas.openxmlformats.org/officeDocument/2006/math" xmlns="" val="1"/>
               </a:ext>
             </a:extLst>
           </p:spPr>
@@ -10027,7 +10160,7 @@
               <a:effectLst/>
               <a:extLst>
                 <a:ext uri="{C572A759-6A51-4108-AA02-DFA0A04FC94B}">
-                  <ma14:wrappingTextBoxFlag xmlns="" xmlns:m="http://schemas.openxmlformats.org/officeDocument/2006/math" xmlns:a14="http://schemas.microsoft.com/office/drawing/2010/main" xmlns:ma14="http://schemas.microsoft.com/office/mac/drawingml/2011/main" val="1"/>
+                  <ma14:wrappingTextBoxFlag xmlns:ma14="http://schemas.microsoft.com/office/mac/drawingml/2011/main" xmlns:a14="http://schemas.microsoft.com/office/drawing/2010/main" xmlns:m="http://schemas.openxmlformats.org/officeDocument/2006/math" xmlns="" val="1"/>
                 </a:ext>
               </a:extLst>
             </p:spPr>
@@ -10075,7 +10208,7 @@
             <a:effectLst/>
             <a:extLst>
               <a:ext uri="{C572A759-6A51-4108-AA02-DFA0A04FC94B}">
-                <ma14:wrappingTextBoxFlag xmlns="" xmlns:m="http://schemas.openxmlformats.org/officeDocument/2006/math" xmlns:a14="http://schemas.microsoft.com/office/drawing/2010/main" xmlns:ma14="http://schemas.microsoft.com/office/mac/drawingml/2011/main" val="1"/>
+                <ma14:wrappingTextBoxFlag xmlns:ma14="http://schemas.microsoft.com/office/mac/drawingml/2011/main" xmlns:a14="http://schemas.microsoft.com/office/drawing/2010/main" xmlns:m="http://schemas.openxmlformats.org/officeDocument/2006/math" xmlns="" val="1"/>
               </a:ext>
             </a:extLst>
           </p:spPr>
@@ -10120,7 +10253,7 @@
           </a:ln>
           <a:extLst>
             <a:ext uri="{C572A759-6A51-4108-AA02-DFA0A04FC94B}">
-              <ma14:wrappingTextBoxFlag xmlns="" xmlns:m="http://schemas.openxmlformats.org/officeDocument/2006/math" xmlns:a14="http://schemas.microsoft.com/office/drawing/2010/main" xmlns:ma14="http://schemas.microsoft.com/office/mac/drawingml/2011/main" val="1"/>
+              <ma14:wrappingTextBoxFlag xmlns:ma14="http://schemas.microsoft.com/office/mac/drawingml/2011/main" xmlns:a14="http://schemas.microsoft.com/office/drawing/2010/main" xmlns:m="http://schemas.openxmlformats.org/officeDocument/2006/math" xmlns="" val="1"/>
             </a:ext>
           </a:extLst>
         </p:spPr>
@@ -10164,7 +10297,7 @@
           </a:ln>
           <a:extLst>
             <a:ext uri="{C572A759-6A51-4108-AA02-DFA0A04FC94B}">
-              <ma14:wrappingTextBoxFlag xmlns="" xmlns:m="http://schemas.openxmlformats.org/officeDocument/2006/math" xmlns:a14="http://schemas.microsoft.com/office/drawing/2010/main" xmlns:ma14="http://schemas.microsoft.com/office/mac/drawingml/2011/main" val="1"/>
+              <ma14:wrappingTextBoxFlag xmlns:ma14="http://schemas.microsoft.com/office/mac/drawingml/2011/main" xmlns:a14="http://schemas.microsoft.com/office/drawing/2010/main" xmlns:m="http://schemas.openxmlformats.org/officeDocument/2006/math" xmlns="" val="1"/>
             </a:ext>
           </a:extLst>
         </p:spPr>
@@ -10208,7 +10341,7 @@
           </a:ln>
           <a:extLst>
             <a:ext uri="{C572A759-6A51-4108-AA02-DFA0A04FC94B}">
-              <ma14:wrappingTextBoxFlag xmlns="" xmlns:m="http://schemas.openxmlformats.org/officeDocument/2006/math" xmlns:a14="http://schemas.microsoft.com/office/drawing/2010/main" xmlns:ma14="http://schemas.microsoft.com/office/mac/drawingml/2011/main" val="1"/>
+              <ma14:wrappingTextBoxFlag xmlns:ma14="http://schemas.microsoft.com/office/mac/drawingml/2011/main" xmlns:a14="http://schemas.microsoft.com/office/drawing/2010/main" xmlns:m="http://schemas.openxmlformats.org/officeDocument/2006/math" xmlns="" val="1"/>
             </a:ext>
           </a:extLst>
         </p:spPr>
@@ -10562,7 +10695,7 @@
             <a:effectLst/>
             <a:extLst>
               <a:ext uri="{C572A759-6A51-4108-AA02-DFA0A04FC94B}">
-                <ma14:wrappingTextBoxFlag xmlns="" xmlns:m="http://schemas.openxmlformats.org/officeDocument/2006/math" xmlns:a14="http://schemas.microsoft.com/office/drawing/2010/main" xmlns:ma14="http://schemas.microsoft.com/office/mac/drawingml/2011/main" val="1"/>
+                <ma14:wrappingTextBoxFlag xmlns:ma14="http://schemas.microsoft.com/office/mac/drawingml/2011/main" xmlns:a14="http://schemas.microsoft.com/office/drawing/2010/main" xmlns:m="http://schemas.openxmlformats.org/officeDocument/2006/math" xmlns="" val="1"/>
               </a:ext>
             </a:extLst>
           </p:spPr>
@@ -10857,7 +10990,7 @@
                 <a:effectLst/>
                 <a:extLst>
                   <a:ext uri="{C572A759-6A51-4108-AA02-DFA0A04FC94B}">
-                    <ma14:wrappingTextBoxFlag xmlns="" xmlns:m="http://schemas.openxmlformats.org/officeDocument/2006/math" xmlns:a14="http://schemas.microsoft.com/office/drawing/2010/main" xmlns:ma14="http://schemas.microsoft.com/office/mac/drawingml/2011/main" val="1"/>
+                    <ma14:wrappingTextBoxFlag xmlns:ma14="http://schemas.microsoft.com/office/mac/drawingml/2011/main" xmlns:a14="http://schemas.microsoft.com/office/drawing/2010/main" xmlns:m="http://schemas.openxmlformats.org/officeDocument/2006/math" xmlns="" val="1"/>
                   </a:ext>
                 </a:extLst>
               </p:spPr>
@@ -11728,7 +11861,7 @@
                 <a:effectLst/>
                 <a:extLst>
                   <a:ext uri="{C572A759-6A51-4108-AA02-DFA0A04FC94B}">
-                    <ma14:wrappingTextBoxFlag xmlns="" xmlns:m="http://schemas.openxmlformats.org/officeDocument/2006/math" xmlns:a14="http://schemas.microsoft.com/office/drawing/2010/main" xmlns:ma14="http://schemas.microsoft.com/office/mac/drawingml/2011/main" val="1"/>
+                    <ma14:wrappingTextBoxFlag xmlns:ma14="http://schemas.microsoft.com/office/mac/drawingml/2011/main" xmlns:a14="http://schemas.microsoft.com/office/drawing/2010/main" xmlns:m="http://schemas.openxmlformats.org/officeDocument/2006/math" xmlns="" val="1"/>
                   </a:ext>
                 </a:extLst>
               </p:spPr>
@@ -11850,7 +11983,7 @@
             <a:effectLst/>
             <a:extLst>
               <a:ext uri="{C572A759-6A51-4108-AA02-DFA0A04FC94B}">
-                <ma14:wrappingTextBoxFlag xmlns="" xmlns:m="http://schemas.openxmlformats.org/officeDocument/2006/math" xmlns:a14="http://schemas.microsoft.com/office/drawing/2010/main" xmlns:ma14="http://schemas.microsoft.com/office/mac/drawingml/2011/main" val="1"/>
+                <ma14:wrappingTextBoxFlag xmlns:ma14="http://schemas.microsoft.com/office/mac/drawingml/2011/main" xmlns:a14="http://schemas.microsoft.com/office/drawing/2010/main" xmlns:m="http://schemas.openxmlformats.org/officeDocument/2006/math" xmlns="" val="1"/>
               </a:ext>
             </a:extLst>
           </p:spPr>
@@ -12028,7 +12161,7 @@
               <a:effectLst/>
               <a:extLst>
                 <a:ext uri="{C572A759-6A51-4108-AA02-DFA0A04FC94B}">
-                  <ma14:wrappingTextBoxFlag xmlns="" xmlns:m="http://schemas.openxmlformats.org/officeDocument/2006/math" xmlns:a14="http://schemas.microsoft.com/office/drawing/2010/main" xmlns:ma14="http://schemas.microsoft.com/office/mac/drawingml/2011/main" val="1"/>
+                  <ma14:wrappingTextBoxFlag xmlns:ma14="http://schemas.microsoft.com/office/mac/drawingml/2011/main" xmlns:a14="http://schemas.microsoft.com/office/drawing/2010/main" xmlns:m="http://schemas.openxmlformats.org/officeDocument/2006/math" xmlns="" val="1"/>
                 </a:ext>
               </a:extLst>
             </p:spPr>
@@ -12163,7 +12296,7 @@
               <a:effectLst/>
               <a:extLst>
                 <a:ext uri="{C572A759-6A51-4108-AA02-DFA0A04FC94B}">
-                  <ma14:wrappingTextBoxFlag xmlns="" xmlns:m="http://schemas.openxmlformats.org/officeDocument/2006/math" xmlns:a14="http://schemas.microsoft.com/office/drawing/2010/main" xmlns:ma14="http://schemas.microsoft.com/office/mac/drawingml/2011/main" val="1"/>
+                  <ma14:wrappingTextBoxFlag xmlns:ma14="http://schemas.microsoft.com/office/mac/drawingml/2011/main" xmlns:a14="http://schemas.microsoft.com/office/drawing/2010/main" xmlns:m="http://schemas.openxmlformats.org/officeDocument/2006/math" xmlns="" val="1"/>
                 </a:ext>
               </a:extLst>
             </p:spPr>
@@ -12310,7 +12443,7 @@
               <a:effectLst/>
               <a:extLst>
                 <a:ext uri="{C572A759-6A51-4108-AA02-DFA0A04FC94B}">
-                  <ma14:wrappingTextBoxFlag xmlns="" xmlns:m="http://schemas.openxmlformats.org/officeDocument/2006/math" xmlns:a14="http://schemas.microsoft.com/office/drawing/2010/main" xmlns:ma14="http://schemas.microsoft.com/office/mac/drawingml/2011/main" val="1"/>
+                  <ma14:wrappingTextBoxFlag xmlns:ma14="http://schemas.microsoft.com/office/mac/drawingml/2011/main" xmlns:a14="http://schemas.microsoft.com/office/drawing/2010/main" xmlns:m="http://schemas.openxmlformats.org/officeDocument/2006/math" xmlns="" val="1"/>
                 </a:ext>
               </a:extLst>
             </p:spPr>

--- a/docs/FootballPredictorDemoDay20260803.pptx
+++ b/docs/FootballPredictorDemoDay20260803.pptx
@@ -1,28 +1,28 @@
 
 <file path=ppt/presentation.xml><?xml version="1.0" encoding="utf-8"?>
-<p:presentation xmlns:a="http://schemas.openxmlformats.org/drawingml/2006/main" xmlns:r="http://schemas.openxmlformats.org/officeDocument/2006/relationships" xmlns:p="http://schemas.openxmlformats.org/presentationml/2006/main" xmlns:m="http://schemas.openxmlformats.org/officeDocument/2006/math" xmlns:a14="http://schemas.microsoft.com/office/drawing/2010/main">
+<p:presentation xmlns:a="http://schemas.openxmlformats.org/drawingml/2006/main" xmlns:r="http://schemas.openxmlformats.org/officeDocument/2006/relationships" xmlns:p="http://schemas.openxmlformats.org/presentationml/2006/main">
   <p:sldMasterIdLst>
-    <p:sldMasterId id="2147483648" r:id="rId5"/>
+    <p:sldMasterId id="2147483648" r:id="rId1"/>
   </p:sldMasterIdLst>
   <p:notesMasterIdLst>
-    <p:notesMasterId r:id="rId7"/>
+    <p:notesMasterId r:id="rId15"/>
   </p:notesMasterIdLst>
   <p:sldIdLst>
-    <p:sldId id="256" r:id="rId8"/>
-    <p:sldId id="257" r:id="rId9"/>
-    <p:sldId id="258" r:id="rId10"/>
-    <p:sldId id="259" r:id="rId11"/>
-    <p:sldId id="260" r:id="rId12"/>
-    <p:sldId id="261" r:id="rId13"/>
-    <p:sldId id="262" r:id="rId14"/>
-    <p:sldId id="263" r:id="rId15"/>
-    <p:sldId id="264" r:id="rId16"/>
-    <p:sldId id="265" r:id="rId17"/>
-    <p:sldId id="266" r:id="rId18"/>
-    <p:sldId id="267" r:id="rId19"/>
-    <p:sldId id="268" r:id="rId20"/>
+    <p:sldId id="256" r:id="rId2"/>
+    <p:sldId id="257" r:id="rId3"/>
+    <p:sldId id="258" r:id="rId4"/>
+    <p:sldId id="259" r:id="rId5"/>
+    <p:sldId id="260" r:id="rId6"/>
+    <p:sldId id="261" r:id="rId7"/>
+    <p:sldId id="262" r:id="rId8"/>
+    <p:sldId id="263" r:id="rId9"/>
+    <p:sldId id="264" r:id="rId10"/>
+    <p:sldId id="265" r:id="rId11"/>
+    <p:sldId id="266" r:id="rId12"/>
+    <p:sldId id="267" r:id="rId13"/>
+    <p:sldId id="268" r:id="rId14"/>
   </p:sldIdLst>
-  <p:sldSz cx="9144000" cy="5143500"/>
+  <p:sldSz cx="9144000" cy="5143500" type="screen16x9"/>
   <p:notesSz cx="6858000" cy="9144000"/>
   <p:defaultTextStyle>
     <a:defPPr marL="0" marR="0" indent="0" algn="l" defTabSz="914400" rtl="0" fontAlgn="auto" latinLnBrk="1" hangingPunct="0">
@@ -40,7 +40,7 @@
       <a:buFontTx/>
       <a:buNone/>
       <a:tabLst/>
-      <a:defRPr b="0" baseline="0" cap="none" i="0" spc="0" strike="noStrike" sz="1800" u="none" kumimoji="0" normalizeH="0">
+      <a:defRPr kumimoji="0" sz="1800" b="0" i="0" u="none" strike="noStrike" cap="none" spc="0" normalizeH="0" baseline="0">
         <a:ln>
           <a:noFill/>
         </a:ln>
@@ -66,7 +66,7 @@
       <a:buFontTx/>
       <a:buNone/>
       <a:tabLst/>
-      <a:defRPr b="0" baseline="0" cap="none" i="0" spc="0" strike="noStrike" sz="1400" u="none" kumimoji="0" normalizeH="0">
+      <a:defRPr kumimoji="0" sz="1400" b="0" i="0" u="none" strike="noStrike" cap="none" spc="0" normalizeH="0" baseline="0">
         <a:ln>
           <a:noFill/>
         </a:ln>
@@ -96,7 +96,7 @@
       <a:buFontTx/>
       <a:buNone/>
       <a:tabLst/>
-      <a:defRPr b="0" baseline="0" cap="none" i="0" spc="0" strike="noStrike" sz="1400" u="none" kumimoji="0" normalizeH="0">
+      <a:defRPr kumimoji="0" sz="1400" b="0" i="0" u="none" strike="noStrike" cap="none" spc="0" normalizeH="0" baseline="0">
         <a:ln>
           <a:noFill/>
         </a:ln>
@@ -126,7 +126,7 @@
       <a:buFontTx/>
       <a:buNone/>
       <a:tabLst/>
-      <a:defRPr b="0" baseline="0" cap="none" i="0" spc="0" strike="noStrike" sz="1400" u="none" kumimoji="0" normalizeH="0">
+      <a:defRPr kumimoji="0" sz="1400" b="0" i="0" u="none" strike="noStrike" cap="none" spc="0" normalizeH="0" baseline="0">
         <a:ln>
           <a:noFill/>
         </a:ln>
@@ -156,7 +156,7 @@
       <a:buFontTx/>
       <a:buNone/>
       <a:tabLst/>
-      <a:defRPr b="0" baseline="0" cap="none" i="0" spc="0" strike="noStrike" sz="1400" u="none" kumimoji="0" normalizeH="0">
+      <a:defRPr kumimoji="0" sz="1400" b="0" i="0" u="none" strike="noStrike" cap="none" spc="0" normalizeH="0" baseline="0">
         <a:ln>
           <a:noFill/>
         </a:ln>
@@ -186,7 +186,7 @@
       <a:buFontTx/>
       <a:buNone/>
       <a:tabLst/>
-      <a:defRPr b="0" baseline="0" cap="none" i="0" spc="0" strike="noStrike" sz="1400" u="none" kumimoji="0" normalizeH="0">
+      <a:defRPr kumimoji="0" sz="1400" b="0" i="0" u="none" strike="noStrike" cap="none" spc="0" normalizeH="0" baseline="0">
         <a:ln>
           <a:noFill/>
         </a:ln>
@@ -216,7 +216,7 @@
       <a:buFontTx/>
       <a:buNone/>
       <a:tabLst/>
-      <a:defRPr b="0" baseline="0" cap="none" i="0" spc="0" strike="noStrike" sz="1400" u="none" kumimoji="0" normalizeH="0">
+      <a:defRPr kumimoji="0" sz="1400" b="0" i="0" u="none" strike="noStrike" cap="none" spc="0" normalizeH="0" baseline="0">
         <a:ln>
           <a:noFill/>
         </a:ln>
@@ -246,7 +246,7 @@
       <a:buFontTx/>
       <a:buNone/>
       <a:tabLst/>
-      <a:defRPr b="0" baseline="0" cap="none" i="0" spc="0" strike="noStrike" sz="1400" u="none" kumimoji="0" normalizeH="0">
+      <a:defRPr kumimoji="0" sz="1400" b="0" i="0" u="none" strike="noStrike" cap="none" spc="0" normalizeH="0" baseline="0">
         <a:ln>
           <a:noFill/>
         </a:ln>
@@ -276,7 +276,7 @@
       <a:buFontTx/>
       <a:buNone/>
       <a:tabLst/>
-      <a:defRPr b="0" baseline="0" cap="none" i="0" spc="0" strike="noStrike" sz="1400" u="none" kumimoji="0" normalizeH="0">
+      <a:defRPr kumimoji="0" sz="1400" b="0" i="0" u="none" strike="noStrike" cap="none" spc="0" normalizeH="0" baseline="0">
         <a:ln>
           <a:noFill/>
         </a:ln>
@@ -306,7 +306,7 @@
       <a:buFontTx/>
       <a:buNone/>
       <a:tabLst/>
-      <a:defRPr b="0" baseline="0" cap="none" i="0" spc="0" strike="noStrike" sz="1400" u="none" kumimoji="0" normalizeH="0">
+      <a:defRPr kumimoji="0" sz="1400" b="0" i="0" u="none" strike="noStrike" cap="none" spc="0" normalizeH="0" baseline="0">
         <a:ln>
           <a:noFill/>
         </a:ln>
@@ -325,13 +325,14 @@
 </p:presentation>
 </file>
 
-<file path=ppt/commentAuthors.xml><?xml version="1.0" encoding="utf-8"?>
-<p:cmAuthorLst xmlns:a="http://schemas.openxmlformats.org/drawingml/2006/main" xmlns:r="http://schemas.openxmlformats.org/officeDocument/2006/relationships" xmlns:p="http://schemas.openxmlformats.org/presentationml/2006/main" xmlns:m="http://schemas.openxmlformats.org/officeDocument/2006/math" xmlns:a14="http://schemas.microsoft.com/office/drawing/2010/main"/>
-</file>
-
 <file path=ppt/notesMasters/notesMaster1.xml><?xml version="1.0" encoding="utf-8"?>
-<p:notesMaster xmlns:a="http://schemas.openxmlformats.org/drawingml/2006/main" xmlns:r="http://schemas.openxmlformats.org/officeDocument/2006/relationships" xmlns:p="http://schemas.openxmlformats.org/presentationml/2006/main" xmlns:m="http://schemas.openxmlformats.org/officeDocument/2006/math" xmlns:a14="http://schemas.microsoft.com/office/drawing/2010/main">
+<p:notesMaster xmlns:a="http://schemas.openxmlformats.org/drawingml/2006/main" xmlns:r="http://schemas.openxmlformats.org/officeDocument/2006/relationships" xmlns:p="http://schemas.openxmlformats.org/presentationml/2006/main">
   <p:cSld>
+    <p:bg>
+      <p:bgRef idx="1001">
+        <a:schemeClr val="bg1"/>
+      </p:bgRef>
+    </p:bg>
     <p:spTree>
       <p:nvGrpSpPr>
         <p:cNvPr id="1" name=""/>
@@ -349,7 +350,9 @@
       <p:sp>
         <p:nvSpPr>
           <p:cNvPr id="106" name="Shape 106"/>
-          <p:cNvSpPr/>
+          <p:cNvSpPr>
+            <a:spLocks noGrp="1" noRot="1" noChangeAspect="1"/>
+          </p:cNvSpPr>
           <p:nvPr>
             <p:ph type="sldImg"/>
           </p:nvPr>
@@ -367,14 +370,16 @@
           <a:bodyPr/>
           <a:lstStyle/>
           <a:p>
-            <a:pPr/>
+            <a:endParaRPr/>
           </a:p>
         </p:txBody>
       </p:sp>
       <p:sp>
         <p:nvSpPr>
           <p:cNvPr id="107" name="Shape 107"/>
-          <p:cNvSpPr/>
+          <p:cNvSpPr>
+            <a:spLocks noGrp="1"/>
+          </p:cNvSpPr>
           <p:nvPr>
             <p:ph type="body" sz="quarter" idx="1"/>
           </p:nvPr>
@@ -392,7 +397,7 @@
           <a:bodyPr/>
           <a:lstStyle/>
           <a:p>
-            <a:pPr/>
+            <a:endParaRPr/>
           </a:p>
         </p:txBody>
       </p:sp>
@@ -477,7 +482,7 @@
 </file>
 
 <file path=ppt/slideLayouts/slideLayout1.xml><?xml version="1.0" encoding="utf-8"?>
-<p:sldLayout xmlns:a="http://schemas.openxmlformats.org/drawingml/2006/main" xmlns:r="http://schemas.openxmlformats.org/officeDocument/2006/relationships" xmlns:p="http://schemas.openxmlformats.org/presentationml/2006/main" xmlns:m="http://schemas.openxmlformats.org/officeDocument/2006/math" xmlns:a14="http://schemas.microsoft.com/office/drawing/2010/main" type="tx" showMasterSp="1" showMasterPhAnim="1">
+<p:sldLayout xmlns:a="http://schemas.openxmlformats.org/drawingml/2006/main" xmlns:r="http://schemas.openxmlformats.org/officeDocument/2006/relationships" xmlns:p="http://schemas.openxmlformats.org/presentationml/2006/main" type="tx">
   <p:cSld name="SECTION_HEADER">
     <p:spTree>
       <p:nvGrpSpPr>
@@ -496,7 +501,9 @@
       <p:sp>
         <p:nvSpPr>
           <p:cNvPr id="11" name="Title Text"/>
-          <p:cNvSpPr txBox="1"/>
+          <p:cNvSpPr txBox="1">
+            <a:spLocks noGrp="1"/>
+          </p:cNvSpPr>
           <p:nvPr>
             <p:ph type="title"/>
           </p:nvPr>
@@ -518,7 +525,6 @@
             </a:lvl1pPr>
           </a:lstStyle>
           <a:p>
-            <a:pPr/>
             <a:r>
               <a:t>Title Text</a:t>
             </a:r>
@@ -528,7 +534,9 @@
       <p:sp>
         <p:nvSpPr>
           <p:cNvPr id="12" name="Slide Number"/>
-          <p:cNvSpPr txBox="1"/>
+          <p:cNvSpPr txBox="1">
+            <a:spLocks noGrp="1"/>
+          </p:cNvSpPr>
           <p:nvPr>
             <p:ph type="sldNum" sz="quarter" idx="2"/>
           </p:nvPr>
@@ -542,8 +550,10 @@
           <a:bodyPr/>
           <a:lstStyle/>
           <a:p>
-            <a:pPr/>
-            <a:fld id="{86CB4B4D-7CA3-9044-876B-883B54F8677D}" type="slidenum"/>
+            <a:fld id="{86CB4B4D-7CA3-9044-876B-883B54F8677D}" type="slidenum">
+              <a:t>‹N°›</a:t>
+            </a:fld>
+            <a:endParaRPr/>
           </a:p>
         </p:txBody>
       </p:sp>
@@ -552,12 +562,12 @@
   <p:clrMapOvr>
     <a:masterClrMapping/>
   </p:clrMapOvr>
-  <p:transition xmlns:p14="http://schemas.microsoft.com/office/powerpoint/2010/main" spd="med" advClick="1"/>
+  <p:transition spd="med"/>
 </p:sldLayout>
 </file>
 
 <file path=ppt/slideLayouts/slideLayout10.xml><?xml version="1.0" encoding="utf-8"?>
-<p:sldLayout xmlns:a="http://schemas.openxmlformats.org/drawingml/2006/main" xmlns:r="http://schemas.openxmlformats.org/officeDocument/2006/relationships" xmlns:p="http://schemas.openxmlformats.org/presentationml/2006/main" xmlns:m="http://schemas.openxmlformats.org/officeDocument/2006/math" xmlns:a14="http://schemas.microsoft.com/office/drawing/2010/main" type="tx" showMasterSp="1" showMasterPhAnim="1">
+<p:sldLayout xmlns:a="http://schemas.openxmlformats.org/drawingml/2006/main" xmlns:r="http://schemas.openxmlformats.org/officeDocument/2006/relationships" xmlns:p="http://schemas.openxmlformats.org/presentationml/2006/main" type="tx">
   <p:cSld name="BLANK">
     <p:spTree>
       <p:nvGrpSpPr>
@@ -576,7 +586,9 @@
       <p:sp>
         <p:nvSpPr>
           <p:cNvPr id="91" name="Slide Number"/>
-          <p:cNvSpPr txBox="1"/>
+          <p:cNvSpPr txBox="1">
+            <a:spLocks noGrp="1"/>
+          </p:cNvSpPr>
           <p:nvPr>
             <p:ph type="sldNum" sz="quarter" idx="2"/>
           </p:nvPr>
@@ -590,8 +602,10 @@
           <a:bodyPr/>
           <a:lstStyle/>
           <a:p>
-            <a:pPr/>
-            <a:fld id="{86CB4B4D-7CA3-9044-876B-883B54F8677D}" type="slidenum"/>
+            <a:fld id="{86CB4B4D-7CA3-9044-876B-883B54F8677D}" type="slidenum">
+              <a:t>‹N°›</a:t>
+            </a:fld>
+            <a:endParaRPr/>
           </a:p>
         </p:txBody>
       </p:sp>
@@ -600,12 +614,12 @@
   <p:clrMapOvr>
     <a:masterClrMapping/>
   </p:clrMapOvr>
-  <p:transition xmlns:p14="http://schemas.microsoft.com/office/powerpoint/2010/main" spd="med" advClick="1"/>
+  <p:transition spd="med"/>
 </p:sldLayout>
 </file>
 
 <file path=ppt/slideLayouts/slideLayout11.xml><?xml version="1.0" encoding="utf-8"?>
-<p:sldLayout xmlns:a="http://schemas.openxmlformats.org/drawingml/2006/main" xmlns:r="http://schemas.openxmlformats.org/officeDocument/2006/relationships" xmlns:p="http://schemas.openxmlformats.org/presentationml/2006/main" xmlns:m="http://schemas.openxmlformats.org/officeDocument/2006/math" xmlns:a14="http://schemas.microsoft.com/office/drawing/2010/main" type="tx" showMasterSp="1" showMasterPhAnim="1">
+<p:sldLayout xmlns:a="http://schemas.openxmlformats.org/drawingml/2006/main" xmlns:r="http://schemas.openxmlformats.org/officeDocument/2006/relationships" xmlns:p="http://schemas.openxmlformats.org/presentationml/2006/main" type="tx">
   <p:cSld name="TITLE_AND_BODY">
     <p:spTree>
       <p:nvGrpSpPr>
@@ -624,7 +638,9 @@
       <p:sp>
         <p:nvSpPr>
           <p:cNvPr id="98" name="Title Text"/>
-          <p:cNvSpPr txBox="1"/>
+          <p:cNvSpPr txBox="1">
+            <a:spLocks noGrp="1"/>
+          </p:cNvSpPr>
           <p:nvPr>
             <p:ph type="title"/>
           </p:nvPr>
@@ -638,7 +654,6 @@
           <a:bodyPr/>
           <a:lstStyle/>
           <a:p>
-            <a:pPr/>
             <a:r>
               <a:t>Title Text</a:t>
             </a:r>
@@ -648,7 +663,9 @@
       <p:sp>
         <p:nvSpPr>
           <p:cNvPr id="99" name="Body Level One…"/>
-          <p:cNvSpPr txBox="1"/>
+          <p:cNvSpPr txBox="1">
+            <a:spLocks noGrp="1"/>
+          </p:cNvSpPr>
           <p:nvPr>
             <p:ph type="body" idx="1"/>
           </p:nvPr>
@@ -662,7 +679,6 @@
           <a:bodyPr/>
           <a:lstStyle/>
           <a:p>
-            <a:pPr/>
             <a:r>
               <a:t>Body Level One</a:t>
             </a:r>
@@ -696,7 +712,9 @@
       <p:sp>
         <p:nvSpPr>
           <p:cNvPr id="100" name="Slide Number"/>
-          <p:cNvSpPr txBox="1"/>
+          <p:cNvSpPr txBox="1">
+            <a:spLocks noGrp="1"/>
+          </p:cNvSpPr>
           <p:nvPr>
             <p:ph type="sldNum" sz="quarter" idx="2"/>
           </p:nvPr>
@@ -714,8 +732,10 @@
           <a:bodyPr/>
           <a:lstStyle/>
           <a:p>
-            <a:pPr/>
-            <a:fld id="{86CB4B4D-7CA3-9044-876B-883B54F8677D}" type="slidenum"/>
+            <a:fld id="{86CB4B4D-7CA3-9044-876B-883B54F8677D}" type="slidenum">
+              <a:t>‹N°›</a:t>
+            </a:fld>
+            <a:endParaRPr/>
           </a:p>
         </p:txBody>
       </p:sp>
@@ -724,12 +744,12 @@
   <p:clrMapOvr>
     <a:masterClrMapping/>
   </p:clrMapOvr>
-  <p:transition xmlns:p14="http://schemas.microsoft.com/office/powerpoint/2010/main" spd="med" advClick="1"/>
+  <p:transition spd="med"/>
 </p:sldLayout>
 </file>
 
 <file path=ppt/slideLayouts/slideLayout2.xml><?xml version="1.0" encoding="utf-8"?>
-<p:sldLayout xmlns:a="http://schemas.openxmlformats.org/drawingml/2006/main" xmlns:r="http://schemas.openxmlformats.org/officeDocument/2006/relationships" xmlns:p="http://schemas.openxmlformats.org/presentationml/2006/main" xmlns:m="http://schemas.openxmlformats.org/officeDocument/2006/math" xmlns:a14="http://schemas.microsoft.com/office/drawing/2010/main" type="tx" showMasterSp="1" showMasterPhAnim="1">
+<p:sldLayout xmlns:a="http://schemas.openxmlformats.org/drawingml/2006/main" xmlns:r="http://schemas.openxmlformats.org/officeDocument/2006/relationships" xmlns:p="http://schemas.openxmlformats.org/presentationml/2006/main" type="tx">
   <p:cSld name="1_TITLE_AND_BODY">
     <p:spTree>
       <p:nvGrpSpPr>
@@ -748,7 +768,9 @@
       <p:sp>
         <p:nvSpPr>
           <p:cNvPr id="19" name="Title Text"/>
-          <p:cNvSpPr txBox="1"/>
+          <p:cNvSpPr txBox="1">
+            <a:spLocks noGrp="1"/>
+          </p:cNvSpPr>
           <p:nvPr>
             <p:ph type="title"/>
           </p:nvPr>
@@ -762,7 +784,6 @@
           <a:bodyPr/>
           <a:lstStyle/>
           <a:p>
-            <a:pPr/>
             <a:r>
               <a:t>Title Text</a:t>
             </a:r>
@@ -772,7 +793,9 @@
       <p:sp>
         <p:nvSpPr>
           <p:cNvPr id="20" name="Body Level One…"/>
-          <p:cNvSpPr txBox="1"/>
+          <p:cNvSpPr txBox="1">
+            <a:spLocks noGrp="1"/>
+          </p:cNvSpPr>
           <p:nvPr>
             <p:ph type="body" idx="1"/>
           </p:nvPr>
@@ -786,7 +809,6 @@
           <a:bodyPr/>
           <a:lstStyle/>
           <a:p>
-            <a:pPr/>
             <a:r>
               <a:t>Body Level One</a:t>
             </a:r>
@@ -820,7 +842,9 @@
       <p:sp>
         <p:nvSpPr>
           <p:cNvPr id="21" name="Slide Number"/>
-          <p:cNvSpPr txBox="1"/>
+          <p:cNvSpPr txBox="1">
+            <a:spLocks noGrp="1"/>
+          </p:cNvSpPr>
           <p:nvPr>
             <p:ph type="sldNum" sz="quarter" idx="2"/>
           </p:nvPr>
@@ -834,8 +858,10 @@
           <a:bodyPr/>
           <a:lstStyle/>
           <a:p>
-            <a:pPr/>
-            <a:fld id="{86CB4B4D-7CA3-9044-876B-883B54F8677D}" type="slidenum"/>
+            <a:fld id="{86CB4B4D-7CA3-9044-876B-883B54F8677D}" type="slidenum">
+              <a:t>‹N°›</a:t>
+            </a:fld>
+            <a:endParaRPr/>
           </a:p>
         </p:txBody>
       </p:sp>
@@ -844,12 +870,12 @@
   <p:clrMapOvr>
     <a:masterClrMapping/>
   </p:clrMapOvr>
-  <p:transition xmlns:p14="http://schemas.microsoft.com/office/powerpoint/2010/main" spd="med" advClick="1"/>
+  <p:transition spd="med"/>
 </p:sldLayout>
 </file>
 
 <file path=ppt/slideLayouts/slideLayout3.xml><?xml version="1.0" encoding="utf-8"?>
-<p:sldLayout xmlns:a="http://schemas.openxmlformats.org/drawingml/2006/main" xmlns:r="http://schemas.openxmlformats.org/officeDocument/2006/relationships" xmlns:p="http://schemas.openxmlformats.org/presentationml/2006/main" xmlns:m="http://schemas.openxmlformats.org/officeDocument/2006/math" xmlns:a14="http://schemas.microsoft.com/office/drawing/2010/main" type="tx" showMasterSp="1" showMasterPhAnim="1">
+<p:sldLayout xmlns:a="http://schemas.openxmlformats.org/drawingml/2006/main" xmlns:r="http://schemas.openxmlformats.org/officeDocument/2006/relationships" xmlns:p="http://schemas.openxmlformats.org/presentationml/2006/main" type="tx">
   <p:cSld name="TITLE_AND_TWO_COLUMNS">
     <p:spTree>
       <p:nvGrpSpPr>
@@ -868,7 +894,9 @@
       <p:sp>
         <p:nvSpPr>
           <p:cNvPr id="28" name="Title Text"/>
-          <p:cNvSpPr txBox="1"/>
+          <p:cNvSpPr txBox="1">
+            <a:spLocks noGrp="1"/>
+          </p:cNvSpPr>
           <p:nvPr>
             <p:ph type="title"/>
           </p:nvPr>
@@ -882,7 +910,6 @@
           <a:bodyPr/>
           <a:lstStyle/>
           <a:p>
-            <a:pPr/>
             <a:r>
               <a:t>Title Text</a:t>
             </a:r>
@@ -892,7 +919,9 @@
       <p:sp>
         <p:nvSpPr>
           <p:cNvPr id="29" name="Body Level One…"/>
-          <p:cNvSpPr txBox="1"/>
+          <p:cNvSpPr txBox="1">
+            <a:spLocks noGrp="1"/>
+          </p:cNvSpPr>
           <p:nvPr>
             <p:ph type="body" sz="half" idx="1"/>
           </p:nvPr>
@@ -931,7 +960,6 @@
             </a:lvl5pPr>
           </a:lstStyle>
           <a:p>
-            <a:pPr/>
             <a:r>
               <a:t>Body Level One</a:t>
             </a:r>
@@ -965,7 +993,9 @@
       <p:sp>
         <p:nvSpPr>
           <p:cNvPr id="30" name="Google Shape;23;p5"/>
-          <p:cNvSpPr txBox="1"/>
+          <p:cNvSpPr txBox="1">
+            <a:spLocks noGrp="1"/>
+          </p:cNvSpPr>
           <p:nvPr>
             <p:ph type="body" sz="half" idx="21"/>
           </p:nvPr>
@@ -983,14 +1013,16 @@
           <a:bodyPr/>
           <a:lstStyle/>
           <a:p>
-            <a:pPr/>
+            <a:endParaRPr/>
           </a:p>
         </p:txBody>
       </p:sp>
       <p:sp>
         <p:nvSpPr>
           <p:cNvPr id="31" name="Slide Number"/>
-          <p:cNvSpPr txBox="1"/>
+          <p:cNvSpPr txBox="1">
+            <a:spLocks noGrp="1"/>
+          </p:cNvSpPr>
           <p:nvPr>
             <p:ph type="sldNum" sz="quarter" idx="2"/>
           </p:nvPr>
@@ -1004,8 +1036,10 @@
           <a:bodyPr/>
           <a:lstStyle/>
           <a:p>
-            <a:pPr/>
-            <a:fld id="{86CB4B4D-7CA3-9044-876B-883B54F8677D}" type="slidenum"/>
+            <a:fld id="{86CB4B4D-7CA3-9044-876B-883B54F8677D}" type="slidenum">
+              <a:t>‹N°›</a:t>
+            </a:fld>
+            <a:endParaRPr/>
           </a:p>
         </p:txBody>
       </p:sp>
@@ -1014,12 +1048,12 @@
   <p:clrMapOvr>
     <a:masterClrMapping/>
   </p:clrMapOvr>
-  <p:transition xmlns:p14="http://schemas.microsoft.com/office/powerpoint/2010/main" spd="med" advClick="1"/>
+  <p:transition spd="med"/>
 </p:sldLayout>
 </file>
 
 <file path=ppt/slideLayouts/slideLayout4.xml><?xml version="1.0" encoding="utf-8"?>
-<p:sldLayout xmlns:a="http://schemas.openxmlformats.org/drawingml/2006/main" xmlns:r="http://schemas.openxmlformats.org/officeDocument/2006/relationships" xmlns:p="http://schemas.openxmlformats.org/presentationml/2006/main" xmlns:m="http://schemas.openxmlformats.org/officeDocument/2006/math" xmlns:a14="http://schemas.microsoft.com/office/drawing/2010/main" type="tx" showMasterSp="1" showMasterPhAnim="1">
+<p:sldLayout xmlns:a="http://schemas.openxmlformats.org/drawingml/2006/main" xmlns:r="http://schemas.openxmlformats.org/officeDocument/2006/relationships" xmlns:p="http://schemas.openxmlformats.org/presentationml/2006/main" type="tx">
   <p:cSld name="TITLE_ONLY">
     <p:spTree>
       <p:nvGrpSpPr>
@@ -1038,7 +1072,9 @@
       <p:sp>
         <p:nvSpPr>
           <p:cNvPr id="38" name="Title Text"/>
-          <p:cNvSpPr txBox="1"/>
+          <p:cNvSpPr txBox="1">
+            <a:spLocks noGrp="1"/>
+          </p:cNvSpPr>
           <p:nvPr>
             <p:ph type="title"/>
           </p:nvPr>
@@ -1052,7 +1088,6 @@
           <a:bodyPr/>
           <a:lstStyle/>
           <a:p>
-            <a:pPr/>
             <a:r>
               <a:t>Title Text</a:t>
             </a:r>
@@ -1062,7 +1097,9 @@
       <p:sp>
         <p:nvSpPr>
           <p:cNvPr id="39" name="Slide Number"/>
-          <p:cNvSpPr txBox="1"/>
+          <p:cNvSpPr txBox="1">
+            <a:spLocks noGrp="1"/>
+          </p:cNvSpPr>
           <p:nvPr>
             <p:ph type="sldNum" sz="quarter" idx="2"/>
           </p:nvPr>
@@ -1076,8 +1113,10 @@
           <a:bodyPr/>
           <a:lstStyle/>
           <a:p>
-            <a:pPr/>
-            <a:fld id="{86CB4B4D-7CA3-9044-876B-883B54F8677D}" type="slidenum"/>
+            <a:fld id="{86CB4B4D-7CA3-9044-876B-883B54F8677D}" type="slidenum">
+              <a:t>‹N°›</a:t>
+            </a:fld>
+            <a:endParaRPr/>
           </a:p>
         </p:txBody>
       </p:sp>
@@ -1086,12 +1125,12 @@
   <p:clrMapOvr>
     <a:masterClrMapping/>
   </p:clrMapOvr>
-  <p:transition xmlns:p14="http://schemas.microsoft.com/office/powerpoint/2010/main" spd="med" advClick="1"/>
+  <p:transition spd="med"/>
 </p:sldLayout>
 </file>
 
 <file path=ppt/slideLayouts/slideLayout5.xml><?xml version="1.0" encoding="utf-8"?>
-<p:sldLayout xmlns:a="http://schemas.openxmlformats.org/drawingml/2006/main" xmlns:r="http://schemas.openxmlformats.org/officeDocument/2006/relationships" xmlns:p="http://schemas.openxmlformats.org/presentationml/2006/main" xmlns:m="http://schemas.openxmlformats.org/officeDocument/2006/math" xmlns:a14="http://schemas.microsoft.com/office/drawing/2010/main" type="tx" showMasterSp="1" showMasterPhAnim="1">
+<p:sldLayout xmlns:a="http://schemas.openxmlformats.org/drawingml/2006/main" xmlns:r="http://schemas.openxmlformats.org/officeDocument/2006/relationships" xmlns:p="http://schemas.openxmlformats.org/presentationml/2006/main" type="tx">
   <p:cSld name="ONE_COLUMN_TEXT">
     <p:spTree>
       <p:nvGrpSpPr>
@@ -1110,7 +1149,9 @@
       <p:sp>
         <p:nvSpPr>
           <p:cNvPr id="46" name="Title Text"/>
-          <p:cNvSpPr txBox="1"/>
+          <p:cNvSpPr txBox="1">
+            <a:spLocks noGrp="1"/>
+          </p:cNvSpPr>
           <p:nvPr>
             <p:ph type="title"/>
           </p:nvPr>
@@ -1132,7 +1173,6 @@
             </a:lvl1pPr>
           </a:lstStyle>
           <a:p>
-            <a:pPr/>
             <a:r>
               <a:t>Title Text</a:t>
             </a:r>
@@ -1142,7 +1182,9 @@
       <p:sp>
         <p:nvSpPr>
           <p:cNvPr id="47" name="Body Level One…"/>
-          <p:cNvSpPr txBox="1"/>
+          <p:cNvSpPr txBox="1">
+            <a:spLocks noGrp="1"/>
+          </p:cNvSpPr>
           <p:nvPr>
             <p:ph type="body" sz="quarter" idx="1"/>
           </p:nvPr>
@@ -1181,7 +1223,6 @@
             </a:lvl5pPr>
           </a:lstStyle>
           <a:p>
-            <a:pPr/>
             <a:r>
               <a:t>Body Level One</a:t>
             </a:r>
@@ -1215,7 +1256,9 @@
       <p:sp>
         <p:nvSpPr>
           <p:cNvPr id="48" name="Slide Number"/>
-          <p:cNvSpPr txBox="1"/>
+          <p:cNvSpPr txBox="1">
+            <a:spLocks noGrp="1"/>
+          </p:cNvSpPr>
           <p:nvPr>
             <p:ph type="sldNum" sz="quarter" idx="2"/>
           </p:nvPr>
@@ -1229,8 +1272,10 @@
           <a:bodyPr/>
           <a:lstStyle/>
           <a:p>
-            <a:pPr/>
-            <a:fld id="{86CB4B4D-7CA3-9044-876B-883B54F8677D}" type="slidenum"/>
+            <a:fld id="{86CB4B4D-7CA3-9044-876B-883B54F8677D}" type="slidenum">
+              <a:t>‹N°›</a:t>
+            </a:fld>
+            <a:endParaRPr/>
           </a:p>
         </p:txBody>
       </p:sp>
@@ -1239,12 +1284,12 @@
   <p:clrMapOvr>
     <a:masterClrMapping/>
   </p:clrMapOvr>
-  <p:transition xmlns:p14="http://schemas.microsoft.com/office/powerpoint/2010/main" spd="med" advClick="1"/>
+  <p:transition spd="med"/>
 </p:sldLayout>
 </file>
 
 <file path=ppt/slideLayouts/slideLayout6.xml><?xml version="1.0" encoding="utf-8"?>
-<p:sldLayout xmlns:a="http://schemas.openxmlformats.org/drawingml/2006/main" xmlns:r="http://schemas.openxmlformats.org/officeDocument/2006/relationships" xmlns:p="http://schemas.openxmlformats.org/presentationml/2006/main" xmlns:m="http://schemas.openxmlformats.org/officeDocument/2006/math" xmlns:a14="http://schemas.microsoft.com/office/drawing/2010/main" type="tx" showMasterSp="1" showMasterPhAnim="1">
+<p:sldLayout xmlns:a="http://schemas.openxmlformats.org/drawingml/2006/main" xmlns:r="http://schemas.openxmlformats.org/officeDocument/2006/relationships" xmlns:p="http://schemas.openxmlformats.org/presentationml/2006/main" type="tx">
   <p:cSld name="MAIN_POINT">
     <p:spTree>
       <p:nvGrpSpPr>
@@ -1263,7 +1308,9 @@
       <p:sp>
         <p:nvSpPr>
           <p:cNvPr id="55" name="Title Text"/>
-          <p:cNvSpPr txBox="1"/>
+          <p:cNvSpPr txBox="1">
+            <a:spLocks noGrp="1"/>
+          </p:cNvSpPr>
           <p:nvPr>
             <p:ph type="title"/>
           </p:nvPr>
@@ -1285,7 +1332,6 @@
             </a:lvl1pPr>
           </a:lstStyle>
           <a:p>
-            <a:pPr/>
             <a:r>
               <a:t>Title Text</a:t>
             </a:r>
@@ -1295,7 +1341,9 @@
       <p:sp>
         <p:nvSpPr>
           <p:cNvPr id="56" name="Slide Number"/>
-          <p:cNvSpPr txBox="1"/>
+          <p:cNvSpPr txBox="1">
+            <a:spLocks noGrp="1"/>
+          </p:cNvSpPr>
           <p:nvPr>
             <p:ph type="sldNum" sz="quarter" idx="2"/>
           </p:nvPr>
@@ -1309,8 +1357,10 @@
           <a:bodyPr/>
           <a:lstStyle/>
           <a:p>
-            <a:pPr/>
-            <a:fld id="{86CB4B4D-7CA3-9044-876B-883B54F8677D}" type="slidenum"/>
+            <a:fld id="{86CB4B4D-7CA3-9044-876B-883B54F8677D}" type="slidenum">
+              <a:t>‹N°›</a:t>
+            </a:fld>
+            <a:endParaRPr/>
           </a:p>
         </p:txBody>
       </p:sp>
@@ -1319,12 +1369,12 @@
   <p:clrMapOvr>
     <a:masterClrMapping/>
   </p:clrMapOvr>
-  <p:transition xmlns:p14="http://schemas.microsoft.com/office/powerpoint/2010/main" spd="med" advClick="1"/>
+  <p:transition spd="med"/>
 </p:sldLayout>
 </file>
 
 <file path=ppt/slideLayouts/slideLayout7.xml><?xml version="1.0" encoding="utf-8"?>
-<p:sldLayout xmlns:a="http://schemas.openxmlformats.org/drawingml/2006/main" xmlns:r="http://schemas.openxmlformats.org/officeDocument/2006/relationships" xmlns:p="http://schemas.openxmlformats.org/presentationml/2006/main" xmlns:m="http://schemas.openxmlformats.org/officeDocument/2006/math" xmlns:a14="http://schemas.microsoft.com/office/drawing/2010/main" type="tx" showMasterSp="1" showMasterPhAnim="1">
+<p:sldLayout xmlns:a="http://schemas.openxmlformats.org/drawingml/2006/main" xmlns:r="http://schemas.openxmlformats.org/officeDocument/2006/relationships" xmlns:p="http://schemas.openxmlformats.org/presentationml/2006/main" type="tx">
   <p:cSld name="SECTION_TITLE_AND_DESCRIPTION">
     <p:spTree>
       <p:nvGrpSpPr>
@@ -1373,13 +1423,16 @@
                 <a:sym typeface="Arial"/>
               </a:defRPr>
             </a:pPr>
+            <a:endParaRPr/>
           </a:p>
         </p:txBody>
       </p:sp>
       <p:sp>
         <p:nvSpPr>
           <p:cNvPr id="64" name="Title Text"/>
-          <p:cNvSpPr txBox="1"/>
+          <p:cNvSpPr txBox="1">
+            <a:spLocks noGrp="1"/>
+          </p:cNvSpPr>
           <p:nvPr>
             <p:ph type="title"/>
           </p:nvPr>
@@ -1401,7 +1454,6 @@
             </a:lvl1pPr>
           </a:lstStyle>
           <a:p>
-            <a:pPr/>
             <a:r>
               <a:t>Title Text</a:t>
             </a:r>
@@ -1411,7 +1463,9 @@
       <p:sp>
         <p:nvSpPr>
           <p:cNvPr id="65" name="Body Level One…"/>
-          <p:cNvSpPr txBox="1"/>
+          <p:cNvSpPr txBox="1">
+            <a:spLocks noGrp="1"/>
+          </p:cNvSpPr>
           <p:nvPr>
             <p:ph type="body" sz="quarter" idx="1"/>
           </p:nvPr>
@@ -1480,7 +1534,6 @@
             </a:lvl5pPr>
           </a:lstStyle>
           <a:p>
-            <a:pPr/>
             <a:r>
               <a:t>Body Level One</a:t>
             </a:r>
@@ -1514,7 +1567,9 @@
       <p:sp>
         <p:nvSpPr>
           <p:cNvPr id="66" name="Google Shape;39;p9"/>
-          <p:cNvSpPr txBox="1"/>
+          <p:cNvSpPr txBox="1">
+            <a:spLocks noGrp="1"/>
+          </p:cNvSpPr>
           <p:nvPr>
             <p:ph type="body" sz="half" idx="21"/>
           </p:nvPr>
@@ -1532,14 +1587,16 @@
           <a:bodyPr anchor="ctr"/>
           <a:lstStyle/>
           <a:p>
-            <a:pPr/>
+            <a:endParaRPr/>
           </a:p>
         </p:txBody>
       </p:sp>
       <p:sp>
         <p:nvSpPr>
           <p:cNvPr id="67" name="Slide Number"/>
-          <p:cNvSpPr txBox="1"/>
+          <p:cNvSpPr txBox="1">
+            <a:spLocks noGrp="1"/>
+          </p:cNvSpPr>
           <p:nvPr>
             <p:ph type="sldNum" sz="quarter" idx="2"/>
           </p:nvPr>
@@ -1553,8 +1610,10 @@
           <a:bodyPr/>
           <a:lstStyle/>
           <a:p>
-            <a:pPr/>
-            <a:fld id="{86CB4B4D-7CA3-9044-876B-883B54F8677D}" type="slidenum"/>
+            <a:fld id="{86CB4B4D-7CA3-9044-876B-883B54F8677D}" type="slidenum">
+              <a:t>‹N°›</a:t>
+            </a:fld>
+            <a:endParaRPr/>
           </a:p>
         </p:txBody>
       </p:sp>
@@ -1563,12 +1622,12 @@
   <p:clrMapOvr>
     <a:masterClrMapping/>
   </p:clrMapOvr>
-  <p:transition xmlns:p14="http://schemas.microsoft.com/office/powerpoint/2010/main" spd="med" advClick="1"/>
+  <p:transition spd="med"/>
 </p:sldLayout>
 </file>
 
 <file path=ppt/slideLayouts/slideLayout8.xml><?xml version="1.0" encoding="utf-8"?>
-<p:sldLayout xmlns:a="http://schemas.openxmlformats.org/drawingml/2006/main" xmlns:r="http://schemas.openxmlformats.org/officeDocument/2006/relationships" xmlns:p="http://schemas.openxmlformats.org/presentationml/2006/main" xmlns:m="http://schemas.openxmlformats.org/officeDocument/2006/math" xmlns:a14="http://schemas.microsoft.com/office/drawing/2010/main" type="tx" showMasterSp="1" showMasterPhAnim="1">
+<p:sldLayout xmlns:a="http://schemas.openxmlformats.org/drawingml/2006/main" xmlns:r="http://schemas.openxmlformats.org/officeDocument/2006/relationships" xmlns:p="http://schemas.openxmlformats.org/presentationml/2006/main" type="tx">
   <p:cSld name="CAPTION_ONLY">
     <p:spTree>
       <p:nvGrpSpPr>
@@ -1587,7 +1646,9 @@
       <p:sp>
         <p:nvSpPr>
           <p:cNvPr id="74" name="Body Level One…"/>
-          <p:cNvSpPr txBox="1"/>
+          <p:cNvSpPr txBox="1">
+            <a:spLocks noGrp="1"/>
+          </p:cNvSpPr>
           <p:nvPr>
             <p:ph type="body" sz="quarter" idx="1"/>
           </p:nvPr>
@@ -1643,7 +1704,6 @@
             </a:lvl5pPr>
           </a:lstStyle>
           <a:p>
-            <a:pPr/>
             <a:r>
               <a:t>Body Level One</a:t>
             </a:r>
@@ -1677,7 +1737,9 @@
       <p:sp>
         <p:nvSpPr>
           <p:cNvPr id="75" name="Slide Number"/>
-          <p:cNvSpPr txBox="1"/>
+          <p:cNvSpPr txBox="1">
+            <a:spLocks noGrp="1"/>
+          </p:cNvSpPr>
           <p:nvPr>
             <p:ph type="sldNum" sz="quarter" idx="2"/>
           </p:nvPr>
@@ -1691,8 +1753,10 @@
           <a:bodyPr/>
           <a:lstStyle/>
           <a:p>
-            <a:pPr/>
-            <a:fld id="{86CB4B4D-7CA3-9044-876B-883B54F8677D}" type="slidenum"/>
+            <a:fld id="{86CB4B4D-7CA3-9044-876B-883B54F8677D}" type="slidenum">
+              <a:t>‹N°›</a:t>
+            </a:fld>
+            <a:endParaRPr/>
           </a:p>
         </p:txBody>
       </p:sp>
@@ -1701,12 +1765,12 @@
   <p:clrMapOvr>
     <a:masterClrMapping/>
   </p:clrMapOvr>
-  <p:transition xmlns:p14="http://schemas.microsoft.com/office/powerpoint/2010/main" spd="med" advClick="1"/>
+  <p:transition spd="med"/>
 </p:sldLayout>
 </file>
 
 <file path=ppt/slideLayouts/slideLayout9.xml><?xml version="1.0" encoding="utf-8"?>
-<p:sldLayout xmlns:a="http://schemas.openxmlformats.org/drawingml/2006/main" xmlns:r="http://schemas.openxmlformats.org/officeDocument/2006/relationships" xmlns:p="http://schemas.openxmlformats.org/presentationml/2006/main" xmlns:m="http://schemas.openxmlformats.org/officeDocument/2006/math" xmlns:a14="http://schemas.microsoft.com/office/drawing/2010/main" type="tx" showMasterSp="1" showMasterPhAnim="1">
+<p:sldLayout xmlns:a="http://schemas.openxmlformats.org/drawingml/2006/main" xmlns:r="http://schemas.openxmlformats.org/officeDocument/2006/relationships" xmlns:p="http://schemas.openxmlformats.org/presentationml/2006/main" type="tx">
   <p:cSld name="BIG_NUMBER">
     <p:spTree>
       <p:nvGrpSpPr>
@@ -1725,7 +1789,9 @@
       <p:sp>
         <p:nvSpPr>
           <p:cNvPr id="82" name="xx%"/>
-          <p:cNvSpPr txBox="1"/>
+          <p:cNvSpPr txBox="1">
+            <a:spLocks noGrp="1"/>
+          </p:cNvSpPr>
           <p:nvPr>
             <p:ph type="title" hasCustomPrompt="1"/>
           </p:nvPr>
@@ -1747,7 +1813,6 @@
             </a:lvl1pPr>
           </a:lstStyle>
           <a:p>
-            <a:pPr/>
             <a:r>
               <a:t>xx%</a:t>
             </a:r>
@@ -1757,7 +1822,9 @@
       <p:sp>
         <p:nvSpPr>
           <p:cNvPr id="83" name="Body Level One…"/>
-          <p:cNvSpPr txBox="1"/>
+          <p:cNvSpPr txBox="1">
+            <a:spLocks noGrp="1"/>
+          </p:cNvSpPr>
           <p:nvPr>
             <p:ph type="body" sz="half" idx="1"/>
           </p:nvPr>
@@ -1781,7 +1848,6 @@
             <a:lvl5pPr algn="ctr"/>
           </a:lstStyle>
           <a:p>
-            <a:pPr/>
             <a:r>
               <a:t>Body Level One</a:t>
             </a:r>
@@ -1815,7 +1881,9 @@
       <p:sp>
         <p:nvSpPr>
           <p:cNvPr id="84" name="Slide Number"/>
-          <p:cNvSpPr txBox="1"/>
+          <p:cNvSpPr txBox="1">
+            <a:spLocks noGrp="1"/>
+          </p:cNvSpPr>
           <p:nvPr>
             <p:ph type="sldNum" sz="quarter" idx="2"/>
           </p:nvPr>
@@ -1829,8 +1897,10 @@
           <a:bodyPr/>
           <a:lstStyle/>
           <a:p>
-            <a:pPr/>
-            <a:fld id="{86CB4B4D-7CA3-9044-876B-883B54F8677D}" type="slidenum"/>
+            <a:fld id="{86CB4B4D-7CA3-9044-876B-883B54F8677D}" type="slidenum">
+              <a:t>‹N°›</a:t>
+            </a:fld>
+            <a:endParaRPr/>
           </a:p>
         </p:txBody>
       </p:sp>
@@ -1839,18 +1909,19 @@
   <p:clrMapOvr>
     <a:masterClrMapping/>
   </p:clrMapOvr>
-  <p:transition xmlns:p14="http://schemas.microsoft.com/office/powerpoint/2010/main" spd="med" advClick="1"/>
+  <p:transition spd="med"/>
 </p:sldLayout>
 </file>
 
 <file path=ppt/slideMasters/slideMaster1.xml><?xml version="1.0" encoding="utf-8"?>
-<p:sldMaster xmlns:a="http://schemas.openxmlformats.org/drawingml/2006/main" xmlns:r="http://schemas.openxmlformats.org/officeDocument/2006/relationships" xmlns:p="http://schemas.openxmlformats.org/presentationml/2006/main" xmlns:m="http://schemas.openxmlformats.org/officeDocument/2006/math" xmlns:a14="http://schemas.microsoft.com/office/drawing/2010/main">
+<p:sldMaster xmlns:a="http://schemas.openxmlformats.org/drawingml/2006/main" xmlns:r="http://schemas.openxmlformats.org/officeDocument/2006/relationships" xmlns:p="http://schemas.openxmlformats.org/presentationml/2006/main">
   <p:cSld>
     <p:bg>
       <p:bgPr>
         <a:solidFill>
           <a:srgbClr val="FFFFFF"/>
         </a:solidFill>
+        <a:effectLst/>
       </p:bgPr>
     </p:bg>
     <p:spTree>
@@ -1870,7 +1941,9 @@
       <p:sp>
         <p:nvSpPr>
           <p:cNvPr id="2" name="Title Text"/>
-          <p:cNvSpPr txBox="1"/>
+          <p:cNvSpPr txBox="1">
+            <a:spLocks noGrp="1"/>
+          </p:cNvSpPr>
           <p:nvPr>
             <p:ph type="title"/>
           </p:nvPr>
@@ -1888,17 +1961,16 @@
           </a:ln>
           <a:extLst>
             <a:ext uri="{C572A759-6A51-4108-AA02-DFA0A04FC94B}">
-              <ma14:wrappingTextBoxFlag xmlns:ma14="http://schemas.microsoft.com/office/mac/drawingml/2011/main" val="1"/>
+              <ma14:wrappingTextBoxFlag xmlns:ma14="http://schemas.microsoft.com/office/mac/drawingml/2011/main" xmlns:a14="http://schemas.microsoft.com/office/drawing/2010/main" xmlns:m="http://schemas.openxmlformats.org/officeDocument/2006/math" xmlns="" val="1"/>
             </a:ext>
           </a:extLst>
         </p:spPr>
         <p:txBody>
           <a:bodyPr lIns="91421" tIns="91421" rIns="91421" bIns="91421">
-            <a:normAutofit fontScale="100000" lnSpcReduction="0"/>
+            <a:normAutofit/>
           </a:bodyPr>
           <a:lstStyle/>
           <a:p>
-            <a:pPr/>
             <a:r>
               <a:t>Title Text</a:t>
             </a:r>
@@ -1908,7 +1980,9 @@
       <p:sp>
         <p:nvSpPr>
           <p:cNvPr id="3" name="Body Level One…"/>
-          <p:cNvSpPr txBox="1"/>
+          <p:cNvSpPr txBox="1">
+            <a:spLocks noGrp="1"/>
+          </p:cNvSpPr>
           <p:nvPr>
             <p:ph type="body" idx="1"/>
           </p:nvPr>
@@ -1926,17 +2000,16 @@
           </a:ln>
           <a:extLst>
             <a:ext uri="{C572A759-6A51-4108-AA02-DFA0A04FC94B}">
-              <ma14:wrappingTextBoxFlag xmlns:ma14="http://schemas.microsoft.com/office/mac/drawingml/2011/main" val="1"/>
+              <ma14:wrappingTextBoxFlag xmlns:ma14="http://schemas.microsoft.com/office/mac/drawingml/2011/main" xmlns:a14="http://schemas.microsoft.com/office/drawing/2010/main" xmlns:m="http://schemas.openxmlformats.org/officeDocument/2006/math" xmlns="" val="1"/>
             </a:ext>
           </a:extLst>
         </p:spPr>
         <p:txBody>
           <a:bodyPr lIns="91421" tIns="91421" rIns="91421" bIns="91421">
-            <a:normAutofit fontScale="100000" lnSpcReduction="0"/>
+            <a:normAutofit/>
           </a:bodyPr>
           <a:lstStyle/>
           <a:p>
-            <a:pPr/>
             <a:r>
               <a:t>Body Level One</a:t>
             </a:r>
@@ -1970,7 +2043,9 @@
       <p:sp>
         <p:nvSpPr>
           <p:cNvPr id="4" name="Slide Number"/>
-          <p:cNvSpPr txBox="1"/>
+          <p:cNvSpPr txBox="1">
+            <a:spLocks noGrp="1"/>
+          </p:cNvSpPr>
           <p:nvPr>
             <p:ph type="sldNum" sz="quarter" idx="2"/>
           </p:nvPr>
@@ -2005,8 +2080,10 @@
             </a:lvl1pPr>
           </a:lstStyle>
           <a:p>
-            <a:pPr/>
-            <a:fld id="{86CB4B4D-7CA3-9044-876B-883B54F8677D}" type="slidenum"/>
+            <a:fld id="{86CB4B4D-7CA3-9044-876B-883B54F8677D}" type="slidenum">
+              <a:t>‹N°›</a:t>
+            </a:fld>
+            <a:endParaRPr/>
           </a:p>
         </p:txBody>
       </p:sp>
@@ -2014,19 +2091,19 @@
   </p:cSld>
   <p:clrMap bg1="lt1" tx1="dk1" bg2="lt2" tx2="dk2" accent1="accent1" accent2="accent2" accent3="accent3" accent4="accent4" accent5="accent5" accent6="accent6" hlink="hlink" folHlink="folHlink"/>
   <p:sldLayoutIdLst>
-    <p:sldLayoutId id="2147483649" r:id="rId2"/>
-    <p:sldLayoutId id="2147483650" r:id="rId3"/>
-    <p:sldLayoutId id="2147483651" r:id="rId4"/>
-    <p:sldLayoutId id="2147483652" r:id="rId5"/>
-    <p:sldLayoutId id="2147483653" r:id="rId6"/>
-    <p:sldLayoutId id="2147483654" r:id="rId7"/>
-    <p:sldLayoutId id="2147483655" r:id="rId8"/>
-    <p:sldLayoutId id="2147483656" r:id="rId9"/>
-    <p:sldLayoutId id="2147483657" r:id="rId10"/>
-    <p:sldLayoutId id="2147483658" r:id="rId11"/>
-    <p:sldLayoutId id="2147483659" r:id="rId12"/>
+    <p:sldLayoutId id="2147483649" r:id="rId1"/>
+    <p:sldLayoutId id="2147483650" r:id="rId2"/>
+    <p:sldLayoutId id="2147483651" r:id="rId3"/>
+    <p:sldLayoutId id="2147483652" r:id="rId4"/>
+    <p:sldLayoutId id="2147483653" r:id="rId5"/>
+    <p:sldLayoutId id="2147483654" r:id="rId6"/>
+    <p:sldLayoutId id="2147483655" r:id="rId7"/>
+    <p:sldLayoutId id="2147483656" r:id="rId8"/>
+    <p:sldLayoutId id="2147483657" r:id="rId9"/>
+    <p:sldLayoutId id="2147483658" r:id="rId10"/>
+    <p:sldLayoutId id="2147483659" r:id="rId11"/>
   </p:sldLayoutIdLst>
-  <p:transition xmlns:p14="http://schemas.microsoft.com/office/powerpoint/2010/main" spd="med" advClick="1"/>
+  <p:transition spd="med"/>
   <p:txStyles>
     <p:titleStyle>
       <a:lvl1pPr marL="0" marR="0" indent="0" algn="l" defTabSz="914400" rtl="0" latinLnBrk="0">
@@ -2044,7 +2121,7 @@
         <a:buFontTx/>
         <a:buNone/>
         <a:tabLst/>
-        <a:defRPr b="0" baseline="0" cap="none" i="0" spc="0" strike="noStrike" sz="2800" u="none">
+        <a:defRPr sz="2800" b="0" i="0" u="none" strike="noStrike" cap="none" spc="0" baseline="0">
           <a:solidFill>
             <a:srgbClr val="000000"/>
           </a:solidFill>
@@ -2070,7 +2147,7 @@
         <a:buFontTx/>
         <a:buNone/>
         <a:tabLst/>
-        <a:defRPr b="0" baseline="0" cap="none" i="0" spc="0" strike="noStrike" sz="2800" u="none">
+        <a:defRPr sz="2800" b="0" i="0" u="none" strike="noStrike" cap="none" spc="0" baseline="0">
           <a:solidFill>
             <a:srgbClr val="000000"/>
           </a:solidFill>
@@ -2096,7 +2173,7 @@
         <a:buFontTx/>
         <a:buNone/>
         <a:tabLst/>
-        <a:defRPr b="0" baseline="0" cap="none" i="0" spc="0" strike="noStrike" sz="2800" u="none">
+        <a:defRPr sz="2800" b="0" i="0" u="none" strike="noStrike" cap="none" spc="0" baseline="0">
           <a:solidFill>
             <a:srgbClr val="000000"/>
           </a:solidFill>
@@ -2122,7 +2199,7 @@
         <a:buFontTx/>
         <a:buNone/>
         <a:tabLst/>
-        <a:defRPr b="0" baseline="0" cap="none" i="0" spc="0" strike="noStrike" sz="2800" u="none">
+        <a:defRPr sz="2800" b="0" i="0" u="none" strike="noStrike" cap="none" spc="0" baseline="0">
           <a:solidFill>
             <a:srgbClr val="000000"/>
           </a:solidFill>
@@ -2148,7 +2225,7 @@
         <a:buFontTx/>
         <a:buNone/>
         <a:tabLst/>
-        <a:defRPr b="0" baseline="0" cap="none" i="0" spc="0" strike="noStrike" sz="2800" u="none">
+        <a:defRPr sz="2800" b="0" i="0" u="none" strike="noStrike" cap="none" spc="0" baseline="0">
           <a:solidFill>
             <a:srgbClr val="000000"/>
           </a:solidFill>
@@ -2174,7 +2251,7 @@
         <a:buFontTx/>
         <a:buNone/>
         <a:tabLst/>
-        <a:defRPr b="0" baseline="0" cap="none" i="0" spc="0" strike="noStrike" sz="2800" u="none">
+        <a:defRPr sz="2800" b="0" i="0" u="none" strike="noStrike" cap="none" spc="0" baseline="0">
           <a:solidFill>
             <a:srgbClr val="000000"/>
           </a:solidFill>
@@ -2200,7 +2277,7 @@
         <a:buFontTx/>
         <a:buNone/>
         <a:tabLst/>
-        <a:defRPr b="0" baseline="0" cap="none" i="0" spc="0" strike="noStrike" sz="2800" u="none">
+        <a:defRPr sz="2800" b="0" i="0" u="none" strike="noStrike" cap="none" spc="0" baseline="0">
           <a:solidFill>
             <a:srgbClr val="000000"/>
           </a:solidFill>
@@ -2226,7 +2303,7 @@
         <a:buFontTx/>
         <a:buNone/>
         <a:tabLst/>
-        <a:defRPr b="0" baseline="0" cap="none" i="0" spc="0" strike="noStrike" sz="2800" u="none">
+        <a:defRPr sz="2800" b="0" i="0" u="none" strike="noStrike" cap="none" spc="0" baseline="0">
           <a:solidFill>
             <a:srgbClr val="000000"/>
           </a:solidFill>
@@ -2252,7 +2329,7 @@
         <a:buFontTx/>
         <a:buNone/>
         <a:tabLst/>
-        <a:defRPr b="0" baseline="0" cap="none" i="0" spc="0" strike="noStrike" sz="2800" u="none">
+        <a:defRPr sz="2800" b="0" i="0" u="none" strike="noStrike" cap="none" spc="0" baseline="0">
           <a:solidFill>
             <a:srgbClr val="000000"/>
           </a:solidFill>
@@ -2282,7 +2359,7 @@
         <a:buFont typeface="Arial"/>
         <a:buChar char="●"/>
         <a:tabLst/>
-        <a:defRPr b="0" baseline="0" cap="none" i="0" spc="0" strike="noStrike" sz="1800" u="none">
+        <a:defRPr sz="1800" b="0" i="0" u="none" strike="noStrike" cap="none" spc="0" baseline="0">
           <a:solidFill>
             <a:srgbClr val="585858"/>
           </a:solidFill>
@@ -2310,7 +2387,7 @@
         <a:buFont typeface="Arial"/>
         <a:buChar char="○"/>
         <a:tabLst/>
-        <a:defRPr b="0" baseline="0" cap="none" i="0" spc="0" strike="noStrike" sz="1800" u="none">
+        <a:defRPr sz="1800" b="0" i="0" u="none" strike="noStrike" cap="none" spc="0" baseline="0">
           <a:solidFill>
             <a:srgbClr val="585858"/>
           </a:solidFill>
@@ -2338,7 +2415,7 @@
         <a:buFont typeface="Arial"/>
         <a:buChar char="■"/>
         <a:tabLst/>
-        <a:defRPr b="0" baseline="0" cap="none" i="0" spc="0" strike="noStrike" sz="1800" u="none">
+        <a:defRPr sz="1800" b="0" i="0" u="none" strike="noStrike" cap="none" spc="0" baseline="0">
           <a:solidFill>
             <a:srgbClr val="585858"/>
           </a:solidFill>
@@ -2366,7 +2443,7 @@
         <a:buFont typeface="Arial"/>
         <a:buChar char="●"/>
         <a:tabLst/>
-        <a:defRPr b="0" baseline="0" cap="none" i="0" spc="0" strike="noStrike" sz="1800" u="none">
+        <a:defRPr sz="1800" b="0" i="0" u="none" strike="noStrike" cap="none" spc="0" baseline="0">
           <a:solidFill>
             <a:srgbClr val="585858"/>
           </a:solidFill>
@@ -2394,7 +2471,7 @@
         <a:buFont typeface="Arial"/>
         <a:buChar char="○"/>
         <a:tabLst/>
-        <a:defRPr b="0" baseline="0" cap="none" i="0" spc="0" strike="noStrike" sz="1800" u="none">
+        <a:defRPr sz="1800" b="0" i="0" u="none" strike="noStrike" cap="none" spc="0" baseline="0">
           <a:solidFill>
             <a:srgbClr val="585858"/>
           </a:solidFill>
@@ -2422,7 +2499,7 @@
         <a:buFont typeface="Arial"/>
         <a:buChar char="■"/>
         <a:tabLst/>
-        <a:defRPr b="0" baseline="0" cap="none" i="0" spc="0" strike="noStrike" sz="1800" u="none">
+        <a:defRPr sz="1800" b="0" i="0" u="none" strike="noStrike" cap="none" spc="0" baseline="0">
           <a:solidFill>
             <a:srgbClr val="585858"/>
           </a:solidFill>
@@ -2450,7 +2527,7 @@
         <a:buFont typeface="Arial"/>
         <a:buChar char="●"/>
         <a:tabLst/>
-        <a:defRPr b="0" baseline="0" cap="none" i="0" spc="0" strike="noStrike" sz="1800" u="none">
+        <a:defRPr sz="1800" b="0" i="0" u="none" strike="noStrike" cap="none" spc="0" baseline="0">
           <a:solidFill>
             <a:srgbClr val="585858"/>
           </a:solidFill>
@@ -2478,7 +2555,7 @@
         <a:buFont typeface="Arial"/>
         <a:buChar char="○"/>
         <a:tabLst/>
-        <a:defRPr b="0" baseline="0" cap="none" i="0" spc="0" strike="noStrike" sz="1800" u="none">
+        <a:defRPr sz="1800" b="0" i="0" u="none" strike="noStrike" cap="none" spc="0" baseline="0">
           <a:solidFill>
             <a:srgbClr val="585858"/>
           </a:solidFill>
@@ -2506,7 +2583,7 @@
         <a:buFont typeface="Arial"/>
         <a:buChar char="■"/>
         <a:tabLst/>
-        <a:defRPr b="0" baseline="0" cap="none" i="0" spc="0" strike="noStrike" sz="1800" u="none">
+        <a:defRPr sz="1800" b="0" i="0" u="none" strike="noStrike" cap="none" spc="0" baseline="0">
           <a:solidFill>
             <a:srgbClr val="585858"/>
           </a:solidFill>
@@ -2534,7 +2611,7 @@
         <a:buFontTx/>
         <a:buNone/>
         <a:tabLst/>
-        <a:defRPr b="0" baseline="0" cap="none" i="0" spc="0" strike="noStrike" sz="1000" u="none">
+        <a:defRPr sz="1000" b="0" i="0" u="none" strike="noStrike" cap="none" spc="0" baseline="0">
           <a:solidFill>
             <a:schemeClr val="tx1"/>
           </a:solidFill>
@@ -2560,7 +2637,7 @@
         <a:buFontTx/>
         <a:buNone/>
         <a:tabLst/>
-        <a:defRPr b="0" baseline="0" cap="none" i="0" spc="0" strike="noStrike" sz="1000" u="none">
+        <a:defRPr sz="1000" b="0" i="0" u="none" strike="noStrike" cap="none" spc="0" baseline="0">
           <a:solidFill>
             <a:schemeClr val="tx1"/>
           </a:solidFill>
@@ -2586,7 +2663,7 @@
         <a:buFontTx/>
         <a:buNone/>
         <a:tabLst/>
-        <a:defRPr b="0" baseline="0" cap="none" i="0" spc="0" strike="noStrike" sz="1000" u="none">
+        <a:defRPr sz="1000" b="0" i="0" u="none" strike="noStrike" cap="none" spc="0" baseline="0">
           <a:solidFill>
             <a:schemeClr val="tx1"/>
           </a:solidFill>
@@ -2612,7 +2689,7 @@
         <a:buFontTx/>
         <a:buNone/>
         <a:tabLst/>
-        <a:defRPr b="0" baseline="0" cap="none" i="0" spc="0" strike="noStrike" sz="1000" u="none">
+        <a:defRPr sz="1000" b="0" i="0" u="none" strike="noStrike" cap="none" spc="0" baseline="0">
           <a:solidFill>
             <a:schemeClr val="tx1"/>
           </a:solidFill>
@@ -2638,7 +2715,7 @@
         <a:buFontTx/>
         <a:buNone/>
         <a:tabLst/>
-        <a:defRPr b="0" baseline="0" cap="none" i="0" spc="0" strike="noStrike" sz="1000" u="none">
+        <a:defRPr sz="1000" b="0" i="0" u="none" strike="noStrike" cap="none" spc="0" baseline="0">
           <a:solidFill>
             <a:schemeClr val="tx1"/>
           </a:solidFill>
@@ -2664,7 +2741,7 @@
         <a:buFontTx/>
         <a:buNone/>
         <a:tabLst/>
-        <a:defRPr b="0" baseline="0" cap="none" i="0" spc="0" strike="noStrike" sz="1000" u="none">
+        <a:defRPr sz="1000" b="0" i="0" u="none" strike="noStrike" cap="none" spc="0" baseline="0">
           <a:solidFill>
             <a:schemeClr val="tx1"/>
           </a:solidFill>
@@ -2690,7 +2767,7 @@
         <a:buFontTx/>
         <a:buNone/>
         <a:tabLst/>
-        <a:defRPr b="0" baseline="0" cap="none" i="0" spc="0" strike="noStrike" sz="1000" u="none">
+        <a:defRPr sz="1000" b="0" i="0" u="none" strike="noStrike" cap="none" spc="0" baseline="0">
           <a:solidFill>
             <a:schemeClr val="tx1"/>
           </a:solidFill>
@@ -2716,7 +2793,7 @@
         <a:buFontTx/>
         <a:buNone/>
         <a:tabLst/>
-        <a:defRPr b="0" baseline="0" cap="none" i="0" spc="0" strike="noStrike" sz="1000" u="none">
+        <a:defRPr sz="1000" b="0" i="0" u="none" strike="noStrike" cap="none" spc="0" baseline="0">
           <a:solidFill>
             <a:schemeClr val="tx1"/>
           </a:solidFill>
@@ -2742,7 +2819,7 @@
         <a:buFontTx/>
         <a:buNone/>
         <a:tabLst/>
-        <a:defRPr b="0" baseline="0" cap="none" i="0" spc="0" strike="noStrike" sz="1000" u="none">
+        <a:defRPr sz="1000" b="0" i="0" u="none" strike="noStrike" cap="none" spc="0" baseline="0">
           <a:solidFill>
             <a:schemeClr val="tx1"/>
           </a:solidFill>
@@ -2759,7 +2836,7 @@
 </file>
 
 <file path=ppt/slides/slide1.xml><?xml version="1.0" encoding="utf-8"?>
-<p:sld xmlns:a="http://schemas.openxmlformats.org/drawingml/2006/main" xmlns:r="http://schemas.openxmlformats.org/officeDocument/2006/relationships" xmlns:p="http://schemas.openxmlformats.org/presentationml/2006/main" xmlns:m="http://schemas.openxmlformats.org/officeDocument/2006/math" xmlns:a14="http://schemas.microsoft.com/office/drawing/2010/main" showMasterSp="1" showMasterPhAnim="1">
+<p:sld xmlns:a="http://schemas.openxmlformats.org/drawingml/2006/main" xmlns:r="http://schemas.openxmlformats.org/officeDocument/2006/relationships" xmlns:p="http://schemas.openxmlformats.org/presentationml/2006/main">
   <p:cSld>
     <p:spTree>
       <p:nvGrpSpPr>
@@ -2808,13 +2885,16 @@
                 <a:sym typeface="Arial"/>
               </a:defRPr>
             </a:pPr>
+            <a:endParaRPr/>
           </a:p>
         </p:txBody>
       </p:sp>
       <p:sp>
         <p:nvSpPr>
           <p:cNvPr id="110" name="Google Shape;62;p14"/>
-          <p:cNvSpPr txBox="1"/>
+          <p:cNvSpPr txBox="1">
+            <a:spLocks noGrp="1"/>
+          </p:cNvSpPr>
           <p:nvPr>
             <p:ph type="title"/>
           </p:nvPr>
@@ -2859,6 +2939,7 @@
                 <a:sym typeface="Inter"/>
               </a:defRPr>
             </a:pPr>
+            <a:endParaRPr/>
           </a:p>
           <a:p>
             <a:pPr>
@@ -2872,6 +2953,7 @@
                 <a:sym typeface="Inter"/>
               </a:defRPr>
             </a:pPr>
+            <a:endParaRPr/>
           </a:p>
           <a:p>
             <a:pPr>
@@ -2885,6 +2967,7 @@
                 <a:sym typeface="Inter"/>
               </a:defRPr>
             </a:pPr>
+            <a:endParaRPr/>
           </a:p>
           <a:p>
             <a:pPr>
@@ -2945,9 +3028,7 @@
           <p:nvPr/>
         </p:nvPicPr>
         <p:blipFill>
-          <a:blip r:embed="rId2">
-            <a:extLst/>
-          </a:blip>
+          <a:blip r:embed="rId2"/>
           <a:stretch>
             <a:fillRect/>
           </a:stretch>
@@ -2974,9 +3055,7 @@
           <p:nvPr/>
         </p:nvPicPr>
         <p:blipFill>
-          <a:blip r:embed="rId3">
-            <a:extLst/>
-          </a:blip>
+          <a:blip r:embed="rId3"/>
           <a:stretch>
             <a:fillRect/>
           </a:stretch>
@@ -3013,13 +3092,13 @@
           </a:ln>
           <a:extLst>
             <a:ext uri="{C572A759-6A51-4108-AA02-DFA0A04FC94B}">
-              <ma14:wrappingTextBoxFlag xmlns:ma14="http://schemas.microsoft.com/office/mac/drawingml/2011/main" val="1"/>
+              <ma14:wrappingTextBoxFlag xmlns:ma14="http://schemas.microsoft.com/office/mac/drawingml/2011/main" xmlns:a14="http://schemas.microsoft.com/office/drawing/2010/main" xmlns:m="http://schemas.openxmlformats.org/officeDocument/2006/math" xmlns="" val="1"/>
             </a:ext>
           </a:extLst>
         </p:spPr>
         <p:txBody>
           <a:bodyPr lIns="91421" tIns="91421" rIns="91421" bIns="91421" anchor="b">
-            <a:normAutofit fontScale="100000" lnSpcReduction="0"/>
+            <a:normAutofit/>
           </a:bodyPr>
           <a:lstStyle>
             <a:lvl1pPr algn="ctr">
@@ -3035,7 +3114,6 @@
             </a:lvl1pPr>
           </a:lstStyle>
           <a:p>
-            <a:pPr/>
             <a:r>
               <a:t>Football Predictor 🏆</a:t>
             </a:r>
@@ -3047,12 +3125,12 @@
   <p:clrMapOvr>
     <a:masterClrMapping/>
   </p:clrMapOvr>
-  <p:transition xmlns:p14="http://schemas.microsoft.com/office/powerpoint/2010/main" spd="med" advClick="1"/>
+  <p:transition spd="med"/>
 </p:sld>
 </file>
 
 <file path=ppt/slides/slide10.xml><?xml version="1.0" encoding="utf-8"?>
-<p:sld xmlns:a="http://schemas.openxmlformats.org/drawingml/2006/main" xmlns:r="http://schemas.openxmlformats.org/officeDocument/2006/relationships" xmlns:p="http://schemas.openxmlformats.org/presentationml/2006/main" xmlns:m="http://schemas.openxmlformats.org/officeDocument/2006/math" xmlns:a14="http://schemas.microsoft.com/office/drawing/2010/main" showMasterSp="1" showMasterPhAnim="1">
+<p:sld xmlns:a="http://schemas.openxmlformats.org/drawingml/2006/main" xmlns:r="http://schemas.openxmlformats.org/officeDocument/2006/relationships" xmlns:p="http://schemas.openxmlformats.org/presentationml/2006/main">
   <p:cSld>
     <p:spTree>
       <p:nvGrpSpPr>
@@ -3077,10 +3155,8 @@
           <p:nvPr/>
         </p:nvPicPr>
         <p:blipFill>
-          <a:blip r:embed="rId2">
-            <a:extLst/>
-          </a:blip>
-          <a:srcRect l="0" t="7813" r="0" b="7812"/>
+          <a:blip r:embed="rId2"/>
+          <a:srcRect t="7813" b="7812"/>
           <a:stretch>
             <a:fillRect/>
           </a:stretch>
@@ -3101,7 +3177,9 @@
       <p:sp>
         <p:nvSpPr>
           <p:cNvPr id="334" name="Google Shape;75;p16"/>
-          <p:cNvSpPr txBox="1"/>
+          <p:cNvSpPr txBox="1">
+            <a:spLocks noGrp="1"/>
+          </p:cNvSpPr>
           <p:nvPr>
             <p:ph type="title"/>
           </p:nvPr>
@@ -3131,10 +3209,7 @@
               </a:defRPr>
             </a:pPr>
             <a:r>
-              <a:t>Conclusion</a:t>
-            </a:r>
-            <a:r>
-              <a:t> - Evolutions</a:t>
+              <a:t>Conclusion - Evolutions</a:t>
             </a:r>
           </a:p>
         </p:txBody>
@@ -3148,9 +3223,7 @@
           <p:nvPr/>
         </p:nvPicPr>
         <p:blipFill>
-          <a:blip r:embed="rId3">
-            <a:extLst/>
-          </a:blip>
+          <a:blip r:embed="rId3"/>
           <a:stretch>
             <a:fillRect/>
           </a:stretch>
@@ -3201,6 +3274,7 @@
                 <a:sym typeface="Arial"/>
               </a:defRPr>
             </a:pPr>
+            <a:endParaRPr/>
           </a:p>
         </p:txBody>
       </p:sp>
@@ -3212,8 +3286,8 @@
         </p:nvSpPr>
         <p:spPr>
           <a:xfrm>
-            <a:off x="1192661" y="1254969"/>
-            <a:ext cx="6974090" cy="2801617"/>
+            <a:off x="345717" y="1274056"/>
+            <a:ext cx="8453510" cy="3685620"/>
           </a:xfrm>
           <a:prstGeom prst="rect">
             <a:avLst/>
@@ -3223,18 +3297,18 @@
           </a:ln>
           <a:extLst>
             <a:ext uri="{C572A759-6A51-4108-AA02-DFA0A04FC94B}">
-              <ma14:wrappingTextBoxFlag xmlns:ma14="http://schemas.microsoft.com/office/mac/drawingml/2011/main" val="1"/>
+              <ma14:wrappingTextBoxFlag xmlns:ma14="http://schemas.microsoft.com/office/mac/drawingml/2011/main" xmlns:a14="http://schemas.microsoft.com/office/drawing/2010/main" xmlns:m="http://schemas.openxmlformats.org/officeDocument/2006/math" xmlns="" val="1"/>
             </a:ext>
           </a:extLst>
         </p:spPr>
         <p:txBody>
-          <a:bodyPr lIns="45718" tIns="45718" rIns="45718" bIns="45718">
+          <a:bodyPr wrap="square" lIns="45718" tIns="45718" rIns="45718" bIns="45718">
             <a:spAutoFit/>
           </a:bodyPr>
           <a:lstStyle/>
           <a:p>
             <a:pPr>
-              <a:defRPr b="1" sz="1600">
+              <a:defRPr sz="1600" b="1">
                 <a:latin typeface="Inter"/>
                 <a:ea typeface="Inter"/>
                 <a:cs typeface="Inter"/>
@@ -3242,19 +3316,21 @@
               </a:defRPr>
             </a:pPr>
             <a:r>
+              <a:rPr dirty="0"/>
               <a:t>Conclusion</a:t>
             </a:r>
-            <a:endParaRPr sz="1100"/>
+            <a:endParaRPr sz="1100" dirty="0"/>
           </a:p>
           <a:p>
             <a:pPr>
-              <a:defRPr b="1" sz="1100">
+              <a:defRPr sz="1100" b="1">
                 <a:latin typeface="Inter"/>
                 <a:ea typeface="Inter"/>
                 <a:cs typeface="Inter"/>
                 <a:sym typeface="Inter"/>
               </a:defRPr>
             </a:pPr>
+            <a:endParaRPr sz="1100" dirty="0"/>
           </a:p>
           <a:p>
             <a:pPr marL="171450" indent="-171450">
@@ -3275,7 +3351,24 @@
               </a:defRPr>
             </a:pPr>
             <a:r>
-              <a:t>  Besoin : assister un entraineur de foot pour former son équipe</a:t>
+              <a:rPr sz="1600" dirty="0"/>
+              <a:t>  </a:t>
+            </a:r>
+            <a:r>
+              <a:rPr sz="1600" dirty="0" err="1"/>
+              <a:t>Besoin</a:t>
+            </a:r>
+            <a:r>
+              <a:rPr sz="1600" dirty="0"/>
+              <a:t> : assister un </a:t>
+            </a:r>
+            <a:r>
+              <a:rPr sz="1600" dirty="0" err="1"/>
+              <a:t>entraineur</a:t>
+            </a:r>
+            <a:r>
+              <a:rPr sz="1600" dirty="0"/>
+              <a:t> de foot pour former son équipe</a:t>
             </a:r>
           </a:p>
           <a:p>
@@ -3297,8 +3390,46 @@
               </a:defRPr>
             </a:pPr>
             <a:r>
-              <a:t>  Proposition : une application pour l’aider à choisir ses joueurs</a:t>
-            </a:r>
+              <a:rPr sz="1600" dirty="0"/>
+              <a:t>  Proposition : </a:t>
+            </a:r>
+            <a:r>
+              <a:rPr sz="1600" dirty="0" err="1"/>
+              <a:t>une</a:t>
+            </a:r>
+            <a:r>
+              <a:rPr sz="1600" dirty="0"/>
+              <a:t> application pour </a:t>
+            </a:r>
+            <a:r>
+              <a:rPr sz="1600" dirty="0" err="1"/>
+              <a:t>l’aider</a:t>
+            </a:r>
+            <a:r>
+              <a:rPr sz="1600" dirty="0"/>
+              <a:t> à </a:t>
+            </a:r>
+            <a:r>
+              <a:rPr sz="1600" dirty="0" err="1"/>
+              <a:t>choisir</a:t>
+            </a:r>
+            <a:r>
+              <a:rPr sz="1600" dirty="0"/>
+              <a:t> </a:t>
+            </a:r>
+            <a:r>
+              <a:rPr sz="1600" dirty="0" err="1"/>
+              <a:t>ses</a:t>
+            </a:r>
+            <a:r>
+              <a:rPr sz="1600" dirty="0"/>
+              <a:t> </a:t>
+            </a:r>
+            <a:r>
+              <a:rPr sz="1600" dirty="0" err="1"/>
+              <a:t>joueurs</a:t>
+            </a:r>
+            <a:endParaRPr sz="1600" dirty="0"/>
           </a:p>
           <a:p>
             <a:pPr>
@@ -3309,6 +3440,7 @@
                 <a:sym typeface="Inter"/>
               </a:defRPr>
             </a:pPr>
+            <a:endParaRPr dirty="0"/>
           </a:p>
           <a:p>
             <a:pPr>
@@ -3319,6 +3451,7 @@
                 <a:sym typeface="Inter"/>
               </a:defRPr>
             </a:pPr>
+            <a:endParaRPr dirty="0"/>
           </a:p>
           <a:p>
             <a:pPr>
@@ -3329,10 +3462,11 @@
                 <a:sym typeface="Inter"/>
               </a:defRPr>
             </a:pPr>
+            <a:endParaRPr dirty="0"/>
           </a:p>
           <a:p>
             <a:pPr>
-              <a:defRPr b="1" sz="1600">
+              <a:defRPr sz="1600" b="1">
                 <a:latin typeface="Inter"/>
                 <a:ea typeface="Inter"/>
                 <a:cs typeface="Inter"/>
@@ -3340,9 +3474,10 @@
               </a:defRPr>
             </a:pPr>
             <a:r>
+              <a:rPr dirty="0"/>
               <a:t>Perspectives</a:t>
             </a:r>
-            <a:endParaRPr sz="1100"/>
+            <a:endParaRPr sz="1100" dirty="0"/>
           </a:p>
           <a:p>
             <a:pPr marL="228600" indent="-228600">
@@ -3369,7 +3504,36 @@
               </a:defRPr>
             </a:pPr>
             <a:r>
-              <a:t>Améliorer le LLM (prompt engineering, les pré-remplissages des formulaires sur la vue « custom team »)</a:t>
+              <a:rPr sz="1600" dirty="0" err="1"/>
+              <a:t>Améliorer</a:t>
+            </a:r>
+            <a:r>
+              <a:rPr sz="1600" dirty="0"/>
+              <a:t> le LLM (prompt engineering, les </a:t>
+            </a:r>
+            <a:r>
+              <a:rPr sz="1600" dirty="0" err="1"/>
+              <a:t>pré-remplissages</a:t>
+            </a:r>
+            <a:r>
+              <a:rPr sz="1600" dirty="0"/>
+              <a:t> des </a:t>
+            </a:r>
+            <a:r>
+              <a:rPr sz="1600" dirty="0" err="1"/>
+              <a:t>formulaires</a:t>
+            </a:r>
+            <a:r>
+              <a:rPr sz="1600" dirty="0"/>
+              <a:t> sur la </a:t>
+            </a:r>
+            <a:r>
+              <a:rPr sz="1600" dirty="0" err="1"/>
+              <a:t>vue</a:t>
+            </a:r>
+            <a:r>
+              <a:rPr sz="1600" dirty="0"/>
+              <a:t> « custom team »)</a:t>
             </a:r>
           </a:p>
           <a:p>
@@ -3397,7 +3561,44 @@
               </a:defRPr>
             </a:pPr>
             <a:r>
-              <a:t>Amélioration du modèle : passer à une target « probabilité de gagner un match »</a:t>
+              <a:rPr sz="1600" dirty="0" err="1"/>
+              <a:t>Amélioration</a:t>
+            </a:r>
+            <a:r>
+              <a:rPr sz="1600" dirty="0"/>
+              <a:t> du </a:t>
+            </a:r>
+            <a:r>
+              <a:rPr sz="1600" dirty="0" err="1"/>
+              <a:t>modèle</a:t>
+            </a:r>
+            <a:r>
+              <a:rPr sz="1600" dirty="0"/>
+              <a:t> : passer à </a:t>
+            </a:r>
+            <a:r>
+              <a:rPr sz="1600" dirty="0" err="1"/>
+              <a:t>une</a:t>
+            </a:r>
+            <a:r>
+              <a:rPr sz="1600" dirty="0"/>
+              <a:t> target « </a:t>
+            </a:r>
+            <a:r>
+              <a:rPr sz="1600" dirty="0" err="1"/>
+              <a:t>probabilité</a:t>
+            </a:r>
+            <a:r>
+              <a:rPr sz="1600" dirty="0"/>
+              <a:t> de </a:t>
+            </a:r>
+            <a:r>
+              <a:rPr sz="1600" dirty="0" err="1"/>
+              <a:t>gagner</a:t>
+            </a:r>
+            <a:r>
+              <a:rPr sz="1600" dirty="0"/>
+              <a:t> un match »</a:t>
             </a:r>
           </a:p>
           <a:p>
@@ -3425,8 +3626,38 @@
               </a:defRPr>
             </a:pPr>
             <a:r>
-              <a:t>Recherche d’autres sources de données pour mieux jauger les joueurs</a:t>
-            </a:r>
+              <a:rPr sz="1600" dirty="0"/>
+              <a:t>Recherche </a:t>
+            </a:r>
+            <a:r>
+              <a:rPr sz="1600" dirty="0" err="1"/>
+              <a:t>d’autres</a:t>
+            </a:r>
+            <a:r>
+              <a:rPr sz="1600" dirty="0"/>
+              <a:t> sources de données pour </a:t>
+            </a:r>
+            <a:r>
+              <a:rPr sz="1600" dirty="0" err="1"/>
+              <a:t>mieux</a:t>
+            </a:r>
+            <a:r>
+              <a:rPr sz="1600" dirty="0"/>
+              <a:t> </a:t>
+            </a:r>
+            <a:r>
+              <a:rPr sz="1600" dirty="0" err="1"/>
+              <a:t>jauger</a:t>
+            </a:r>
+            <a:r>
+              <a:rPr sz="1600" dirty="0"/>
+              <a:t> les </a:t>
+            </a:r>
+            <a:r>
+              <a:rPr sz="1600" dirty="0" err="1"/>
+              <a:t>joueurs</a:t>
+            </a:r>
+            <a:endParaRPr sz="1600" dirty="0"/>
           </a:p>
           <a:p>
             <a:pPr marL="228600" indent="-228600">
@@ -3450,8 +3681,34 @@
               </a:defRPr>
             </a:pPr>
             <a:r>
-              <a:t>Ré-entrainement du modèle après ajout des nouveaux matchs</a:t>
-            </a:r>
+              <a:rPr sz="1600" dirty="0" err="1"/>
+              <a:t>Ré-entrainement</a:t>
+            </a:r>
+            <a:r>
+              <a:rPr sz="1600" dirty="0"/>
+              <a:t> du </a:t>
+            </a:r>
+            <a:r>
+              <a:rPr sz="1600" dirty="0" err="1"/>
+              <a:t>modèle</a:t>
+            </a:r>
+            <a:r>
+              <a:rPr sz="1600" dirty="0"/>
+              <a:t> après </a:t>
+            </a:r>
+            <a:r>
+              <a:rPr sz="1600" dirty="0" err="1"/>
+              <a:t>ajout</a:t>
+            </a:r>
+            <a:r>
+              <a:rPr sz="1600" dirty="0"/>
+              <a:t> des nouveaux </a:t>
+            </a:r>
+            <a:r>
+              <a:rPr sz="1600" dirty="0" err="1"/>
+              <a:t>matchs</a:t>
+            </a:r>
+            <a:endParaRPr sz="1600" dirty="0"/>
           </a:p>
           <a:p>
             <a:pPr marL="171450" indent="-171450">
@@ -3468,6 +3725,7 @@
                 <a:sym typeface="Inter"/>
               </a:defRPr>
             </a:pPr>
+            <a:endParaRPr dirty="0"/>
           </a:p>
           <a:p>
             <a:pPr>
@@ -3479,6 +3737,7 @@
               </a:defRPr>
             </a:pPr>
             <a:r>
+              <a:rPr dirty="0"/>
               <a:t> </a:t>
             </a:r>
           </a:p>
@@ -3489,18 +3748,19 @@
   <p:clrMapOvr>
     <a:masterClrMapping/>
   </p:clrMapOvr>
-  <p:transition xmlns:p14="http://schemas.microsoft.com/office/powerpoint/2010/main" spd="med" advClick="1"/>
+  <p:transition spd="med"/>
 </p:sld>
 </file>
 
 <file path=ppt/slides/slide11.xml><?xml version="1.0" encoding="utf-8"?>
-<p:sld xmlns:a="http://schemas.openxmlformats.org/drawingml/2006/main" xmlns:r="http://schemas.openxmlformats.org/officeDocument/2006/relationships" xmlns:p="http://schemas.openxmlformats.org/presentationml/2006/main" xmlns:m="http://schemas.openxmlformats.org/officeDocument/2006/math" xmlns:a14="http://schemas.microsoft.com/office/drawing/2010/main" showMasterSp="1" showMasterPhAnim="1">
+<p:sld xmlns:a="http://schemas.openxmlformats.org/drawingml/2006/main" xmlns:r="http://schemas.openxmlformats.org/officeDocument/2006/relationships" xmlns:p="http://schemas.openxmlformats.org/presentationml/2006/main">
   <p:cSld>
     <p:bg>
       <p:bgPr>
         <a:solidFill>
           <a:srgbClr val="00DBD0"/>
         </a:solidFill>
+        <a:effectLst/>
       </p:bgPr>
     </p:bg>
     <p:spTree>
@@ -3520,7 +3780,9 @@
       <p:sp>
         <p:nvSpPr>
           <p:cNvPr id="339" name="Google Shape;110;p21"/>
-          <p:cNvSpPr txBox="1"/>
+          <p:cNvSpPr txBox="1">
+            <a:spLocks noGrp="1"/>
+          </p:cNvSpPr>
           <p:nvPr>
             <p:ph type="title"/>
           </p:nvPr>
@@ -3550,7 +3812,6 @@
             </a:lvl1pPr>
           </a:lstStyle>
           <a:p>
-            <a:pPr/>
             <a:r>
               <a:t>Any questions ?</a:t>
             </a:r>
@@ -3566,9 +3827,7 @@
           <p:nvPr/>
         </p:nvPicPr>
         <p:blipFill>
-          <a:blip r:embed="rId2">
-            <a:extLst/>
-          </a:blip>
+          <a:blip r:embed="rId2"/>
           <a:stretch>
             <a:fillRect/>
           </a:stretch>
@@ -3595,9 +3854,7 @@
           <p:nvPr/>
         </p:nvPicPr>
         <p:blipFill>
-          <a:blip r:embed="rId3">
-            <a:extLst/>
-          </a:blip>
+          <a:blip r:embed="rId3"/>
           <a:stretch>
             <a:fillRect/>
           </a:stretch>
@@ -3620,12 +3877,12 @@
   <p:clrMapOvr>
     <a:masterClrMapping/>
   </p:clrMapOvr>
-  <p:transition xmlns:p14="http://schemas.microsoft.com/office/powerpoint/2010/main" spd="med" advClick="1"/>
+  <p:transition spd="med"/>
 </p:sld>
 </file>
 
 <file path=ppt/slides/slide12.xml><?xml version="1.0" encoding="utf-8"?>
-<p:sld xmlns:a="http://schemas.openxmlformats.org/drawingml/2006/main" xmlns:r="http://schemas.openxmlformats.org/officeDocument/2006/relationships" xmlns:p="http://schemas.openxmlformats.org/presentationml/2006/main" xmlns:m="http://schemas.openxmlformats.org/officeDocument/2006/math" xmlns:a14="http://schemas.microsoft.com/office/drawing/2010/main" showMasterSp="1" showMasterPhAnim="1">
+<p:sld xmlns:a="http://schemas.openxmlformats.org/drawingml/2006/main" xmlns:r="http://schemas.openxmlformats.org/officeDocument/2006/relationships" xmlns:p="http://schemas.openxmlformats.org/presentationml/2006/main">
   <p:cSld>
     <p:spTree>
       <p:nvGrpSpPr>
@@ -3652,9 +3909,8 @@
         <p:blipFill>
           <a:blip r:embed="rId2">
             <a:alphaModFix amt="22000"/>
-            <a:extLst/>
           </a:blip>
-          <a:srcRect l="0" t="21875" r="0" b="21875"/>
+          <a:srcRect t="21875" b="21875"/>
           <a:stretch>
             <a:fillRect/>
           </a:stretch>
@@ -3675,7 +3931,9 @@
       <p:sp>
         <p:nvSpPr>
           <p:cNvPr id="344" name="Google Shape;75;p16"/>
-          <p:cNvSpPr txBox="1"/>
+          <p:cNvSpPr txBox="1">
+            <a:spLocks noGrp="1"/>
+          </p:cNvSpPr>
           <p:nvPr>
             <p:ph type="title"/>
           </p:nvPr>
@@ -3705,7 +3963,6 @@
             </a:lvl1pPr>
           </a:lstStyle>
           <a:p>
-            <a:pPr/>
             <a:r>
               <a:t>Annexes</a:t>
             </a:r>
@@ -3721,9 +3978,7 @@
           <p:nvPr/>
         </p:nvPicPr>
         <p:blipFill>
-          <a:blip r:embed="rId3">
-            <a:extLst/>
-          </a:blip>
+          <a:blip r:embed="rId3"/>
           <a:stretch>
             <a:fillRect/>
           </a:stretch>
@@ -3774,6 +4029,7 @@
                 <a:sym typeface="Arial"/>
               </a:defRPr>
             </a:pPr>
+            <a:endParaRPr/>
           </a:p>
         </p:txBody>
       </p:sp>
@@ -3796,7 +4052,7 @@
           </a:ln>
           <a:extLst>
             <a:ext uri="{C572A759-6A51-4108-AA02-DFA0A04FC94B}">
-              <ma14:wrappingTextBoxFlag xmlns:ma14="http://schemas.microsoft.com/office/mac/drawingml/2011/main" val="1"/>
+              <ma14:wrappingTextBoxFlag xmlns:ma14="http://schemas.microsoft.com/office/mac/drawingml/2011/main" xmlns:a14="http://schemas.microsoft.com/office/drawing/2010/main" xmlns:m="http://schemas.openxmlformats.org/officeDocument/2006/math" xmlns="" val="1"/>
             </a:ext>
           </a:extLst>
         </p:spPr>
@@ -3813,7 +4069,7 @@
               <a:spcBef>
                 <a:spcPts val="500"/>
               </a:spcBef>
-              <a:defRPr b="1" spc="60" sz="1100">
+              <a:defRPr sz="1100" b="1" spc="60">
                 <a:solidFill>
                   <a:srgbClr val="015955"/>
                 </a:solidFill>
@@ -3901,7 +4157,7 @@
           </a:ln>
           <a:extLst>
             <a:ext uri="{C572A759-6A51-4108-AA02-DFA0A04FC94B}">
-              <ma14:wrappingTextBoxFlag xmlns:ma14="http://schemas.microsoft.com/office/mac/drawingml/2011/main" val="1"/>
+              <ma14:wrappingTextBoxFlag xmlns:ma14="http://schemas.microsoft.com/office/mac/drawingml/2011/main" xmlns:a14="http://schemas.microsoft.com/office/drawing/2010/main" xmlns:m="http://schemas.openxmlformats.org/officeDocument/2006/math" xmlns="" val="1"/>
             </a:ext>
           </a:extLst>
         </p:spPr>
@@ -3918,7 +4174,7 @@
               <a:spcBef>
                 <a:spcPts val="500"/>
               </a:spcBef>
-              <a:defRPr b="1" spc="60" sz="1100">
+              <a:defRPr sz="1100" b="1" spc="60">
                 <a:solidFill>
                   <a:srgbClr val="015955"/>
                 </a:solidFill>
@@ -4020,12 +4276,12 @@
   <p:clrMapOvr>
     <a:masterClrMapping/>
   </p:clrMapOvr>
-  <p:transition xmlns:p14="http://schemas.microsoft.com/office/powerpoint/2010/main" spd="med" advClick="1"/>
+  <p:transition spd="med"/>
 </p:sld>
 </file>
 
 <file path=ppt/slides/slide13.xml><?xml version="1.0" encoding="utf-8"?>
-<p:sld xmlns:a="http://schemas.openxmlformats.org/drawingml/2006/main" xmlns:r="http://schemas.openxmlformats.org/officeDocument/2006/relationships" xmlns:p="http://schemas.openxmlformats.org/presentationml/2006/main" xmlns:m="http://schemas.openxmlformats.org/officeDocument/2006/math" xmlns:a14="http://schemas.microsoft.com/office/drawing/2010/main" showMasterSp="1" showMasterPhAnim="1">
+<p:sld xmlns:a="http://schemas.openxmlformats.org/drawingml/2006/main" xmlns:r="http://schemas.openxmlformats.org/officeDocument/2006/relationships" xmlns:p="http://schemas.openxmlformats.org/presentationml/2006/main">
   <p:cSld>
     <p:spTree>
       <p:nvGrpSpPr>
@@ -4044,7 +4300,9 @@
       <p:sp>
         <p:nvSpPr>
           <p:cNvPr id="350" name="Google Shape;75;p16"/>
-          <p:cNvSpPr txBox="1"/>
+          <p:cNvSpPr txBox="1">
+            <a:spLocks noGrp="1"/>
+          </p:cNvSpPr>
           <p:nvPr>
             <p:ph type="title"/>
           </p:nvPr>
@@ -4074,7 +4332,6 @@
             </a:lvl1pPr>
           </a:lstStyle>
           <a:p>
-            <a:pPr/>
             <a:r>
               <a:t>Architecture – templates formes</a:t>
             </a:r>
@@ -4090,9 +4347,7 @@
           <p:nvPr/>
         </p:nvPicPr>
         <p:blipFill>
-          <a:blip r:embed="rId2">
-            <a:extLst/>
-          </a:blip>
+          <a:blip r:embed="rId2"/>
           <a:stretch>
             <a:fillRect/>
           </a:stretch>
@@ -4143,6 +4398,7 @@
                 <a:sym typeface="Arial"/>
               </a:defRPr>
             </a:pPr>
+            <a:endParaRPr/>
           </a:p>
         </p:txBody>
       </p:sp>
@@ -4155,9 +4411,7 @@
           <p:nvPr/>
         </p:nvPicPr>
         <p:blipFill>
-          <a:blip r:embed="rId3">
-            <a:extLst/>
-          </a:blip>
+          <a:blip r:embed="rId3"/>
           <a:stretch>
             <a:fillRect/>
           </a:stretch>
@@ -4198,9 +4452,7 @@
             <p:nvPr/>
           </p:nvPicPr>
           <p:blipFill>
-            <a:blip r:embed="rId4">
-              <a:extLst/>
-            </a:blip>
+            <a:blip r:embed="rId4"/>
             <a:stretch>
               <a:fillRect/>
             </a:stretch>
@@ -4242,7 +4494,7 @@
             <a:effectLst/>
             <a:extLst>
               <a:ext uri="{C572A759-6A51-4108-AA02-DFA0A04FC94B}">
-                <ma14:wrappingTextBoxFlag xmlns:ma14="http://schemas.microsoft.com/office/mac/drawingml/2011/main" val="1"/>
+                <ma14:wrappingTextBoxFlag xmlns:ma14="http://schemas.microsoft.com/office/mac/drawingml/2011/main" xmlns:a14="http://schemas.microsoft.com/office/drawing/2010/main" xmlns:m="http://schemas.openxmlformats.org/officeDocument/2006/math" xmlns="" val="1"/>
               </a:ext>
             </a:extLst>
           </p:spPr>
@@ -4261,7 +4513,6 @@
               </a:lvl1pPr>
             </a:lstStyle>
             <a:p>
-              <a:pPr/>
               <a:r>
                 <a:t>Tracking</a:t>
               </a:r>
@@ -4292,9 +4543,7 @@
             <p:nvPr/>
           </p:nvPicPr>
           <p:blipFill>
-            <a:blip r:embed="rId4">
-              <a:extLst/>
-            </a:blip>
+            <a:blip r:embed="rId4"/>
             <a:stretch>
               <a:fillRect/>
             </a:stretch>
@@ -4336,7 +4585,7 @@
             <a:effectLst/>
             <a:extLst>
               <a:ext uri="{C572A759-6A51-4108-AA02-DFA0A04FC94B}">
-                <ma14:wrappingTextBoxFlag xmlns:ma14="http://schemas.microsoft.com/office/mac/drawingml/2011/main" val="1"/>
+                <ma14:wrappingTextBoxFlag xmlns:ma14="http://schemas.microsoft.com/office/mac/drawingml/2011/main" xmlns:a14="http://schemas.microsoft.com/office/drawing/2010/main" xmlns:m="http://schemas.openxmlformats.org/officeDocument/2006/math" xmlns="" val="1"/>
               </a:ext>
             </a:extLst>
           </p:spPr>
@@ -4355,7 +4604,6 @@
               </a:lvl1pPr>
             </a:lstStyle>
             <a:p>
-              <a:pPr/>
               <a:r>
                 <a:t>Model</a:t>
               </a:r>
@@ -4372,9 +4620,7 @@
           <p:nvPr/>
         </p:nvPicPr>
         <p:blipFill>
-          <a:blip r:embed="rId5">
-            <a:extLst/>
-          </a:blip>
+          <a:blip r:embed="rId5"/>
           <a:stretch>
             <a:fillRect/>
           </a:stretch>
@@ -4401,9 +4647,7 @@
           <p:nvPr/>
         </p:nvPicPr>
         <p:blipFill>
-          <a:blip r:embed="rId6">
-            <a:extLst/>
-          </a:blip>
+          <a:blip r:embed="rId6"/>
           <a:stretch>
             <a:fillRect/>
           </a:stretch>
@@ -4430,9 +4674,7 @@
           <p:nvPr/>
         </p:nvPicPr>
         <p:blipFill>
-          <a:blip r:embed="rId7">
-            <a:extLst/>
-          </a:blip>
+          <a:blip r:embed="rId7"/>
           <a:stretch>
             <a:fillRect/>
           </a:stretch>
@@ -4459,9 +4701,7 @@
           <p:nvPr/>
         </p:nvPicPr>
         <p:blipFill>
-          <a:blip r:embed="rId8">
-            <a:extLst/>
-          </a:blip>
+          <a:blip r:embed="rId8"/>
           <a:stretch>
             <a:fillRect/>
           </a:stretch>
@@ -4488,9 +4728,7 @@
           <p:nvPr/>
         </p:nvPicPr>
         <p:blipFill>
-          <a:blip r:embed="rId9">
-            <a:extLst/>
-          </a:blip>
+          <a:blip r:embed="rId9"/>
           <a:stretch>
             <a:fillRect/>
           </a:stretch>
@@ -4517,9 +4755,7 @@
           <p:nvPr/>
         </p:nvPicPr>
         <p:blipFill>
-          <a:blip r:embed="rId10">
-            <a:extLst/>
-          </a:blip>
+          <a:blip r:embed="rId10"/>
           <a:stretch>
             <a:fillRect/>
           </a:stretch>
@@ -4546,9 +4782,7 @@
           <p:nvPr/>
         </p:nvPicPr>
         <p:blipFill>
-          <a:blip r:embed="rId11">
-            <a:extLst/>
-          </a:blip>
+          <a:blip r:embed="rId11"/>
           <a:stretch>
             <a:fillRect/>
           </a:stretch>
@@ -4575,9 +4809,7 @@
           <p:nvPr/>
         </p:nvPicPr>
         <p:blipFill>
-          <a:blip r:embed="rId12">
-            <a:extLst/>
-          </a:blip>
+          <a:blip r:embed="rId12"/>
           <a:stretch>
             <a:fillRect/>
           </a:stretch>
@@ -4604,9 +4836,7 @@
           <p:nvPr/>
         </p:nvPicPr>
         <p:blipFill>
-          <a:blip r:embed="rId13">
-            <a:extLst/>
-          </a:blip>
+          <a:blip r:embed="rId13"/>
           <a:stretch>
             <a:fillRect/>
           </a:stretch>
@@ -4633,9 +4863,7 @@
           <p:nvPr/>
         </p:nvPicPr>
         <p:blipFill>
-          <a:blip r:embed="rId14">
-            <a:extLst/>
-          </a:blip>
+          <a:blip r:embed="rId14"/>
           <a:stretch>
             <a:fillRect/>
           </a:stretch>
@@ -4662,9 +4890,7 @@
           <p:nvPr/>
         </p:nvPicPr>
         <p:blipFill>
-          <a:blip r:embed="rId15">
-            <a:extLst/>
-          </a:blip>
+          <a:blip r:embed="rId15"/>
           <a:stretch>
             <a:fillRect/>
           </a:stretch>
@@ -4691,9 +4917,7 @@
           <p:nvPr/>
         </p:nvPicPr>
         <p:blipFill>
-          <a:blip r:embed="rId16">
-            <a:extLst/>
-          </a:blip>
+          <a:blip r:embed="rId16"/>
           <a:stretch>
             <a:fillRect/>
           </a:stretch>
@@ -4720,9 +4944,7 @@
           <p:nvPr/>
         </p:nvPicPr>
         <p:blipFill>
-          <a:blip r:embed="rId17">
-            <a:extLst/>
-          </a:blip>
+          <a:blip r:embed="rId17"/>
           <a:stretch>
             <a:fillRect/>
           </a:stretch>
@@ -4749,9 +4971,7 @@
           <p:nvPr/>
         </p:nvPicPr>
         <p:blipFill>
-          <a:blip r:embed="rId18">
-            <a:extLst/>
-          </a:blip>
+          <a:blip r:embed="rId18"/>
           <a:stretch>
             <a:fillRect/>
           </a:stretch>
@@ -4774,12 +4994,12 @@
   <p:clrMapOvr>
     <a:masterClrMapping/>
   </p:clrMapOvr>
-  <p:transition xmlns:p14="http://schemas.microsoft.com/office/powerpoint/2010/main" spd="med" advClick="1"/>
+  <p:transition spd="med"/>
 </p:sld>
 </file>
 
 <file path=ppt/slides/slide2.xml><?xml version="1.0" encoding="utf-8"?>
-<p:sld xmlns:a="http://schemas.openxmlformats.org/drawingml/2006/main" xmlns:r="http://schemas.openxmlformats.org/officeDocument/2006/relationships" xmlns:p="http://schemas.openxmlformats.org/presentationml/2006/main" xmlns:m="http://schemas.openxmlformats.org/officeDocument/2006/math" xmlns:a14="http://schemas.microsoft.com/office/drawing/2010/main" showMasterSp="1" showMasterPhAnim="1">
+<p:sld xmlns:a="http://schemas.openxmlformats.org/drawingml/2006/main" xmlns:r="http://schemas.openxmlformats.org/officeDocument/2006/relationships" xmlns:p="http://schemas.openxmlformats.org/presentationml/2006/main">
   <p:cSld>
     <p:spTree>
       <p:nvGrpSpPr>
@@ -4798,7 +5018,9 @@
       <p:sp>
         <p:nvSpPr>
           <p:cNvPr id="115" name="title"/>
-          <p:cNvSpPr txBox="1"/>
+          <p:cNvSpPr txBox="1">
+            <a:spLocks noGrp="1"/>
+          </p:cNvSpPr>
           <p:nvPr>
             <p:ph type="title"/>
           </p:nvPr>
@@ -4828,7 +5050,6 @@
             </a:lvl1pPr>
           </a:lstStyle>
           <a:p>
-            <a:pPr/>
             <a:r>
               <a:t>Pitch</a:t>
             </a:r>
@@ -4844,9 +5065,7 @@
           <p:nvPr/>
         </p:nvPicPr>
         <p:blipFill>
-          <a:blip r:embed="rId2">
-            <a:extLst/>
-          </a:blip>
+          <a:blip r:embed="rId2"/>
           <a:stretch>
             <a:fillRect/>
           </a:stretch>
@@ -4897,6 +5116,7 @@
                 <a:sym typeface="Arial"/>
               </a:defRPr>
             </a:pPr>
+            <a:endParaRPr/>
           </a:p>
         </p:txBody>
       </p:sp>
@@ -4923,7 +5143,7 @@
             <a:miter lim="400000"/>
           </a:ln>
           <a:effectLst>
-            <a:outerShdw sx="100000" sy="100000" kx="0" ky="0" algn="b" rotWithShape="0" blurRad="88900" dist="26000" dir="5400000">
+            <a:outerShdw blurRad="88900" dist="26000" dir="5400000" rotWithShape="0">
               <a:srgbClr val="0E3449">
                 <a:alpha val="12000"/>
               </a:srgbClr>
@@ -4942,6 +5162,7 @@
                 <a:sym typeface="Arial"/>
               </a:defRPr>
             </a:pPr>
+            <a:endParaRPr/>
           </a:p>
         </p:txBody>
       </p:sp>
@@ -4978,6 +5199,7 @@
                 <a:sym typeface="Arial"/>
               </a:defRPr>
             </a:pPr>
+            <a:endParaRPr/>
           </a:p>
         </p:txBody>
       </p:sp>
@@ -4990,9 +5212,7 @@
           <p:nvPr/>
         </p:nvPicPr>
         <p:blipFill>
-          <a:blip r:embed="rId3">
-            <a:extLst/>
-          </a:blip>
+          <a:blip r:embed="rId3"/>
           <a:stretch>
             <a:fillRect/>
           </a:stretch>
@@ -5029,13 +5249,13 @@
           </a:ln>
           <a:extLst>
             <a:ext uri="{C572A759-6A51-4108-AA02-DFA0A04FC94B}">
-              <ma14:wrappingTextBoxFlag xmlns:ma14="http://schemas.microsoft.com/office/mac/drawingml/2011/main" val="1"/>
+              <ma14:wrappingTextBoxFlag xmlns:ma14="http://schemas.microsoft.com/office/mac/drawingml/2011/main" xmlns:a14="http://schemas.microsoft.com/office/drawing/2010/main" xmlns:m="http://schemas.openxmlformats.org/officeDocument/2006/math" xmlns="" val="1"/>
             </a:ext>
           </a:extLst>
         </p:spPr>
         <p:txBody>
           <a:bodyPr lIns="18000" tIns="18000" rIns="18000" bIns="18000" anchor="ctr">
-            <a:normAutofit fontScale="100000" lnSpcReduction="0"/>
+            <a:normAutofit/>
           </a:bodyPr>
           <a:lstStyle/>
           <a:p>
@@ -5043,7 +5263,7 @@
               <a:spcBef>
                 <a:spcPts val="300"/>
               </a:spcBef>
-              <a:defRPr b="1" sz="1300">
+              <a:defRPr sz="1300" b="1">
                 <a:solidFill>
                   <a:srgbClr val="0E3449"/>
                 </a:solidFill>
@@ -5062,7 +5282,7 @@
               <a:spcBef>
                 <a:spcPts val="300"/>
               </a:spcBef>
-              <a:defRPr b="1" sz="1300">
+              <a:defRPr sz="1300" b="1">
                 <a:solidFill>
                   <a:srgbClr val="0E3449"/>
                 </a:solidFill>
@@ -5072,6 +5292,7 @@
                 <a:sym typeface="Inter SemiBold"/>
               </a:defRPr>
             </a:pPr>
+            <a:endParaRPr/>
           </a:p>
           <a:p>
             <a:pPr>
@@ -5117,7 +5338,7 @@
             <a:miter lim="400000"/>
           </a:ln>
           <a:effectLst>
-            <a:outerShdw sx="100000" sy="100000" kx="0" ky="0" algn="b" rotWithShape="0" blurRad="88900" dist="26000" dir="5400000">
+            <a:outerShdw blurRad="88900" dist="26000" dir="5400000" rotWithShape="0">
               <a:srgbClr val="0E3449">
                 <a:alpha val="12000"/>
               </a:srgbClr>
@@ -5136,6 +5357,7 @@
                 <a:sym typeface="Arial"/>
               </a:defRPr>
             </a:pPr>
+            <a:endParaRPr/>
           </a:p>
         </p:txBody>
       </p:sp>
@@ -5162,7 +5384,7 @@
             <a:miter lim="400000"/>
           </a:ln>
           <a:effectLst>
-            <a:outerShdw sx="100000" sy="100000" kx="0" ky="0" algn="b" rotWithShape="0" blurRad="88900" dist="26000" dir="5400000">
+            <a:outerShdw blurRad="88900" dist="26000" dir="5400000" rotWithShape="0">
               <a:srgbClr val="0E3449">
                 <a:alpha val="12000"/>
               </a:srgbClr>
@@ -5181,6 +5403,7 @@
                 <a:sym typeface="Arial"/>
               </a:defRPr>
             </a:pPr>
+            <a:endParaRPr/>
           </a:p>
         </p:txBody>
       </p:sp>
@@ -5217,6 +5440,7 @@
                 <a:sym typeface="Arial"/>
               </a:defRPr>
             </a:pPr>
+            <a:endParaRPr/>
           </a:p>
         </p:txBody>
       </p:sp>
@@ -5253,6 +5477,7 @@
                 <a:sym typeface="Arial"/>
               </a:defRPr>
             </a:pPr>
+            <a:endParaRPr/>
           </a:p>
         </p:txBody>
       </p:sp>
@@ -5265,9 +5490,7 @@
           <p:nvPr/>
         </p:nvPicPr>
         <p:blipFill>
-          <a:blip r:embed="rId4">
-            <a:extLst/>
-          </a:blip>
+          <a:blip r:embed="rId4"/>
           <a:stretch>
             <a:fillRect/>
           </a:stretch>
@@ -5294,9 +5517,7 @@
           <p:nvPr/>
         </p:nvPicPr>
         <p:blipFill>
-          <a:blip r:embed="rId5">
-            <a:extLst/>
-          </a:blip>
+          <a:blip r:embed="rId5"/>
           <a:stretch>
             <a:fillRect/>
           </a:stretch>
@@ -5333,13 +5554,13 @@
           </a:ln>
           <a:extLst>
             <a:ext uri="{C572A759-6A51-4108-AA02-DFA0A04FC94B}">
-              <ma14:wrappingTextBoxFlag xmlns:ma14="http://schemas.microsoft.com/office/mac/drawingml/2011/main" val="1"/>
+              <ma14:wrappingTextBoxFlag xmlns:ma14="http://schemas.microsoft.com/office/mac/drawingml/2011/main" xmlns:a14="http://schemas.microsoft.com/office/drawing/2010/main" xmlns:m="http://schemas.openxmlformats.org/officeDocument/2006/math" xmlns="" val="1"/>
             </a:ext>
           </a:extLst>
         </p:spPr>
         <p:txBody>
           <a:bodyPr lIns="18000" tIns="18000" rIns="18000" bIns="18000" anchor="ctr">
-            <a:normAutofit fontScale="100000" lnSpcReduction="0"/>
+            <a:normAutofit/>
           </a:bodyPr>
           <a:lstStyle>
             <a:lvl1pPr>
@@ -5355,7 +5576,6 @@
             </a:lvl1pPr>
           </a:lstStyle>
           <a:p>
-            <a:pPr/>
             <a:r>
               <a:t>Notre solution</a:t>
             </a:r>
@@ -5381,13 +5601,13 @@
           </a:ln>
           <a:extLst>
             <a:ext uri="{C572A759-6A51-4108-AA02-DFA0A04FC94B}">
-              <ma14:wrappingTextBoxFlag xmlns:ma14="http://schemas.microsoft.com/office/mac/drawingml/2011/main" val="1"/>
+              <ma14:wrappingTextBoxFlag xmlns:ma14="http://schemas.microsoft.com/office/mac/drawingml/2011/main" xmlns:a14="http://schemas.microsoft.com/office/drawing/2010/main" xmlns:m="http://schemas.openxmlformats.org/officeDocument/2006/math" xmlns="" val="1"/>
             </a:ext>
           </a:extLst>
         </p:spPr>
         <p:txBody>
           <a:bodyPr lIns="18000" tIns="18000" rIns="18000" bIns="18000">
-            <a:normAutofit fontScale="100000" lnSpcReduction="0"/>
+            <a:normAutofit/>
           </a:bodyPr>
           <a:lstStyle>
             <a:lvl1pPr>
@@ -5403,7 +5623,6 @@
             </a:lvl1pPr>
           </a:lstStyle>
           <a:p>
-            <a:pPr/>
             <a:r>
               <a:t>Une appli qui exploite les données du foot moderne pour prédire l’issue d’un match, à partir des infos équipes, joueurs et résultats des championnats européens.</a:t>
             </a:r>
@@ -5429,13 +5648,13 @@
           </a:ln>
           <a:extLst>
             <a:ext uri="{C572A759-6A51-4108-AA02-DFA0A04FC94B}">
-              <ma14:wrappingTextBoxFlag xmlns:ma14="http://schemas.microsoft.com/office/mac/drawingml/2011/main" val="1"/>
+              <ma14:wrappingTextBoxFlag xmlns:ma14="http://schemas.microsoft.com/office/mac/drawingml/2011/main" xmlns:a14="http://schemas.microsoft.com/office/drawing/2010/main" xmlns:m="http://schemas.openxmlformats.org/officeDocument/2006/math" xmlns="" val="1"/>
             </a:ext>
           </a:extLst>
         </p:spPr>
         <p:txBody>
           <a:bodyPr lIns="18000" tIns="18000" rIns="18000" bIns="18000" anchor="ctr">
-            <a:normAutofit fontScale="100000" lnSpcReduction="0"/>
+            <a:normAutofit/>
           </a:bodyPr>
           <a:lstStyle>
             <a:lvl1pPr>
@@ -5451,7 +5670,6 @@
             </a:lvl1pPr>
           </a:lstStyle>
           <a:p>
-            <a:pPr/>
             <a:r>
               <a:t>Pour qui ?</a:t>
             </a:r>
@@ -5477,13 +5695,13 @@
           </a:ln>
           <a:extLst>
             <a:ext uri="{C572A759-6A51-4108-AA02-DFA0A04FC94B}">
-              <ma14:wrappingTextBoxFlag xmlns:ma14="http://schemas.microsoft.com/office/mac/drawingml/2011/main" val="1"/>
+              <ma14:wrappingTextBoxFlag xmlns:ma14="http://schemas.microsoft.com/office/mac/drawingml/2011/main" xmlns:a14="http://schemas.microsoft.com/office/drawing/2010/main" xmlns:m="http://schemas.openxmlformats.org/officeDocument/2006/math" xmlns="" val="1"/>
             </a:ext>
           </a:extLst>
         </p:spPr>
         <p:txBody>
           <a:bodyPr lIns="18000" tIns="18000" rIns="18000" bIns="18000">
-            <a:normAutofit fontScale="100000" lnSpcReduction="0"/>
+            <a:normAutofit/>
           </a:bodyPr>
           <a:lstStyle/>
           <a:p>
@@ -5529,12 +5747,12 @@
   <p:clrMapOvr>
     <a:masterClrMapping/>
   </p:clrMapOvr>
-  <p:transition xmlns:p14="http://schemas.microsoft.com/office/powerpoint/2010/main" spd="med" advClick="1"/>
+  <p:transition spd="med"/>
 </p:sld>
 </file>
 
 <file path=ppt/slides/slide3.xml><?xml version="1.0" encoding="utf-8"?>
-<p:sld xmlns:a="http://schemas.openxmlformats.org/drawingml/2006/main" xmlns:r="http://schemas.openxmlformats.org/officeDocument/2006/relationships" xmlns:p="http://schemas.openxmlformats.org/presentationml/2006/main" xmlns:m="http://schemas.openxmlformats.org/officeDocument/2006/math" xmlns:a14="http://schemas.microsoft.com/office/drawing/2010/main" showMasterSp="1" showMasterPhAnim="1">
+<p:sld xmlns:a="http://schemas.openxmlformats.org/drawingml/2006/main" xmlns:r="http://schemas.openxmlformats.org/officeDocument/2006/relationships" xmlns:p="http://schemas.openxmlformats.org/presentationml/2006/main">
   <p:cSld>
     <p:spTree>
       <p:nvGrpSpPr>
@@ -5553,7 +5771,9 @@
       <p:sp>
         <p:nvSpPr>
           <p:cNvPr id="133" name="Google Shape;68;p15"/>
-          <p:cNvSpPr txBox="1"/>
+          <p:cNvSpPr txBox="1">
+            <a:spLocks noGrp="1"/>
+          </p:cNvSpPr>
           <p:nvPr>
             <p:ph type="title"/>
           </p:nvPr>
@@ -5583,7 +5803,6 @@
             </a:lvl1pPr>
           </a:lstStyle>
           <a:p>
-            <a:pPr/>
             <a:r>
               <a:t>Description du modèle</a:t>
             </a:r>
@@ -5623,6 +5842,7 @@
                 <a:sym typeface="Arial"/>
               </a:defRPr>
             </a:pPr>
+            <a:endParaRPr/>
           </a:p>
         </p:txBody>
       </p:sp>
@@ -5635,9 +5855,7 @@
           <p:nvPr/>
         </p:nvPicPr>
         <p:blipFill>
-          <a:blip r:embed="rId2">
-            <a:extLst/>
-          </a:blip>
+          <a:blip r:embed="rId2"/>
           <a:stretch>
             <a:fillRect/>
           </a:stretch>
@@ -5678,7 +5896,7 @@
             <a:miter lim="400000"/>
           </a:ln>
           <a:effectLst>
-            <a:outerShdw sx="100000" sy="100000" kx="0" ky="0" algn="b" rotWithShape="0" blurRad="88900" dist="26000" dir="5400000">
+            <a:outerShdw blurRad="88900" dist="26000" dir="5400000" rotWithShape="0">
               <a:srgbClr val="0E3449">
                 <a:alpha val="13000"/>
               </a:srgbClr>
@@ -5697,6 +5915,7 @@
                 <a:sym typeface="Arial"/>
               </a:defRPr>
             </a:pPr>
+            <a:endParaRPr/>
           </a:p>
         </p:txBody>
       </p:sp>
@@ -5723,7 +5942,7 @@
             <a:miter lim="400000"/>
           </a:ln>
           <a:effectLst>
-            <a:outerShdw sx="100000" sy="100000" kx="0" ky="0" algn="b" rotWithShape="0" blurRad="88900" dist="26000" dir="5400000">
+            <a:outerShdw blurRad="88900" dist="26000" dir="5400000" rotWithShape="0">
               <a:srgbClr val="0E3449">
                 <a:alpha val="13000"/>
               </a:srgbClr>
@@ -5742,6 +5961,7 @@
                 <a:sym typeface="Arial"/>
               </a:defRPr>
             </a:pPr>
+            <a:endParaRPr/>
           </a:p>
         </p:txBody>
       </p:sp>
@@ -5768,7 +5988,7 @@
             <a:miter lim="400000"/>
           </a:ln>
           <a:effectLst>
-            <a:outerShdw sx="100000" sy="100000" kx="0" ky="0" algn="b" rotWithShape="0" blurRad="88900" dist="26000" dir="5400000">
+            <a:outerShdw blurRad="88900" dist="26000" dir="5400000" rotWithShape="0">
               <a:srgbClr val="0E3449">
                 <a:alpha val="13000"/>
               </a:srgbClr>
@@ -5787,6 +6007,7 @@
                 <a:sym typeface="Arial"/>
               </a:defRPr>
             </a:pPr>
+            <a:endParaRPr/>
           </a:p>
         </p:txBody>
       </p:sp>
@@ -5826,6 +6047,7 @@
                 <a:sym typeface="Arial"/>
               </a:defRPr>
             </a:pPr>
+            <a:endParaRPr/>
           </a:p>
         </p:txBody>
       </p:sp>
@@ -5865,6 +6087,7 @@
                 <a:sym typeface="Arial"/>
               </a:defRPr>
             </a:pPr>
+            <a:endParaRPr/>
           </a:p>
         </p:txBody>
       </p:sp>
@@ -5901,6 +6124,7 @@
                 <a:sym typeface="Arial"/>
               </a:defRPr>
             </a:pPr>
+            <a:endParaRPr/>
           </a:p>
         </p:txBody>
       </p:sp>
@@ -5937,6 +6161,7 @@
                 <a:sym typeface="Arial"/>
               </a:defRPr>
             </a:pPr>
+            <a:endParaRPr/>
           </a:p>
         </p:txBody>
       </p:sp>
@@ -5973,6 +6198,7 @@
                 <a:sym typeface="Arial"/>
               </a:defRPr>
             </a:pPr>
+            <a:endParaRPr/>
           </a:p>
         </p:txBody>
       </p:sp>
@@ -5985,9 +6211,7 @@
           <p:nvPr/>
         </p:nvPicPr>
         <p:blipFill>
-          <a:blip r:embed="rId3">
-            <a:extLst/>
-          </a:blip>
+          <a:blip r:embed="rId3"/>
           <a:stretch>
             <a:fillRect/>
           </a:stretch>
@@ -6014,9 +6238,7 @@
           <p:nvPr/>
         </p:nvPicPr>
         <p:blipFill>
-          <a:blip r:embed="rId4">
-            <a:extLst/>
-          </a:blip>
+          <a:blip r:embed="rId4"/>
           <a:stretch>
             <a:fillRect/>
           </a:stretch>
@@ -6043,9 +6265,7 @@
           <p:nvPr/>
         </p:nvPicPr>
         <p:blipFill>
-          <a:blip r:embed="rId5">
-            <a:extLst/>
-          </a:blip>
+          <a:blip r:embed="rId5"/>
           <a:stretch>
             <a:fillRect/>
           </a:stretch>
@@ -6082,17 +6302,17 @@
           </a:ln>
           <a:extLst>
             <a:ext uri="{C572A759-6A51-4108-AA02-DFA0A04FC94B}">
-              <ma14:wrappingTextBoxFlag xmlns:ma14="http://schemas.microsoft.com/office/mac/drawingml/2011/main" val="1"/>
+              <ma14:wrappingTextBoxFlag xmlns:ma14="http://schemas.microsoft.com/office/mac/drawingml/2011/main" xmlns:a14="http://schemas.microsoft.com/office/drawing/2010/main" xmlns:m="http://schemas.openxmlformats.org/officeDocument/2006/math" xmlns="" val="1"/>
             </a:ext>
           </a:extLst>
         </p:spPr>
         <p:txBody>
           <a:bodyPr lIns="18000" tIns="18000" rIns="18000" bIns="18000" anchor="ctr">
-            <a:normAutofit fontScale="100000" lnSpcReduction="0"/>
+            <a:normAutofit/>
           </a:bodyPr>
           <a:lstStyle>
             <a:lvl1pPr algn="ctr">
-              <a:defRPr b="1" sz="1300">
+              <a:defRPr sz="1300" b="1">
                 <a:solidFill>
                   <a:srgbClr val="0E3449"/>
                 </a:solidFill>
@@ -6104,7 +6324,6 @@
             </a:lvl1pPr>
           </a:lstStyle>
           <a:p>
-            <a:pPr/>
             <a:r>
               <a:t>Les données</a:t>
             </a:r>
@@ -6130,13 +6349,13 @@
           </a:ln>
           <a:extLst>
             <a:ext uri="{C572A759-6A51-4108-AA02-DFA0A04FC94B}">
-              <ma14:wrappingTextBoxFlag xmlns:ma14="http://schemas.microsoft.com/office/mac/drawingml/2011/main" val="1"/>
+              <ma14:wrappingTextBoxFlag xmlns:ma14="http://schemas.microsoft.com/office/mac/drawingml/2011/main" xmlns:a14="http://schemas.microsoft.com/office/drawing/2010/main" xmlns:m="http://schemas.openxmlformats.org/officeDocument/2006/math" xmlns="" val="1"/>
             </a:ext>
           </a:extLst>
         </p:spPr>
         <p:txBody>
           <a:bodyPr lIns="18000" tIns="18000" rIns="18000" bIns="18000">
-            <a:normAutofit fontScale="100000" lnSpcReduction="0"/>
+            <a:normAutofit/>
           </a:bodyPr>
           <a:lstStyle>
             <a:lvl1pPr algn="ctr">
@@ -6152,7 +6371,6 @@
             </a:lvl1pPr>
           </a:lstStyle>
           <a:p>
-            <a:pPr/>
             <a:r>
               <a:t>matchs, équipes et joueurs des championnats européens</a:t>
             </a:r>
@@ -6178,17 +6396,17 @@
           </a:ln>
           <a:extLst>
             <a:ext uri="{C572A759-6A51-4108-AA02-DFA0A04FC94B}">
-              <ma14:wrappingTextBoxFlag xmlns:ma14="http://schemas.microsoft.com/office/mac/drawingml/2011/main" val="1"/>
+              <ma14:wrappingTextBoxFlag xmlns:ma14="http://schemas.microsoft.com/office/mac/drawingml/2011/main" xmlns:a14="http://schemas.microsoft.com/office/drawing/2010/main" xmlns:m="http://schemas.openxmlformats.org/officeDocument/2006/math" xmlns="" val="1"/>
             </a:ext>
           </a:extLst>
         </p:spPr>
         <p:txBody>
           <a:bodyPr lIns="18000" tIns="18000" rIns="18000" bIns="18000" anchor="ctr">
-            <a:normAutofit fontScale="100000" lnSpcReduction="0"/>
+            <a:normAutofit/>
           </a:bodyPr>
           <a:lstStyle>
             <a:lvl1pPr algn="ctr">
-              <a:defRPr b="1" sz="1300">
+              <a:defRPr sz="1300" b="1">
                 <a:solidFill>
                   <a:srgbClr val="0E3449"/>
                 </a:solidFill>
@@ -6200,7 +6418,6 @@
             </a:lvl1pPr>
           </a:lstStyle>
           <a:p>
-            <a:pPr/>
             <a:r>
               <a:t>Le modèle</a:t>
             </a:r>
@@ -6226,13 +6443,13 @@
           </a:ln>
           <a:extLst>
             <a:ext uri="{C572A759-6A51-4108-AA02-DFA0A04FC94B}">
-              <ma14:wrappingTextBoxFlag xmlns:ma14="http://schemas.microsoft.com/office/mac/drawingml/2011/main" val="1"/>
+              <ma14:wrappingTextBoxFlag xmlns:ma14="http://schemas.microsoft.com/office/mac/drawingml/2011/main" xmlns:a14="http://schemas.microsoft.com/office/drawing/2010/main" xmlns:m="http://schemas.openxmlformats.org/officeDocument/2006/math" xmlns="" val="1"/>
             </a:ext>
           </a:extLst>
         </p:spPr>
         <p:txBody>
           <a:bodyPr lIns="18000" tIns="18000" rIns="18000" bIns="18000">
-            <a:normAutofit fontScale="100000" lnSpcReduction="0"/>
+            <a:normAutofit/>
           </a:bodyPr>
           <a:lstStyle>
             <a:lvl1pPr algn="ctr">
@@ -6248,7 +6465,6 @@
             </a:lvl1pPr>
           </a:lstStyle>
           <a:p>
-            <a:pPr/>
             <a:r>
               <a:t>à partir des notes FIFA 26 des joueurs</a:t>
             </a:r>
@@ -6274,17 +6490,17 @@
           </a:ln>
           <a:extLst>
             <a:ext uri="{C572A759-6A51-4108-AA02-DFA0A04FC94B}">
-              <ma14:wrappingTextBoxFlag xmlns:ma14="http://schemas.microsoft.com/office/mac/drawingml/2011/main" val="1"/>
+              <ma14:wrappingTextBoxFlag xmlns:ma14="http://schemas.microsoft.com/office/mac/drawingml/2011/main" xmlns:a14="http://schemas.microsoft.com/office/drawing/2010/main" xmlns:m="http://schemas.openxmlformats.org/officeDocument/2006/math" xmlns="" val="1"/>
             </a:ext>
           </a:extLst>
         </p:spPr>
         <p:txBody>
           <a:bodyPr lIns="18000" tIns="18000" rIns="18000" bIns="18000" anchor="ctr">
-            <a:normAutofit fontScale="100000" lnSpcReduction="0"/>
+            <a:normAutofit/>
           </a:bodyPr>
           <a:lstStyle>
             <a:lvl1pPr algn="ctr">
-              <a:defRPr b="1" sz="1300">
+              <a:defRPr sz="1300" b="1">
                 <a:solidFill>
                   <a:srgbClr val="0E3449"/>
                 </a:solidFill>
@@ -6296,7 +6512,6 @@
             </a:lvl1pPr>
           </a:lstStyle>
           <a:p>
-            <a:pPr/>
             <a:r>
               <a:t>La prédiction</a:t>
             </a:r>
@@ -6322,13 +6537,13 @@
           </a:ln>
           <a:extLst>
             <a:ext uri="{C572A759-6A51-4108-AA02-DFA0A04FC94B}">
-              <ma14:wrappingTextBoxFlag xmlns:ma14="http://schemas.microsoft.com/office/mac/drawingml/2011/main" val="1"/>
+              <ma14:wrappingTextBoxFlag xmlns:ma14="http://schemas.microsoft.com/office/mac/drawingml/2011/main" xmlns:a14="http://schemas.microsoft.com/office/drawing/2010/main" xmlns:m="http://schemas.openxmlformats.org/officeDocument/2006/math" xmlns="" val="1"/>
             </a:ext>
           </a:extLst>
         </p:spPr>
         <p:txBody>
           <a:bodyPr lIns="18000" tIns="18000" rIns="18000" bIns="18000">
-            <a:normAutofit fontScale="100000" lnSpcReduction="0"/>
+            <a:normAutofit/>
           </a:bodyPr>
           <a:lstStyle>
             <a:lvl1pPr algn="ctr">
@@ -6344,7 +6559,6 @@
             </a:lvl1pPr>
           </a:lstStyle>
           <a:p>
-            <a:pPr/>
             <a:r>
               <a:t>le résultat d’un match entre deux équipes</a:t>
             </a:r>
@@ -6356,12 +6570,12 @@
   <p:clrMapOvr>
     <a:masterClrMapping/>
   </p:clrMapOvr>
-  <p:transition xmlns:p14="http://schemas.microsoft.com/office/powerpoint/2010/main" spd="med" advClick="1"/>
+  <p:transition spd="med"/>
 </p:sld>
 </file>
 
 <file path=ppt/slides/slide4.xml><?xml version="1.0" encoding="utf-8"?>
-<p:sld xmlns:a="http://schemas.openxmlformats.org/drawingml/2006/main" xmlns:r="http://schemas.openxmlformats.org/officeDocument/2006/relationships" xmlns:p="http://schemas.openxmlformats.org/presentationml/2006/main" xmlns:m="http://schemas.openxmlformats.org/officeDocument/2006/math" xmlns:a14="http://schemas.microsoft.com/office/drawing/2010/main" showMasterSp="1" showMasterPhAnim="1">
+<p:sld xmlns:a="http://schemas.openxmlformats.org/drawingml/2006/main" xmlns:r="http://schemas.openxmlformats.org/officeDocument/2006/relationships" xmlns:p="http://schemas.openxmlformats.org/presentationml/2006/main">
   <p:cSld>
     <p:spTree>
       <p:nvGrpSpPr>
@@ -6386,10 +6600,8 @@
           <p:nvPr/>
         </p:nvPicPr>
         <p:blipFill>
-          <a:blip r:embed="rId2">
-            <a:extLst/>
-          </a:blip>
-          <a:srcRect l="0" t="7813" r="0" b="7812"/>
+          <a:blip r:embed="rId2"/>
+          <a:srcRect t="7813" b="7812"/>
           <a:stretch>
             <a:fillRect/>
           </a:stretch>
@@ -6410,7 +6622,9 @@
       <p:sp>
         <p:nvSpPr>
           <p:cNvPr id="155" name="Google Shape;89;p18"/>
-          <p:cNvSpPr txBox="1"/>
+          <p:cNvSpPr txBox="1">
+            <a:spLocks noGrp="1"/>
+          </p:cNvSpPr>
           <p:nvPr>
             <p:ph type="title"/>
           </p:nvPr>
@@ -6452,7 +6666,7 @@
                     <a:srgbClr val="0000FF"/>
                   </a:solidFill>
                 </a:uFill>
-                <a:hlinkClick r:id="rId3" invalidUrl="" action="" tgtFrame="" tooltip="" history="1" highlightClick="0" endSnd="0"/>
+                <a:hlinkClick r:id="rId3"/>
               </a:rPr>
               <a:t>Vidéo</a:t>
             </a:r>
@@ -6466,7 +6680,7 @@
                     <a:srgbClr val="0000FF"/>
                   </a:solidFill>
                 </a:uFill>
-                <a:hlinkClick r:id="rId4" invalidUrl="" action="" tgtFrame="" tooltip="" history="1" highlightClick="0" endSnd="0"/>
+                <a:hlinkClick r:id="rId4"/>
               </a:rPr>
               <a:t> </a:t>
             </a:r>
@@ -6482,9 +6696,7 @@
           <p:nvPr/>
         </p:nvPicPr>
         <p:blipFill>
-          <a:blip r:embed="rId5">
-            <a:extLst/>
-          </a:blip>
+          <a:blip r:embed="rId5"/>
           <a:stretch>
             <a:fillRect/>
           </a:stretch>
@@ -6535,6 +6747,7 @@
                 <a:sym typeface="Arial"/>
               </a:defRPr>
             </a:pPr>
+            <a:endParaRPr/>
           </a:p>
         </p:txBody>
       </p:sp>
@@ -6561,7 +6774,7 @@
             <a:miter lim="400000"/>
           </a:ln>
           <a:effectLst>
-            <a:outerShdw sx="100000" sy="100000" kx="0" ky="0" algn="b" rotWithShape="0" blurRad="88900" dist="26000" dir="5400000">
+            <a:outerShdw blurRad="88900" dist="26000" dir="5400000" rotWithShape="0">
               <a:srgbClr val="0E3449">
                 <a:alpha val="13000"/>
               </a:srgbClr>
@@ -6580,6 +6793,7 @@
                 <a:sym typeface="Arial"/>
               </a:defRPr>
             </a:pPr>
+            <a:endParaRPr/>
           </a:p>
         </p:txBody>
       </p:sp>
@@ -6606,7 +6820,7 @@
             <a:miter lim="400000"/>
           </a:ln>
           <a:effectLst>
-            <a:outerShdw sx="100000" sy="100000" kx="0" ky="0" algn="b" rotWithShape="0" blurRad="88900" dist="26000" dir="5400000">
+            <a:outerShdw blurRad="88900" dist="26000" dir="5400000" rotWithShape="0">
               <a:srgbClr val="0E3449">
                 <a:alpha val="13000"/>
               </a:srgbClr>
@@ -6625,6 +6839,7 @@
                 <a:sym typeface="Arial"/>
               </a:defRPr>
             </a:pPr>
+            <a:endParaRPr/>
           </a:p>
         </p:txBody>
       </p:sp>
@@ -6651,7 +6866,7 @@
             <a:miter lim="400000"/>
           </a:ln>
           <a:effectLst>
-            <a:outerShdw sx="100000" sy="100000" kx="0" ky="0" algn="b" rotWithShape="0" blurRad="88900" dist="26000" dir="5400000">
+            <a:outerShdw blurRad="88900" dist="26000" dir="5400000" rotWithShape="0">
               <a:srgbClr val="0E3449">
                 <a:alpha val="13000"/>
               </a:srgbClr>
@@ -6670,6 +6885,7 @@
                 <a:sym typeface="Arial"/>
               </a:defRPr>
             </a:pPr>
+            <a:endParaRPr/>
           </a:p>
         </p:txBody>
       </p:sp>
@@ -6696,7 +6912,7 @@
             <a:miter lim="400000"/>
           </a:ln>
           <a:effectLst>
-            <a:outerShdw sx="100000" sy="100000" kx="0" ky="0" algn="b" rotWithShape="0" blurRad="88900" dist="26000" dir="5400000">
+            <a:outerShdw blurRad="88900" dist="26000" dir="5400000" rotWithShape="0">
               <a:srgbClr val="0E3449">
                 <a:alpha val="13000"/>
               </a:srgbClr>
@@ -6715,6 +6931,7 @@
                 <a:sym typeface="Arial"/>
               </a:defRPr>
             </a:pPr>
+            <a:endParaRPr/>
           </a:p>
         </p:txBody>
       </p:sp>
@@ -6751,6 +6968,7 @@
                 <a:sym typeface="Arial"/>
               </a:defRPr>
             </a:pPr>
+            <a:endParaRPr/>
           </a:p>
         </p:txBody>
       </p:sp>
@@ -6787,6 +7005,7 @@
                 <a:sym typeface="Arial"/>
               </a:defRPr>
             </a:pPr>
+            <a:endParaRPr/>
           </a:p>
         </p:txBody>
       </p:sp>
@@ -6823,6 +7042,7 @@
                 <a:sym typeface="Arial"/>
               </a:defRPr>
             </a:pPr>
+            <a:endParaRPr/>
           </a:p>
         </p:txBody>
       </p:sp>
@@ -6859,6 +7079,7 @@
                 <a:sym typeface="Arial"/>
               </a:defRPr>
             </a:pPr>
+            <a:endParaRPr/>
           </a:p>
         </p:txBody>
       </p:sp>
@@ -6871,9 +7092,7 @@
           <p:nvPr/>
         </p:nvPicPr>
         <p:blipFill>
-          <a:blip r:embed="rId6">
-            <a:extLst/>
-          </a:blip>
+          <a:blip r:embed="rId6"/>
           <a:stretch>
             <a:fillRect/>
           </a:stretch>
@@ -6900,9 +7119,7 @@
           <p:nvPr/>
         </p:nvPicPr>
         <p:blipFill>
-          <a:blip r:embed="rId7">
-            <a:extLst/>
-          </a:blip>
+          <a:blip r:embed="rId7"/>
           <a:stretch>
             <a:fillRect/>
           </a:stretch>
@@ -6929,9 +7146,7 @@
           <p:nvPr/>
         </p:nvPicPr>
         <p:blipFill>
-          <a:blip r:embed="rId8">
-            <a:extLst/>
-          </a:blip>
+          <a:blip r:embed="rId8"/>
           <a:stretch>
             <a:fillRect/>
           </a:stretch>
@@ -6958,9 +7173,7 @@
           <p:nvPr/>
         </p:nvPicPr>
         <p:blipFill>
-          <a:blip r:embed="rId9">
-            <a:extLst/>
-          </a:blip>
+          <a:blip r:embed="rId9"/>
           <a:stretch>
             <a:fillRect/>
           </a:stretch>
@@ -6997,17 +7210,17 @@
           </a:ln>
           <a:extLst>
             <a:ext uri="{C572A759-6A51-4108-AA02-DFA0A04FC94B}">
-              <ma14:wrappingTextBoxFlag xmlns:ma14="http://schemas.microsoft.com/office/mac/drawingml/2011/main" val="1"/>
+              <ma14:wrappingTextBoxFlag xmlns:ma14="http://schemas.microsoft.com/office/mac/drawingml/2011/main" xmlns:a14="http://schemas.microsoft.com/office/drawing/2010/main" xmlns:m="http://schemas.openxmlformats.org/officeDocument/2006/math" xmlns="" val="1"/>
             </a:ext>
           </a:extLst>
         </p:spPr>
         <p:txBody>
           <a:bodyPr lIns="18000" tIns="18000" rIns="18000" bIns="18000" anchor="ctr">
-            <a:normAutofit fontScale="100000" lnSpcReduction="0"/>
+            <a:normAutofit/>
           </a:bodyPr>
           <a:lstStyle>
             <a:lvl1pPr>
-              <a:defRPr b="1" sz="1300">
+              <a:defRPr sz="1300" b="1">
                 <a:solidFill>
                   <a:srgbClr val="0E3449"/>
                 </a:solidFill>
@@ -7019,7 +7232,6 @@
             </a:lvl1pPr>
           </a:lstStyle>
           <a:p>
-            <a:pPr/>
             <a:r>
               <a:t>Équipes &amp; effectifs</a:t>
             </a:r>
@@ -7045,13 +7257,13 @@
           </a:ln>
           <a:extLst>
             <a:ext uri="{C572A759-6A51-4108-AA02-DFA0A04FC94B}">
-              <ma14:wrappingTextBoxFlag xmlns:ma14="http://schemas.microsoft.com/office/mac/drawingml/2011/main" val="1"/>
+              <ma14:wrappingTextBoxFlag xmlns:ma14="http://schemas.microsoft.com/office/mac/drawingml/2011/main" xmlns:a14="http://schemas.microsoft.com/office/drawing/2010/main" xmlns:m="http://schemas.openxmlformats.org/officeDocument/2006/math" xmlns="" val="1"/>
             </a:ext>
           </a:extLst>
         </p:spPr>
         <p:txBody>
           <a:bodyPr lIns="18000" tIns="18000" rIns="18000" bIns="18000">
-            <a:normAutofit fontScale="100000" lnSpcReduction="0"/>
+            <a:normAutofit/>
           </a:bodyPr>
           <a:lstStyle>
             <a:lvl1pPr>
@@ -7067,7 +7279,6 @@
             </a:lvl1pPr>
           </a:lstStyle>
           <a:p>
-            <a:pPr/>
             <a:r>
               <a:t>effectif de la saison, notes &amp; valeur marchande, dernière composition officielle</a:t>
             </a:r>
@@ -7093,17 +7304,17 @@
           </a:ln>
           <a:extLst>
             <a:ext uri="{C572A759-6A51-4108-AA02-DFA0A04FC94B}">
-              <ma14:wrappingTextBoxFlag xmlns:ma14="http://schemas.microsoft.com/office/mac/drawingml/2011/main" val="1"/>
+              <ma14:wrappingTextBoxFlag xmlns:ma14="http://schemas.microsoft.com/office/mac/drawingml/2011/main" xmlns:a14="http://schemas.microsoft.com/office/drawing/2010/main" xmlns:m="http://schemas.openxmlformats.org/officeDocument/2006/math" xmlns="" val="1"/>
             </a:ext>
           </a:extLst>
         </p:spPr>
         <p:txBody>
           <a:bodyPr lIns="18000" tIns="18000" rIns="18000" bIns="18000" anchor="ctr">
-            <a:normAutofit fontScale="100000" lnSpcReduction="0"/>
+            <a:normAutofit/>
           </a:bodyPr>
           <a:lstStyle>
             <a:lvl1pPr>
-              <a:defRPr b="1" sz="1300">
+              <a:defRPr sz="1300" b="1">
                 <a:solidFill>
                   <a:srgbClr val="0E3449"/>
                 </a:solidFill>
@@ -7115,7 +7326,6 @@
             </a:lvl1pPr>
           </a:lstStyle>
           <a:p>
-            <a:pPr/>
             <a:r>
               <a:t>Prédiction de match</a:t>
             </a:r>
@@ -7141,13 +7351,13 @@
           </a:ln>
           <a:extLst>
             <a:ext uri="{C572A759-6A51-4108-AA02-DFA0A04FC94B}">
-              <ma14:wrappingTextBoxFlag xmlns:ma14="http://schemas.microsoft.com/office/mac/drawingml/2011/main" val="1"/>
+              <ma14:wrappingTextBoxFlag xmlns:ma14="http://schemas.microsoft.com/office/mac/drawingml/2011/main" xmlns:a14="http://schemas.microsoft.com/office/drawing/2010/main" xmlns:m="http://schemas.openxmlformats.org/officeDocument/2006/math" xmlns="" val="1"/>
             </a:ext>
           </a:extLst>
         </p:spPr>
         <p:txBody>
           <a:bodyPr lIns="18000" tIns="18000" rIns="18000" bIns="18000">
-            <a:normAutofit fontScale="100000" lnSpcReduction="0"/>
+            <a:normAutofit/>
           </a:bodyPr>
           <a:lstStyle>
             <a:lvl1pPr>
@@ -7163,7 +7373,6 @@
             </a:lvl1pPr>
           </a:lstStyle>
           <a:p>
-            <a:pPr/>
             <a:r>
               <a:t>résultat prédit entre deux équipes données</a:t>
             </a:r>
@@ -7189,17 +7398,17 @@
           </a:ln>
           <a:extLst>
             <a:ext uri="{C572A759-6A51-4108-AA02-DFA0A04FC94B}">
-              <ma14:wrappingTextBoxFlag xmlns:ma14="http://schemas.microsoft.com/office/mac/drawingml/2011/main" val="1"/>
+              <ma14:wrappingTextBoxFlag xmlns:ma14="http://schemas.microsoft.com/office/mac/drawingml/2011/main" xmlns:a14="http://schemas.microsoft.com/office/drawing/2010/main" xmlns:m="http://schemas.openxmlformats.org/officeDocument/2006/math" xmlns="" val="1"/>
             </a:ext>
           </a:extLst>
         </p:spPr>
         <p:txBody>
           <a:bodyPr lIns="18000" tIns="18000" rIns="18000" bIns="18000" anchor="ctr">
-            <a:normAutofit fontScale="100000" lnSpcReduction="0"/>
+            <a:normAutofit/>
           </a:bodyPr>
           <a:lstStyle>
             <a:lvl1pPr>
-              <a:defRPr b="1" sz="1300">
+              <a:defRPr sz="1300" b="1">
                 <a:solidFill>
                   <a:srgbClr val="0E3449"/>
                 </a:solidFill>
@@ -7211,7 +7420,6 @@
             </a:lvl1pPr>
           </a:lstStyle>
           <a:p>
-            <a:pPr/>
             <a:r>
               <a:t>Mode Fantasy</a:t>
             </a:r>
@@ -7237,13 +7445,13 @@
           </a:ln>
           <a:extLst>
             <a:ext uri="{C572A759-6A51-4108-AA02-DFA0A04FC94B}">
-              <ma14:wrappingTextBoxFlag xmlns:ma14="http://schemas.microsoft.com/office/mac/drawingml/2011/main" val="1"/>
+              <ma14:wrappingTextBoxFlag xmlns:ma14="http://schemas.microsoft.com/office/mac/drawingml/2011/main" xmlns:a14="http://schemas.microsoft.com/office/drawing/2010/main" xmlns:m="http://schemas.openxmlformats.org/officeDocument/2006/math" xmlns="" val="1"/>
             </a:ext>
           </a:extLst>
         </p:spPr>
         <p:txBody>
           <a:bodyPr lIns="18000" tIns="18000" rIns="18000" bIns="18000">
-            <a:normAutofit fontScale="100000" lnSpcReduction="0"/>
+            <a:normAutofit/>
           </a:bodyPr>
           <a:lstStyle>
             <a:lvl1pPr>
@@ -7259,7 +7467,6 @@
             </a:lvl1pPr>
           </a:lstStyle>
           <a:p>
-            <a:pPr/>
             <a:r>
               <a:t>créer sa dream team et lancer un tournoi (équipes fictives ou réelles)</a:t>
             </a:r>
@@ -7285,17 +7492,17 @@
           </a:ln>
           <a:extLst>
             <a:ext uri="{C572A759-6A51-4108-AA02-DFA0A04FC94B}">
-              <ma14:wrappingTextBoxFlag xmlns:ma14="http://schemas.microsoft.com/office/mac/drawingml/2011/main" val="1"/>
+              <ma14:wrappingTextBoxFlag xmlns:ma14="http://schemas.microsoft.com/office/mac/drawingml/2011/main" xmlns:a14="http://schemas.microsoft.com/office/drawing/2010/main" xmlns:m="http://schemas.openxmlformats.org/officeDocument/2006/math" xmlns="" val="1"/>
             </a:ext>
           </a:extLst>
         </p:spPr>
         <p:txBody>
           <a:bodyPr lIns="18000" tIns="18000" rIns="18000" bIns="18000" anchor="ctr">
-            <a:normAutofit fontScale="100000" lnSpcReduction="0"/>
+            <a:normAutofit/>
           </a:bodyPr>
           <a:lstStyle>
             <a:lvl1pPr>
-              <a:defRPr b="1" sz="1300">
+              <a:defRPr sz="1300" b="1">
                 <a:solidFill>
                   <a:srgbClr val="0E3449"/>
                 </a:solidFill>
@@ -7307,7 +7514,6 @@
             </a:lvl1pPr>
           </a:lstStyle>
           <a:p>
-            <a:pPr/>
             <a:r>
               <a:t>Chatbot IA</a:t>
             </a:r>
@@ -7333,13 +7539,13 @@
           </a:ln>
           <a:extLst>
             <a:ext uri="{C572A759-6A51-4108-AA02-DFA0A04FC94B}">
-              <ma14:wrappingTextBoxFlag xmlns:ma14="http://schemas.microsoft.com/office/mac/drawingml/2011/main" val="1"/>
+              <ma14:wrappingTextBoxFlag xmlns:ma14="http://schemas.microsoft.com/office/mac/drawingml/2011/main" xmlns:a14="http://schemas.microsoft.com/office/drawing/2010/main" xmlns:m="http://schemas.openxmlformats.org/officeDocument/2006/math" xmlns="" val="1"/>
             </a:ext>
           </a:extLst>
         </p:spPr>
         <p:txBody>
           <a:bodyPr lIns="18000" tIns="18000" rIns="18000" bIns="18000">
-            <a:normAutofit fontScale="100000" lnSpcReduction="0"/>
+            <a:normAutofit/>
           </a:bodyPr>
           <a:lstStyle>
             <a:lvl1pPr>
@@ -7355,7 +7561,6 @@
             </a:lvl1pPr>
           </a:lstStyle>
           <a:p>
-            <a:pPr/>
             <a:r>
               <a:t>réponses générées depuis les bases neondb &amp; Transfermarkt</a:t>
             </a:r>
@@ -7367,12 +7572,12 @@
   <p:clrMapOvr>
     <a:masterClrMapping/>
   </p:clrMapOvr>
-  <p:transition xmlns:p14="http://schemas.microsoft.com/office/powerpoint/2010/main" spd="med" advClick="1"/>
+  <p:transition spd="med"/>
 </p:sld>
 </file>
 
 <file path=ppt/slides/slide5.xml><?xml version="1.0" encoding="utf-8"?>
-<p:sld xmlns:a="http://schemas.openxmlformats.org/drawingml/2006/main" xmlns:r="http://schemas.openxmlformats.org/officeDocument/2006/relationships" xmlns:p="http://schemas.openxmlformats.org/presentationml/2006/main" xmlns:m="http://schemas.openxmlformats.org/officeDocument/2006/math" xmlns:a14="http://schemas.microsoft.com/office/drawing/2010/main" showMasterSp="1" showMasterPhAnim="1">
+<p:sld xmlns:a="http://schemas.openxmlformats.org/drawingml/2006/main" xmlns:r="http://schemas.openxmlformats.org/officeDocument/2006/relationships" xmlns:p="http://schemas.openxmlformats.org/presentationml/2006/main">
   <p:cSld>
     <p:spTree>
       <p:nvGrpSpPr>
@@ -7397,17 +7602,15 @@
           <p:nvPr/>
         </p:nvPicPr>
         <p:blipFill>
-          <a:blip r:embed="rId2">
-            <a:extLst/>
-          </a:blip>
-          <a:srcRect l="0" t="7813" r="0" b="7812"/>
+          <a:blip r:embed="rId2"/>
+          <a:srcRect t="7813" b="7812"/>
           <a:stretch>
             <a:fillRect/>
           </a:stretch>
         </p:blipFill>
         <p:spPr>
           <a:xfrm>
-            <a:off x="0" y="0"/>
+            <a:off x="325018" y="-75"/>
             <a:ext cx="9144000" cy="5143500"/>
           </a:xfrm>
           <a:prstGeom prst="rect">
@@ -7421,7 +7624,9 @@
       <p:sp>
         <p:nvSpPr>
           <p:cNvPr id="180" name="Google Shape;75;p16"/>
-          <p:cNvSpPr txBox="1"/>
+          <p:cNvSpPr txBox="1">
+            <a:spLocks noGrp="1"/>
+          </p:cNvSpPr>
           <p:nvPr>
             <p:ph type="title"/>
           </p:nvPr>
@@ -7448,7 +7653,6 @@
             </a:lvl1pPr>
           </a:lstStyle>
           <a:p>
-            <a:pPr/>
             <a:r>
               <a:t>ETL, EDA et choix de données modèle</a:t>
             </a:r>
@@ -7464,9 +7668,7 @@
           <p:nvPr/>
         </p:nvPicPr>
         <p:blipFill>
-          <a:blip r:embed="rId3">
-            <a:extLst/>
-          </a:blip>
+          <a:blip r:embed="rId3"/>
           <a:stretch>
             <a:fillRect/>
           </a:stretch>
@@ -7517,282 +7719,287 @@
                 <a:sym typeface="Arial"/>
               </a:defRPr>
             </a:pPr>
+            <a:endParaRPr/>
           </a:p>
         </p:txBody>
       </p:sp>
-      <p:grpSp>
-        <p:nvGrpSpPr>
-          <p:cNvPr id="185" name="Groupe 13"/>
-          <p:cNvGrpSpPr/>
-          <p:nvPr/>
-        </p:nvGrpSpPr>
-        <p:grpSpPr>
-          <a:xfrm>
-            <a:off x="817142" y="2657186"/>
-            <a:ext cx="5680340" cy="1343042"/>
-            <a:chOff x="-1" y="0"/>
-            <a:chExt cx="5680338" cy="1343040"/>
-          </a:xfrm>
-        </p:grpSpPr>
-        <p:sp>
-          <p:nvSpPr>
-            <p:cNvPr id="183" name="Groupe 12"/>
-            <p:cNvSpPr/>
-            <p:nvPr/>
-          </p:nvSpPr>
-          <p:spPr>
-            <a:xfrm>
-              <a:off x="-2" y="-1"/>
-              <a:ext cx="5680339" cy="1343042"/>
-            </a:xfrm>
-            <a:prstGeom prst="rect">
-              <a:avLst/>
-            </a:prstGeom>
-            <a:solidFill>
-              <a:schemeClr val="accent2">
-                <a:lumOff val="80020"/>
-              </a:schemeClr>
-            </a:solidFill>
-            <a:ln w="12700" cap="flat">
-              <a:noFill/>
-              <a:miter lim="400000"/>
-            </a:ln>
-            <a:effectLst/>
-          </p:spPr>
-          <p:txBody>
-            <a:bodyPr wrap="square" lIns="45718" tIns="45718" rIns="45718" bIns="45718" numCol="1" anchor="t">
-              <a:noAutofit/>
-            </a:bodyPr>
-            <a:lstStyle/>
-            <a:p>
-              <a:pPr>
-                <a:defRPr sz="1000">
-                  <a:latin typeface="+mn-lt"/>
-                  <a:ea typeface="+mn-ea"/>
-                  <a:cs typeface="+mn-cs"/>
-                  <a:sym typeface="Arial"/>
-                </a:defRPr>
-              </a:pPr>
-            </a:p>
-          </p:txBody>
-        </p:sp>
-        <p:sp>
-          <p:nvSpPr>
-            <p:cNvPr id="184" name="Conserver l'information joueur détaillée, puis tester si les abstractions apportent vraiment de la performance."/>
-            <p:cNvSpPr txBox="1"/>
-            <p:nvPr/>
-          </p:nvSpPr>
-          <p:spPr>
-            <a:xfrm>
-              <a:off x="56181" y="332429"/>
-              <a:ext cx="5392028" cy="678179"/>
-            </a:xfrm>
-            <a:prstGeom prst="rect">
-              <a:avLst/>
-            </a:prstGeom>
+      <p:sp>
+        <p:nvSpPr>
+          <p:cNvPr id="184" name="Conserver l'information joueur détaillée, puis tester si les abstractions apportent vraiment de la performance."/>
+          <p:cNvSpPr txBox="1"/>
+          <p:nvPr/>
+        </p:nvSpPr>
+        <p:spPr>
+          <a:xfrm>
+            <a:off x="634522" y="1166901"/>
+            <a:ext cx="8096727" cy="1054132"/>
+          </a:xfrm>
+          <a:prstGeom prst="rect">
+            <a:avLst/>
+          </a:prstGeom>
+          <a:noFill/>
+          <a:ln w="12700" cap="flat">
             <a:noFill/>
-            <a:ln w="12700" cap="flat">
-              <a:noFill/>
-              <a:miter lim="400000"/>
-            </a:ln>
-            <a:effectLst/>
+            <a:miter lim="400000"/>
+          </a:ln>
+          <a:effectLst/>
+          <a:extLst>
+            <a:ext uri="{C572A759-6A51-4108-AA02-DFA0A04FC94B}">
+              <ma14:wrappingTextBoxFlag xmlns:ma14="http://schemas.microsoft.com/office/mac/drawingml/2011/main" xmlns:a14="http://schemas.microsoft.com/office/drawing/2010/main" xmlns:m="http://schemas.openxmlformats.org/officeDocument/2006/math" xmlns="" val="1"/>
+            </a:ext>
+          </a:extLst>
+        </p:spPr>
+        <p:txBody>
+          <a:bodyPr wrap="square" lIns="34289" tIns="34289" rIns="34289" bIns="34289" numCol="1" anchor="t">
+            <a:spAutoFit/>
+          </a:bodyPr>
+          <a:lstStyle/>
+          <a:p>
+            <a:pPr>
+              <a:defRPr sz="1000" b="1">
+                <a:latin typeface="Inter"/>
+                <a:ea typeface="Inter"/>
+                <a:cs typeface="Inter"/>
+                <a:sym typeface="Inter"/>
+              </a:defRPr>
+            </a:pPr>
+            <a:r>
+              <a:rPr sz="1600" dirty="0" err="1"/>
+              <a:t>Décision</a:t>
+            </a:r>
+            <a:r>
+              <a:rPr sz="1600" dirty="0"/>
+              <a:t> </a:t>
+            </a:r>
+            <a:r>
+              <a:rPr sz="1600" dirty="0" err="1"/>
+              <a:t>structurante</a:t>
+            </a:r>
+            <a:endParaRPr sz="1600" dirty="0"/>
+          </a:p>
+          <a:p>
+            <a:pPr>
+              <a:defRPr sz="1000">
+                <a:latin typeface="Inter"/>
+                <a:ea typeface="Inter"/>
+                <a:cs typeface="Inter"/>
+                <a:sym typeface="Inter"/>
+              </a:defRPr>
+            </a:pPr>
+            <a:endParaRPr sz="1600" dirty="0"/>
+          </a:p>
+          <a:p>
+            <a:pPr>
+              <a:defRPr sz="1000">
+                <a:latin typeface="Inter"/>
+                <a:ea typeface="Inter"/>
+                <a:cs typeface="Inter"/>
+                <a:sym typeface="Inter"/>
+              </a:defRPr>
+            </a:pPr>
+            <a:r>
+              <a:rPr sz="1600" dirty="0"/>
+              <a:t>Conserver </a:t>
+            </a:r>
+            <a:r>
+              <a:rPr sz="1600" dirty="0" err="1"/>
+              <a:t>l'information</a:t>
+            </a:r>
+            <a:r>
+              <a:rPr sz="1600" dirty="0"/>
+              <a:t> </a:t>
+            </a:r>
+            <a:r>
+              <a:rPr sz="1600" dirty="0" err="1"/>
+              <a:t>joueur</a:t>
+            </a:r>
+            <a:r>
+              <a:rPr sz="1600" dirty="0"/>
+              <a:t> </a:t>
+            </a:r>
+            <a:r>
+              <a:rPr sz="1600" dirty="0" err="1"/>
+              <a:t>détaillée</a:t>
+            </a:r>
+            <a:r>
+              <a:rPr sz="1600" dirty="0"/>
+              <a:t>, </a:t>
+            </a:r>
+            <a:r>
+              <a:rPr sz="1600" dirty="0" err="1"/>
+              <a:t>puis</a:t>
+            </a:r>
+            <a:r>
+              <a:rPr sz="1600" dirty="0"/>
+              <a:t> tester </a:t>
+            </a:r>
+            <a:r>
+              <a:rPr sz="1600" dirty="0" err="1"/>
+              <a:t>si</a:t>
+            </a:r>
+            <a:r>
+              <a:rPr sz="1600" dirty="0"/>
+              <a:t> les abstractions </a:t>
+            </a:r>
+            <a:r>
+              <a:rPr sz="1600" dirty="0" err="1"/>
+              <a:t>apportent</a:t>
+            </a:r>
+            <a:r>
+              <a:rPr sz="1600" dirty="0"/>
+              <a:t> </a:t>
+            </a:r>
+            <a:r>
+              <a:rPr sz="1600" dirty="0" err="1"/>
+              <a:t>vraiment</a:t>
+            </a:r>
+            <a:r>
+              <a:rPr sz="1600" dirty="0"/>
+              <a:t> de la performance.</a:t>
+            </a:r>
+          </a:p>
+        </p:txBody>
+      </p:sp>
+      <p:sp>
+        <p:nvSpPr>
+          <p:cNvPr id="3" name="Objectif: transformer des données football hétérogènes en datasets fiables pour entraîner et comparer les modèles.">
             <a:extLst>
-              <a:ext uri="{C572A759-6A51-4108-AA02-DFA0A04FC94B}">
-                <ma14:wrappingTextBoxFlag xmlns:ma14="http://schemas.microsoft.com/office/mac/drawingml/2011/main" val="1"/>
+              <a:ext uri="{FF2B5EF4-FFF2-40B4-BE49-F238E27FC236}">
+                <a16:creationId xmlns:a16="http://schemas.microsoft.com/office/drawing/2014/main" id="{AEA5899D-231B-0DA6-F635-B6FC10F082FA}"/>
               </a:ext>
             </a:extLst>
-          </p:spPr>
-          <p:txBody>
-            <a:bodyPr wrap="square" lIns="34289" tIns="34289" rIns="34289" bIns="34289" numCol="1" anchor="t">
-              <a:spAutoFit/>
-            </a:bodyPr>
-            <a:lstStyle/>
-            <a:p>
-              <a:pPr>
-                <a:defRPr b="1" sz="1000">
-                  <a:latin typeface="Inter"/>
-                  <a:ea typeface="Inter"/>
-                  <a:cs typeface="Inter"/>
-                  <a:sym typeface="Inter"/>
-                </a:defRPr>
-              </a:pPr>
-              <a:r>
-                <a:t>Décision structurante</a:t>
-              </a:r>
-            </a:p>
-            <a:p>
-              <a:pPr>
-                <a:defRPr sz="1000">
-                  <a:latin typeface="Inter"/>
-                  <a:ea typeface="Inter"/>
-                  <a:cs typeface="Inter"/>
-                  <a:sym typeface="Inter"/>
-                </a:defRPr>
-              </a:pPr>
-            </a:p>
-            <a:p>
-              <a:pPr>
-                <a:defRPr sz="1000">
-                  <a:latin typeface="Inter"/>
-                  <a:ea typeface="Inter"/>
-                  <a:cs typeface="Inter"/>
-                  <a:sym typeface="Inter"/>
-                </a:defRPr>
-              </a:pPr>
-              <a:r>
-                <a:t>Conserver l'information joueur détaillée, puis tester si les abstractions apportent vraiment de la performance.</a:t>
-              </a:r>
-            </a:p>
-          </p:txBody>
-        </p:sp>
-      </p:grpSp>
-      <p:grpSp>
-        <p:nvGrpSpPr>
-          <p:cNvPr id="188" name="Rectangle"/>
-          <p:cNvGrpSpPr/>
-          <p:nvPr/>
-        </p:nvGrpSpPr>
-        <p:grpSpPr>
-          <a:xfrm>
-            <a:off x="817143" y="1284863"/>
-            <a:ext cx="5778399" cy="911266"/>
-            <a:chOff x="-1" y="-1"/>
-            <a:chExt cx="5778398" cy="911265"/>
-          </a:xfrm>
-        </p:grpSpPr>
-        <p:sp>
-          <p:nvSpPr>
-            <p:cNvPr id="186" name="Rectangle"/>
-            <p:cNvSpPr/>
-            <p:nvPr/>
-          </p:nvSpPr>
-          <p:spPr>
-            <a:xfrm>
-              <a:off x="-2" y="-2"/>
-              <a:ext cx="5778400" cy="911267"/>
-            </a:xfrm>
-            <a:prstGeom prst="rect">
-              <a:avLst/>
-            </a:prstGeom>
-            <a:solidFill>
-              <a:schemeClr val="accent2">
-                <a:lumOff val="80020"/>
-              </a:schemeClr>
-            </a:solidFill>
-            <a:ln w="12700" cap="flat">
-              <a:noFill/>
-              <a:miter lim="400000"/>
-            </a:ln>
-            <a:effectLst/>
-          </p:spPr>
-          <p:txBody>
-            <a:bodyPr wrap="square" lIns="45718" tIns="45718" rIns="45718" bIns="45718" numCol="1" anchor="t">
-              <a:noAutofit/>
-            </a:bodyPr>
-            <a:lstStyle/>
-            <a:p>
-              <a:pPr>
-                <a:defRPr sz="1000">
-                  <a:latin typeface="+mn-lt"/>
-                  <a:ea typeface="+mn-ea"/>
-                  <a:cs typeface="+mn-cs"/>
-                  <a:sym typeface="Arial"/>
-                </a:defRPr>
-              </a:pPr>
-            </a:p>
-          </p:txBody>
-        </p:sp>
-        <p:sp>
-          <p:nvSpPr>
-            <p:cNvPr id="187" name="Objectif: transformer des données football hétérogènes en datasets fiables pour entraîner et comparer les modèles."/>
-            <p:cNvSpPr txBox="1"/>
-            <p:nvPr/>
-          </p:nvSpPr>
-          <p:spPr>
-            <a:xfrm>
-              <a:off x="110618" y="74628"/>
-              <a:ext cx="5557163" cy="762001"/>
-            </a:xfrm>
-            <a:prstGeom prst="rect">
-              <a:avLst/>
-            </a:prstGeom>
+          </p:cNvPr>
+          <p:cNvSpPr txBox="1"/>
+          <p:nvPr/>
+        </p:nvSpPr>
+        <p:spPr>
+          <a:xfrm>
+            <a:off x="716128" y="2641351"/>
+            <a:ext cx="7933514" cy="1138773"/>
+          </a:xfrm>
+          <a:prstGeom prst="rect">
+            <a:avLst/>
+          </a:prstGeom>
+          <a:noFill/>
+          <a:ln w="12700" cap="flat">
             <a:noFill/>
-            <a:ln w="12700" cap="flat">
-              <a:noFill/>
-              <a:miter lim="400000"/>
-            </a:ln>
-            <a:effectLst/>
-            <a:extLst>
-              <a:ext uri="{C572A759-6A51-4108-AA02-DFA0A04FC94B}">
-                <ma14:wrappingTextBoxFlag xmlns:ma14="http://schemas.microsoft.com/office/mac/drawingml/2011/main" val="1"/>
-              </a:ext>
-            </a:extLst>
-          </p:spPr>
-          <p:txBody>
-            <a:bodyPr wrap="square" lIns="0" tIns="0" rIns="0" bIns="0" numCol="1" anchor="t">
-              <a:spAutoFit/>
-            </a:bodyPr>
-            <a:lstStyle/>
-            <a:p>
-              <a:pPr lvl="3">
-                <a:defRPr b="1" sz="1000">
-                  <a:latin typeface="Inter"/>
-                  <a:ea typeface="Inter"/>
-                  <a:cs typeface="Inter"/>
-                  <a:sym typeface="Inter"/>
-                </a:defRPr>
-              </a:pPr>
-            </a:p>
-            <a:p>
-              <a:pPr lvl="3">
-                <a:defRPr b="1" sz="1000">
-                  <a:latin typeface="Inter"/>
-                  <a:ea typeface="Inter"/>
-                  <a:cs typeface="Inter"/>
-                  <a:sym typeface="Inter"/>
-                </a:defRPr>
-              </a:pPr>
-              <a:r>
-                <a:t>Objectif</a:t>
-              </a:r>
-            </a:p>
-            <a:p>
-              <a:pPr lvl="3">
-                <a:defRPr sz="1000">
-                  <a:latin typeface="Inter"/>
-                  <a:ea typeface="Inter"/>
-                  <a:cs typeface="Inter"/>
-                  <a:sym typeface="Inter"/>
-                </a:defRPr>
-              </a:pPr>
-            </a:p>
-            <a:p>
-              <a:pPr>
-                <a:defRPr sz="1000">
-                  <a:latin typeface="Inter"/>
-                  <a:ea typeface="Inter"/>
-                  <a:cs typeface="Inter"/>
-                  <a:sym typeface="Inter"/>
-                </a:defRPr>
-              </a:pPr>
-              <a:r>
-                <a:t>Transformer des données football hétérogènes en datasets fiables pour entraîner et comparer les modèles.</a:t>
-              </a:r>
-            </a:p>
-          </p:txBody>
-        </p:sp>
-      </p:grpSp>
+            <a:miter lim="400000"/>
+          </a:ln>
+          <a:effectLst/>
+          <a:extLst>
+            <a:ext uri="{C572A759-6A51-4108-AA02-DFA0A04FC94B}">
+              <ma14:wrappingTextBoxFlag xmlns="" xmlns:m="http://schemas.openxmlformats.org/officeDocument/2006/math" xmlns:a14="http://schemas.microsoft.com/office/drawing/2010/main" xmlns:ma14="http://schemas.microsoft.com/office/mac/drawingml/2011/main" val="1"/>
+            </a:ext>
+          </a:extLst>
+        </p:spPr>
+        <p:txBody>
+          <a:bodyPr wrap="square" lIns="0" tIns="0" rIns="0" bIns="0" numCol="1" anchor="t">
+            <a:spAutoFit/>
+          </a:bodyPr>
+          <a:lstStyle/>
+          <a:p>
+            <a:pPr lvl="3">
+              <a:defRPr sz="1000" b="1">
+                <a:latin typeface="Inter"/>
+                <a:ea typeface="Inter"/>
+                <a:cs typeface="Inter"/>
+                <a:sym typeface="Inter"/>
+              </a:defRPr>
+            </a:pPr>
+            <a:endParaRPr dirty="0"/>
+          </a:p>
+          <a:p>
+            <a:pPr lvl="3">
+              <a:defRPr sz="1000" b="1">
+                <a:latin typeface="Inter"/>
+                <a:ea typeface="Inter"/>
+                <a:cs typeface="Inter"/>
+                <a:sym typeface="Inter"/>
+              </a:defRPr>
+            </a:pPr>
+            <a:r>
+              <a:rPr sz="1600" dirty="0"/>
+              <a:t>Objectif</a:t>
+            </a:r>
+          </a:p>
+          <a:p>
+            <a:pPr lvl="3">
+              <a:defRPr sz="1000">
+                <a:latin typeface="Inter"/>
+                <a:ea typeface="Inter"/>
+                <a:cs typeface="Inter"/>
+                <a:sym typeface="Inter"/>
+              </a:defRPr>
+            </a:pPr>
+            <a:endParaRPr sz="1600" dirty="0"/>
+          </a:p>
+          <a:p>
+            <a:pPr>
+              <a:defRPr sz="1000">
+                <a:latin typeface="Inter"/>
+                <a:ea typeface="Inter"/>
+                <a:cs typeface="Inter"/>
+                <a:sym typeface="Inter"/>
+              </a:defRPr>
+            </a:pPr>
+            <a:r>
+              <a:rPr sz="1600" dirty="0"/>
+              <a:t>Transformer des données football </a:t>
+            </a:r>
+            <a:r>
+              <a:rPr sz="1600" dirty="0" err="1"/>
+              <a:t>hétérogènes</a:t>
+            </a:r>
+            <a:r>
+              <a:rPr sz="1600" dirty="0"/>
+              <a:t> </a:t>
+            </a:r>
+            <a:r>
+              <a:rPr sz="1600" dirty="0" err="1"/>
+              <a:t>en</a:t>
+            </a:r>
+            <a:r>
+              <a:rPr sz="1600" dirty="0"/>
+              <a:t> datasets </a:t>
+            </a:r>
+            <a:r>
+              <a:rPr sz="1600" dirty="0" err="1"/>
+              <a:t>fiables</a:t>
+            </a:r>
+            <a:r>
+              <a:rPr sz="1600" dirty="0"/>
+              <a:t> pour </a:t>
+            </a:r>
+            <a:r>
+              <a:rPr sz="1600" dirty="0" err="1"/>
+              <a:t>entraîner</a:t>
+            </a:r>
+            <a:r>
+              <a:rPr sz="1600" dirty="0"/>
+              <a:t> et comparer les </a:t>
+            </a:r>
+            <a:r>
+              <a:rPr sz="1600" dirty="0" err="1"/>
+              <a:t>modèles</a:t>
+            </a:r>
+            <a:r>
+              <a:rPr sz="1600" dirty="0"/>
+              <a:t>.</a:t>
+            </a:r>
+          </a:p>
+        </p:txBody>
+      </p:sp>
     </p:spTree>
   </p:cSld>
   <p:clrMapOvr>
     <a:masterClrMapping/>
   </p:clrMapOvr>
-  <p:transition xmlns:p14="http://schemas.microsoft.com/office/powerpoint/2010/main" spd="med" advClick="1"/>
+  <p:transition spd="med"/>
 </p:sld>
 </file>
 
 <file path=ppt/slides/slide6.xml><?xml version="1.0" encoding="utf-8"?>
-<p:sld xmlns:a="http://schemas.openxmlformats.org/drawingml/2006/main" xmlns:r="http://schemas.openxmlformats.org/officeDocument/2006/relationships" xmlns:p="http://schemas.openxmlformats.org/presentationml/2006/main" xmlns:m="http://schemas.openxmlformats.org/officeDocument/2006/math" xmlns:a14="http://schemas.microsoft.com/office/drawing/2010/main" showMasterSp="1" showMasterPhAnim="1">
+<p:sld xmlns:a="http://schemas.openxmlformats.org/drawingml/2006/main" xmlns:r="http://schemas.openxmlformats.org/officeDocument/2006/relationships" xmlns:p="http://schemas.openxmlformats.org/presentationml/2006/main">
   <p:cSld>
     <p:spTree>
       <p:nvGrpSpPr>
@@ -7817,10 +8024,8 @@
           <p:nvPr/>
         </p:nvPicPr>
         <p:blipFill>
-          <a:blip r:embed="rId2">
-            <a:extLst/>
-          </a:blip>
-          <a:srcRect l="0" t="2750" r="5496" b="12874"/>
+          <a:blip r:embed="rId2"/>
+          <a:srcRect t="2750" r="5496" b="12874"/>
           <a:stretch>
             <a:fillRect/>
           </a:stretch>
@@ -7841,7 +8046,9 @@
       <p:sp>
         <p:nvSpPr>
           <p:cNvPr id="191" name="Google Shape;75;p16"/>
-          <p:cNvSpPr txBox="1"/>
+          <p:cNvSpPr txBox="1">
+            <a:spLocks noGrp="1"/>
+          </p:cNvSpPr>
           <p:nvPr>
             <p:ph type="title"/>
           </p:nvPr>
@@ -7893,9 +8100,7 @@
           <p:nvPr/>
         </p:nvPicPr>
         <p:blipFill>
-          <a:blip r:embed="rId3">
-            <a:extLst/>
-          </a:blip>
+          <a:blip r:embed="rId3"/>
           <a:stretch>
             <a:fillRect/>
           </a:stretch>
@@ -7946,6 +8151,7 @@
                 <a:sym typeface="Arial"/>
               </a:defRPr>
             </a:pPr>
+            <a:endParaRPr/>
           </a:p>
         </p:txBody>
       </p:sp>
@@ -7985,7 +8191,7 @@
             <a:effectLst/>
             <a:extLst>
               <a:ext uri="{C572A759-6A51-4108-AA02-DFA0A04FC94B}">
-                <ma14:wrappingTextBoxFlag xmlns:ma14="http://schemas.microsoft.com/office/mac/drawingml/2011/main" val="1"/>
+                <ma14:wrappingTextBoxFlag xmlns:ma14="http://schemas.microsoft.com/office/mac/drawingml/2011/main" xmlns:a14="http://schemas.microsoft.com/office/drawing/2010/main" xmlns:m="http://schemas.openxmlformats.org/officeDocument/2006/math" xmlns="" val="1"/>
               </a:ext>
             </a:extLst>
           </p:spPr>
@@ -7995,7 +8201,7 @@
             </a:bodyPr>
             <a:lstStyle>
               <a:lvl1pPr>
-                <a:defRPr b="1" sz="1100">
+                <a:defRPr sz="1100" b="1">
                   <a:solidFill>
                     <a:srgbClr val="555555"/>
                   </a:solidFill>
@@ -8007,7 +8213,6 @@
               </a:lvl1pPr>
             </a:lstStyle>
             <a:p>
-              <a:pPr/>
               <a:r>
                 <a:t>Sources</a:t>
               </a:r>
@@ -8067,6 +8272,7 @@
                     <a:sym typeface="Arial"/>
                   </a:defRPr>
                 </a:pPr>
+                <a:endParaRPr/>
               </a:p>
             </p:txBody>
           </p:sp>
@@ -8092,7 +8298,7 @@
               <a:effectLst/>
               <a:extLst>
                 <a:ext uri="{C572A759-6A51-4108-AA02-DFA0A04FC94B}">
-                  <ma14:wrappingTextBoxFlag xmlns:ma14="http://schemas.microsoft.com/office/mac/drawingml/2011/main" val="1"/>
+                  <ma14:wrappingTextBoxFlag xmlns:ma14="http://schemas.microsoft.com/office/mac/drawingml/2011/main" xmlns:a14="http://schemas.microsoft.com/office/drawing/2010/main" xmlns:m="http://schemas.openxmlformats.org/officeDocument/2006/math" xmlns="" val="1"/>
                 </a:ext>
               </a:extLst>
             </p:spPr>
@@ -8102,7 +8308,7 @@
               </a:bodyPr>
               <a:lstStyle>
                 <a:lvl1pPr>
-                  <a:defRPr b="1" sz="1100">
+                  <a:defRPr sz="1100" b="1">
                     <a:solidFill>
                       <a:srgbClr val="FF4B4B"/>
                     </a:solidFill>
@@ -8114,7 +8320,6 @@
                 </a:lvl1pPr>
               </a:lstStyle>
               <a:p>
-                <a:pPr/>
                 <a:r>
                   <a:t>SoFIFA</a:t>
                 </a:r>
@@ -8143,7 +8348,7 @@
               <a:effectLst/>
               <a:extLst>
                 <a:ext uri="{C572A759-6A51-4108-AA02-DFA0A04FC94B}">
-                  <ma14:wrappingTextBoxFlag xmlns:ma14="http://schemas.microsoft.com/office/mac/drawingml/2011/main" val="1"/>
+                  <ma14:wrappingTextBoxFlag xmlns:ma14="http://schemas.microsoft.com/office/mac/drawingml/2011/main" xmlns:a14="http://schemas.microsoft.com/office/drawing/2010/main" xmlns:m="http://schemas.openxmlformats.org/officeDocument/2006/math" xmlns="" val="1"/>
                 </a:ext>
               </a:extLst>
             </p:spPr>
@@ -8162,7 +8367,6 @@
                 </a:lvl1pPr>
               </a:lstStyle>
               <a:p>
-                <a:pPr/>
                 <a:r>
                   <a:t>Scraping des notes détaillées joueurs: attaque, technique, mouvement, défense, gardien.</a:t>
                 </a:r>
@@ -8238,6 +8442,7 @@
                     <a:sym typeface="Arial"/>
                   </a:defRPr>
                 </a:pPr>
+                <a:endParaRPr/>
               </a:p>
             </p:txBody>
           </p:sp>
@@ -8263,7 +8468,7 @@
               <a:effectLst/>
               <a:extLst>
                 <a:ext uri="{C572A759-6A51-4108-AA02-DFA0A04FC94B}">
-                  <ma14:wrappingTextBoxFlag xmlns:ma14="http://schemas.microsoft.com/office/mac/drawingml/2011/main" val="1"/>
+                  <ma14:wrappingTextBoxFlag xmlns:ma14="http://schemas.microsoft.com/office/mac/drawingml/2011/main" xmlns:a14="http://schemas.microsoft.com/office/drawing/2010/main" xmlns:m="http://schemas.openxmlformats.org/officeDocument/2006/math" xmlns="" val="1"/>
                 </a:ext>
               </a:extLst>
             </p:spPr>
@@ -8273,7 +8478,7 @@
               </a:bodyPr>
               <a:lstStyle>
                 <a:lvl1pPr>
-                  <a:defRPr b="1" sz="1100">
+                  <a:defRPr sz="1100" b="1">
                     <a:solidFill>
                       <a:srgbClr val="FF4B4B"/>
                     </a:solidFill>
@@ -8285,7 +8490,6 @@
                 </a:lvl1pPr>
               </a:lstStyle>
               <a:p>
-                <a:pPr/>
                 <a:r>
                   <a:t>Transfermarkt</a:t>
                 </a:r>
@@ -8315,7 +8519,7 @@
             <a:effectLst/>
             <a:extLst>
               <a:ext uri="{C572A759-6A51-4108-AA02-DFA0A04FC94B}">
-                <ma14:wrappingTextBoxFlag xmlns:ma14="http://schemas.microsoft.com/office/mac/drawingml/2011/main" val="1"/>
+                <ma14:wrappingTextBoxFlag xmlns:ma14="http://schemas.microsoft.com/office/mac/drawingml/2011/main" xmlns:a14="http://schemas.microsoft.com/office/drawing/2010/main" xmlns:m="http://schemas.openxmlformats.org/officeDocument/2006/math" xmlns="" val="1"/>
               </a:ext>
             </a:extLst>
           </p:spPr>
@@ -8334,7 +8538,6 @@
               </a:lvl1pPr>
             </a:lstStyle>
             <a:p>
-              <a:pPr/>
               <a:r>
                 <a:t>CSV GitHub: matchs, lineups, joueurs, clubs et transferts. Mise à jour régulière.</a:t>
               </a:r>
@@ -8395,6 +8598,7 @@
                   <a:sym typeface="Arial"/>
                 </a:defRPr>
               </a:pPr>
+              <a:endParaRPr/>
             </a:p>
           </p:txBody>
         </p:sp>
@@ -8420,7 +8624,7 @@
             <a:effectLst/>
             <a:extLst>
               <a:ext uri="{C572A759-6A51-4108-AA02-DFA0A04FC94B}">
-                <ma14:wrappingTextBoxFlag xmlns:ma14="http://schemas.microsoft.com/office/mac/drawingml/2011/main" val="1"/>
+                <ma14:wrappingTextBoxFlag xmlns:ma14="http://schemas.microsoft.com/office/mac/drawingml/2011/main" xmlns:a14="http://schemas.microsoft.com/office/drawing/2010/main" xmlns:m="http://schemas.openxmlformats.org/officeDocument/2006/math" xmlns="" val="1"/>
               </a:ext>
             </a:extLst>
           </p:spPr>
@@ -8430,7 +8634,7 @@
             </a:bodyPr>
             <a:lstStyle>
               <a:lvl1pPr>
-                <a:defRPr b="1" sz="1100">
+                <a:defRPr sz="1100" b="1">
                   <a:solidFill>
                     <a:srgbClr val="2563EB"/>
                   </a:solidFill>
@@ -8442,7 +8646,6 @@
               </a:lvl1pPr>
             </a:lstStyle>
             <a:p>
-              <a:pPr/>
               <a:r>
                 <a:t>/raw</a:t>
               </a:r>
@@ -8503,6 +8706,7 @@
                   <a:sym typeface="Arial"/>
                 </a:defRPr>
               </a:pPr>
+              <a:endParaRPr/>
             </a:p>
           </p:txBody>
         </p:sp>
@@ -8528,7 +8732,7 @@
             <a:effectLst/>
             <a:extLst>
               <a:ext uri="{C572A759-6A51-4108-AA02-DFA0A04FC94B}">
-                <ma14:wrappingTextBoxFlag xmlns:ma14="http://schemas.microsoft.com/office/mac/drawingml/2011/main" val="1"/>
+                <ma14:wrappingTextBoxFlag xmlns:ma14="http://schemas.microsoft.com/office/mac/drawingml/2011/main" xmlns:a14="http://schemas.microsoft.com/office/drawing/2010/main" xmlns:m="http://schemas.openxmlformats.org/officeDocument/2006/math" xmlns="" val="1"/>
               </a:ext>
             </a:extLst>
           </p:spPr>
@@ -8538,7 +8742,7 @@
             </a:bodyPr>
             <a:lstStyle>
               <a:lvl1pPr>
-                <a:defRPr b="1" sz="1100">
+                <a:defRPr sz="1100" b="1">
                   <a:solidFill>
                     <a:srgbClr val="2563EB"/>
                   </a:solidFill>
@@ -8550,7 +8754,6 @@
               </a:lvl1pPr>
             </a:lstStyle>
             <a:p>
-              <a:pPr/>
               <a:r>
                 <a:t>/staging</a:t>
               </a:r>
@@ -8579,7 +8782,7 @@
             <a:effectLst/>
             <a:extLst>
               <a:ext uri="{C572A759-6A51-4108-AA02-DFA0A04FC94B}">
-                <ma14:wrappingTextBoxFlag xmlns:ma14="http://schemas.microsoft.com/office/mac/drawingml/2011/main" val="1"/>
+                <ma14:wrappingTextBoxFlag xmlns:ma14="http://schemas.microsoft.com/office/mac/drawingml/2011/main" xmlns:a14="http://schemas.microsoft.com/office/drawing/2010/main" xmlns:m="http://schemas.openxmlformats.org/officeDocument/2006/math" xmlns="" val="1"/>
               </a:ext>
             </a:extLst>
           </p:spPr>
@@ -8693,7 +8896,7 @@
               </a:cxnLst>
               <a:rect l="0" t="0" r="r" b="b"/>
               <a:pathLst>
-                <a:path w="21600" h="0" fill="norm" stroke="1" extrusionOk="0">
+                <a:path w="21600" extrusionOk="0">
                   <a:moveTo>
                     <a:pt x="0" y="0"/>
                   </a:moveTo>
@@ -8718,7 +8921,7 @@
             <a:effectLst/>
             <a:extLst>
               <a:ext uri="{C572A759-6A51-4108-AA02-DFA0A04FC94B}">
-                <ma14:wrappingTextBoxFlag xmlns:ma14="http://schemas.microsoft.com/office/mac/drawingml/2011/main" val="1"/>
+                <ma14:wrappingTextBoxFlag xmlns:ma14="http://schemas.microsoft.com/office/mac/drawingml/2011/main" xmlns:a14="http://schemas.microsoft.com/office/drawing/2010/main" xmlns:m="http://schemas.openxmlformats.org/officeDocument/2006/math" xmlns="" val="1"/>
               </a:ext>
             </a:extLst>
           </p:spPr>
@@ -8728,7 +8931,7 @@
             </a:bodyPr>
             <a:lstStyle>
               <a:lvl1pPr>
-                <a:defRPr b="1" sz="1100">
+                <a:defRPr sz="1100" b="1">
                   <a:solidFill>
                     <a:srgbClr val="555555"/>
                   </a:solidFill>
@@ -8740,7 +8943,6 @@
               </a:lvl1pPr>
             </a:lstStyle>
             <a:p>
-              <a:pPr/>
               <a:r>
                 <a:t>Analyse et modèles</a:t>
               </a:r>
@@ -8814,6 +9016,7 @@
                       <a:sym typeface="Arial"/>
                     </a:defRPr>
                   </a:pPr>
+                  <a:endParaRPr/>
                 </a:p>
               </p:txBody>
             </p:sp>
@@ -8848,7 +9051,7 @@
                   </a:cxnLst>
                   <a:rect l="0" t="0" r="r" b="b"/>
                   <a:pathLst>
-                    <a:path w="21600" h="0" fill="norm" stroke="1" extrusionOk="0">
+                    <a:path w="21600" extrusionOk="0">
                       <a:moveTo>
                         <a:pt x="0" y="0"/>
                       </a:moveTo>
@@ -8873,7 +9076,7 @@
                 <a:effectLst/>
                 <a:extLst>
                   <a:ext uri="{C572A759-6A51-4108-AA02-DFA0A04FC94B}">
-                    <ma14:wrappingTextBoxFlag xmlns:ma14="http://schemas.microsoft.com/office/mac/drawingml/2011/main" val="1"/>
+                    <ma14:wrappingTextBoxFlag xmlns:ma14="http://schemas.microsoft.com/office/mac/drawingml/2011/main" xmlns:a14="http://schemas.microsoft.com/office/drawing/2010/main" xmlns:m="http://schemas.openxmlformats.org/officeDocument/2006/math" xmlns="" val="1"/>
                   </a:ext>
                 </a:extLst>
               </p:spPr>
@@ -8883,7 +9086,7 @@
                 </a:bodyPr>
                 <a:lstStyle>
                   <a:lvl1pPr>
-                    <a:defRPr b="1" sz="1100">
+                    <a:defRPr sz="1100" b="1">
                       <a:solidFill>
                         <a:srgbClr val="15803D"/>
                       </a:solidFill>
@@ -8895,7 +9098,6 @@
                   </a:lvl1pPr>
                 </a:lstStyle>
                 <a:p>
-                  <a:pPr/>
                   <a:r>
                     <a:t>/curated</a:t>
                   </a:r>
@@ -8934,7 +9136,7 @@
                 </a:cxnLst>
                 <a:rect l="0" t="0" r="r" b="b"/>
                 <a:pathLst>
-                  <a:path w="21600" h="0" fill="norm" stroke="1" extrusionOk="0">
+                  <a:path w="21600" extrusionOk="0">
                     <a:moveTo>
                       <a:pt x="0" y="0"/>
                     </a:moveTo>
@@ -8959,7 +9161,7 @@
               <a:effectLst/>
               <a:extLst>
                 <a:ext uri="{C572A759-6A51-4108-AA02-DFA0A04FC94B}">
-                  <ma14:wrappingTextBoxFlag xmlns:ma14="http://schemas.microsoft.com/office/mac/drawingml/2011/main" val="1"/>
+                  <ma14:wrappingTextBoxFlag xmlns:ma14="http://schemas.microsoft.com/office/mac/drawingml/2011/main" xmlns:a14="http://schemas.microsoft.com/office/drawing/2010/main" xmlns:m="http://schemas.openxmlformats.org/officeDocument/2006/math" xmlns="" val="1"/>
                 </a:ext>
               </a:extLst>
             </p:spPr>
@@ -8978,7 +9180,6 @@
                 </a:lvl1pPr>
               </a:lstStyle>
               <a:p>
-                <a:pPr/>
                 <a:r>
                   <a:t>Datasets locaux de notebook pour entraînement ML, dont training_dataset_df.</a:t>
                 </a:r>
@@ -9010,9 +9211,7 @@
             <p:nvPr/>
           </p:nvPicPr>
           <p:blipFill>
-            <a:blip r:embed="rId4">
-              <a:extLst/>
-            </a:blip>
+            <a:blip r:embed="rId4"/>
             <a:stretch>
               <a:fillRect/>
             </a:stretch>
@@ -9041,9 +9240,7 @@
             <p:nvPr/>
           </p:nvPicPr>
           <p:blipFill>
-            <a:blip r:embed="rId5">
-              <a:extLst/>
-            </a:blip>
+            <a:blip r:embed="rId5"/>
             <a:stretch>
               <a:fillRect/>
             </a:stretch>
@@ -9073,9 +9270,7 @@
           <p:nvPr/>
         </p:nvPicPr>
         <p:blipFill>
-          <a:blip r:embed="rId6">
-            <a:extLst/>
-          </a:blip>
+          <a:blip r:embed="rId6"/>
           <a:stretch>
             <a:fillRect/>
           </a:stretch>
@@ -9118,7 +9313,7 @@
           <a:bodyPr lIns="45718" tIns="45718" rIns="45718" bIns="45718"/>
           <a:lstStyle/>
           <a:p>
-            <a:pPr/>
+            <a:endParaRPr/>
           </a:p>
         </p:txBody>
       </p:sp>
@@ -9147,7 +9342,7 @@
           <a:bodyPr lIns="45718" tIns="45718" rIns="45718" bIns="45718"/>
           <a:lstStyle/>
           <a:p>
-            <a:pPr/>
+            <a:endParaRPr/>
           </a:p>
         </p:txBody>
       </p:sp>
@@ -9176,7 +9371,7 @@
           <a:bodyPr lIns="45718" tIns="45718" rIns="45718" bIns="45718"/>
           <a:lstStyle/>
           <a:p>
-            <a:pPr/>
+            <a:endParaRPr/>
           </a:p>
         </p:txBody>
       </p:sp>
@@ -9205,7 +9400,7 @@
           <a:bodyPr lIns="45718" tIns="45718" rIns="45718" bIns="45718"/>
           <a:lstStyle/>
           <a:p>
-            <a:pPr/>
+            <a:endParaRPr/>
           </a:p>
         </p:txBody>
       </p:sp>
@@ -9214,12 +9409,12 @@
   <p:clrMapOvr>
     <a:masterClrMapping/>
   </p:clrMapOvr>
-  <p:transition xmlns:p14="http://schemas.microsoft.com/office/powerpoint/2010/main" spd="med" advClick="1"/>
+  <p:transition spd="med"/>
 </p:sld>
 </file>
 
 <file path=ppt/slides/slide7.xml><?xml version="1.0" encoding="utf-8"?>
-<p:sld xmlns:a="http://schemas.openxmlformats.org/drawingml/2006/main" xmlns:r="http://schemas.openxmlformats.org/officeDocument/2006/relationships" xmlns:p="http://schemas.openxmlformats.org/presentationml/2006/main" xmlns:m="http://schemas.openxmlformats.org/officeDocument/2006/math" xmlns:a14="http://schemas.microsoft.com/office/drawing/2010/main" showMasterSp="1" showMasterPhAnim="1">
+<p:sld xmlns:a="http://schemas.openxmlformats.org/drawingml/2006/main" xmlns:r="http://schemas.openxmlformats.org/officeDocument/2006/relationships" xmlns:p="http://schemas.openxmlformats.org/presentationml/2006/main">
   <p:cSld>
     <p:spTree>
       <p:nvGrpSpPr>
@@ -9244,10 +9439,8 @@
           <p:nvPr/>
         </p:nvPicPr>
         <p:blipFill>
-          <a:blip r:embed="rId2">
-            <a:extLst/>
-          </a:blip>
-          <a:srcRect l="0" t="7813" r="0" b="7812"/>
+          <a:blip r:embed="rId2"/>
+          <a:srcRect t="7813" b="7812"/>
           <a:stretch>
             <a:fillRect/>
           </a:stretch>
@@ -9268,7 +9461,9 @@
       <p:sp>
         <p:nvSpPr>
           <p:cNvPr id="229" name="Google Shape;75;p16"/>
-          <p:cNvSpPr txBox="1"/>
+          <p:cNvSpPr txBox="1">
+            <a:spLocks noGrp="1"/>
+          </p:cNvSpPr>
           <p:nvPr>
             <p:ph type="title"/>
           </p:nvPr>
@@ -9298,7 +9493,6 @@
             </a:lvl1pPr>
           </a:lstStyle>
           <a:p>
-            <a:pPr/>
             <a:r>
               <a:t>EDA : sécurise le dataset d'entraînement</a:t>
             </a:r>
@@ -9314,9 +9508,7 @@
           <p:nvPr/>
         </p:nvPicPr>
         <p:blipFill>
-          <a:blip r:embed="rId3">
-            <a:extLst/>
-          </a:blip>
+          <a:blip r:embed="rId3"/>
           <a:stretch>
             <a:fillRect/>
           </a:stretch>
@@ -9367,6 +9559,7 @@
                 <a:sym typeface="Arial"/>
               </a:defRPr>
             </a:pPr>
+            <a:endParaRPr/>
           </a:p>
         </p:txBody>
       </p:sp>
@@ -9389,7 +9582,7 @@
           </a:ln>
           <a:extLst>
             <a:ext uri="{C572A759-6A51-4108-AA02-DFA0A04FC94B}">
-              <ma14:wrappingTextBoxFlag xmlns:ma14="http://schemas.microsoft.com/office/mac/drawingml/2011/main" val="1"/>
+              <ma14:wrappingTextBoxFlag xmlns:ma14="http://schemas.microsoft.com/office/mac/drawingml/2011/main" xmlns:a14="http://schemas.microsoft.com/office/drawing/2010/main" xmlns:m="http://schemas.openxmlformats.org/officeDocument/2006/math" xmlns="" val="1"/>
             </a:ext>
           </a:extLst>
         </p:spPr>
@@ -9411,7 +9604,6 @@
             </a:lvl1pPr>
           </a:lstStyle>
           <a:p>
-            <a:pPr/>
             <a:r>
               <a:t>Périmètre: matchs UEFA des 5 dernières années, entre les 100 meilleurs clubs UEFA.</a:t>
             </a:r>
@@ -9485,6 +9677,7 @@
                     <a:sym typeface="Arial"/>
                   </a:defRPr>
                 </a:pPr>
+                <a:endParaRPr/>
               </a:p>
             </p:txBody>
           </p:sp>
@@ -9510,7 +9703,7 @@
               <a:effectLst/>
               <a:extLst>
                 <a:ext uri="{C572A759-6A51-4108-AA02-DFA0A04FC94B}">
-                  <ma14:wrappingTextBoxFlag xmlns:ma14="http://schemas.microsoft.com/office/mac/drawingml/2011/main" val="1"/>
+                  <ma14:wrappingTextBoxFlag xmlns:ma14="http://schemas.microsoft.com/office/mac/drawingml/2011/main" xmlns:a14="http://schemas.microsoft.com/office/drawing/2010/main" xmlns:m="http://schemas.openxmlformats.org/officeDocument/2006/math" xmlns="" val="1"/>
                 </a:ext>
               </a:extLst>
             </p:spPr>
@@ -9520,7 +9713,7 @@
               </a:bodyPr>
               <a:lstStyle>
                 <a:lvl1pPr>
-                  <a:defRPr b="1" sz="3800">
+                  <a:defRPr sz="3800" b="1">
                     <a:latin typeface="+mn-lt"/>
                     <a:ea typeface="+mn-ea"/>
                     <a:cs typeface="+mn-cs"/>
@@ -9529,7 +9722,6 @@
                 </a:lvl1pPr>
               </a:lstStyle>
               <a:p>
-                <a:pPr/>
                 <a:r>
                   <a:t>100</a:t>
                 </a:r>
@@ -9559,7 +9751,7 @@
             <a:effectLst/>
             <a:extLst>
               <a:ext uri="{C572A759-6A51-4108-AA02-DFA0A04FC94B}">
-                <ma14:wrappingTextBoxFlag xmlns:ma14="http://schemas.microsoft.com/office/mac/drawingml/2011/main" val="1"/>
+                <ma14:wrappingTextBoxFlag xmlns:ma14="http://schemas.microsoft.com/office/mac/drawingml/2011/main" xmlns:a14="http://schemas.microsoft.com/office/drawing/2010/main" xmlns:m="http://schemas.openxmlformats.org/officeDocument/2006/math" xmlns="" val="1"/>
               </a:ext>
             </a:extLst>
           </p:spPr>
@@ -9578,7 +9770,6 @@
               </a:lvl1pPr>
             </a:lstStyle>
             <a:p>
-              <a:pPr/>
               <a:r>
                 <a:t>meilleures équipes UEFA comme base de comparaison</a:t>
               </a:r>
@@ -9653,6 +9844,7 @@
                     <a:sym typeface="Arial"/>
                   </a:defRPr>
                 </a:pPr>
+                <a:endParaRPr/>
               </a:p>
             </p:txBody>
           </p:sp>
@@ -9678,7 +9870,7 @@
               <a:effectLst/>
               <a:extLst>
                 <a:ext uri="{C572A759-6A51-4108-AA02-DFA0A04FC94B}">
-                  <ma14:wrappingTextBoxFlag xmlns:ma14="http://schemas.microsoft.com/office/mac/drawingml/2011/main" val="1"/>
+                  <ma14:wrappingTextBoxFlag xmlns:ma14="http://schemas.microsoft.com/office/mac/drawingml/2011/main" xmlns:a14="http://schemas.microsoft.com/office/drawing/2010/main" xmlns:m="http://schemas.openxmlformats.org/officeDocument/2006/math" xmlns="" val="1"/>
                 </a:ext>
               </a:extLst>
             </p:spPr>
@@ -9688,7 +9880,7 @@
               </a:bodyPr>
               <a:lstStyle>
                 <a:lvl1pPr>
-                  <a:defRPr b="1" sz="3800">
+                  <a:defRPr sz="3800" b="1">
                     <a:latin typeface="+mn-lt"/>
                     <a:ea typeface="+mn-ea"/>
                     <a:cs typeface="+mn-cs"/>
@@ -9697,7 +9889,6 @@
                 </a:lvl1pPr>
               </a:lstStyle>
               <a:p>
-                <a:pPr/>
                 <a:r>
                   <a:t>6000</a:t>
                 </a:r>
@@ -9727,7 +9918,7 @@
             <a:effectLst/>
             <a:extLst>
               <a:ext uri="{C572A759-6A51-4108-AA02-DFA0A04FC94B}">
-                <ma14:wrappingTextBoxFlag xmlns:ma14="http://schemas.microsoft.com/office/mac/drawingml/2011/main" val="1"/>
+                <ma14:wrappingTextBoxFlag xmlns:ma14="http://schemas.microsoft.com/office/mac/drawingml/2011/main" xmlns:a14="http://schemas.microsoft.com/office/drawing/2010/main" xmlns:m="http://schemas.openxmlformats.org/officeDocument/2006/math" xmlns="" val="1"/>
               </a:ext>
             </a:extLst>
           </p:spPr>
@@ -9746,7 +9937,6 @@
               </a:lvl1pPr>
             </a:lstStyle>
             <a:p>
-              <a:pPr/>
               <a:r>
                 <a:t>matchs environ avant jointure complète</a:t>
               </a:r>
@@ -9821,6 +10011,7 @@
                     <a:sym typeface="Arial"/>
                   </a:defRPr>
                 </a:pPr>
+                <a:endParaRPr/>
               </a:p>
             </p:txBody>
           </p:sp>
@@ -9846,7 +10037,7 @@
               <a:effectLst/>
               <a:extLst>
                 <a:ext uri="{C572A759-6A51-4108-AA02-DFA0A04FC94B}">
-                  <ma14:wrappingTextBoxFlag xmlns:ma14="http://schemas.microsoft.com/office/mac/drawingml/2011/main" val="1"/>
+                  <ma14:wrappingTextBoxFlag xmlns:ma14="http://schemas.microsoft.com/office/mac/drawingml/2011/main" xmlns:a14="http://schemas.microsoft.com/office/drawing/2010/main" xmlns:m="http://schemas.openxmlformats.org/officeDocument/2006/math" xmlns="" val="1"/>
                 </a:ext>
               </a:extLst>
             </p:spPr>
@@ -9856,7 +10047,7 @@
               </a:bodyPr>
               <a:lstStyle>
                 <a:lvl1pPr>
-                  <a:defRPr b="1" sz="3800">
+                  <a:defRPr sz="3800" b="1">
                     <a:latin typeface="+mn-lt"/>
                     <a:ea typeface="+mn-ea"/>
                     <a:cs typeface="+mn-cs"/>
@@ -9865,7 +10056,6 @@
                 </a:lvl1pPr>
               </a:lstStyle>
               <a:p>
-                <a:pPr/>
                 <a:r>
                   <a:t>3800</a:t>
                 </a:r>
@@ -9895,7 +10085,7 @@
             <a:effectLst/>
             <a:extLst>
               <a:ext uri="{C572A759-6A51-4108-AA02-DFA0A04FC94B}">
-                <ma14:wrappingTextBoxFlag xmlns:ma14="http://schemas.microsoft.com/office/mac/drawingml/2011/main" val="1"/>
+                <ma14:wrappingTextBoxFlag xmlns:ma14="http://schemas.microsoft.com/office/mac/drawingml/2011/main" xmlns:a14="http://schemas.microsoft.com/office/drawing/2010/main" xmlns:m="http://schemas.openxmlformats.org/officeDocument/2006/math" xmlns="" val="1"/>
               </a:ext>
             </a:extLst>
           </p:spPr>
@@ -9914,7 +10104,6 @@
               </a:lvl1pPr>
             </a:lstStyle>
             <a:p>
-              <a:pPr/>
               <a:r>
                 <a:t>matchs exploitables après retrait des NaN</a:t>
               </a:r>
@@ -9941,7 +10130,7 @@
           </a:ln>
           <a:extLst>
             <a:ext uri="{C572A759-6A51-4108-AA02-DFA0A04FC94B}">
-              <ma14:wrappingTextBoxFlag xmlns:ma14="http://schemas.microsoft.com/office/mac/drawingml/2011/main" val="1"/>
+              <ma14:wrappingTextBoxFlag xmlns:ma14="http://schemas.microsoft.com/office/mac/drawingml/2011/main" xmlns:a14="http://schemas.microsoft.com/office/drawing/2010/main" xmlns:m="http://schemas.openxmlformats.org/officeDocument/2006/math" xmlns="" val="1"/>
             </a:ext>
           </a:extLst>
         </p:spPr>
@@ -9951,7 +10140,7 @@
           </a:bodyPr>
           <a:lstStyle>
             <a:lvl1pPr>
-              <a:defRPr b="1" sz="1100">
+              <a:defRPr sz="1100" b="1">
                 <a:latin typeface="Inter"/>
                 <a:ea typeface="Inter"/>
                 <a:cs typeface="Inter"/>
@@ -9960,7 +10149,6 @@
             </a:lvl1pPr>
           </a:lstStyle>
           <a:p>
-            <a:pPr/>
             <a:r>
               <a:t>Conclusion modèle</a:t>
             </a:r>
@@ -9986,7 +10174,7 @@
           </a:ln>
           <a:extLst>
             <a:ext uri="{C572A759-6A51-4108-AA02-DFA0A04FC94B}">
-              <ma14:wrappingTextBoxFlag xmlns:ma14="http://schemas.microsoft.com/office/mac/drawingml/2011/main" val="1"/>
+              <ma14:wrappingTextBoxFlag xmlns:ma14="http://schemas.microsoft.com/office/mac/drawingml/2011/main" xmlns:a14="http://schemas.microsoft.com/office/drawing/2010/main" xmlns:m="http://schemas.openxmlformats.org/officeDocument/2006/math" xmlns="" val="1"/>
             </a:ext>
           </a:extLst>
         </p:spPr>
@@ -10005,7 +10193,6 @@
             </a:lvl1pPr>
           </a:lstStyle>
           <a:p>
-            <a:pPr/>
             <a:r>
               <a:t>Le clustering joueurs a surtout séparé les niveaux de force, pas des profils techniques nets. Dans cette version, il réduit l'information et dégrade la performance.</a:t>
             </a:r>
@@ -10031,7 +10218,7 @@
           </a:ln>
           <a:extLst>
             <a:ext uri="{C572A759-6A51-4108-AA02-DFA0A04FC94B}">
-              <ma14:wrappingTextBoxFlag xmlns:ma14="http://schemas.microsoft.com/office/mac/drawingml/2011/main" val="1"/>
+              <ma14:wrappingTextBoxFlag xmlns:ma14="http://schemas.microsoft.com/office/mac/drawingml/2011/main" xmlns:a14="http://schemas.microsoft.com/office/drawing/2010/main" xmlns:m="http://schemas.openxmlformats.org/officeDocument/2006/math" xmlns="" val="1"/>
             </a:ext>
           </a:extLst>
         </p:spPr>
@@ -10053,7 +10240,6 @@
             </a:lvl1pPr>
           </a:lstStyle>
           <a:p>
-            <a:pPr/>
             <a:r>
               <a:t>3</a:t>
             </a:r>
@@ -10065,12 +10251,12 @@
   <p:clrMapOvr>
     <a:masterClrMapping/>
   </p:clrMapOvr>
-  <p:transition xmlns:p14="http://schemas.microsoft.com/office/powerpoint/2010/main" spd="med" advClick="1"/>
+  <p:transition spd="med"/>
 </p:sld>
 </file>
 
 <file path=ppt/slides/slide8.xml><?xml version="1.0" encoding="utf-8"?>
-<p:sld xmlns:a="http://schemas.openxmlformats.org/drawingml/2006/main" xmlns:r="http://schemas.openxmlformats.org/officeDocument/2006/relationships" xmlns:p="http://schemas.openxmlformats.org/presentationml/2006/main" xmlns:m="http://schemas.openxmlformats.org/officeDocument/2006/math" xmlns:a14="http://schemas.microsoft.com/office/drawing/2010/main" showMasterSp="1" showMasterPhAnim="1">
+<p:sld xmlns:a="http://schemas.openxmlformats.org/drawingml/2006/main" xmlns:r="http://schemas.openxmlformats.org/officeDocument/2006/relationships" xmlns:p="http://schemas.openxmlformats.org/presentationml/2006/main">
   <p:cSld>
     <p:spTree>
       <p:nvGrpSpPr>
@@ -10095,10 +10281,8 @@
           <p:nvPr/>
         </p:nvPicPr>
         <p:blipFill>
-          <a:blip r:embed="rId2">
-            <a:extLst/>
-          </a:blip>
-          <a:srcRect l="0" t="7812" r="8100" b="7812"/>
+          <a:blip r:embed="rId2"/>
+          <a:srcRect t="7812" r="8100" b="7812"/>
           <a:stretch>
             <a:fillRect/>
           </a:stretch>
@@ -10119,7 +10303,9 @@
       <p:sp>
         <p:nvSpPr>
           <p:cNvPr id="253" name="Google Shape;75;p16"/>
-          <p:cNvSpPr txBox="1"/>
+          <p:cNvSpPr txBox="1">
+            <a:spLocks noGrp="1"/>
+          </p:cNvSpPr>
           <p:nvPr>
             <p:ph type="title"/>
           </p:nvPr>
@@ -10149,7 +10335,6 @@
             </a:lvl1pPr>
           </a:lstStyle>
           <a:p>
-            <a:pPr/>
             <a:r>
               <a:t>Architecture - Entrainement</a:t>
             </a:r>
@@ -10165,9 +10350,7 @@
           <p:nvPr/>
         </p:nvPicPr>
         <p:blipFill>
-          <a:blip r:embed="rId3">
-            <a:extLst/>
-          </a:blip>
+          <a:blip r:embed="rId3"/>
           <a:stretch>
             <a:fillRect/>
           </a:stretch>
@@ -10218,6 +10401,7 @@
                 <a:sym typeface="Arial"/>
               </a:defRPr>
             </a:pPr>
+            <a:endParaRPr/>
           </a:p>
         </p:txBody>
       </p:sp>
@@ -10244,9 +10428,7 @@
             <p:nvPr/>
           </p:nvPicPr>
           <p:blipFill>
-            <a:blip r:embed="rId4">
-              <a:extLst/>
-            </a:blip>
+            <a:blip r:embed="rId4"/>
             <a:stretch>
               <a:fillRect/>
             </a:stretch>
@@ -10275,9 +10457,7 @@
             <p:nvPr/>
           </p:nvPicPr>
           <p:blipFill>
-            <a:blip r:embed="rId5">
-              <a:extLst/>
-            </a:blip>
+            <a:blip r:embed="rId5"/>
             <a:stretch>
               <a:fillRect/>
             </a:stretch>
@@ -10321,9 +10501,7 @@
             <p:nvPr/>
           </p:nvPicPr>
           <p:blipFill>
-            <a:blip r:embed="rId6">
-              <a:extLst/>
-            </a:blip>
+            <a:blip r:embed="rId6"/>
             <a:stretch>
               <a:fillRect/>
             </a:stretch>
@@ -10352,9 +10530,7 @@
             <p:nvPr/>
           </p:nvPicPr>
           <p:blipFill>
-            <a:blip r:embed="rId7">
-              <a:extLst/>
-            </a:blip>
+            <a:blip r:embed="rId7"/>
             <a:stretch>
               <a:fillRect/>
             </a:stretch>
@@ -10396,7 +10572,7 @@
             <a:effectLst/>
             <a:extLst>
               <a:ext uri="{C572A759-6A51-4108-AA02-DFA0A04FC94B}">
-                <ma14:wrappingTextBoxFlag xmlns:ma14="http://schemas.microsoft.com/office/mac/drawingml/2011/main" val="1"/>
+                <ma14:wrappingTextBoxFlag xmlns:ma14="http://schemas.microsoft.com/office/mac/drawingml/2011/main" xmlns:a14="http://schemas.microsoft.com/office/drawing/2010/main" xmlns:m="http://schemas.openxmlformats.org/officeDocument/2006/math" xmlns="" val="1"/>
               </a:ext>
             </a:extLst>
           </p:spPr>
@@ -10463,7 +10639,7 @@
           <a:bodyPr lIns="45718" tIns="45718" rIns="45718" bIns="45718"/>
           <a:lstStyle/>
           <a:p>
-            <a:pPr/>
+            <a:endParaRPr/>
           </a:p>
         </p:txBody>
       </p:sp>
@@ -10492,7 +10668,7 @@
           <a:bodyPr lIns="45718" tIns="45718" rIns="45718" bIns="45718"/>
           <a:lstStyle/>
           <a:p>
-            <a:pPr/>
+            <a:endParaRPr/>
           </a:p>
         </p:txBody>
       </p:sp>
@@ -10521,7 +10697,7 @@
           <a:bodyPr lIns="45718" tIns="45718" rIns="45718" bIns="45718"/>
           <a:lstStyle/>
           <a:p>
-            <a:pPr/>
+            <a:endParaRPr/>
           </a:p>
         </p:txBody>
       </p:sp>
@@ -10548,9 +10724,7 @@
             <p:nvPr/>
           </p:nvPicPr>
           <p:blipFill>
-            <a:blip r:embed="rId8">
-              <a:extLst/>
-            </a:blip>
+            <a:blip r:embed="rId8"/>
             <a:stretch>
               <a:fillRect/>
             </a:stretch>
@@ -10579,9 +10753,7 @@
             <p:nvPr/>
           </p:nvPicPr>
           <p:blipFill>
-            <a:blip r:embed="rId9">
-              <a:extLst/>
-            </a:blip>
+            <a:blip r:embed="rId9"/>
             <a:stretch>
               <a:fillRect/>
             </a:stretch>
@@ -10653,9 +10825,7 @@
                 <p:nvPr/>
               </p:nvPicPr>
               <p:blipFill>
-                <a:blip r:embed="rId10">
-                  <a:extLst/>
-                </a:blip>
+                <a:blip r:embed="rId10"/>
                 <a:stretch>
                   <a:fillRect/>
                 </a:stretch>
@@ -10697,7 +10867,7 @@
                 <a:effectLst/>
                 <a:extLst>
                   <a:ext uri="{C572A759-6A51-4108-AA02-DFA0A04FC94B}">
-                    <ma14:wrappingTextBoxFlag xmlns:ma14="http://schemas.microsoft.com/office/mac/drawingml/2011/main" val="1"/>
+                    <ma14:wrappingTextBoxFlag xmlns:ma14="http://schemas.microsoft.com/office/mac/drawingml/2011/main" xmlns:a14="http://schemas.microsoft.com/office/drawing/2010/main" xmlns:m="http://schemas.openxmlformats.org/officeDocument/2006/math" xmlns="" val="1"/>
                   </a:ext>
                 </a:extLst>
               </p:spPr>
@@ -10716,7 +10886,6 @@
                   </a:lvl1pPr>
                 </a:lstStyle>
                 <a:p>
-                  <a:pPr/>
                   <a:r>
                     <a:t>Tracking</a:t>
                   </a:r>
@@ -10733,9 +10902,7 @@
               <p:nvPr/>
             </p:nvPicPr>
             <p:blipFill>
-              <a:blip r:embed="rId11">
-                <a:extLst/>
-              </a:blip>
+              <a:blip r:embed="rId11"/>
               <a:stretch>
                 <a:fillRect/>
               </a:stretch>
@@ -10765,9 +10932,7 @@
             <p:nvPr/>
           </p:nvPicPr>
           <p:blipFill>
-            <a:blip r:embed="rId12">
-              <a:extLst/>
-            </a:blip>
+            <a:blip r:embed="rId12"/>
             <a:stretch>
               <a:fillRect/>
             </a:stretch>
@@ -10797,9 +10962,7 @@
           <p:nvPr/>
         </p:nvPicPr>
         <p:blipFill>
-          <a:blip r:embed="rId13">
-            <a:extLst/>
-          </a:blip>
+          <a:blip r:embed="rId13"/>
           <a:stretch>
             <a:fillRect/>
           </a:stretch>
@@ -10822,12 +10985,12 @@
   <p:clrMapOvr>
     <a:masterClrMapping/>
   </p:clrMapOvr>
-  <p:transition xmlns:p14="http://schemas.microsoft.com/office/powerpoint/2010/main" spd="med" advClick="1"/>
+  <p:transition spd="med"/>
 </p:sld>
 </file>
 
 <file path=ppt/slides/slide9.xml><?xml version="1.0" encoding="utf-8"?>
-<p:sld xmlns:a="http://schemas.openxmlformats.org/drawingml/2006/main" xmlns:r="http://schemas.openxmlformats.org/officeDocument/2006/relationships" xmlns:p="http://schemas.openxmlformats.org/presentationml/2006/main" xmlns:m="http://schemas.openxmlformats.org/officeDocument/2006/math" xmlns:a14="http://schemas.microsoft.com/office/drawing/2010/main" showMasterSp="1" showMasterPhAnim="1">
+<p:sld xmlns:a="http://schemas.openxmlformats.org/drawingml/2006/main" xmlns:r="http://schemas.openxmlformats.org/officeDocument/2006/relationships" xmlns:p="http://schemas.openxmlformats.org/presentationml/2006/main">
   <p:cSld>
     <p:spTree>
       <p:nvGrpSpPr>
@@ -10852,10 +11015,8 @@
           <p:nvPr/>
         </p:nvPicPr>
         <p:blipFill>
-          <a:blip r:embed="rId2">
-            <a:extLst/>
-          </a:blip>
-          <a:srcRect l="0" t="7813" r="0" b="7812"/>
+          <a:blip r:embed="rId2"/>
+          <a:srcRect t="7813" b="7812"/>
           <a:stretch>
             <a:fillRect/>
           </a:stretch>
@@ -10895,7 +11056,7 @@
             </a:solidFill>
           </a:ln>
           <a:effectLst>
-            <a:outerShdw sx="100000" sy="100000" kx="0" ky="0" algn="b" rotWithShape="0" blurRad="76200" dist="20000" dir="5400000">
+            <a:outerShdw blurRad="76200" dist="20000" dir="5400000" rotWithShape="0">
               <a:srgbClr val="0E3449">
                 <a:alpha val="16000"/>
               </a:srgbClr>
@@ -10914,13 +11075,16 @@
                 <a:sym typeface="Arial"/>
               </a:defRPr>
             </a:pPr>
+            <a:endParaRPr/>
           </a:p>
         </p:txBody>
       </p:sp>
       <p:sp>
         <p:nvSpPr>
           <p:cNvPr id="280" name="Google Shape;75;p16"/>
-          <p:cNvSpPr txBox="1"/>
+          <p:cNvSpPr txBox="1">
+            <a:spLocks noGrp="1"/>
+          </p:cNvSpPr>
           <p:nvPr>
             <p:ph type="title"/>
           </p:nvPr>
@@ -10950,7 +11114,6 @@
             </a:lvl1pPr>
           </a:lstStyle>
           <a:p>
-            <a:pPr/>
             <a:r>
               <a:t>Architecture - Inference</a:t>
             </a:r>
@@ -10966,9 +11129,7 @@
           <p:nvPr/>
         </p:nvPicPr>
         <p:blipFill>
-          <a:blip r:embed="rId3">
-            <a:extLst/>
-          </a:blip>
+          <a:blip r:embed="rId3"/>
           <a:stretch>
             <a:fillRect/>
           </a:stretch>
@@ -11019,6 +11180,7 @@
                 <a:sym typeface="Arial"/>
               </a:defRPr>
             </a:pPr>
+            <a:endParaRPr/>
           </a:p>
         </p:txBody>
       </p:sp>
@@ -11031,9 +11193,7 @@
           <p:nvPr/>
         </p:nvPicPr>
         <p:blipFill>
-          <a:blip r:embed="rId4">
-            <a:extLst/>
-          </a:blip>
+          <a:blip r:embed="rId4"/>
           <a:stretch>
             <a:fillRect/>
           </a:stretch>
@@ -11074,9 +11234,7 @@
             <p:nvPr/>
           </p:nvPicPr>
           <p:blipFill>
-            <a:blip r:embed="rId5">
-              <a:extLst/>
-            </a:blip>
+            <a:blip r:embed="rId5"/>
             <a:stretch>
               <a:fillRect/>
             </a:stretch>
@@ -11105,9 +11263,7 @@
             <p:nvPr/>
           </p:nvPicPr>
           <p:blipFill>
-            <a:blip r:embed="rId6">
-              <a:extLst/>
-            </a:blip>
+            <a:blip r:embed="rId6"/>
             <a:stretch>
               <a:fillRect/>
             </a:stretch>
@@ -11153,7 +11309,7 @@
           <a:bodyPr lIns="45718" tIns="45718" rIns="45718" bIns="45718"/>
           <a:lstStyle/>
           <a:p>
-            <a:pPr/>
+            <a:endParaRPr/>
           </a:p>
         </p:txBody>
       </p:sp>
@@ -11182,7 +11338,7 @@
           <a:bodyPr lIns="45718" tIns="45718" rIns="45718" bIns="45718"/>
           <a:lstStyle/>
           <a:p>
-            <a:pPr/>
+            <a:endParaRPr/>
           </a:p>
         </p:txBody>
       </p:sp>
@@ -11211,7 +11367,7 @@
           <a:bodyPr lIns="45718" tIns="45718" rIns="45718" bIns="45718"/>
           <a:lstStyle/>
           <a:p>
-            <a:pPr/>
+            <a:endParaRPr/>
           </a:p>
         </p:txBody>
       </p:sp>
@@ -11240,7 +11396,7 @@
           <a:bodyPr lIns="45718" tIns="45718" rIns="45718" bIns="45718"/>
           <a:lstStyle/>
           <a:p>
-            <a:pPr/>
+            <a:endParaRPr/>
           </a:p>
         </p:txBody>
       </p:sp>
@@ -11269,7 +11425,7 @@
           <a:bodyPr lIns="45718" tIns="45718" rIns="45718" bIns="45718"/>
           <a:lstStyle/>
           <a:p>
-            <a:pPr/>
+            <a:endParaRPr/>
           </a:p>
         </p:txBody>
       </p:sp>
@@ -11298,7 +11454,7 @@
           <a:bodyPr lIns="45718" tIns="45718" rIns="45718" bIns="45718"/>
           <a:lstStyle/>
           <a:p>
-            <a:pPr/>
+            <a:endParaRPr/>
           </a:p>
         </p:txBody>
       </p:sp>
@@ -11327,7 +11483,7 @@
           <a:bodyPr lIns="45718" tIns="45718" rIns="45718" bIns="45718"/>
           <a:lstStyle/>
           <a:p>
-            <a:pPr/>
+            <a:endParaRPr/>
           </a:p>
         </p:txBody>
       </p:sp>
@@ -11356,7 +11512,7 @@
           <a:bodyPr lIns="45718" tIns="45718" rIns="45718" bIns="45718"/>
           <a:lstStyle/>
           <a:p>
-            <a:pPr/>
+            <a:endParaRPr/>
           </a:p>
         </p:txBody>
       </p:sp>
@@ -11383,9 +11539,7 @@
             <p:nvPr/>
           </p:nvPicPr>
           <p:blipFill>
-            <a:blip r:embed="rId7">
-              <a:extLst/>
-            </a:blip>
+            <a:blip r:embed="rId7"/>
             <a:stretch>
               <a:fillRect/>
             </a:stretch>
@@ -11414,9 +11568,7 @@
             <p:nvPr/>
           </p:nvPicPr>
           <p:blipFill>
-            <a:blip r:embed="rId8">
-              <a:extLst/>
-            </a:blip>
+            <a:blip r:embed="rId8"/>
             <a:stretch>
               <a:fillRect/>
             </a:stretch>
@@ -11446,9 +11598,7 @@
           <p:nvPr/>
         </p:nvPicPr>
         <p:blipFill>
-          <a:blip r:embed="rId9">
-            <a:extLst/>
-          </a:blip>
+          <a:blip r:embed="rId9"/>
           <a:stretch>
             <a:fillRect/>
           </a:stretch>
@@ -11491,7 +11641,7 @@
           <a:bodyPr lIns="45718" tIns="45718" rIns="45718" bIns="45718"/>
           <a:lstStyle/>
           <a:p>
-            <a:pPr/>
+            <a:endParaRPr/>
           </a:p>
         </p:txBody>
       </p:sp>
@@ -11546,9 +11696,7 @@
                 <p:nvPr/>
               </p:nvPicPr>
               <p:blipFill>
-                <a:blip r:embed="rId10">
-                  <a:extLst/>
-                </a:blip>
+                <a:blip r:embed="rId10"/>
                 <a:stretch>
                   <a:fillRect/>
                 </a:stretch>
@@ -11590,7 +11738,7 @@
                 <a:effectLst/>
                 <a:extLst>
                   <a:ext uri="{C572A759-6A51-4108-AA02-DFA0A04FC94B}">
-                    <ma14:wrappingTextBoxFlag xmlns:ma14="http://schemas.microsoft.com/office/mac/drawingml/2011/main" val="1"/>
+                    <ma14:wrappingTextBoxFlag xmlns:ma14="http://schemas.microsoft.com/office/mac/drawingml/2011/main" xmlns:a14="http://schemas.microsoft.com/office/drawing/2010/main" xmlns:m="http://schemas.openxmlformats.org/officeDocument/2006/math" xmlns="" val="1"/>
                   </a:ext>
                 </a:extLst>
               </p:spPr>
@@ -11609,7 +11757,6 @@
                   </a:lvl1pPr>
                 </a:lstStyle>
                 <a:p>
-                  <a:pPr/>
                   <a:r>
                     <a:t>Model</a:t>
                   </a:r>
@@ -11626,9 +11773,7 @@
               <p:nvPr/>
             </p:nvPicPr>
             <p:blipFill>
-              <a:blip r:embed="rId11">
-                <a:extLst/>
-              </a:blip>
+              <a:blip r:embed="rId11"/>
               <a:stretch>
                 <a:fillRect/>
               </a:stretch>
@@ -11658,9 +11803,7 @@
             <p:nvPr/>
           </p:nvPicPr>
           <p:blipFill>
-            <a:blip r:embed="rId12">
-              <a:extLst/>
-            </a:blip>
+            <a:blip r:embed="rId12"/>
             <a:stretch>
               <a:fillRect/>
             </a:stretch>
@@ -11717,7 +11860,7 @@
             <a:effectLst/>
             <a:extLst>
               <a:ext uri="{C572A759-6A51-4108-AA02-DFA0A04FC94B}">
-                <ma14:wrappingTextBoxFlag xmlns:ma14="http://schemas.microsoft.com/office/mac/drawingml/2011/main" val="1"/>
+                <ma14:wrappingTextBoxFlag xmlns:ma14="http://schemas.microsoft.com/office/mac/drawingml/2011/main" xmlns:a14="http://schemas.microsoft.com/office/drawing/2010/main" xmlns:m="http://schemas.openxmlformats.org/officeDocument/2006/math" xmlns="" val="1"/>
               </a:ext>
             </a:extLst>
           </p:spPr>
@@ -11736,7 +11879,6 @@
               </a:lvl1pPr>
             </a:lstStyle>
             <a:p>
-              <a:pPr/>
               <a:r>
                 <a:t>/tchat</a:t>
               </a:r>
@@ -11766,9 +11908,7 @@
               <p:nvPr/>
             </p:nvPicPr>
             <p:blipFill>
-              <a:blip r:embed="rId13">
-                <a:extLst/>
-              </a:blip>
+              <a:blip r:embed="rId13"/>
               <a:stretch>
                 <a:fillRect/>
               </a:stretch>
@@ -11797,9 +11937,7 @@
               <p:nvPr/>
             </p:nvPicPr>
             <p:blipFill>
-              <a:blip r:embed="rId12">
-                <a:extLst/>
-              </a:blip>
+              <a:blip r:embed="rId12"/>
               <a:stretch>
                 <a:fillRect/>
               </a:stretch>
@@ -11858,9 +11996,7 @@
               <p:nvPr/>
             </p:nvPicPr>
             <p:blipFill>
-              <a:blip r:embed="rId14">
-                <a:extLst/>
-              </a:blip>
+              <a:blip r:embed="rId14"/>
               <a:stretch>
                 <a:fillRect/>
               </a:stretch>
@@ -11902,7 +12038,7 @@
               <a:effectLst/>
               <a:extLst>
                 <a:ext uri="{C572A759-6A51-4108-AA02-DFA0A04FC94B}">
-                  <ma14:wrappingTextBoxFlag xmlns:ma14="http://schemas.microsoft.com/office/mac/drawingml/2011/main" val="1"/>
+                  <ma14:wrappingTextBoxFlag xmlns:ma14="http://schemas.microsoft.com/office/mac/drawingml/2011/main" xmlns:a14="http://schemas.microsoft.com/office/drawing/2010/main" xmlns:m="http://schemas.openxmlformats.org/officeDocument/2006/math" xmlns="" val="1"/>
                 </a:ext>
               </a:extLst>
             </p:spPr>
@@ -11921,7 +12057,6 @@
                 </a:lvl1pPr>
               </a:lstStyle>
               <a:p>
-                <a:pPr/>
                 <a:r>
                   <a:t>Front</a:t>
                 </a:r>
@@ -11938,9 +12073,7 @@
             <p:nvPr/>
           </p:nvPicPr>
           <p:blipFill>
-            <a:blip r:embed="rId12">
-              <a:extLst/>
-            </a:blip>
+            <a:blip r:embed="rId12"/>
             <a:stretch>
               <a:fillRect/>
             </a:stretch>
@@ -11998,9 +12131,7 @@
               <p:nvPr/>
             </p:nvPicPr>
             <p:blipFill>
-              <a:blip r:embed="rId13">
-                <a:extLst/>
-              </a:blip>
+              <a:blip r:embed="rId13"/>
               <a:stretch>
                 <a:fillRect/>
               </a:stretch>
@@ -12042,7 +12173,7 @@
               <a:effectLst/>
               <a:extLst>
                 <a:ext uri="{C572A759-6A51-4108-AA02-DFA0A04FC94B}">
-                  <ma14:wrappingTextBoxFlag xmlns:ma14="http://schemas.microsoft.com/office/mac/drawingml/2011/main" val="1"/>
+                  <ma14:wrappingTextBoxFlag xmlns:ma14="http://schemas.microsoft.com/office/mac/drawingml/2011/main" xmlns:a14="http://schemas.microsoft.com/office/drawing/2010/main" xmlns:m="http://schemas.openxmlformats.org/officeDocument/2006/math" xmlns="" val="1"/>
                 </a:ext>
               </a:extLst>
             </p:spPr>
@@ -12089,9 +12220,7 @@
             <p:nvPr/>
           </p:nvPicPr>
           <p:blipFill>
-            <a:blip r:embed="rId12">
-              <a:extLst/>
-            </a:blip>
+            <a:blip r:embed="rId12"/>
             <a:stretch>
               <a:fillRect/>
             </a:stretch>
@@ -12149,9 +12278,7 @@
               <p:nvPr/>
             </p:nvPicPr>
             <p:blipFill>
-              <a:blip r:embed="rId13">
-                <a:extLst/>
-              </a:blip>
+              <a:blip r:embed="rId13"/>
               <a:stretch>
                 <a:fillRect/>
               </a:stretch>
@@ -12193,7 +12320,7 @@
               <a:effectLst/>
               <a:extLst>
                 <a:ext uri="{C572A759-6A51-4108-AA02-DFA0A04FC94B}">
-                  <ma14:wrappingTextBoxFlag xmlns:ma14="http://schemas.microsoft.com/office/mac/drawingml/2011/main" val="1"/>
+                  <ma14:wrappingTextBoxFlag xmlns:ma14="http://schemas.microsoft.com/office/mac/drawingml/2011/main" xmlns:a14="http://schemas.microsoft.com/office/drawing/2010/main" xmlns:m="http://schemas.openxmlformats.org/officeDocument/2006/math" xmlns="" val="1"/>
                 </a:ext>
               </a:extLst>
             </p:spPr>
@@ -12236,9 +12363,7 @@
             <p:nvPr/>
           </p:nvPicPr>
           <p:blipFill>
-            <a:blip r:embed="rId12">
-              <a:extLst/>
-            </a:blip>
+            <a:blip r:embed="rId12"/>
             <a:stretch>
               <a:fillRect/>
             </a:stretch>
@@ -12296,9 +12421,7 @@
               <p:nvPr/>
             </p:nvPicPr>
             <p:blipFill>
-              <a:blip r:embed="rId15">
-                <a:extLst/>
-              </a:blip>
+              <a:blip r:embed="rId15"/>
               <a:stretch>
                 <a:fillRect/>
               </a:stretch>
@@ -12327,9 +12450,7 @@
               <p:nvPr/>
             </p:nvPicPr>
             <p:blipFill>
-              <a:blip r:embed="rId16">
-                <a:extLst/>
-              </a:blip>
+              <a:blip r:embed="rId16"/>
               <a:stretch>
                 <a:fillRect/>
               </a:stretch>
@@ -12359,9 +12480,7 @@
             <p:nvPr/>
           </p:nvPicPr>
           <p:blipFill>
-            <a:blip r:embed="rId12">
-              <a:extLst/>
-            </a:blip>
+            <a:blip r:embed="rId12"/>
             <a:stretch>
               <a:fillRect/>
             </a:stretch>
@@ -12387,12 +12506,12 @@
   <p:clrMapOvr>
     <a:masterClrMapping/>
   </p:clrMapOvr>
-  <p:transition xmlns:p14="http://schemas.microsoft.com/office/powerpoint/2010/main" spd="med" advClick="1"/>
+  <p:transition spd="med"/>
 </p:sld>
 </file>
 
 <file path=ppt/theme/theme1.xml><?xml version="1.0" encoding="utf-8"?>
-<a:theme xmlns:a="http://schemas.openxmlformats.org/drawingml/2006/main" xmlns:r="http://schemas.openxmlformats.org/officeDocument/2006/relationships" name="Simple Light">
+<a:theme xmlns:a="http://schemas.openxmlformats.org/drawingml/2006/main" name="Simple Light">
   <a:themeElements>
     <a:clrScheme name="Simple Light">
       <a:dk1>
@@ -12518,7 +12637,7 @@
       <a:effectStyleLst>
         <a:effectStyle>
           <a:effectLst>
-            <a:outerShdw sx="100000" sy="100000" kx="0" ky="0" algn="b" rotWithShape="0" blurRad="38100" dist="23000" dir="5400000">
+            <a:outerShdw blurRad="38100" dist="23000" dir="5400000" rotWithShape="0">
               <a:srgbClr val="000000">
                 <a:alpha val="35000"/>
               </a:srgbClr>
@@ -12527,7 +12646,7 @@
         </a:effectStyle>
         <a:effectStyle>
           <a:effectLst>
-            <a:outerShdw sx="100000" sy="100000" kx="0" ky="0" algn="b" rotWithShape="0" blurRad="38100" dist="23000" dir="5400000">
+            <a:outerShdw blurRad="38100" dist="23000" dir="5400000" rotWithShape="0">
               <a:srgbClr val="000000">
                 <a:alpha val="35000"/>
               </a:srgbClr>
@@ -12536,7 +12655,7 @@
         </a:effectStyle>
         <a:effectStyle>
           <a:effectLst>
-            <a:outerShdw sx="100000" sy="100000" kx="0" ky="0" algn="b" rotWithShape="0" blurRad="38100" dist="23000" dir="5400000">
+            <a:outerShdw blurRad="38100" dist="23000" dir="5400000" rotWithShape="0">
               <a:srgbClr val="000000">
                 <a:alpha val="35000"/>
               </a:srgbClr>
@@ -12610,7 +12729,7 @@
           <a:round/>
         </a:ln>
         <a:effectLst>
-          <a:outerShdw sx="100000" sy="100000" kx="0" ky="0" algn="b" rotWithShape="0" blurRad="38100" dist="23000" dir="5400000">
+          <a:outerShdw blurRad="38100" dist="23000" dir="5400000" rotWithShape="0">
             <a:srgbClr val="000000">
               <a:alpha val="35000"/>
             </a:srgbClr>
@@ -12618,7 +12737,7 @@
         </a:effectLst>
         <a:sp3d/>
       </a:spPr>
-      <a:bodyPr rot="0" spcFirstLastPara="1" vertOverflow="overflow" horzOverflow="overflow" vert="horz" wrap="square" lIns="45718" tIns="45718" rIns="45718" bIns="45718" numCol="1" spcCol="38100" rtlCol="0" anchor="ctr" upright="0">
+      <a:bodyPr rot="0" spcFirstLastPara="1" vertOverflow="overflow" horzOverflow="overflow" vert="horz" wrap="square" lIns="45718" tIns="45718" rIns="45718" bIns="45718" numCol="1" spcCol="38100" rtlCol="0" anchor="ctr">
         <a:spAutoFit/>
       </a:bodyPr>
       <a:lstStyle>
@@ -12637,7 +12756,7 @@
           <a:buFontTx/>
           <a:buNone/>
           <a:tabLst/>
-          <a:defRPr b="0" baseline="0" cap="none" i="0" spc="0" strike="noStrike" sz="1400" u="none" kumimoji="0" normalizeH="0">
+          <a:defRPr kumimoji="0" sz="1400" b="0" i="0" u="none" strike="noStrike" cap="none" spc="0" normalizeH="0" baseline="0">
             <a:ln>
               <a:noFill/>
             </a:ln>
@@ -12667,7 +12786,7 @@
           <a:buFontTx/>
           <a:buNone/>
           <a:tabLst/>
-          <a:defRPr b="0" baseline="0" cap="none" i="0" spc="0" strike="noStrike" sz="1800" u="none" kumimoji="0" normalizeH="0">
+          <a:defRPr kumimoji="0" sz="1800" b="0" i="0" u="none" strike="noStrike" cap="none" spc="0" normalizeH="0" baseline="0">
             <a:ln>
               <a:noFill/>
             </a:ln>
@@ -12693,7 +12812,7 @@
           <a:buFontTx/>
           <a:buNone/>
           <a:tabLst/>
-          <a:defRPr b="0" baseline="0" cap="none" i="0" spc="0" strike="noStrike" sz="1800" u="none" kumimoji="0" normalizeH="0">
+          <a:defRPr kumimoji="0" sz="1800" b="0" i="0" u="none" strike="noStrike" cap="none" spc="0" normalizeH="0" baseline="0">
             <a:ln>
               <a:noFill/>
             </a:ln>
@@ -12719,7 +12838,7 @@
           <a:buFontTx/>
           <a:buNone/>
           <a:tabLst/>
-          <a:defRPr b="0" baseline="0" cap="none" i="0" spc="0" strike="noStrike" sz="1800" u="none" kumimoji="0" normalizeH="0">
+          <a:defRPr kumimoji="0" sz="1800" b="0" i="0" u="none" strike="noStrike" cap="none" spc="0" normalizeH="0" baseline="0">
             <a:ln>
               <a:noFill/>
             </a:ln>
@@ -12745,7 +12864,7 @@
           <a:buFontTx/>
           <a:buNone/>
           <a:tabLst/>
-          <a:defRPr b="0" baseline="0" cap="none" i="0" spc="0" strike="noStrike" sz="1800" u="none" kumimoji="0" normalizeH="0">
+          <a:defRPr kumimoji="0" sz="1800" b="0" i="0" u="none" strike="noStrike" cap="none" spc="0" normalizeH="0" baseline="0">
             <a:ln>
               <a:noFill/>
             </a:ln>
@@ -12771,7 +12890,7 @@
           <a:buFontTx/>
           <a:buNone/>
           <a:tabLst/>
-          <a:defRPr b="0" baseline="0" cap="none" i="0" spc="0" strike="noStrike" sz="1800" u="none" kumimoji="0" normalizeH="0">
+          <a:defRPr kumimoji="0" sz="1800" b="0" i="0" u="none" strike="noStrike" cap="none" spc="0" normalizeH="0" baseline="0">
             <a:ln>
               <a:noFill/>
             </a:ln>
@@ -12797,7 +12916,7 @@
           <a:buFontTx/>
           <a:buNone/>
           <a:tabLst/>
-          <a:defRPr b="0" baseline="0" cap="none" i="0" spc="0" strike="noStrike" sz="1800" u="none" kumimoji="0" normalizeH="0">
+          <a:defRPr kumimoji="0" sz="1800" b="0" i="0" u="none" strike="noStrike" cap="none" spc="0" normalizeH="0" baseline="0">
             <a:ln>
               <a:noFill/>
             </a:ln>
@@ -12823,7 +12942,7 @@
           <a:buFontTx/>
           <a:buNone/>
           <a:tabLst/>
-          <a:defRPr b="0" baseline="0" cap="none" i="0" spc="0" strike="noStrike" sz="1800" u="none" kumimoji="0" normalizeH="0">
+          <a:defRPr kumimoji="0" sz="1800" b="0" i="0" u="none" strike="noStrike" cap="none" spc="0" normalizeH="0" baseline="0">
             <a:ln>
               <a:noFill/>
             </a:ln>
@@ -12849,7 +12968,7 @@
           <a:buFontTx/>
           <a:buNone/>
           <a:tabLst/>
-          <a:defRPr b="0" baseline="0" cap="none" i="0" spc="0" strike="noStrike" sz="1800" u="none" kumimoji="0" normalizeH="0">
+          <a:defRPr kumimoji="0" sz="1800" b="0" i="0" u="none" strike="noStrike" cap="none" spc="0" normalizeH="0" baseline="0">
             <a:ln>
               <a:noFill/>
             </a:ln>
@@ -12875,7 +12994,7 @@
           <a:buFontTx/>
           <a:buNone/>
           <a:tabLst/>
-          <a:defRPr b="0" baseline="0" cap="none" i="0" spc="0" strike="noStrike" sz="1800" u="none" kumimoji="0" normalizeH="0">
+          <a:defRPr kumimoji="0" sz="1800" b="0" i="0" u="none" strike="noStrike" cap="none" spc="0" normalizeH="0" baseline="0">
             <a:ln>
               <a:noFill/>
             </a:ln>
@@ -12888,9 +13007,15 @@
         </a:lvl9pPr>
       </a:lstStyle>
       <a:style>
-        <a:lnRef idx="0"/>
-        <a:fillRef idx="0"/>
-        <a:effectRef idx="0"/>
+        <a:lnRef idx="0">
+          <a:scrgbClr r="0" g="0" b="0"/>
+        </a:lnRef>
+        <a:fillRef idx="0">
+          <a:scrgbClr r="0" g="0" b="0"/>
+        </a:fillRef>
+        <a:effectRef idx="0">
+          <a:scrgbClr r="0" g="0" b="0"/>
+        </a:effectRef>
         <a:fontRef idx="none"/>
       </a:style>
     </a:spDef>
@@ -12905,7 +13030,7 @@
           <a:round/>
         </a:ln>
         <a:effectLst>
-          <a:outerShdw sx="100000" sy="100000" kx="0" ky="0" algn="b" rotWithShape="0" blurRad="38100" dist="23000" dir="5400000">
+          <a:outerShdw blurRad="38100" dist="23000" dir="5400000" rotWithShape="0">
             <a:srgbClr val="000000">
               <a:alpha val="35000"/>
             </a:srgbClr>
@@ -12913,7 +13038,7 @@
         </a:effectLst>
         <a:sp3d/>
       </a:spPr>
-      <a:bodyPr rot="0" spcFirstLastPara="1" vertOverflow="overflow" horzOverflow="overflow" vert="horz" wrap="square" lIns="91439" tIns="45719" rIns="91439" bIns="45719" numCol="1" spcCol="38100" rtlCol="0" anchor="t" upright="0">
+      <a:bodyPr rot="0" spcFirstLastPara="1" vertOverflow="overflow" horzOverflow="overflow" vert="horz" wrap="square" lIns="91439" tIns="45719" rIns="91439" bIns="45719" numCol="1" spcCol="38100" rtlCol="0" anchor="t">
         <a:noAutofit/>
       </a:bodyPr>
       <a:lstStyle>
@@ -12932,7 +13057,7 @@
           <a:buFontTx/>
           <a:buNone/>
           <a:tabLst/>
-          <a:defRPr b="0" baseline="0" cap="none" i="0" spc="0" strike="noStrike" sz="1800" u="none" kumimoji="0" normalizeH="0">
+          <a:defRPr kumimoji="0" sz="1800" b="0" i="0" u="none" strike="noStrike" cap="none" spc="0" normalizeH="0" baseline="0">
             <a:ln>
               <a:noFill/>
             </a:ln>
@@ -12958,7 +13083,7 @@
           <a:buFontTx/>
           <a:buNone/>
           <a:tabLst/>
-          <a:defRPr b="0" baseline="0" cap="none" i="0" spc="0" strike="noStrike" sz="1800" u="none" kumimoji="0" normalizeH="0">
+          <a:defRPr kumimoji="0" sz="1800" b="0" i="0" u="none" strike="noStrike" cap="none" spc="0" normalizeH="0" baseline="0">
             <a:ln>
               <a:noFill/>
             </a:ln>
@@ -12984,7 +13109,7 @@
           <a:buFontTx/>
           <a:buNone/>
           <a:tabLst/>
-          <a:defRPr b="0" baseline="0" cap="none" i="0" spc="0" strike="noStrike" sz="1800" u="none" kumimoji="0" normalizeH="0">
+          <a:defRPr kumimoji="0" sz="1800" b="0" i="0" u="none" strike="noStrike" cap="none" spc="0" normalizeH="0" baseline="0">
             <a:ln>
               <a:noFill/>
             </a:ln>
@@ -13010,7 +13135,7 @@
           <a:buFontTx/>
           <a:buNone/>
           <a:tabLst/>
-          <a:defRPr b="0" baseline="0" cap="none" i="0" spc="0" strike="noStrike" sz="1800" u="none" kumimoji="0" normalizeH="0">
+          <a:defRPr kumimoji="0" sz="1800" b="0" i="0" u="none" strike="noStrike" cap="none" spc="0" normalizeH="0" baseline="0">
             <a:ln>
               <a:noFill/>
             </a:ln>
@@ -13036,7 +13161,7 @@
           <a:buFontTx/>
           <a:buNone/>
           <a:tabLst/>
-          <a:defRPr b="0" baseline="0" cap="none" i="0" spc="0" strike="noStrike" sz="1800" u="none" kumimoji="0" normalizeH="0">
+          <a:defRPr kumimoji="0" sz="1800" b="0" i="0" u="none" strike="noStrike" cap="none" spc="0" normalizeH="0" baseline="0">
             <a:ln>
               <a:noFill/>
             </a:ln>
@@ -13062,7 +13187,7 @@
           <a:buFontTx/>
           <a:buNone/>
           <a:tabLst/>
-          <a:defRPr b="0" baseline="0" cap="none" i="0" spc="0" strike="noStrike" sz="1800" u="none" kumimoji="0" normalizeH="0">
+          <a:defRPr kumimoji="0" sz="1800" b="0" i="0" u="none" strike="noStrike" cap="none" spc="0" normalizeH="0" baseline="0">
             <a:ln>
               <a:noFill/>
             </a:ln>
@@ -13088,7 +13213,7 @@
           <a:buFontTx/>
           <a:buNone/>
           <a:tabLst/>
-          <a:defRPr b="0" baseline="0" cap="none" i="0" spc="0" strike="noStrike" sz="1800" u="none" kumimoji="0" normalizeH="0">
+          <a:defRPr kumimoji="0" sz="1800" b="0" i="0" u="none" strike="noStrike" cap="none" spc="0" normalizeH="0" baseline="0">
             <a:ln>
               <a:noFill/>
             </a:ln>
@@ -13114,7 +13239,7 @@
           <a:buFontTx/>
           <a:buNone/>
           <a:tabLst/>
-          <a:defRPr b="0" baseline="0" cap="none" i="0" spc="0" strike="noStrike" sz="1800" u="none" kumimoji="0" normalizeH="0">
+          <a:defRPr kumimoji="0" sz="1800" b="0" i="0" u="none" strike="noStrike" cap="none" spc="0" normalizeH="0" baseline="0">
             <a:ln>
               <a:noFill/>
             </a:ln>
@@ -13140,7 +13265,7 @@
           <a:buFontTx/>
           <a:buNone/>
           <a:tabLst/>
-          <a:defRPr b="0" baseline="0" cap="none" i="0" spc="0" strike="noStrike" sz="1800" u="none" kumimoji="0" normalizeH="0">
+          <a:defRPr kumimoji="0" sz="1800" b="0" i="0" u="none" strike="noStrike" cap="none" spc="0" normalizeH="0" baseline="0">
             <a:ln>
               <a:noFill/>
             </a:ln>
@@ -13166,7 +13291,7 @@
           <a:buFontTx/>
           <a:buNone/>
           <a:tabLst/>
-          <a:defRPr b="0" baseline="0" cap="none" i="0" spc="0" strike="noStrike" sz="1800" u="none" kumimoji="0" normalizeH="0">
+          <a:defRPr kumimoji="0" sz="1800" b="0" i="0" u="none" strike="noStrike" cap="none" spc="0" normalizeH="0" baseline="0">
             <a:ln>
               <a:noFill/>
             </a:ln>
@@ -13179,9 +13304,15 @@
         </a:lvl9pPr>
       </a:lstStyle>
       <a:style>
-        <a:lnRef idx="0"/>
-        <a:fillRef idx="0"/>
-        <a:effectRef idx="0"/>
+        <a:lnRef idx="0">
+          <a:scrgbClr r="0" g="0" b="0"/>
+        </a:lnRef>
+        <a:fillRef idx="0">
+          <a:scrgbClr r="0" g="0" b="0"/>
+        </a:fillRef>
+        <a:effectRef idx="0">
+          <a:scrgbClr r="0" g="0" b="0"/>
+        </a:effectRef>
         <a:fontRef idx="none"/>
       </a:style>
     </a:lnDef>
@@ -13195,7 +13326,7 @@
         <a:effectLst/>
         <a:sp3d/>
       </a:spPr>
-      <a:bodyPr rot="0" spcFirstLastPara="1" vertOverflow="overflow" horzOverflow="overflow" vert="horz" wrap="square" lIns="45718" tIns="45718" rIns="45718" bIns="45718" numCol="1" spcCol="38100" rtlCol="0" anchor="t" upright="0">
+      <a:bodyPr rot="0" spcFirstLastPara="1" vertOverflow="overflow" horzOverflow="overflow" vert="horz" wrap="square" lIns="45718" tIns="45718" rIns="45718" bIns="45718" numCol="1" spcCol="38100" rtlCol="0" anchor="t">
         <a:spAutoFit/>
       </a:bodyPr>
       <a:lstStyle>
@@ -13214,7 +13345,7 @@
           <a:buFontTx/>
           <a:buNone/>
           <a:tabLst/>
-          <a:defRPr b="0" baseline="0" cap="none" i="0" spc="0" strike="noStrike" sz="1400" u="none" kumimoji="0" normalizeH="0">
+          <a:defRPr kumimoji="0" sz="1400" b="0" i="0" u="none" strike="noStrike" cap="none" spc="0" normalizeH="0" baseline="0">
             <a:ln>
               <a:noFill/>
             </a:ln>
@@ -13244,7 +13375,7 @@
           <a:buFontTx/>
           <a:buNone/>
           <a:tabLst/>
-          <a:defRPr b="0" baseline="0" cap="none" i="0" spc="0" strike="noStrike" sz="1800" u="none" kumimoji="0" normalizeH="0">
+          <a:defRPr kumimoji="0" sz="1800" b="0" i="0" u="none" strike="noStrike" cap="none" spc="0" normalizeH="0" baseline="0">
             <a:ln>
               <a:noFill/>
             </a:ln>
@@ -13270,7 +13401,7 @@
           <a:buFontTx/>
           <a:buNone/>
           <a:tabLst/>
-          <a:defRPr b="0" baseline="0" cap="none" i="0" spc="0" strike="noStrike" sz="1800" u="none" kumimoji="0" normalizeH="0">
+          <a:defRPr kumimoji="0" sz="1800" b="0" i="0" u="none" strike="noStrike" cap="none" spc="0" normalizeH="0" baseline="0">
             <a:ln>
               <a:noFill/>
             </a:ln>
@@ -13296,7 +13427,7 @@
           <a:buFontTx/>
           <a:buNone/>
           <a:tabLst/>
-          <a:defRPr b="0" baseline="0" cap="none" i="0" spc="0" strike="noStrike" sz="1800" u="none" kumimoji="0" normalizeH="0">
+          <a:defRPr kumimoji="0" sz="1800" b="0" i="0" u="none" strike="noStrike" cap="none" spc="0" normalizeH="0" baseline="0">
             <a:ln>
               <a:noFill/>
             </a:ln>
@@ -13322,7 +13453,7 @@
           <a:buFontTx/>
           <a:buNone/>
           <a:tabLst/>
-          <a:defRPr b="0" baseline="0" cap="none" i="0" spc="0" strike="noStrike" sz="1800" u="none" kumimoji="0" normalizeH="0">
+          <a:defRPr kumimoji="0" sz="1800" b="0" i="0" u="none" strike="noStrike" cap="none" spc="0" normalizeH="0" baseline="0">
             <a:ln>
               <a:noFill/>
             </a:ln>
@@ -13348,7 +13479,7 @@
           <a:buFontTx/>
           <a:buNone/>
           <a:tabLst/>
-          <a:defRPr b="0" baseline="0" cap="none" i="0" spc="0" strike="noStrike" sz="1800" u="none" kumimoji="0" normalizeH="0">
+          <a:defRPr kumimoji="0" sz="1800" b="0" i="0" u="none" strike="noStrike" cap="none" spc="0" normalizeH="0" baseline="0">
             <a:ln>
               <a:noFill/>
             </a:ln>
@@ -13374,7 +13505,7 @@
           <a:buFontTx/>
           <a:buNone/>
           <a:tabLst/>
-          <a:defRPr b="0" baseline="0" cap="none" i="0" spc="0" strike="noStrike" sz="1800" u="none" kumimoji="0" normalizeH="0">
+          <a:defRPr kumimoji="0" sz="1800" b="0" i="0" u="none" strike="noStrike" cap="none" spc="0" normalizeH="0" baseline="0">
             <a:ln>
               <a:noFill/>
             </a:ln>
@@ -13400,7 +13531,7 @@
           <a:buFontTx/>
           <a:buNone/>
           <a:tabLst/>
-          <a:defRPr b="0" baseline="0" cap="none" i="0" spc="0" strike="noStrike" sz="1800" u="none" kumimoji="0" normalizeH="0">
+          <a:defRPr kumimoji="0" sz="1800" b="0" i="0" u="none" strike="noStrike" cap="none" spc="0" normalizeH="0" baseline="0">
             <a:ln>
               <a:noFill/>
             </a:ln>
@@ -13426,7 +13557,7 @@
           <a:buFontTx/>
           <a:buNone/>
           <a:tabLst/>
-          <a:defRPr b="0" baseline="0" cap="none" i="0" spc="0" strike="noStrike" sz="1800" u="none" kumimoji="0" normalizeH="0">
+          <a:defRPr kumimoji="0" sz="1800" b="0" i="0" u="none" strike="noStrike" cap="none" spc="0" normalizeH="0" baseline="0">
             <a:ln>
               <a:noFill/>
             </a:ln>
@@ -13452,7 +13583,7 @@
           <a:buFontTx/>
           <a:buNone/>
           <a:tabLst/>
-          <a:defRPr b="0" baseline="0" cap="none" i="0" spc="0" strike="noStrike" sz="1800" u="none" kumimoji="0" normalizeH="0">
+          <a:defRPr kumimoji="0" sz="1800" b="0" i="0" u="none" strike="noStrike" cap="none" spc="0" normalizeH="0" baseline="0">
             <a:ln>
               <a:noFill/>
             </a:ln>
@@ -13465,18 +13596,25 @@
         </a:lvl9pPr>
       </a:lstStyle>
       <a:style>
-        <a:lnRef idx="0"/>
-        <a:fillRef idx="0"/>
-        <a:effectRef idx="0"/>
+        <a:lnRef idx="0">
+          <a:scrgbClr r="0" g="0" b="0"/>
+        </a:lnRef>
+        <a:fillRef idx="0">
+          <a:scrgbClr r="0" g="0" b="0"/>
+        </a:fillRef>
+        <a:effectRef idx="0">
+          <a:scrgbClr r="0" g="0" b="0"/>
+        </a:effectRef>
         <a:fontRef idx="none"/>
       </a:style>
     </a:txDef>
   </a:objectDefaults>
+  <a:extraClrSchemeLst/>
 </a:theme>
 </file>
 
 <file path=ppt/theme/theme2.xml><?xml version="1.0" encoding="utf-8"?>
-<a:theme xmlns:a="http://schemas.openxmlformats.org/drawingml/2006/main" xmlns:r="http://schemas.openxmlformats.org/officeDocument/2006/relationships" name="Simple Light">
+<a:theme xmlns:a="http://schemas.openxmlformats.org/drawingml/2006/main" name="Simple Light">
   <a:themeElements>
     <a:clrScheme name="Simple Light">
       <a:dk1>
@@ -13602,7 +13740,7 @@
       <a:effectStyleLst>
         <a:effectStyle>
           <a:effectLst>
-            <a:outerShdw sx="100000" sy="100000" kx="0" ky="0" algn="b" rotWithShape="0" blurRad="38100" dist="23000" dir="5400000">
+            <a:outerShdw blurRad="38100" dist="23000" dir="5400000" rotWithShape="0">
               <a:srgbClr val="000000">
                 <a:alpha val="35000"/>
               </a:srgbClr>
@@ -13611,7 +13749,7 @@
         </a:effectStyle>
         <a:effectStyle>
           <a:effectLst>
-            <a:outerShdw sx="100000" sy="100000" kx="0" ky="0" algn="b" rotWithShape="0" blurRad="38100" dist="23000" dir="5400000">
+            <a:outerShdw blurRad="38100" dist="23000" dir="5400000" rotWithShape="0">
               <a:srgbClr val="000000">
                 <a:alpha val="35000"/>
               </a:srgbClr>
@@ -13620,7 +13758,7 @@
         </a:effectStyle>
         <a:effectStyle>
           <a:effectLst>
-            <a:outerShdw sx="100000" sy="100000" kx="0" ky="0" algn="b" rotWithShape="0" blurRad="38100" dist="23000" dir="5400000">
+            <a:outerShdw blurRad="38100" dist="23000" dir="5400000" rotWithShape="0">
               <a:srgbClr val="000000">
                 <a:alpha val="35000"/>
               </a:srgbClr>
@@ -13694,7 +13832,7 @@
           <a:round/>
         </a:ln>
         <a:effectLst>
-          <a:outerShdw sx="100000" sy="100000" kx="0" ky="0" algn="b" rotWithShape="0" blurRad="38100" dist="23000" dir="5400000">
+          <a:outerShdw blurRad="38100" dist="23000" dir="5400000" rotWithShape="0">
             <a:srgbClr val="000000">
               <a:alpha val="35000"/>
             </a:srgbClr>
@@ -13702,7 +13840,7 @@
         </a:effectLst>
         <a:sp3d/>
       </a:spPr>
-      <a:bodyPr rot="0" spcFirstLastPara="1" vertOverflow="overflow" horzOverflow="overflow" vert="horz" wrap="square" lIns="45718" tIns="45718" rIns="45718" bIns="45718" numCol="1" spcCol="38100" rtlCol="0" anchor="ctr" upright="0">
+      <a:bodyPr rot="0" spcFirstLastPara="1" vertOverflow="overflow" horzOverflow="overflow" vert="horz" wrap="square" lIns="45718" tIns="45718" rIns="45718" bIns="45718" numCol="1" spcCol="38100" rtlCol="0" anchor="ctr">
         <a:spAutoFit/>
       </a:bodyPr>
       <a:lstStyle>
@@ -13721,7 +13859,7 @@
           <a:buFontTx/>
           <a:buNone/>
           <a:tabLst/>
-          <a:defRPr b="0" baseline="0" cap="none" i="0" spc="0" strike="noStrike" sz="1400" u="none" kumimoji="0" normalizeH="0">
+          <a:defRPr kumimoji="0" sz="1400" b="0" i="0" u="none" strike="noStrike" cap="none" spc="0" normalizeH="0" baseline="0">
             <a:ln>
               <a:noFill/>
             </a:ln>
@@ -13751,7 +13889,7 @@
           <a:buFontTx/>
           <a:buNone/>
           <a:tabLst/>
-          <a:defRPr b="0" baseline="0" cap="none" i="0" spc="0" strike="noStrike" sz="1800" u="none" kumimoji="0" normalizeH="0">
+          <a:defRPr kumimoji="0" sz="1800" b="0" i="0" u="none" strike="noStrike" cap="none" spc="0" normalizeH="0" baseline="0">
             <a:ln>
               <a:noFill/>
             </a:ln>
@@ -13777,7 +13915,7 @@
           <a:buFontTx/>
           <a:buNone/>
           <a:tabLst/>
-          <a:defRPr b="0" baseline="0" cap="none" i="0" spc="0" strike="noStrike" sz="1800" u="none" kumimoji="0" normalizeH="0">
+          <a:defRPr kumimoji="0" sz="1800" b="0" i="0" u="none" strike="noStrike" cap="none" spc="0" normalizeH="0" baseline="0">
             <a:ln>
               <a:noFill/>
             </a:ln>
@@ -13803,7 +13941,7 @@
           <a:buFontTx/>
           <a:buNone/>
           <a:tabLst/>
-          <a:defRPr b="0" baseline="0" cap="none" i="0" spc="0" strike="noStrike" sz="1800" u="none" kumimoji="0" normalizeH="0">
+          <a:defRPr kumimoji="0" sz="1800" b="0" i="0" u="none" strike="noStrike" cap="none" spc="0" normalizeH="0" baseline="0">
             <a:ln>
               <a:noFill/>
             </a:ln>
@@ -13829,7 +13967,7 @@
           <a:buFontTx/>
           <a:buNone/>
           <a:tabLst/>
-          <a:defRPr b="0" baseline="0" cap="none" i="0" spc="0" strike="noStrike" sz="1800" u="none" kumimoji="0" normalizeH="0">
+          <a:defRPr kumimoji="0" sz="1800" b="0" i="0" u="none" strike="noStrike" cap="none" spc="0" normalizeH="0" baseline="0">
             <a:ln>
               <a:noFill/>
             </a:ln>
@@ -13855,7 +13993,7 @@
           <a:buFontTx/>
           <a:buNone/>
           <a:tabLst/>
-          <a:defRPr b="0" baseline="0" cap="none" i="0" spc="0" strike="noStrike" sz="1800" u="none" kumimoji="0" normalizeH="0">
+          <a:defRPr kumimoji="0" sz="1800" b="0" i="0" u="none" strike="noStrike" cap="none" spc="0" normalizeH="0" baseline="0">
             <a:ln>
               <a:noFill/>
             </a:ln>
@@ -13881,7 +14019,7 @@
           <a:buFontTx/>
           <a:buNone/>
           <a:tabLst/>
-          <a:defRPr b="0" baseline="0" cap="none" i="0" spc="0" strike="noStrike" sz="1800" u="none" kumimoji="0" normalizeH="0">
+          <a:defRPr kumimoji="0" sz="1800" b="0" i="0" u="none" strike="noStrike" cap="none" spc="0" normalizeH="0" baseline="0">
             <a:ln>
               <a:noFill/>
             </a:ln>
@@ -13907,7 +14045,7 @@
           <a:buFontTx/>
           <a:buNone/>
           <a:tabLst/>
-          <a:defRPr b="0" baseline="0" cap="none" i="0" spc="0" strike="noStrike" sz="1800" u="none" kumimoji="0" normalizeH="0">
+          <a:defRPr kumimoji="0" sz="1800" b="0" i="0" u="none" strike="noStrike" cap="none" spc="0" normalizeH="0" baseline="0">
             <a:ln>
               <a:noFill/>
             </a:ln>
@@ -13933,7 +14071,7 @@
           <a:buFontTx/>
           <a:buNone/>
           <a:tabLst/>
-          <a:defRPr b="0" baseline="0" cap="none" i="0" spc="0" strike="noStrike" sz="1800" u="none" kumimoji="0" normalizeH="0">
+          <a:defRPr kumimoji="0" sz="1800" b="0" i="0" u="none" strike="noStrike" cap="none" spc="0" normalizeH="0" baseline="0">
             <a:ln>
               <a:noFill/>
             </a:ln>
@@ -13959,7 +14097,7 @@
           <a:buFontTx/>
           <a:buNone/>
           <a:tabLst/>
-          <a:defRPr b="0" baseline="0" cap="none" i="0" spc="0" strike="noStrike" sz="1800" u="none" kumimoji="0" normalizeH="0">
+          <a:defRPr kumimoji="0" sz="1800" b="0" i="0" u="none" strike="noStrike" cap="none" spc="0" normalizeH="0" baseline="0">
             <a:ln>
               <a:noFill/>
             </a:ln>
@@ -13972,9 +14110,15 @@
         </a:lvl9pPr>
       </a:lstStyle>
       <a:style>
-        <a:lnRef idx="0"/>
-        <a:fillRef idx="0"/>
-        <a:effectRef idx="0"/>
+        <a:lnRef idx="0">
+          <a:scrgbClr r="0" g="0" b="0"/>
+        </a:lnRef>
+        <a:fillRef idx="0">
+          <a:scrgbClr r="0" g="0" b="0"/>
+        </a:fillRef>
+        <a:effectRef idx="0">
+          <a:scrgbClr r="0" g="0" b="0"/>
+        </a:effectRef>
         <a:fontRef idx="none"/>
       </a:style>
     </a:spDef>
@@ -13989,7 +14133,7 @@
           <a:round/>
         </a:ln>
         <a:effectLst>
-          <a:outerShdw sx="100000" sy="100000" kx="0" ky="0" algn="b" rotWithShape="0" blurRad="38100" dist="23000" dir="5400000">
+          <a:outerShdw blurRad="38100" dist="23000" dir="5400000" rotWithShape="0">
             <a:srgbClr val="000000">
               <a:alpha val="35000"/>
             </a:srgbClr>
@@ -13997,7 +14141,7 @@
         </a:effectLst>
         <a:sp3d/>
       </a:spPr>
-      <a:bodyPr rot="0" spcFirstLastPara="1" vertOverflow="overflow" horzOverflow="overflow" vert="horz" wrap="square" lIns="91439" tIns="45719" rIns="91439" bIns="45719" numCol="1" spcCol="38100" rtlCol="0" anchor="t" upright="0">
+      <a:bodyPr rot="0" spcFirstLastPara="1" vertOverflow="overflow" horzOverflow="overflow" vert="horz" wrap="square" lIns="91439" tIns="45719" rIns="91439" bIns="45719" numCol="1" spcCol="38100" rtlCol="0" anchor="t">
         <a:noAutofit/>
       </a:bodyPr>
       <a:lstStyle>
@@ -14016,7 +14160,7 @@
           <a:buFontTx/>
           <a:buNone/>
           <a:tabLst/>
-          <a:defRPr b="0" baseline="0" cap="none" i="0" spc="0" strike="noStrike" sz="1800" u="none" kumimoji="0" normalizeH="0">
+          <a:defRPr kumimoji="0" sz="1800" b="0" i="0" u="none" strike="noStrike" cap="none" spc="0" normalizeH="0" baseline="0">
             <a:ln>
               <a:noFill/>
             </a:ln>
@@ -14042,7 +14186,7 @@
           <a:buFontTx/>
           <a:buNone/>
           <a:tabLst/>
-          <a:defRPr b="0" baseline="0" cap="none" i="0" spc="0" strike="noStrike" sz="1800" u="none" kumimoji="0" normalizeH="0">
+          <a:defRPr kumimoji="0" sz="1800" b="0" i="0" u="none" strike="noStrike" cap="none" spc="0" normalizeH="0" baseline="0">
             <a:ln>
               <a:noFill/>
             </a:ln>
@@ -14068,7 +14212,7 @@
           <a:buFontTx/>
           <a:buNone/>
           <a:tabLst/>
-          <a:defRPr b="0" baseline="0" cap="none" i="0" spc="0" strike="noStrike" sz="1800" u="none" kumimoji="0" normalizeH="0">
+          <a:defRPr kumimoji="0" sz="1800" b="0" i="0" u="none" strike="noStrike" cap="none" spc="0" normalizeH="0" baseline="0">
             <a:ln>
               <a:noFill/>
             </a:ln>
@@ -14094,7 +14238,7 @@
           <a:buFontTx/>
           <a:buNone/>
           <a:tabLst/>
-          <a:defRPr b="0" baseline="0" cap="none" i="0" spc="0" strike="noStrike" sz="1800" u="none" kumimoji="0" normalizeH="0">
+          <a:defRPr kumimoji="0" sz="1800" b="0" i="0" u="none" strike="noStrike" cap="none" spc="0" normalizeH="0" baseline="0">
             <a:ln>
               <a:noFill/>
             </a:ln>
@@ -14120,7 +14264,7 @@
           <a:buFontTx/>
           <a:buNone/>
           <a:tabLst/>
-          <a:defRPr b="0" baseline="0" cap="none" i="0" spc="0" strike="noStrike" sz="1800" u="none" kumimoji="0" normalizeH="0">
+          <a:defRPr kumimoji="0" sz="1800" b="0" i="0" u="none" strike="noStrike" cap="none" spc="0" normalizeH="0" baseline="0">
             <a:ln>
               <a:noFill/>
             </a:ln>
@@ -14146,7 +14290,7 @@
           <a:buFontTx/>
           <a:buNone/>
           <a:tabLst/>
-          <a:defRPr b="0" baseline="0" cap="none" i="0" spc="0" strike="noStrike" sz="1800" u="none" kumimoji="0" normalizeH="0">
+          <a:defRPr kumimoji="0" sz="1800" b="0" i="0" u="none" strike="noStrike" cap="none" spc="0" normalizeH="0" baseline="0">
             <a:ln>
               <a:noFill/>
             </a:ln>
@@ -14172,7 +14316,7 @@
           <a:buFontTx/>
           <a:buNone/>
           <a:tabLst/>
-          <a:defRPr b="0" baseline="0" cap="none" i="0" spc="0" strike="noStrike" sz="1800" u="none" kumimoji="0" normalizeH="0">
+          <a:defRPr kumimoji="0" sz="1800" b="0" i="0" u="none" strike="noStrike" cap="none" spc="0" normalizeH="0" baseline="0">
             <a:ln>
               <a:noFill/>
             </a:ln>
@@ -14198,7 +14342,7 @@
           <a:buFontTx/>
           <a:buNone/>
           <a:tabLst/>
-          <a:defRPr b="0" baseline="0" cap="none" i="0" spc="0" strike="noStrike" sz="1800" u="none" kumimoji="0" normalizeH="0">
+          <a:defRPr kumimoji="0" sz="1800" b="0" i="0" u="none" strike="noStrike" cap="none" spc="0" normalizeH="0" baseline="0">
             <a:ln>
               <a:noFill/>
             </a:ln>
@@ -14224,7 +14368,7 @@
           <a:buFontTx/>
           <a:buNone/>
           <a:tabLst/>
-          <a:defRPr b="0" baseline="0" cap="none" i="0" spc="0" strike="noStrike" sz="1800" u="none" kumimoji="0" normalizeH="0">
+          <a:defRPr kumimoji="0" sz="1800" b="0" i="0" u="none" strike="noStrike" cap="none" spc="0" normalizeH="0" baseline="0">
             <a:ln>
               <a:noFill/>
             </a:ln>
@@ -14250,7 +14394,7 @@
           <a:buFontTx/>
           <a:buNone/>
           <a:tabLst/>
-          <a:defRPr b="0" baseline="0" cap="none" i="0" spc="0" strike="noStrike" sz="1800" u="none" kumimoji="0" normalizeH="0">
+          <a:defRPr kumimoji="0" sz="1800" b="0" i="0" u="none" strike="noStrike" cap="none" spc="0" normalizeH="0" baseline="0">
             <a:ln>
               <a:noFill/>
             </a:ln>
@@ -14263,9 +14407,15 @@
         </a:lvl9pPr>
       </a:lstStyle>
       <a:style>
-        <a:lnRef idx="0"/>
-        <a:fillRef idx="0"/>
-        <a:effectRef idx="0"/>
+        <a:lnRef idx="0">
+          <a:scrgbClr r="0" g="0" b="0"/>
+        </a:lnRef>
+        <a:fillRef idx="0">
+          <a:scrgbClr r="0" g="0" b="0"/>
+        </a:fillRef>
+        <a:effectRef idx="0">
+          <a:scrgbClr r="0" g="0" b="0"/>
+        </a:effectRef>
         <a:fontRef idx="none"/>
       </a:style>
     </a:lnDef>
@@ -14279,7 +14429,7 @@
         <a:effectLst/>
         <a:sp3d/>
       </a:spPr>
-      <a:bodyPr rot="0" spcFirstLastPara="1" vertOverflow="overflow" horzOverflow="overflow" vert="horz" wrap="square" lIns="45718" tIns="45718" rIns="45718" bIns="45718" numCol="1" spcCol="38100" rtlCol="0" anchor="t" upright="0">
+      <a:bodyPr rot="0" spcFirstLastPara="1" vertOverflow="overflow" horzOverflow="overflow" vert="horz" wrap="square" lIns="45718" tIns="45718" rIns="45718" bIns="45718" numCol="1" spcCol="38100" rtlCol="0" anchor="t">
         <a:spAutoFit/>
       </a:bodyPr>
       <a:lstStyle>
@@ -14298,7 +14448,7 @@
           <a:buFontTx/>
           <a:buNone/>
           <a:tabLst/>
-          <a:defRPr b="0" baseline="0" cap="none" i="0" spc="0" strike="noStrike" sz="1400" u="none" kumimoji="0" normalizeH="0">
+          <a:defRPr kumimoji="0" sz="1400" b="0" i="0" u="none" strike="noStrike" cap="none" spc="0" normalizeH="0" baseline="0">
             <a:ln>
               <a:noFill/>
             </a:ln>
@@ -14328,7 +14478,7 @@
           <a:buFontTx/>
           <a:buNone/>
           <a:tabLst/>
-          <a:defRPr b="0" baseline="0" cap="none" i="0" spc="0" strike="noStrike" sz="1800" u="none" kumimoji="0" normalizeH="0">
+          <a:defRPr kumimoji="0" sz="1800" b="0" i="0" u="none" strike="noStrike" cap="none" spc="0" normalizeH="0" baseline="0">
             <a:ln>
               <a:noFill/>
             </a:ln>
@@ -14354,7 +14504,7 @@
           <a:buFontTx/>
           <a:buNone/>
           <a:tabLst/>
-          <a:defRPr b="0" baseline="0" cap="none" i="0" spc="0" strike="noStrike" sz="1800" u="none" kumimoji="0" normalizeH="0">
+          <a:defRPr kumimoji="0" sz="1800" b="0" i="0" u="none" strike="noStrike" cap="none" spc="0" normalizeH="0" baseline="0">
             <a:ln>
               <a:noFill/>
             </a:ln>
@@ -14380,7 +14530,7 @@
           <a:buFontTx/>
           <a:buNone/>
           <a:tabLst/>
-          <a:defRPr b="0" baseline="0" cap="none" i="0" spc="0" strike="noStrike" sz="1800" u="none" kumimoji="0" normalizeH="0">
+          <a:defRPr kumimoji="0" sz="1800" b="0" i="0" u="none" strike="noStrike" cap="none" spc="0" normalizeH="0" baseline="0">
             <a:ln>
               <a:noFill/>
             </a:ln>
@@ -14406,7 +14556,7 @@
           <a:buFontTx/>
           <a:buNone/>
           <a:tabLst/>
-          <a:defRPr b="0" baseline="0" cap="none" i="0" spc="0" strike="noStrike" sz="1800" u="none" kumimoji="0" normalizeH="0">
+          <a:defRPr kumimoji="0" sz="1800" b="0" i="0" u="none" strike="noStrike" cap="none" spc="0" normalizeH="0" baseline="0">
             <a:ln>
               <a:noFill/>
             </a:ln>
@@ -14432,7 +14582,7 @@
           <a:buFontTx/>
           <a:buNone/>
           <a:tabLst/>
-          <a:defRPr b="0" baseline="0" cap="none" i="0" spc="0" strike="noStrike" sz="1800" u="none" kumimoji="0" normalizeH="0">
+          <a:defRPr kumimoji="0" sz="1800" b="0" i="0" u="none" strike="noStrike" cap="none" spc="0" normalizeH="0" baseline="0">
             <a:ln>
               <a:noFill/>
             </a:ln>
@@ -14458,7 +14608,7 @@
           <a:buFontTx/>
           <a:buNone/>
           <a:tabLst/>
-          <a:defRPr b="0" baseline="0" cap="none" i="0" spc="0" strike="noStrike" sz="1800" u="none" kumimoji="0" normalizeH="0">
+          <a:defRPr kumimoji="0" sz="1800" b="0" i="0" u="none" strike="noStrike" cap="none" spc="0" normalizeH="0" baseline="0">
             <a:ln>
               <a:noFill/>
             </a:ln>
@@ -14484,7 +14634,7 @@
           <a:buFontTx/>
           <a:buNone/>
           <a:tabLst/>
-          <a:defRPr b="0" baseline="0" cap="none" i="0" spc="0" strike="noStrike" sz="1800" u="none" kumimoji="0" normalizeH="0">
+          <a:defRPr kumimoji="0" sz="1800" b="0" i="0" u="none" strike="noStrike" cap="none" spc="0" normalizeH="0" baseline="0">
             <a:ln>
               <a:noFill/>
             </a:ln>
@@ -14510,7 +14660,7 @@
           <a:buFontTx/>
           <a:buNone/>
           <a:tabLst/>
-          <a:defRPr b="0" baseline="0" cap="none" i="0" spc="0" strike="noStrike" sz="1800" u="none" kumimoji="0" normalizeH="0">
+          <a:defRPr kumimoji="0" sz="1800" b="0" i="0" u="none" strike="noStrike" cap="none" spc="0" normalizeH="0" baseline="0">
             <a:ln>
               <a:noFill/>
             </a:ln>
@@ -14536,7 +14686,7 @@
           <a:buFontTx/>
           <a:buNone/>
           <a:tabLst/>
-          <a:defRPr b="0" baseline="0" cap="none" i="0" spc="0" strike="noStrike" sz="1800" u="none" kumimoji="0" normalizeH="0">
+          <a:defRPr kumimoji="0" sz="1800" b="0" i="0" u="none" strike="noStrike" cap="none" spc="0" normalizeH="0" baseline="0">
             <a:ln>
               <a:noFill/>
             </a:ln>
@@ -14549,12 +14699,19 @@
         </a:lvl9pPr>
       </a:lstStyle>
       <a:style>
-        <a:lnRef idx="0"/>
-        <a:fillRef idx="0"/>
-        <a:effectRef idx="0"/>
+        <a:lnRef idx="0">
+          <a:scrgbClr r="0" g="0" b="0"/>
+        </a:lnRef>
+        <a:fillRef idx="0">
+          <a:scrgbClr r="0" g="0" b="0"/>
+        </a:fillRef>
+        <a:effectRef idx="0">
+          <a:scrgbClr r="0" g="0" b="0"/>
+        </a:effectRef>
         <a:fontRef idx="none"/>
       </a:style>
     </a:txDef>
   </a:objectDefaults>
+  <a:extraClrSchemeLst/>
 </a:theme>
 </file>